--- a/doc/presentation_materials/JIMA2026fall_発表.pptx
+++ b/doc/presentation_materials/JIMA2026fall_発表.pptx
@@ -3909,8 +3909,8 @@
         </p:blipFill>
         <p:spPr>
           <a:xfrm>
-            <a:off x="2180312" y="3520440"/>
-            <a:ext cx="2808271" cy="566928"/>
+            <a:off x="2131904" y="3520440"/>
+            <a:ext cx="2905086" cy="566928"/>
           </a:xfrm>
           <a:prstGeom prst="rect">
             <a:avLst/>
@@ -14213,7 +14213,7 @@
                 <a:latin typeface="Meiryo"/>
                 <a:ea typeface="Meiryo"/>
               </a:rPr>
-              <a:t>どちらのシナリオでも，演算子を組み込むと両構造のフロント（点線）は高安定領域で重なる</a:t>
+              <a:t>どちらのシナリオでも，演算子を組み込むと両構造の Pareto フロント（点線）は高安定領域で重なる</a:t>
             </a:r>
           </a:p>
         </p:txBody>
@@ -20513,8 +20513,8 @@
         </p:blipFill>
         <p:spPr>
           <a:xfrm>
-            <a:off x="3693261" y="1325880"/>
-            <a:ext cx="4805172" cy="548640"/>
+            <a:off x="3643240" y="1325880"/>
+            <a:ext cx="4905213" cy="548640"/>
           </a:xfrm>
           <a:prstGeom prst="rect">
             <a:avLst/>
@@ -20885,7 +20885,7 @@
                 <a:latin typeface="Meiryo"/>
                 <a:ea typeface="Meiryo"/>
               </a:rPr>
-              <a:t>：各重みの探索を時間で追えば立ち上がりの速さ（AUC）が，全重みの解を合わせればフロント全体の HV が，同じ実験から測れる</a:t>
+              <a:t>：各重みの探索を時間で追えば立ち上がりの速さ（AUC）が，全重みの解を合わせれば Pareto フロント全体の HV が，同じ実験から測れる</a:t>
             </a:r>
           </a:p>
           <a:p>
@@ -20925,7 +20925,7 @@
                 <a:latin typeface="Meiryo"/>
                 <a:ea typeface="Meiryo"/>
               </a:rPr>
-              <a:t>：重み付き和は非凸フロントの凹部に届かない．ただし全手法が同じスカラー化を共有し，探索中に訪問した凹部の解も記録するため，構造差の比較への影響は限定的．Pareto 支配に基づく手法（NSGA-II 等）での再検証は今後の課題</a:t>
+              <a:t>：重み付き和は非凸な Pareto フロントの凹部に届かない．ただし全手法が同じスカラー化を共有し，探索中に訪問した凹部の解も記録するため，構造差の比較への影響は限定的．Pareto 支配に基づく手法（NSGA-II 等）での再検証は今後の課題</a:t>
             </a:r>
           </a:p>
         </p:txBody>
@@ -22895,8 +22895,8 @@
         </p:nvSpPr>
         <p:spPr>
           <a:xfrm>
-            <a:off x="566928" y="1828800"/>
-            <a:ext cx="11057839" cy="731520"/>
+            <a:off x="566928" y="1755648"/>
+            <a:ext cx="11057839" cy="658368"/>
           </a:xfrm>
           <a:prstGeom prst="roundRect">
             <a:avLst>
@@ -22943,8 +22943,8 @@
         </p:nvSpPr>
         <p:spPr>
           <a:xfrm>
-            <a:off x="841247" y="1828800"/>
-            <a:ext cx="10509199" cy="731520"/>
+            <a:off x="841247" y="1755648"/>
+            <a:ext cx="10509199" cy="658368"/>
           </a:xfrm>
           <a:prstGeom prst="rect">
             <a:avLst/>
@@ -23003,8 +23003,8 @@
         </p:nvCxnSpPr>
         <p:spPr>
           <a:xfrm flipH="1">
-            <a:off x="3194227" y="2578608"/>
-            <a:ext cx="2901620" cy="448056"/>
+            <a:off x="2075688" y="2432303"/>
+            <a:ext cx="4020159" cy="274321"/>
           </a:xfrm>
           <a:prstGeom prst="line">
             <a:avLst/>
@@ -23040,8 +23040,8 @@
         </p:nvSpPr>
         <p:spPr>
           <a:xfrm>
-            <a:off x="566928" y="3063240"/>
-            <a:ext cx="5254599" cy="1234440"/>
+            <a:off x="566928" y="2743200"/>
+            <a:ext cx="3017520" cy="1097280"/>
           </a:xfrm>
           <a:prstGeom prst="roundRect">
             <a:avLst>
@@ -23088,8 +23088,8 @@
         </p:nvSpPr>
         <p:spPr>
           <a:xfrm>
-            <a:off x="841247" y="3227832"/>
-            <a:ext cx="3425799" cy="411480"/>
+            <a:off x="841247" y="2871216"/>
+            <a:ext cx="2468879" cy="384048"/>
           </a:xfrm>
           <a:prstGeom prst="rect">
             <a:avLst/>
@@ -23128,8 +23128,8 @@
         </p:nvSpPr>
         <p:spPr>
           <a:xfrm>
-            <a:off x="841247" y="3721608"/>
-            <a:ext cx="4705959" cy="411480"/>
+            <a:off x="841247" y="3310128"/>
+            <a:ext cx="2468879" cy="475488"/>
           </a:xfrm>
           <a:prstGeom prst="rect">
             <a:avLst/>
@@ -23148,7 +23148,7 @@
               </a:lnSpc>
             </a:pPr>
             <a:r>
-              <a:rPr sz="1500" b="0" i="0">
+              <a:rPr sz="1450" b="0" i="0">
                 <a:solidFill>
                   <a:srgbClr val="6E7A88"/>
                 </a:solidFill>
@@ -23168,15 +23168,15 @@
         </p:nvCxnSpPr>
         <p:spPr>
           <a:xfrm>
-            <a:off x="6095847" y="2578608"/>
-            <a:ext cx="2901620" cy="448056"/>
+            <a:off x="6095847" y="2432303"/>
+            <a:ext cx="1691640" cy="274321"/>
           </a:xfrm>
           <a:prstGeom prst="line">
             <a:avLst/>
           </a:prstGeom>
-          <a:ln w="20320">
+          <a:ln w="27940">
             <a:solidFill>
-              <a:srgbClr val="6E7A88"/>
+              <a:srgbClr val="16385C"/>
             </a:solidFill>
             <a:tailEnd type="triangle" w="med" len="med"/>
           </a:ln>
@@ -23205,8 +23205,8 @@
         </p:nvSpPr>
         <p:spPr>
           <a:xfrm>
-            <a:off x="6370167" y="3063240"/>
-            <a:ext cx="5254599" cy="1234440"/>
+            <a:off x="3950208" y="2743200"/>
+            <a:ext cx="7674559" cy="1097280"/>
           </a:xfrm>
           <a:prstGeom prst="roundRect">
             <a:avLst>
@@ -23253,8 +23253,8 @@
         </p:nvSpPr>
         <p:spPr>
           <a:xfrm>
-            <a:off x="6644487" y="3227832"/>
-            <a:ext cx="3425799" cy="411480"/>
+            <a:off x="4224528" y="2871216"/>
+            <a:ext cx="7125919" cy="384048"/>
           </a:xfrm>
           <a:prstGeom prst="rect">
             <a:avLst/>
@@ -23293,8 +23293,8 @@
         </p:nvSpPr>
         <p:spPr>
           <a:xfrm>
-            <a:off x="6644487" y="3721608"/>
-            <a:ext cx="4705959" cy="411480"/>
+            <a:off x="4224528" y="3310128"/>
+            <a:ext cx="7125919" cy="475488"/>
           </a:xfrm>
           <a:prstGeom prst="rect">
             <a:avLst/>
@@ -23313,7 +23313,7 @@
               </a:lnSpc>
             </a:pPr>
             <a:r>
-              <a:rPr sz="1500" b="0" i="0">
+              <a:rPr sz="1450" b="0" i="0">
                 <a:solidFill>
                   <a:srgbClr val="26303A"/>
                 </a:solidFill>
@@ -23325,27 +23325,66 @@
           </a:p>
         </p:txBody>
       </p:sp>
-      <p:sp>
-        <p:nvSpPr>
-          <p:cNvPr id="18" name="Rounded Rectangle 17"/>
+      <p:cxnSp>
+        <p:nvCxnSpPr>
+          <p:cNvPr id="18" name="Connector 17"/>
+          <p:cNvCxnSpPr/>
+          <p:nvPr/>
+        </p:nvCxnSpPr>
+        <p:spPr>
+          <a:xfrm flipH="1">
+            <a:off x="5573268" y="3858768"/>
+            <a:ext cx="2214219" cy="539496"/>
+          </a:xfrm>
+          <a:prstGeom prst="line">
+            <a:avLst/>
+          </a:prstGeom>
+          <a:ln w="20320">
+            <a:solidFill>
+              <a:srgbClr val="6E7A88"/>
+            </a:solidFill>
+            <a:tailEnd type="triangle" w="med" len="med"/>
+          </a:ln>
+          <a:effectLst/>
+        </p:spPr>
+        <p:style>
+          <a:lnRef idx="2">
+            <a:schemeClr val="accent1"/>
+          </a:lnRef>
+          <a:fillRef idx="0">
+            <a:schemeClr val="accent1"/>
+          </a:fillRef>
+          <a:effectRef idx="1">
+            <a:schemeClr val="accent1"/>
+          </a:effectRef>
+          <a:fontRef idx="minor">
+            <a:schemeClr val="tx1"/>
+          </a:fontRef>
+        </p:style>
+      </p:cxnSp>
+      <p:sp>
+        <p:nvSpPr>
+          <p:cNvPr id="19" name="Rounded Rectangle 18"/>
           <p:cNvSpPr/>
           <p:nvPr/>
         </p:nvSpPr>
         <p:spPr>
           <a:xfrm>
-            <a:off x="10390327" y="3246120"/>
-            <a:ext cx="1005840" cy="347472"/>
+            <a:off x="3950208" y="4434840"/>
+            <a:ext cx="3246120" cy="1783080"/>
           </a:xfrm>
           <a:prstGeom prst="roundRect">
             <a:avLst>
-              <a:gd name="adj" fmla="val 40000"/>
+              <a:gd name="adj" fmla="val 6000"/>
             </a:avLst>
           </a:prstGeom>
           <a:solidFill>
-            <a:srgbClr val="16385C"/>
+            <a:srgbClr val="FFFFFF"/>
           </a:solidFill>
-          <a:ln>
-            <a:noFill/>
+          <a:ln w="13970">
+            <a:solidFill>
+              <a:srgbClr val="C9D6E5"/>
+            </a:solidFill>
           </a:ln>
           <a:effectLst/>
         </p:spPr>
@@ -23364,37 +23403,103 @@
           </a:fontRef>
         </p:style>
         <p:txBody>
-          <a:bodyPr rtlCol="0" anchor="ctr" wrap="square" lIns="54864" rIns="54864" tIns="18288" bIns="18288"/>
-          <a:lstStyle/>
-          <a:p>
-            <a:pPr algn="ctr">
+          <a:bodyPr rtlCol="0" anchor="ctr"/>
+          <a:lstStyle/>
+          <a:p>
+            <a:pPr algn="ctr"/>
+          </a:p>
+        </p:txBody>
+      </p:sp>
+      <p:sp>
+        <p:nvSpPr>
+          <p:cNvPr id="20" name="TextBox 19"/>
+          <p:cNvSpPr txBox="1"/>
+          <p:nvPr/>
+        </p:nvSpPr>
+        <p:spPr>
+          <a:xfrm>
+            <a:off x="4178808" y="4581144"/>
+            <a:ext cx="2788920" cy="384048"/>
+          </a:xfrm>
+          <a:prstGeom prst="rect">
+            <a:avLst/>
+          </a:prstGeom>
+          <a:noFill/>
+        </p:spPr>
+        <p:txBody>
+          <a:bodyPr wrap="square" anchor="t" lIns="18288" rIns="18288" tIns="9144" bIns="9144">
+            <a:spAutoFit/>
+          </a:bodyPr>
+          <a:lstStyle/>
+          <a:p>
+            <a:pPr algn="l">
               <a:lnSpc>
-                <a:spcPct val="100000"/>
+                <a:spcPct val="105000"/>
               </a:lnSpc>
             </a:pPr>
             <a:r>
-              <a:rPr sz="1250" b="1" i="0">
-                <a:solidFill>
-                  <a:srgbClr val="FFFFFF"/>
-                </a:solidFill>
-                <a:latin typeface="Meiryo"/>
-                <a:ea typeface="Meiryo"/>
-              </a:rPr>
-              <a:t>本研究</a:t>
+              <a:rPr sz="1550" b="1" i="0">
+                <a:solidFill>
+                  <a:srgbClr val="6E7A88"/>
+                </a:solidFill>
+                <a:latin typeface="Meiryo"/>
+                <a:ea typeface="Meiryo"/>
+              </a:rPr>
+              <a:t>完全リアクティブ</a:t>
+            </a:r>
+          </a:p>
+        </p:txBody>
+      </p:sp>
+      <p:sp>
+        <p:nvSpPr>
+          <p:cNvPr id="21" name="TextBox 20"/>
+          <p:cNvSpPr txBox="1"/>
+          <p:nvPr/>
+        </p:nvSpPr>
+        <p:spPr>
+          <a:xfrm>
+            <a:off x="4178808" y="5038344"/>
+            <a:ext cx="2788920" cy="1051560"/>
+          </a:xfrm>
+          <a:prstGeom prst="rect">
+            <a:avLst/>
+          </a:prstGeom>
+          <a:noFill/>
+        </p:spPr>
+        <p:txBody>
+          <a:bodyPr wrap="square" anchor="t" lIns="18288" rIns="18288" tIns="9144" bIns="9144">
+            <a:spAutoFit/>
+          </a:bodyPr>
+          <a:lstStyle/>
+          <a:p>
+            <a:pPr algn="l">
+              <a:lnSpc>
+                <a:spcPct val="110000"/>
+              </a:lnSpc>
+            </a:pPr>
+            <a:r>
+              <a:rPr sz="1300" b="0" i="0">
+                <a:solidFill>
+                  <a:srgbClr val="6E7A88"/>
+                </a:solidFill>
+                <a:latin typeface="Meiryo"/>
+                <a:ea typeface="Meiryo"/>
+              </a:rPr>
+              <a:t>事前のスケジュールを持たず，ディスパッチングルールなどで作業をその場で決める</a:t>
             </a:r>
           </a:p>
         </p:txBody>
       </p:sp>
       <p:cxnSp>
         <p:nvCxnSpPr>
-          <p:cNvPr id="19" name="Connector 18"/>
+          <p:cNvPr id="22" name="Connector 21"/>
           <p:cNvCxnSpPr/>
           <p:nvPr/>
         </p:nvCxnSpPr>
         <p:spPr>
           <a:xfrm>
-            <a:off x="8997467" y="4334256"/>
-            <a:ext cx="0" cy="347472"/>
+            <a:off x="7787487" y="3858768"/>
+            <a:ext cx="1805940" cy="539496"/>
           </a:xfrm>
           <a:prstGeom prst="line">
             <a:avLst/>
@@ -23424,14 +23529,14 @@
       </p:cxnSp>
       <p:sp>
         <p:nvSpPr>
-          <p:cNvPr id="20" name="Rounded Rectangle 19"/>
+          <p:cNvPr id="23" name="Rounded Rectangle 22"/>
           <p:cNvSpPr/>
           <p:nvPr/>
         </p:nvSpPr>
         <p:spPr>
           <a:xfrm>
-            <a:off x="6370167" y="4736592"/>
-            <a:ext cx="5254599" cy="1463040"/>
+            <a:off x="7562088" y="4434840"/>
+            <a:ext cx="4062679" cy="1783080"/>
           </a:xfrm>
           <a:prstGeom prst="roundRect">
             <a:avLst>
@@ -23470,14 +23575,74 @@
       </p:sp>
       <p:sp>
         <p:nvSpPr>
-          <p:cNvPr id="21" name="TextBox 20"/>
+          <p:cNvPr id="24" name="Rounded Rectangle 23"/>
+          <p:cNvSpPr/>
+          <p:nvPr/>
+        </p:nvSpPr>
+        <p:spPr>
+          <a:xfrm>
+            <a:off x="10436047" y="4261103"/>
+            <a:ext cx="1005840" cy="347472"/>
+          </a:xfrm>
+          <a:prstGeom prst="roundRect">
+            <a:avLst>
+              <a:gd name="adj" fmla="val 40000"/>
+            </a:avLst>
+          </a:prstGeom>
+          <a:solidFill>
+            <a:srgbClr val="3E618C"/>
+          </a:solidFill>
+          <a:ln>
+            <a:noFill/>
+          </a:ln>
+          <a:effectLst/>
+        </p:spPr>
+        <p:style>
+          <a:lnRef idx="1">
+            <a:schemeClr val="accent1"/>
+          </a:lnRef>
+          <a:fillRef idx="3">
+            <a:schemeClr val="accent1"/>
+          </a:fillRef>
+          <a:effectRef idx="2">
+            <a:schemeClr val="accent1"/>
+          </a:effectRef>
+          <a:fontRef idx="minor">
+            <a:schemeClr val="lt1"/>
+          </a:fontRef>
+        </p:style>
+        <p:txBody>
+          <a:bodyPr rtlCol="0" anchor="ctr" wrap="square" lIns="54864" rIns="54864" tIns="18288" bIns="18288"/>
+          <a:lstStyle/>
+          <a:p>
+            <a:pPr algn="ctr">
+              <a:lnSpc>
+                <a:spcPct val="100000"/>
+              </a:lnSpc>
+            </a:pPr>
+            <a:r>
+              <a:rPr sz="1250" b="1" i="0">
+                <a:solidFill>
+                  <a:srgbClr val="FFFFFF"/>
+                </a:solidFill>
+                <a:latin typeface="Meiryo"/>
+                <a:ea typeface="Meiryo"/>
+              </a:rPr>
+              <a:t>本研究</a:t>
+            </a:r>
+          </a:p>
+        </p:txBody>
+      </p:sp>
+      <p:sp>
+        <p:nvSpPr>
+          <p:cNvPr id="25" name="TextBox 24"/>
           <p:cNvSpPr txBox="1"/>
           <p:nvPr/>
         </p:nvSpPr>
         <p:spPr>
           <a:xfrm>
-            <a:off x="6644487" y="4773168"/>
-            <a:ext cx="4705959" cy="1389888"/>
+            <a:off x="7818119" y="4709159"/>
+            <a:ext cx="3550615" cy="1417319"/>
           </a:xfrm>
           <a:prstGeom prst="rect">
             <a:avLst/>
@@ -23485,7 +23650,7 @@
           <a:noFill/>
         </p:spPr>
         <p:txBody>
-          <a:bodyPr wrap="square" anchor="ctr" lIns="18288" rIns="18288" tIns="9144" bIns="9144">
+          <a:bodyPr wrap="square" anchor="t" lIns="18288" rIns="18288" tIns="9144" bIns="9144">
             <a:spAutoFit/>
           </a:bodyPr>
           <a:lstStyle/>
@@ -23518,7 +23683,47 @@
                 <a:latin typeface="Meiryo"/>
                 <a:ea typeface="Meiryo"/>
               </a:rPr>
-              <a:t>外乱が起きたら，</a:t>
+              <a:t>外乱が起きたら，外乱前のスケジュール（</a:t>
+            </a:r>
+            <a:r>
+              <a:rPr sz="1350" b="1" i="0">
+                <a:solidFill>
+                  <a:srgbClr val="FFFFFF"/>
+                </a:solidFill>
+                <a:latin typeface="Meiryo"/>
+                <a:ea typeface="Meiryo"/>
+              </a:rPr>
+              <a:t>初期スケジュール </a:t>
+            </a:r>
+            <a:r>
+              <a:rPr sz="1350" b="1" i="1">
+                <a:solidFill>
+                  <a:srgbClr val="FFFFFF"/>
+                </a:solidFill>
+                <a:latin typeface="Meiryo"/>
+                <a:ea typeface="Meiryo"/>
+              </a:rPr>
+              <a:t>S</a:t>
+            </a:r>
+            <a:r>
+              <a:rPr sz="971" b="1" i="1" baseline="-22000">
+                <a:solidFill>
+                  <a:srgbClr val="FFFFFF"/>
+                </a:solidFill>
+                <a:latin typeface="Meiryo"/>
+                <a:ea typeface="Meiryo"/>
+              </a:rPr>
+              <a:t>p</a:t>
+            </a:r>
+            <a:r>
+              <a:rPr sz="1350" b="0" i="0">
+                <a:solidFill>
+                  <a:srgbClr val="FFFFFF"/>
+                </a:solidFill>
+                <a:latin typeface="Meiryo"/>
+                <a:ea typeface="Meiryo"/>
+              </a:rPr>
+              <a:t>）を修正する</a:t>
             </a:r>
           </a:p>
           <a:p>
@@ -23526,6 +23731,9 @@
               <a:lnSpc>
                 <a:spcPct val="110000"/>
               </a:lnSpc>
+              <a:spcBef>
+                <a:spcPts val="800"/>
+              </a:spcBef>
             </a:pPr>
             <a:r>
               <a:rPr sz="1350" b="0" i="0">
@@ -23535,147 +23743,77 @@
                 <a:latin typeface="Meiryo"/>
                 <a:ea typeface="Meiryo"/>
               </a:rPr>
-              <a:t>外乱前のスケジュール（</a:t>
+              <a:t>→ </a:t>
+            </a:r>
+            <a:r>
+              <a:rPr sz="1350" b="0" i="1">
+                <a:solidFill>
+                  <a:srgbClr val="FFFFFF"/>
+                </a:solidFill>
+                <a:latin typeface="Meiryo"/>
+                <a:ea typeface="Meiryo"/>
+              </a:rPr>
+              <a:t>S</a:t>
+            </a:r>
+            <a:r>
+              <a:rPr sz="971" b="0" i="1" baseline="-22000">
+                <a:solidFill>
+                  <a:srgbClr val="FFFFFF"/>
+                </a:solidFill>
+                <a:latin typeface="Meiryo"/>
+                <a:ea typeface="Meiryo"/>
+              </a:rPr>
+              <a:t>p</a:t>
+            </a:r>
+            <a:r>
+              <a:rPr sz="1350" b="0" i="0">
+                <a:solidFill>
+                  <a:srgbClr val="FFFFFF"/>
+                </a:solidFill>
+                <a:latin typeface="Meiryo"/>
+                <a:ea typeface="Meiryo"/>
+              </a:rPr>
+              <a:t> が存在するので，</a:t>
+            </a:r>
+            <a:r>
+              <a:rPr sz="1350" b="1" i="1">
+                <a:solidFill>
+                  <a:srgbClr val="FFD98A"/>
+                </a:solidFill>
+                <a:latin typeface="Meiryo"/>
+                <a:ea typeface="Meiryo"/>
+              </a:rPr>
+              <a:t>S</a:t>
+            </a:r>
+            <a:r>
+              <a:rPr sz="971" b="1" i="1" baseline="-22000">
+                <a:solidFill>
+                  <a:srgbClr val="FFD98A"/>
+                </a:solidFill>
+                <a:latin typeface="Meiryo"/>
+                <a:ea typeface="Meiryo"/>
+              </a:rPr>
+              <a:t>p</a:t>
             </a:r>
             <a:r>
               <a:rPr sz="1350" b="1" i="0">
                 <a:solidFill>
+                  <a:srgbClr val="FFD98A"/>
+                </a:solidFill>
+                <a:latin typeface="Meiryo"/>
+                <a:ea typeface="Meiryo"/>
+              </a:rPr>
+              <a:t> からの変更量</a:t>
+            </a:r>
+            <a:r>
+              <a:rPr sz="1350" b="0" i="0">
+                <a:solidFill>
                   <a:srgbClr val="FFFFFF"/>
                 </a:solidFill>
                 <a:latin typeface="Meiryo"/>
                 <a:ea typeface="Meiryo"/>
               </a:rPr>
-              <a:t>初期スケジュール </a:t>
-            </a:r>
-            <a:r>
-              <a:rPr sz="1350" b="1" i="1">
-                <a:solidFill>
-                  <a:srgbClr val="FFFFFF"/>
-                </a:solidFill>
-                <a:latin typeface="Meiryo"/>
-                <a:ea typeface="Meiryo"/>
-              </a:rPr>
-              <a:t>S</a:t>
-            </a:r>
-            <a:r>
-              <a:rPr sz="971" b="1" i="1" baseline="-22000">
-                <a:solidFill>
-                  <a:srgbClr val="FFFFFF"/>
-                </a:solidFill>
-                <a:latin typeface="Meiryo"/>
-                <a:ea typeface="Meiryo"/>
-              </a:rPr>
-              <a:t>p</a:t>
-            </a:r>
-            <a:r>
-              <a:rPr sz="1350" b="0" i="0">
-                <a:solidFill>
-                  <a:srgbClr val="FFFFFF"/>
-                </a:solidFill>
-                <a:latin typeface="Meiryo"/>
-                <a:ea typeface="Meiryo"/>
-              </a:rPr>
-              <a:t>）を修正する</a:t>
-            </a:r>
-          </a:p>
-        </p:txBody>
-      </p:sp>
-      <p:sp>
-        <p:nvSpPr>
-          <p:cNvPr id="22" name="Rounded Rectangle 21"/>
-          <p:cNvSpPr/>
-          <p:nvPr/>
-        </p:nvSpPr>
-        <p:spPr>
-          <a:xfrm>
-            <a:off x="566928" y="5138928"/>
-            <a:ext cx="1463040" cy="384048"/>
-          </a:xfrm>
-          <a:prstGeom prst="roundRect">
-            <a:avLst>
-              <a:gd name="adj" fmla="val 40000"/>
-            </a:avLst>
-          </a:prstGeom>
-          <a:solidFill>
-            <a:srgbClr val="3E618C"/>
-          </a:solidFill>
-          <a:ln>
-            <a:noFill/>
-          </a:ln>
-          <a:effectLst/>
-        </p:spPr>
-        <p:style>
-          <a:lnRef idx="1">
-            <a:schemeClr val="accent1"/>
-          </a:lnRef>
-          <a:fillRef idx="3">
-            <a:schemeClr val="accent1"/>
-          </a:fillRef>
-          <a:effectRef idx="2">
-            <a:schemeClr val="accent1"/>
-          </a:effectRef>
-          <a:fontRef idx="minor">
-            <a:schemeClr val="lt1"/>
-          </a:fontRef>
-        </p:style>
-        <p:txBody>
-          <a:bodyPr rtlCol="0" anchor="ctr" wrap="square" lIns="54864" rIns="54864" tIns="18288" bIns="18288"/>
-          <a:lstStyle/>
-          <a:p>
-            <a:pPr algn="ctr">
-              <a:lnSpc>
-                <a:spcPct val="100000"/>
-              </a:lnSpc>
-            </a:pPr>
-            <a:r>
-              <a:rPr sz="1250" b="1" i="0">
-                <a:solidFill>
-                  <a:srgbClr val="FFFFFF"/>
-                </a:solidFill>
-                <a:latin typeface="Meiryo"/>
-                <a:ea typeface="Meiryo"/>
-              </a:rPr>
-              <a:t>本研究の対象</a:t>
-            </a:r>
-          </a:p>
-        </p:txBody>
-      </p:sp>
-      <p:sp>
-        <p:nvSpPr>
-          <p:cNvPr id="23" name="TextBox 22"/>
-          <p:cNvSpPr txBox="1"/>
-          <p:nvPr/>
-        </p:nvSpPr>
-        <p:spPr>
-          <a:xfrm>
-            <a:off x="2167128" y="5074920"/>
-            <a:ext cx="3791559" cy="512064"/>
-          </a:xfrm>
-          <a:prstGeom prst="rect">
-            <a:avLst/>
-          </a:prstGeom>
-          <a:noFill/>
-        </p:spPr>
-        <p:txBody>
-          <a:bodyPr wrap="square" anchor="ctr" lIns="18288" rIns="18288" tIns="9144" bIns="9144">
-            <a:spAutoFit/>
-          </a:bodyPr>
-          <a:lstStyle/>
-          <a:p>
-            <a:pPr algn="l">
-              <a:lnSpc>
-                <a:spcPct val="105000"/>
-              </a:lnSpc>
-            </a:pPr>
-            <a:r>
-              <a:rPr sz="1400" b="0" i="0">
-                <a:solidFill>
-                  <a:srgbClr val="26303A"/>
-                </a:solidFill>
-                <a:latin typeface="Meiryo"/>
-                <a:ea typeface="Meiryo"/>
-              </a:rPr>
-              <a:t>ジョブショップ問題（JSP）における作業遅延</a:t>
+              <a:t>を定義できる</a:t>
             </a:r>
           </a:p>
         </p:txBody>
@@ -28875,7 +29013,27 @@
                 <a:latin typeface="Meiryo"/>
                 <a:ea typeface="Meiryo"/>
               </a:rPr>
-              <a:t>安定性では最適で，生産効率も高い解が，探索の開始前から得られている</a:t>
+              <a:t>安定性では最適で，</a:t>
+            </a:r>
+            <a:r>
+              <a:rPr sz="1500" b="1" i="1">
+                <a:solidFill>
+                  <a:srgbClr val="16385C"/>
+                </a:solidFill>
+                <a:latin typeface="Meiryo"/>
+                <a:ea typeface="Meiryo"/>
+              </a:rPr>
+              <a:t>MS</a:t>
+            </a:r>
+            <a:r>
+              <a:rPr sz="1500" b="1" i="0">
+                <a:solidFill>
+                  <a:srgbClr val="16385C"/>
+                </a:solidFill>
+                <a:latin typeface="Meiryo"/>
+                <a:ea typeface="Meiryo"/>
+              </a:rPr>
+              <a:t> の増加も遅延量以内に収まる解が，探索の開始前から得られている</a:t>
             </a:r>
           </a:p>
         </p:txBody>
@@ -28967,8 +29125,8 @@
         </p:blipFill>
         <p:spPr>
           <a:xfrm>
-            <a:off x="521207" y="1627632"/>
-            <a:ext cx="5852160" cy="4524451"/>
+            <a:off x="521207" y="1691640"/>
+            <a:ext cx="5577840" cy="4312367"/>
           </a:xfrm>
           <a:prstGeom prst="rect">
             <a:avLst/>
@@ -28983,8 +29141,8 @@
         </p:nvSpPr>
         <p:spPr>
           <a:xfrm>
-            <a:off x="6556248" y="1783080"/>
-            <a:ext cx="5068519" cy="457200"/>
+            <a:off x="6281928" y="1783080"/>
+            <a:ext cx="5342839" cy="457200"/>
           </a:xfrm>
           <a:prstGeom prst="rect">
             <a:avLst/>
@@ -29006,7 +29164,7 @@
               </a:spcBef>
             </a:pPr>
             <a:r>
-              <a:rPr sz="1360" b="1" i="0">
+              <a:rPr sz="1200" b="1" i="0">
                 <a:solidFill>
                   <a:srgbClr val="16385C"/>
                 </a:solidFill>
@@ -29016,7 +29174,7 @@
               <a:t>▪ </a:t>
             </a:r>
             <a:r>
-              <a:rPr sz="1700" b="0" i="1">
+              <a:rPr sz="1500" b="0" i="1">
                 <a:solidFill>
                   <a:srgbClr val="26303A"/>
                 </a:solidFill>
@@ -29026,7 +29184,7 @@
               <a:t>S</a:t>
             </a:r>
             <a:r>
-              <a:rPr sz="1224" b="0" i="1" baseline="-22000">
+              <a:rPr sz="1080" b="0" i="1" baseline="-22000">
                 <a:solidFill>
                   <a:srgbClr val="26303A"/>
                 </a:solidFill>
@@ -29036,17 +29194,17 @@
               <a:t>p</a:t>
             </a:r>
             <a:r>
-              <a:rPr sz="1700" b="0" i="0">
-                <a:solidFill>
-                  <a:srgbClr val="26303A"/>
-                </a:solidFill>
-                <a:latin typeface="Meiryo"/>
-                <a:ea typeface="Meiryo"/>
-              </a:rPr>
-              <a:t> の処理順序を保ったまま遅延を吸収した解は</a:t>
-            </a:r>
-            <a:r>
-              <a:rPr sz="1700" b="1" i="0">
+              <a:rPr sz="1500" b="0" i="0">
+                <a:solidFill>
+                  <a:srgbClr val="26303A"/>
+                </a:solidFill>
+                <a:latin typeface="Meiryo"/>
+                <a:ea typeface="Meiryo"/>
+              </a:rPr>
+              <a:t> の処理順序を保ったまま遅延を吸収した解（right-shift）は，</a:t>
+            </a:r>
+            <a:r>
+              <a:rPr sz="1500" b="1" i="0">
                 <a:solidFill>
                   <a:srgbClr val="16385C"/>
                 </a:solidFill>
@@ -29062,11 +29220,11 @@
                 <a:spcPct val="108000"/>
               </a:lnSpc>
               <a:spcBef>
-                <a:spcPts val="1600"/>
+                <a:spcPts val="1000"/>
               </a:spcBef>
             </a:pPr>
             <a:r>
-              <a:rPr sz="1360" b="1" i="0">
+              <a:rPr sz="1200" b="1" i="0">
                 <a:solidFill>
                   <a:srgbClr val="16385C"/>
                 </a:solidFill>
@@ -29076,7 +29234,7 @@
               <a:t>▪ </a:t>
             </a:r>
             <a:r>
-              <a:rPr sz="1700" b="0" i="0">
+              <a:rPr sz="1500" b="0" i="0">
                 <a:solidFill>
                   <a:srgbClr val="26303A"/>
                 </a:solidFill>
@@ -29086,7 +29244,7 @@
               <a:t>この解は</a:t>
             </a:r>
             <a:r>
-              <a:rPr sz="1700" b="1" i="0">
+              <a:rPr sz="1500" b="1" i="0">
                 <a:solidFill>
                   <a:srgbClr val="16385C"/>
                 </a:solidFill>
@@ -29096,17 +29254,37 @@
               <a:t>変更量 0</a:t>
             </a:r>
             <a:r>
-              <a:rPr sz="1700" b="0" i="0">
-                <a:solidFill>
-                  <a:srgbClr val="26303A"/>
-                </a:solidFill>
-                <a:latin typeface="Meiryo"/>
-                <a:ea typeface="Meiryo"/>
-              </a:rPr>
-              <a:t> で安定性では最適であり，</a:t>
-            </a:r>
-            <a:r>
-              <a:rPr sz="1700" b="0" i="1">
+              <a:rPr sz="1500" b="0" i="0">
+                <a:solidFill>
+                  <a:srgbClr val="26303A"/>
+                </a:solidFill>
+                <a:latin typeface="Meiryo"/>
+                <a:ea typeface="Meiryo"/>
+              </a:rPr>
+              <a:t> で安定性では最適．</a:t>
+            </a:r>
+            <a:r>
+              <a:rPr sz="1500" b="0" i="1">
+                <a:solidFill>
+                  <a:srgbClr val="26303A"/>
+                </a:solidFill>
+                <a:latin typeface="Meiryo"/>
+                <a:ea typeface="Meiryo"/>
+              </a:rPr>
+              <a:t>MS</a:t>
+            </a:r>
+            <a:r>
+              <a:rPr sz="1500" b="0" i="0">
+                <a:solidFill>
+                  <a:srgbClr val="26303A"/>
+                </a:solidFill>
+                <a:latin typeface="Meiryo"/>
+                <a:ea typeface="Meiryo"/>
+              </a:rPr>
+              <a:t> も，外乱前に最適化した </a:t>
+            </a:r>
+            <a:r>
+              <a:rPr sz="1500" b="0" i="1">
                 <a:solidFill>
                   <a:srgbClr val="26303A"/>
                 </a:solidFill>
@@ -29116,7 +29294,7 @@
               <a:t>S</a:t>
             </a:r>
             <a:r>
-              <a:rPr sz="1224" b="0" i="1" baseline="-22000">
+              <a:rPr sz="1080" b="0" i="1" baseline="-22000">
                 <a:solidFill>
                   <a:srgbClr val="26303A"/>
                 </a:solidFill>
@@ -29126,34 +29304,34 @@
               <a:t>p</a:t>
             </a:r>
             <a:r>
-              <a:rPr sz="1700" b="0" i="0">
-                <a:solidFill>
-                  <a:srgbClr val="26303A"/>
-                </a:solidFill>
-                <a:latin typeface="Meiryo"/>
-                <a:ea typeface="Meiryo"/>
-              </a:rPr>
-              <a:t> が外乱前に最適化済みのため </a:t>
-            </a:r>
-            <a:r>
-              <a:rPr sz="1700" b="1" i="1">
+              <a:rPr sz="1500" b="0" i="0">
+                <a:solidFill>
+                  <a:srgbClr val="26303A"/>
+                </a:solidFill>
+                <a:latin typeface="Meiryo"/>
+                <a:ea typeface="Meiryo"/>
+              </a:rPr>
+              <a:t> の値から</a:t>
+            </a:r>
+            <a:r>
+              <a:rPr sz="1500" b="1" i="0">
                 <a:solidFill>
                   <a:srgbClr val="16385C"/>
                 </a:solidFill>
                 <a:latin typeface="Meiryo"/>
                 <a:ea typeface="Meiryo"/>
               </a:rPr>
-              <a:t>MS</a:t>
-            </a:r>
-            <a:r>
-              <a:rPr sz="1700" b="1" i="0">
-                <a:solidFill>
-                  <a:srgbClr val="16385C"/>
-                </a:solidFill>
-                <a:latin typeface="Meiryo"/>
-                <a:ea typeface="Meiryo"/>
-              </a:rPr>
-              <a:t> も小さい</a:t>
+              <a:t>遅延量以内の増加</a:t>
+            </a:r>
+            <a:r>
+              <a:rPr sz="1500" b="0" i="0">
+                <a:solidFill>
+                  <a:srgbClr val="26303A"/>
+                </a:solidFill>
+                <a:latin typeface="Meiryo"/>
+                <a:ea typeface="Meiryo"/>
+              </a:rPr>
+              <a:t>に収まる</a:t>
             </a:r>
           </a:p>
           <a:p>
@@ -29162,11 +29340,11 @@
                 <a:spcPct val="108000"/>
               </a:lnSpc>
               <a:spcBef>
-                <a:spcPts val="1600"/>
+                <a:spcPts val="1000"/>
               </a:spcBef>
             </a:pPr>
             <a:r>
-              <a:rPr sz="1360" b="1" i="0">
+              <a:rPr sz="1200" b="1" i="0">
                 <a:solidFill>
                   <a:srgbClr val="16385C"/>
                 </a:solidFill>
@@ -29176,47 +29354,37 @@
               <a:t>▪ </a:t>
             </a:r>
             <a:r>
-              <a:rPr sz="1700" b="0" i="0">
-                <a:solidFill>
-                  <a:srgbClr val="26303A"/>
-                </a:solidFill>
-                <a:latin typeface="Meiryo"/>
-                <a:ea typeface="Meiryo"/>
-              </a:rPr>
-              <a:t>変更コストが無視できない場面では，</a:t>
-            </a:r>
-            <a:r>
-              <a:rPr sz="1700" b="0" i="1">
-                <a:solidFill>
-                  <a:srgbClr val="26303A"/>
-                </a:solidFill>
-                <a:latin typeface="Meiryo"/>
-                <a:ea typeface="Meiryo"/>
-              </a:rPr>
-              <a:t>S</a:t>
-            </a:r>
-            <a:r>
-              <a:rPr sz="1224" b="0" i="1" baseline="-22000">
-                <a:solidFill>
-                  <a:srgbClr val="26303A"/>
-                </a:solidFill>
-                <a:latin typeface="Meiryo"/>
-                <a:ea typeface="Meiryo"/>
-              </a:rPr>
-              <a:t>p</a:t>
-            </a:r>
-            <a:r>
-              <a:rPr sz="1700" b="0" i="0">
-                <a:solidFill>
-                  <a:srgbClr val="26303A"/>
-                </a:solidFill>
-                <a:latin typeface="Meiryo"/>
-                <a:ea typeface="Meiryo"/>
-              </a:rPr>
-              <a:t> の近傍（</a:t>
-            </a:r>
-            <a:r>
-              <a:rPr sz="1700" b="1" i="0">
+              <a:rPr sz="1500" b="0" i="0">
+                <a:solidFill>
+                  <a:srgbClr val="26303A"/>
+                </a:solidFill>
+                <a:latin typeface="Meiryo"/>
+                <a:ea typeface="Meiryo"/>
+              </a:rPr>
+              <a:t>変更コストが無視できない場面で求められるのは，この解から少しの変更で </a:t>
+            </a:r>
+            <a:r>
+              <a:rPr sz="1500" b="0" i="1">
+                <a:solidFill>
+                  <a:srgbClr val="26303A"/>
+                </a:solidFill>
+                <a:latin typeface="Meiryo"/>
+                <a:ea typeface="Meiryo"/>
+              </a:rPr>
+              <a:t>MS</a:t>
+            </a:r>
+            <a:r>
+              <a:rPr sz="1500" b="0" i="0">
+                <a:solidFill>
+                  <a:srgbClr val="26303A"/>
+                </a:solidFill>
+                <a:latin typeface="Meiryo"/>
+                <a:ea typeface="Meiryo"/>
+              </a:rPr>
+              <a:t> をどこまで下げられるか ＝ </a:t>
+            </a:r>
+            <a:r>
+              <a:rPr sz="1500" b="1" i="0">
                 <a:solidFill>
                   <a:srgbClr val="16385C"/>
                 </a:solidFill>
@@ -29226,34 +29394,14 @@
               <a:t>高安定領域</a:t>
             </a:r>
             <a:r>
-              <a:rPr sz="1700" b="0" i="0">
-                <a:solidFill>
-                  <a:srgbClr val="26303A"/>
-                </a:solidFill>
-                <a:latin typeface="Meiryo"/>
-                <a:ea typeface="Meiryo"/>
-              </a:rPr>
-              <a:t>）で </a:t>
-            </a:r>
-            <a:r>
-              <a:rPr sz="1700" b="0" i="1">
-                <a:solidFill>
-                  <a:srgbClr val="26303A"/>
-                </a:solidFill>
-                <a:latin typeface="Meiryo"/>
-                <a:ea typeface="Meiryo"/>
-              </a:rPr>
-              <a:t>MS</a:t>
-            </a:r>
-            <a:r>
-              <a:rPr sz="1700" b="0" i="0">
-                <a:solidFill>
-                  <a:srgbClr val="26303A"/>
-                </a:solidFill>
-                <a:latin typeface="Meiryo"/>
-                <a:ea typeface="Meiryo"/>
-              </a:rPr>
-              <a:t> を改善した解が求められる</a:t>
+              <a:rPr sz="1500" b="0" i="0">
+                <a:solidFill>
+                  <a:srgbClr val="26303A"/>
+                </a:solidFill>
+                <a:latin typeface="Meiryo"/>
+                <a:ea typeface="Meiryo"/>
+              </a:rPr>
+              <a:t>の Pareto フロント</a:t>
             </a:r>
           </a:p>
         </p:txBody>
@@ -29266,8 +29414,8 @@
         </p:nvSpPr>
         <p:spPr>
           <a:xfrm>
-            <a:off x="6556248" y="4343400"/>
-            <a:ext cx="5068519" cy="640080"/>
+            <a:off x="6281928" y="4160520"/>
+            <a:ext cx="5342839" cy="685800"/>
           </a:xfrm>
           <a:prstGeom prst="rect">
             <a:avLst/>
@@ -29286,14 +29434,14 @@
               </a:lnSpc>
             </a:pPr>
             <a:r>
-              <a:rPr sz="1700" b="0" i="0">
-                <a:solidFill>
-                  <a:srgbClr val="26303A"/>
-                </a:solidFill>
-                <a:latin typeface="Meiryo"/>
-                <a:ea typeface="Meiryo"/>
-              </a:rPr>
-              <a:t>→ 手法はフロント全体の解の質だけでなく，</a:t>
+              <a:rPr sz="1600" b="0" i="0">
+                <a:solidFill>
+                  <a:srgbClr val="26303A"/>
+                </a:solidFill>
+                <a:latin typeface="Meiryo"/>
+                <a:ea typeface="Meiryo"/>
+              </a:rPr>
+              <a:t>→ 実用上は，Pareto フロント全体だけでなく，</a:t>
             </a:r>
           </a:p>
           <a:p>
@@ -29303,24 +29451,24 @@
               </a:lnSpc>
             </a:pPr>
             <a:r>
-              <a:rPr sz="1700" b="1" i="0">
+              <a:rPr sz="1600" b="1" i="0">
                 <a:solidFill>
                   <a:srgbClr val="16385C"/>
                 </a:solidFill>
                 <a:latin typeface="Meiryo"/>
                 <a:ea typeface="Meiryo"/>
               </a:rPr>
-              <a:t>高安定領域の解の質</a:t>
-            </a:r>
-            <a:r>
-              <a:rPr sz="1700" b="0" i="0">
-                <a:solidFill>
-                  <a:srgbClr val="26303A"/>
-                </a:solidFill>
-                <a:latin typeface="Meiryo"/>
-                <a:ea typeface="Meiryo"/>
-              </a:rPr>
-              <a:t>でも評価する必要がある</a:t>
+              <a:t>高安定領域のフロントの質</a:t>
+            </a:r>
+            <a:r>
+              <a:rPr sz="1600" b="0" i="0">
+                <a:solidFill>
+                  <a:srgbClr val="26303A"/>
+                </a:solidFill>
+                <a:latin typeface="Meiryo"/>
+                <a:ea typeface="Meiryo"/>
+              </a:rPr>
+              <a:t>が手法の価値を決める</a:t>
             </a:r>
           </a:p>
         </p:txBody>
@@ -29333,8 +29481,8 @@
         </p:nvSpPr>
         <p:spPr>
           <a:xfrm>
-            <a:off x="6556248" y="5029200"/>
-            <a:ext cx="5068519" cy="365760"/>
+            <a:off x="6281928" y="5029200"/>
+            <a:ext cx="5342839" cy="640080"/>
           </a:xfrm>
           <a:prstGeom prst="rect">
             <a:avLst/>
@@ -29349,18 +29497,38 @@
           <a:p>
             <a:pPr algn="l">
               <a:lnSpc>
-                <a:spcPct val="105000"/>
+                <a:spcPct val="108000"/>
               </a:lnSpc>
             </a:pPr>
             <a:r>
-              <a:rPr sz="1500" b="0" i="0">
-                <a:solidFill>
-                  <a:srgbClr val="26303A"/>
-                </a:solidFill>
-                <a:latin typeface="Meiryo"/>
-                <a:ea typeface="Meiryo"/>
-              </a:rPr>
-              <a:t>本研究では，解の質を hypervolume（HV）で測る</a:t>
+              <a:rPr sz="1350" b="0" i="0">
+                <a:solidFill>
+                  <a:srgbClr val="26303A"/>
+                </a:solidFill>
+                <a:latin typeface="Meiryo"/>
+                <a:ea typeface="Meiryo"/>
+              </a:rPr>
+              <a:t>本研究では，フロントの質を hypervolume（HV）で測り，高安定領域に限った HV を</a:t>
+            </a:r>
+            <a:r>
+              <a:rPr sz="1350" b="1" i="0">
+                <a:solidFill>
+                  <a:srgbClr val="16385C"/>
+                </a:solidFill>
+                <a:latin typeface="Meiryo"/>
+                <a:ea typeface="Meiryo"/>
+              </a:rPr>
+              <a:t>高安定 HV</a:t>
+            </a:r>
+            <a:r>
+              <a:rPr sz="1350" b="0" i="0">
+                <a:solidFill>
+                  <a:srgbClr val="26303A"/>
+                </a:solidFill>
+                <a:latin typeface="Meiryo"/>
+                <a:ea typeface="Meiryo"/>
+              </a:rPr>
+              <a:t> と呼ぶ</a:t>
             </a:r>
           </a:p>
         </p:txBody>
@@ -30751,7 +30919,7 @@
         <p:spPr>
           <a:xfrm>
             <a:off x="566928" y="1737360"/>
-            <a:ext cx="11057839" cy="1371600"/>
+            <a:ext cx="11057839" cy="1188720"/>
           </a:xfrm>
           <a:prstGeom prst="roundRect">
             <a:avLst>
@@ -30798,7 +30966,7 @@
         </p:nvSpPr>
         <p:spPr>
           <a:xfrm>
-            <a:off x="768096" y="2167128"/>
+            <a:off x="768096" y="2075688"/>
             <a:ext cx="512064" cy="512064"/>
           </a:xfrm>
           <a:prstGeom prst="roundRect">
@@ -30859,7 +31027,7 @@
         <p:spPr>
           <a:xfrm>
             <a:off x="1481328" y="1810512"/>
-            <a:ext cx="3108960" cy="1225296"/>
+            <a:ext cx="3108960" cy="1042416"/>
           </a:xfrm>
           <a:prstGeom prst="rect">
             <a:avLst/>
@@ -30916,7 +31084,7 @@
         <p:spPr>
           <a:xfrm>
             <a:off x="4681728" y="1938528"/>
-            <a:ext cx="13716" cy="969264"/>
+            <a:ext cx="13716" cy="786384"/>
           </a:xfrm>
           <a:prstGeom prst="rect">
             <a:avLst/>
@@ -30960,7 +31128,7 @@
         <p:spPr>
           <a:xfrm>
             <a:off x="4910328" y="1810512"/>
-            <a:ext cx="6485839" cy="1225296"/>
+            <a:ext cx="6485839" cy="1042416"/>
           </a:xfrm>
           <a:prstGeom prst="rect">
             <a:avLst/>
@@ -31029,8 +31197,8 @@
         </p:nvSpPr>
         <p:spPr>
           <a:xfrm>
-            <a:off x="566928" y="3291839"/>
-            <a:ext cx="11057839" cy="1371600"/>
+            <a:off x="566928" y="3108960"/>
+            <a:ext cx="11057839" cy="1188720"/>
           </a:xfrm>
           <a:prstGeom prst="roundRect">
             <a:avLst>
@@ -31077,7 +31245,7 @@
         </p:nvSpPr>
         <p:spPr>
           <a:xfrm>
-            <a:off x="768096" y="3721607"/>
+            <a:off x="768096" y="3447288"/>
             <a:ext cx="512064" cy="512064"/>
           </a:xfrm>
           <a:prstGeom prst="roundRect">
@@ -31137,8 +31305,8 @@
         </p:nvSpPr>
         <p:spPr>
           <a:xfrm>
-            <a:off x="1481328" y="3364991"/>
-            <a:ext cx="3108960" cy="1225296"/>
+            <a:off x="1481328" y="3182112"/>
+            <a:ext cx="3108960" cy="1042416"/>
           </a:xfrm>
           <a:prstGeom prst="rect">
             <a:avLst/>
@@ -31194,8 +31362,8 @@
         </p:nvSpPr>
         <p:spPr>
           <a:xfrm>
-            <a:off x="4681728" y="3493008"/>
-            <a:ext cx="13716" cy="969264"/>
+            <a:off x="4681728" y="3310128"/>
+            <a:ext cx="13716" cy="786384"/>
           </a:xfrm>
           <a:prstGeom prst="rect">
             <a:avLst/>
@@ -31238,8 +31406,8 @@
         </p:nvSpPr>
         <p:spPr>
           <a:xfrm>
-            <a:off x="4910328" y="3364991"/>
-            <a:ext cx="6485839" cy="1225296"/>
+            <a:off x="4910328" y="3182112"/>
+            <a:ext cx="6485839" cy="1042416"/>
           </a:xfrm>
           <a:prstGeom prst="rect">
             <a:avLst/>
@@ -31265,7 +31433,7 @@
                 <a:latin typeface="Meiryo"/>
                 <a:ea typeface="Meiryo"/>
               </a:rPr>
-              <a:t>比較は少数の重みでのスカラー値や，フロント全体の HV で行われ，高安定領域で手法がどう異なるかは分析されていない</a:t>
+              <a:t>比較は少数の重みでのスカラー値や，Pareto フロント全体の HV で行われ，高安定領域で手法がどう異なるかは分析されていない</a:t>
             </a:r>
           </a:p>
         </p:txBody>
@@ -31278,8 +31446,8 @@
         </p:nvSpPr>
         <p:spPr>
           <a:xfrm>
-            <a:off x="566928" y="4846320"/>
-            <a:ext cx="11057839" cy="1371600"/>
+            <a:off x="566928" y="4480560"/>
+            <a:ext cx="11057839" cy="1783080"/>
           </a:xfrm>
           <a:prstGeom prst="roundRect">
             <a:avLst>
@@ -31326,7 +31494,7 @@
         </p:nvSpPr>
         <p:spPr>
           <a:xfrm>
-            <a:off x="768096" y="5276088"/>
+            <a:off x="768096" y="5116068"/>
             <a:ext cx="512064" cy="512064"/>
           </a:xfrm>
           <a:prstGeom prst="roundRect">
@@ -31386,8 +31554,8 @@
         </p:nvSpPr>
         <p:spPr>
           <a:xfrm>
-            <a:off x="1481328" y="4919472"/>
-            <a:ext cx="3108960" cy="1225296"/>
+            <a:off x="1481328" y="4553712"/>
+            <a:ext cx="3108960" cy="1636776"/>
           </a:xfrm>
           <a:prstGeom prst="rect">
             <a:avLst/>
@@ -31413,7 +31581,7 @@
                 <a:latin typeface="Meiryo"/>
                 <a:ea typeface="Meiryo"/>
               </a:rPr>
-              <a:t>フロント全体を保って</a:t>
+              <a:t>Pareto フロント全体を保って</a:t>
             </a:r>
           </a:p>
           <a:p>
@@ -31460,8 +31628,8 @@
         </p:nvSpPr>
         <p:spPr>
           <a:xfrm>
-            <a:off x="4681728" y="5047488"/>
-            <a:ext cx="13716" cy="969264"/>
+            <a:off x="4681728" y="4681728"/>
+            <a:ext cx="13716" cy="1380744"/>
           </a:xfrm>
           <a:prstGeom prst="rect">
             <a:avLst/>
@@ -31504,8 +31672,8 @@
         </p:nvSpPr>
         <p:spPr>
           <a:xfrm>
-            <a:off x="4910328" y="4919472"/>
-            <a:ext cx="6485839" cy="1225296"/>
+            <a:off x="4910328" y="4553712"/>
+            <a:ext cx="6485839" cy="1636776"/>
           </a:xfrm>
           <a:prstGeom prst="rect">
             <a:avLst/>
@@ -31541,7 +31709,7 @@
                 <a:latin typeface="Meiryo"/>
                 <a:ea typeface="Meiryo"/>
               </a:rPr>
-              <a:t>：選ばれる解は変わるが，高安定領域の解を作る操作はない</a:t>
+              <a:t>：高安定領域の解を「選ぶ」ことはできるが，「作る」のは交叉や局所探索などの探索演算子のまま</a:t>
             </a:r>
           </a:p>
           <a:p>
@@ -31568,7 +31736,27 @@
                 <a:latin typeface="Meiryo"/>
                 <a:ea typeface="Meiryo"/>
               </a:rPr>
-              <a:t>：解は高安定領域に留まるが，範囲外のトレードオフ解を失う</a:t>
+              <a:t>：解を高安定領域に閉じ込めるので，範囲外（変更量が大きく </a:t>
+            </a:r>
+            <a:r>
+              <a:rPr sz="1400" b="0" i="1">
+                <a:solidFill>
+                  <a:srgbClr val="26303A"/>
+                </a:solidFill>
+                <a:latin typeface="Meiryo"/>
+                <a:ea typeface="Meiryo"/>
+              </a:rPr>
+              <a:t>MS</a:t>
+            </a:r>
+            <a:r>
+              <a:rPr sz="1400" b="0" i="0">
+                <a:solidFill>
+                  <a:srgbClr val="26303A"/>
+                </a:solidFill>
+                <a:latin typeface="Meiryo"/>
+                <a:ea typeface="Meiryo"/>
+              </a:rPr>
+              <a:t> が小さい）の Pareto フロントは得られない</a:t>
             </a:r>
           </a:p>
           <a:p>
@@ -31585,7 +31773,7 @@
                 <a:latin typeface="Meiryo"/>
                 <a:ea typeface="Meiryo"/>
               </a:rPr>
-              <a:t>→ 探索構造が高安定領域に届かないとき（課題 1），補う手段がない</a:t>
+              <a:t>→ Pareto フロント全体を保ったまま，高安定領域の解を能動的に作る操作は，どちらにもない</a:t>
             </a:r>
           </a:p>
         </p:txBody>
@@ -31928,8 +32116,8 @@
         </p:nvSpPr>
         <p:spPr>
           <a:xfrm>
-            <a:off x="731520" y="2002536"/>
-            <a:ext cx="5062575" cy="1371600"/>
+            <a:off x="713232" y="2002536"/>
+            <a:ext cx="5099151" cy="1371600"/>
           </a:xfrm>
           <a:prstGeom prst="rect">
             <a:avLst/>
@@ -31948,7 +32136,7 @@
               </a:lnSpc>
             </a:pPr>
             <a:r>
-              <a:rPr sz="1650" b="0" i="0">
+              <a:rPr sz="1550" b="0" i="0">
                 <a:solidFill>
                   <a:srgbClr val="FFFFFF"/>
                 </a:solidFill>
@@ -31958,7 +32146,7 @@
               <a:t>交叉で 2 親の染色体を組み替える</a:t>
             </a:r>
             <a:r>
-              <a:rPr sz="1650" b="1" i="0">
+              <a:rPr sz="1550" b="1" i="0">
                 <a:solidFill>
                   <a:srgbClr val="FFD98A"/>
                 </a:solidFill>
@@ -31968,7 +32156,7 @@
               <a:t>多点探索</a:t>
             </a:r>
             <a:r>
-              <a:rPr sz="1650" b="0" i="0">
+              <a:rPr sz="1550" b="0" i="0">
                 <a:solidFill>
                   <a:srgbClr val="FFFFFF"/>
                 </a:solidFill>
@@ -31985,7 +32173,7 @@
               </a:lnSpc>
             </a:pPr>
             <a:r>
-              <a:rPr sz="1650" b="0" i="1">
+              <a:rPr sz="1550" b="0" i="1">
                 <a:solidFill>
                   <a:srgbClr val="FFFFFF"/>
                 </a:solidFill>
@@ -31995,7 +32183,7 @@
               <a:t>S</a:t>
             </a:r>
             <a:r>
-              <a:rPr sz="1188" b="0" i="1" baseline="-22000">
+              <a:rPr sz="1116" b="0" i="1" baseline="-22000">
                 <a:solidFill>
                   <a:srgbClr val="FFFFFF"/>
                 </a:solidFill>
@@ -32005,14 +32193,14 @@
               <a:t>p</a:t>
             </a:r>
             <a:r>
-              <a:rPr sz="1650" b="0" i="0">
+              <a:rPr sz="1550" b="0" i="0">
                 <a:solidFill>
                   <a:srgbClr val="FFFFFF"/>
                 </a:solidFill>
                 <a:latin typeface="Meiryo"/>
                 <a:ea typeface="Meiryo"/>
               </a:rPr>
-              <a:t> からの小さな変更では表せない飛躍を伴うため，</a:t>
+              <a:t> からの小さな変更では表せない飛躍を伴う．</a:t>
             </a:r>
           </a:p>
           <a:p>
@@ -32022,17 +32210,27 @@
               </a:lnSpc>
             </a:pPr>
             <a:r>
-              <a:rPr sz="1650" b="0" i="1">
+              <a:rPr sz="1550" b="0" i="0">
                 <a:solidFill>
                   <a:srgbClr val="FFFFFF"/>
                 </a:solidFill>
                 <a:latin typeface="Meiryo"/>
                 <a:ea typeface="Meiryo"/>
               </a:rPr>
+              <a:t>そのため，</a:t>
+            </a:r>
+            <a:r>
+              <a:rPr sz="1550" b="0" i="1">
+                <a:solidFill>
+                  <a:srgbClr val="FFFFFF"/>
+                </a:solidFill>
+                <a:latin typeface="Meiryo"/>
+                <a:ea typeface="Meiryo"/>
+              </a:rPr>
               <a:t>S</a:t>
             </a:r>
             <a:r>
-              <a:rPr sz="1188" b="0" i="1" baseline="-22000">
+              <a:rPr sz="1116" b="0" i="1" baseline="-22000">
                 <a:solidFill>
                   <a:srgbClr val="FFFFFF"/>
                 </a:solidFill>
@@ -32042,7 +32240,7 @@
               <a:t>p</a:t>
             </a:r>
             <a:r>
-              <a:rPr sz="1650" b="0" i="0">
+              <a:rPr sz="1550" b="0" i="0">
                 <a:solidFill>
                   <a:srgbClr val="FFFFFF"/>
                 </a:solidFill>
@@ -32059,7 +32257,7 @@
               </a:lnSpc>
             </a:pPr>
             <a:r>
-              <a:rPr sz="1650" b="1" i="0">
+              <a:rPr sz="1550" b="1" i="0">
                 <a:solidFill>
                   <a:srgbClr val="FFD98A"/>
                 </a:solidFill>
@@ -32069,7 +32267,7 @@
               <a:t>単点探索</a:t>
             </a:r>
             <a:r>
-              <a:rPr sz="1650" b="0" i="0">
+              <a:rPr sz="1550" b="0" i="0">
                 <a:solidFill>
                   <a:srgbClr val="FFFFFF"/>
                 </a:solidFill>
@@ -32079,7 +32277,7 @@
               <a:t>のほうが，</a:t>
             </a:r>
             <a:r>
-              <a:rPr sz="1650" b="1" i="0">
+              <a:rPr sz="1550" b="1" i="0">
                 <a:solidFill>
                   <a:srgbClr val="FFD98A"/>
                 </a:solidFill>
@@ -32209,8 +32407,8 @@
         </p:nvSpPr>
         <p:spPr>
           <a:xfrm>
-            <a:off x="6397599" y="2002536"/>
-            <a:ext cx="5062575" cy="1371600"/>
+            <a:off x="6379311" y="2002536"/>
+            <a:ext cx="5099151" cy="1371600"/>
           </a:xfrm>
           <a:prstGeom prst="rect">
             <a:avLst/>
@@ -32229,7 +32427,7 @@
               </a:lnSpc>
             </a:pPr>
             <a:r>
-              <a:rPr sz="1650" b="0" i="0">
+              <a:rPr sz="1550" b="0" i="0">
                 <a:solidFill>
                   <a:srgbClr val="FFFFFF"/>
                 </a:solidFill>
@@ -32239,7 +32437,7 @@
               <a:t>多点探索に，解を </a:t>
             </a:r>
             <a:r>
-              <a:rPr sz="1650" b="0" i="1">
+              <a:rPr sz="1550" b="0" i="1">
                 <a:solidFill>
                   <a:srgbClr val="FFFFFF"/>
                 </a:solidFill>
@@ -32249,7 +32447,7 @@
               <a:t>S</a:t>
             </a:r>
             <a:r>
-              <a:rPr sz="1188" b="0" i="1" baseline="-22000">
+              <a:rPr sz="1116" b="0" i="1" baseline="-22000">
                 <a:solidFill>
                   <a:srgbClr val="FFFFFF"/>
                 </a:solidFill>
@@ -32259,7 +32457,7 @@
               <a:t>p</a:t>
             </a:r>
             <a:r>
-              <a:rPr sz="1650" b="0" i="0">
+              <a:rPr sz="1550" b="0" i="0">
                 <a:solidFill>
                   <a:srgbClr val="FFFFFF"/>
                 </a:solidFill>
@@ -32276,7 +32474,7 @@
               </a:lnSpc>
             </a:pPr>
             <a:r>
-              <a:rPr sz="1650" b="0" i="0">
+              <a:rPr sz="1550" b="0" i="0">
                 <a:solidFill>
                   <a:srgbClr val="FFFFFF"/>
                 </a:solidFill>
@@ -32286,7 +32484,7 @@
               <a:t>（</a:t>
             </a:r>
             <a:r>
-              <a:rPr sz="1650" b="1" i="0">
+              <a:rPr sz="1550" b="1" i="0">
                 <a:solidFill>
                   <a:srgbClr val="FFD98A"/>
                 </a:solidFill>
@@ -32296,7 +32494,7 @@
               <a:t>安定性誘導演算子</a:t>
             </a:r>
             <a:r>
-              <a:rPr sz="1650" b="0" i="0">
+              <a:rPr sz="1550" b="0" i="0">
                 <a:solidFill>
                   <a:srgbClr val="FFFFFF"/>
                 </a:solidFill>
@@ -32313,34 +32511,14 @@
               </a:lnSpc>
             </a:pPr>
             <a:r>
-              <a:rPr sz="1650" b="0" i="0">
+              <a:rPr sz="1550" b="0" i="0">
                 <a:solidFill>
                   <a:srgbClr val="FFFFFF"/>
                 </a:solidFill>
                 <a:latin typeface="Meiryo"/>
                 <a:ea typeface="Meiryo"/>
               </a:rPr>
-              <a:t>その経路上に変更量が小さく </a:t>
-            </a:r>
-            <a:r>
-              <a:rPr sz="1650" b="0" i="1">
-                <a:solidFill>
-                  <a:srgbClr val="FFFFFF"/>
-                </a:solidFill>
-                <a:latin typeface="Meiryo"/>
-                <a:ea typeface="Meiryo"/>
-              </a:rPr>
-              <a:t>MS</a:t>
-            </a:r>
-            <a:r>
-              <a:rPr sz="1650" b="0" i="0">
-                <a:solidFill>
-                  <a:srgbClr val="FFFFFF"/>
-                </a:solidFill>
-                <a:latin typeface="Meiryo"/>
-                <a:ea typeface="Meiryo"/>
-              </a:rPr>
-              <a:t> の劣化も小さい</a:t>
+              <a:t>その経路上に変更量の小さい解が現れるため，</a:t>
             </a:r>
           </a:p>
           <a:p>
@@ -32350,17 +32528,7 @@
               </a:lnSpc>
             </a:pPr>
             <a:r>
-              <a:rPr sz="1650" b="0" i="0">
-                <a:solidFill>
-                  <a:srgbClr val="FFFFFF"/>
-                </a:solidFill>
-                <a:latin typeface="Meiryo"/>
-                <a:ea typeface="Meiryo"/>
-              </a:rPr>
-              <a:t>解が現れるため，</a:t>
-            </a:r>
-            <a:r>
-              <a:rPr sz="1650" b="1" i="0">
+              <a:rPr sz="1550" b="1" i="0">
                 <a:solidFill>
                   <a:srgbClr val="FFD98A"/>
                 </a:solidFill>

--- a/doc/presentation_materials/JIMA2026fall_発表.pptx
+++ b/doc/presentation_materials/JIMA2026fall_発表.pptx
@@ -29013,7 +29013,7 @@
                 <a:latin typeface="Meiryo"/>
                 <a:ea typeface="Meiryo"/>
               </a:rPr>
-              <a:t>安定性では最適で，</a:t>
+              <a:t>安定性が最良の解は探索せずに得られる．問われるのは，そこから少しの変更で </a:t>
             </a:r>
             <a:r>
               <a:rPr sz="1500" b="1" i="1">
@@ -29033,7 +29033,7 @@
                 <a:latin typeface="Meiryo"/>
                 <a:ea typeface="Meiryo"/>
               </a:rPr>
-              <a:t> の増加も遅延量以内に収まる解が，探索の開始前から得られている</a:t>
+              <a:t> をどこまで下げられるか</a:t>
             </a:r>
           </a:p>
         </p:txBody>
@@ -29171,7 +29171,17 @@
                 <a:latin typeface="Meiryo"/>
                 <a:ea typeface="Meiryo"/>
               </a:rPr>
-              <a:t>▪ </a:t>
+              <a:t/>
+            </a:r>
+            <a:r>
+              <a:rPr sz="1500" b="0" i="0">
+                <a:solidFill>
+                  <a:srgbClr val="26303A"/>
+                </a:solidFill>
+                <a:latin typeface="Meiryo"/>
+                <a:ea typeface="Meiryo"/>
+              </a:rPr>
+              <a:t>★ </a:t>
             </a:r>
             <a:r>
               <a:rPr sz="1500" b="0" i="1">
@@ -29201,7 +29211,7 @@
                 <a:latin typeface="Meiryo"/>
                 <a:ea typeface="Meiryo"/>
               </a:rPr>
-              <a:t> の処理順序を保ったまま遅延を吸収した解（right-shift）は，</a:t>
+              <a:t> の処理順序を保って遅延を吸収した解（right-shift）は，</a:t>
             </a:r>
             <a:r>
               <a:rPr sz="1500" b="1" i="0">
@@ -29211,7 +29221,37 @@
                 <a:latin typeface="Meiryo"/>
                 <a:ea typeface="Meiryo"/>
               </a:rPr>
-              <a:t>探索の開始前から得られる</a:t>
+              <a:t>探索せずに得られる</a:t>
+            </a:r>
+            <a:r>
+              <a:rPr sz="1500" b="0" i="0">
+                <a:solidFill>
+                  <a:srgbClr val="26303A"/>
+                </a:solidFill>
+                <a:latin typeface="Meiryo"/>
+                <a:ea typeface="Meiryo"/>
+              </a:rPr>
+              <a:t>．変更量 0 で安定性は最良，</a:t>
+            </a:r>
+            <a:r>
+              <a:rPr sz="1500" b="0" i="1">
+                <a:solidFill>
+                  <a:srgbClr val="26303A"/>
+                </a:solidFill>
+                <a:latin typeface="Meiryo"/>
+                <a:ea typeface="Meiryo"/>
+              </a:rPr>
+              <a:t>MS</a:t>
+            </a:r>
+            <a:r>
+              <a:rPr sz="1500" b="0" i="0">
+                <a:solidFill>
+                  <a:srgbClr val="26303A"/>
+                </a:solidFill>
+                <a:latin typeface="Meiryo"/>
+                <a:ea typeface="Meiryo"/>
+              </a:rPr>
+              <a:t> も外乱前の値＋遅延量を超えない</a:t>
             </a:r>
           </a:p>
           <a:p>
@@ -29220,7 +29260,7 @@
                 <a:spcPct val="108000"/>
               </a:lnSpc>
               <a:spcBef>
-                <a:spcPts val="1000"/>
+                <a:spcPts val="1200"/>
               </a:spcBef>
             </a:pPr>
             <a:r>
@@ -29231,7 +29271,7 @@
                 <a:latin typeface="Meiryo"/>
                 <a:ea typeface="Meiryo"/>
               </a:rPr>
-              <a:t>▪ </a:t>
+              <a:t/>
             </a:r>
             <a:r>
               <a:rPr sz="1500" b="0" i="0">
@@ -29241,7 +29281,27 @@
                 <a:latin typeface="Meiryo"/>
                 <a:ea typeface="Meiryo"/>
               </a:rPr>
-              <a:t>この解は</a:t>
+              <a:t>● 処理順序を変えるほど </a:t>
+            </a:r>
+            <a:r>
+              <a:rPr sz="1500" b="0" i="1">
+                <a:solidFill>
+                  <a:srgbClr val="26303A"/>
+                </a:solidFill>
+                <a:latin typeface="Meiryo"/>
+                <a:ea typeface="Meiryo"/>
+              </a:rPr>
+              <a:t>MS</a:t>
+            </a:r>
+            <a:r>
+              <a:rPr sz="1500" b="0" i="0">
+                <a:solidFill>
+                  <a:srgbClr val="26303A"/>
+                </a:solidFill>
+                <a:latin typeface="Meiryo"/>
+                <a:ea typeface="Meiryo"/>
+              </a:rPr>
+              <a:t> は下げられるが，変更量は増える（</a:t>
             </a:r>
             <a:r>
               <a:rPr sz="1500" b="1" i="0">
@@ -29251,7 +29311,7 @@
                 <a:latin typeface="Meiryo"/>
                 <a:ea typeface="Meiryo"/>
               </a:rPr>
-              <a:t>変更量 0</a:t>
+              <a:t>Pareto フロント</a:t>
             </a:r>
             <a:r>
               <a:rPr sz="1500" b="0" i="0">
@@ -29261,7 +29321,7 @@
                 <a:latin typeface="Meiryo"/>
                 <a:ea typeface="Meiryo"/>
               </a:rPr>
-              <a:t> で安定性では最適．</a:t>
+              <a:t>）．変更コストが無視できない現場で選ばれるのは，</a:t>
             </a:r>
             <a:r>
               <a:rPr sz="1500" b="0" i="1">
@@ -29271,7 +29331,17 @@
                 <a:latin typeface="Meiryo"/>
                 <a:ea typeface="Meiryo"/>
               </a:rPr>
-              <a:t>MS</a:t>
+              <a:t>S</a:t>
+            </a:r>
+            <a:r>
+              <a:rPr sz="1080" b="0" i="1" baseline="-22000">
+                <a:solidFill>
+                  <a:srgbClr val="26303A"/>
+                </a:solidFill>
+                <a:latin typeface="Meiryo"/>
+                <a:ea typeface="Meiryo"/>
+              </a:rPr>
+              <a:t>p</a:t>
             </a:r>
             <a:r>
               <a:rPr sz="1500" b="0" i="0">
@@ -29281,27 +29351,17 @@
                 <a:latin typeface="Meiryo"/>
                 <a:ea typeface="Meiryo"/>
               </a:rPr>
-              <a:t> も，外乱前に最適化した </a:t>
-            </a:r>
-            <a:r>
-              <a:rPr sz="1500" b="0" i="1">
-                <a:solidFill>
-                  <a:srgbClr val="26303A"/>
-                </a:solidFill>
-                <a:latin typeface="Meiryo"/>
-                <a:ea typeface="Meiryo"/>
-              </a:rPr>
-              <a:t>S</a:t>
-            </a:r>
-            <a:r>
-              <a:rPr sz="1080" b="0" i="1" baseline="-22000">
-                <a:solidFill>
-                  <a:srgbClr val="26303A"/>
-                </a:solidFill>
-                <a:latin typeface="Meiryo"/>
-                <a:ea typeface="Meiryo"/>
-              </a:rPr>
-              <a:t>p</a:t>
+              <a:t> の近傍 ＝ </a:t>
+            </a:r>
+            <a:r>
+              <a:rPr sz="1500" b="1" i="0">
+                <a:solidFill>
+                  <a:srgbClr val="16385C"/>
+                </a:solidFill>
+                <a:latin typeface="Meiryo"/>
+                <a:ea typeface="Meiryo"/>
+              </a:rPr>
+              <a:t>高安定領域</a:t>
             </a:r>
             <a:r>
               <a:rPr sz="1500" b="0" i="0">
@@ -29311,97 +29371,7 @@
                 <a:latin typeface="Meiryo"/>
                 <a:ea typeface="Meiryo"/>
               </a:rPr>
-              <a:t> の値から</a:t>
-            </a:r>
-            <a:r>
-              <a:rPr sz="1500" b="1" i="0">
-                <a:solidFill>
-                  <a:srgbClr val="16385C"/>
-                </a:solidFill>
-                <a:latin typeface="Meiryo"/>
-                <a:ea typeface="Meiryo"/>
-              </a:rPr>
-              <a:t>遅延量以内の増加</a:t>
-            </a:r>
-            <a:r>
-              <a:rPr sz="1500" b="0" i="0">
-                <a:solidFill>
-                  <a:srgbClr val="26303A"/>
-                </a:solidFill>
-                <a:latin typeface="Meiryo"/>
-                <a:ea typeface="Meiryo"/>
-              </a:rPr>
-              <a:t>に収まる</a:t>
-            </a:r>
-          </a:p>
-          <a:p>
-            <a:pPr>
-              <a:lnSpc>
-                <a:spcPct val="108000"/>
-              </a:lnSpc>
-              <a:spcBef>
-                <a:spcPts val="1000"/>
-              </a:spcBef>
-            </a:pPr>
-            <a:r>
-              <a:rPr sz="1200" b="1" i="0">
-                <a:solidFill>
-                  <a:srgbClr val="16385C"/>
-                </a:solidFill>
-                <a:latin typeface="Meiryo"/>
-                <a:ea typeface="Meiryo"/>
-              </a:rPr>
-              <a:t>▪ </a:t>
-            </a:r>
-            <a:r>
-              <a:rPr sz="1500" b="0" i="0">
-                <a:solidFill>
-                  <a:srgbClr val="26303A"/>
-                </a:solidFill>
-                <a:latin typeface="Meiryo"/>
-                <a:ea typeface="Meiryo"/>
-              </a:rPr>
-              <a:t>変更コストが無視できない場面で求められるのは，この解から少しの変更で </a:t>
-            </a:r>
-            <a:r>
-              <a:rPr sz="1500" b="0" i="1">
-                <a:solidFill>
-                  <a:srgbClr val="26303A"/>
-                </a:solidFill>
-                <a:latin typeface="Meiryo"/>
-                <a:ea typeface="Meiryo"/>
-              </a:rPr>
-              <a:t>MS</a:t>
-            </a:r>
-            <a:r>
-              <a:rPr sz="1500" b="0" i="0">
-                <a:solidFill>
-                  <a:srgbClr val="26303A"/>
-                </a:solidFill>
-                <a:latin typeface="Meiryo"/>
-                <a:ea typeface="Meiryo"/>
-              </a:rPr>
-              <a:t> をどこまで下げられるか ＝ </a:t>
-            </a:r>
-            <a:r>
-              <a:rPr sz="1500" b="1" i="0">
-                <a:solidFill>
-                  <a:srgbClr val="16385C"/>
-                </a:solidFill>
-                <a:latin typeface="Meiryo"/>
-                <a:ea typeface="Meiryo"/>
-              </a:rPr>
-              <a:t>高安定領域</a:t>
-            </a:r>
-            <a:r>
-              <a:rPr sz="1500" b="0" i="0">
-                <a:solidFill>
-                  <a:srgbClr val="26303A"/>
-                </a:solidFill>
-                <a:latin typeface="Meiryo"/>
-                <a:ea typeface="Meiryo"/>
-              </a:rPr>
-              <a:t>の Pareto フロント</a:t>
+              <a:t>の解</a:t>
             </a:r>
           </a:p>
         </p:txBody>
@@ -29414,7 +29384,7 @@
         </p:nvSpPr>
         <p:spPr>
           <a:xfrm>
-            <a:off x="6281928" y="4160520"/>
+            <a:off x="6281928" y="3886200"/>
             <a:ext cx="5342839" cy="685800"/>
           </a:xfrm>
           <a:prstGeom prst="rect">
@@ -29441,7 +29411,7 @@
                 <a:latin typeface="Meiryo"/>
                 <a:ea typeface="Meiryo"/>
               </a:rPr>
-              <a:t>→ 実用上は，Pareto フロント全体だけでなく，</a:t>
+              <a:t>→ 手法に問われるのは，フロント全体の質に加えて，</a:t>
             </a:r>
           </a:p>
           <a:p>
@@ -29458,17 +29428,7 @@
                 <a:latin typeface="Meiryo"/>
                 <a:ea typeface="Meiryo"/>
               </a:rPr>
-              <a:t>高安定領域のフロントの質</a:t>
-            </a:r>
-            <a:r>
-              <a:rPr sz="1600" b="0" i="0">
-                <a:solidFill>
-                  <a:srgbClr val="26303A"/>
-                </a:solidFill>
-                <a:latin typeface="Meiryo"/>
-                <a:ea typeface="Meiryo"/>
-              </a:rPr>
-              <a:t>が手法の価値を決める</a:t>
+              <a:t>高安定領域にどれだけ良い解を出せるか</a:t>
             </a:r>
           </a:p>
         </p:txBody>
@@ -29481,7 +29441,7 @@
         </p:nvSpPr>
         <p:spPr>
           <a:xfrm>
-            <a:off x="6281928" y="5029200"/>
+            <a:off x="6281928" y="4754880"/>
             <a:ext cx="5342839" cy="640080"/>
           </a:xfrm>
           <a:prstGeom prst="rect">

--- a/doc/presentation_materials/JIMA2026fall_発表.pptx
+++ b/doc/presentation_materials/JIMA2026fall_発表.pptx
@@ -29251,7 +29251,7 @@
                 <a:latin typeface="Meiryo"/>
                 <a:ea typeface="Meiryo"/>
               </a:rPr>
-              <a:t> も外乱前の値＋遅延量を超えない</a:t>
+              <a:t> も外乱前に最適化済み</a:t>
             </a:r>
           </a:p>
           <a:p>
@@ -29281,7 +29281,27 @@
                 <a:latin typeface="Meiryo"/>
                 <a:ea typeface="Meiryo"/>
               </a:rPr>
-              <a:t>● 処理順序を変えるほど </a:t>
+              <a:t>● </a:t>
+            </a:r>
+            <a:r>
+              <a:rPr sz="1500" b="1" i="0">
+                <a:solidFill>
+                  <a:srgbClr val="16385C"/>
+                </a:solidFill>
+                <a:latin typeface="Meiryo"/>
+                <a:ea typeface="Meiryo"/>
+              </a:rPr>
+              <a:t>Pareto フロント</a:t>
+            </a:r>
+            <a:r>
+              <a:rPr sz="1500" b="0" i="0">
+                <a:solidFill>
+                  <a:srgbClr val="26303A"/>
+                </a:solidFill>
+                <a:latin typeface="Meiryo"/>
+                <a:ea typeface="Meiryo"/>
+              </a:rPr>
+              <a:t>上の非劣解のうち，変更コストが無視できない場面で選ばれるのは，</a:t>
             </a:r>
             <a:r>
               <a:rPr sz="1500" b="0" i="1">
@@ -29291,7 +29311,17 @@
                 <a:latin typeface="Meiryo"/>
                 <a:ea typeface="Meiryo"/>
               </a:rPr>
-              <a:t>MS</a:t>
+              <a:t>S</a:t>
+            </a:r>
+            <a:r>
+              <a:rPr sz="1080" b="0" i="1" baseline="-22000">
+                <a:solidFill>
+                  <a:srgbClr val="26303A"/>
+                </a:solidFill>
+                <a:latin typeface="Meiryo"/>
+                <a:ea typeface="Meiryo"/>
+              </a:rPr>
+              <a:t>p</a:t>
             </a:r>
             <a:r>
               <a:rPr sz="1500" b="0" i="0">
@@ -29301,7 +29331,7 @@
                 <a:latin typeface="Meiryo"/>
                 <a:ea typeface="Meiryo"/>
               </a:rPr>
-              <a:t> は下げられるが，変更量は増える（</a:t>
+              <a:t> の近傍（</a:t>
             </a:r>
             <a:r>
               <a:rPr sz="1500" b="1" i="0">
@@ -29311,7 +29341,7 @@
                 <a:latin typeface="Meiryo"/>
                 <a:ea typeface="Meiryo"/>
               </a:rPr>
-              <a:t>Pareto フロント</a:t>
+              <a:t>高安定領域</a:t>
             </a:r>
             <a:r>
               <a:rPr sz="1500" b="0" i="0">
@@ -29321,57 +29351,7 @@
                 <a:latin typeface="Meiryo"/>
                 <a:ea typeface="Meiryo"/>
               </a:rPr>
-              <a:t>）．変更コストが無視できない現場で選ばれるのは，</a:t>
-            </a:r>
-            <a:r>
-              <a:rPr sz="1500" b="0" i="1">
-                <a:solidFill>
-                  <a:srgbClr val="26303A"/>
-                </a:solidFill>
-                <a:latin typeface="Meiryo"/>
-                <a:ea typeface="Meiryo"/>
-              </a:rPr>
-              <a:t>S</a:t>
-            </a:r>
-            <a:r>
-              <a:rPr sz="1080" b="0" i="1" baseline="-22000">
-                <a:solidFill>
-                  <a:srgbClr val="26303A"/>
-                </a:solidFill>
-                <a:latin typeface="Meiryo"/>
-                <a:ea typeface="Meiryo"/>
-              </a:rPr>
-              <a:t>p</a:t>
-            </a:r>
-            <a:r>
-              <a:rPr sz="1500" b="0" i="0">
-                <a:solidFill>
-                  <a:srgbClr val="26303A"/>
-                </a:solidFill>
-                <a:latin typeface="Meiryo"/>
-                <a:ea typeface="Meiryo"/>
-              </a:rPr>
-              <a:t> の近傍 ＝ </a:t>
-            </a:r>
-            <a:r>
-              <a:rPr sz="1500" b="1" i="0">
-                <a:solidFill>
-                  <a:srgbClr val="16385C"/>
-                </a:solidFill>
-                <a:latin typeface="Meiryo"/>
-                <a:ea typeface="Meiryo"/>
-              </a:rPr>
-              <a:t>高安定領域</a:t>
-            </a:r>
-            <a:r>
-              <a:rPr sz="1500" b="0" i="0">
-                <a:solidFill>
-                  <a:srgbClr val="26303A"/>
-                </a:solidFill>
-                <a:latin typeface="Meiryo"/>
-                <a:ea typeface="Meiryo"/>
-              </a:rPr>
-              <a:t>の解</a:t>
+              <a:t>）の解</a:t>
             </a:r>
           </a:p>
         </p:txBody>
@@ -29384,7 +29364,7 @@
         </p:nvSpPr>
         <p:spPr>
           <a:xfrm>
-            <a:off x="6281928" y="3886200"/>
+            <a:off x="6281928" y="3703320"/>
             <a:ext cx="5342839" cy="685800"/>
           </a:xfrm>
           <a:prstGeom prst="rect">
@@ -29404,14 +29384,14 @@
               </a:lnSpc>
             </a:pPr>
             <a:r>
-              <a:rPr sz="1600" b="0" i="0">
-                <a:solidFill>
-                  <a:srgbClr val="26303A"/>
-                </a:solidFill>
-                <a:latin typeface="Meiryo"/>
-                <a:ea typeface="Meiryo"/>
-              </a:rPr>
-              <a:t>→ 手法に問われるのは，フロント全体の質に加えて，</a:t>
+              <a:rPr sz="1550" b="0" i="0">
+                <a:solidFill>
+                  <a:srgbClr val="26303A"/>
+                </a:solidFill>
+                <a:latin typeface="Meiryo"/>
+                <a:ea typeface="Meiryo"/>
+              </a:rPr>
+              <a:t>→ この場合，手法は Pareto フロント全体の品質</a:t>
             </a:r>
           </a:p>
           <a:p>
@@ -29421,14 +29401,34 @@
               </a:lnSpc>
             </a:pPr>
             <a:r>
-              <a:rPr sz="1600" b="1" i="0">
+              <a:rPr sz="1550" b="0" i="0">
+                <a:solidFill>
+                  <a:srgbClr val="26303A"/>
+                </a:solidFill>
+                <a:latin typeface="Meiryo"/>
+                <a:ea typeface="Meiryo"/>
+              </a:rPr>
+              <a:t>だけではなく，</a:t>
+            </a:r>
+            <a:r>
+              <a:rPr sz="1550" b="1" i="0">
                 <a:solidFill>
                   <a:srgbClr val="16385C"/>
                 </a:solidFill>
                 <a:latin typeface="Meiryo"/>
                 <a:ea typeface="Meiryo"/>
               </a:rPr>
-              <a:t>高安定領域にどれだけ良い解を出せるか</a:t>
+              <a:t>高安定領域の品質</a:t>
+            </a:r>
+            <a:r>
+              <a:rPr sz="1550" b="0" i="0">
+                <a:solidFill>
+                  <a:srgbClr val="26303A"/>
+                </a:solidFill>
+                <a:latin typeface="Meiryo"/>
+                <a:ea typeface="Meiryo"/>
+              </a:rPr>
+              <a:t>が問われる</a:t>
             </a:r>
           </a:p>
         </p:txBody>
@@ -29441,7 +29441,7 @@
         </p:nvSpPr>
         <p:spPr>
           <a:xfrm>
-            <a:off x="6281928" y="4754880"/>
+            <a:off x="6281928" y="4572000"/>
             <a:ext cx="5342839" cy="640080"/>
           </a:xfrm>
           <a:prstGeom prst="rect">
@@ -29468,7 +29468,7 @@
                 <a:latin typeface="Meiryo"/>
                 <a:ea typeface="Meiryo"/>
               </a:rPr>
-              <a:t>本研究では，フロントの質を hypervolume（HV）で測り，高安定領域に限った HV を</a:t>
+              <a:t>本研究では，Pareto フロントの品質を hypervolume（HV）で測り，高安定領域に限った HV を</a:t>
             </a:r>
             <a:r>
               <a:rPr sz="1350" b="1" i="0">
@@ -30794,7 +30794,37 @@
                 <a:latin typeface="Meiryo"/>
                 <a:ea typeface="Meiryo"/>
               </a:rPr>
-              <a:t>探索構造の差は検証されておらず，その差を測る形式も，差を補う操作もない</a:t>
+              <a:t>探索構造の差は検証されておらず，その差を測る形式も，解を </a:t>
+            </a:r>
+            <a:r>
+              <a:rPr sz="1500" b="1" i="1">
+                <a:solidFill>
+                  <a:srgbClr val="16385C"/>
+                </a:solidFill>
+                <a:latin typeface="Meiryo"/>
+                <a:ea typeface="Meiryo"/>
+              </a:rPr>
+              <a:t>S</a:t>
+            </a:r>
+            <a:r>
+              <a:rPr sz="1080" b="1" i="1" baseline="-22000">
+                <a:solidFill>
+                  <a:srgbClr val="16385C"/>
+                </a:solidFill>
+                <a:latin typeface="Meiryo"/>
+                <a:ea typeface="Meiryo"/>
+              </a:rPr>
+              <a:t>p</a:t>
+            </a:r>
+            <a:r>
+              <a:rPr sz="1500" b="1" i="0">
+                <a:solidFill>
+                  <a:srgbClr val="16385C"/>
+                </a:solidFill>
+                <a:latin typeface="Meiryo"/>
+                <a:ea typeface="Meiryo"/>
+              </a:rPr>
+              <a:t> に近づける探索操作もない</a:t>
             </a:r>
           </a:p>
         </p:txBody>
@@ -31541,7 +31571,37 @@
                 <a:latin typeface="Meiryo"/>
                 <a:ea typeface="Meiryo"/>
               </a:rPr>
-              <a:t>Pareto フロント全体を保って</a:t>
+              <a:t>解を </a:t>
+            </a:r>
+            <a:r>
+              <a:rPr sz="1600" b="1" i="1">
+                <a:solidFill>
+                  <a:srgbClr val="16385C"/>
+                </a:solidFill>
+                <a:latin typeface="Meiryo"/>
+                <a:ea typeface="Meiryo"/>
+              </a:rPr>
+              <a:t>S</a:t>
+            </a:r>
+            <a:r>
+              <a:rPr sz="1152" b="1" i="1" baseline="-22000">
+                <a:solidFill>
+                  <a:srgbClr val="16385C"/>
+                </a:solidFill>
+                <a:latin typeface="Meiryo"/>
+                <a:ea typeface="Meiryo"/>
+              </a:rPr>
+              <a:t>p</a:t>
+            </a:r>
+            <a:r>
+              <a:rPr sz="1600" b="1" i="0">
+                <a:solidFill>
+                  <a:srgbClr val="16385C"/>
+                </a:solidFill>
+                <a:latin typeface="Meiryo"/>
+                <a:ea typeface="Meiryo"/>
+              </a:rPr>
+              <a:t> に近づける</a:t>
             </a:r>
           </a:p>
           <a:p>
@@ -31558,24 +31618,7 @@
                 <a:latin typeface="Meiryo"/>
                 <a:ea typeface="Meiryo"/>
               </a:rPr>
-              <a:t>高安定領域の解を生む</a:t>
-            </a:r>
-          </a:p>
-          <a:p>
-            <a:pPr algn="l">
-              <a:lnSpc>
-                <a:spcPct val="110000"/>
-              </a:lnSpc>
-            </a:pPr>
-            <a:r>
-              <a:rPr sz="1600" b="1" i="0">
-                <a:solidFill>
-                  <a:srgbClr val="16385C"/>
-                </a:solidFill>
-                <a:latin typeface="Meiryo"/>
-                <a:ea typeface="Meiryo"/>
-              </a:rPr>
-              <a:t>操作がない</a:t>
+              <a:t>探索操作がない</a:t>
             </a:r>
           </a:p>
         </p:txBody>
@@ -31669,7 +31712,37 @@
                 <a:latin typeface="Meiryo"/>
                 <a:ea typeface="Meiryo"/>
               </a:rPr>
-              <a:t>：高安定領域の解を「選ぶ」ことはできるが，「作る」のは交叉や局所探索などの探索演算子のまま</a:t>
+              <a:t>：安定性は解の評価にだけ入る．交叉や局所探索などの探索操作は </a:t>
+            </a:r>
+            <a:r>
+              <a:rPr sz="1400" b="0" i="1">
+                <a:solidFill>
+                  <a:srgbClr val="26303A"/>
+                </a:solidFill>
+                <a:latin typeface="Meiryo"/>
+                <a:ea typeface="Meiryo"/>
+              </a:rPr>
+              <a:t>S</a:t>
+            </a:r>
+            <a:r>
+              <a:rPr sz="1008" b="0" i="1" baseline="-22000">
+                <a:solidFill>
+                  <a:srgbClr val="26303A"/>
+                </a:solidFill>
+                <a:latin typeface="Meiryo"/>
+                <a:ea typeface="Meiryo"/>
+              </a:rPr>
+              <a:t>p</a:t>
+            </a:r>
+            <a:r>
+              <a:rPr sz="1400" b="0" i="0">
+                <a:solidFill>
+                  <a:srgbClr val="26303A"/>
+                </a:solidFill>
+                <a:latin typeface="Meiryo"/>
+                <a:ea typeface="Meiryo"/>
+              </a:rPr>
+              <a:t> を参照しない</a:t>
             </a:r>
           </a:p>
           <a:p>
@@ -31696,27 +31769,7 @@
                 <a:latin typeface="Meiryo"/>
                 <a:ea typeface="Meiryo"/>
               </a:rPr>
-              <a:t>：解を高安定領域に閉じ込めるので，範囲外（変更量が大きく </a:t>
-            </a:r>
-            <a:r>
-              <a:rPr sz="1400" b="0" i="1">
-                <a:solidFill>
-                  <a:srgbClr val="26303A"/>
-                </a:solidFill>
-                <a:latin typeface="Meiryo"/>
-                <a:ea typeface="Meiryo"/>
-              </a:rPr>
-              <a:t>MS</a:t>
-            </a:r>
-            <a:r>
-              <a:rPr sz="1400" b="0" i="0">
-                <a:solidFill>
-                  <a:srgbClr val="26303A"/>
-                </a:solidFill>
-                <a:latin typeface="Meiryo"/>
-                <a:ea typeface="Meiryo"/>
-              </a:rPr>
-              <a:t> が小さい）の Pareto フロントは得られない</a:t>
+              <a:t>：安定性は探索空間の制限にだけ入る．範囲を事前に決めるので，その外にある変更量の大きい解は探索しない</a:t>
             </a:r>
           </a:p>
           <a:p>
@@ -31733,7 +31786,37 @@
                 <a:latin typeface="Meiryo"/>
                 <a:ea typeface="Meiryo"/>
               </a:rPr>
-              <a:t>→ Pareto フロント全体を保ったまま，高安定領域の解を能動的に作る操作は，どちらにもない</a:t>
+              <a:t>→ どちらも，探索の途中で解を </a:t>
+            </a:r>
+            <a:r>
+              <a:rPr sz="1400" b="0" i="1">
+                <a:solidFill>
+                  <a:srgbClr val="26303A"/>
+                </a:solidFill>
+                <a:latin typeface="Meiryo"/>
+                <a:ea typeface="Meiryo"/>
+              </a:rPr>
+              <a:t>S</a:t>
+            </a:r>
+            <a:r>
+              <a:rPr sz="1008" b="0" i="1" baseline="-22000">
+                <a:solidFill>
+                  <a:srgbClr val="26303A"/>
+                </a:solidFill>
+                <a:latin typeface="Meiryo"/>
+                <a:ea typeface="Meiryo"/>
+              </a:rPr>
+              <a:t>p</a:t>
+            </a:r>
+            <a:r>
+              <a:rPr sz="1400" b="0" i="0">
+                <a:solidFill>
+                  <a:srgbClr val="26303A"/>
+                </a:solidFill>
+                <a:latin typeface="Meiryo"/>
+                <a:ea typeface="Meiryo"/>
+              </a:rPr>
+              <a:t> に近づける操作（安定性を探索の移動として扱う操作）を持たない</a:t>
             </a:r>
           </a:p>
         </p:txBody>

--- a/doc/presentation_materials/JIMA2026fall_発表.pptx
+++ b/doc/presentation_materials/JIMA2026fall_発表.pptx
@@ -5894,8 +5894,8 @@
         </p:nvSpPr>
         <p:spPr>
           <a:xfrm>
-            <a:off x="886968" y="2770632"/>
-            <a:ext cx="3566160" cy="475488"/>
+            <a:off x="886968" y="2715768"/>
+            <a:ext cx="3566160" cy="402336"/>
           </a:xfrm>
           <a:prstGeom prst="roundRect">
             <a:avLst>
@@ -5976,105 +5976,8 @@
         </p:nvSpPr>
         <p:spPr>
           <a:xfrm>
-            <a:off x="886968" y="3520440"/>
-            <a:ext cx="3566160" cy="475488"/>
-          </a:xfrm>
-          <a:prstGeom prst="roundRect">
-            <a:avLst>
-              <a:gd name="adj" fmla="val 12000"/>
-            </a:avLst>
-          </a:prstGeom>
-          <a:solidFill>
-            <a:srgbClr val="E06C00"/>
-          </a:solidFill>
-          <a:ln>
-            <a:noFill/>
-          </a:ln>
-          <a:effectLst/>
-        </p:spPr>
-        <p:style>
-          <a:lnRef idx="1">
-            <a:schemeClr val="accent1"/>
-          </a:lnRef>
-          <a:fillRef idx="3">
-            <a:schemeClr val="accent1"/>
-          </a:fillRef>
-          <a:effectRef idx="2">
-            <a:schemeClr val="accent1"/>
-          </a:effectRef>
-          <a:fontRef idx="minor">
-            <a:schemeClr val="lt1"/>
-          </a:fontRef>
-        </p:style>
-        <p:txBody>
-          <a:bodyPr rtlCol="0" anchor="ctr" wrap="square" lIns="54864" rIns="54864" tIns="18288" bIns="18288"/>
-          <a:lstStyle/>
-          <a:p>
-            <a:pPr algn="ctr">
-              <a:lnSpc>
-                <a:spcPct val="100000"/>
-              </a:lnSpc>
-            </a:pPr>
-            <a:r>
-              <a:rPr sz="1250" b="1" i="0">
-                <a:solidFill>
-                  <a:srgbClr val="FFFFFF"/>
-                </a:solidFill>
-                <a:latin typeface="Meiryo"/>
-                <a:ea typeface="Meiryo"/>
-              </a:rPr>
-              <a:t>摂動：数手の insert 移動</a:t>
-            </a:r>
-          </a:p>
-        </p:txBody>
-      </p:sp>
-      <p:cxnSp>
-        <p:nvCxnSpPr>
-          <p:cNvPr id="14" name="Connector 13"/>
-          <p:cNvCxnSpPr/>
-          <p:nvPr/>
-        </p:nvCxnSpPr>
-        <p:spPr>
-          <a:xfrm>
-            <a:off x="2670048" y="3264408"/>
-            <a:ext cx="0" cy="237744"/>
-          </a:xfrm>
-          <a:prstGeom prst="line">
-            <a:avLst/>
-          </a:prstGeom>
-          <a:ln w="17780">
-            <a:solidFill>
-              <a:srgbClr val="6E7A88"/>
-            </a:solidFill>
-            <a:tailEnd type="triangle" w="med" len="med"/>
-          </a:ln>
-          <a:effectLst/>
-        </p:spPr>
-        <p:style>
-          <a:lnRef idx="2">
-            <a:schemeClr val="accent1"/>
-          </a:lnRef>
-          <a:fillRef idx="0">
-            <a:schemeClr val="accent1"/>
-          </a:fillRef>
-          <a:effectRef idx="1">
-            <a:schemeClr val="accent1"/>
-          </a:effectRef>
-          <a:fontRef idx="minor">
-            <a:schemeClr val="tx1"/>
-          </a:fontRef>
-        </p:style>
-      </p:cxnSp>
-      <p:sp>
-        <p:nvSpPr>
-          <p:cNvPr id="15" name="Rounded Rectangle 14"/>
-          <p:cNvSpPr/>
-          <p:nvPr/>
-        </p:nvSpPr>
-        <p:spPr>
-          <a:xfrm>
-            <a:off x="886968" y="4270248"/>
-            <a:ext cx="3566160" cy="475488"/>
+            <a:off x="886968" y="3300984"/>
+            <a:ext cx="3566160" cy="402336"/>
           </a:xfrm>
           <a:prstGeom prst="roundRect">
             <a:avLst>
@@ -6129,14 +6032,14 @@
       </p:sp>
       <p:cxnSp>
         <p:nvCxnSpPr>
-          <p:cNvPr id="16" name="Connector 15"/>
+          <p:cNvPr id="14" name="Connector 13"/>
           <p:cNvCxnSpPr/>
           <p:nvPr/>
         </p:nvCxnSpPr>
         <p:spPr>
           <a:xfrm>
-            <a:off x="2670048" y="4014215"/>
-            <a:ext cx="0" cy="237745"/>
+            <a:off x="2670048" y="3136392"/>
+            <a:ext cx="0" cy="146304"/>
           </a:xfrm>
           <a:prstGeom prst="line">
             <a:avLst/>
@@ -6166,14 +6069,210 @@
       </p:cxnSp>
       <p:sp>
         <p:nvSpPr>
+          <p:cNvPr id="15" name="Rounded Rectangle 14"/>
+          <p:cNvSpPr/>
+          <p:nvPr/>
+        </p:nvSpPr>
+        <p:spPr>
+          <a:xfrm>
+            <a:off x="886968" y="3886200"/>
+            <a:ext cx="3566160" cy="402336"/>
+          </a:xfrm>
+          <a:prstGeom prst="roundRect">
+            <a:avLst>
+              <a:gd name="adj" fmla="val 12000"/>
+            </a:avLst>
+          </a:prstGeom>
+          <a:solidFill>
+            <a:srgbClr val="E06C00"/>
+          </a:solidFill>
+          <a:ln>
+            <a:noFill/>
+          </a:ln>
+          <a:effectLst/>
+        </p:spPr>
+        <p:style>
+          <a:lnRef idx="1">
+            <a:schemeClr val="accent1"/>
+          </a:lnRef>
+          <a:fillRef idx="3">
+            <a:schemeClr val="accent1"/>
+          </a:fillRef>
+          <a:effectRef idx="2">
+            <a:schemeClr val="accent1"/>
+          </a:effectRef>
+          <a:fontRef idx="minor">
+            <a:schemeClr val="lt1"/>
+          </a:fontRef>
+        </p:style>
+        <p:txBody>
+          <a:bodyPr rtlCol="0" anchor="ctr" wrap="square" lIns="54864" rIns="54864" tIns="18288" bIns="18288"/>
+          <a:lstStyle/>
+          <a:p>
+            <a:pPr algn="ctr">
+              <a:lnSpc>
+                <a:spcPct val="100000"/>
+              </a:lnSpc>
+            </a:pPr>
+            <a:r>
+              <a:rPr sz="1250" b="1" i="0">
+                <a:solidFill>
+                  <a:srgbClr val="FFFFFF"/>
+                </a:solidFill>
+                <a:latin typeface="Meiryo"/>
+                <a:ea typeface="Meiryo"/>
+              </a:rPr>
+              <a:t>摂動：数手の insert 移動</a:t>
+            </a:r>
+          </a:p>
+        </p:txBody>
+      </p:sp>
+      <p:cxnSp>
+        <p:nvCxnSpPr>
+          <p:cNvPr id="16" name="Connector 15"/>
+          <p:cNvCxnSpPr/>
+          <p:nvPr/>
+        </p:nvCxnSpPr>
+        <p:spPr>
+          <a:xfrm>
+            <a:off x="2670048" y="3721607"/>
+            <a:ext cx="0" cy="146305"/>
+          </a:xfrm>
+          <a:prstGeom prst="line">
+            <a:avLst/>
+          </a:prstGeom>
+          <a:ln w="17780">
+            <a:solidFill>
+              <a:srgbClr val="6E7A88"/>
+            </a:solidFill>
+            <a:tailEnd type="triangle" w="med" len="med"/>
+          </a:ln>
+          <a:effectLst/>
+        </p:spPr>
+        <p:style>
+          <a:lnRef idx="2">
+            <a:schemeClr val="accent1"/>
+          </a:lnRef>
+          <a:fillRef idx="0">
+            <a:schemeClr val="accent1"/>
+          </a:fillRef>
+          <a:effectRef idx="1">
+            <a:schemeClr val="accent1"/>
+          </a:effectRef>
+          <a:fontRef idx="minor">
+            <a:schemeClr val="tx1"/>
+          </a:fontRef>
+        </p:style>
+      </p:cxnSp>
+      <p:sp>
+        <p:nvSpPr>
           <p:cNvPr id="17" name="Rounded Rectangle 16"/>
           <p:cNvSpPr/>
           <p:nvPr/>
         </p:nvSpPr>
         <p:spPr>
           <a:xfrm>
-            <a:off x="886968" y="5020056"/>
-            <a:ext cx="3566160" cy="475488"/>
+            <a:off x="886968" y="4471416"/>
+            <a:ext cx="3566160" cy="402336"/>
+          </a:xfrm>
+          <a:prstGeom prst="roundRect">
+            <a:avLst>
+              <a:gd name="adj" fmla="val 12000"/>
+            </a:avLst>
+          </a:prstGeom>
+          <a:solidFill>
+            <a:srgbClr val="EDF2F7"/>
+          </a:solidFill>
+          <a:ln w="13970">
+            <a:solidFill>
+              <a:srgbClr val="C9D6E5"/>
+            </a:solidFill>
+          </a:ln>
+          <a:effectLst/>
+        </p:spPr>
+        <p:style>
+          <a:lnRef idx="1">
+            <a:schemeClr val="accent1"/>
+          </a:lnRef>
+          <a:fillRef idx="3">
+            <a:schemeClr val="accent1"/>
+          </a:fillRef>
+          <a:effectRef idx="2">
+            <a:schemeClr val="accent1"/>
+          </a:effectRef>
+          <a:fontRef idx="minor">
+            <a:schemeClr val="lt1"/>
+          </a:fontRef>
+        </p:style>
+        <p:txBody>
+          <a:bodyPr rtlCol="0" anchor="ctr" wrap="square" lIns="54864" rIns="54864" tIns="18288" bIns="18288"/>
+          <a:lstStyle/>
+          <a:p>
+            <a:pPr algn="ctr">
+              <a:lnSpc>
+                <a:spcPct val="100000"/>
+              </a:lnSpc>
+            </a:pPr>
+            <a:r>
+              <a:rPr sz="1250" b="0" i="0">
+                <a:solidFill>
+                  <a:srgbClr val="26303A"/>
+                </a:solidFill>
+                <a:latin typeface="Meiryo"/>
+                <a:ea typeface="Meiryo"/>
+              </a:rPr>
+              <a:t>局所探索：N5 近傍</a:t>
+            </a:r>
+          </a:p>
+        </p:txBody>
+      </p:sp>
+      <p:cxnSp>
+        <p:nvCxnSpPr>
+          <p:cNvPr id="18" name="Connector 17"/>
+          <p:cNvCxnSpPr/>
+          <p:nvPr/>
+        </p:nvCxnSpPr>
+        <p:spPr>
+          <a:xfrm>
+            <a:off x="2670048" y="4306824"/>
+            <a:ext cx="0" cy="146304"/>
+          </a:xfrm>
+          <a:prstGeom prst="line">
+            <a:avLst/>
+          </a:prstGeom>
+          <a:ln w="17780">
+            <a:solidFill>
+              <a:srgbClr val="6E7A88"/>
+            </a:solidFill>
+            <a:tailEnd type="triangle" w="med" len="med"/>
+          </a:ln>
+          <a:effectLst/>
+        </p:spPr>
+        <p:style>
+          <a:lnRef idx="2">
+            <a:schemeClr val="accent1"/>
+          </a:lnRef>
+          <a:fillRef idx="0">
+            <a:schemeClr val="accent1"/>
+          </a:fillRef>
+          <a:effectRef idx="1">
+            <a:schemeClr val="accent1"/>
+          </a:effectRef>
+          <a:fontRef idx="minor">
+            <a:schemeClr val="tx1"/>
+          </a:fontRef>
+        </p:style>
+      </p:cxnSp>
+      <p:sp>
+        <p:nvSpPr>
+          <p:cNvPr id="19" name="Rounded Rectangle 18"/>
+          <p:cNvSpPr/>
+          <p:nvPr/>
+        </p:nvSpPr>
+        <p:spPr>
+          <a:xfrm>
+            <a:off x="886968" y="5056632"/>
+            <a:ext cx="3566160" cy="402336"/>
           </a:xfrm>
           <a:prstGeom prst="roundRect">
             <a:avLst>
@@ -6248,14 +6347,14 @@
       </p:sp>
       <p:cxnSp>
         <p:nvCxnSpPr>
-          <p:cNvPr id="18" name="Connector 17"/>
+          <p:cNvPr id="20" name="Connector 19"/>
           <p:cNvCxnSpPr/>
           <p:nvPr/>
         </p:nvCxnSpPr>
         <p:spPr>
           <a:xfrm>
-            <a:off x="2670048" y="4764024"/>
-            <a:ext cx="0" cy="237744"/>
+            <a:off x="2670048" y="4892040"/>
+            <a:ext cx="0" cy="146304"/>
           </a:xfrm>
           <a:prstGeom prst="line">
             <a:avLst/>
@@ -6265,78 +6364,6 @@
               <a:srgbClr val="6E7A88"/>
             </a:solidFill>
             <a:tailEnd type="triangle" w="med" len="med"/>
-          </a:ln>
-          <a:effectLst/>
-        </p:spPr>
-        <p:style>
-          <a:lnRef idx="2">
-            <a:schemeClr val="accent1"/>
-          </a:lnRef>
-          <a:fillRef idx="0">
-            <a:schemeClr val="accent1"/>
-          </a:fillRef>
-          <a:effectRef idx="1">
-            <a:schemeClr val="accent1"/>
-          </a:effectRef>
-          <a:fontRef idx="minor">
-            <a:schemeClr val="tx1"/>
-          </a:fontRef>
-        </p:style>
-      </p:cxnSp>
-      <p:cxnSp>
-        <p:nvCxnSpPr>
-          <p:cNvPr id="19" name="Connector 18"/>
-          <p:cNvCxnSpPr/>
-          <p:nvPr/>
-        </p:nvCxnSpPr>
-        <p:spPr>
-          <a:xfrm>
-            <a:off x="4471416" y="5257800"/>
-            <a:ext cx="237744" cy="0"/>
-          </a:xfrm>
-          <a:prstGeom prst="line">
-            <a:avLst/>
-          </a:prstGeom>
-          <a:ln w="17780">
-            <a:solidFill>
-              <a:srgbClr val="6E7A88"/>
-            </a:solidFill>
-          </a:ln>
-          <a:effectLst/>
-        </p:spPr>
-        <p:style>
-          <a:lnRef idx="2">
-            <a:schemeClr val="accent1"/>
-          </a:lnRef>
-          <a:fillRef idx="0">
-            <a:schemeClr val="accent1"/>
-          </a:fillRef>
-          <a:effectRef idx="1">
-            <a:schemeClr val="accent1"/>
-          </a:effectRef>
-          <a:fontRef idx="minor">
-            <a:schemeClr val="tx1"/>
-          </a:fontRef>
-        </p:style>
-      </p:cxnSp>
-      <p:cxnSp>
-        <p:nvCxnSpPr>
-          <p:cNvPr id="20" name="Connector 19"/>
-          <p:cNvCxnSpPr/>
-          <p:nvPr/>
-        </p:nvCxnSpPr>
-        <p:spPr>
-          <a:xfrm flipV="1">
-            <a:off x="4709160" y="3758184"/>
-            <a:ext cx="0" cy="1499616"/>
-          </a:xfrm>
-          <a:prstGeom prst="line">
-            <a:avLst/>
-          </a:prstGeom>
-          <a:ln w="17780">
-            <a:solidFill>
-              <a:srgbClr val="6E7A88"/>
-            </a:solidFill>
           </a:ln>
           <a:effectLst/>
         </p:spPr>
@@ -6362,8 +6389,80 @@
           <p:nvPr/>
         </p:nvCxnSpPr>
         <p:spPr>
+          <a:xfrm>
+            <a:off x="4471416" y="5257800"/>
+            <a:ext cx="237744" cy="0"/>
+          </a:xfrm>
+          <a:prstGeom prst="line">
+            <a:avLst/>
+          </a:prstGeom>
+          <a:ln w="17780">
+            <a:solidFill>
+              <a:srgbClr val="6E7A88"/>
+            </a:solidFill>
+          </a:ln>
+          <a:effectLst/>
+        </p:spPr>
+        <p:style>
+          <a:lnRef idx="2">
+            <a:schemeClr val="accent1"/>
+          </a:lnRef>
+          <a:fillRef idx="0">
+            <a:schemeClr val="accent1"/>
+          </a:fillRef>
+          <a:effectRef idx="1">
+            <a:schemeClr val="accent1"/>
+          </a:effectRef>
+          <a:fontRef idx="minor">
+            <a:schemeClr val="tx1"/>
+          </a:fontRef>
+        </p:style>
+      </p:cxnSp>
+      <p:cxnSp>
+        <p:nvCxnSpPr>
+          <p:cNvPr id="22" name="Connector 21"/>
+          <p:cNvCxnSpPr/>
+          <p:nvPr/>
+        </p:nvCxnSpPr>
+        <p:spPr>
+          <a:xfrm flipV="1">
+            <a:off x="4709160" y="4087368"/>
+            <a:ext cx="0" cy="1170432"/>
+          </a:xfrm>
+          <a:prstGeom prst="line">
+            <a:avLst/>
+          </a:prstGeom>
+          <a:ln w="17780">
+            <a:solidFill>
+              <a:srgbClr val="6E7A88"/>
+            </a:solidFill>
+          </a:ln>
+          <a:effectLst/>
+        </p:spPr>
+        <p:style>
+          <a:lnRef idx="2">
+            <a:schemeClr val="accent1"/>
+          </a:lnRef>
+          <a:fillRef idx="0">
+            <a:schemeClr val="accent1"/>
+          </a:fillRef>
+          <a:effectRef idx="1">
+            <a:schemeClr val="accent1"/>
+          </a:effectRef>
+          <a:fontRef idx="minor">
+            <a:schemeClr val="tx1"/>
+          </a:fontRef>
+        </p:style>
+      </p:cxnSp>
+      <p:cxnSp>
+        <p:nvCxnSpPr>
+          <p:cNvPr id="23" name="Connector 22"/>
+          <p:cNvCxnSpPr/>
+          <p:nvPr/>
+        </p:nvCxnSpPr>
+        <p:spPr>
           <a:xfrm flipH="1">
-            <a:off x="4489704" y="3758184"/>
+            <a:off x="4489704" y="4087368"/>
             <a:ext cx="219456" cy="0"/>
           </a:xfrm>
           <a:prstGeom prst="line">
@@ -6394,13 +6493,13 @@
       </p:cxnSp>
       <p:sp>
         <p:nvSpPr>
-          <p:cNvPr id="22" name="TextBox 21"/>
+          <p:cNvPr id="24" name="TextBox 23"/>
           <p:cNvSpPr txBox="1"/>
           <p:nvPr/>
         </p:nvSpPr>
         <p:spPr>
           <a:xfrm>
-            <a:off x="4782312" y="4325112"/>
+            <a:off x="4782312" y="4489703"/>
             <a:ext cx="1188720" cy="365760"/>
           </a:xfrm>
           <a:prstGeom prst="rect">
@@ -6434,7 +6533,7 @@
       </p:sp>
       <p:sp>
         <p:nvSpPr>
-          <p:cNvPr id="23" name="Rounded Rectangle 22"/>
+          <p:cNvPr id="25" name="Rounded Rectangle 24"/>
           <p:cNvSpPr/>
           <p:nvPr/>
         </p:nvSpPr>
@@ -6482,7 +6581,7 @@
       </p:sp>
       <p:sp>
         <p:nvSpPr>
-          <p:cNvPr id="24" name="Rectangle 23"/>
+          <p:cNvPr id="26" name="Rectangle 25"/>
           <p:cNvSpPr/>
           <p:nvPr/>
         </p:nvSpPr>
@@ -6526,7 +6625,7 @@
       </p:sp>
       <p:sp>
         <p:nvSpPr>
-          <p:cNvPr id="25" name="TextBox 24"/>
+          <p:cNvPr id="27" name="TextBox 26"/>
           <p:cNvSpPr txBox="1"/>
           <p:nvPr/>
         </p:nvSpPr>
@@ -6571,7 +6670,7 @@
       </p:sp>
       <p:sp>
         <p:nvSpPr>
-          <p:cNvPr id="26" name="TextBox 25"/>
+          <p:cNvPr id="28" name="TextBox 27"/>
           <p:cNvSpPr txBox="1"/>
           <p:nvPr/>
         </p:nvSpPr>
@@ -6616,14 +6715,14 @@
       </p:sp>
       <p:sp>
         <p:nvSpPr>
-          <p:cNvPr id="27" name="Rounded Rectangle 26"/>
+          <p:cNvPr id="29" name="Rounded Rectangle 28"/>
           <p:cNvSpPr/>
           <p:nvPr/>
         </p:nvSpPr>
         <p:spPr>
           <a:xfrm>
-            <a:off x="6598767" y="2770632"/>
-            <a:ext cx="3566160" cy="475488"/>
+            <a:off x="6598767" y="2715768"/>
+            <a:ext cx="3566160" cy="402336"/>
           </a:xfrm>
           <a:prstGeom prst="roundRect">
             <a:avLst>
@@ -6708,14 +6807,14 @@
       </p:sp>
       <p:sp>
         <p:nvSpPr>
-          <p:cNvPr id="28" name="Rounded Rectangle 27"/>
+          <p:cNvPr id="30" name="Rounded Rectangle 29"/>
           <p:cNvSpPr/>
           <p:nvPr/>
         </p:nvSpPr>
         <p:spPr>
           <a:xfrm>
-            <a:off x="6598767" y="3520440"/>
-            <a:ext cx="3566160" cy="475488"/>
+            <a:off x="6598767" y="3392424"/>
+            <a:ext cx="3566160" cy="402336"/>
           </a:xfrm>
           <a:prstGeom prst="roundRect">
             <a:avLst>
@@ -6768,13 +6867,13 @@
       </p:sp>
       <p:cxnSp>
         <p:nvCxnSpPr>
-          <p:cNvPr id="29" name="Connector 28"/>
+          <p:cNvPr id="31" name="Connector 30"/>
           <p:cNvCxnSpPr/>
           <p:nvPr/>
         </p:nvCxnSpPr>
         <p:spPr>
           <a:xfrm>
-            <a:off x="8381847" y="3264408"/>
+            <a:off x="8381847" y="3136392"/>
             <a:ext cx="0" cy="237744"/>
           </a:xfrm>
           <a:prstGeom prst="line">
@@ -6805,14 +6904,14 @@
       </p:cxnSp>
       <p:sp>
         <p:nvSpPr>
-          <p:cNvPr id="30" name="Rounded Rectangle 29"/>
+          <p:cNvPr id="32" name="Rounded Rectangle 31"/>
           <p:cNvSpPr/>
           <p:nvPr/>
         </p:nvSpPr>
         <p:spPr>
           <a:xfrm>
-            <a:off x="6598767" y="4270248"/>
-            <a:ext cx="3566160" cy="475488"/>
+            <a:off x="6598767" y="4069080"/>
+            <a:ext cx="3566160" cy="402336"/>
           </a:xfrm>
           <a:prstGeom prst="roundRect">
             <a:avLst>
@@ -6867,14 +6966,14 @@
       </p:sp>
       <p:cxnSp>
         <p:nvCxnSpPr>
-          <p:cNvPr id="31" name="Connector 30"/>
+          <p:cNvPr id="33" name="Connector 32"/>
           <p:cNvCxnSpPr/>
           <p:nvPr/>
         </p:nvCxnSpPr>
         <p:spPr>
           <a:xfrm>
-            <a:off x="8381847" y="4014215"/>
-            <a:ext cx="0" cy="237745"/>
+            <a:off x="8381847" y="3813048"/>
+            <a:ext cx="0" cy="237744"/>
           </a:xfrm>
           <a:prstGeom prst="line">
             <a:avLst/>
@@ -6904,14 +7003,14 @@
       </p:cxnSp>
       <p:sp>
         <p:nvSpPr>
-          <p:cNvPr id="32" name="Rounded Rectangle 31"/>
+          <p:cNvPr id="34" name="Rounded Rectangle 33"/>
           <p:cNvSpPr/>
           <p:nvPr/>
         </p:nvSpPr>
         <p:spPr>
           <a:xfrm>
-            <a:off x="6598767" y="5020056"/>
-            <a:ext cx="3566160" cy="475488"/>
+            <a:off x="6598767" y="4745736"/>
+            <a:ext cx="3566160" cy="402336"/>
           </a:xfrm>
           <a:prstGeom prst="roundRect">
             <a:avLst>
@@ -6966,14 +7065,14 @@
       </p:sp>
       <p:cxnSp>
         <p:nvCxnSpPr>
-          <p:cNvPr id="33" name="Connector 32"/>
+          <p:cNvPr id="35" name="Connector 34"/>
           <p:cNvCxnSpPr/>
           <p:nvPr/>
         </p:nvCxnSpPr>
         <p:spPr>
           <a:xfrm>
-            <a:off x="8381847" y="4764024"/>
-            <a:ext cx="0" cy="237744"/>
+            <a:off x="8381847" y="4489703"/>
+            <a:ext cx="0" cy="237745"/>
           </a:xfrm>
           <a:prstGeom prst="line">
             <a:avLst/>
@@ -6983,78 +7082,6 @@
               <a:srgbClr val="6E7A88"/>
             </a:solidFill>
             <a:tailEnd type="triangle" w="med" len="med"/>
-          </a:ln>
-          <a:effectLst/>
-        </p:spPr>
-        <p:style>
-          <a:lnRef idx="2">
-            <a:schemeClr val="accent1"/>
-          </a:lnRef>
-          <a:fillRef idx="0">
-            <a:schemeClr val="accent1"/>
-          </a:fillRef>
-          <a:effectRef idx="1">
-            <a:schemeClr val="accent1"/>
-          </a:effectRef>
-          <a:fontRef idx="minor">
-            <a:schemeClr val="tx1"/>
-          </a:fontRef>
-        </p:style>
-      </p:cxnSp>
-      <p:cxnSp>
-        <p:nvCxnSpPr>
-          <p:cNvPr id="34" name="Connector 33"/>
-          <p:cNvCxnSpPr/>
-          <p:nvPr/>
-        </p:nvCxnSpPr>
-        <p:spPr>
-          <a:xfrm>
-            <a:off x="10183215" y="5257800"/>
-            <a:ext cx="237744" cy="0"/>
-          </a:xfrm>
-          <a:prstGeom prst="line">
-            <a:avLst/>
-          </a:prstGeom>
-          <a:ln w="17780">
-            <a:solidFill>
-              <a:srgbClr val="6E7A88"/>
-            </a:solidFill>
-          </a:ln>
-          <a:effectLst/>
-        </p:spPr>
-        <p:style>
-          <a:lnRef idx="2">
-            <a:schemeClr val="accent1"/>
-          </a:lnRef>
-          <a:fillRef idx="0">
-            <a:schemeClr val="accent1"/>
-          </a:fillRef>
-          <a:effectRef idx="1">
-            <a:schemeClr val="accent1"/>
-          </a:effectRef>
-          <a:fontRef idx="minor">
-            <a:schemeClr val="tx1"/>
-          </a:fontRef>
-        </p:style>
-      </p:cxnSp>
-      <p:cxnSp>
-        <p:nvCxnSpPr>
-          <p:cNvPr id="35" name="Connector 34"/>
-          <p:cNvCxnSpPr/>
-          <p:nvPr/>
-        </p:nvCxnSpPr>
-        <p:spPr>
-          <a:xfrm flipV="1">
-            <a:off x="10420959" y="3758184"/>
-            <a:ext cx="0" cy="1499616"/>
-          </a:xfrm>
-          <a:prstGeom prst="line">
-            <a:avLst/>
-          </a:prstGeom>
-          <a:ln w="17780">
-            <a:solidFill>
-              <a:srgbClr val="6E7A88"/>
-            </a:solidFill>
           </a:ln>
           <a:effectLst/>
         </p:spPr>
@@ -7080,8 +7107,80 @@
           <p:nvPr/>
         </p:nvCxnSpPr>
         <p:spPr>
+          <a:xfrm>
+            <a:off x="10183215" y="4946903"/>
+            <a:ext cx="237744" cy="0"/>
+          </a:xfrm>
+          <a:prstGeom prst="line">
+            <a:avLst/>
+          </a:prstGeom>
+          <a:ln w="17780">
+            <a:solidFill>
+              <a:srgbClr val="6E7A88"/>
+            </a:solidFill>
+          </a:ln>
+          <a:effectLst/>
+        </p:spPr>
+        <p:style>
+          <a:lnRef idx="2">
+            <a:schemeClr val="accent1"/>
+          </a:lnRef>
+          <a:fillRef idx="0">
+            <a:schemeClr val="accent1"/>
+          </a:fillRef>
+          <a:effectRef idx="1">
+            <a:schemeClr val="accent1"/>
+          </a:effectRef>
+          <a:fontRef idx="minor">
+            <a:schemeClr val="tx1"/>
+          </a:fontRef>
+        </p:style>
+      </p:cxnSp>
+      <p:cxnSp>
+        <p:nvCxnSpPr>
+          <p:cNvPr id="37" name="Connector 36"/>
+          <p:cNvCxnSpPr/>
+          <p:nvPr/>
+        </p:nvCxnSpPr>
+        <p:spPr>
+          <a:xfrm flipV="1">
+            <a:off x="10420959" y="3593592"/>
+            <a:ext cx="0" cy="1353311"/>
+          </a:xfrm>
+          <a:prstGeom prst="line">
+            <a:avLst/>
+          </a:prstGeom>
+          <a:ln w="17780">
+            <a:solidFill>
+              <a:srgbClr val="6E7A88"/>
+            </a:solidFill>
+          </a:ln>
+          <a:effectLst/>
+        </p:spPr>
+        <p:style>
+          <a:lnRef idx="2">
+            <a:schemeClr val="accent1"/>
+          </a:lnRef>
+          <a:fillRef idx="0">
+            <a:schemeClr val="accent1"/>
+          </a:fillRef>
+          <a:effectRef idx="1">
+            <a:schemeClr val="accent1"/>
+          </a:effectRef>
+          <a:fontRef idx="minor">
+            <a:schemeClr val="tx1"/>
+          </a:fontRef>
+        </p:style>
+      </p:cxnSp>
+      <p:cxnSp>
+        <p:nvCxnSpPr>
+          <p:cNvPr id="38" name="Connector 37"/>
+          <p:cNvCxnSpPr/>
+          <p:nvPr/>
+        </p:nvCxnSpPr>
+        <p:spPr>
           <a:xfrm flipH="1">
-            <a:off x="10201503" y="3758184"/>
+            <a:off x="10201503" y="3593592"/>
             <a:ext cx="219456" cy="0"/>
           </a:xfrm>
           <a:prstGeom prst="line">
@@ -7112,13 +7211,13 @@
       </p:cxnSp>
       <p:sp>
         <p:nvSpPr>
-          <p:cNvPr id="37" name="TextBox 36"/>
+          <p:cNvPr id="39" name="TextBox 38"/>
           <p:cNvSpPr txBox="1"/>
           <p:nvPr/>
         </p:nvSpPr>
         <p:spPr>
           <a:xfrm>
-            <a:off x="10494111" y="4325112"/>
+            <a:off x="10494111" y="4087368"/>
             <a:ext cx="1188720" cy="365760"/>
           </a:xfrm>
           <a:prstGeom prst="rect">
@@ -7152,7 +7251,7 @@
       </p:sp>
       <p:sp>
         <p:nvSpPr>
-          <p:cNvPr id="38" name="Rounded Rectangle 37"/>
+          <p:cNvPr id="40" name="Rounded Rectangle 39"/>
           <p:cNvSpPr/>
           <p:nvPr/>
         </p:nvSpPr>
@@ -7308,7 +7407,7 @@
                 <a:latin typeface="Meiryo"/>
                 <a:ea typeface="Meiryo"/>
               </a:rPr>
-              <a:t>安定性誘導演算子：PR と PR-</a:t>
+              <a:t>提案：安定性誘導演算子 — </a:t>
             </a:r>
             <a:r>
               <a:rPr sz="2450" b="1" i="1">
@@ -7318,7 +7417,27 @@
                 <a:latin typeface="Meiryo"/>
                 <a:ea typeface="Meiryo"/>
               </a:rPr>
-              <a:t>k</a:t>
+              <a:t>S</a:t>
+            </a:r>
+            <a:r>
+              <a:rPr sz="1764" b="1" i="1" baseline="-22000">
+                <a:solidFill>
+                  <a:srgbClr val="16385C"/>
+                </a:solidFill>
+                <a:latin typeface="Meiryo"/>
+                <a:ea typeface="Meiryo"/>
+              </a:rPr>
+              <a:t>p</a:t>
+            </a:r>
+            <a:r>
+              <a:rPr sz="2450" b="1" i="0">
+                <a:solidFill>
+                  <a:srgbClr val="16385C"/>
+                </a:solidFill>
+                <a:latin typeface="Meiryo"/>
+                <a:ea typeface="Meiryo"/>
+              </a:rPr>
+              <a:t> を誘導解とする path relinking</a:t>
             </a:r>
           </a:p>
         </p:txBody>
@@ -7438,7 +7557,7 @@
                 <a:latin typeface="Meiryo"/>
                 <a:ea typeface="Meiryo"/>
               </a:rPr>
-              <a:t>path relinking（PR）の誘導解を </a:t>
+              <a:t>提案は PR の誘導解を </a:t>
             </a:r>
             <a:r>
               <a:rPr sz="1500" b="1" i="1">
@@ -7468,7 +7587,7 @@
                 <a:latin typeface="Meiryo"/>
                 <a:ea typeface="Meiryo"/>
               </a:rPr>
-              <a:t> に固定し，現在解から </a:t>
+              <a:t> に固定すること．解を </a:t>
             </a:r>
             <a:r>
               <a:rPr sz="1500" b="1" i="1">
@@ -7498,7 +7617,7 @@
                 <a:latin typeface="Meiryo"/>
                 <a:ea typeface="Meiryo"/>
               </a:rPr>
-              <a:t> へ swap 移動でたどる</a:t>
+              <a:t> に近づける操作になり，両構造に同じ形で組み込める</a:t>
             </a:r>
           </a:p>
         </p:txBody>
@@ -9344,7 +9463,7 @@
         <p:spPr>
           <a:xfrm>
             <a:off x="566928" y="1691640"/>
-            <a:ext cx="5342839" cy="1481328"/>
+            <a:ext cx="5342839" cy="3108960"/>
           </a:xfrm>
           <a:prstGeom prst="roundRect">
             <a:avLst>
@@ -9391,8 +9510,457 @@
         </p:nvSpPr>
         <p:spPr>
           <a:xfrm>
-            <a:off x="749808" y="1874520"/>
-            <a:ext cx="960120" cy="384048"/>
+            <a:off x="4858207" y="1517904"/>
+            <a:ext cx="868680" cy="347472"/>
+          </a:xfrm>
+          <a:prstGeom prst="roundRect">
+            <a:avLst>
+              <a:gd name="adj" fmla="val 40000"/>
+            </a:avLst>
+          </a:prstGeom>
+          <a:solidFill>
+            <a:srgbClr val="3E618C"/>
+          </a:solidFill>
+          <a:ln>
+            <a:noFill/>
+          </a:ln>
+          <a:effectLst/>
+        </p:spPr>
+        <p:style>
+          <a:lnRef idx="1">
+            <a:schemeClr val="accent1"/>
+          </a:lnRef>
+          <a:fillRef idx="3">
+            <a:schemeClr val="accent1"/>
+          </a:fillRef>
+          <a:effectRef idx="2">
+            <a:schemeClr val="accent1"/>
+          </a:effectRef>
+          <a:fontRef idx="minor">
+            <a:schemeClr val="lt1"/>
+          </a:fontRef>
+        </p:style>
+        <p:txBody>
+          <a:bodyPr rtlCol="0" anchor="ctr" wrap="square" lIns="54864" rIns="54864" tIns="18288" bIns="18288"/>
+          <a:lstStyle/>
+          <a:p>
+            <a:pPr algn="ctr">
+              <a:lnSpc>
+                <a:spcPct val="100000"/>
+              </a:lnSpc>
+            </a:pPr>
+            <a:r>
+              <a:rPr sz="1250" b="1" i="0">
+                <a:solidFill>
+                  <a:srgbClr val="FFFFFF"/>
+                </a:solidFill>
+                <a:latin typeface="Meiryo"/>
+                <a:ea typeface="Meiryo"/>
+              </a:rPr>
+              <a:t>提案</a:t>
+            </a:r>
+          </a:p>
+        </p:txBody>
+      </p:sp>
+      <p:sp>
+        <p:nvSpPr>
+          <p:cNvPr id="40" name="TextBox 39"/>
+          <p:cNvSpPr txBox="1"/>
+          <p:nvPr/>
+        </p:nvSpPr>
+        <p:spPr>
+          <a:xfrm>
+            <a:off x="768096" y="1801368"/>
+            <a:ext cx="3971239" cy="384048"/>
+          </a:xfrm>
+          <a:prstGeom prst="rect">
+            <a:avLst/>
+          </a:prstGeom>
+          <a:noFill/>
+        </p:spPr>
+        <p:txBody>
+          <a:bodyPr wrap="square" anchor="ctr" lIns="18288" rIns="18288" tIns="9144" bIns="9144">
+            <a:spAutoFit/>
+          </a:bodyPr>
+          <a:lstStyle/>
+          <a:p>
+            <a:pPr algn="l">
+              <a:lnSpc>
+                <a:spcPct val="105000"/>
+              </a:lnSpc>
+            </a:pPr>
+            <a:r>
+              <a:rPr sz="1500" b="1" i="0">
+                <a:solidFill>
+                  <a:srgbClr val="16385C"/>
+                </a:solidFill>
+                <a:latin typeface="Meiryo"/>
+                <a:ea typeface="Meiryo"/>
+              </a:rPr>
+              <a:t>通常の path relinking との違い</a:t>
+            </a:r>
+          </a:p>
+        </p:txBody>
+      </p:sp>
+      <p:graphicFrame>
+        <p:nvGraphicFramePr>
+          <p:cNvPr id="41" name="Table 40"/>
+          <p:cNvGraphicFramePr>
+            <a:graphicFrameLocks noGrp="1"/>
+          </p:cNvGraphicFramePr>
+          <p:nvPr/>
+        </p:nvGraphicFramePr>
+        <p:xfrm>
+          <a:off x="768096" y="2258568"/>
+          <a:ext cx="4940502" cy="1261872"/>
+        </p:xfrm>
+        <a:graphic>
+          <a:graphicData uri="http://schemas.openxmlformats.org/drawingml/2006/table">
+            <a:tbl>
+              <a:tblPr firstRow="0" bandRow="0">
+                <a:tableStyleId>{5940675A-B579-460E-94D1-54222C63F5DA}</a:tableStyleId>
+              </a:tblPr>
+              <a:tblGrid>
+                <a:gridCol w="617562"/>
+                <a:gridCol w="1543907"/>
+                <a:gridCol w="2779033"/>
+              </a:tblGrid>
+              <a:tr h="420624">
+                <a:tc>
+                  <a:txBody>
+                    <a:bodyPr wrap="square"/>
+                    <a:lstStyle/>
+                    <a:p>
+                      <a:pPr algn="l"/>
+                    </a:p>
+                  </a:txBody>
+                  <a:tcPr marL="82296" marR="54864" marT="18288" marB="18288" anchor="ctr">
+                    <a:solidFill>
+                      <a:srgbClr val="16385C"/>
+                    </a:solidFill>
+                  </a:tcPr>
+                </a:tc>
+                <a:tc>
+                  <a:txBody>
+                    <a:bodyPr wrap="square"/>
+                    <a:lstStyle/>
+                    <a:p>
+                      <a:pPr algn="ctr"/>
+                      <a:r>
+                        <a:rPr sz="1150" b="1" i="0">
+                          <a:solidFill>
+                            <a:srgbClr val="FFFFFF"/>
+                          </a:solidFill>
+                          <a:latin typeface="Meiryo"/>
+                          <a:ea typeface="Meiryo"/>
+                        </a:rPr>
+                        <a:t>通常の PR</a:t>
+                      </a:r>
+                    </a:p>
+                  </a:txBody>
+                  <a:tcPr marL="82296" marR="54864" marT="18288" marB="18288" anchor="ctr">
+                    <a:solidFill>
+                      <a:srgbClr val="16385C"/>
+                    </a:solidFill>
+                  </a:tcPr>
+                </a:tc>
+                <a:tc>
+                  <a:txBody>
+                    <a:bodyPr wrap="square"/>
+                    <a:lstStyle/>
+                    <a:p>
+                      <a:pPr algn="ctr"/>
+                      <a:r>
+                        <a:rPr sz="1150" b="1" i="0">
+                          <a:solidFill>
+                            <a:srgbClr val="FFFFFF"/>
+                          </a:solidFill>
+                          <a:latin typeface="Meiryo"/>
+                          <a:ea typeface="Meiryo"/>
+                        </a:rPr>
+                        <a:t>本研究（安定性誘導演算子）</a:t>
+                      </a:r>
+                    </a:p>
+                  </a:txBody>
+                  <a:tcPr marL="82296" marR="54864" marT="18288" marB="18288" anchor="ctr">
+                    <a:solidFill>
+                      <a:srgbClr val="16385C"/>
+                    </a:solidFill>
+                  </a:tcPr>
+                </a:tc>
+              </a:tr>
+              <a:tr h="420624">
+                <a:tc>
+                  <a:txBody>
+                    <a:bodyPr wrap="square"/>
+                    <a:lstStyle/>
+                    <a:p>
+                      <a:pPr algn="l"/>
+                      <a:r>
+                        <a:rPr sz="1150" b="0" i="0">
+                          <a:solidFill>
+                            <a:srgbClr val="26303A"/>
+                          </a:solidFill>
+                          <a:latin typeface="Meiryo"/>
+                          <a:ea typeface="Meiryo"/>
+                        </a:rPr>
+                        <a:t>誘導解</a:t>
+                      </a:r>
+                    </a:p>
+                  </a:txBody>
+                  <a:tcPr marL="82296" marR="54864" marT="18288" marB="18288" anchor="ctr">
+                    <a:solidFill>
+                      <a:srgbClr val="FFFFFF"/>
+                    </a:solidFill>
+                    <a:lnB w="9525" cap="flat">
+                      <a:solidFill>
+                        <a:srgbClr val="D6DEE7"/>
+                      </a:solidFill>
+                    </a:lnB>
+                  </a:tcPr>
+                </a:tc>
+                <a:tc>
+                  <a:txBody>
+                    <a:bodyPr wrap="square"/>
+                    <a:lstStyle/>
+                    <a:p>
+                      <a:pPr algn="ctr"/>
+                      <a:r>
+                        <a:rPr sz="1150" b="0" i="0">
+                          <a:solidFill>
+                            <a:srgbClr val="26303A"/>
+                          </a:solidFill>
+                          <a:latin typeface="Meiryo"/>
+                          <a:ea typeface="Meiryo"/>
+                        </a:rPr>
+                        <a:t>探索中の別の良い解</a:t>
+                      </a:r>
+                    </a:p>
+                  </a:txBody>
+                  <a:tcPr marL="82296" marR="54864" marT="18288" marB="18288" anchor="ctr">
+                    <a:solidFill>
+                      <a:srgbClr val="FFFFFF"/>
+                    </a:solidFill>
+                    <a:lnB w="9525" cap="flat">
+                      <a:solidFill>
+                        <a:srgbClr val="D6DEE7"/>
+                      </a:solidFill>
+                    </a:lnB>
+                  </a:tcPr>
+                </a:tc>
+                <a:tc>
+                  <a:txBody>
+                    <a:bodyPr wrap="square"/>
+                    <a:lstStyle/>
+                    <a:p>
+                      <a:pPr algn="ctr"/>
+                      <a:r>
+                        <a:rPr sz="1150" b="0" i="0">
+                          <a:solidFill>
+                            <a:srgbClr val="26303A"/>
+                          </a:solidFill>
+                          <a:latin typeface="Meiryo"/>
+                          <a:ea typeface="Meiryo"/>
+                        </a:rPr>
+                        <a:t>外乱前のスケジュール </a:t>
+                      </a:r>
+                      <a:r>
+                        <a:rPr sz="1150" b="0" i="1">
+                          <a:solidFill>
+                            <a:srgbClr val="26303A"/>
+                          </a:solidFill>
+                          <a:latin typeface="Meiryo"/>
+                          <a:ea typeface="Meiryo"/>
+                        </a:rPr>
+                        <a:t>S</a:t>
+                      </a:r>
+                      <a:r>
+                        <a:rPr sz="827" b="0" i="1" baseline="-22000">
+                          <a:solidFill>
+                            <a:srgbClr val="26303A"/>
+                          </a:solidFill>
+                          <a:latin typeface="Meiryo"/>
+                          <a:ea typeface="Meiryo"/>
+                        </a:rPr>
+                        <a:t>p</a:t>
+                      </a:r>
+                      <a:r>
+                        <a:rPr sz="1150" b="0" i="0">
+                          <a:solidFill>
+                            <a:srgbClr val="26303A"/>
+                          </a:solidFill>
+                          <a:latin typeface="Meiryo"/>
+                          <a:ea typeface="Meiryo"/>
+                        </a:rPr>
+                        <a:t> に</a:t>
+                      </a:r>
+                      <a:r>
+                        <a:rPr sz="1150" b="1" i="0">
+                          <a:solidFill>
+                            <a:srgbClr val="16385C"/>
+                          </a:solidFill>
+                          <a:latin typeface="Meiryo"/>
+                          <a:ea typeface="Meiryo"/>
+                        </a:rPr>
+                        <a:t>固定</a:t>
+                      </a:r>
+                    </a:p>
+                  </a:txBody>
+                  <a:tcPr marL="82296" marR="54864" marT="18288" marB="18288" anchor="ctr">
+                    <a:solidFill>
+                      <a:srgbClr val="FFFFFF"/>
+                    </a:solidFill>
+                    <a:lnB w="9525" cap="flat">
+                      <a:solidFill>
+                        <a:srgbClr val="D6DEE7"/>
+                      </a:solidFill>
+                    </a:lnB>
+                  </a:tcPr>
+                </a:tc>
+              </a:tr>
+              <a:tr h="420624">
+                <a:tc>
+                  <a:txBody>
+                    <a:bodyPr wrap="square"/>
+                    <a:lstStyle/>
+                    <a:p>
+                      <a:pPr algn="l"/>
+                      <a:r>
+                        <a:rPr sz="1150" b="0" i="0">
+                          <a:solidFill>
+                            <a:srgbClr val="26303A"/>
+                          </a:solidFill>
+                          <a:latin typeface="Meiryo"/>
+                          <a:ea typeface="Meiryo"/>
+                        </a:rPr>
+                        <a:t>ねらい</a:t>
+                      </a:r>
+                    </a:p>
+                  </a:txBody>
+                  <a:tcPr marL="82296" marR="54864" marT="18288" marB="18288" anchor="ctr">
+                    <a:solidFill>
+                      <a:srgbClr val="F6F9FB"/>
+                    </a:solidFill>
+                    <a:lnB w="9525" cap="flat">
+                      <a:solidFill>
+                        <a:srgbClr val="D6DEE7"/>
+                      </a:solidFill>
+                    </a:lnB>
+                  </a:tcPr>
+                </a:tc>
+                <a:tc>
+                  <a:txBody>
+                    <a:bodyPr wrap="square"/>
+                    <a:lstStyle/>
+                    <a:p>
+                      <a:pPr algn="ctr"/>
+                      <a:r>
+                        <a:rPr sz="1150" b="0" i="0">
+                          <a:solidFill>
+                            <a:srgbClr val="26303A"/>
+                          </a:solidFill>
+                          <a:latin typeface="Meiryo"/>
+                          <a:ea typeface="Meiryo"/>
+                        </a:rPr>
+                        <a:t>良い解の間を探索</a:t>
+                      </a:r>
+                    </a:p>
+                  </a:txBody>
+                  <a:tcPr marL="82296" marR="54864" marT="18288" marB="18288" anchor="ctr">
+                    <a:solidFill>
+                      <a:srgbClr val="F6F9FB"/>
+                    </a:solidFill>
+                    <a:lnB w="9525" cap="flat">
+                      <a:solidFill>
+                        <a:srgbClr val="D6DEE7"/>
+                      </a:solidFill>
+                    </a:lnB>
+                  </a:tcPr>
+                </a:tc>
+                <a:tc>
+                  <a:txBody>
+                    <a:bodyPr wrap="square"/>
+                    <a:lstStyle/>
+                    <a:p>
+                      <a:pPr algn="ctr"/>
+                      <a:r>
+                        <a:rPr sz="1150" b="0" i="1">
+                          <a:solidFill>
+                            <a:srgbClr val="26303A"/>
+                          </a:solidFill>
+                          <a:latin typeface="Meiryo"/>
+                          <a:ea typeface="Meiryo"/>
+                        </a:rPr>
+                        <a:t>S</a:t>
+                      </a:r>
+                      <a:r>
+                        <a:rPr sz="827" b="0" i="1" baseline="-22000">
+                          <a:solidFill>
+                            <a:srgbClr val="26303A"/>
+                          </a:solidFill>
+                          <a:latin typeface="Meiryo"/>
+                          <a:ea typeface="Meiryo"/>
+                        </a:rPr>
+                        <a:t>p</a:t>
+                      </a:r>
+                      <a:r>
+                        <a:rPr sz="1150" b="0" i="0">
+                          <a:solidFill>
+                            <a:srgbClr val="26303A"/>
+                          </a:solidFill>
+                          <a:latin typeface="Meiryo"/>
+                          <a:ea typeface="Meiryo"/>
+                        </a:rPr>
+                        <a:t> に近づけて</a:t>
+                      </a:r>
+                      <a:r>
+                        <a:rPr sz="1150" b="1" i="0">
+                          <a:solidFill>
+                            <a:srgbClr val="16385C"/>
+                          </a:solidFill>
+                          <a:latin typeface="Meiryo"/>
+                          <a:ea typeface="Meiryo"/>
+                        </a:rPr>
+                        <a:t>変更量の小さい解</a:t>
+                      </a:r>
+                      <a:r>
+                        <a:rPr sz="1150" b="0" i="0">
+                          <a:solidFill>
+                            <a:srgbClr val="26303A"/>
+                          </a:solidFill>
+                          <a:latin typeface="Meiryo"/>
+                          <a:ea typeface="Meiryo"/>
+                        </a:rPr>
+                        <a:t>を得る</a:t>
+                      </a:r>
+                    </a:p>
+                  </a:txBody>
+                  <a:tcPr marL="82296" marR="54864" marT="18288" marB="18288" anchor="ctr">
+                    <a:solidFill>
+                      <a:srgbClr val="F6F9FB"/>
+                    </a:solidFill>
+                    <a:lnB w="9525" cap="flat">
+                      <a:solidFill>
+                        <a:srgbClr val="D6DEE7"/>
+                      </a:solidFill>
+                    </a:lnB>
+                  </a:tcPr>
+                </a:tc>
+              </a:tr>
+            </a:tbl>
+          </a:graphicData>
+        </a:graphic>
+      </p:graphicFrame>
+      <p:sp>
+        <p:nvSpPr>
+          <p:cNvPr id="42" name="Rounded Rectangle 41"/>
+          <p:cNvSpPr/>
+          <p:nvPr/>
+        </p:nvSpPr>
+        <p:spPr>
+          <a:xfrm>
+            <a:off x="768096" y="3749040"/>
+            <a:ext cx="868680" cy="365760"/>
           </a:xfrm>
           <a:prstGeom prst="roundRect">
             <a:avLst>
@@ -9431,7 +9999,7 @@
               </a:lnSpc>
             </a:pPr>
             <a:r>
-              <a:rPr sz="1400" b="1" i="0">
+              <a:rPr sz="1350" b="1" i="0">
                 <a:solidFill>
                   <a:srgbClr val="FFFFFF"/>
                 </a:solidFill>
@@ -9445,14 +10013,14 @@
       </p:sp>
       <p:sp>
         <p:nvSpPr>
-          <p:cNvPr id="40" name="TextBox 39"/>
+          <p:cNvPr id="43" name="TextBox 42"/>
           <p:cNvSpPr txBox="1"/>
           <p:nvPr/>
         </p:nvSpPr>
         <p:spPr>
           <a:xfrm>
-            <a:off x="1892807" y="1764792"/>
-            <a:ext cx="3879799" cy="1335024"/>
+            <a:off x="1773936" y="3703320"/>
+            <a:ext cx="3925519" cy="457200"/>
           </a:xfrm>
           <a:prstGeom prst="rect">
             <a:avLst/>
@@ -9467,50 +10035,13 @@
           <a:p>
             <a:pPr algn="l">
               <a:lnSpc>
-                <a:spcPct val="112000"/>
+                <a:spcPct val="108000"/>
               </a:lnSpc>
             </a:pPr>
             <a:r>
-              <a:rPr sz="1500" b="0" i="0">
-                <a:solidFill>
-                  <a:srgbClr val="26303A"/>
-                </a:solidFill>
-                <a:latin typeface="Meiryo"/>
-                <a:ea typeface="Meiryo"/>
-              </a:rPr>
-              <a:t>通常の PR はエリート解どうしを結ぶ．</a:t>
-            </a:r>
-          </a:p>
-          <a:p>
-            <a:pPr algn="l">
-              <a:lnSpc>
-                <a:spcPct val="112000"/>
-              </a:lnSpc>
-            </a:pPr>
-            <a:r>
-              <a:rPr sz="1500" b="0" i="0">
-                <a:solidFill>
-                  <a:srgbClr val="26303A"/>
-                </a:solidFill>
-                <a:latin typeface="Meiryo"/>
-                <a:ea typeface="Meiryo"/>
-              </a:rPr>
-              <a:t>本研究では</a:t>
-            </a:r>
-            <a:r>
-              <a:rPr sz="1500" b="1" i="0">
-                <a:solidFill>
-                  <a:srgbClr val="16385C"/>
-                </a:solidFill>
-                <a:latin typeface="Meiryo"/>
-                <a:ea typeface="Meiryo"/>
-              </a:rPr>
-              <a:t>誘導解を </a:t>
-            </a:r>
-            <a:r>
-              <a:rPr sz="1500" b="1" i="1">
-                <a:solidFill>
-                  <a:srgbClr val="16385C"/>
+              <a:rPr sz="1350" b="0" i="1">
+                <a:solidFill>
+                  <a:srgbClr val="26303A"/>
                 </a:solidFill>
                 <a:latin typeface="Meiryo"/>
                 <a:ea typeface="Meiryo"/>
@@ -9518,9 +10049,9 @@
               <a:t>S</a:t>
             </a:r>
             <a:r>
-              <a:rPr sz="1080" b="1" i="1" baseline="-22000">
-                <a:solidFill>
-                  <a:srgbClr val="16385C"/>
+              <a:rPr sz="971" b="0" i="1" baseline="-22000">
+                <a:solidFill>
+                  <a:srgbClr val="26303A"/>
                 </a:solidFill>
                 <a:latin typeface="Meiryo"/>
                 <a:ea typeface="Meiryo"/>
@@ -9528,91 +10059,17 @@
               <a:t>p</a:t>
             </a:r>
             <a:r>
-              <a:rPr sz="1500" b="1" i="0">
-                <a:solidFill>
-                  <a:srgbClr val="16385C"/>
-                </a:solidFill>
-                <a:latin typeface="Meiryo"/>
-                <a:ea typeface="Meiryo"/>
-              </a:rPr>
-              <a:t> に固定</a:t>
-            </a:r>
-            <a:r>
-              <a:rPr sz="1500" b="0" i="0">
-                <a:solidFill>
-                  <a:srgbClr val="26303A"/>
-                </a:solidFill>
-                <a:latin typeface="Meiryo"/>
-                <a:ea typeface="Meiryo"/>
-              </a:rPr>
-              <a:t>し，</a:t>
-            </a:r>
-          </a:p>
-          <a:p>
-            <a:pPr algn="l">
-              <a:lnSpc>
-                <a:spcPct val="112000"/>
-              </a:lnSpc>
-            </a:pPr>
-            <a:r>
-              <a:rPr sz="1500" b="0" i="0">
-                <a:solidFill>
-                  <a:srgbClr val="26303A"/>
-                </a:solidFill>
-                <a:latin typeface="Meiryo"/>
-                <a:ea typeface="Meiryo"/>
-              </a:rPr>
-              <a:t>現在解と </a:t>
-            </a:r>
-            <a:r>
-              <a:rPr sz="1500" b="0" i="1">
-                <a:solidFill>
-                  <a:srgbClr val="26303A"/>
-                </a:solidFill>
-                <a:latin typeface="Meiryo"/>
-                <a:ea typeface="Meiryo"/>
-              </a:rPr>
-              <a:t>S</a:t>
-            </a:r>
-            <a:r>
-              <a:rPr sz="1080" b="0" i="1" baseline="-22000">
-                <a:solidFill>
-                  <a:srgbClr val="26303A"/>
-                </a:solidFill>
-                <a:latin typeface="Meiryo"/>
-                <a:ea typeface="Meiryo"/>
-              </a:rPr>
-              <a:t>p</a:t>
-            </a:r>
-            <a:r>
-              <a:rPr sz="1500" b="0" i="0">
-                <a:solidFill>
-                  <a:srgbClr val="26303A"/>
-                </a:solidFill>
-                <a:latin typeface="Meiryo"/>
-                <a:ea typeface="Meiryo"/>
-              </a:rPr>
-              <a:t> を結ぶ経路をたどり，</a:t>
-            </a:r>
-          </a:p>
-          <a:p>
-            <a:pPr algn="l">
-              <a:lnSpc>
-                <a:spcPct val="112000"/>
-              </a:lnSpc>
-            </a:pPr>
-            <a:r>
-              <a:rPr sz="1500" b="0" i="0">
-                <a:solidFill>
-                  <a:srgbClr val="26303A"/>
-                </a:solidFill>
-                <a:latin typeface="Meiryo"/>
-                <a:ea typeface="Meiryo"/>
-              </a:rPr>
-              <a:t>その中間解から </a:t>
-            </a:r>
-            <a:r>
-              <a:rPr sz="1500" b="0" i="1">
+              <a:rPr sz="1350" b="0" i="0">
+                <a:solidFill>
+                  <a:srgbClr val="26303A"/>
+                </a:solidFill>
+                <a:latin typeface="Meiryo"/>
+                <a:ea typeface="Meiryo"/>
+              </a:rPr>
+              <a:t> に到達するまで swap をたどり，経路上で </a:t>
+            </a:r>
+            <a:r>
+              <a:rPr sz="1350" b="0" i="1">
                 <a:solidFill>
                   <a:srgbClr val="26303A"/>
                 </a:solidFill>
@@ -9622,76 +10079,28 @@
               <a:t>F</a:t>
             </a:r>
             <a:r>
-              <a:rPr sz="1500" b="0" i="0">
-                <a:solidFill>
-                  <a:srgbClr val="26303A"/>
-                </a:solidFill>
-                <a:latin typeface="Meiryo"/>
-                <a:ea typeface="Meiryo"/>
-              </a:rPr>
-              <a:t> の小さい解を選ぶ</a:t>
-            </a:r>
-          </a:p>
-        </p:txBody>
-      </p:sp>
-      <p:sp>
-        <p:nvSpPr>
-          <p:cNvPr id="41" name="Rounded Rectangle 40"/>
+              <a:rPr sz="1350" b="0" i="0">
+                <a:solidFill>
+                  <a:srgbClr val="26303A"/>
+                </a:solidFill>
+                <a:latin typeface="Meiryo"/>
+                <a:ea typeface="Meiryo"/>
+              </a:rPr>
+              <a:t> が最小の解を返す</a:t>
+            </a:r>
+          </a:p>
+        </p:txBody>
+      </p:sp>
+      <p:sp>
+        <p:nvSpPr>
+          <p:cNvPr id="44" name="Rounded Rectangle 43"/>
           <p:cNvSpPr/>
           <p:nvPr/>
         </p:nvSpPr>
         <p:spPr>
           <a:xfrm>
-            <a:off x="566928" y="3337560"/>
-            <a:ext cx="5342839" cy="1188720"/>
-          </a:xfrm>
-          <a:prstGeom prst="roundRect">
-            <a:avLst>
-              <a:gd name="adj" fmla="val 5000"/>
-            </a:avLst>
-          </a:prstGeom>
-          <a:solidFill>
-            <a:srgbClr val="FFFFFF"/>
-          </a:solidFill>
-          <a:ln w="13970">
-            <a:solidFill>
-              <a:srgbClr val="C9D6E5"/>
-            </a:solidFill>
-          </a:ln>
-          <a:effectLst/>
-        </p:spPr>
-        <p:style>
-          <a:lnRef idx="1">
-            <a:schemeClr val="accent1"/>
-          </a:lnRef>
-          <a:fillRef idx="3">
-            <a:schemeClr val="accent1"/>
-          </a:fillRef>
-          <a:effectRef idx="2">
-            <a:schemeClr val="accent1"/>
-          </a:effectRef>
-          <a:fontRef idx="minor">
-            <a:schemeClr val="lt1"/>
-          </a:fontRef>
-        </p:style>
-        <p:txBody>
-          <a:bodyPr rtlCol="0" anchor="ctr"/>
-          <a:lstStyle/>
-          <a:p>
-            <a:pPr algn="ctr"/>
-          </a:p>
-        </p:txBody>
-      </p:sp>
-      <p:sp>
-        <p:nvSpPr>
-          <p:cNvPr id="42" name="Rounded Rectangle 41"/>
-          <p:cNvSpPr/>
-          <p:nvPr/>
-        </p:nvSpPr>
-        <p:spPr>
-          <a:xfrm>
-            <a:off x="749808" y="3520440"/>
-            <a:ext cx="960120" cy="384048"/>
+            <a:off x="768096" y="4270248"/>
+            <a:ext cx="868680" cy="365760"/>
           </a:xfrm>
           <a:prstGeom prst="roundRect">
             <a:avLst>
@@ -9730,7 +10139,7 @@
               </a:lnSpc>
             </a:pPr>
             <a:r>
-              <a:rPr sz="1400" b="1" i="0">
+              <a:rPr sz="1350" b="1" i="0">
                 <a:solidFill>
                   <a:srgbClr val="FFFFFF"/>
                 </a:solidFill>
@@ -9740,7 +10149,7 @@
               <a:t>PR-</a:t>
             </a:r>
             <a:r>
-              <a:rPr sz="1400" b="1" i="1">
+              <a:rPr sz="1350" b="1" i="1">
                 <a:solidFill>
                   <a:srgbClr val="FFFFFF"/>
                 </a:solidFill>
@@ -9754,14 +10163,14 @@
       </p:sp>
       <p:sp>
         <p:nvSpPr>
-          <p:cNvPr id="43" name="TextBox 42"/>
+          <p:cNvPr id="45" name="TextBox 44"/>
           <p:cNvSpPr txBox="1"/>
           <p:nvPr/>
         </p:nvSpPr>
         <p:spPr>
           <a:xfrm>
-            <a:off x="1892807" y="3410712"/>
-            <a:ext cx="3879799" cy="1042416"/>
+            <a:off x="1773936" y="4160520"/>
+            <a:ext cx="3925519" cy="585216"/>
           </a:xfrm>
           <a:prstGeom prst="rect">
             <a:avLst/>
@@ -9776,11 +10185,11 @@
           <a:p>
             <a:pPr algn="l">
               <a:lnSpc>
-                <a:spcPct val="112000"/>
+                <a:spcPct val="108000"/>
               </a:lnSpc>
             </a:pPr>
             <a:r>
-              <a:rPr sz="1500" b="0" i="1">
+              <a:rPr sz="1350" b="0" i="1">
                 <a:solidFill>
                   <a:srgbClr val="26303A"/>
                 </a:solidFill>
@@ -9790,34 +10199,17 @@
               <a:t>k</a:t>
             </a:r>
             <a:r>
-              <a:rPr sz="1500" b="0" i="0">
-                <a:solidFill>
-                  <a:srgbClr val="26303A"/>
-                </a:solidFill>
-                <a:latin typeface="Meiryo"/>
-                <a:ea typeface="Meiryo"/>
-              </a:rPr>
-              <a:t> 回の swap で打ち切り，</a:t>
-            </a:r>
-          </a:p>
-          <a:p>
-            <a:pPr algn="l">
-              <a:lnSpc>
-                <a:spcPct val="112000"/>
-              </a:lnSpc>
-            </a:pPr>
-            <a:r>
-              <a:rPr sz="1500" b="0" i="0">
-                <a:solidFill>
-                  <a:srgbClr val="26303A"/>
-                </a:solidFill>
-                <a:latin typeface="Meiryo"/>
-                <a:ea typeface="Meiryo"/>
-              </a:rPr>
-              <a:t>到達解を返す．</a:t>
-            </a:r>
-            <a:r>
-              <a:rPr sz="1500" b="0" i="1">
+              <a:rPr sz="1350" b="0" i="0">
+                <a:solidFill>
+                  <a:srgbClr val="26303A"/>
+                </a:solidFill>
+                <a:latin typeface="Meiryo"/>
+                <a:ea typeface="Meiryo"/>
+              </a:rPr>
+              <a:t> 回の swap で打ち切り，到達解を返す（</a:t>
+            </a:r>
+            <a:r>
+              <a:rPr sz="1350" b="0" i="1">
                 <a:solidFill>
                   <a:srgbClr val="26303A"/>
                 </a:solidFill>
@@ -9827,7 +10219,7 @@
               <a:t>k</a:t>
             </a:r>
             <a:r>
-              <a:rPr sz="1500" b="0" i="0">
+              <a:rPr sz="1350" b="0" i="0">
                 <a:solidFill>
                   <a:srgbClr val="26303A"/>
                 </a:solidFill>
@@ -9837,7 +10229,7 @@
               <a:t> は 1〜</a:t>
             </a:r>
             <a:r>
-              <a:rPr sz="1500" b="0" i="1">
+              <a:rPr sz="1350" b="0" i="1">
                 <a:solidFill>
                   <a:srgbClr val="26303A"/>
                 </a:solidFill>
@@ -9847,34 +10239,17 @@
               <a:t>d</a:t>
             </a:r>
             <a:r>
-              <a:rPr sz="1500" b="0" i="0">
-                <a:solidFill>
-                  <a:srgbClr val="26303A"/>
-                </a:solidFill>
-                <a:latin typeface="Meiryo"/>
-                <a:ea typeface="Meiryo"/>
-              </a:rPr>
-              <a:t> で変える</a:t>
-            </a:r>
-          </a:p>
-          <a:p>
-            <a:pPr algn="l">
-              <a:lnSpc>
-                <a:spcPct val="112000"/>
-              </a:lnSpc>
-            </a:pPr>
-            <a:r>
-              <a:rPr sz="1500" b="0" i="0">
-                <a:solidFill>
-                  <a:srgbClr val="26303A"/>
-                </a:solidFill>
-                <a:latin typeface="Meiryo"/>
-                <a:ea typeface="Meiryo"/>
-              </a:rPr>
-              <a:t>（</a:t>
-            </a:r>
-            <a:r>
-              <a:rPr sz="1500" b="0" i="1">
+              <a:rPr sz="1350" b="0" i="0">
+                <a:solidFill>
+                  <a:srgbClr val="26303A"/>
+                </a:solidFill>
+                <a:latin typeface="Meiryo"/>
+                <a:ea typeface="Meiryo"/>
+              </a:rPr>
+              <a:t>．</a:t>
+            </a:r>
+            <a:r>
+              <a:rPr sz="1350" b="0" i="1">
                 <a:solidFill>
                   <a:srgbClr val="26303A"/>
                 </a:solidFill>
@@ -9884,7 +10259,7 @@
               <a:t>d</a:t>
             </a:r>
             <a:r>
-              <a:rPr sz="1500" b="0" i="0">
+              <a:rPr sz="1350" b="0" i="0">
                 <a:solidFill>
                   <a:srgbClr val="26303A"/>
                 </a:solidFill>
@@ -9894,7 +10269,7 @@
               <a:t>：</a:t>
             </a:r>
             <a:r>
-              <a:rPr sz="1500" b="0" i="1">
+              <a:rPr sz="1350" b="0" i="1">
                 <a:solidFill>
                   <a:srgbClr val="26303A"/>
                 </a:solidFill>
@@ -9904,7 +10279,7 @@
               <a:t>S</a:t>
             </a:r>
             <a:r>
-              <a:rPr sz="1080" b="0" i="1" baseline="-22000">
+              <a:rPr sz="971" b="0" i="1" baseline="-22000">
                 <a:solidFill>
                   <a:srgbClr val="26303A"/>
                 </a:solidFill>
@@ -9914,7 +10289,7 @@
               <a:t>p</a:t>
             </a:r>
             <a:r>
-              <a:rPr sz="1500" b="0" i="0">
+              <a:rPr sz="1350" b="0" i="0">
                 <a:solidFill>
                   <a:srgbClr val="26303A"/>
                 </a:solidFill>
@@ -9928,14 +10303,14 @@
       </p:sp>
       <p:sp>
         <p:nvSpPr>
-          <p:cNvPr id="44" name="Rounded Rectangle 43"/>
+          <p:cNvPr id="46" name="Rounded Rectangle 45"/>
           <p:cNvSpPr/>
           <p:nvPr/>
         </p:nvSpPr>
         <p:spPr>
           <a:xfrm>
-            <a:off x="566928" y="4690872"/>
-            <a:ext cx="5342839" cy="1481327"/>
+            <a:off x="566928" y="4965192"/>
+            <a:ext cx="5342839" cy="1207008"/>
           </a:xfrm>
           <a:prstGeom prst="roundRect">
             <a:avLst>
@@ -9976,14 +10351,14 @@
       </p:sp>
       <p:sp>
         <p:nvSpPr>
-          <p:cNvPr id="45" name="TextBox 44"/>
+          <p:cNvPr id="47" name="TextBox 46"/>
           <p:cNvSpPr txBox="1"/>
           <p:nvPr/>
         </p:nvSpPr>
         <p:spPr>
           <a:xfrm>
-            <a:off x="795528" y="4745736"/>
-            <a:ext cx="4885639" cy="1371599"/>
+            <a:off x="795528" y="5020055"/>
+            <a:ext cx="4885639" cy="1097280"/>
           </a:xfrm>
           <a:prstGeom prst="rect">
             <a:avLst/>

--- a/doc/presentation_materials/JIMA2026fall_発表.pptx
+++ b/doc/presentation_materials/JIMA2026fall_発表.pptx
@@ -10682,67 +10682,17 @@
           </a:p>
         </p:txBody>
       </p:sp>
-      <p:sp>
-        <p:nvSpPr>
-          <p:cNvPr id="8" name="TextBox 7"/>
-          <p:cNvSpPr txBox="1"/>
-          <p:nvPr/>
-        </p:nvSpPr>
-        <p:spPr>
-          <a:xfrm>
-            <a:off x="566928" y="1517904"/>
-            <a:ext cx="11057839" cy="329184"/>
-          </a:xfrm>
-          <a:prstGeom prst="rect">
-            <a:avLst/>
-          </a:prstGeom>
-          <a:noFill/>
-        </p:spPr>
-        <p:txBody>
-          <a:bodyPr wrap="square" anchor="ctr" lIns="18288" rIns="18288" tIns="9144" bIns="9144">
-            <a:spAutoFit/>
-          </a:bodyPr>
-          <a:lstStyle/>
-          <a:p>
-            <a:pPr algn="l">
-              <a:lnSpc>
-                <a:spcPct val="105000"/>
-              </a:lnSpc>
-            </a:pPr>
-            <a:r>
-              <a:rPr sz="1400" b="0" i="0">
-                <a:solidFill>
-                  <a:srgbClr val="26303A"/>
-                </a:solidFill>
-                <a:latin typeface="Meiryo"/>
-                <a:ea typeface="Meiryo"/>
-              </a:rPr>
-              <a:t>本研究の主眼は最先端手法との性能競争ではなく，仮説を立てて条件を統制し，</a:t>
-            </a:r>
-            <a:r>
-              <a:rPr sz="1400" b="1" i="0">
-                <a:solidFill>
-                  <a:srgbClr val="16385C"/>
-                </a:solidFill>
-                <a:latin typeface="Meiryo"/>
-                <a:ea typeface="Meiryo"/>
-              </a:rPr>
-              <a:t>探索構造と演算子の関係を切り分けること</a:t>
-            </a:r>
-          </a:p>
-        </p:txBody>
-      </p:sp>
       <p:graphicFrame>
         <p:nvGraphicFramePr>
-          <p:cNvPr id="9" name="Table 8"/>
+          <p:cNvPr id="8" name="Table 7"/>
           <p:cNvGraphicFramePr>
             <a:graphicFrameLocks noGrp="1"/>
           </p:cNvGraphicFramePr>
           <p:nvPr/>
         </p:nvGraphicFramePr>
         <p:xfrm>
-          <a:off x="566928" y="1975104"/>
-          <a:ext cx="7955280" cy="1097280"/>
+          <a:off x="566928" y="1783080"/>
+          <a:ext cx="7955280" cy="1152144"/>
         </p:xfrm>
         <a:graphic>
           <a:graphicData uri="http://schemas.openxmlformats.org/drawingml/2006/table">
@@ -10756,7 +10706,7 @@
                 <a:gridCol w="1828800"/>
                 <a:gridCol w="1737360"/>
               </a:tblGrid>
-              <a:tr h="365760">
+              <a:tr h="384048">
                 <a:tc>
                   <a:txBody>
                     <a:bodyPr wrap="square"/>
@@ -10874,7 +10824,7 @@
                   </a:tcPr>
                 </a:tc>
               </a:tr>
-              <a:tr h="365760">
+              <a:tr h="384048">
                 <a:tc>
                   <a:txBody>
                     <a:bodyPr wrap="square"/>
@@ -11002,7 +10952,7 @@
                   </a:tcPr>
                 </a:tc>
               </a:tr>
-              <a:tr h="365760">
+              <a:tr h="384048">
                 <a:tc>
                   <a:txBody>
                     <a:bodyPr wrap="square"/>
@@ -11136,14 +11086,333 @@
       </p:graphicFrame>
       <p:sp>
         <p:nvSpPr>
-          <p:cNvPr id="10" name="TextBox 9"/>
+          <p:cNvPr id="9" name="Rounded Rectangle 8"/>
+          <p:cNvSpPr/>
+          <p:nvPr/>
+        </p:nvSpPr>
+        <p:spPr>
+          <a:xfrm>
+            <a:off x="2898648" y="2212848"/>
+            <a:ext cx="5577840" cy="292607"/>
+          </a:xfrm>
+          <a:prstGeom prst="roundRect">
+            <a:avLst>
+              <a:gd name="adj" fmla="val 8000"/>
+            </a:avLst>
+          </a:prstGeom>
+          <a:noFill/>
+          <a:ln w="20320">
+            <a:solidFill>
+              <a:srgbClr val="6E7A88"/>
+            </a:solidFill>
+            <a:prstDash val="dash"/>
+          </a:ln>
+          <a:effectLst/>
+        </p:spPr>
+        <p:style>
+          <a:lnRef idx="1">
+            <a:schemeClr val="accent1"/>
+          </a:lnRef>
+          <a:fillRef idx="3">
+            <a:schemeClr val="accent1"/>
+          </a:fillRef>
+          <a:effectRef idx="2">
+            <a:schemeClr val="accent1"/>
+          </a:effectRef>
+          <a:fontRef idx="minor">
+            <a:schemeClr val="lt1"/>
+          </a:fontRef>
+        </p:style>
+        <p:txBody>
+          <a:bodyPr rtlCol="0" anchor="ctr"/>
+          <a:lstStyle/>
+          <a:p>
+            <a:pPr algn="ctr"/>
+          </a:p>
+        </p:txBody>
+      </p:sp>
+      <p:sp>
+        <p:nvSpPr>
+          <p:cNvPr id="10" name="Rounded Rectangle 9"/>
+          <p:cNvSpPr/>
+          <p:nvPr/>
+        </p:nvSpPr>
+        <p:spPr>
+          <a:xfrm>
+            <a:off x="2898648" y="2596896"/>
+            <a:ext cx="5577840" cy="292607"/>
+          </a:xfrm>
+          <a:prstGeom prst="roundRect">
+            <a:avLst>
+              <a:gd name="adj" fmla="val 8000"/>
+            </a:avLst>
+          </a:prstGeom>
+          <a:noFill/>
+          <a:ln w="27940">
+            <a:solidFill>
+              <a:srgbClr val="2E1A0E"/>
+            </a:solidFill>
+          </a:ln>
+          <a:effectLst/>
+        </p:spPr>
+        <p:style>
+          <a:lnRef idx="1">
+            <a:schemeClr val="accent1"/>
+          </a:lnRef>
+          <a:fillRef idx="3">
+            <a:schemeClr val="accent1"/>
+          </a:fillRef>
+          <a:effectRef idx="2">
+            <a:schemeClr val="accent1"/>
+          </a:effectRef>
+          <a:fontRef idx="minor">
+            <a:schemeClr val="lt1"/>
+          </a:fontRef>
+        </p:style>
+        <p:txBody>
+          <a:bodyPr rtlCol="0" anchor="ctr"/>
+          <a:lstStyle/>
+          <a:p>
+            <a:pPr algn="ctr"/>
+          </a:p>
+        </p:txBody>
+      </p:sp>
+      <p:sp>
+        <p:nvSpPr>
+          <p:cNvPr id="11" name="Rounded Rectangle 10"/>
+          <p:cNvSpPr/>
+          <p:nvPr/>
+        </p:nvSpPr>
+        <p:spPr>
+          <a:xfrm>
+            <a:off x="2898648" y="2212848"/>
+            <a:ext cx="2011679" cy="676655"/>
+          </a:xfrm>
+          <a:prstGeom prst="roundRect">
+            <a:avLst>
+              <a:gd name="adj" fmla="val 8000"/>
+            </a:avLst>
+          </a:prstGeom>
+          <a:noFill/>
+          <a:ln w="27940">
+            <a:solidFill>
+              <a:srgbClr val="16385C"/>
+            </a:solidFill>
+          </a:ln>
+          <a:effectLst/>
+        </p:spPr>
+        <p:style>
+          <a:lnRef idx="1">
+            <a:schemeClr val="accent1"/>
+          </a:lnRef>
+          <a:fillRef idx="3">
+            <a:schemeClr val="accent1"/>
+          </a:fillRef>
+          <a:effectRef idx="2">
+            <a:schemeClr val="accent1"/>
+          </a:effectRef>
+          <a:fontRef idx="minor">
+            <a:schemeClr val="lt1"/>
+          </a:fontRef>
+        </p:style>
+        <p:txBody>
+          <a:bodyPr rtlCol="0" anchor="ctr"/>
+          <a:lstStyle/>
+          <a:p>
+            <a:pPr algn="ctr"/>
+          </a:p>
+        </p:txBody>
+      </p:sp>
+      <p:sp>
+        <p:nvSpPr>
+          <p:cNvPr id="12" name="Rounded Rectangle 11"/>
+          <p:cNvSpPr/>
+          <p:nvPr/>
+        </p:nvSpPr>
+        <p:spPr>
+          <a:xfrm>
+            <a:off x="8659368" y="2221992"/>
+            <a:ext cx="914400" cy="274320"/>
+          </a:xfrm>
+          <a:prstGeom prst="roundRect">
+            <a:avLst>
+              <a:gd name="adj" fmla="val 30000"/>
+            </a:avLst>
+          </a:prstGeom>
+          <a:solidFill>
+            <a:srgbClr val="6E7A88"/>
+          </a:solidFill>
+          <a:ln>
+            <a:noFill/>
+          </a:ln>
+          <a:effectLst/>
+        </p:spPr>
+        <p:style>
+          <a:lnRef idx="1">
+            <a:schemeClr val="accent1"/>
+          </a:lnRef>
+          <a:fillRef idx="3">
+            <a:schemeClr val="accent1"/>
+          </a:fillRef>
+          <a:effectRef idx="2">
+            <a:schemeClr val="accent1"/>
+          </a:effectRef>
+          <a:fontRef idx="minor">
+            <a:schemeClr val="lt1"/>
+          </a:fontRef>
+        </p:style>
+        <p:txBody>
+          <a:bodyPr rtlCol="0" anchor="ctr" wrap="square" lIns="54864" rIns="54864" tIns="18288" bIns="18288"/>
+          <a:lstStyle/>
+          <a:p>
+            <a:pPr algn="ctr">
+              <a:lnSpc>
+                <a:spcPct val="100000"/>
+              </a:lnSpc>
+            </a:pPr>
+            <a:r>
+              <a:rPr sz="1100" b="1" i="0">
+                <a:solidFill>
+                  <a:srgbClr val="FFFFFF"/>
+                </a:solidFill>
+                <a:latin typeface="Meiryo"/>
+                <a:ea typeface="Meiryo"/>
+              </a:rPr>
+              <a:t>仮説の外</a:t>
+            </a:r>
+          </a:p>
+        </p:txBody>
+      </p:sp>
+      <p:sp>
+        <p:nvSpPr>
+          <p:cNvPr id="13" name="Rounded Rectangle 12"/>
+          <p:cNvSpPr/>
+          <p:nvPr/>
+        </p:nvSpPr>
+        <p:spPr>
+          <a:xfrm>
+            <a:off x="8659368" y="2606040"/>
+            <a:ext cx="914400" cy="274320"/>
+          </a:xfrm>
+          <a:prstGeom prst="roundRect">
+            <a:avLst>
+              <a:gd name="adj" fmla="val 30000"/>
+            </a:avLst>
+          </a:prstGeom>
+          <a:solidFill>
+            <a:srgbClr val="2E1A0E"/>
+          </a:solidFill>
+          <a:ln>
+            <a:noFill/>
+          </a:ln>
+          <a:effectLst/>
+        </p:spPr>
+        <p:style>
+          <a:lnRef idx="1">
+            <a:schemeClr val="accent1"/>
+          </a:lnRef>
+          <a:fillRef idx="3">
+            <a:schemeClr val="accent1"/>
+          </a:fillRef>
+          <a:effectRef idx="2">
+            <a:schemeClr val="accent1"/>
+          </a:effectRef>
+          <a:fontRef idx="minor">
+            <a:schemeClr val="lt1"/>
+          </a:fontRef>
+        </p:style>
+        <p:txBody>
+          <a:bodyPr rtlCol="0" anchor="ctr" wrap="square" lIns="54864" rIns="54864" tIns="18288" bIns="18288"/>
+          <a:lstStyle/>
+          <a:p>
+            <a:pPr algn="ctr">
+              <a:lnSpc>
+                <a:spcPct val="100000"/>
+              </a:lnSpc>
+            </a:pPr>
+            <a:r>
+              <a:rPr sz="1100" b="1" i="0">
+                <a:solidFill>
+                  <a:srgbClr val="FFFFFF"/>
+                </a:solidFill>
+                <a:latin typeface="Meiryo"/>
+                <a:ea typeface="Meiryo"/>
+              </a:rPr>
+              <a:t>仮説 2</a:t>
+            </a:r>
+          </a:p>
+        </p:txBody>
+      </p:sp>
+      <p:sp>
+        <p:nvSpPr>
+          <p:cNvPr id="14" name="Rounded Rectangle 13"/>
+          <p:cNvSpPr/>
+          <p:nvPr/>
+        </p:nvSpPr>
+        <p:spPr>
+          <a:xfrm>
+            <a:off x="3447287" y="2980944"/>
+            <a:ext cx="914400" cy="274320"/>
+          </a:xfrm>
+          <a:prstGeom prst="roundRect">
+            <a:avLst>
+              <a:gd name="adj" fmla="val 30000"/>
+            </a:avLst>
+          </a:prstGeom>
+          <a:solidFill>
+            <a:srgbClr val="16385C"/>
+          </a:solidFill>
+          <a:ln>
+            <a:noFill/>
+          </a:ln>
+          <a:effectLst/>
+        </p:spPr>
+        <p:style>
+          <a:lnRef idx="1">
+            <a:schemeClr val="accent1"/>
+          </a:lnRef>
+          <a:fillRef idx="3">
+            <a:schemeClr val="accent1"/>
+          </a:fillRef>
+          <a:effectRef idx="2">
+            <a:schemeClr val="accent1"/>
+          </a:effectRef>
+          <a:fontRef idx="minor">
+            <a:schemeClr val="lt1"/>
+          </a:fontRef>
+        </p:style>
+        <p:txBody>
+          <a:bodyPr rtlCol="0" anchor="ctr" wrap="square" lIns="54864" rIns="54864" tIns="18288" bIns="18288"/>
+          <a:lstStyle/>
+          <a:p>
+            <a:pPr algn="ctr">
+              <a:lnSpc>
+                <a:spcPct val="100000"/>
+              </a:lnSpc>
+            </a:pPr>
+            <a:r>
+              <a:rPr sz="1100" b="1" i="0">
+                <a:solidFill>
+                  <a:srgbClr val="FFFFFF"/>
+                </a:solidFill>
+                <a:latin typeface="Meiryo"/>
+                <a:ea typeface="Meiryo"/>
+              </a:rPr>
+              <a:t>仮説 1</a:t>
+            </a:r>
+          </a:p>
+        </p:txBody>
+      </p:sp>
+      <p:sp>
+        <p:nvSpPr>
+          <p:cNvPr id="15" name="TextBox 14"/>
           <p:cNvSpPr txBox="1"/>
           <p:nvPr/>
         </p:nvSpPr>
         <p:spPr>
           <a:xfrm>
-            <a:off x="8842247" y="2340864"/>
-            <a:ext cx="2782519" cy="731520"/>
+            <a:off x="5047488" y="2990088"/>
+            <a:ext cx="3474720" cy="274320"/>
           </a:xfrm>
           <a:prstGeom prst="rect">
             <a:avLst/>
@@ -11162,16 +11431,99 @@
               </a:lnSpc>
             </a:pPr>
             <a:r>
-              <a:rPr sz="1300" b="0" i="0">
+              <a:rPr sz="1150" b="0" i="0">
                 <a:solidFill>
                   <a:srgbClr val="6E7A88"/>
                 </a:solidFill>
                 <a:latin typeface="Meiryo"/>
                 <a:ea typeface="Meiryo"/>
               </a:rPr>
-              <a:t>参考：GA（局所探索なし）を</a:t>
-            </a:r>
-          </a:p>
+              <a:t>参考：GA（局所探索なし）を加えて計 7 手法</a:t>
+            </a:r>
+          </a:p>
+        </p:txBody>
+      </p:sp>
+      <p:sp>
+        <p:nvSpPr>
+          <p:cNvPr id="16" name="Rounded Rectangle 15"/>
+          <p:cNvSpPr/>
+          <p:nvPr/>
+        </p:nvSpPr>
+        <p:spPr>
+          <a:xfrm>
+            <a:off x="566928" y="3429000"/>
+            <a:ext cx="1097280" cy="365760"/>
+          </a:xfrm>
+          <a:prstGeom prst="roundRect">
+            <a:avLst>
+              <a:gd name="adj" fmla="val 30000"/>
+            </a:avLst>
+          </a:prstGeom>
+          <a:solidFill>
+            <a:srgbClr val="16385C"/>
+          </a:solidFill>
+          <a:ln>
+            <a:noFill/>
+          </a:ln>
+          <a:effectLst/>
+        </p:spPr>
+        <p:style>
+          <a:lnRef idx="1">
+            <a:schemeClr val="accent1"/>
+          </a:lnRef>
+          <a:fillRef idx="3">
+            <a:schemeClr val="accent1"/>
+          </a:fillRef>
+          <a:effectRef idx="2">
+            <a:schemeClr val="accent1"/>
+          </a:effectRef>
+          <a:fontRef idx="minor">
+            <a:schemeClr val="lt1"/>
+          </a:fontRef>
+        </p:style>
+        <p:txBody>
+          <a:bodyPr rtlCol="0" anchor="ctr" wrap="square" lIns="54864" rIns="54864" tIns="18288" bIns="18288"/>
+          <a:lstStyle/>
+          <a:p>
+            <a:pPr algn="ctr">
+              <a:lnSpc>
+                <a:spcPct val="100000"/>
+              </a:lnSpc>
+            </a:pPr>
+            <a:r>
+              <a:rPr sz="1400" b="1" i="0">
+                <a:solidFill>
+                  <a:srgbClr val="FFFFFF"/>
+                </a:solidFill>
+                <a:latin typeface="Meiryo"/>
+                <a:ea typeface="Meiryo"/>
+              </a:rPr>
+              <a:t>仮説 1</a:t>
+            </a:r>
+          </a:p>
+        </p:txBody>
+      </p:sp>
+      <p:sp>
+        <p:nvSpPr>
+          <p:cNvPr id="17" name="TextBox 16"/>
+          <p:cNvSpPr txBox="1"/>
+          <p:nvPr/>
+        </p:nvSpPr>
+        <p:spPr>
+          <a:xfrm>
+            <a:off x="1847088" y="3401568"/>
+            <a:ext cx="9777679" cy="420624"/>
+          </a:xfrm>
+          <a:prstGeom prst="rect">
+            <a:avLst/>
+          </a:prstGeom>
+          <a:noFill/>
+        </p:spPr>
+        <p:txBody>
+          <a:bodyPr wrap="square" anchor="ctr" lIns="18288" rIns="18288" tIns="9144" bIns="9144">
+            <a:spAutoFit/>
+          </a:bodyPr>
+          <a:lstStyle/>
           <a:p>
             <a:pPr algn="l">
               <a:lnSpc>
@@ -11179,88 +11531,28 @@
               </a:lnSpc>
             </a:pPr>
             <a:r>
-              <a:rPr sz="1300" b="0" i="0">
-                <a:solidFill>
-                  <a:srgbClr val="6E7A88"/>
-                </a:solidFill>
-                <a:latin typeface="Meiryo"/>
-                <a:ea typeface="Meiryo"/>
-              </a:rPr>
-              <a:t>加えて計 7 手法</a:t>
-            </a:r>
-          </a:p>
-        </p:txBody>
-      </p:sp>
-      <p:sp>
-        <p:nvSpPr>
-          <p:cNvPr id="11" name="Rounded Rectangle 10"/>
-          <p:cNvSpPr/>
-          <p:nvPr/>
-        </p:nvSpPr>
-        <p:spPr>
-          <a:xfrm>
-            <a:off x="566928" y="3300984"/>
-            <a:ext cx="1097280" cy="365760"/>
-          </a:xfrm>
-          <a:prstGeom prst="roundRect">
-            <a:avLst>
-              <a:gd name="adj" fmla="val 30000"/>
-            </a:avLst>
-          </a:prstGeom>
-          <a:solidFill>
-            <a:srgbClr val="123150"/>
-          </a:solidFill>
-          <a:ln>
-            <a:noFill/>
-          </a:ln>
-          <a:effectLst/>
-        </p:spPr>
-        <p:style>
-          <a:lnRef idx="1">
-            <a:schemeClr val="accent1"/>
-          </a:lnRef>
-          <a:fillRef idx="3">
-            <a:schemeClr val="accent1"/>
-          </a:fillRef>
-          <a:effectRef idx="2">
-            <a:schemeClr val="accent1"/>
-          </a:effectRef>
-          <a:fontRef idx="minor">
-            <a:schemeClr val="lt1"/>
-          </a:fontRef>
-        </p:style>
-        <p:txBody>
-          <a:bodyPr rtlCol="0" anchor="ctr" wrap="square" lIns="54864" rIns="54864" tIns="18288" bIns="18288"/>
-          <a:lstStyle/>
-          <a:p>
-            <a:pPr algn="ctr">
-              <a:lnSpc>
-                <a:spcPct val="100000"/>
-              </a:lnSpc>
-            </a:pPr>
-            <a:r>
-              <a:rPr sz="1400" b="1" i="0">
-                <a:solidFill>
-                  <a:srgbClr val="FFFFFF"/>
-                </a:solidFill>
-                <a:latin typeface="Meiryo"/>
-                <a:ea typeface="Meiryo"/>
-              </a:rPr>
-              <a:t>仮説 1</a:t>
-            </a:r>
-          </a:p>
-        </p:txBody>
-      </p:sp>
-      <p:sp>
-        <p:nvSpPr>
-          <p:cNvPr id="12" name="TextBox 11"/>
+              <a:rPr sz="1700" b="1" i="0">
+                <a:solidFill>
+                  <a:srgbClr val="26303A"/>
+                </a:solidFill>
+                <a:latin typeface="Meiryo"/>
+                <a:ea typeface="Meiryo"/>
+              </a:rPr>
+              <a:t>単点探索のほうが，多点探索より高安定 HV が大きい</a:t>
+            </a:r>
+          </a:p>
+        </p:txBody>
+      </p:sp>
+      <p:sp>
+        <p:nvSpPr>
+          <p:cNvPr id="18" name="TextBox 17"/>
           <p:cNvSpPr txBox="1"/>
           <p:nvPr/>
         </p:nvSpPr>
         <p:spPr>
           <a:xfrm>
-            <a:off x="1847088" y="3273552"/>
-            <a:ext cx="9777679" cy="420624"/>
+            <a:off x="1847088" y="3840480"/>
+            <a:ext cx="9777679" cy="347472"/>
           </a:xfrm>
           <a:prstGeom prst="rect">
             <a:avLst/>
@@ -11273,46 +11565,6 @@
           </a:bodyPr>
           <a:lstStyle/>
           <a:p>
-            <a:pPr algn="l">
-              <a:lnSpc>
-                <a:spcPct val="105000"/>
-              </a:lnSpc>
-            </a:pPr>
-            <a:r>
-              <a:rPr sz="1700" b="1" i="0">
-                <a:solidFill>
-                  <a:srgbClr val="26303A"/>
-                </a:solidFill>
-                <a:latin typeface="Meiryo"/>
-                <a:ea typeface="Meiryo"/>
-              </a:rPr>
-              <a:t>単点探索のほうが，多点探索より高安定 HV が大きい</a:t>
-            </a:r>
-          </a:p>
-        </p:txBody>
-      </p:sp>
-      <p:sp>
-        <p:nvSpPr>
-          <p:cNvPr id="13" name="TextBox 12"/>
-          <p:cNvSpPr txBox="1"/>
-          <p:nvPr/>
-        </p:nvSpPr>
-        <p:spPr>
-          <a:xfrm>
-            <a:off x="1847088" y="3712464"/>
-            <a:ext cx="9777679" cy="347472"/>
-          </a:xfrm>
-          <a:prstGeom prst="rect">
-            <a:avLst/>
-          </a:prstGeom>
-          <a:noFill/>
-        </p:spPr>
-        <p:txBody>
-          <a:bodyPr wrap="square" anchor="ctr" lIns="18288" rIns="18288" tIns="9144" bIns="9144">
-            <a:spAutoFit/>
-          </a:bodyPr>
-          <a:lstStyle/>
-          <a:p>
             <a:r>
               <a:rPr sz="1500" b="1" i="0">
                 <a:solidFill>
@@ -11331,20 +11583,20 @@
                 <a:latin typeface="Meiryo"/>
                 <a:ea typeface="Meiryo"/>
               </a:rPr>
-              <a:t>ILS が Memetic を全シナリオで有意に上回れば，支持とみなす</a:t>
-            </a:r>
-          </a:p>
-        </p:txBody>
-      </p:sp>
-      <p:sp>
-        <p:nvSpPr>
-          <p:cNvPr id="14" name="Rectangle 13"/>
+              <a:t>ILS が Memetic を全シナリオで有意に上回れば支持</a:t>
+            </a:r>
+          </a:p>
+        </p:txBody>
+      </p:sp>
+      <p:sp>
+        <p:nvSpPr>
+          <p:cNvPr id="19" name="Rectangle 18"/>
           <p:cNvSpPr/>
           <p:nvPr/>
         </p:nvSpPr>
         <p:spPr>
           <a:xfrm>
-            <a:off x="566928" y="4133088"/>
+            <a:off x="566928" y="4224528"/>
             <a:ext cx="11057839" cy="10972"/>
           </a:xfrm>
           <a:prstGeom prst="rect">
@@ -11382,13 +11634,13 @@
       </p:sp>
       <p:sp>
         <p:nvSpPr>
-          <p:cNvPr id="15" name="Rounded Rectangle 14"/>
+          <p:cNvPr id="20" name="Rounded Rectangle 19"/>
           <p:cNvSpPr/>
           <p:nvPr/>
         </p:nvSpPr>
         <p:spPr>
           <a:xfrm>
-            <a:off x="566928" y="4251960"/>
+            <a:off x="566928" y="4343400"/>
             <a:ext cx="1097280" cy="365760"/>
           </a:xfrm>
           <a:prstGeom prst="roundRect">
@@ -11397,7 +11649,7 @@
             </a:avLst>
           </a:prstGeom>
           <a:solidFill>
-            <a:srgbClr val="123150"/>
+            <a:srgbClr val="2E1A0E"/>
           </a:solidFill>
           <a:ln>
             <a:noFill/>
@@ -11442,13 +11694,13 @@
       </p:sp>
       <p:sp>
         <p:nvSpPr>
-          <p:cNvPr id="16" name="TextBox 15"/>
+          <p:cNvPr id="21" name="TextBox 20"/>
           <p:cNvSpPr txBox="1"/>
           <p:nvPr/>
         </p:nvSpPr>
         <p:spPr>
           <a:xfrm>
-            <a:off x="1847088" y="4224528"/>
+            <a:off x="1847088" y="4315968"/>
             <a:ext cx="9777679" cy="420624"/>
           </a:xfrm>
           <a:prstGeom prst="rect">
@@ -11482,13 +11734,13 @@
       </p:sp>
       <p:sp>
         <p:nvSpPr>
-          <p:cNvPr id="17" name="TextBox 16"/>
+          <p:cNvPr id="22" name="TextBox 21"/>
           <p:cNvSpPr txBox="1"/>
           <p:nvPr/>
         </p:nvSpPr>
         <p:spPr>
           <a:xfrm>
-            <a:off x="1847088" y="4663440"/>
+            <a:off x="1847088" y="4754880"/>
             <a:ext cx="9777679" cy="347472"/>
           </a:xfrm>
           <a:prstGeom prst="rect">
@@ -11540,20 +11792,20 @@
                 <a:latin typeface="Meiryo"/>
                 <a:ea typeface="Meiryo"/>
               </a:rPr>
-              <a:t> と Memetic＋PR がそれぞれ Memetic を全シナリオで有意に上回れば，支持とみなす</a:t>
-            </a:r>
-          </a:p>
-        </p:txBody>
-      </p:sp>
-      <p:sp>
-        <p:nvSpPr>
-          <p:cNvPr id="18" name="Rectangle 17"/>
+              <a:t> と Memetic＋PR がそれぞれ Memetic を全シナリオで有意に上回れば支持</a:t>
+            </a:r>
+          </a:p>
+        </p:txBody>
+      </p:sp>
+      <p:sp>
+        <p:nvSpPr>
+          <p:cNvPr id="23" name="Rectangle 22"/>
           <p:cNvSpPr/>
           <p:nvPr/>
         </p:nvSpPr>
         <p:spPr>
           <a:xfrm>
-            <a:off x="566928" y="5084064"/>
+            <a:off x="566928" y="5138928"/>
             <a:ext cx="11057839" cy="10972"/>
           </a:xfrm>
           <a:prstGeom prst="rect">
@@ -11591,13 +11843,13 @@
       </p:sp>
       <p:sp>
         <p:nvSpPr>
-          <p:cNvPr id="19" name="Rounded Rectangle 18"/>
+          <p:cNvPr id="24" name="Rounded Rectangle 23"/>
           <p:cNvSpPr/>
           <p:nvPr/>
         </p:nvSpPr>
         <p:spPr>
           <a:xfrm>
-            <a:off x="566928" y="5202936"/>
+            <a:off x="566928" y="5257800"/>
             <a:ext cx="1097280" cy="365760"/>
           </a:xfrm>
           <a:prstGeom prst="roundRect">
@@ -11644,20 +11896,20 @@
                 <a:latin typeface="Meiryo"/>
                 <a:ea typeface="Meiryo"/>
               </a:rPr>
-              <a:t>仮説なし</a:t>
-            </a:r>
-          </a:p>
-        </p:txBody>
-      </p:sp>
-      <p:sp>
-        <p:nvSpPr>
-          <p:cNvPr id="20" name="TextBox 19"/>
+              <a:t>仮説の外</a:t>
+            </a:r>
+          </a:p>
+        </p:txBody>
+      </p:sp>
+      <p:sp>
+        <p:nvSpPr>
+          <p:cNvPr id="25" name="TextBox 24"/>
           <p:cNvSpPr txBox="1"/>
           <p:nvPr/>
         </p:nvSpPr>
         <p:spPr>
           <a:xfrm>
-            <a:off x="1847088" y="5175504"/>
+            <a:off x="1847088" y="5230368"/>
             <a:ext cx="9777679" cy="420624"/>
           </a:xfrm>
           <a:prstGeom prst="rect">
@@ -11704,20 +11956,20 @@
                 <a:latin typeface="Meiryo"/>
                 <a:ea typeface="Meiryo"/>
               </a:rPr>
-              <a:t> と ILS＋PR も，仮説 2 と同じ形で ILS と比較する</a:t>
-            </a:r>
-          </a:p>
-        </p:txBody>
-      </p:sp>
-      <p:sp>
-        <p:nvSpPr>
-          <p:cNvPr id="21" name="TextBox 20"/>
+              <a:t> と ILS＋PR も同じ形で ILS と比較し，演算子の効果が探索構造で異なるかを見る</a:t>
+            </a:r>
+          </a:p>
+        </p:txBody>
+      </p:sp>
+      <p:sp>
+        <p:nvSpPr>
+          <p:cNvPr id="26" name="TextBox 25"/>
           <p:cNvSpPr txBox="1"/>
           <p:nvPr/>
         </p:nvSpPr>
         <p:spPr>
           <a:xfrm>
-            <a:off x="566928" y="5833872"/>
+            <a:off x="566928" y="5779008"/>
             <a:ext cx="11057839" cy="512064"/>
           </a:xfrm>
           <a:prstGeom prst="rect">
@@ -32488,8 +32740,8 @@
         </p:nvSpPr>
         <p:spPr>
           <a:xfrm>
-            <a:off x="566928" y="1956816"/>
-            <a:ext cx="5391759" cy="1463040"/>
+            <a:off x="566928" y="1920240"/>
+            <a:ext cx="5391759" cy="1371600"/>
           </a:xfrm>
           <a:prstGeom prst="roundRect">
             <a:avLst>
@@ -32534,8 +32786,8 @@
         </p:nvSpPr>
         <p:spPr>
           <a:xfrm>
-            <a:off x="713232" y="2002536"/>
-            <a:ext cx="5099151" cy="1371600"/>
+            <a:off x="713232" y="1965960"/>
+            <a:ext cx="5099151" cy="1280160"/>
           </a:xfrm>
           <a:prstGeom prst="rect">
             <a:avLst/>
@@ -32723,8 +32975,8 @@
         </p:blipFill>
         <p:spPr>
           <a:xfrm>
-            <a:off x="1067136" y="3511296"/>
-            <a:ext cx="4391343" cy="2889504"/>
+            <a:off x="1261689" y="3383280"/>
+            <a:ext cx="4002237" cy="2633472"/>
           </a:xfrm>
           <a:prstGeom prst="rect">
             <a:avLst/>
@@ -32779,8 +33031,8 @@
         </p:nvSpPr>
         <p:spPr>
           <a:xfrm>
-            <a:off x="6233007" y="1956816"/>
-            <a:ext cx="5391759" cy="1463040"/>
+            <a:off x="6233007" y="1920240"/>
+            <a:ext cx="5391759" cy="1371600"/>
           </a:xfrm>
           <a:prstGeom prst="roundRect">
             <a:avLst>
@@ -32825,8 +33077,8 @@
         </p:nvSpPr>
         <p:spPr>
           <a:xfrm>
-            <a:off x="6379311" y="2002536"/>
-            <a:ext cx="5099151" cy="1371600"/>
+            <a:off x="6379311" y="1965960"/>
+            <a:ext cx="5099151" cy="1280160"/>
           </a:xfrm>
           <a:prstGeom prst="rect">
             <a:avLst/>
@@ -32974,14 +33226,54 @@
         </p:blipFill>
         <p:spPr>
           <a:xfrm>
-            <a:off x="6733215" y="3511296"/>
-            <a:ext cx="4391343" cy="2889504"/>
+            <a:off x="6927768" y="3383280"/>
+            <a:ext cx="4002237" cy="2633472"/>
           </a:xfrm>
           <a:prstGeom prst="rect">
             <a:avLst/>
           </a:prstGeom>
         </p:spPr>
       </p:pic>
+      <p:sp>
+        <p:nvSpPr>
+          <p:cNvPr id="16" name="TextBox 15"/>
+          <p:cNvSpPr txBox="1"/>
+          <p:nvPr/>
+        </p:nvSpPr>
+        <p:spPr>
+          <a:xfrm>
+            <a:off x="566928" y="6071616"/>
+            <a:ext cx="11057839" cy="292608"/>
+          </a:xfrm>
+          <a:prstGeom prst="rect">
+            <a:avLst/>
+          </a:prstGeom>
+          <a:noFill/>
+        </p:spPr>
+        <p:txBody>
+          <a:bodyPr wrap="square" anchor="ctr" lIns="18288" rIns="18288" tIns="9144" bIns="9144">
+            <a:spAutoFit/>
+          </a:bodyPr>
+          <a:lstStyle/>
+          <a:p>
+            <a:pPr algn="ctr">
+              <a:lnSpc>
+                <a:spcPct val="105000"/>
+              </a:lnSpc>
+            </a:pPr>
+            <a:r>
+              <a:rPr sz="1250" b="0" i="0">
+                <a:solidFill>
+                  <a:srgbClr val="6E7A88"/>
+                </a:solidFill>
+                <a:latin typeface="Meiryo"/>
+                <a:ea typeface="Meiryo"/>
+              </a:rPr>
+              <a:t>主眼は最先端手法との性能競争ではなく，条件を統制して探索構造と演算子の関係を切り分けること</a:t>
+            </a:r>
+          </a:p>
+        </p:txBody>
+      </p:sp>
     </p:spTree>
   </p:cSld>
   <p:clrMapOvr>

--- a/doc/presentation_materials/JIMA2026fall_発表.pptx
+++ b/doc/presentation_materials/JIMA2026fall_発表.pptx
@@ -7297,17 +7297,17 @@
               </a:lnSpc>
             </a:pPr>
             <a:r>
-              <a:rPr sz="1350" b="1" i="0">
+              <a:rPr sz="1400" b="1" i="0">
                 <a:solidFill>
                   <a:srgbClr val="FFFFFF"/>
                 </a:solidFill>
                 <a:latin typeface="Meiryo"/>
                 <a:ea typeface="Meiryo"/>
               </a:rPr>
-              <a:t>揃えた条件：局所探索（N5 近傍）・目的関数 </a:t>
-            </a:r>
-            <a:r>
-              <a:rPr sz="1350" b="1" i="1">
+              <a:t>探索構造の差だけを比較するため，局所探索（N5 近傍）・目的関数 </a:t>
+            </a:r>
+            <a:r>
+              <a:rPr sz="1400" b="1" i="1">
                 <a:solidFill>
                   <a:srgbClr val="FFFFFF"/>
                 </a:solidFill>
@@ -7317,17 +7317,17 @@
               <a:t>F</a:t>
             </a:r>
             <a:r>
-              <a:rPr sz="1350" b="1" i="0">
+              <a:rPr sz="1400" b="1" i="0">
                 <a:solidFill>
                   <a:srgbClr val="FFFFFF"/>
                 </a:solidFill>
                 <a:latin typeface="Meiryo"/>
                 <a:ea typeface="Meiryo"/>
               </a:rPr>
-              <a:t>・初期解に </a:t>
-            </a:r>
-            <a:r>
-              <a:rPr sz="1350" b="1" i="1">
+              <a:t>・初期解 </a:t>
+            </a:r>
+            <a:r>
+              <a:rPr sz="1400" b="1" i="1">
                 <a:solidFill>
                   <a:srgbClr val="FFFFFF"/>
                 </a:solidFill>
@@ -7337,7 +7337,7 @@
               <a:t>S</a:t>
             </a:r>
             <a:r>
-              <a:rPr sz="971" b="1" i="1" baseline="-22000">
+              <a:rPr sz="1008" b="1" i="1" baseline="-22000">
                 <a:solidFill>
                   <a:srgbClr val="FFFFFF"/>
                 </a:solidFill>
@@ -7347,14 +7347,14 @@
               <a:t>p</a:t>
             </a:r>
             <a:r>
-              <a:rPr sz="1350" b="1" i="0">
+              <a:rPr sz="1400" b="1" i="0">
                 <a:solidFill>
                   <a:srgbClr val="FFFFFF"/>
                 </a:solidFill>
                 <a:latin typeface="Meiryo"/>
                 <a:ea typeface="Meiryo"/>
               </a:rPr>
-              <a:t> を含めること　→　局所探索の有無による差を除いて比較</a:t>
+              <a:t> を両者で揃える</a:t>
             </a:r>
           </a:p>
         </p:txBody>
@@ -9382,7 +9382,27 @@
                 <a:latin typeface="Meiryo"/>
                 <a:ea typeface="Meiryo"/>
               </a:rPr>
-              <a:t> と順位が異なる作業</a:t>
+              <a:t> と順位が異なる作業（その数が </a:t>
+            </a:r>
+            <a:r>
+              <a:rPr sz="1200" b="0" i="1">
+                <a:solidFill>
+                  <a:srgbClr val="6E7A88"/>
+                </a:solidFill>
+                <a:latin typeface="Meiryo"/>
+                <a:ea typeface="Meiryo"/>
+              </a:rPr>
+              <a:t>d</a:t>
+            </a:r>
+            <a:r>
+              <a:rPr sz="1200" b="0" i="0">
+                <a:solidFill>
+                  <a:srgbClr val="6E7A88"/>
+                </a:solidFill>
+                <a:latin typeface="Meiryo"/>
+                <a:ea typeface="Meiryo"/>
+              </a:rPr>
+              <a:t>）</a:t>
             </a:r>
           </a:p>
           <a:p>
@@ -9463,7 +9483,7 @@
         <p:spPr>
           <a:xfrm>
             <a:off x="566928" y="1691640"/>
-            <a:ext cx="5342839" cy="3108960"/>
+            <a:ext cx="5342839" cy="2971800"/>
           </a:xfrm>
           <a:prstGeom prst="roundRect">
             <a:avLst>
@@ -9564,14 +9584,74 @@
       </p:sp>
       <p:sp>
         <p:nvSpPr>
-          <p:cNvPr id="40" name="TextBox 39"/>
+          <p:cNvPr id="40" name="Rounded Rectangle 39"/>
+          <p:cNvSpPr/>
+          <p:nvPr/>
+        </p:nvSpPr>
+        <p:spPr>
+          <a:xfrm>
+            <a:off x="768096" y="2075688"/>
+            <a:ext cx="960120" cy="347472"/>
+          </a:xfrm>
+          <a:prstGeom prst="roundRect">
+            <a:avLst>
+              <a:gd name="adj" fmla="val 30000"/>
+            </a:avLst>
+          </a:prstGeom>
+          <a:solidFill>
+            <a:srgbClr val="6E7A88"/>
+          </a:solidFill>
+          <a:ln>
+            <a:noFill/>
+          </a:ln>
+          <a:effectLst/>
+        </p:spPr>
+        <p:style>
+          <a:lnRef idx="1">
+            <a:schemeClr val="accent1"/>
+          </a:lnRef>
+          <a:fillRef idx="3">
+            <a:schemeClr val="accent1"/>
+          </a:fillRef>
+          <a:effectRef idx="2">
+            <a:schemeClr val="accent1"/>
+          </a:effectRef>
+          <a:fontRef idx="minor">
+            <a:schemeClr val="lt1"/>
+          </a:fontRef>
+        </p:style>
+        <p:txBody>
+          <a:bodyPr rtlCol="0" anchor="ctr" wrap="square" lIns="54864" rIns="54864" tIns="18288" bIns="18288"/>
+          <a:lstStyle/>
+          <a:p>
+            <a:pPr algn="ctr">
+              <a:lnSpc>
+                <a:spcPct val="100000"/>
+              </a:lnSpc>
+            </a:pPr>
+            <a:r>
+              <a:rPr sz="1250" b="1" i="0">
+                <a:solidFill>
+                  <a:srgbClr val="FFFFFF"/>
+                </a:solidFill>
+                <a:latin typeface="Meiryo"/>
+                <a:ea typeface="Meiryo"/>
+              </a:rPr>
+              <a:t>通常の PR</a:t>
+            </a:r>
+          </a:p>
+        </p:txBody>
+      </p:sp>
+      <p:sp>
+        <p:nvSpPr>
+          <p:cNvPr id="41" name="TextBox 40"/>
           <p:cNvSpPr txBox="1"/>
           <p:nvPr/>
         </p:nvSpPr>
         <p:spPr>
           <a:xfrm>
-            <a:off x="768096" y="1801368"/>
-            <a:ext cx="3971239" cy="384048"/>
+            <a:off x="1865376" y="1965960"/>
+            <a:ext cx="3834079" cy="566928"/>
           </a:xfrm>
           <a:prstGeom prst="rect">
             <a:avLst/>
@@ -9586,371 +9666,22 @@
           <a:p>
             <a:pPr algn="l">
               <a:lnSpc>
-                <a:spcPct val="105000"/>
+                <a:spcPct val="108000"/>
               </a:lnSpc>
             </a:pPr>
             <a:r>
-              <a:rPr sz="1500" b="1" i="0">
-                <a:solidFill>
-                  <a:srgbClr val="16385C"/>
-                </a:solidFill>
-                <a:latin typeface="Meiryo"/>
-                <a:ea typeface="Meiryo"/>
-              </a:rPr>
-              <a:t>通常の path relinking との違い</a:t>
-            </a:r>
-          </a:p>
-        </p:txBody>
-      </p:sp>
-      <p:graphicFrame>
-        <p:nvGraphicFramePr>
-          <p:cNvPr id="41" name="Table 40"/>
-          <p:cNvGraphicFramePr>
-            <a:graphicFrameLocks noGrp="1"/>
-          </p:cNvGraphicFramePr>
-          <p:nvPr/>
-        </p:nvGraphicFramePr>
-        <p:xfrm>
-          <a:off x="768096" y="2258568"/>
-          <a:ext cx="4940502" cy="1261872"/>
-        </p:xfrm>
-        <a:graphic>
-          <a:graphicData uri="http://schemas.openxmlformats.org/drawingml/2006/table">
-            <a:tbl>
-              <a:tblPr firstRow="0" bandRow="0">
-                <a:tableStyleId>{5940675A-B579-460E-94D1-54222C63F5DA}</a:tableStyleId>
-              </a:tblPr>
-              <a:tblGrid>
-                <a:gridCol w="617562"/>
-                <a:gridCol w="1543907"/>
-                <a:gridCol w="2779033"/>
-              </a:tblGrid>
-              <a:tr h="420624">
-                <a:tc>
-                  <a:txBody>
-                    <a:bodyPr wrap="square"/>
-                    <a:lstStyle/>
-                    <a:p>
-                      <a:pPr algn="l"/>
-                    </a:p>
-                  </a:txBody>
-                  <a:tcPr marL="82296" marR="54864" marT="18288" marB="18288" anchor="ctr">
-                    <a:solidFill>
-                      <a:srgbClr val="16385C"/>
-                    </a:solidFill>
-                  </a:tcPr>
-                </a:tc>
-                <a:tc>
-                  <a:txBody>
-                    <a:bodyPr wrap="square"/>
-                    <a:lstStyle/>
-                    <a:p>
-                      <a:pPr algn="ctr"/>
-                      <a:r>
-                        <a:rPr sz="1150" b="1" i="0">
-                          <a:solidFill>
-                            <a:srgbClr val="FFFFFF"/>
-                          </a:solidFill>
-                          <a:latin typeface="Meiryo"/>
-                          <a:ea typeface="Meiryo"/>
-                        </a:rPr>
-                        <a:t>通常の PR</a:t>
-                      </a:r>
-                    </a:p>
-                  </a:txBody>
-                  <a:tcPr marL="82296" marR="54864" marT="18288" marB="18288" anchor="ctr">
-                    <a:solidFill>
-                      <a:srgbClr val="16385C"/>
-                    </a:solidFill>
-                  </a:tcPr>
-                </a:tc>
-                <a:tc>
-                  <a:txBody>
-                    <a:bodyPr wrap="square"/>
-                    <a:lstStyle/>
-                    <a:p>
-                      <a:pPr algn="ctr"/>
-                      <a:r>
-                        <a:rPr sz="1150" b="1" i="0">
-                          <a:solidFill>
-                            <a:srgbClr val="FFFFFF"/>
-                          </a:solidFill>
-                          <a:latin typeface="Meiryo"/>
-                          <a:ea typeface="Meiryo"/>
-                        </a:rPr>
-                        <a:t>本研究（安定性誘導演算子）</a:t>
-                      </a:r>
-                    </a:p>
-                  </a:txBody>
-                  <a:tcPr marL="82296" marR="54864" marT="18288" marB="18288" anchor="ctr">
-                    <a:solidFill>
-                      <a:srgbClr val="16385C"/>
-                    </a:solidFill>
-                  </a:tcPr>
-                </a:tc>
-              </a:tr>
-              <a:tr h="420624">
-                <a:tc>
-                  <a:txBody>
-                    <a:bodyPr wrap="square"/>
-                    <a:lstStyle/>
-                    <a:p>
-                      <a:pPr algn="l"/>
-                      <a:r>
-                        <a:rPr sz="1150" b="0" i="0">
-                          <a:solidFill>
-                            <a:srgbClr val="26303A"/>
-                          </a:solidFill>
-                          <a:latin typeface="Meiryo"/>
-                          <a:ea typeface="Meiryo"/>
-                        </a:rPr>
-                        <a:t>誘導解</a:t>
-                      </a:r>
-                    </a:p>
-                  </a:txBody>
-                  <a:tcPr marL="82296" marR="54864" marT="18288" marB="18288" anchor="ctr">
-                    <a:solidFill>
-                      <a:srgbClr val="FFFFFF"/>
-                    </a:solidFill>
-                    <a:lnB w="9525" cap="flat">
-                      <a:solidFill>
-                        <a:srgbClr val="D6DEE7"/>
-                      </a:solidFill>
-                    </a:lnB>
-                  </a:tcPr>
-                </a:tc>
-                <a:tc>
-                  <a:txBody>
-                    <a:bodyPr wrap="square"/>
-                    <a:lstStyle/>
-                    <a:p>
-                      <a:pPr algn="ctr"/>
-                      <a:r>
-                        <a:rPr sz="1150" b="0" i="0">
-                          <a:solidFill>
-                            <a:srgbClr val="26303A"/>
-                          </a:solidFill>
-                          <a:latin typeface="Meiryo"/>
-                          <a:ea typeface="Meiryo"/>
-                        </a:rPr>
-                        <a:t>探索中の別の良い解</a:t>
-                      </a:r>
-                    </a:p>
-                  </a:txBody>
-                  <a:tcPr marL="82296" marR="54864" marT="18288" marB="18288" anchor="ctr">
-                    <a:solidFill>
-                      <a:srgbClr val="FFFFFF"/>
-                    </a:solidFill>
-                    <a:lnB w="9525" cap="flat">
-                      <a:solidFill>
-                        <a:srgbClr val="D6DEE7"/>
-                      </a:solidFill>
-                    </a:lnB>
-                  </a:tcPr>
-                </a:tc>
-                <a:tc>
-                  <a:txBody>
-                    <a:bodyPr wrap="square"/>
-                    <a:lstStyle/>
-                    <a:p>
-                      <a:pPr algn="ctr"/>
-                      <a:r>
-                        <a:rPr sz="1150" b="0" i="0">
-                          <a:solidFill>
-                            <a:srgbClr val="26303A"/>
-                          </a:solidFill>
-                          <a:latin typeface="Meiryo"/>
-                          <a:ea typeface="Meiryo"/>
-                        </a:rPr>
-                        <a:t>外乱前のスケジュール </a:t>
-                      </a:r>
-                      <a:r>
-                        <a:rPr sz="1150" b="0" i="1">
-                          <a:solidFill>
-                            <a:srgbClr val="26303A"/>
-                          </a:solidFill>
-                          <a:latin typeface="Meiryo"/>
-                          <a:ea typeface="Meiryo"/>
-                        </a:rPr>
-                        <a:t>S</a:t>
-                      </a:r>
-                      <a:r>
-                        <a:rPr sz="827" b="0" i="1" baseline="-22000">
-                          <a:solidFill>
-                            <a:srgbClr val="26303A"/>
-                          </a:solidFill>
-                          <a:latin typeface="Meiryo"/>
-                          <a:ea typeface="Meiryo"/>
-                        </a:rPr>
-                        <a:t>p</a:t>
-                      </a:r>
-                      <a:r>
-                        <a:rPr sz="1150" b="0" i="0">
-                          <a:solidFill>
-                            <a:srgbClr val="26303A"/>
-                          </a:solidFill>
-                          <a:latin typeface="Meiryo"/>
-                          <a:ea typeface="Meiryo"/>
-                        </a:rPr>
-                        <a:t> に</a:t>
-                      </a:r>
-                      <a:r>
-                        <a:rPr sz="1150" b="1" i="0">
-                          <a:solidFill>
-                            <a:srgbClr val="16385C"/>
-                          </a:solidFill>
-                          <a:latin typeface="Meiryo"/>
-                          <a:ea typeface="Meiryo"/>
-                        </a:rPr>
-                        <a:t>固定</a:t>
-                      </a:r>
-                    </a:p>
-                  </a:txBody>
-                  <a:tcPr marL="82296" marR="54864" marT="18288" marB="18288" anchor="ctr">
-                    <a:solidFill>
-                      <a:srgbClr val="FFFFFF"/>
-                    </a:solidFill>
-                    <a:lnB w="9525" cap="flat">
-                      <a:solidFill>
-                        <a:srgbClr val="D6DEE7"/>
-                      </a:solidFill>
-                    </a:lnB>
-                  </a:tcPr>
-                </a:tc>
-              </a:tr>
-              <a:tr h="420624">
-                <a:tc>
-                  <a:txBody>
-                    <a:bodyPr wrap="square"/>
-                    <a:lstStyle/>
-                    <a:p>
-                      <a:pPr algn="l"/>
-                      <a:r>
-                        <a:rPr sz="1150" b="0" i="0">
-                          <a:solidFill>
-                            <a:srgbClr val="26303A"/>
-                          </a:solidFill>
-                          <a:latin typeface="Meiryo"/>
-                          <a:ea typeface="Meiryo"/>
-                        </a:rPr>
-                        <a:t>ねらい</a:t>
-                      </a:r>
-                    </a:p>
-                  </a:txBody>
-                  <a:tcPr marL="82296" marR="54864" marT="18288" marB="18288" anchor="ctr">
-                    <a:solidFill>
-                      <a:srgbClr val="F6F9FB"/>
-                    </a:solidFill>
-                    <a:lnB w="9525" cap="flat">
-                      <a:solidFill>
-                        <a:srgbClr val="D6DEE7"/>
-                      </a:solidFill>
-                    </a:lnB>
-                  </a:tcPr>
-                </a:tc>
-                <a:tc>
-                  <a:txBody>
-                    <a:bodyPr wrap="square"/>
-                    <a:lstStyle/>
-                    <a:p>
-                      <a:pPr algn="ctr"/>
-                      <a:r>
-                        <a:rPr sz="1150" b="0" i="0">
-                          <a:solidFill>
-                            <a:srgbClr val="26303A"/>
-                          </a:solidFill>
-                          <a:latin typeface="Meiryo"/>
-                          <a:ea typeface="Meiryo"/>
-                        </a:rPr>
-                        <a:t>良い解の間を探索</a:t>
-                      </a:r>
-                    </a:p>
-                  </a:txBody>
-                  <a:tcPr marL="82296" marR="54864" marT="18288" marB="18288" anchor="ctr">
-                    <a:solidFill>
-                      <a:srgbClr val="F6F9FB"/>
-                    </a:solidFill>
-                    <a:lnB w="9525" cap="flat">
-                      <a:solidFill>
-                        <a:srgbClr val="D6DEE7"/>
-                      </a:solidFill>
-                    </a:lnB>
-                  </a:tcPr>
-                </a:tc>
-                <a:tc>
-                  <a:txBody>
-                    <a:bodyPr wrap="square"/>
-                    <a:lstStyle/>
-                    <a:p>
-                      <a:pPr algn="ctr"/>
-                      <a:r>
-                        <a:rPr sz="1150" b="0" i="1">
-                          <a:solidFill>
-                            <a:srgbClr val="26303A"/>
-                          </a:solidFill>
-                          <a:latin typeface="Meiryo"/>
-                          <a:ea typeface="Meiryo"/>
-                        </a:rPr>
-                        <a:t>S</a:t>
-                      </a:r>
-                      <a:r>
-                        <a:rPr sz="827" b="0" i="1" baseline="-22000">
-                          <a:solidFill>
-                            <a:srgbClr val="26303A"/>
-                          </a:solidFill>
-                          <a:latin typeface="Meiryo"/>
-                          <a:ea typeface="Meiryo"/>
-                        </a:rPr>
-                        <a:t>p</a:t>
-                      </a:r>
-                      <a:r>
-                        <a:rPr sz="1150" b="0" i="0">
-                          <a:solidFill>
-                            <a:srgbClr val="26303A"/>
-                          </a:solidFill>
-                          <a:latin typeface="Meiryo"/>
-                          <a:ea typeface="Meiryo"/>
-                        </a:rPr>
-                        <a:t> に近づけて</a:t>
-                      </a:r>
-                      <a:r>
-                        <a:rPr sz="1150" b="1" i="0">
-                          <a:solidFill>
-                            <a:srgbClr val="16385C"/>
-                          </a:solidFill>
-                          <a:latin typeface="Meiryo"/>
-                          <a:ea typeface="Meiryo"/>
-                        </a:rPr>
-                        <a:t>変更量の小さい解</a:t>
-                      </a:r>
-                      <a:r>
-                        <a:rPr sz="1150" b="0" i="0">
-                          <a:solidFill>
-                            <a:srgbClr val="26303A"/>
-                          </a:solidFill>
-                          <a:latin typeface="Meiryo"/>
-                          <a:ea typeface="Meiryo"/>
-                        </a:rPr>
-                        <a:t>を得る</a:t>
-                      </a:r>
-                    </a:p>
-                  </a:txBody>
-                  <a:tcPr marL="82296" marR="54864" marT="18288" marB="18288" anchor="ctr">
-                    <a:solidFill>
-                      <a:srgbClr val="F6F9FB"/>
-                    </a:solidFill>
-                    <a:lnB w="9525" cap="flat">
-                      <a:solidFill>
-                        <a:srgbClr val="D6DEE7"/>
-                      </a:solidFill>
-                    </a:lnB>
-                  </a:tcPr>
-                </a:tc>
-              </a:tr>
-            </a:tbl>
-          </a:graphicData>
-        </a:graphic>
-      </p:graphicFrame>
+              <a:rPr sz="1350" b="0" i="0">
+                <a:solidFill>
+                  <a:srgbClr val="6E7A88"/>
+                </a:solidFill>
+                <a:latin typeface="Meiryo"/>
+                <a:ea typeface="Meiryo"/>
+              </a:rPr>
+              <a:t>探索中に得た良い解どうしを結び，その間を探索する</a:t>
+            </a:r>
+          </a:p>
+        </p:txBody>
+      </p:sp>
       <p:sp>
         <p:nvSpPr>
           <p:cNvPr id="42" name="Rounded Rectangle 41"/>
@@ -9959,8 +9690,224 @@
         </p:nvSpPr>
         <p:spPr>
           <a:xfrm>
-            <a:off x="768096" y="3749040"/>
-            <a:ext cx="868680" cy="365760"/>
+            <a:off x="768096" y="2734056"/>
+            <a:ext cx="960120" cy="347472"/>
+          </a:xfrm>
+          <a:prstGeom prst="roundRect">
+            <a:avLst>
+              <a:gd name="adj" fmla="val 30000"/>
+            </a:avLst>
+          </a:prstGeom>
+          <a:solidFill>
+            <a:srgbClr val="16385C"/>
+          </a:solidFill>
+          <a:ln>
+            <a:noFill/>
+          </a:ln>
+          <a:effectLst/>
+        </p:spPr>
+        <p:style>
+          <a:lnRef idx="1">
+            <a:schemeClr val="accent1"/>
+          </a:lnRef>
+          <a:fillRef idx="3">
+            <a:schemeClr val="accent1"/>
+          </a:fillRef>
+          <a:effectRef idx="2">
+            <a:schemeClr val="accent1"/>
+          </a:effectRef>
+          <a:fontRef idx="minor">
+            <a:schemeClr val="lt1"/>
+          </a:fontRef>
+        </p:style>
+        <p:txBody>
+          <a:bodyPr rtlCol="0" anchor="ctr" wrap="square" lIns="54864" rIns="54864" tIns="18288" bIns="18288"/>
+          <a:lstStyle/>
+          <a:p>
+            <a:pPr algn="ctr">
+              <a:lnSpc>
+                <a:spcPct val="100000"/>
+              </a:lnSpc>
+            </a:pPr>
+            <a:r>
+              <a:rPr sz="1250" b="1" i="0">
+                <a:solidFill>
+                  <a:srgbClr val="FFFFFF"/>
+                </a:solidFill>
+                <a:latin typeface="Meiryo"/>
+                <a:ea typeface="Meiryo"/>
+              </a:rPr>
+              <a:t>本研究</a:t>
+            </a:r>
+          </a:p>
+        </p:txBody>
+      </p:sp>
+      <p:sp>
+        <p:nvSpPr>
+          <p:cNvPr id="43" name="TextBox 42"/>
+          <p:cNvSpPr txBox="1"/>
+          <p:nvPr/>
+        </p:nvSpPr>
+        <p:spPr>
+          <a:xfrm>
+            <a:off x="1865376" y="2532888"/>
+            <a:ext cx="3834079" cy="749808"/>
+          </a:xfrm>
+          <a:prstGeom prst="rect">
+            <a:avLst/>
+          </a:prstGeom>
+          <a:noFill/>
+        </p:spPr>
+        <p:txBody>
+          <a:bodyPr wrap="square" anchor="ctr" lIns="18288" rIns="18288" tIns="9144" bIns="9144">
+            <a:spAutoFit/>
+          </a:bodyPr>
+          <a:lstStyle/>
+          <a:p>
+            <a:pPr algn="l">
+              <a:lnSpc>
+                <a:spcPct val="108000"/>
+              </a:lnSpc>
+            </a:pPr>
+            <a:r>
+              <a:rPr sz="1450" b="0" i="0">
+                <a:solidFill>
+                  <a:srgbClr val="26303A"/>
+                </a:solidFill>
+                <a:latin typeface="Meiryo"/>
+                <a:ea typeface="Meiryo"/>
+              </a:rPr>
+              <a:t>誘導解を初期スケジュール </a:t>
+            </a:r>
+            <a:r>
+              <a:rPr sz="1450" b="0" i="1">
+                <a:solidFill>
+                  <a:srgbClr val="26303A"/>
+                </a:solidFill>
+                <a:latin typeface="Meiryo"/>
+                <a:ea typeface="Meiryo"/>
+              </a:rPr>
+              <a:t>S</a:t>
+            </a:r>
+            <a:r>
+              <a:rPr sz="1044" b="0" i="1" baseline="-22000">
+                <a:solidFill>
+                  <a:srgbClr val="26303A"/>
+                </a:solidFill>
+                <a:latin typeface="Meiryo"/>
+                <a:ea typeface="Meiryo"/>
+              </a:rPr>
+              <a:t>p</a:t>
+            </a:r>
+            <a:r>
+              <a:rPr sz="1450" b="0" i="0">
+                <a:solidFill>
+                  <a:srgbClr val="26303A"/>
+                </a:solidFill>
+                <a:latin typeface="Meiryo"/>
+                <a:ea typeface="Meiryo"/>
+              </a:rPr>
+              <a:t> に</a:t>
+            </a:r>
+            <a:r>
+              <a:rPr sz="1450" b="1" i="0">
+                <a:solidFill>
+                  <a:srgbClr val="16385C"/>
+                </a:solidFill>
+                <a:latin typeface="Meiryo"/>
+                <a:ea typeface="Meiryo"/>
+              </a:rPr>
+              <a:t>固定</a:t>
+            </a:r>
+            <a:r>
+              <a:rPr sz="1450" b="0" i="0">
+                <a:solidFill>
+                  <a:srgbClr val="26303A"/>
+                </a:solidFill>
+                <a:latin typeface="Meiryo"/>
+                <a:ea typeface="Meiryo"/>
+              </a:rPr>
+              <a:t>し，解を </a:t>
+            </a:r>
+            <a:r>
+              <a:rPr sz="1450" b="0" i="1">
+                <a:solidFill>
+                  <a:srgbClr val="26303A"/>
+                </a:solidFill>
+                <a:latin typeface="Meiryo"/>
+                <a:ea typeface="Meiryo"/>
+              </a:rPr>
+              <a:t>S</a:t>
+            </a:r>
+            <a:r>
+              <a:rPr sz="1044" b="0" i="1" baseline="-22000">
+                <a:solidFill>
+                  <a:srgbClr val="26303A"/>
+                </a:solidFill>
+                <a:latin typeface="Meiryo"/>
+                <a:ea typeface="Meiryo"/>
+              </a:rPr>
+              <a:t>p</a:t>
+            </a:r>
+            <a:r>
+              <a:rPr sz="1450" b="0" i="0">
+                <a:solidFill>
+                  <a:srgbClr val="26303A"/>
+                </a:solidFill>
+                <a:latin typeface="Meiryo"/>
+                <a:ea typeface="Meiryo"/>
+              </a:rPr>
+              <a:t> に近づける操作にする</a:t>
+            </a:r>
+          </a:p>
+        </p:txBody>
+      </p:sp>
+      <p:cxnSp>
+        <p:nvCxnSpPr>
+          <p:cNvPr id="44" name="Connector 43"/>
+          <p:cNvCxnSpPr/>
+          <p:nvPr/>
+        </p:nvCxnSpPr>
+        <p:spPr>
+          <a:xfrm>
+            <a:off x="768096" y="3300984"/>
+            <a:ext cx="4940503" cy="0"/>
+          </a:xfrm>
+          <a:prstGeom prst="bentConnector3">
+            <a:avLst/>
+          </a:prstGeom>
+          <a:ln w="12700">
+            <a:solidFill>
+              <a:srgbClr val="D6DEE7"/>
+            </a:solidFill>
+          </a:ln>
+          <a:effectLst/>
+        </p:spPr>
+        <p:style>
+          <a:lnRef idx="2">
+            <a:schemeClr val="accent1"/>
+          </a:lnRef>
+          <a:fillRef idx="0">
+            <a:schemeClr val="accent1"/>
+          </a:fillRef>
+          <a:effectRef idx="1">
+            <a:schemeClr val="accent1"/>
+          </a:effectRef>
+          <a:fontRef idx="minor">
+            <a:schemeClr val="tx1"/>
+          </a:fontRef>
+        </p:style>
+      </p:cxnSp>
+      <p:sp>
+        <p:nvSpPr>
+          <p:cNvPr id="45" name="Rounded Rectangle 44"/>
+          <p:cNvSpPr/>
+          <p:nvPr/>
+        </p:nvSpPr>
+        <p:spPr>
+          <a:xfrm>
+            <a:off x="768096" y="3520440"/>
+            <a:ext cx="960120" cy="347472"/>
           </a:xfrm>
           <a:prstGeom prst="roundRect">
             <a:avLst>
@@ -9999,7 +9946,7 @@
               </a:lnSpc>
             </a:pPr>
             <a:r>
-              <a:rPr sz="1350" b="1" i="0">
+              <a:rPr sz="1250" b="1" i="0">
                 <a:solidFill>
                   <a:srgbClr val="FFFFFF"/>
                 </a:solidFill>
@@ -10013,14 +9960,14 @@
       </p:sp>
       <p:sp>
         <p:nvSpPr>
-          <p:cNvPr id="43" name="TextBox 42"/>
+          <p:cNvPr id="46" name="TextBox 45"/>
           <p:cNvSpPr txBox="1"/>
           <p:nvPr/>
         </p:nvSpPr>
         <p:spPr>
           <a:xfrm>
-            <a:off x="1773936" y="3703320"/>
-            <a:ext cx="3925519" cy="457200"/>
+            <a:off x="1865376" y="3410712"/>
+            <a:ext cx="3834079" cy="566928"/>
           </a:xfrm>
           <a:prstGeom prst="rect">
             <a:avLst/>
@@ -10093,14 +10040,14 @@
       </p:sp>
       <p:sp>
         <p:nvSpPr>
-          <p:cNvPr id="44" name="Rounded Rectangle 43"/>
+          <p:cNvPr id="47" name="Rounded Rectangle 46"/>
           <p:cNvSpPr/>
           <p:nvPr/>
         </p:nvSpPr>
         <p:spPr>
           <a:xfrm>
-            <a:off x="768096" y="4270248"/>
-            <a:ext cx="868680" cy="365760"/>
+            <a:off x="768096" y="4087368"/>
+            <a:ext cx="960120" cy="347472"/>
           </a:xfrm>
           <a:prstGeom prst="roundRect">
             <a:avLst>
@@ -10139,7 +10086,7 @@
               </a:lnSpc>
             </a:pPr>
             <a:r>
-              <a:rPr sz="1350" b="1" i="0">
+              <a:rPr sz="1250" b="1" i="0">
                 <a:solidFill>
                   <a:srgbClr val="FFFFFF"/>
                 </a:solidFill>
@@ -10149,7 +10096,7 @@
               <a:t>PR-</a:t>
             </a:r>
             <a:r>
-              <a:rPr sz="1350" b="1" i="1">
+              <a:rPr sz="1250" b="1" i="1">
                 <a:solidFill>
                   <a:srgbClr val="FFFFFF"/>
                 </a:solidFill>
@@ -10163,14 +10110,14 @@
       </p:sp>
       <p:sp>
         <p:nvSpPr>
-          <p:cNvPr id="45" name="TextBox 44"/>
+          <p:cNvPr id="48" name="TextBox 47"/>
           <p:cNvSpPr txBox="1"/>
           <p:nvPr/>
         </p:nvSpPr>
         <p:spPr>
           <a:xfrm>
-            <a:off x="1773936" y="4160520"/>
-            <a:ext cx="3925519" cy="585216"/>
+            <a:off x="1865376" y="3977639"/>
+            <a:ext cx="3834079" cy="566928"/>
           </a:xfrm>
           <a:prstGeom prst="rect">
             <a:avLst/>
@@ -10246,71 +10193,21 @@
                 <a:latin typeface="Meiryo"/>
                 <a:ea typeface="Meiryo"/>
               </a:rPr>
-              <a:t>．</a:t>
-            </a:r>
-            <a:r>
-              <a:rPr sz="1350" b="0" i="1">
-                <a:solidFill>
-                  <a:srgbClr val="26303A"/>
-                </a:solidFill>
-                <a:latin typeface="Meiryo"/>
-                <a:ea typeface="Meiryo"/>
-              </a:rPr>
-              <a:t>d</a:t>
-            </a:r>
-            <a:r>
-              <a:rPr sz="1350" b="0" i="0">
-                <a:solidFill>
-                  <a:srgbClr val="26303A"/>
-                </a:solidFill>
-                <a:latin typeface="Meiryo"/>
-                <a:ea typeface="Meiryo"/>
-              </a:rPr>
-              <a:t>：</a:t>
-            </a:r>
-            <a:r>
-              <a:rPr sz="1350" b="0" i="1">
-                <a:solidFill>
-                  <a:srgbClr val="26303A"/>
-                </a:solidFill>
-                <a:latin typeface="Meiryo"/>
-                <a:ea typeface="Meiryo"/>
-              </a:rPr>
-              <a:t>S</a:t>
-            </a:r>
-            <a:r>
-              <a:rPr sz="971" b="0" i="1" baseline="-22000">
-                <a:solidFill>
-                  <a:srgbClr val="26303A"/>
-                </a:solidFill>
-                <a:latin typeface="Meiryo"/>
-                <a:ea typeface="Meiryo"/>
-              </a:rPr>
-              <a:t>p</a:t>
-            </a:r>
-            <a:r>
-              <a:rPr sz="1350" b="0" i="0">
-                <a:solidFill>
-                  <a:srgbClr val="26303A"/>
-                </a:solidFill>
-                <a:latin typeface="Meiryo"/>
-                <a:ea typeface="Meiryo"/>
-              </a:rPr>
-              <a:t> と順位が異なる作業数）</a:t>
-            </a:r>
-          </a:p>
-        </p:txBody>
-      </p:sp>
-      <p:sp>
-        <p:nvSpPr>
-          <p:cNvPr id="46" name="Rounded Rectangle 45"/>
+              <a:t> で変える）</a:t>
+            </a:r>
+          </a:p>
+        </p:txBody>
+      </p:sp>
+      <p:sp>
+        <p:nvSpPr>
+          <p:cNvPr id="49" name="Rounded Rectangle 48"/>
           <p:cNvSpPr/>
           <p:nvPr/>
         </p:nvSpPr>
         <p:spPr>
           <a:xfrm>
-            <a:off x="566928" y="4965192"/>
-            <a:ext cx="5342839" cy="1207008"/>
+            <a:off x="566928" y="4828031"/>
+            <a:ext cx="5342839" cy="1344168"/>
           </a:xfrm>
           <a:prstGeom prst="roundRect">
             <a:avLst>
@@ -10351,14 +10248,14 @@
       </p:sp>
       <p:sp>
         <p:nvSpPr>
-          <p:cNvPr id="47" name="TextBox 46"/>
+          <p:cNvPr id="50" name="TextBox 49"/>
           <p:cNvSpPr txBox="1"/>
           <p:nvPr/>
         </p:nvSpPr>
         <p:spPr>
           <a:xfrm>
-            <a:off x="795528" y="5020055"/>
-            <a:ext cx="4885639" cy="1097280"/>
+            <a:off x="795528" y="4882895"/>
+            <a:ext cx="4885639" cy="1234440"/>
           </a:xfrm>
           <a:prstGeom prst="rect">
             <a:avLst/>

--- a/doc/presentation_materials/JIMA2026fall_発表.pptx
+++ b/doc/presentation_materials/JIMA2026fall_発表.pptx
@@ -7407,7 +7407,7 @@
                 <a:latin typeface="Meiryo"/>
                 <a:ea typeface="Meiryo"/>
               </a:rPr>
-              <a:t>提案：安定性誘導演算子 — </a:t>
+              <a:t>提案：安定性誘導演算子（PR と PR-</a:t>
             </a:r>
             <a:r>
               <a:rPr sz="2450" b="1" i="1">
@@ -7417,27 +7417,17 @@
                 <a:latin typeface="Meiryo"/>
                 <a:ea typeface="Meiryo"/>
               </a:rPr>
-              <a:t>S</a:t>
-            </a:r>
-            <a:r>
-              <a:rPr sz="1764" b="1" i="1" baseline="-22000">
+              <a:t>k</a:t>
+            </a:r>
+            <a:r>
+              <a:rPr sz="2450" b="1" i="0">
                 <a:solidFill>
                   <a:srgbClr val="16385C"/>
                 </a:solidFill>
                 <a:latin typeface="Meiryo"/>
                 <a:ea typeface="Meiryo"/>
               </a:rPr>
-              <a:t>p</a:t>
-            </a:r>
-            <a:r>
-              <a:rPr sz="2450" b="1" i="0">
-                <a:solidFill>
-                  <a:srgbClr val="16385C"/>
-                </a:solidFill>
-                <a:latin typeface="Meiryo"/>
-                <a:ea typeface="Meiryo"/>
-              </a:rPr>
-              <a:t> を誘導解とする path relinking</a:t>
+              <a:t>）</a:t>
             </a:r>
           </a:p>
         </p:txBody>
@@ -7557,7 +7547,7 @@
                 <a:latin typeface="Meiryo"/>
                 <a:ea typeface="Meiryo"/>
               </a:rPr>
-              <a:t>提案は PR の誘導解を </a:t>
+              <a:t>PR の誘導解を初期スケジュール </a:t>
             </a:r>
             <a:r>
               <a:rPr sz="1500" b="1" i="1">
@@ -7587,7 +7577,7 @@
                 <a:latin typeface="Meiryo"/>
                 <a:ea typeface="Meiryo"/>
               </a:rPr>
-              <a:t> に固定すること．解を </a:t>
+              <a:t> に固定し，現在解から </a:t>
             </a:r>
             <a:r>
               <a:rPr sz="1500" b="1" i="1">
@@ -7617,7 +7607,7 @@
                 <a:latin typeface="Meiryo"/>
                 <a:ea typeface="Meiryo"/>
               </a:rPr>
-              <a:t> に近づける操作になり，両構造に同じ形で組み込める</a:t>
+              <a:t> へ swap でたどる経路上の解を返す操作にする</a:t>
             </a:r>
           </a:p>
         </p:txBody>
@@ -7693,16 +7683,320 @@
           </a:p>
         </p:txBody>
       </p:sp>
-      <p:sp>
-        <p:nvSpPr>
-          <p:cNvPr id="8" name="Rounded Rectangle 7"/>
+      <p:pic>
+        <p:nvPicPr>
+          <p:cNvPr id="8" name="Picture 7" descr="concept_op.png"/>
+          <p:cNvPicPr>
+            <a:picLocks noChangeAspect="1"/>
+          </p:cNvPicPr>
+          <p:nvPr/>
+        </p:nvPicPr>
+        <p:blipFill>
+          <a:blip r:embed="rId2"/>
+          <a:stretch>
+            <a:fillRect/>
+          </a:stretch>
+        </p:blipFill>
+        <p:spPr>
+          <a:xfrm>
+            <a:off x="521207" y="1691640"/>
+            <a:ext cx="5532120" cy="3640134"/>
+          </a:xfrm>
+          <a:prstGeom prst="rect">
+            <a:avLst/>
+          </a:prstGeom>
+        </p:spPr>
+      </p:pic>
+      <p:sp>
+        <p:nvSpPr>
+          <p:cNvPr id="9" name="Rounded Rectangle 8"/>
           <p:cNvSpPr/>
           <p:nvPr/>
         </p:nvSpPr>
         <p:spPr>
           <a:xfrm>
-            <a:off x="6184087" y="1691640"/>
-            <a:ext cx="5440680" cy="4480560"/>
+            <a:off x="566928" y="5459790"/>
+            <a:ext cx="960120" cy="310896"/>
+          </a:xfrm>
+          <a:prstGeom prst="roundRect">
+            <a:avLst>
+              <a:gd name="adj" fmla="val 30000"/>
+            </a:avLst>
+          </a:prstGeom>
+          <a:solidFill>
+            <a:srgbClr val="6E7A88"/>
+          </a:solidFill>
+          <a:ln>
+            <a:noFill/>
+          </a:ln>
+          <a:effectLst/>
+        </p:spPr>
+        <p:style>
+          <a:lnRef idx="1">
+            <a:schemeClr val="accent1"/>
+          </a:lnRef>
+          <a:fillRef idx="3">
+            <a:schemeClr val="accent1"/>
+          </a:fillRef>
+          <a:effectRef idx="2">
+            <a:schemeClr val="accent1"/>
+          </a:effectRef>
+          <a:fontRef idx="minor">
+            <a:schemeClr val="lt1"/>
+          </a:fontRef>
+        </p:style>
+        <p:txBody>
+          <a:bodyPr rtlCol="0" anchor="ctr" wrap="square" lIns="54864" rIns="54864" tIns="18288" bIns="18288"/>
+          <a:lstStyle/>
+          <a:p>
+            <a:pPr algn="ctr">
+              <a:lnSpc>
+                <a:spcPct val="100000"/>
+              </a:lnSpc>
+            </a:pPr>
+            <a:r>
+              <a:rPr sz="1200" b="1" i="0">
+                <a:solidFill>
+                  <a:srgbClr val="FFFFFF"/>
+                </a:solidFill>
+                <a:latin typeface="Meiryo"/>
+                <a:ea typeface="Meiryo"/>
+              </a:rPr>
+              <a:t>通常の PR</a:t>
+            </a:r>
+          </a:p>
+        </p:txBody>
+      </p:sp>
+      <p:sp>
+        <p:nvSpPr>
+          <p:cNvPr id="10" name="TextBox 9"/>
+          <p:cNvSpPr txBox="1"/>
+          <p:nvPr/>
+        </p:nvSpPr>
+        <p:spPr>
+          <a:xfrm>
+            <a:off x="1664207" y="5423214"/>
+            <a:ext cx="4343400" cy="384048"/>
+          </a:xfrm>
+          <a:prstGeom prst="rect">
+            <a:avLst/>
+          </a:prstGeom>
+          <a:noFill/>
+        </p:spPr>
+        <p:txBody>
+          <a:bodyPr wrap="square" anchor="ctr" lIns="18288" rIns="18288" tIns="9144" bIns="9144">
+            <a:spAutoFit/>
+          </a:bodyPr>
+          <a:lstStyle/>
+          <a:p>
+            <a:pPr algn="l">
+              <a:lnSpc>
+                <a:spcPct val="105000"/>
+              </a:lnSpc>
+            </a:pPr>
+            <a:r>
+              <a:rPr sz="1300" b="0" i="0">
+                <a:solidFill>
+                  <a:srgbClr val="6E7A88"/>
+                </a:solidFill>
+                <a:latin typeface="Meiryo"/>
+                <a:ea typeface="Meiryo"/>
+              </a:rPr>
+              <a:t>探索中に得た良い解どうしを結び，その間を探索する</a:t>
+            </a:r>
+          </a:p>
+        </p:txBody>
+      </p:sp>
+      <p:sp>
+        <p:nvSpPr>
+          <p:cNvPr id="11" name="Rounded Rectangle 10"/>
+          <p:cNvSpPr/>
+          <p:nvPr/>
+        </p:nvSpPr>
+        <p:spPr>
+          <a:xfrm>
+            <a:off x="566928" y="5843838"/>
+            <a:ext cx="960120" cy="310896"/>
+          </a:xfrm>
+          <a:prstGeom prst="roundRect">
+            <a:avLst>
+              <a:gd name="adj" fmla="val 30000"/>
+            </a:avLst>
+          </a:prstGeom>
+          <a:solidFill>
+            <a:srgbClr val="16385C"/>
+          </a:solidFill>
+          <a:ln>
+            <a:noFill/>
+          </a:ln>
+          <a:effectLst/>
+        </p:spPr>
+        <p:style>
+          <a:lnRef idx="1">
+            <a:schemeClr val="accent1"/>
+          </a:lnRef>
+          <a:fillRef idx="3">
+            <a:schemeClr val="accent1"/>
+          </a:fillRef>
+          <a:effectRef idx="2">
+            <a:schemeClr val="accent1"/>
+          </a:effectRef>
+          <a:fontRef idx="minor">
+            <a:schemeClr val="lt1"/>
+          </a:fontRef>
+        </p:style>
+        <p:txBody>
+          <a:bodyPr rtlCol="0" anchor="ctr" wrap="square" lIns="54864" rIns="54864" tIns="18288" bIns="18288"/>
+          <a:lstStyle/>
+          <a:p>
+            <a:pPr algn="ctr">
+              <a:lnSpc>
+                <a:spcPct val="100000"/>
+              </a:lnSpc>
+            </a:pPr>
+            <a:r>
+              <a:rPr sz="1200" b="1" i="0">
+                <a:solidFill>
+                  <a:srgbClr val="FFFFFF"/>
+                </a:solidFill>
+                <a:latin typeface="Meiryo"/>
+                <a:ea typeface="Meiryo"/>
+              </a:rPr>
+              <a:t>本研究</a:t>
+            </a:r>
+          </a:p>
+        </p:txBody>
+      </p:sp>
+      <p:sp>
+        <p:nvSpPr>
+          <p:cNvPr id="12" name="TextBox 11"/>
+          <p:cNvSpPr txBox="1"/>
+          <p:nvPr/>
+        </p:nvSpPr>
+        <p:spPr>
+          <a:xfrm>
+            <a:off x="1664207" y="5807262"/>
+            <a:ext cx="4343400" cy="384048"/>
+          </a:xfrm>
+          <a:prstGeom prst="rect">
+            <a:avLst/>
+          </a:prstGeom>
+          <a:noFill/>
+        </p:spPr>
+        <p:txBody>
+          <a:bodyPr wrap="square" anchor="ctr" lIns="18288" rIns="18288" tIns="9144" bIns="9144">
+            <a:spAutoFit/>
+          </a:bodyPr>
+          <a:lstStyle/>
+          <a:p>
+            <a:pPr algn="l">
+              <a:lnSpc>
+                <a:spcPct val="105000"/>
+              </a:lnSpc>
+            </a:pPr>
+            <a:r>
+              <a:rPr sz="1300" b="0" i="0">
+                <a:solidFill>
+                  <a:srgbClr val="26303A"/>
+                </a:solidFill>
+                <a:latin typeface="Meiryo"/>
+                <a:ea typeface="Meiryo"/>
+              </a:rPr>
+              <a:t>誘導解を </a:t>
+            </a:r>
+            <a:r>
+              <a:rPr sz="1300" b="0" i="1">
+                <a:solidFill>
+                  <a:srgbClr val="26303A"/>
+                </a:solidFill>
+                <a:latin typeface="Meiryo"/>
+                <a:ea typeface="Meiryo"/>
+              </a:rPr>
+              <a:t>S</a:t>
+            </a:r>
+            <a:r>
+              <a:rPr sz="936" b="0" i="1" baseline="-22000">
+                <a:solidFill>
+                  <a:srgbClr val="26303A"/>
+                </a:solidFill>
+                <a:latin typeface="Meiryo"/>
+                <a:ea typeface="Meiryo"/>
+              </a:rPr>
+              <a:t>p</a:t>
+            </a:r>
+            <a:r>
+              <a:rPr sz="1300" b="0" i="0">
+                <a:solidFill>
+                  <a:srgbClr val="26303A"/>
+                </a:solidFill>
+                <a:latin typeface="Meiryo"/>
+                <a:ea typeface="Meiryo"/>
+              </a:rPr>
+              <a:t> に</a:t>
+            </a:r>
+            <a:r>
+              <a:rPr sz="1300" b="1" i="0">
+                <a:solidFill>
+                  <a:srgbClr val="16385C"/>
+                </a:solidFill>
+                <a:latin typeface="Meiryo"/>
+                <a:ea typeface="Meiryo"/>
+              </a:rPr>
+              <a:t>固定</a:t>
+            </a:r>
+            <a:r>
+              <a:rPr sz="1300" b="0" i="0">
+                <a:solidFill>
+                  <a:srgbClr val="26303A"/>
+                </a:solidFill>
+                <a:latin typeface="Meiryo"/>
+                <a:ea typeface="Meiryo"/>
+              </a:rPr>
+              <a:t> → 解を </a:t>
+            </a:r>
+            <a:r>
+              <a:rPr sz="1300" b="0" i="1">
+                <a:solidFill>
+                  <a:srgbClr val="26303A"/>
+                </a:solidFill>
+                <a:latin typeface="Meiryo"/>
+                <a:ea typeface="Meiryo"/>
+              </a:rPr>
+              <a:t>S</a:t>
+            </a:r>
+            <a:r>
+              <a:rPr sz="936" b="0" i="1" baseline="-22000">
+                <a:solidFill>
+                  <a:srgbClr val="26303A"/>
+                </a:solidFill>
+                <a:latin typeface="Meiryo"/>
+                <a:ea typeface="Meiryo"/>
+              </a:rPr>
+              <a:t>p</a:t>
+            </a:r>
+            <a:r>
+              <a:rPr sz="1300" b="0" i="0">
+                <a:solidFill>
+                  <a:srgbClr val="26303A"/>
+                </a:solidFill>
+                <a:latin typeface="Meiryo"/>
+                <a:ea typeface="Meiryo"/>
+              </a:rPr>
+              <a:t> に近づける操作になる</a:t>
+            </a:r>
+          </a:p>
+        </p:txBody>
+      </p:sp>
+      <p:sp>
+        <p:nvSpPr>
+          <p:cNvPr id="13" name="Rounded Rectangle 12"/>
+          <p:cNvSpPr/>
+          <p:nvPr/>
+        </p:nvSpPr>
+        <p:spPr>
+          <a:xfrm>
+            <a:off x="6373368" y="1691640"/>
+            <a:ext cx="5251399" cy="3794760"/>
           </a:xfrm>
           <a:prstGeom prst="roundRect">
             <a:avLst>
@@ -7743,14 +8037,14 @@
       </p:sp>
       <p:sp>
         <p:nvSpPr>
-          <p:cNvPr id="9" name="TextBox 8"/>
+          <p:cNvPr id="14" name="TextBox 13"/>
           <p:cNvSpPr txBox="1"/>
           <p:nvPr/>
         </p:nvSpPr>
         <p:spPr>
           <a:xfrm>
-            <a:off x="6412687" y="1783080"/>
-            <a:ext cx="4983480" cy="365760"/>
+            <a:off x="6601968" y="1764792"/>
+            <a:ext cx="4794199" cy="329184"/>
           </a:xfrm>
           <a:prstGeom prst="rect">
             <a:avLst/>
@@ -7758,7 +8052,7 @@
           <a:noFill/>
         </p:spPr>
         <p:txBody>
-          <a:bodyPr wrap="square" anchor="t" lIns="18288" rIns="18288" tIns="9144" bIns="9144">
+          <a:bodyPr wrap="square" anchor="ctr" lIns="18288" rIns="18288" tIns="9144" bIns="9144">
             <a:spAutoFit/>
           </a:bodyPr>
           <a:lstStyle/>
@@ -7813,14 +8107,14 @@
       </p:sp>
       <p:sp>
         <p:nvSpPr>
-          <p:cNvPr id="10" name="Rounded Rectangle 9"/>
+          <p:cNvPr id="15" name="Rounded Rectangle 14"/>
           <p:cNvSpPr/>
           <p:nvPr/>
         </p:nvSpPr>
         <p:spPr>
           <a:xfrm>
-            <a:off x="6321247" y="2240280"/>
-            <a:ext cx="5166360" cy="640080"/>
+            <a:off x="6510528" y="2148840"/>
+            <a:ext cx="4977079" cy="548640"/>
           </a:xfrm>
           <a:prstGeom prst="roundRect">
             <a:avLst>
@@ -7859,14 +8153,14 @@
       </p:sp>
       <p:sp>
         <p:nvSpPr>
-          <p:cNvPr id="11" name="TextBox 10"/>
+          <p:cNvPr id="16" name="TextBox 15"/>
           <p:cNvSpPr txBox="1"/>
           <p:nvPr/>
         </p:nvSpPr>
         <p:spPr>
           <a:xfrm>
-            <a:off x="6412687" y="2331720"/>
-            <a:ext cx="1188720" cy="457200"/>
+            <a:off x="6601968" y="2212848"/>
+            <a:ext cx="1143000" cy="420624"/>
           </a:xfrm>
           <a:prstGeom prst="rect">
             <a:avLst/>
@@ -7885,7 +8179,7 @@
               </a:lnSpc>
             </a:pPr>
             <a:r>
-              <a:rPr sz="1350" b="1" i="1">
+              <a:rPr sz="1300" b="1" i="1">
                 <a:solidFill>
                   <a:srgbClr val="16385C"/>
                 </a:solidFill>
@@ -7895,7 +8189,7 @@
               <a:t>S</a:t>
             </a:r>
             <a:r>
-              <a:rPr sz="971" b="1" i="1" baseline="-22000">
+              <a:rPr sz="936" b="1" i="1" baseline="-22000">
                 <a:solidFill>
                   <a:srgbClr val="16385C"/>
                 </a:solidFill>
@@ -7905,7 +8199,7 @@
               <a:t>p</a:t>
             </a:r>
             <a:r>
-              <a:rPr sz="1350" b="1" i="0">
+              <a:rPr sz="1300" b="1" i="0">
                 <a:solidFill>
                   <a:srgbClr val="16385C"/>
                 </a:solidFill>
@@ -7919,14 +8213,14 @@
       </p:sp>
       <p:sp>
         <p:nvSpPr>
-          <p:cNvPr id="12" name="Rounded Rectangle 11"/>
+          <p:cNvPr id="17" name="Rounded Rectangle 16"/>
           <p:cNvSpPr/>
           <p:nvPr/>
         </p:nvSpPr>
         <p:spPr>
           <a:xfrm>
-            <a:off x="7601407" y="2331720"/>
-            <a:ext cx="658368" cy="457200"/>
+            <a:off x="7744967" y="2212848"/>
+            <a:ext cx="621792" cy="420624"/>
           </a:xfrm>
           <a:prstGeom prst="roundRect">
             <a:avLst>
@@ -7965,7 +8259,7 @@
               </a:lnSpc>
             </a:pPr>
             <a:r>
-              <a:rPr sz="1350" b="1" i="0">
+              <a:rPr sz="1300" b="1" i="0">
                 <a:solidFill>
                   <a:srgbClr val="FFFFFF"/>
                 </a:solidFill>
@@ -7979,14 +8273,14 @@
       </p:sp>
       <p:sp>
         <p:nvSpPr>
-          <p:cNvPr id="13" name="Rounded Rectangle 12"/>
+          <p:cNvPr id="18" name="Rounded Rectangle 17"/>
           <p:cNvSpPr/>
           <p:nvPr/>
         </p:nvSpPr>
         <p:spPr>
           <a:xfrm>
-            <a:off x="8342071" y="2331720"/>
-            <a:ext cx="658368" cy="457200"/>
+            <a:off x="8439911" y="2212848"/>
+            <a:ext cx="621792" cy="420624"/>
           </a:xfrm>
           <a:prstGeom prst="roundRect">
             <a:avLst>
@@ -8025,7 +8319,7 @@
               </a:lnSpc>
             </a:pPr>
             <a:r>
-              <a:rPr sz="1350" b="1" i="0">
+              <a:rPr sz="1300" b="1" i="0">
                 <a:solidFill>
                   <a:srgbClr val="FFFFFF"/>
                 </a:solidFill>
@@ -8039,14 +8333,14 @@
       </p:sp>
       <p:sp>
         <p:nvSpPr>
-          <p:cNvPr id="14" name="Rounded Rectangle 13"/>
+          <p:cNvPr id="19" name="Rounded Rectangle 18"/>
           <p:cNvSpPr/>
           <p:nvPr/>
         </p:nvSpPr>
         <p:spPr>
           <a:xfrm>
-            <a:off x="9082735" y="2331720"/>
-            <a:ext cx="658368" cy="457200"/>
+            <a:off x="9134855" y="2212848"/>
+            <a:ext cx="621792" cy="420624"/>
           </a:xfrm>
           <a:prstGeom prst="roundRect">
             <a:avLst>
@@ -8085,7 +8379,7 @@
               </a:lnSpc>
             </a:pPr>
             <a:r>
-              <a:rPr sz="1350" b="1" i="0">
+              <a:rPr sz="1300" b="1" i="0">
                 <a:solidFill>
                   <a:srgbClr val="FFFFFF"/>
                 </a:solidFill>
@@ -8099,14 +8393,14 @@
       </p:sp>
       <p:sp>
         <p:nvSpPr>
-          <p:cNvPr id="15" name="Rounded Rectangle 14"/>
+          <p:cNvPr id="20" name="Rounded Rectangle 19"/>
           <p:cNvSpPr/>
           <p:nvPr/>
         </p:nvSpPr>
         <p:spPr>
           <a:xfrm>
-            <a:off x="9823399" y="2331720"/>
-            <a:ext cx="658368" cy="457200"/>
+            <a:off x="9829800" y="2212848"/>
+            <a:ext cx="621792" cy="420624"/>
           </a:xfrm>
           <a:prstGeom prst="roundRect">
             <a:avLst>
@@ -8145,7 +8439,7 @@
               </a:lnSpc>
             </a:pPr>
             <a:r>
-              <a:rPr sz="1350" b="1" i="0">
+              <a:rPr sz="1300" b="1" i="0">
                 <a:solidFill>
                   <a:srgbClr val="FFFFFF"/>
                 </a:solidFill>
@@ -8159,14 +8453,14 @@
       </p:sp>
       <p:sp>
         <p:nvSpPr>
-          <p:cNvPr id="16" name="TextBox 15"/>
+          <p:cNvPr id="21" name="TextBox 20"/>
           <p:cNvSpPr txBox="1"/>
           <p:nvPr/>
         </p:nvSpPr>
         <p:spPr>
           <a:xfrm>
-            <a:off x="10637215" y="2331720"/>
-            <a:ext cx="822960" cy="457200"/>
+            <a:off x="10579607" y="2212848"/>
+            <a:ext cx="822960" cy="420624"/>
           </a:xfrm>
           <a:prstGeom prst="rect">
             <a:avLst/>
@@ -8185,7 +8479,7 @@
               </a:lnSpc>
             </a:pPr>
             <a:r>
-              <a:rPr sz="1350" b="0" i="1">
+              <a:rPr sz="1300" b="0" i="1">
                 <a:solidFill>
                   <a:srgbClr val="26303A"/>
                 </a:solidFill>
@@ -8195,7 +8489,7 @@
               <a:t>D</a:t>
             </a:r>
             <a:r>
-              <a:rPr sz="1350" b="0" i="0">
+              <a:rPr sz="1300" b="0" i="0">
                 <a:solidFill>
                   <a:srgbClr val="26303A"/>
                 </a:solidFill>
@@ -8209,14 +8503,14 @@
       </p:sp>
       <p:sp>
         <p:nvSpPr>
-          <p:cNvPr id="17" name="TextBox 16"/>
+          <p:cNvPr id="22" name="TextBox 21"/>
           <p:cNvSpPr txBox="1"/>
           <p:nvPr/>
         </p:nvSpPr>
         <p:spPr>
           <a:xfrm>
-            <a:off x="6412687" y="3127248"/>
-            <a:ext cx="1188720" cy="457200"/>
+            <a:off x="6601968" y="2880360"/>
+            <a:ext cx="1143000" cy="420624"/>
           </a:xfrm>
           <a:prstGeom prst="rect">
             <a:avLst/>
@@ -8235,7 +8529,7 @@
               </a:lnSpc>
             </a:pPr>
             <a:r>
-              <a:rPr sz="1350" b="1" i="0">
+              <a:rPr sz="1300" b="1" i="0">
                 <a:solidFill>
                   <a:srgbClr val="26303A"/>
                 </a:solidFill>
@@ -8249,14 +8543,14 @@
       </p:sp>
       <p:sp>
         <p:nvSpPr>
-          <p:cNvPr id="18" name="Rounded Rectangle 17"/>
+          <p:cNvPr id="23" name="Rounded Rectangle 22"/>
           <p:cNvSpPr/>
           <p:nvPr/>
         </p:nvSpPr>
         <p:spPr>
           <a:xfrm>
-            <a:off x="7601407" y="3127248"/>
-            <a:ext cx="658368" cy="457200"/>
+            <a:off x="7744967" y="2880360"/>
+            <a:ext cx="621792" cy="420624"/>
           </a:xfrm>
           <a:prstGeom prst="roundRect">
             <a:avLst>
@@ -8295,7 +8589,7 @@
               </a:lnSpc>
             </a:pPr>
             <a:r>
-              <a:rPr sz="1350" b="1" i="0">
+              <a:rPr sz="1300" b="1" i="0">
                 <a:solidFill>
                   <a:srgbClr val="FFFFFF"/>
                 </a:solidFill>
@@ -8309,14 +8603,14 @@
       </p:sp>
       <p:sp>
         <p:nvSpPr>
-          <p:cNvPr id="19" name="Rounded Rectangle 18"/>
+          <p:cNvPr id="24" name="Rounded Rectangle 23"/>
           <p:cNvSpPr/>
           <p:nvPr/>
         </p:nvSpPr>
         <p:spPr>
           <a:xfrm>
-            <a:off x="8342071" y="3127248"/>
-            <a:ext cx="658368" cy="457200"/>
+            <a:off x="8439911" y="2880360"/>
+            <a:ext cx="621792" cy="420624"/>
           </a:xfrm>
           <a:prstGeom prst="roundRect">
             <a:avLst>
@@ -8326,7 +8620,7 @@
           <a:solidFill>
             <a:srgbClr val="8A86A8"/>
           </a:solidFill>
-          <a:ln w="33020">
+          <a:ln w="30480">
             <a:solidFill>
               <a:srgbClr val="B03A2E"/>
             </a:solidFill>
@@ -8357,7 +8651,7 @@
               </a:lnSpc>
             </a:pPr>
             <a:r>
-              <a:rPr sz="1350" b="1" i="0">
+              <a:rPr sz="1300" b="1" i="0">
                 <a:solidFill>
                   <a:srgbClr val="FFFFFF"/>
                 </a:solidFill>
@@ -8371,14 +8665,14 @@
       </p:sp>
       <p:sp>
         <p:nvSpPr>
-          <p:cNvPr id="20" name="Rounded Rectangle 19"/>
+          <p:cNvPr id="25" name="Rounded Rectangle 24"/>
           <p:cNvSpPr/>
           <p:nvPr/>
         </p:nvSpPr>
         <p:spPr>
           <a:xfrm>
-            <a:off x="9082735" y="3127248"/>
-            <a:ext cx="658368" cy="457200"/>
+            <a:off x="9134855" y="2880360"/>
+            <a:ext cx="621792" cy="420624"/>
           </a:xfrm>
           <a:prstGeom prst="roundRect">
             <a:avLst>
@@ -8388,7 +8682,7 @@
           <a:solidFill>
             <a:srgbClr val="D98E45"/>
           </a:solidFill>
-          <a:ln w="33020">
+          <a:ln w="30480">
             <a:solidFill>
               <a:srgbClr val="B03A2E"/>
             </a:solidFill>
@@ -8419,7 +8713,7 @@
               </a:lnSpc>
             </a:pPr>
             <a:r>
-              <a:rPr sz="1350" b="1" i="0">
+              <a:rPr sz="1300" b="1" i="0">
                 <a:solidFill>
                   <a:srgbClr val="FFFFFF"/>
                 </a:solidFill>
@@ -8433,14 +8727,14 @@
       </p:sp>
       <p:sp>
         <p:nvSpPr>
-          <p:cNvPr id="21" name="Rounded Rectangle 20"/>
+          <p:cNvPr id="26" name="Rounded Rectangle 25"/>
           <p:cNvSpPr/>
           <p:nvPr/>
         </p:nvSpPr>
         <p:spPr>
           <a:xfrm>
-            <a:off x="9823399" y="3127248"/>
-            <a:ext cx="658368" cy="457200"/>
+            <a:off x="9829800" y="2880360"/>
+            <a:ext cx="621792" cy="420624"/>
           </a:xfrm>
           <a:prstGeom prst="roundRect">
             <a:avLst>
@@ -8450,7 +8744,7 @@
           <a:solidFill>
             <a:srgbClr val="6F9E7C"/>
           </a:solidFill>
-          <a:ln w="33020">
+          <a:ln w="30480">
             <a:solidFill>
               <a:srgbClr val="B03A2E"/>
             </a:solidFill>
@@ -8481,7 +8775,7 @@
               </a:lnSpc>
             </a:pPr>
             <a:r>
-              <a:rPr sz="1350" b="1" i="0">
+              <a:rPr sz="1300" b="1" i="0">
                 <a:solidFill>
                   <a:srgbClr val="FFFFFF"/>
                 </a:solidFill>
@@ -8495,14 +8789,14 @@
       </p:sp>
       <p:sp>
         <p:nvSpPr>
-          <p:cNvPr id="22" name="TextBox 21"/>
+          <p:cNvPr id="27" name="TextBox 26"/>
           <p:cNvSpPr txBox="1"/>
           <p:nvPr/>
         </p:nvSpPr>
         <p:spPr>
           <a:xfrm>
-            <a:off x="10637215" y="3127248"/>
-            <a:ext cx="822960" cy="457200"/>
+            <a:off x="10579607" y="2880360"/>
+            <a:ext cx="822960" cy="420624"/>
           </a:xfrm>
           <a:prstGeom prst="rect">
             <a:avLst/>
@@ -8521,7 +8815,7 @@
               </a:lnSpc>
             </a:pPr>
             <a:r>
-              <a:rPr sz="1350" b="0" i="1">
+              <a:rPr sz="1300" b="0" i="1">
                 <a:solidFill>
                   <a:srgbClr val="26303A"/>
                 </a:solidFill>
@@ -8531,7 +8825,7 @@
               <a:t>D</a:t>
             </a:r>
             <a:r>
-              <a:rPr sz="1350" b="0" i="0">
+              <a:rPr sz="1300" b="0" i="0">
                 <a:solidFill>
                   <a:srgbClr val="26303A"/>
                 </a:solidFill>
@@ -8545,14 +8839,14 @@
       </p:sp>
       <p:sp>
         <p:nvSpPr>
-          <p:cNvPr id="23" name="TextBox 22"/>
+          <p:cNvPr id="28" name="TextBox 27"/>
           <p:cNvSpPr txBox="1"/>
           <p:nvPr/>
         </p:nvSpPr>
         <p:spPr>
           <a:xfrm>
-            <a:off x="7555687" y="3584448"/>
-            <a:ext cx="3931920" cy="420624"/>
+            <a:off x="7699247" y="3300984"/>
+            <a:ext cx="3788359" cy="347472"/>
           </a:xfrm>
           <a:prstGeom prst="rect">
             <a:avLst/>
@@ -8571,7 +8865,7 @@
               </a:lnSpc>
             </a:pPr>
             <a:r>
-              <a:rPr sz="1150" b="0" i="0">
+              <a:rPr sz="1100" b="0" i="0">
                 <a:solidFill>
                   <a:srgbClr val="B03A2E"/>
                 </a:solidFill>
@@ -8585,14 +8879,14 @@
       </p:sp>
       <p:sp>
         <p:nvSpPr>
-          <p:cNvPr id="24" name="TextBox 23"/>
+          <p:cNvPr id="29" name="TextBox 28"/>
           <p:cNvSpPr txBox="1"/>
           <p:nvPr/>
         </p:nvSpPr>
         <p:spPr>
           <a:xfrm>
-            <a:off x="6412687" y="4005072"/>
-            <a:ext cx="1188720" cy="457200"/>
+            <a:off x="6601968" y="3648456"/>
+            <a:ext cx="1143000" cy="420624"/>
           </a:xfrm>
           <a:prstGeom prst="rect">
             <a:avLst/>
@@ -8611,7 +8905,7 @@
               </a:lnSpc>
             </a:pPr>
             <a:r>
-              <a:rPr sz="1350" b="1" i="0">
+              <a:rPr sz="1300" b="1" i="0">
                 <a:solidFill>
                   <a:srgbClr val="26303A"/>
                 </a:solidFill>
@@ -8625,14 +8919,14 @@
       </p:sp>
       <p:sp>
         <p:nvSpPr>
-          <p:cNvPr id="25" name="Rounded Rectangle 24"/>
+          <p:cNvPr id="30" name="Rounded Rectangle 29"/>
           <p:cNvSpPr/>
           <p:nvPr/>
         </p:nvSpPr>
         <p:spPr>
           <a:xfrm>
-            <a:off x="7601407" y="4005072"/>
-            <a:ext cx="658368" cy="457200"/>
+            <a:off x="7744967" y="3648456"/>
+            <a:ext cx="621792" cy="420624"/>
           </a:xfrm>
           <a:prstGeom prst="roundRect">
             <a:avLst>
@@ -8671,7 +8965,7 @@
               </a:lnSpc>
             </a:pPr>
             <a:r>
-              <a:rPr sz="1350" b="1" i="0">
+              <a:rPr sz="1300" b="1" i="0">
                 <a:solidFill>
                   <a:srgbClr val="FFFFFF"/>
                 </a:solidFill>
@@ -8685,14 +8979,14 @@
       </p:sp>
       <p:sp>
         <p:nvSpPr>
-          <p:cNvPr id="26" name="Rounded Rectangle 25"/>
+          <p:cNvPr id="31" name="Rounded Rectangle 30"/>
           <p:cNvSpPr/>
           <p:nvPr/>
         </p:nvSpPr>
         <p:spPr>
           <a:xfrm>
-            <a:off x="8342071" y="4005072"/>
-            <a:ext cx="658368" cy="457200"/>
+            <a:off x="8439911" y="3648456"/>
+            <a:ext cx="621792" cy="420624"/>
           </a:xfrm>
           <a:prstGeom prst="roundRect">
             <a:avLst>
@@ -8702,7 +8996,7 @@
           <a:solidFill>
             <a:srgbClr val="6F9E7C"/>
           </a:solidFill>
-          <a:ln w="33020">
+          <a:ln w="30480">
             <a:solidFill>
               <a:srgbClr val="B03A2E"/>
             </a:solidFill>
@@ -8733,7 +9027,7 @@
               </a:lnSpc>
             </a:pPr>
             <a:r>
-              <a:rPr sz="1350" b="1" i="0">
+              <a:rPr sz="1300" b="1" i="0">
                 <a:solidFill>
                   <a:srgbClr val="FFFFFF"/>
                 </a:solidFill>
@@ -8747,14 +9041,14 @@
       </p:sp>
       <p:sp>
         <p:nvSpPr>
-          <p:cNvPr id="27" name="Rounded Rectangle 26"/>
+          <p:cNvPr id="32" name="Rounded Rectangle 31"/>
           <p:cNvSpPr/>
           <p:nvPr/>
         </p:nvSpPr>
         <p:spPr>
           <a:xfrm>
-            <a:off x="9082735" y="4005072"/>
-            <a:ext cx="658368" cy="457200"/>
+            <a:off x="9134855" y="3648456"/>
+            <a:ext cx="621792" cy="420624"/>
           </a:xfrm>
           <a:prstGeom prst="roundRect">
             <a:avLst>
@@ -8764,7 +9058,7 @@
           <a:solidFill>
             <a:srgbClr val="D98E45"/>
           </a:solidFill>
-          <a:ln w="33020">
+          <a:ln w="30480">
             <a:solidFill>
               <a:srgbClr val="B03A2E"/>
             </a:solidFill>
@@ -8795,7 +9089,7 @@
               </a:lnSpc>
             </a:pPr>
             <a:r>
-              <a:rPr sz="1350" b="1" i="0">
+              <a:rPr sz="1300" b="1" i="0">
                 <a:solidFill>
                   <a:srgbClr val="FFFFFF"/>
                 </a:solidFill>
@@ -8809,14 +9103,14 @@
       </p:sp>
       <p:sp>
         <p:nvSpPr>
-          <p:cNvPr id="28" name="Rounded Rectangle 27"/>
+          <p:cNvPr id="33" name="Rounded Rectangle 32"/>
           <p:cNvSpPr/>
           <p:nvPr/>
         </p:nvSpPr>
         <p:spPr>
           <a:xfrm>
-            <a:off x="9823399" y="4005072"/>
-            <a:ext cx="658368" cy="457200"/>
+            <a:off x="9829800" y="3648456"/>
+            <a:ext cx="621792" cy="420624"/>
           </a:xfrm>
           <a:prstGeom prst="roundRect">
             <a:avLst>
@@ -8855,7 +9149,7 @@
               </a:lnSpc>
             </a:pPr>
             <a:r>
-              <a:rPr sz="1350" b="1" i="0">
+              <a:rPr sz="1300" b="1" i="0">
                 <a:solidFill>
                   <a:srgbClr val="FFFFFF"/>
                 </a:solidFill>
@@ -8869,14 +9163,14 @@
       </p:sp>
       <p:sp>
         <p:nvSpPr>
-          <p:cNvPr id="29" name="TextBox 28"/>
+          <p:cNvPr id="34" name="TextBox 33"/>
           <p:cNvSpPr txBox="1"/>
           <p:nvPr/>
         </p:nvSpPr>
         <p:spPr>
           <a:xfrm>
-            <a:off x="10637215" y="4005072"/>
-            <a:ext cx="822960" cy="457200"/>
+            <a:off x="10579607" y="3648456"/>
+            <a:ext cx="822960" cy="420624"/>
           </a:xfrm>
           <a:prstGeom prst="rect">
             <a:avLst/>
@@ -8895,7 +9189,7 @@
               </a:lnSpc>
             </a:pPr>
             <a:r>
-              <a:rPr sz="1350" b="0" i="1">
+              <a:rPr sz="1300" b="0" i="1">
                 <a:solidFill>
                   <a:srgbClr val="26303A"/>
                 </a:solidFill>
@@ -8905,7 +9199,7 @@
               <a:t>D</a:t>
             </a:r>
             <a:r>
-              <a:rPr sz="1350" b="0" i="0">
+              <a:rPr sz="1300" b="0" i="0">
                 <a:solidFill>
                   <a:srgbClr val="26303A"/>
                 </a:solidFill>
@@ -8919,14 +9213,14 @@
       </p:sp>
       <p:sp>
         <p:nvSpPr>
-          <p:cNvPr id="30" name="TextBox 29"/>
+          <p:cNvPr id="35" name="TextBox 34"/>
           <p:cNvSpPr txBox="1"/>
           <p:nvPr/>
         </p:nvSpPr>
         <p:spPr>
           <a:xfrm>
-            <a:off x="7555687" y="4462272"/>
-            <a:ext cx="3931920" cy="420624"/>
+            <a:off x="7699247" y="4069080"/>
+            <a:ext cx="3788359" cy="347472"/>
           </a:xfrm>
           <a:prstGeom prst="rect">
             <a:avLst/>
@@ -8945,7 +9239,7 @@
               </a:lnSpc>
             </a:pPr>
             <a:r>
-              <a:rPr sz="1150" b="0" i="0">
+              <a:rPr sz="1100" b="0" i="0">
                 <a:solidFill>
                   <a:srgbClr val="B03A2E"/>
                 </a:solidFill>
@@ -8955,7 +9249,7 @@
               <a:t>↓ swap：J3 と J2 を入れ替え（</a:t>
             </a:r>
             <a:r>
-              <a:rPr sz="1150" b="0" i="1">
+              <a:rPr sz="1100" b="0" i="1">
                 <a:solidFill>
                   <a:srgbClr val="B03A2E"/>
                 </a:solidFill>
@@ -8965,7 +9259,7 @@
               <a:t>S</a:t>
             </a:r>
             <a:r>
-              <a:rPr sz="827" b="0" i="1" baseline="-22000">
+              <a:rPr sz="792" b="0" i="1" baseline="-22000">
                 <a:solidFill>
                   <a:srgbClr val="B03A2E"/>
                 </a:solidFill>
@@ -8975,7 +9269,7 @@
               <a:t>p</a:t>
             </a:r>
             <a:r>
-              <a:rPr sz="1150" b="0" i="0">
+              <a:rPr sz="1100" b="0" i="0">
                 <a:solidFill>
                   <a:srgbClr val="B03A2E"/>
                 </a:solidFill>
@@ -8989,14 +9283,14 @@
       </p:sp>
       <p:sp>
         <p:nvSpPr>
-          <p:cNvPr id="31" name="TextBox 30"/>
+          <p:cNvPr id="36" name="TextBox 35"/>
           <p:cNvSpPr txBox="1"/>
           <p:nvPr/>
         </p:nvSpPr>
         <p:spPr>
           <a:xfrm>
-            <a:off x="6412687" y="4882896"/>
-            <a:ext cx="1188720" cy="457200"/>
+            <a:off x="6601968" y="4416552"/>
+            <a:ext cx="1143000" cy="420624"/>
           </a:xfrm>
           <a:prstGeom prst="rect">
             <a:avLst/>
@@ -9015,7 +9309,7 @@
               </a:lnSpc>
             </a:pPr>
             <a:r>
-              <a:rPr sz="1350" b="1" i="0">
+              <a:rPr sz="1300" b="1" i="0">
                 <a:solidFill>
                   <a:srgbClr val="26303A"/>
                 </a:solidFill>
@@ -9029,14 +9323,14 @@
       </p:sp>
       <p:sp>
         <p:nvSpPr>
-          <p:cNvPr id="32" name="Rounded Rectangle 31"/>
+          <p:cNvPr id="37" name="Rounded Rectangle 36"/>
           <p:cNvSpPr/>
           <p:nvPr/>
         </p:nvSpPr>
         <p:spPr>
           <a:xfrm>
-            <a:off x="7601407" y="4882896"/>
-            <a:ext cx="658368" cy="457200"/>
+            <a:off x="7744967" y="4416552"/>
+            <a:ext cx="621792" cy="420624"/>
           </a:xfrm>
           <a:prstGeom prst="roundRect">
             <a:avLst>
@@ -9075,7 +9369,7 @@
               </a:lnSpc>
             </a:pPr>
             <a:r>
-              <a:rPr sz="1350" b="1" i="0">
+              <a:rPr sz="1300" b="1" i="0">
                 <a:solidFill>
                   <a:srgbClr val="FFFFFF"/>
                 </a:solidFill>
@@ -9089,14 +9383,14 @@
       </p:sp>
       <p:sp>
         <p:nvSpPr>
-          <p:cNvPr id="33" name="Rounded Rectangle 32"/>
+          <p:cNvPr id="38" name="Rounded Rectangle 37"/>
           <p:cNvSpPr/>
           <p:nvPr/>
         </p:nvSpPr>
         <p:spPr>
           <a:xfrm>
-            <a:off x="8342071" y="4882896"/>
-            <a:ext cx="658368" cy="457200"/>
+            <a:off x="8439911" y="4416552"/>
+            <a:ext cx="621792" cy="420624"/>
           </a:xfrm>
           <a:prstGeom prst="roundRect">
             <a:avLst>
@@ -9135,7 +9429,7 @@
               </a:lnSpc>
             </a:pPr>
             <a:r>
-              <a:rPr sz="1350" b="1" i="0">
+              <a:rPr sz="1300" b="1" i="0">
                 <a:solidFill>
                   <a:srgbClr val="FFFFFF"/>
                 </a:solidFill>
@@ -9149,14 +9443,14 @@
       </p:sp>
       <p:sp>
         <p:nvSpPr>
-          <p:cNvPr id="34" name="Rounded Rectangle 33"/>
+          <p:cNvPr id="39" name="Rounded Rectangle 38"/>
           <p:cNvSpPr/>
           <p:nvPr/>
         </p:nvSpPr>
         <p:spPr>
           <a:xfrm>
-            <a:off x="9082735" y="4882896"/>
-            <a:ext cx="658368" cy="457200"/>
+            <a:off x="9134855" y="4416552"/>
+            <a:ext cx="621792" cy="420624"/>
           </a:xfrm>
           <a:prstGeom prst="roundRect">
             <a:avLst>
@@ -9195,7 +9489,7 @@
               </a:lnSpc>
             </a:pPr>
             <a:r>
-              <a:rPr sz="1350" b="1" i="0">
+              <a:rPr sz="1300" b="1" i="0">
                 <a:solidFill>
                   <a:srgbClr val="FFFFFF"/>
                 </a:solidFill>
@@ -9209,14 +9503,14 @@
       </p:sp>
       <p:sp>
         <p:nvSpPr>
-          <p:cNvPr id="35" name="Rounded Rectangle 34"/>
+          <p:cNvPr id="40" name="Rounded Rectangle 39"/>
           <p:cNvSpPr/>
           <p:nvPr/>
         </p:nvSpPr>
         <p:spPr>
           <a:xfrm>
-            <a:off x="9823399" y="4882896"/>
-            <a:ext cx="658368" cy="457200"/>
+            <a:off x="9829800" y="4416552"/>
+            <a:ext cx="621792" cy="420624"/>
           </a:xfrm>
           <a:prstGeom prst="roundRect">
             <a:avLst>
@@ -9255,7 +9549,7 @@
               </a:lnSpc>
             </a:pPr>
             <a:r>
-              <a:rPr sz="1350" b="1" i="0">
+              <a:rPr sz="1300" b="1" i="0">
                 <a:solidFill>
                   <a:srgbClr val="FFFFFF"/>
                 </a:solidFill>
@@ -9269,14 +9563,14 @@
       </p:sp>
       <p:sp>
         <p:nvSpPr>
-          <p:cNvPr id="36" name="TextBox 35"/>
+          <p:cNvPr id="41" name="TextBox 40"/>
           <p:cNvSpPr txBox="1"/>
           <p:nvPr/>
         </p:nvSpPr>
         <p:spPr>
           <a:xfrm>
-            <a:off x="10637215" y="4882896"/>
-            <a:ext cx="822960" cy="457200"/>
+            <a:off x="10579607" y="4416552"/>
+            <a:ext cx="822960" cy="420624"/>
           </a:xfrm>
           <a:prstGeom prst="rect">
             <a:avLst/>
@@ -9295,7 +9589,7 @@
               </a:lnSpc>
             </a:pPr>
             <a:r>
-              <a:rPr sz="1350" b="0" i="1">
+              <a:rPr sz="1300" b="0" i="1">
                 <a:solidFill>
                   <a:srgbClr val="26303A"/>
                 </a:solidFill>
@@ -9305,7 +9599,7 @@
               <a:t>D</a:t>
             </a:r>
             <a:r>
-              <a:rPr sz="1350" b="0" i="0">
+              <a:rPr sz="1300" b="0" i="0">
                 <a:solidFill>
                   <a:srgbClr val="26303A"/>
                 </a:solidFill>
@@ -9319,14 +9613,14 @@
       </p:sp>
       <p:sp>
         <p:nvSpPr>
-          <p:cNvPr id="37" name="TextBox 36"/>
+          <p:cNvPr id="42" name="TextBox 41"/>
           <p:cNvSpPr txBox="1"/>
           <p:nvPr/>
         </p:nvSpPr>
         <p:spPr>
           <a:xfrm>
-            <a:off x="6412687" y="5458968"/>
-            <a:ext cx="4983480" cy="640080"/>
+            <a:off x="6601968" y="4846320"/>
+            <a:ext cx="4794199" cy="566928"/>
           </a:xfrm>
           <a:prstGeom prst="rect">
             <a:avLst/>
@@ -9345,7 +9639,7 @@
               </a:lnSpc>
             </a:pPr>
             <a:r>
-              <a:rPr sz="1200" b="0" i="0">
+              <a:rPr sz="1150" b="0" i="0">
                 <a:solidFill>
                   <a:srgbClr val="6E7A88"/>
                 </a:solidFill>
@@ -9355,7 +9649,7 @@
               <a:t>赤枠：</a:t>
             </a:r>
             <a:r>
-              <a:rPr sz="1200" b="0" i="1">
+              <a:rPr sz="1150" b="0" i="1">
                 <a:solidFill>
                   <a:srgbClr val="6E7A88"/>
                 </a:solidFill>
@@ -9365,7 +9659,7 @@
               <a:t>S</a:t>
             </a:r>
             <a:r>
-              <a:rPr sz="864" b="0" i="1" baseline="-22000">
+              <a:rPr sz="827" b="0" i="1" baseline="-22000">
                 <a:solidFill>
                   <a:srgbClr val="6E7A88"/>
                 </a:solidFill>
@@ -9375,7 +9669,7 @@
               <a:t>p</a:t>
             </a:r>
             <a:r>
-              <a:rPr sz="1200" b="0" i="0">
+              <a:rPr sz="1150" b="0" i="0">
                 <a:solidFill>
                   <a:srgbClr val="6E7A88"/>
                 </a:solidFill>
@@ -9385,7 +9679,7 @@
               <a:t> と順位が異なる作業（その数が </a:t>
             </a:r>
             <a:r>
-              <a:rPr sz="1200" b="0" i="1">
+              <a:rPr sz="1150" b="0" i="1">
                 <a:solidFill>
                   <a:srgbClr val="6E7A88"/>
                 </a:solidFill>
@@ -9395,7 +9689,7 @@
               <a:t>d</a:t>
             </a:r>
             <a:r>
-              <a:rPr sz="1200" b="0" i="0">
+              <a:rPr sz="1150" b="0" i="0">
                 <a:solidFill>
                   <a:srgbClr val="6E7A88"/>
                 </a:solidFill>
@@ -9412,7 +9706,7 @@
               </a:lnSpc>
             </a:pPr>
             <a:r>
-              <a:rPr sz="1200" b="0" i="0">
+              <a:rPr sz="1150" b="0" i="0">
                 <a:solidFill>
                   <a:srgbClr val="6E7A88"/>
                 </a:solidFill>
@@ -9422,7 +9716,7 @@
               <a:t>1 回の swap で 1 作業を </a:t>
             </a:r>
             <a:r>
-              <a:rPr sz="1200" b="0" i="1">
+              <a:rPr sz="1150" b="0" i="1">
                 <a:solidFill>
                   <a:srgbClr val="6E7A88"/>
                 </a:solidFill>
@@ -9432,7 +9726,7 @@
               <a:t>S</a:t>
             </a:r>
             <a:r>
-              <a:rPr sz="864" b="0" i="1" baseline="-22000">
+              <a:rPr sz="827" b="0" i="1" baseline="-22000">
                 <a:solidFill>
                   <a:srgbClr val="6E7A88"/>
                 </a:solidFill>
@@ -9442,7 +9736,7 @@
               <a:t>p</a:t>
             </a:r>
             <a:r>
-              <a:rPr sz="1200" b="0" i="0">
+              <a:rPr sz="1150" b="0" i="0">
                 <a:solidFill>
                   <a:srgbClr val="6E7A88"/>
                 </a:solidFill>
@@ -9452,7 +9746,7 @@
               <a:t> の順位に合わせ，</a:t>
             </a:r>
             <a:r>
-              <a:rPr sz="1200" b="0" i="1">
+              <a:rPr sz="1150" b="0" i="1">
                 <a:solidFill>
                   <a:srgbClr val="6E7A88"/>
                 </a:solidFill>
@@ -9462,7 +9756,7 @@
               <a:t>D</a:t>
             </a:r>
             <a:r>
-              <a:rPr sz="1200" b="0" i="0">
+              <a:rPr sz="1150" b="0" i="0">
                 <a:solidFill>
                   <a:srgbClr val="6E7A88"/>
                 </a:solidFill>
@@ -9476,738 +9770,14 @@
       </p:sp>
       <p:sp>
         <p:nvSpPr>
-          <p:cNvPr id="38" name="Rounded Rectangle 37"/>
+          <p:cNvPr id="43" name="Rounded Rectangle 42"/>
           <p:cNvSpPr/>
           <p:nvPr/>
         </p:nvSpPr>
         <p:spPr>
           <a:xfrm>
-            <a:off x="566928" y="1691640"/>
-            <a:ext cx="5342839" cy="2971800"/>
-          </a:xfrm>
-          <a:prstGeom prst="roundRect">
-            <a:avLst>
-              <a:gd name="adj" fmla="val 5000"/>
-            </a:avLst>
-          </a:prstGeom>
-          <a:solidFill>
-            <a:srgbClr val="FFFFFF"/>
-          </a:solidFill>
-          <a:ln w="13970">
-            <a:solidFill>
-              <a:srgbClr val="C9D6E5"/>
-            </a:solidFill>
-          </a:ln>
-          <a:effectLst/>
-        </p:spPr>
-        <p:style>
-          <a:lnRef idx="1">
-            <a:schemeClr val="accent1"/>
-          </a:lnRef>
-          <a:fillRef idx="3">
-            <a:schemeClr val="accent1"/>
-          </a:fillRef>
-          <a:effectRef idx="2">
-            <a:schemeClr val="accent1"/>
-          </a:effectRef>
-          <a:fontRef idx="minor">
-            <a:schemeClr val="lt1"/>
-          </a:fontRef>
-        </p:style>
-        <p:txBody>
-          <a:bodyPr rtlCol="0" anchor="ctr"/>
-          <a:lstStyle/>
-          <a:p>
-            <a:pPr algn="ctr"/>
-          </a:p>
-        </p:txBody>
-      </p:sp>
-      <p:sp>
-        <p:nvSpPr>
-          <p:cNvPr id="39" name="Rounded Rectangle 38"/>
-          <p:cNvSpPr/>
-          <p:nvPr/>
-        </p:nvSpPr>
-        <p:spPr>
-          <a:xfrm>
-            <a:off x="4858207" y="1517904"/>
-            <a:ext cx="868680" cy="347472"/>
-          </a:xfrm>
-          <a:prstGeom prst="roundRect">
-            <a:avLst>
-              <a:gd name="adj" fmla="val 40000"/>
-            </a:avLst>
-          </a:prstGeom>
-          <a:solidFill>
-            <a:srgbClr val="3E618C"/>
-          </a:solidFill>
-          <a:ln>
-            <a:noFill/>
-          </a:ln>
-          <a:effectLst/>
-        </p:spPr>
-        <p:style>
-          <a:lnRef idx="1">
-            <a:schemeClr val="accent1"/>
-          </a:lnRef>
-          <a:fillRef idx="3">
-            <a:schemeClr val="accent1"/>
-          </a:fillRef>
-          <a:effectRef idx="2">
-            <a:schemeClr val="accent1"/>
-          </a:effectRef>
-          <a:fontRef idx="minor">
-            <a:schemeClr val="lt1"/>
-          </a:fontRef>
-        </p:style>
-        <p:txBody>
-          <a:bodyPr rtlCol="0" anchor="ctr" wrap="square" lIns="54864" rIns="54864" tIns="18288" bIns="18288"/>
-          <a:lstStyle/>
-          <a:p>
-            <a:pPr algn="ctr">
-              <a:lnSpc>
-                <a:spcPct val="100000"/>
-              </a:lnSpc>
-            </a:pPr>
-            <a:r>
-              <a:rPr sz="1250" b="1" i="0">
-                <a:solidFill>
-                  <a:srgbClr val="FFFFFF"/>
-                </a:solidFill>
-                <a:latin typeface="Meiryo"/>
-                <a:ea typeface="Meiryo"/>
-              </a:rPr>
-              <a:t>提案</a:t>
-            </a:r>
-          </a:p>
-        </p:txBody>
-      </p:sp>
-      <p:sp>
-        <p:nvSpPr>
-          <p:cNvPr id="40" name="Rounded Rectangle 39"/>
-          <p:cNvSpPr/>
-          <p:nvPr/>
-        </p:nvSpPr>
-        <p:spPr>
-          <a:xfrm>
-            <a:off x="768096" y="2075688"/>
-            <a:ext cx="960120" cy="347472"/>
-          </a:xfrm>
-          <a:prstGeom prst="roundRect">
-            <a:avLst>
-              <a:gd name="adj" fmla="val 30000"/>
-            </a:avLst>
-          </a:prstGeom>
-          <a:solidFill>
-            <a:srgbClr val="6E7A88"/>
-          </a:solidFill>
-          <a:ln>
-            <a:noFill/>
-          </a:ln>
-          <a:effectLst/>
-        </p:spPr>
-        <p:style>
-          <a:lnRef idx="1">
-            <a:schemeClr val="accent1"/>
-          </a:lnRef>
-          <a:fillRef idx="3">
-            <a:schemeClr val="accent1"/>
-          </a:fillRef>
-          <a:effectRef idx="2">
-            <a:schemeClr val="accent1"/>
-          </a:effectRef>
-          <a:fontRef idx="minor">
-            <a:schemeClr val="lt1"/>
-          </a:fontRef>
-        </p:style>
-        <p:txBody>
-          <a:bodyPr rtlCol="0" anchor="ctr" wrap="square" lIns="54864" rIns="54864" tIns="18288" bIns="18288"/>
-          <a:lstStyle/>
-          <a:p>
-            <a:pPr algn="ctr">
-              <a:lnSpc>
-                <a:spcPct val="100000"/>
-              </a:lnSpc>
-            </a:pPr>
-            <a:r>
-              <a:rPr sz="1250" b="1" i="0">
-                <a:solidFill>
-                  <a:srgbClr val="FFFFFF"/>
-                </a:solidFill>
-                <a:latin typeface="Meiryo"/>
-                <a:ea typeface="Meiryo"/>
-              </a:rPr>
-              <a:t>通常の PR</a:t>
-            </a:r>
-          </a:p>
-        </p:txBody>
-      </p:sp>
-      <p:sp>
-        <p:nvSpPr>
-          <p:cNvPr id="41" name="TextBox 40"/>
-          <p:cNvSpPr txBox="1"/>
-          <p:nvPr/>
-        </p:nvSpPr>
-        <p:spPr>
-          <a:xfrm>
-            <a:off x="1865376" y="1965960"/>
-            <a:ext cx="3834079" cy="566928"/>
-          </a:xfrm>
-          <a:prstGeom prst="rect">
-            <a:avLst/>
-          </a:prstGeom>
-          <a:noFill/>
-        </p:spPr>
-        <p:txBody>
-          <a:bodyPr wrap="square" anchor="ctr" lIns="18288" rIns="18288" tIns="9144" bIns="9144">
-            <a:spAutoFit/>
-          </a:bodyPr>
-          <a:lstStyle/>
-          <a:p>
-            <a:pPr algn="l">
-              <a:lnSpc>
-                <a:spcPct val="108000"/>
-              </a:lnSpc>
-            </a:pPr>
-            <a:r>
-              <a:rPr sz="1350" b="0" i="0">
-                <a:solidFill>
-                  <a:srgbClr val="6E7A88"/>
-                </a:solidFill>
-                <a:latin typeface="Meiryo"/>
-                <a:ea typeface="Meiryo"/>
-              </a:rPr>
-              <a:t>探索中に得た良い解どうしを結び，その間を探索する</a:t>
-            </a:r>
-          </a:p>
-        </p:txBody>
-      </p:sp>
-      <p:sp>
-        <p:nvSpPr>
-          <p:cNvPr id="42" name="Rounded Rectangle 41"/>
-          <p:cNvSpPr/>
-          <p:nvPr/>
-        </p:nvSpPr>
-        <p:spPr>
-          <a:xfrm>
-            <a:off x="768096" y="2734056"/>
-            <a:ext cx="960120" cy="347472"/>
-          </a:xfrm>
-          <a:prstGeom prst="roundRect">
-            <a:avLst>
-              <a:gd name="adj" fmla="val 30000"/>
-            </a:avLst>
-          </a:prstGeom>
-          <a:solidFill>
-            <a:srgbClr val="16385C"/>
-          </a:solidFill>
-          <a:ln>
-            <a:noFill/>
-          </a:ln>
-          <a:effectLst/>
-        </p:spPr>
-        <p:style>
-          <a:lnRef idx="1">
-            <a:schemeClr val="accent1"/>
-          </a:lnRef>
-          <a:fillRef idx="3">
-            <a:schemeClr val="accent1"/>
-          </a:fillRef>
-          <a:effectRef idx="2">
-            <a:schemeClr val="accent1"/>
-          </a:effectRef>
-          <a:fontRef idx="minor">
-            <a:schemeClr val="lt1"/>
-          </a:fontRef>
-        </p:style>
-        <p:txBody>
-          <a:bodyPr rtlCol="0" anchor="ctr" wrap="square" lIns="54864" rIns="54864" tIns="18288" bIns="18288"/>
-          <a:lstStyle/>
-          <a:p>
-            <a:pPr algn="ctr">
-              <a:lnSpc>
-                <a:spcPct val="100000"/>
-              </a:lnSpc>
-            </a:pPr>
-            <a:r>
-              <a:rPr sz="1250" b="1" i="0">
-                <a:solidFill>
-                  <a:srgbClr val="FFFFFF"/>
-                </a:solidFill>
-                <a:latin typeface="Meiryo"/>
-                <a:ea typeface="Meiryo"/>
-              </a:rPr>
-              <a:t>本研究</a:t>
-            </a:r>
-          </a:p>
-        </p:txBody>
-      </p:sp>
-      <p:sp>
-        <p:nvSpPr>
-          <p:cNvPr id="43" name="TextBox 42"/>
-          <p:cNvSpPr txBox="1"/>
-          <p:nvPr/>
-        </p:nvSpPr>
-        <p:spPr>
-          <a:xfrm>
-            <a:off x="1865376" y="2532888"/>
-            <a:ext cx="3834079" cy="749808"/>
-          </a:xfrm>
-          <a:prstGeom prst="rect">
-            <a:avLst/>
-          </a:prstGeom>
-          <a:noFill/>
-        </p:spPr>
-        <p:txBody>
-          <a:bodyPr wrap="square" anchor="ctr" lIns="18288" rIns="18288" tIns="9144" bIns="9144">
-            <a:spAutoFit/>
-          </a:bodyPr>
-          <a:lstStyle/>
-          <a:p>
-            <a:pPr algn="l">
-              <a:lnSpc>
-                <a:spcPct val="108000"/>
-              </a:lnSpc>
-            </a:pPr>
-            <a:r>
-              <a:rPr sz="1450" b="0" i="0">
-                <a:solidFill>
-                  <a:srgbClr val="26303A"/>
-                </a:solidFill>
-                <a:latin typeface="Meiryo"/>
-                <a:ea typeface="Meiryo"/>
-              </a:rPr>
-              <a:t>誘導解を初期スケジュール </a:t>
-            </a:r>
-            <a:r>
-              <a:rPr sz="1450" b="0" i="1">
-                <a:solidFill>
-                  <a:srgbClr val="26303A"/>
-                </a:solidFill>
-                <a:latin typeface="Meiryo"/>
-                <a:ea typeface="Meiryo"/>
-              </a:rPr>
-              <a:t>S</a:t>
-            </a:r>
-            <a:r>
-              <a:rPr sz="1044" b="0" i="1" baseline="-22000">
-                <a:solidFill>
-                  <a:srgbClr val="26303A"/>
-                </a:solidFill>
-                <a:latin typeface="Meiryo"/>
-                <a:ea typeface="Meiryo"/>
-              </a:rPr>
-              <a:t>p</a:t>
-            </a:r>
-            <a:r>
-              <a:rPr sz="1450" b="0" i="0">
-                <a:solidFill>
-                  <a:srgbClr val="26303A"/>
-                </a:solidFill>
-                <a:latin typeface="Meiryo"/>
-                <a:ea typeface="Meiryo"/>
-              </a:rPr>
-              <a:t> に</a:t>
-            </a:r>
-            <a:r>
-              <a:rPr sz="1450" b="1" i="0">
-                <a:solidFill>
-                  <a:srgbClr val="16385C"/>
-                </a:solidFill>
-                <a:latin typeface="Meiryo"/>
-                <a:ea typeface="Meiryo"/>
-              </a:rPr>
-              <a:t>固定</a:t>
-            </a:r>
-            <a:r>
-              <a:rPr sz="1450" b="0" i="0">
-                <a:solidFill>
-                  <a:srgbClr val="26303A"/>
-                </a:solidFill>
-                <a:latin typeface="Meiryo"/>
-                <a:ea typeface="Meiryo"/>
-              </a:rPr>
-              <a:t>し，解を </a:t>
-            </a:r>
-            <a:r>
-              <a:rPr sz="1450" b="0" i="1">
-                <a:solidFill>
-                  <a:srgbClr val="26303A"/>
-                </a:solidFill>
-                <a:latin typeface="Meiryo"/>
-                <a:ea typeface="Meiryo"/>
-              </a:rPr>
-              <a:t>S</a:t>
-            </a:r>
-            <a:r>
-              <a:rPr sz="1044" b="0" i="1" baseline="-22000">
-                <a:solidFill>
-                  <a:srgbClr val="26303A"/>
-                </a:solidFill>
-                <a:latin typeface="Meiryo"/>
-                <a:ea typeface="Meiryo"/>
-              </a:rPr>
-              <a:t>p</a:t>
-            </a:r>
-            <a:r>
-              <a:rPr sz="1450" b="0" i="0">
-                <a:solidFill>
-                  <a:srgbClr val="26303A"/>
-                </a:solidFill>
-                <a:latin typeface="Meiryo"/>
-                <a:ea typeface="Meiryo"/>
-              </a:rPr>
-              <a:t> に近づける操作にする</a:t>
-            </a:r>
-          </a:p>
-        </p:txBody>
-      </p:sp>
-      <p:cxnSp>
-        <p:nvCxnSpPr>
-          <p:cNvPr id="44" name="Connector 43"/>
-          <p:cNvCxnSpPr/>
-          <p:nvPr/>
-        </p:nvCxnSpPr>
-        <p:spPr>
-          <a:xfrm>
-            <a:off x="768096" y="3300984"/>
-            <a:ext cx="4940503" cy="0"/>
-          </a:xfrm>
-          <a:prstGeom prst="bentConnector3">
-            <a:avLst/>
-          </a:prstGeom>
-          <a:ln w="12700">
-            <a:solidFill>
-              <a:srgbClr val="D6DEE7"/>
-            </a:solidFill>
-          </a:ln>
-          <a:effectLst/>
-        </p:spPr>
-        <p:style>
-          <a:lnRef idx="2">
-            <a:schemeClr val="accent1"/>
-          </a:lnRef>
-          <a:fillRef idx="0">
-            <a:schemeClr val="accent1"/>
-          </a:fillRef>
-          <a:effectRef idx="1">
-            <a:schemeClr val="accent1"/>
-          </a:effectRef>
-          <a:fontRef idx="minor">
-            <a:schemeClr val="tx1"/>
-          </a:fontRef>
-        </p:style>
-      </p:cxnSp>
-      <p:sp>
-        <p:nvSpPr>
-          <p:cNvPr id="45" name="Rounded Rectangle 44"/>
-          <p:cNvSpPr/>
-          <p:nvPr/>
-        </p:nvSpPr>
-        <p:spPr>
-          <a:xfrm>
-            <a:off x="768096" y="3520440"/>
-            <a:ext cx="960120" cy="347472"/>
-          </a:xfrm>
-          <a:prstGeom prst="roundRect">
-            <a:avLst>
-              <a:gd name="adj" fmla="val 30000"/>
-            </a:avLst>
-          </a:prstGeom>
-          <a:solidFill>
-            <a:srgbClr val="2E1A0E"/>
-          </a:solidFill>
-          <a:ln>
-            <a:noFill/>
-          </a:ln>
-          <a:effectLst/>
-        </p:spPr>
-        <p:style>
-          <a:lnRef idx="1">
-            <a:schemeClr val="accent1"/>
-          </a:lnRef>
-          <a:fillRef idx="3">
-            <a:schemeClr val="accent1"/>
-          </a:fillRef>
-          <a:effectRef idx="2">
-            <a:schemeClr val="accent1"/>
-          </a:effectRef>
-          <a:fontRef idx="minor">
-            <a:schemeClr val="lt1"/>
-          </a:fontRef>
-        </p:style>
-        <p:txBody>
-          <a:bodyPr rtlCol="0" anchor="ctr" wrap="square" lIns="54864" rIns="54864" tIns="18288" bIns="18288"/>
-          <a:lstStyle/>
-          <a:p>
-            <a:pPr algn="ctr">
-              <a:lnSpc>
-                <a:spcPct val="100000"/>
-              </a:lnSpc>
-            </a:pPr>
-            <a:r>
-              <a:rPr sz="1250" b="1" i="0">
-                <a:solidFill>
-                  <a:srgbClr val="FFFFFF"/>
-                </a:solidFill>
-                <a:latin typeface="Meiryo"/>
-                <a:ea typeface="Meiryo"/>
-              </a:rPr>
-              <a:t>PR</a:t>
-            </a:r>
-          </a:p>
-        </p:txBody>
-      </p:sp>
-      <p:sp>
-        <p:nvSpPr>
-          <p:cNvPr id="46" name="TextBox 45"/>
-          <p:cNvSpPr txBox="1"/>
-          <p:nvPr/>
-        </p:nvSpPr>
-        <p:spPr>
-          <a:xfrm>
-            <a:off x="1865376" y="3410712"/>
-            <a:ext cx="3834079" cy="566928"/>
-          </a:xfrm>
-          <a:prstGeom prst="rect">
-            <a:avLst/>
-          </a:prstGeom>
-          <a:noFill/>
-        </p:spPr>
-        <p:txBody>
-          <a:bodyPr wrap="square" anchor="ctr" lIns="18288" rIns="18288" tIns="9144" bIns="9144">
-            <a:spAutoFit/>
-          </a:bodyPr>
-          <a:lstStyle/>
-          <a:p>
-            <a:pPr algn="l">
-              <a:lnSpc>
-                <a:spcPct val="108000"/>
-              </a:lnSpc>
-            </a:pPr>
-            <a:r>
-              <a:rPr sz="1350" b="0" i="1">
-                <a:solidFill>
-                  <a:srgbClr val="26303A"/>
-                </a:solidFill>
-                <a:latin typeface="Meiryo"/>
-                <a:ea typeface="Meiryo"/>
-              </a:rPr>
-              <a:t>S</a:t>
-            </a:r>
-            <a:r>
-              <a:rPr sz="971" b="0" i="1" baseline="-22000">
-                <a:solidFill>
-                  <a:srgbClr val="26303A"/>
-                </a:solidFill>
-                <a:latin typeface="Meiryo"/>
-                <a:ea typeface="Meiryo"/>
-              </a:rPr>
-              <a:t>p</a:t>
-            </a:r>
-            <a:r>
-              <a:rPr sz="1350" b="0" i="0">
-                <a:solidFill>
-                  <a:srgbClr val="26303A"/>
-                </a:solidFill>
-                <a:latin typeface="Meiryo"/>
-                <a:ea typeface="Meiryo"/>
-              </a:rPr>
-              <a:t> に到達するまで swap をたどり，経路上で </a:t>
-            </a:r>
-            <a:r>
-              <a:rPr sz="1350" b="0" i="1">
-                <a:solidFill>
-                  <a:srgbClr val="26303A"/>
-                </a:solidFill>
-                <a:latin typeface="Meiryo"/>
-                <a:ea typeface="Meiryo"/>
-              </a:rPr>
-              <a:t>F</a:t>
-            </a:r>
-            <a:r>
-              <a:rPr sz="1350" b="0" i="0">
-                <a:solidFill>
-                  <a:srgbClr val="26303A"/>
-                </a:solidFill>
-                <a:latin typeface="Meiryo"/>
-                <a:ea typeface="Meiryo"/>
-              </a:rPr>
-              <a:t> が最小の解を返す</a:t>
-            </a:r>
-          </a:p>
-        </p:txBody>
-      </p:sp>
-      <p:sp>
-        <p:nvSpPr>
-          <p:cNvPr id="47" name="Rounded Rectangle 46"/>
-          <p:cNvSpPr/>
-          <p:nvPr/>
-        </p:nvSpPr>
-        <p:spPr>
-          <a:xfrm>
-            <a:off x="768096" y="4087368"/>
-            <a:ext cx="960120" cy="347472"/>
-          </a:xfrm>
-          <a:prstGeom prst="roundRect">
-            <a:avLst>
-              <a:gd name="adj" fmla="val 30000"/>
-            </a:avLst>
-          </a:prstGeom>
-          <a:solidFill>
-            <a:srgbClr val="2E1A0E"/>
-          </a:solidFill>
-          <a:ln>
-            <a:noFill/>
-          </a:ln>
-          <a:effectLst/>
-        </p:spPr>
-        <p:style>
-          <a:lnRef idx="1">
-            <a:schemeClr val="accent1"/>
-          </a:lnRef>
-          <a:fillRef idx="3">
-            <a:schemeClr val="accent1"/>
-          </a:fillRef>
-          <a:effectRef idx="2">
-            <a:schemeClr val="accent1"/>
-          </a:effectRef>
-          <a:fontRef idx="minor">
-            <a:schemeClr val="lt1"/>
-          </a:fontRef>
-        </p:style>
-        <p:txBody>
-          <a:bodyPr rtlCol="0" anchor="ctr" wrap="square" lIns="54864" rIns="54864" tIns="18288" bIns="18288"/>
-          <a:lstStyle/>
-          <a:p>
-            <a:pPr algn="ctr">
-              <a:lnSpc>
-                <a:spcPct val="100000"/>
-              </a:lnSpc>
-            </a:pPr>
-            <a:r>
-              <a:rPr sz="1250" b="1" i="0">
-                <a:solidFill>
-                  <a:srgbClr val="FFFFFF"/>
-                </a:solidFill>
-                <a:latin typeface="Meiryo"/>
-                <a:ea typeface="Meiryo"/>
-              </a:rPr>
-              <a:t>PR-</a:t>
-            </a:r>
-            <a:r>
-              <a:rPr sz="1250" b="1" i="1">
-                <a:solidFill>
-                  <a:srgbClr val="FFFFFF"/>
-                </a:solidFill>
-                <a:latin typeface="Meiryo"/>
-                <a:ea typeface="Meiryo"/>
-              </a:rPr>
-              <a:t>k</a:t>
-            </a:r>
-          </a:p>
-        </p:txBody>
-      </p:sp>
-      <p:sp>
-        <p:nvSpPr>
-          <p:cNvPr id="48" name="TextBox 47"/>
-          <p:cNvSpPr txBox="1"/>
-          <p:nvPr/>
-        </p:nvSpPr>
-        <p:spPr>
-          <a:xfrm>
-            <a:off x="1865376" y="3977639"/>
-            <a:ext cx="3834079" cy="566928"/>
-          </a:xfrm>
-          <a:prstGeom prst="rect">
-            <a:avLst/>
-          </a:prstGeom>
-          <a:noFill/>
-        </p:spPr>
-        <p:txBody>
-          <a:bodyPr wrap="square" anchor="ctr" lIns="18288" rIns="18288" tIns="9144" bIns="9144">
-            <a:spAutoFit/>
-          </a:bodyPr>
-          <a:lstStyle/>
-          <a:p>
-            <a:pPr algn="l">
-              <a:lnSpc>
-                <a:spcPct val="108000"/>
-              </a:lnSpc>
-            </a:pPr>
-            <a:r>
-              <a:rPr sz="1350" b="0" i="1">
-                <a:solidFill>
-                  <a:srgbClr val="26303A"/>
-                </a:solidFill>
-                <a:latin typeface="Meiryo"/>
-                <a:ea typeface="Meiryo"/>
-              </a:rPr>
-              <a:t>k</a:t>
-            </a:r>
-            <a:r>
-              <a:rPr sz="1350" b="0" i="0">
-                <a:solidFill>
-                  <a:srgbClr val="26303A"/>
-                </a:solidFill>
-                <a:latin typeface="Meiryo"/>
-                <a:ea typeface="Meiryo"/>
-              </a:rPr>
-              <a:t> 回の swap で打ち切り，到達解を返す（</a:t>
-            </a:r>
-            <a:r>
-              <a:rPr sz="1350" b="0" i="1">
-                <a:solidFill>
-                  <a:srgbClr val="26303A"/>
-                </a:solidFill>
-                <a:latin typeface="Meiryo"/>
-                <a:ea typeface="Meiryo"/>
-              </a:rPr>
-              <a:t>k</a:t>
-            </a:r>
-            <a:r>
-              <a:rPr sz="1350" b="0" i="0">
-                <a:solidFill>
-                  <a:srgbClr val="26303A"/>
-                </a:solidFill>
-                <a:latin typeface="Meiryo"/>
-                <a:ea typeface="Meiryo"/>
-              </a:rPr>
-              <a:t> は 1〜</a:t>
-            </a:r>
-            <a:r>
-              <a:rPr sz="1350" b="0" i="1">
-                <a:solidFill>
-                  <a:srgbClr val="26303A"/>
-                </a:solidFill>
-                <a:latin typeface="Meiryo"/>
-                <a:ea typeface="Meiryo"/>
-              </a:rPr>
-              <a:t>d</a:t>
-            </a:r>
-            <a:r>
-              <a:rPr sz="1350" b="0" i="0">
-                <a:solidFill>
-                  <a:srgbClr val="26303A"/>
-                </a:solidFill>
-                <a:latin typeface="Meiryo"/>
-                <a:ea typeface="Meiryo"/>
-              </a:rPr>
-              <a:t> で変える）</a:t>
-            </a:r>
-          </a:p>
-        </p:txBody>
-      </p:sp>
-      <p:sp>
-        <p:nvSpPr>
-          <p:cNvPr id="49" name="Rounded Rectangle 48"/>
-          <p:cNvSpPr/>
-          <p:nvPr/>
-        </p:nvSpPr>
-        <p:spPr>
-          <a:xfrm>
-            <a:off x="566928" y="4828031"/>
-            <a:ext cx="5342839" cy="1344168"/>
+            <a:off x="6373368" y="5623560"/>
+            <a:ext cx="5251399" cy="640079"/>
           </a:xfrm>
           <a:prstGeom prst="roundRect">
             <a:avLst>
@@ -10248,14 +9818,14 @@
       </p:sp>
       <p:sp>
         <p:nvSpPr>
-          <p:cNvPr id="50" name="TextBox 49"/>
+          <p:cNvPr id="44" name="TextBox 43"/>
           <p:cNvSpPr txBox="1"/>
           <p:nvPr/>
         </p:nvSpPr>
         <p:spPr>
           <a:xfrm>
-            <a:off x="795528" y="4882895"/>
-            <a:ext cx="4885639" cy="1234440"/>
+            <a:off x="6601968" y="5660136"/>
+            <a:ext cx="4794199" cy="566927"/>
           </a:xfrm>
           <a:prstGeom prst="rect">
             <a:avLst/>
@@ -10269,7 +9839,7 @@
           <a:lstStyle/>
           <a:p>
             <a:r>
-              <a:rPr sz="1500" b="1" i="0">
+              <a:rPr sz="1300" b="1" i="0">
                 <a:solidFill>
                   <a:srgbClr val="16385C"/>
                 </a:solidFill>
@@ -10282,11 +9852,11 @@
           <a:p>
             <a:pPr>
               <a:spcBef>
-                <a:spcPts val="800"/>
+                <a:spcPts val="200"/>
               </a:spcBef>
             </a:pPr>
             <a:r>
-              <a:rPr sz="1500" b="1" i="0">
+              <a:rPr sz="1250" b="1" i="0">
                 <a:solidFill>
                   <a:srgbClr val="E06C00"/>
                 </a:solidFill>
@@ -10296,24 +9866,24 @@
               <a:t>ILS：</a:t>
             </a:r>
             <a:r>
-              <a:rPr sz="1500" b="0" i="0">
+              <a:rPr sz="1250" b="0" i="0">
                 <a:solidFill>
                   <a:srgbClr val="26303A"/>
                 </a:solidFill>
                 <a:latin typeface="Meiryo"/>
                 <a:ea typeface="Meiryo"/>
               </a:rPr>
-              <a:t>停滞したときに，摂動として発動</a:t>
+              <a:t>停滞したときに摂動として発動</a:t>
             </a:r>
           </a:p>
           <a:p>
             <a:pPr>
               <a:spcBef>
-                <a:spcPts val="800"/>
+                <a:spcPts val="200"/>
               </a:spcBef>
             </a:pPr>
             <a:r>
-              <a:rPr sz="1500" b="1" i="0">
+              <a:rPr sz="1250" b="1" i="0">
                 <a:solidFill>
                   <a:srgbClr val="0F5C28"/>
                 </a:solidFill>
@@ -10323,14 +9893,14 @@
               <a:t>Memetic：</a:t>
             </a:r>
             <a:r>
-              <a:rPr sz="1500" b="0" i="0">
+              <a:rPr sz="1250" b="0" i="0">
                 <a:solidFill>
                   <a:srgbClr val="26303A"/>
                 </a:solidFill>
                 <a:latin typeface="Meiryo"/>
                 <a:ea typeface="Meiryo"/>
               </a:rPr>
-              <a:t>各個体に確率的に，改善操作として発動</a:t>
+              <a:t>各個体に確率的に改善操作として発動</a:t>
             </a:r>
           </a:p>
         </p:txBody>
@@ -11128,8 +10698,406 @@
         </p:nvSpPr>
         <p:spPr>
           <a:xfrm>
-            <a:off x="8659368" y="2221992"/>
-            <a:ext cx="914400" cy="274320"/>
+            <a:off x="566928" y="3429000"/>
+            <a:ext cx="1097280" cy="365760"/>
+          </a:xfrm>
+          <a:prstGeom prst="roundRect">
+            <a:avLst>
+              <a:gd name="adj" fmla="val 30000"/>
+            </a:avLst>
+          </a:prstGeom>
+          <a:solidFill>
+            <a:srgbClr val="16385C"/>
+          </a:solidFill>
+          <a:ln>
+            <a:noFill/>
+          </a:ln>
+          <a:effectLst/>
+        </p:spPr>
+        <p:style>
+          <a:lnRef idx="1">
+            <a:schemeClr val="accent1"/>
+          </a:lnRef>
+          <a:fillRef idx="3">
+            <a:schemeClr val="accent1"/>
+          </a:fillRef>
+          <a:effectRef idx="2">
+            <a:schemeClr val="accent1"/>
+          </a:effectRef>
+          <a:fontRef idx="minor">
+            <a:schemeClr val="lt1"/>
+          </a:fontRef>
+        </p:style>
+        <p:txBody>
+          <a:bodyPr rtlCol="0" anchor="ctr" wrap="square" lIns="54864" rIns="54864" tIns="18288" bIns="18288"/>
+          <a:lstStyle/>
+          <a:p>
+            <a:pPr algn="ctr">
+              <a:lnSpc>
+                <a:spcPct val="100000"/>
+              </a:lnSpc>
+            </a:pPr>
+            <a:r>
+              <a:rPr sz="1400" b="1" i="0">
+                <a:solidFill>
+                  <a:srgbClr val="FFFFFF"/>
+                </a:solidFill>
+                <a:latin typeface="Meiryo"/>
+                <a:ea typeface="Meiryo"/>
+              </a:rPr>
+              <a:t>仮説 1</a:t>
+            </a:r>
+          </a:p>
+        </p:txBody>
+      </p:sp>
+      <p:sp>
+        <p:nvSpPr>
+          <p:cNvPr id="13" name="TextBox 12"/>
+          <p:cNvSpPr txBox="1"/>
+          <p:nvPr/>
+        </p:nvSpPr>
+        <p:spPr>
+          <a:xfrm>
+            <a:off x="1847088" y="3401568"/>
+            <a:ext cx="9777679" cy="420624"/>
+          </a:xfrm>
+          <a:prstGeom prst="rect">
+            <a:avLst/>
+          </a:prstGeom>
+          <a:noFill/>
+        </p:spPr>
+        <p:txBody>
+          <a:bodyPr wrap="square" anchor="ctr" lIns="18288" rIns="18288" tIns="9144" bIns="9144">
+            <a:spAutoFit/>
+          </a:bodyPr>
+          <a:lstStyle/>
+          <a:p>
+            <a:pPr algn="l">
+              <a:lnSpc>
+                <a:spcPct val="105000"/>
+              </a:lnSpc>
+            </a:pPr>
+            <a:r>
+              <a:rPr sz="1700" b="1" i="0">
+                <a:solidFill>
+                  <a:srgbClr val="26303A"/>
+                </a:solidFill>
+                <a:latin typeface="Meiryo"/>
+                <a:ea typeface="Meiryo"/>
+              </a:rPr>
+              <a:t>単点探索のほうが，多点探索より高安定 HV が大きい</a:t>
+            </a:r>
+          </a:p>
+        </p:txBody>
+      </p:sp>
+      <p:sp>
+        <p:nvSpPr>
+          <p:cNvPr id="14" name="TextBox 13"/>
+          <p:cNvSpPr txBox="1"/>
+          <p:nvPr/>
+        </p:nvSpPr>
+        <p:spPr>
+          <a:xfrm>
+            <a:off x="1847088" y="3840480"/>
+            <a:ext cx="9777679" cy="347472"/>
+          </a:xfrm>
+          <a:prstGeom prst="rect">
+            <a:avLst/>
+          </a:prstGeom>
+          <a:noFill/>
+        </p:spPr>
+        <p:txBody>
+          <a:bodyPr wrap="square" anchor="ctr" lIns="18288" rIns="18288" tIns="9144" bIns="9144">
+            <a:spAutoFit/>
+          </a:bodyPr>
+          <a:lstStyle/>
+          <a:p>
+            <a:r>
+              <a:rPr sz="1500" b="1" i="0">
+                <a:solidFill>
+                  <a:srgbClr val="16385C"/>
+                </a:solidFill>
+                <a:latin typeface="Meiryo"/>
+                <a:ea typeface="Meiryo"/>
+              </a:rPr>
+              <a:t>判定：</a:t>
+            </a:r>
+            <a:r>
+              <a:rPr sz="1500" b="0" i="0">
+                <a:solidFill>
+                  <a:srgbClr val="26303A"/>
+                </a:solidFill>
+                <a:latin typeface="Meiryo"/>
+                <a:ea typeface="Meiryo"/>
+              </a:rPr>
+              <a:t>ILS が Memetic を全シナリオで有意に上回れば支持</a:t>
+            </a:r>
+          </a:p>
+        </p:txBody>
+      </p:sp>
+      <p:sp>
+        <p:nvSpPr>
+          <p:cNvPr id="15" name="Rectangle 14"/>
+          <p:cNvSpPr/>
+          <p:nvPr/>
+        </p:nvSpPr>
+        <p:spPr>
+          <a:xfrm>
+            <a:off x="566928" y="4224528"/>
+            <a:ext cx="11057839" cy="10972"/>
+          </a:xfrm>
+          <a:prstGeom prst="rect">
+            <a:avLst/>
+          </a:prstGeom>
+          <a:solidFill>
+            <a:srgbClr val="D6DEE7"/>
+          </a:solidFill>
+          <a:ln>
+            <a:noFill/>
+          </a:ln>
+          <a:effectLst/>
+        </p:spPr>
+        <p:style>
+          <a:lnRef idx="1">
+            <a:schemeClr val="accent1"/>
+          </a:lnRef>
+          <a:fillRef idx="3">
+            <a:schemeClr val="accent1"/>
+          </a:fillRef>
+          <a:effectRef idx="2">
+            <a:schemeClr val="accent1"/>
+          </a:effectRef>
+          <a:fontRef idx="minor">
+            <a:schemeClr val="lt1"/>
+          </a:fontRef>
+        </p:style>
+        <p:txBody>
+          <a:bodyPr rtlCol="0" anchor="ctr"/>
+          <a:lstStyle/>
+          <a:p>
+            <a:pPr algn="ctr"/>
+          </a:p>
+        </p:txBody>
+      </p:sp>
+      <p:sp>
+        <p:nvSpPr>
+          <p:cNvPr id="16" name="Rounded Rectangle 15"/>
+          <p:cNvSpPr/>
+          <p:nvPr/>
+        </p:nvSpPr>
+        <p:spPr>
+          <a:xfrm>
+            <a:off x="566928" y="4343400"/>
+            <a:ext cx="1097280" cy="365760"/>
+          </a:xfrm>
+          <a:prstGeom prst="roundRect">
+            <a:avLst>
+              <a:gd name="adj" fmla="val 30000"/>
+            </a:avLst>
+          </a:prstGeom>
+          <a:solidFill>
+            <a:srgbClr val="2E1A0E"/>
+          </a:solidFill>
+          <a:ln>
+            <a:noFill/>
+          </a:ln>
+          <a:effectLst/>
+        </p:spPr>
+        <p:style>
+          <a:lnRef idx="1">
+            <a:schemeClr val="accent1"/>
+          </a:lnRef>
+          <a:fillRef idx="3">
+            <a:schemeClr val="accent1"/>
+          </a:fillRef>
+          <a:effectRef idx="2">
+            <a:schemeClr val="accent1"/>
+          </a:effectRef>
+          <a:fontRef idx="minor">
+            <a:schemeClr val="lt1"/>
+          </a:fontRef>
+        </p:style>
+        <p:txBody>
+          <a:bodyPr rtlCol="0" anchor="ctr" wrap="square" lIns="54864" rIns="54864" tIns="18288" bIns="18288"/>
+          <a:lstStyle/>
+          <a:p>
+            <a:pPr algn="ctr">
+              <a:lnSpc>
+                <a:spcPct val="100000"/>
+              </a:lnSpc>
+            </a:pPr>
+            <a:r>
+              <a:rPr sz="1400" b="1" i="0">
+                <a:solidFill>
+                  <a:srgbClr val="FFFFFF"/>
+                </a:solidFill>
+                <a:latin typeface="Meiryo"/>
+                <a:ea typeface="Meiryo"/>
+              </a:rPr>
+              <a:t>仮説 2</a:t>
+            </a:r>
+          </a:p>
+        </p:txBody>
+      </p:sp>
+      <p:sp>
+        <p:nvSpPr>
+          <p:cNvPr id="17" name="TextBox 16"/>
+          <p:cNvSpPr txBox="1"/>
+          <p:nvPr/>
+        </p:nvSpPr>
+        <p:spPr>
+          <a:xfrm>
+            <a:off x="1847088" y="4315968"/>
+            <a:ext cx="9777679" cy="420624"/>
+          </a:xfrm>
+          <a:prstGeom prst="rect">
+            <a:avLst/>
+          </a:prstGeom>
+          <a:noFill/>
+        </p:spPr>
+        <p:txBody>
+          <a:bodyPr wrap="square" anchor="ctr" lIns="18288" rIns="18288" tIns="9144" bIns="9144">
+            <a:spAutoFit/>
+          </a:bodyPr>
+          <a:lstStyle/>
+          <a:p>
+            <a:pPr algn="l">
+              <a:lnSpc>
+                <a:spcPct val="105000"/>
+              </a:lnSpc>
+            </a:pPr>
+            <a:r>
+              <a:rPr sz="1700" b="1" i="0">
+                <a:solidFill>
+                  <a:srgbClr val="26303A"/>
+                </a:solidFill>
+                <a:latin typeface="Meiryo"/>
+                <a:ea typeface="Meiryo"/>
+              </a:rPr>
+              <a:t>安定性誘導演算子を組み込めば，多点探索の高安定 HV は向上する</a:t>
+            </a:r>
+          </a:p>
+        </p:txBody>
+      </p:sp>
+      <p:sp>
+        <p:nvSpPr>
+          <p:cNvPr id="18" name="TextBox 17"/>
+          <p:cNvSpPr txBox="1"/>
+          <p:nvPr/>
+        </p:nvSpPr>
+        <p:spPr>
+          <a:xfrm>
+            <a:off x="1847088" y="4754880"/>
+            <a:ext cx="9777679" cy="347472"/>
+          </a:xfrm>
+          <a:prstGeom prst="rect">
+            <a:avLst/>
+          </a:prstGeom>
+          <a:noFill/>
+        </p:spPr>
+        <p:txBody>
+          <a:bodyPr wrap="square" anchor="ctr" lIns="18288" rIns="18288" tIns="9144" bIns="9144">
+            <a:spAutoFit/>
+          </a:bodyPr>
+          <a:lstStyle/>
+          <a:p>
+            <a:r>
+              <a:rPr sz="1500" b="1" i="0">
+                <a:solidFill>
+                  <a:srgbClr val="16385C"/>
+                </a:solidFill>
+                <a:latin typeface="Meiryo"/>
+                <a:ea typeface="Meiryo"/>
+              </a:rPr>
+              <a:t>判定：</a:t>
+            </a:r>
+            <a:r>
+              <a:rPr sz="1500" b="0" i="0">
+                <a:solidFill>
+                  <a:srgbClr val="26303A"/>
+                </a:solidFill>
+                <a:latin typeface="Meiryo"/>
+                <a:ea typeface="Meiryo"/>
+              </a:rPr>
+              <a:t>Memetic＋PR-</a:t>
+            </a:r>
+            <a:r>
+              <a:rPr sz="1500" b="0" i="1">
+                <a:solidFill>
+                  <a:srgbClr val="26303A"/>
+                </a:solidFill>
+                <a:latin typeface="Meiryo"/>
+                <a:ea typeface="Meiryo"/>
+              </a:rPr>
+              <a:t>k</a:t>
+            </a:r>
+            <a:r>
+              <a:rPr sz="1500" b="0" i="0">
+                <a:solidFill>
+                  <a:srgbClr val="26303A"/>
+                </a:solidFill>
+                <a:latin typeface="Meiryo"/>
+                <a:ea typeface="Meiryo"/>
+              </a:rPr>
+              <a:t> と Memetic＋PR がそれぞれ Memetic を全シナリオで有意に上回れば支持</a:t>
+            </a:r>
+          </a:p>
+        </p:txBody>
+      </p:sp>
+      <p:sp>
+        <p:nvSpPr>
+          <p:cNvPr id="19" name="Rectangle 18"/>
+          <p:cNvSpPr/>
+          <p:nvPr/>
+        </p:nvSpPr>
+        <p:spPr>
+          <a:xfrm>
+            <a:off x="566928" y="5138928"/>
+            <a:ext cx="11057839" cy="10972"/>
+          </a:xfrm>
+          <a:prstGeom prst="rect">
+            <a:avLst/>
+          </a:prstGeom>
+          <a:solidFill>
+            <a:srgbClr val="D6DEE7"/>
+          </a:solidFill>
+          <a:ln>
+            <a:noFill/>
+          </a:ln>
+          <a:effectLst/>
+        </p:spPr>
+        <p:style>
+          <a:lnRef idx="1">
+            <a:schemeClr val="accent1"/>
+          </a:lnRef>
+          <a:fillRef idx="3">
+            <a:schemeClr val="accent1"/>
+          </a:fillRef>
+          <a:effectRef idx="2">
+            <a:schemeClr val="accent1"/>
+          </a:effectRef>
+          <a:fontRef idx="minor">
+            <a:schemeClr val="lt1"/>
+          </a:fontRef>
+        </p:style>
+        <p:txBody>
+          <a:bodyPr rtlCol="0" anchor="ctr"/>
+          <a:lstStyle/>
+          <a:p>
+            <a:pPr algn="ctr"/>
+          </a:p>
+        </p:txBody>
+      </p:sp>
+      <p:sp>
+        <p:nvSpPr>
+          <p:cNvPr id="20" name="Rounded Rectangle 19"/>
+          <p:cNvSpPr/>
+          <p:nvPr/>
+        </p:nvSpPr>
+        <p:spPr>
+          <a:xfrm>
+            <a:off x="566928" y="5257800"/>
+            <a:ext cx="1097280" cy="365760"/>
           </a:xfrm>
           <a:prstGeom prst="roundRect">
             <a:avLst>
@@ -11168,7 +11136,7 @@
               </a:lnSpc>
             </a:pPr>
             <a:r>
-              <a:rPr sz="1100" b="1" i="0">
+              <a:rPr sz="1300" b="1" i="0">
                 <a:solidFill>
                   <a:srgbClr val="FFFFFF"/>
                 </a:solidFill>
@@ -11182,134 +11150,14 @@
       </p:sp>
       <p:sp>
         <p:nvSpPr>
-          <p:cNvPr id="13" name="Rounded Rectangle 12"/>
-          <p:cNvSpPr/>
-          <p:nvPr/>
-        </p:nvSpPr>
-        <p:spPr>
-          <a:xfrm>
-            <a:off x="8659368" y="2606040"/>
-            <a:ext cx="914400" cy="274320"/>
-          </a:xfrm>
-          <a:prstGeom prst="roundRect">
-            <a:avLst>
-              <a:gd name="adj" fmla="val 30000"/>
-            </a:avLst>
-          </a:prstGeom>
-          <a:solidFill>
-            <a:srgbClr val="2E1A0E"/>
-          </a:solidFill>
-          <a:ln>
-            <a:noFill/>
-          </a:ln>
-          <a:effectLst/>
-        </p:spPr>
-        <p:style>
-          <a:lnRef idx="1">
-            <a:schemeClr val="accent1"/>
-          </a:lnRef>
-          <a:fillRef idx="3">
-            <a:schemeClr val="accent1"/>
-          </a:fillRef>
-          <a:effectRef idx="2">
-            <a:schemeClr val="accent1"/>
-          </a:effectRef>
-          <a:fontRef idx="minor">
-            <a:schemeClr val="lt1"/>
-          </a:fontRef>
-        </p:style>
-        <p:txBody>
-          <a:bodyPr rtlCol="0" anchor="ctr" wrap="square" lIns="54864" rIns="54864" tIns="18288" bIns="18288"/>
-          <a:lstStyle/>
-          <a:p>
-            <a:pPr algn="ctr">
-              <a:lnSpc>
-                <a:spcPct val="100000"/>
-              </a:lnSpc>
-            </a:pPr>
-            <a:r>
-              <a:rPr sz="1100" b="1" i="0">
-                <a:solidFill>
-                  <a:srgbClr val="FFFFFF"/>
-                </a:solidFill>
-                <a:latin typeface="Meiryo"/>
-                <a:ea typeface="Meiryo"/>
-              </a:rPr>
-              <a:t>仮説 2</a:t>
-            </a:r>
-          </a:p>
-        </p:txBody>
-      </p:sp>
-      <p:sp>
-        <p:nvSpPr>
-          <p:cNvPr id="14" name="Rounded Rectangle 13"/>
-          <p:cNvSpPr/>
-          <p:nvPr/>
-        </p:nvSpPr>
-        <p:spPr>
-          <a:xfrm>
-            <a:off x="3447287" y="2980944"/>
-            <a:ext cx="914400" cy="274320"/>
-          </a:xfrm>
-          <a:prstGeom prst="roundRect">
-            <a:avLst>
-              <a:gd name="adj" fmla="val 30000"/>
-            </a:avLst>
-          </a:prstGeom>
-          <a:solidFill>
-            <a:srgbClr val="16385C"/>
-          </a:solidFill>
-          <a:ln>
-            <a:noFill/>
-          </a:ln>
-          <a:effectLst/>
-        </p:spPr>
-        <p:style>
-          <a:lnRef idx="1">
-            <a:schemeClr val="accent1"/>
-          </a:lnRef>
-          <a:fillRef idx="3">
-            <a:schemeClr val="accent1"/>
-          </a:fillRef>
-          <a:effectRef idx="2">
-            <a:schemeClr val="accent1"/>
-          </a:effectRef>
-          <a:fontRef idx="minor">
-            <a:schemeClr val="lt1"/>
-          </a:fontRef>
-        </p:style>
-        <p:txBody>
-          <a:bodyPr rtlCol="0" anchor="ctr" wrap="square" lIns="54864" rIns="54864" tIns="18288" bIns="18288"/>
-          <a:lstStyle/>
-          <a:p>
-            <a:pPr algn="ctr">
-              <a:lnSpc>
-                <a:spcPct val="100000"/>
-              </a:lnSpc>
-            </a:pPr>
-            <a:r>
-              <a:rPr sz="1100" b="1" i="0">
-                <a:solidFill>
-                  <a:srgbClr val="FFFFFF"/>
-                </a:solidFill>
-                <a:latin typeface="Meiryo"/>
-                <a:ea typeface="Meiryo"/>
-              </a:rPr>
-              <a:t>仮説 1</a:t>
-            </a:r>
-          </a:p>
-        </p:txBody>
-      </p:sp>
-      <p:sp>
-        <p:nvSpPr>
-          <p:cNvPr id="15" name="TextBox 14"/>
+          <p:cNvPr id="21" name="TextBox 20"/>
           <p:cNvSpPr txBox="1"/>
           <p:nvPr/>
         </p:nvSpPr>
         <p:spPr>
           <a:xfrm>
-            <a:off x="5047488" y="2990088"/>
-            <a:ext cx="3474720" cy="274320"/>
+            <a:off x="1847088" y="5230368"/>
+            <a:ext cx="9777679" cy="420624"/>
           </a:xfrm>
           <a:prstGeom prst="rect">
             <a:avLst/>
@@ -11328,149 +11176,24 @@
               </a:lnSpc>
             </a:pPr>
             <a:r>
-              <a:rPr sz="1150" b="0" i="0">
-                <a:solidFill>
-                  <a:srgbClr val="6E7A88"/>
-                </a:solidFill>
-                <a:latin typeface="Meiryo"/>
-                <a:ea typeface="Meiryo"/>
-              </a:rPr>
-              <a:t>参考：GA（局所探索なし）を加えて計 7 手法</a:t>
-            </a:r>
-          </a:p>
-        </p:txBody>
-      </p:sp>
-      <p:sp>
-        <p:nvSpPr>
-          <p:cNvPr id="16" name="Rounded Rectangle 15"/>
-          <p:cNvSpPr/>
-          <p:nvPr/>
-        </p:nvSpPr>
-        <p:spPr>
-          <a:xfrm>
-            <a:off x="566928" y="3429000"/>
-            <a:ext cx="1097280" cy="365760"/>
-          </a:xfrm>
-          <a:prstGeom prst="roundRect">
-            <a:avLst>
-              <a:gd name="adj" fmla="val 30000"/>
-            </a:avLst>
-          </a:prstGeom>
-          <a:solidFill>
-            <a:srgbClr val="16385C"/>
-          </a:solidFill>
-          <a:ln>
-            <a:noFill/>
-          </a:ln>
-          <a:effectLst/>
-        </p:spPr>
-        <p:style>
-          <a:lnRef idx="1">
-            <a:schemeClr val="accent1"/>
-          </a:lnRef>
-          <a:fillRef idx="3">
-            <a:schemeClr val="accent1"/>
-          </a:fillRef>
-          <a:effectRef idx="2">
-            <a:schemeClr val="accent1"/>
-          </a:effectRef>
-          <a:fontRef idx="minor">
-            <a:schemeClr val="lt1"/>
-          </a:fontRef>
-        </p:style>
-        <p:txBody>
-          <a:bodyPr rtlCol="0" anchor="ctr" wrap="square" lIns="54864" rIns="54864" tIns="18288" bIns="18288"/>
-          <a:lstStyle/>
-          <a:p>
-            <a:pPr algn="ctr">
-              <a:lnSpc>
-                <a:spcPct val="100000"/>
-              </a:lnSpc>
-            </a:pPr>
-            <a:r>
-              <a:rPr sz="1400" b="1" i="0">
-                <a:solidFill>
-                  <a:srgbClr val="FFFFFF"/>
-                </a:solidFill>
-                <a:latin typeface="Meiryo"/>
-                <a:ea typeface="Meiryo"/>
-              </a:rPr>
-              <a:t>仮説 1</a:t>
-            </a:r>
-          </a:p>
-        </p:txBody>
-      </p:sp>
-      <p:sp>
-        <p:nvSpPr>
-          <p:cNvPr id="17" name="TextBox 16"/>
-          <p:cNvSpPr txBox="1"/>
-          <p:nvPr/>
-        </p:nvSpPr>
-        <p:spPr>
-          <a:xfrm>
-            <a:off x="1847088" y="3401568"/>
-            <a:ext cx="9777679" cy="420624"/>
-          </a:xfrm>
-          <a:prstGeom prst="rect">
-            <a:avLst/>
-          </a:prstGeom>
-          <a:noFill/>
-        </p:spPr>
-        <p:txBody>
-          <a:bodyPr wrap="square" anchor="ctr" lIns="18288" rIns="18288" tIns="9144" bIns="9144">
-            <a:spAutoFit/>
-          </a:bodyPr>
-          <a:lstStyle/>
-          <a:p>
-            <a:pPr algn="l">
-              <a:lnSpc>
-                <a:spcPct val="105000"/>
-              </a:lnSpc>
-            </a:pPr>
-            <a:r>
-              <a:rPr sz="1700" b="1" i="0">
+              <a:rPr sz="1500" b="0" i="0">
                 <a:solidFill>
                   <a:srgbClr val="26303A"/>
                 </a:solidFill>
                 <a:latin typeface="Meiryo"/>
                 <a:ea typeface="Meiryo"/>
               </a:rPr>
-              <a:t>単点探索のほうが，多点探索より高安定 HV が大きい</a:t>
-            </a:r>
-          </a:p>
-        </p:txBody>
-      </p:sp>
-      <p:sp>
-        <p:nvSpPr>
-          <p:cNvPr id="18" name="TextBox 17"/>
-          <p:cNvSpPr txBox="1"/>
-          <p:nvPr/>
-        </p:nvSpPr>
-        <p:spPr>
-          <a:xfrm>
-            <a:off x="1847088" y="3840480"/>
-            <a:ext cx="9777679" cy="347472"/>
-          </a:xfrm>
-          <a:prstGeom prst="rect">
-            <a:avLst/>
-          </a:prstGeom>
-          <a:noFill/>
-        </p:spPr>
-        <p:txBody>
-          <a:bodyPr wrap="square" anchor="ctr" lIns="18288" rIns="18288" tIns="9144" bIns="9144">
-            <a:spAutoFit/>
-          </a:bodyPr>
-          <a:lstStyle/>
-          <a:p>
-            <a:r>
-              <a:rPr sz="1500" b="1" i="0">
-                <a:solidFill>
-                  <a:srgbClr val="16385C"/>
-                </a:solidFill>
-                <a:latin typeface="Meiryo"/>
-                <a:ea typeface="Meiryo"/>
-              </a:rPr>
-              <a:t>判定：</a:t>
+              <a:t>ILS＋PR-</a:t>
+            </a:r>
+            <a:r>
+              <a:rPr sz="1500" b="0" i="1">
+                <a:solidFill>
+                  <a:srgbClr val="26303A"/>
+                </a:solidFill>
+                <a:latin typeface="Meiryo"/>
+                <a:ea typeface="Meiryo"/>
+              </a:rPr>
+              <a:t>k</a:t>
             </a:r>
             <a:r>
               <a:rPr sz="1500" b="0" i="0">
@@ -11480,151 +11203,7 @@
                 <a:latin typeface="Meiryo"/>
                 <a:ea typeface="Meiryo"/>
               </a:rPr>
-              <a:t>ILS が Memetic を全シナリオで有意に上回れば支持</a:t>
-            </a:r>
-          </a:p>
-        </p:txBody>
-      </p:sp>
-      <p:sp>
-        <p:nvSpPr>
-          <p:cNvPr id="19" name="Rectangle 18"/>
-          <p:cNvSpPr/>
-          <p:nvPr/>
-        </p:nvSpPr>
-        <p:spPr>
-          <a:xfrm>
-            <a:off x="566928" y="4224528"/>
-            <a:ext cx="11057839" cy="10972"/>
-          </a:xfrm>
-          <a:prstGeom prst="rect">
-            <a:avLst/>
-          </a:prstGeom>
-          <a:solidFill>
-            <a:srgbClr val="D6DEE7"/>
-          </a:solidFill>
-          <a:ln>
-            <a:noFill/>
-          </a:ln>
-          <a:effectLst/>
-        </p:spPr>
-        <p:style>
-          <a:lnRef idx="1">
-            <a:schemeClr val="accent1"/>
-          </a:lnRef>
-          <a:fillRef idx="3">
-            <a:schemeClr val="accent1"/>
-          </a:fillRef>
-          <a:effectRef idx="2">
-            <a:schemeClr val="accent1"/>
-          </a:effectRef>
-          <a:fontRef idx="minor">
-            <a:schemeClr val="lt1"/>
-          </a:fontRef>
-        </p:style>
-        <p:txBody>
-          <a:bodyPr rtlCol="0" anchor="ctr"/>
-          <a:lstStyle/>
-          <a:p>
-            <a:pPr algn="ctr"/>
-          </a:p>
-        </p:txBody>
-      </p:sp>
-      <p:sp>
-        <p:nvSpPr>
-          <p:cNvPr id="20" name="Rounded Rectangle 19"/>
-          <p:cNvSpPr/>
-          <p:nvPr/>
-        </p:nvSpPr>
-        <p:spPr>
-          <a:xfrm>
-            <a:off x="566928" y="4343400"/>
-            <a:ext cx="1097280" cy="365760"/>
-          </a:xfrm>
-          <a:prstGeom prst="roundRect">
-            <a:avLst>
-              <a:gd name="adj" fmla="val 30000"/>
-            </a:avLst>
-          </a:prstGeom>
-          <a:solidFill>
-            <a:srgbClr val="2E1A0E"/>
-          </a:solidFill>
-          <a:ln>
-            <a:noFill/>
-          </a:ln>
-          <a:effectLst/>
-        </p:spPr>
-        <p:style>
-          <a:lnRef idx="1">
-            <a:schemeClr val="accent1"/>
-          </a:lnRef>
-          <a:fillRef idx="3">
-            <a:schemeClr val="accent1"/>
-          </a:fillRef>
-          <a:effectRef idx="2">
-            <a:schemeClr val="accent1"/>
-          </a:effectRef>
-          <a:fontRef idx="minor">
-            <a:schemeClr val="lt1"/>
-          </a:fontRef>
-        </p:style>
-        <p:txBody>
-          <a:bodyPr rtlCol="0" anchor="ctr" wrap="square" lIns="54864" rIns="54864" tIns="18288" bIns="18288"/>
-          <a:lstStyle/>
-          <a:p>
-            <a:pPr algn="ctr">
-              <a:lnSpc>
-                <a:spcPct val="100000"/>
-              </a:lnSpc>
-            </a:pPr>
-            <a:r>
-              <a:rPr sz="1400" b="1" i="0">
-                <a:solidFill>
-                  <a:srgbClr val="FFFFFF"/>
-                </a:solidFill>
-                <a:latin typeface="Meiryo"/>
-                <a:ea typeface="Meiryo"/>
-              </a:rPr>
-              <a:t>仮説 2</a:t>
-            </a:r>
-          </a:p>
-        </p:txBody>
-      </p:sp>
-      <p:sp>
-        <p:nvSpPr>
-          <p:cNvPr id="21" name="TextBox 20"/>
-          <p:cNvSpPr txBox="1"/>
-          <p:nvPr/>
-        </p:nvSpPr>
-        <p:spPr>
-          <a:xfrm>
-            <a:off x="1847088" y="4315968"/>
-            <a:ext cx="9777679" cy="420624"/>
-          </a:xfrm>
-          <a:prstGeom prst="rect">
-            <a:avLst/>
-          </a:prstGeom>
-          <a:noFill/>
-        </p:spPr>
-        <p:txBody>
-          <a:bodyPr wrap="square" anchor="ctr" lIns="18288" rIns="18288" tIns="9144" bIns="9144">
-            <a:spAutoFit/>
-          </a:bodyPr>
-          <a:lstStyle/>
-          <a:p>
-            <a:pPr algn="l">
-              <a:lnSpc>
-                <a:spcPct val="105000"/>
-              </a:lnSpc>
-            </a:pPr>
-            <a:r>
-              <a:rPr sz="1700" b="1" i="0">
-                <a:solidFill>
-                  <a:srgbClr val="26303A"/>
-                </a:solidFill>
-                <a:latin typeface="Meiryo"/>
-                <a:ea typeface="Meiryo"/>
-              </a:rPr>
-              <a:t>安定性誘導演算子を組み込めば，多点探索の高安定 HV は向上する</a:t>
+              <a:t> と ILS＋PR も同じ形で ILS と比較し，演算子の効果が探索構造で異なるかを見る</a:t>
             </a:r>
           </a:p>
         </p:txBody>
@@ -11632,235 +11211,6 @@
       <p:sp>
         <p:nvSpPr>
           <p:cNvPr id="22" name="TextBox 21"/>
-          <p:cNvSpPr txBox="1"/>
-          <p:nvPr/>
-        </p:nvSpPr>
-        <p:spPr>
-          <a:xfrm>
-            <a:off x="1847088" y="4754880"/>
-            <a:ext cx="9777679" cy="347472"/>
-          </a:xfrm>
-          <a:prstGeom prst="rect">
-            <a:avLst/>
-          </a:prstGeom>
-          <a:noFill/>
-        </p:spPr>
-        <p:txBody>
-          <a:bodyPr wrap="square" anchor="ctr" lIns="18288" rIns="18288" tIns="9144" bIns="9144">
-            <a:spAutoFit/>
-          </a:bodyPr>
-          <a:lstStyle/>
-          <a:p>
-            <a:r>
-              <a:rPr sz="1500" b="1" i="0">
-                <a:solidFill>
-                  <a:srgbClr val="16385C"/>
-                </a:solidFill>
-                <a:latin typeface="Meiryo"/>
-                <a:ea typeface="Meiryo"/>
-              </a:rPr>
-              <a:t>判定：</a:t>
-            </a:r>
-            <a:r>
-              <a:rPr sz="1500" b="0" i="0">
-                <a:solidFill>
-                  <a:srgbClr val="26303A"/>
-                </a:solidFill>
-                <a:latin typeface="Meiryo"/>
-                <a:ea typeface="Meiryo"/>
-              </a:rPr>
-              <a:t>Memetic＋PR-</a:t>
-            </a:r>
-            <a:r>
-              <a:rPr sz="1500" b="0" i="1">
-                <a:solidFill>
-                  <a:srgbClr val="26303A"/>
-                </a:solidFill>
-                <a:latin typeface="Meiryo"/>
-                <a:ea typeface="Meiryo"/>
-              </a:rPr>
-              <a:t>k</a:t>
-            </a:r>
-            <a:r>
-              <a:rPr sz="1500" b="0" i="0">
-                <a:solidFill>
-                  <a:srgbClr val="26303A"/>
-                </a:solidFill>
-                <a:latin typeface="Meiryo"/>
-                <a:ea typeface="Meiryo"/>
-              </a:rPr>
-              <a:t> と Memetic＋PR がそれぞれ Memetic を全シナリオで有意に上回れば支持</a:t>
-            </a:r>
-          </a:p>
-        </p:txBody>
-      </p:sp>
-      <p:sp>
-        <p:nvSpPr>
-          <p:cNvPr id="23" name="Rectangle 22"/>
-          <p:cNvSpPr/>
-          <p:nvPr/>
-        </p:nvSpPr>
-        <p:spPr>
-          <a:xfrm>
-            <a:off x="566928" y="5138928"/>
-            <a:ext cx="11057839" cy="10972"/>
-          </a:xfrm>
-          <a:prstGeom prst="rect">
-            <a:avLst/>
-          </a:prstGeom>
-          <a:solidFill>
-            <a:srgbClr val="D6DEE7"/>
-          </a:solidFill>
-          <a:ln>
-            <a:noFill/>
-          </a:ln>
-          <a:effectLst/>
-        </p:spPr>
-        <p:style>
-          <a:lnRef idx="1">
-            <a:schemeClr val="accent1"/>
-          </a:lnRef>
-          <a:fillRef idx="3">
-            <a:schemeClr val="accent1"/>
-          </a:fillRef>
-          <a:effectRef idx="2">
-            <a:schemeClr val="accent1"/>
-          </a:effectRef>
-          <a:fontRef idx="minor">
-            <a:schemeClr val="lt1"/>
-          </a:fontRef>
-        </p:style>
-        <p:txBody>
-          <a:bodyPr rtlCol="0" anchor="ctr"/>
-          <a:lstStyle/>
-          <a:p>
-            <a:pPr algn="ctr"/>
-          </a:p>
-        </p:txBody>
-      </p:sp>
-      <p:sp>
-        <p:nvSpPr>
-          <p:cNvPr id="24" name="Rounded Rectangle 23"/>
-          <p:cNvSpPr/>
-          <p:nvPr/>
-        </p:nvSpPr>
-        <p:spPr>
-          <a:xfrm>
-            <a:off x="566928" y="5257800"/>
-            <a:ext cx="1097280" cy="365760"/>
-          </a:xfrm>
-          <a:prstGeom prst="roundRect">
-            <a:avLst>
-              <a:gd name="adj" fmla="val 30000"/>
-            </a:avLst>
-          </a:prstGeom>
-          <a:solidFill>
-            <a:srgbClr val="6E7A88"/>
-          </a:solidFill>
-          <a:ln>
-            <a:noFill/>
-          </a:ln>
-          <a:effectLst/>
-        </p:spPr>
-        <p:style>
-          <a:lnRef idx="1">
-            <a:schemeClr val="accent1"/>
-          </a:lnRef>
-          <a:fillRef idx="3">
-            <a:schemeClr val="accent1"/>
-          </a:fillRef>
-          <a:effectRef idx="2">
-            <a:schemeClr val="accent1"/>
-          </a:effectRef>
-          <a:fontRef idx="minor">
-            <a:schemeClr val="lt1"/>
-          </a:fontRef>
-        </p:style>
-        <p:txBody>
-          <a:bodyPr rtlCol="0" anchor="ctr" wrap="square" lIns="54864" rIns="54864" tIns="18288" bIns="18288"/>
-          <a:lstStyle/>
-          <a:p>
-            <a:pPr algn="ctr">
-              <a:lnSpc>
-                <a:spcPct val="100000"/>
-              </a:lnSpc>
-            </a:pPr>
-            <a:r>
-              <a:rPr sz="1300" b="1" i="0">
-                <a:solidFill>
-                  <a:srgbClr val="FFFFFF"/>
-                </a:solidFill>
-                <a:latin typeface="Meiryo"/>
-                <a:ea typeface="Meiryo"/>
-              </a:rPr>
-              <a:t>仮説の外</a:t>
-            </a:r>
-          </a:p>
-        </p:txBody>
-      </p:sp>
-      <p:sp>
-        <p:nvSpPr>
-          <p:cNvPr id="25" name="TextBox 24"/>
-          <p:cNvSpPr txBox="1"/>
-          <p:nvPr/>
-        </p:nvSpPr>
-        <p:spPr>
-          <a:xfrm>
-            <a:off x="1847088" y="5230368"/>
-            <a:ext cx="9777679" cy="420624"/>
-          </a:xfrm>
-          <a:prstGeom prst="rect">
-            <a:avLst/>
-          </a:prstGeom>
-          <a:noFill/>
-        </p:spPr>
-        <p:txBody>
-          <a:bodyPr wrap="square" anchor="ctr" lIns="18288" rIns="18288" tIns="9144" bIns="9144">
-            <a:spAutoFit/>
-          </a:bodyPr>
-          <a:lstStyle/>
-          <a:p>
-            <a:pPr algn="l">
-              <a:lnSpc>
-                <a:spcPct val="105000"/>
-              </a:lnSpc>
-            </a:pPr>
-            <a:r>
-              <a:rPr sz="1500" b="0" i="0">
-                <a:solidFill>
-                  <a:srgbClr val="26303A"/>
-                </a:solidFill>
-                <a:latin typeface="Meiryo"/>
-                <a:ea typeface="Meiryo"/>
-              </a:rPr>
-              <a:t>ILS＋PR-</a:t>
-            </a:r>
-            <a:r>
-              <a:rPr sz="1500" b="0" i="1">
-                <a:solidFill>
-                  <a:srgbClr val="26303A"/>
-                </a:solidFill>
-                <a:latin typeface="Meiryo"/>
-                <a:ea typeface="Meiryo"/>
-              </a:rPr>
-              <a:t>k</a:t>
-            </a:r>
-            <a:r>
-              <a:rPr sz="1500" b="0" i="0">
-                <a:solidFill>
-                  <a:srgbClr val="26303A"/>
-                </a:solidFill>
-                <a:latin typeface="Meiryo"/>
-                <a:ea typeface="Meiryo"/>
-              </a:rPr>
-              <a:t> と ILS＋PR も同じ形で ILS と比較し，演算子の効果が探索構造で異なるかを見る</a:t>
-            </a:r>
-          </a:p>
-        </p:txBody>
-      </p:sp>
-      <p:sp>
-        <p:nvSpPr>
-          <p:cNvPr id="26" name="TextBox 25"/>
           <p:cNvSpPr txBox="1"/>
           <p:nvPr/>
         </p:nvSpPr>
@@ -13300,13 +12650,93 @@
                           <a:latin typeface="Meiryo"/>
                           <a:ea typeface="Meiryo"/>
                         </a:rPr>
+                        <a:t>比較手法</a:t>
+                      </a:r>
+                    </a:p>
+                  </a:txBody>
+                  <a:tcPr marL="82296" marR="54864" marT="18288" marB="18288" anchor="ctr">
+                    <a:solidFill>
+                      <a:srgbClr val="FFFFFF"/>
+                    </a:solidFill>
+                    <a:lnB w="9525" cap="flat">
+                      <a:solidFill>
+                        <a:srgbClr val="D6DEE7"/>
+                      </a:solidFill>
+                    </a:lnB>
+                  </a:tcPr>
+                </a:tc>
+                <a:tc>
+                  <a:txBody>
+                    <a:bodyPr wrap="square"/>
+                    <a:lstStyle/>
+                    <a:p>
+                      <a:pPr algn="l"/>
+                      <a:r>
+                        <a:rPr sz="1250" b="0" i="0">
+                          <a:solidFill>
+                            <a:srgbClr val="26303A"/>
+                          </a:solidFill>
+                          <a:latin typeface="Meiryo"/>
+                          <a:ea typeface="Meiryo"/>
+                        </a:rPr>
+                        <a:t>ILS・Memetic と，それぞれに PR-</a:t>
+                      </a:r>
+                      <a:r>
+                        <a:rPr sz="1250" b="0" i="1">
+                          <a:solidFill>
+                            <a:srgbClr val="26303A"/>
+                          </a:solidFill>
+                          <a:latin typeface="Meiryo"/>
+                          <a:ea typeface="Meiryo"/>
+                        </a:rPr>
+                        <a:t>k</a:t>
+                      </a:r>
+                      <a:r>
+                        <a:rPr sz="1250" b="0" i="0">
+                          <a:solidFill>
+                            <a:srgbClr val="26303A"/>
+                          </a:solidFill>
+                          <a:latin typeface="Meiryo"/>
+                          <a:ea typeface="Meiryo"/>
+                        </a:rPr>
+                        <a:t>／PR を組み込んだ 6 手法＋参考の GA（局所探索なし）</a:t>
+                      </a:r>
+                    </a:p>
+                  </a:txBody>
+                  <a:tcPr marL="82296" marR="54864" marT="18288" marB="18288" anchor="ctr">
+                    <a:solidFill>
+                      <a:srgbClr val="FFFFFF"/>
+                    </a:solidFill>
+                    <a:lnB w="9525" cap="flat">
+                      <a:solidFill>
+                        <a:srgbClr val="D6DEE7"/>
+                      </a:solidFill>
+                    </a:lnB>
+                  </a:tcPr>
+                </a:tc>
+              </a:tr>
+              <a:tr h="274320">
+                <a:tc>
+                  <a:txBody>
+                    <a:bodyPr wrap="square"/>
+                    <a:lstStyle/>
+                    <a:p>
+                      <a:pPr algn="l"/>
+                      <a:r>
+                        <a:rPr sz="1250" b="0" i="0">
+                          <a:solidFill>
+                            <a:srgbClr val="26303A"/>
+                          </a:solidFill>
+                          <a:latin typeface="Meiryo"/>
+                          <a:ea typeface="Meiryo"/>
+                        </a:rPr>
                         <a:t>問題・外乱</a:t>
                       </a:r>
                     </a:p>
                   </a:txBody>
                   <a:tcPr marL="82296" marR="54864" marT="18288" marB="18288" anchor="ctr">
                     <a:solidFill>
-                      <a:srgbClr val="FFFFFF"/>
+                      <a:srgbClr val="F6F9FB"/>
                     </a:solidFill>
                     <a:lnB w="9525" cap="flat">
                       <a:solidFill>
@@ -13355,7 +12785,7 @@
                   </a:txBody>
                   <a:tcPr marL="82296" marR="54864" marT="18288" marB="18288" anchor="ctr">
                     <a:solidFill>
-                      <a:srgbClr val="FFFFFF"/>
+                      <a:srgbClr val="F6F9FB"/>
                     </a:solidFill>
                     <a:lnB w="9525" cap="flat">
                       <a:solidFill>
@@ -13386,7 +12816,7 @@
                   </a:txBody>
                   <a:tcPr marL="82296" marR="54864" marT="18288" marB="18288" anchor="ctr">
                     <a:solidFill>
-                      <a:srgbClr val="F6F9FB"/>
+                      <a:srgbClr val="FFFFFF"/>
                     </a:solidFill>
                     <a:lnB w="9525" cap="flat">
                       <a:solidFill>
@@ -13458,7 +12888,7 @@
                   </a:txBody>
                   <a:tcPr marL="82296" marR="54864" marT="18288" marB="18288" anchor="ctr">
                     <a:solidFill>
-                      <a:srgbClr val="F6F9FB"/>
+                      <a:srgbClr val="FFFFFF"/>
                     </a:solidFill>
                     <a:lnB w="9525" cap="flat">
                       <a:solidFill>
@@ -13509,7 +12939,7 @@
                   </a:txBody>
                   <a:tcPr marL="82296" marR="54864" marT="18288" marB="18288" anchor="ctr">
                     <a:solidFill>
-                      <a:srgbClr val="FFFFFF"/>
+                      <a:srgbClr val="F6F9FB"/>
                     </a:solidFill>
                     <a:lnB w="9525" cap="flat">
                       <a:solidFill>
@@ -13538,7 +12968,7 @@
                   </a:txBody>
                   <a:tcPr marL="82296" marR="54864" marT="18288" marB="18288" anchor="ctr">
                     <a:solidFill>
-                      <a:srgbClr val="FFFFFF"/>
+                      <a:srgbClr val="F6F9FB"/>
                     </a:solidFill>
                     <a:lnB w="9525" cap="flat">
                       <a:solidFill>
@@ -13579,7 +13009,7 @@
                   </a:txBody>
                   <a:tcPr marL="82296" marR="54864" marT="18288" marB="18288" anchor="ctr">
                     <a:solidFill>
-                      <a:srgbClr val="F6F9FB"/>
+                      <a:srgbClr val="FFFFFF"/>
                     </a:solidFill>
                     <a:lnB w="9525" cap="flat">
                       <a:solidFill>
@@ -13648,7 +13078,7 @@
                   </a:txBody>
                   <a:tcPr marL="82296" marR="54864" marT="18288" marB="18288" anchor="ctr">
                     <a:solidFill>
-                      <a:srgbClr val="F6F9FB"/>
+                      <a:srgbClr val="FFFFFF"/>
                     </a:solidFill>
                     <a:lnB w="9525" cap="flat">
                       <a:solidFill>
@@ -13679,7 +13109,7 @@
                   </a:txBody>
                   <a:tcPr marL="82296" marR="54864" marT="18288" marB="18288" anchor="ctr">
                     <a:solidFill>
-                      <a:srgbClr val="FFFFFF"/>
+                      <a:srgbClr val="F6F9FB"/>
                     </a:solidFill>
                     <a:lnB w="9525" cap="flat">
                       <a:solidFill>
@@ -13708,7 +13138,7 @@
                   </a:txBody>
                   <a:tcPr marL="82296" marR="54864" marT="18288" marB="18288" anchor="ctr">
                     <a:solidFill>
-                      <a:srgbClr val="FFFFFF"/>
+                      <a:srgbClr val="F6F9FB"/>
                     </a:solidFill>
                     <a:lnB w="9525" cap="flat">
                       <a:solidFill>
@@ -13739,7 +13169,7 @@
                   </a:txBody>
                   <a:tcPr marL="82296" marR="54864" marT="18288" marB="18288" anchor="ctr">
                     <a:solidFill>
-                      <a:srgbClr val="F6F9FB"/>
+                      <a:srgbClr val="FFFFFF"/>
                     </a:solidFill>
                     <a:lnB w="9525" cap="flat">
                       <a:solidFill>
@@ -13811,7 +13241,7 @@
                   </a:txBody>
                   <a:tcPr marL="82296" marR="54864" marT="18288" marB="18288" anchor="ctr">
                     <a:solidFill>
-                      <a:srgbClr val="F6F9FB"/>
+                      <a:srgbClr val="FFFFFF"/>
                     </a:solidFill>
                     <a:lnB w="9525" cap="flat">
                       <a:solidFill>
@@ -13842,7 +13272,7 @@
                   </a:txBody>
                   <a:tcPr marL="82296" marR="54864" marT="18288" marB="18288" anchor="ctr">
                     <a:solidFill>
-                      <a:srgbClr val="FFFFFF"/>
+                      <a:srgbClr val="F6F9FB"/>
                     </a:solidFill>
                     <a:lnB w="9525" cap="flat">
                       <a:solidFill>
@@ -13884,7 +13314,7 @@
                   </a:txBody>
                   <a:tcPr marL="82296" marR="54864" marT="18288" marB="18288" anchor="ctr">
                     <a:solidFill>
-                      <a:srgbClr val="FFFFFF"/>
+                      <a:srgbClr val="F6F9FB"/>
                     </a:solidFill>
                     <a:lnB w="9525" cap="flat">
                       <a:solidFill>
@@ -13915,7 +13345,7 @@
                   </a:txBody>
                   <a:tcPr marL="82296" marR="54864" marT="18288" marB="18288" anchor="ctr">
                     <a:solidFill>
-                      <a:srgbClr val="F6F9FB"/>
+                      <a:srgbClr val="FFFFFF"/>
                     </a:solidFill>
                     <a:lnB w="9525" cap="flat">
                       <a:solidFill>
@@ -14004,7 +13434,7 @@
                   </a:txBody>
                   <a:tcPr marL="82296" marR="54864" marT="18288" marB="18288" anchor="ctr">
                     <a:solidFill>
-                      <a:srgbClr val="F6F9FB"/>
+                      <a:srgbClr val="FFFFFF"/>
                     </a:solidFill>
                     <a:lnB w="9525" cap="flat">
                       <a:solidFill>
@@ -14035,7 +13465,7 @@
                   </a:txBody>
                   <a:tcPr marL="82296" marR="54864" marT="18288" marB="18288" anchor="ctr">
                     <a:solidFill>
-                      <a:srgbClr val="FFFFFF"/>
+                      <a:srgbClr val="F6F9FB"/>
                     </a:solidFill>
                     <a:lnB w="9525" cap="flat">
                       <a:solidFill>
@@ -14064,66 +13494,6 @@
                   </a:txBody>
                   <a:tcPr marL="82296" marR="54864" marT="18288" marB="18288" anchor="ctr">
                     <a:solidFill>
-                      <a:srgbClr val="FFFFFF"/>
-                    </a:solidFill>
-                    <a:lnB w="9525" cap="flat">
-                      <a:solidFill>
-                        <a:srgbClr val="D6DEE7"/>
-                      </a:solidFill>
-                    </a:lnB>
-                  </a:tcPr>
-                </a:tc>
-              </a:tr>
-              <a:tr h="274320">
-                <a:tc>
-                  <a:txBody>
-                    <a:bodyPr wrap="square"/>
-                    <a:lstStyle/>
-                    <a:p>
-                      <a:pPr algn="l"/>
-                      <a:r>
-                        <a:rPr sz="1250" b="0" i="0">
-                          <a:solidFill>
-                            <a:srgbClr val="26303A"/>
-                          </a:solidFill>
-                          <a:latin typeface="Meiryo"/>
-                          <a:ea typeface="Meiryo"/>
-                        </a:rPr>
-                        <a:t>環境</a:t>
-                      </a:r>
-                    </a:p>
-                  </a:txBody>
-                  <a:tcPr marL="82296" marR="54864" marT="18288" marB="18288" anchor="ctr">
-                    <a:solidFill>
-                      <a:srgbClr val="F6F9FB"/>
-                    </a:solidFill>
-                    <a:lnB w="9525" cap="flat">
-                      <a:solidFill>
-                        <a:srgbClr val="D6DEE7"/>
-                      </a:solidFill>
-                    </a:lnB>
-                  </a:tcPr>
-                </a:tc>
-                <a:tc>
-                  <a:txBody>
-                    <a:bodyPr wrap="square"/>
-                    <a:lstStyle/>
-                    <a:p>
-                      <a:pPr algn="l"/>
-                      <a:r>
-                        <a:rPr sz="1250" b="0" i="0">
-                          <a:solidFill>
-                            <a:srgbClr val="26303A"/>
-                          </a:solidFill>
-                          <a:latin typeface="Meiryo"/>
-                          <a:ea typeface="Meiryo"/>
-                        </a:rPr>
-                        <a:t>AMD Ryzen 5 7530U，Python 3.12（NumPy・DEAP・SciPy）</a:t>
-                      </a:r>
-                    </a:p>
-                  </a:txBody>
-                  <a:tcPr marL="82296" marR="54864" marT="18288" marB="18288" anchor="ctr">
-                    <a:solidFill>
                       <a:srgbClr val="F6F9FB"/>
                     </a:solidFill>
                     <a:lnB w="9525" cap="flat">
@@ -14389,7 +13759,7 @@
                 <a:latin typeface="Meiryo"/>
                 <a:ea typeface="Meiryo"/>
               </a:rPr>
-              <a:t>結果 1　高安定領域の非劣解（代表 2 シナリオ）</a:t>
+              <a:t>高安定 HV の比較：代表 2 シナリオの非劣解</a:t>
             </a:r>
           </a:p>
         </p:txBody>
@@ -14790,7 +14160,7 @@
                 <a:latin typeface="Meiryo"/>
                 <a:ea typeface="Meiryo"/>
               </a:rPr>
-              <a:t>結果 2　高安定 HV（全 8 シナリオ）</a:t>
+              <a:t>高安定 HV の比較：全 8 シナリオ（仮説の判定）</a:t>
             </a:r>
           </a:p>
         </p:txBody>
@@ -15271,7 +14641,7 @@
                 <a:latin typeface="Meiryo"/>
                 <a:ea typeface="Meiryo"/>
               </a:rPr>
-              <a:t>安定性誘導演算子の効果が現れる条件</a:t>
+              <a:t>高安定 HV の比較：演算子の効果が現れる条件</a:t>
             </a:r>
           </a:p>
         </p:txBody>
@@ -16165,7 +15535,7 @@
                 <a:latin typeface="Meiryo"/>
                 <a:ea typeface="Meiryo"/>
               </a:rPr>
-              <a:t>結果 3　全域 HV と AUC（代表 2 シナリオ）</a:t>
+              <a:t>全域 HV と AUC：代表 2 シナリオの推移</a:t>
             </a:r>
           </a:p>
         </p:txBody>
@@ -16516,7 +15886,7 @@
                 <a:latin typeface="Meiryo"/>
                 <a:ea typeface="Meiryo"/>
               </a:rPr>
-              <a:t>結果 4　全域 HV と AUC（全 8 シナリオ）</a:t>
+              <a:t>全域 HV と AUC：全 8 シナリオ</a:t>
             </a:r>
           </a:p>
         </p:txBody>

--- a/doc/presentation_materials/JIMA2026fall_発表.pptx
+++ b/doc/presentation_materials/JIMA2026fall_発表.pptx
@@ -5704,16 +5704,40 @@
           </a:p>
         </p:txBody>
       </p:sp>
-      <p:sp>
-        <p:nvSpPr>
-          <p:cNvPr id="8" name="Rounded Rectangle 7"/>
+      <p:pic>
+        <p:nvPicPr>
+          <p:cNvPr id="8" name="Picture 7" descr="concept_h1.png"/>
+          <p:cNvPicPr>
+            <a:picLocks noChangeAspect="1"/>
+          </p:cNvPicPr>
+          <p:nvPr/>
+        </p:nvPicPr>
+        <p:blipFill>
+          <a:blip r:embed="rId2"/>
+          <a:stretch>
+            <a:fillRect/>
+          </a:stretch>
+        </p:blipFill>
+        <p:spPr>
+          <a:xfrm>
+            <a:off x="521207" y="1691640"/>
+            <a:ext cx="5669280" cy="3730386"/>
+          </a:xfrm>
+          <a:prstGeom prst="rect">
+            <a:avLst/>
+          </a:prstGeom>
+        </p:spPr>
+      </p:pic>
+      <p:sp>
+        <p:nvSpPr>
+          <p:cNvPr id="9" name="Rounded Rectangle 8"/>
           <p:cNvSpPr/>
           <p:nvPr/>
         </p:nvSpPr>
         <p:spPr>
           <a:xfrm>
-            <a:off x="566928" y="1691640"/>
-            <a:ext cx="5346039" cy="3931920"/>
+            <a:off x="6510528" y="1691640"/>
+            <a:ext cx="5114239" cy="1810512"/>
           </a:xfrm>
           <a:prstGeom prst="roundRect">
             <a:avLst>
@@ -5754,14 +5778,14 @@
       </p:sp>
       <p:sp>
         <p:nvSpPr>
-          <p:cNvPr id="9" name="Rectangle 8"/>
+          <p:cNvPr id="10" name="Rectangle 9"/>
           <p:cNvSpPr/>
           <p:nvPr/>
         </p:nvSpPr>
         <p:spPr>
           <a:xfrm>
-            <a:off x="566928" y="1691640"/>
-            <a:ext cx="5346039" cy="502920"/>
+            <a:off x="6510528" y="1691640"/>
+            <a:ext cx="5114239" cy="402336"/>
           </a:xfrm>
           <a:prstGeom prst="rect">
             <a:avLst/>
@@ -5798,14 +5822,14 @@
       </p:sp>
       <p:sp>
         <p:nvSpPr>
-          <p:cNvPr id="10" name="TextBox 9"/>
+          <p:cNvPr id="11" name="TextBox 10"/>
           <p:cNvSpPr txBox="1"/>
           <p:nvPr/>
         </p:nvSpPr>
         <p:spPr>
           <a:xfrm>
-            <a:off x="749808" y="1691640"/>
-            <a:ext cx="4980279" cy="502920"/>
+            <a:off x="6693408" y="1691640"/>
+            <a:ext cx="4748479" cy="402336"/>
           </a:xfrm>
           <a:prstGeom prst="rect">
             <a:avLst/>
@@ -5819,7 +5843,7 @@
           <a:lstStyle/>
           <a:p>
             <a:r>
-              <a:rPr sz="1500" b="1" i="0">
+              <a:rPr sz="1400" b="1" i="0">
                 <a:solidFill>
                   <a:srgbClr val="FFFFFF"/>
                 </a:solidFill>
@@ -5829,7 +5853,7 @@
               <a:t>単点探索（ILS：反復局所探索）</a:t>
             </a:r>
             <a:r>
-              <a:rPr sz="1200" b="0" i="0">
+              <a:rPr sz="1150" b="0" i="0">
                 <a:solidFill>
                   <a:srgbClr val="FFFFFF"/>
                 </a:solidFill>
@@ -5843,14 +5867,14 @@
       </p:sp>
       <p:sp>
         <p:nvSpPr>
-          <p:cNvPr id="11" name="TextBox 10"/>
+          <p:cNvPr id="12" name="TextBox 11"/>
           <p:cNvSpPr txBox="1"/>
           <p:nvPr/>
         </p:nvSpPr>
         <p:spPr>
           <a:xfrm>
-            <a:off x="795528" y="2276856"/>
-            <a:ext cx="4888839" cy="365760"/>
+            <a:off x="6693408" y="2203704"/>
+            <a:ext cx="4748479" cy="457200"/>
           </a:xfrm>
           <a:prstGeom prst="rect">
             <a:avLst/>
@@ -5858,48 +5882,156 @@
           <a:noFill/>
         </p:spPr>
         <p:txBody>
-          <a:bodyPr wrap="square" anchor="ctr" lIns="18288" rIns="18288" tIns="9144" bIns="9144">
+          <a:bodyPr wrap="square" anchor="t" lIns="18288" rIns="18288" tIns="9144" bIns="9144">
             <a:spAutoFit/>
           </a:bodyPr>
           <a:lstStyle/>
           <a:p>
-            <a:r>
-              <a:rPr sz="1200" b="1" i="0">
+            <a:pPr>
+              <a:lnSpc>
+                <a:spcPct val="108000"/>
+              </a:lnSpc>
+              <a:spcBef>
+                <a:spcPts val="0"/>
+              </a:spcBef>
+            </a:pPr>
+            <a:r>
+              <a:rPr sz="1000" b="1" i="0">
+                <a:solidFill>
+                  <a:srgbClr val="16385C"/>
+                </a:solidFill>
+                <a:latin typeface="Meiryo"/>
+                <a:ea typeface="Meiryo"/>
+              </a:rPr>
+              <a:t>▪ </a:t>
+            </a:r>
+            <a:r>
+              <a:rPr sz="1250" b="0" i="0">
+                <a:solidFill>
+                  <a:srgbClr val="26303A"/>
+                </a:solidFill>
+                <a:latin typeface="Meiryo"/>
+                <a:ea typeface="Meiryo"/>
+              </a:rPr>
+              <a:t>初期解 </a:t>
+            </a:r>
+            <a:r>
+              <a:rPr sz="1250" b="0" i="1">
+                <a:solidFill>
+                  <a:srgbClr val="26303A"/>
+                </a:solidFill>
+                <a:latin typeface="Meiryo"/>
+                <a:ea typeface="Meiryo"/>
+              </a:rPr>
+              <a:t>S</a:t>
+            </a:r>
+            <a:r>
+              <a:rPr sz="900" b="0" i="1" baseline="-22000">
+                <a:solidFill>
+                  <a:srgbClr val="26303A"/>
+                </a:solidFill>
+                <a:latin typeface="Meiryo"/>
+                <a:ea typeface="Meiryo"/>
+              </a:rPr>
+              <a:t>p</a:t>
+            </a:r>
+            <a:r>
+              <a:rPr sz="1250" b="0" i="0">
+                <a:solidFill>
+                  <a:srgbClr val="26303A"/>
+                </a:solidFill>
+                <a:latin typeface="Meiryo"/>
+                <a:ea typeface="Meiryo"/>
+              </a:rPr>
+              <a:t> に局所探索（N5 近傍）をかけ，</a:t>
+            </a:r>
+            <a:r>
+              <a:rPr sz="1250" b="1" i="0">
                 <a:solidFill>
                   <a:srgbClr val="E06C00"/>
                 </a:solidFill>
                 <a:latin typeface="Meiryo"/>
                 <a:ea typeface="Meiryo"/>
               </a:rPr>
-              <a:t>選定理由：</a:t>
-            </a:r>
-            <a:r>
-              <a:rPr sz="1200" b="0" i="0">
-                <a:solidFill>
-                  <a:srgbClr val="26303A"/>
-                </a:solidFill>
-                <a:latin typeface="Meiryo"/>
-                <a:ea typeface="Meiryo"/>
-              </a:rPr>
-              <a:t>局所探索と摂動が別の段で，演算子を摂動に組み込める</a:t>
-            </a:r>
-          </a:p>
-        </p:txBody>
-      </p:sp>
-      <p:sp>
-        <p:nvSpPr>
-          <p:cNvPr id="12" name="Rounded Rectangle 11"/>
+              <a:t>摂動（数手の insert 移動）→ 局所探索 → 受理判定（</a:t>
+            </a:r>
+            <a:r>
+              <a:rPr sz="1250" b="1" i="1">
+                <a:solidFill>
+                  <a:srgbClr val="E06C00"/>
+                </a:solidFill>
+                <a:latin typeface="Meiryo"/>
+                <a:ea typeface="Meiryo"/>
+              </a:rPr>
+              <a:t>F</a:t>
+            </a:r>
+            <a:r>
+              <a:rPr sz="1250" b="1" i="0">
+                <a:solidFill>
+                  <a:srgbClr val="E06C00"/>
+                </a:solidFill>
+                <a:latin typeface="Meiryo"/>
+                <a:ea typeface="Meiryo"/>
+              </a:rPr>
+              <a:t> が改善すれば更新）</a:t>
+            </a:r>
+            <a:r>
+              <a:rPr sz="1250" b="0" i="0">
+                <a:solidFill>
+                  <a:srgbClr val="26303A"/>
+                </a:solidFill>
+                <a:latin typeface="Meiryo"/>
+                <a:ea typeface="Meiryo"/>
+              </a:rPr>
+              <a:t>を反復する</a:t>
+            </a:r>
+          </a:p>
+          <a:p>
+            <a:pPr>
+              <a:lnSpc>
+                <a:spcPct val="108000"/>
+              </a:lnSpc>
+              <a:spcBef>
+                <a:spcPts val="600"/>
+              </a:spcBef>
+            </a:pPr>
+            <a:r>
+              <a:rPr sz="1000" b="1" i="0">
+                <a:solidFill>
+                  <a:srgbClr val="16385C"/>
+                </a:solidFill>
+                <a:latin typeface="Meiryo"/>
+                <a:ea typeface="Meiryo"/>
+              </a:rPr>
+              <a:t>▪ </a:t>
+            </a:r>
+            <a:r>
+              <a:rPr sz="1250" b="0" i="0">
+                <a:solidFill>
+                  <a:srgbClr val="26303A"/>
+                </a:solidFill>
+                <a:latin typeface="Meiryo"/>
+                <a:ea typeface="Meiryo"/>
+              </a:rPr>
+              <a:t>選定理由：局所探索と摂動が別の段にあり，演算子を摂動に組み込める</a:t>
+            </a:r>
+          </a:p>
+        </p:txBody>
+      </p:sp>
+      <p:sp>
+        <p:nvSpPr>
+          <p:cNvPr id="13" name="Rounded Rectangle 12"/>
           <p:cNvSpPr/>
           <p:nvPr/>
         </p:nvSpPr>
         <p:spPr>
           <a:xfrm>
-            <a:off x="886968" y="2715768"/>
-            <a:ext cx="3566160" cy="402336"/>
+            <a:off x="6510528" y="3630168"/>
+            <a:ext cx="5114239" cy="1810512"/>
           </a:xfrm>
           <a:prstGeom prst="roundRect">
             <a:avLst>
-              <a:gd name="adj" fmla="val 12000"/>
+              <a:gd name="adj" fmla="val 4000"/>
             </a:avLst>
           </a:prstGeom>
           <a:solidFill>
@@ -5927,668 +6059,23 @@
           </a:fontRef>
         </p:style>
         <p:txBody>
-          <a:bodyPr rtlCol="0" anchor="ctr" wrap="square" lIns="54864" rIns="54864" tIns="18288" bIns="18288"/>
-          <a:lstStyle/>
-          <a:p>
-            <a:pPr algn="ctr">
-              <a:lnSpc>
-                <a:spcPct val="100000"/>
-              </a:lnSpc>
-            </a:pPr>
-            <a:r>
-              <a:rPr sz="1250" b="0" i="0">
-                <a:solidFill>
-                  <a:srgbClr val="26303A"/>
-                </a:solidFill>
-                <a:latin typeface="Meiryo"/>
-                <a:ea typeface="Meiryo"/>
-              </a:rPr>
-              <a:t>初期解：</a:t>
-            </a:r>
-            <a:r>
-              <a:rPr sz="1250" b="0" i="1">
-                <a:solidFill>
-                  <a:srgbClr val="26303A"/>
-                </a:solidFill>
-                <a:latin typeface="Meiryo"/>
-                <a:ea typeface="Meiryo"/>
-              </a:rPr>
-              <a:t>S</a:t>
-            </a:r>
-            <a:r>
-              <a:rPr sz="900" b="0" i="1" baseline="-22000">
-                <a:solidFill>
-                  <a:srgbClr val="26303A"/>
-                </a:solidFill>
-                <a:latin typeface="Meiryo"/>
-                <a:ea typeface="Meiryo"/>
-              </a:rPr>
-              <a:t>p</a:t>
-            </a:r>
-          </a:p>
-        </p:txBody>
-      </p:sp>
-      <p:sp>
-        <p:nvSpPr>
-          <p:cNvPr id="13" name="Rounded Rectangle 12"/>
+          <a:bodyPr rtlCol="0" anchor="ctr"/>
+          <a:lstStyle/>
+          <a:p>
+            <a:pPr algn="ctr"/>
+          </a:p>
+        </p:txBody>
+      </p:sp>
+      <p:sp>
+        <p:nvSpPr>
+          <p:cNvPr id="14" name="Rectangle 13"/>
           <p:cNvSpPr/>
           <p:nvPr/>
         </p:nvSpPr>
         <p:spPr>
           <a:xfrm>
-            <a:off x="886968" y="3300984"/>
-            <a:ext cx="3566160" cy="402336"/>
-          </a:xfrm>
-          <a:prstGeom prst="roundRect">
-            <a:avLst>
-              <a:gd name="adj" fmla="val 12000"/>
-            </a:avLst>
-          </a:prstGeom>
-          <a:solidFill>
-            <a:srgbClr val="EDF2F7"/>
-          </a:solidFill>
-          <a:ln w="13970">
-            <a:solidFill>
-              <a:srgbClr val="C9D6E5"/>
-            </a:solidFill>
-          </a:ln>
-          <a:effectLst/>
-        </p:spPr>
-        <p:style>
-          <a:lnRef idx="1">
-            <a:schemeClr val="accent1"/>
-          </a:lnRef>
-          <a:fillRef idx="3">
-            <a:schemeClr val="accent1"/>
-          </a:fillRef>
-          <a:effectRef idx="2">
-            <a:schemeClr val="accent1"/>
-          </a:effectRef>
-          <a:fontRef idx="minor">
-            <a:schemeClr val="lt1"/>
-          </a:fontRef>
-        </p:style>
-        <p:txBody>
-          <a:bodyPr rtlCol="0" anchor="ctr" wrap="square" lIns="54864" rIns="54864" tIns="18288" bIns="18288"/>
-          <a:lstStyle/>
-          <a:p>
-            <a:pPr algn="ctr">
-              <a:lnSpc>
-                <a:spcPct val="100000"/>
-              </a:lnSpc>
-            </a:pPr>
-            <a:r>
-              <a:rPr sz="1250" b="0" i="0">
-                <a:solidFill>
-                  <a:srgbClr val="26303A"/>
-                </a:solidFill>
-                <a:latin typeface="Meiryo"/>
-                <a:ea typeface="Meiryo"/>
-              </a:rPr>
-              <a:t>局所探索：N5 近傍</a:t>
-            </a:r>
-          </a:p>
-        </p:txBody>
-      </p:sp>
-      <p:cxnSp>
-        <p:nvCxnSpPr>
-          <p:cNvPr id="14" name="Connector 13"/>
-          <p:cNvCxnSpPr/>
-          <p:nvPr/>
-        </p:nvCxnSpPr>
-        <p:spPr>
-          <a:xfrm>
-            <a:off x="2670048" y="3136392"/>
-            <a:ext cx="0" cy="146304"/>
-          </a:xfrm>
-          <a:prstGeom prst="line">
-            <a:avLst/>
-          </a:prstGeom>
-          <a:ln w="17780">
-            <a:solidFill>
-              <a:srgbClr val="6E7A88"/>
-            </a:solidFill>
-            <a:tailEnd type="triangle" w="med" len="med"/>
-          </a:ln>
-          <a:effectLst/>
-        </p:spPr>
-        <p:style>
-          <a:lnRef idx="2">
-            <a:schemeClr val="accent1"/>
-          </a:lnRef>
-          <a:fillRef idx="0">
-            <a:schemeClr val="accent1"/>
-          </a:fillRef>
-          <a:effectRef idx="1">
-            <a:schemeClr val="accent1"/>
-          </a:effectRef>
-          <a:fontRef idx="minor">
-            <a:schemeClr val="tx1"/>
-          </a:fontRef>
-        </p:style>
-      </p:cxnSp>
-      <p:sp>
-        <p:nvSpPr>
-          <p:cNvPr id="15" name="Rounded Rectangle 14"/>
-          <p:cNvSpPr/>
-          <p:nvPr/>
-        </p:nvSpPr>
-        <p:spPr>
-          <a:xfrm>
-            <a:off x="886968" y="3886200"/>
-            <a:ext cx="3566160" cy="402336"/>
-          </a:xfrm>
-          <a:prstGeom prst="roundRect">
-            <a:avLst>
-              <a:gd name="adj" fmla="val 12000"/>
-            </a:avLst>
-          </a:prstGeom>
-          <a:solidFill>
-            <a:srgbClr val="E06C00"/>
-          </a:solidFill>
-          <a:ln>
-            <a:noFill/>
-          </a:ln>
-          <a:effectLst/>
-        </p:spPr>
-        <p:style>
-          <a:lnRef idx="1">
-            <a:schemeClr val="accent1"/>
-          </a:lnRef>
-          <a:fillRef idx="3">
-            <a:schemeClr val="accent1"/>
-          </a:fillRef>
-          <a:effectRef idx="2">
-            <a:schemeClr val="accent1"/>
-          </a:effectRef>
-          <a:fontRef idx="minor">
-            <a:schemeClr val="lt1"/>
-          </a:fontRef>
-        </p:style>
-        <p:txBody>
-          <a:bodyPr rtlCol="0" anchor="ctr" wrap="square" lIns="54864" rIns="54864" tIns="18288" bIns="18288"/>
-          <a:lstStyle/>
-          <a:p>
-            <a:pPr algn="ctr">
-              <a:lnSpc>
-                <a:spcPct val="100000"/>
-              </a:lnSpc>
-            </a:pPr>
-            <a:r>
-              <a:rPr sz="1250" b="1" i="0">
-                <a:solidFill>
-                  <a:srgbClr val="FFFFFF"/>
-                </a:solidFill>
-                <a:latin typeface="Meiryo"/>
-                <a:ea typeface="Meiryo"/>
-              </a:rPr>
-              <a:t>摂動：数手の insert 移動</a:t>
-            </a:r>
-          </a:p>
-        </p:txBody>
-      </p:sp>
-      <p:cxnSp>
-        <p:nvCxnSpPr>
-          <p:cNvPr id="16" name="Connector 15"/>
-          <p:cNvCxnSpPr/>
-          <p:nvPr/>
-        </p:nvCxnSpPr>
-        <p:spPr>
-          <a:xfrm>
-            <a:off x="2670048" y="3721607"/>
-            <a:ext cx="0" cy="146305"/>
-          </a:xfrm>
-          <a:prstGeom prst="line">
-            <a:avLst/>
-          </a:prstGeom>
-          <a:ln w="17780">
-            <a:solidFill>
-              <a:srgbClr val="6E7A88"/>
-            </a:solidFill>
-            <a:tailEnd type="triangle" w="med" len="med"/>
-          </a:ln>
-          <a:effectLst/>
-        </p:spPr>
-        <p:style>
-          <a:lnRef idx="2">
-            <a:schemeClr val="accent1"/>
-          </a:lnRef>
-          <a:fillRef idx="0">
-            <a:schemeClr val="accent1"/>
-          </a:fillRef>
-          <a:effectRef idx="1">
-            <a:schemeClr val="accent1"/>
-          </a:effectRef>
-          <a:fontRef idx="minor">
-            <a:schemeClr val="tx1"/>
-          </a:fontRef>
-        </p:style>
-      </p:cxnSp>
-      <p:sp>
-        <p:nvSpPr>
-          <p:cNvPr id="17" name="Rounded Rectangle 16"/>
-          <p:cNvSpPr/>
-          <p:nvPr/>
-        </p:nvSpPr>
-        <p:spPr>
-          <a:xfrm>
-            <a:off x="886968" y="4471416"/>
-            <a:ext cx="3566160" cy="402336"/>
-          </a:xfrm>
-          <a:prstGeom prst="roundRect">
-            <a:avLst>
-              <a:gd name="adj" fmla="val 12000"/>
-            </a:avLst>
-          </a:prstGeom>
-          <a:solidFill>
-            <a:srgbClr val="EDF2F7"/>
-          </a:solidFill>
-          <a:ln w="13970">
-            <a:solidFill>
-              <a:srgbClr val="C9D6E5"/>
-            </a:solidFill>
-          </a:ln>
-          <a:effectLst/>
-        </p:spPr>
-        <p:style>
-          <a:lnRef idx="1">
-            <a:schemeClr val="accent1"/>
-          </a:lnRef>
-          <a:fillRef idx="3">
-            <a:schemeClr val="accent1"/>
-          </a:fillRef>
-          <a:effectRef idx="2">
-            <a:schemeClr val="accent1"/>
-          </a:effectRef>
-          <a:fontRef idx="minor">
-            <a:schemeClr val="lt1"/>
-          </a:fontRef>
-        </p:style>
-        <p:txBody>
-          <a:bodyPr rtlCol="0" anchor="ctr" wrap="square" lIns="54864" rIns="54864" tIns="18288" bIns="18288"/>
-          <a:lstStyle/>
-          <a:p>
-            <a:pPr algn="ctr">
-              <a:lnSpc>
-                <a:spcPct val="100000"/>
-              </a:lnSpc>
-            </a:pPr>
-            <a:r>
-              <a:rPr sz="1250" b="0" i="0">
-                <a:solidFill>
-                  <a:srgbClr val="26303A"/>
-                </a:solidFill>
-                <a:latin typeface="Meiryo"/>
-                <a:ea typeface="Meiryo"/>
-              </a:rPr>
-              <a:t>局所探索：N5 近傍</a:t>
-            </a:r>
-          </a:p>
-        </p:txBody>
-      </p:sp>
-      <p:cxnSp>
-        <p:nvCxnSpPr>
-          <p:cNvPr id="18" name="Connector 17"/>
-          <p:cNvCxnSpPr/>
-          <p:nvPr/>
-        </p:nvCxnSpPr>
-        <p:spPr>
-          <a:xfrm>
-            <a:off x="2670048" y="4306824"/>
-            <a:ext cx="0" cy="146304"/>
-          </a:xfrm>
-          <a:prstGeom prst="line">
-            <a:avLst/>
-          </a:prstGeom>
-          <a:ln w="17780">
-            <a:solidFill>
-              <a:srgbClr val="6E7A88"/>
-            </a:solidFill>
-            <a:tailEnd type="triangle" w="med" len="med"/>
-          </a:ln>
-          <a:effectLst/>
-        </p:spPr>
-        <p:style>
-          <a:lnRef idx="2">
-            <a:schemeClr val="accent1"/>
-          </a:lnRef>
-          <a:fillRef idx="0">
-            <a:schemeClr val="accent1"/>
-          </a:fillRef>
-          <a:effectRef idx="1">
-            <a:schemeClr val="accent1"/>
-          </a:effectRef>
-          <a:fontRef idx="minor">
-            <a:schemeClr val="tx1"/>
-          </a:fontRef>
-        </p:style>
-      </p:cxnSp>
-      <p:sp>
-        <p:nvSpPr>
-          <p:cNvPr id="19" name="Rounded Rectangle 18"/>
-          <p:cNvSpPr/>
-          <p:nvPr/>
-        </p:nvSpPr>
-        <p:spPr>
-          <a:xfrm>
-            <a:off x="886968" y="5056632"/>
-            <a:ext cx="3566160" cy="402336"/>
-          </a:xfrm>
-          <a:prstGeom prst="roundRect">
-            <a:avLst>
-              <a:gd name="adj" fmla="val 12000"/>
-            </a:avLst>
-          </a:prstGeom>
-          <a:solidFill>
-            <a:srgbClr val="FFFFFF"/>
-          </a:solidFill>
-          <a:ln w="13970">
-            <a:solidFill>
-              <a:srgbClr val="C9D6E5"/>
-            </a:solidFill>
-          </a:ln>
-          <a:effectLst/>
-        </p:spPr>
-        <p:style>
-          <a:lnRef idx="1">
-            <a:schemeClr val="accent1"/>
-          </a:lnRef>
-          <a:fillRef idx="3">
-            <a:schemeClr val="accent1"/>
-          </a:fillRef>
-          <a:effectRef idx="2">
-            <a:schemeClr val="accent1"/>
-          </a:effectRef>
-          <a:fontRef idx="minor">
-            <a:schemeClr val="lt1"/>
-          </a:fontRef>
-        </p:style>
-        <p:txBody>
-          <a:bodyPr rtlCol="0" anchor="ctr" wrap="square" lIns="54864" rIns="54864" tIns="18288" bIns="18288"/>
-          <a:lstStyle/>
-          <a:p>
-            <a:pPr algn="ctr">
-              <a:lnSpc>
-                <a:spcPct val="100000"/>
-              </a:lnSpc>
-            </a:pPr>
-            <a:r>
-              <a:rPr sz="1250" b="0" i="0">
-                <a:solidFill>
-                  <a:srgbClr val="26303A"/>
-                </a:solidFill>
-                <a:latin typeface="Meiryo"/>
-                <a:ea typeface="Meiryo"/>
-              </a:rPr>
-              <a:t>受理判定：</a:t>
-            </a:r>
-            <a:r>
-              <a:rPr sz="1250" b="0" i="1">
-                <a:solidFill>
-                  <a:srgbClr val="26303A"/>
-                </a:solidFill>
-                <a:latin typeface="Meiryo"/>
-                <a:ea typeface="Meiryo"/>
-              </a:rPr>
-              <a:t>F</a:t>
-            </a:r>
-            <a:r>
-              <a:rPr sz="1250" b="0" i="0">
-                <a:solidFill>
-                  <a:srgbClr val="26303A"/>
-                </a:solidFill>
-                <a:latin typeface="Meiryo"/>
-                <a:ea typeface="Meiryo"/>
-              </a:rPr>
-              <a:t> が改善すれば更新</a:t>
-            </a:r>
-          </a:p>
-        </p:txBody>
-      </p:sp>
-      <p:cxnSp>
-        <p:nvCxnSpPr>
-          <p:cNvPr id="20" name="Connector 19"/>
-          <p:cNvCxnSpPr/>
-          <p:nvPr/>
-        </p:nvCxnSpPr>
-        <p:spPr>
-          <a:xfrm>
-            <a:off x="2670048" y="4892040"/>
-            <a:ext cx="0" cy="146304"/>
-          </a:xfrm>
-          <a:prstGeom prst="line">
-            <a:avLst/>
-          </a:prstGeom>
-          <a:ln w="17780">
-            <a:solidFill>
-              <a:srgbClr val="6E7A88"/>
-            </a:solidFill>
-            <a:tailEnd type="triangle" w="med" len="med"/>
-          </a:ln>
-          <a:effectLst/>
-        </p:spPr>
-        <p:style>
-          <a:lnRef idx="2">
-            <a:schemeClr val="accent1"/>
-          </a:lnRef>
-          <a:fillRef idx="0">
-            <a:schemeClr val="accent1"/>
-          </a:fillRef>
-          <a:effectRef idx="1">
-            <a:schemeClr val="accent1"/>
-          </a:effectRef>
-          <a:fontRef idx="minor">
-            <a:schemeClr val="tx1"/>
-          </a:fontRef>
-        </p:style>
-      </p:cxnSp>
-      <p:cxnSp>
-        <p:nvCxnSpPr>
-          <p:cNvPr id="21" name="Connector 20"/>
-          <p:cNvCxnSpPr/>
-          <p:nvPr/>
-        </p:nvCxnSpPr>
-        <p:spPr>
-          <a:xfrm>
-            <a:off x="4471416" y="5257800"/>
-            <a:ext cx="237744" cy="0"/>
-          </a:xfrm>
-          <a:prstGeom prst="line">
-            <a:avLst/>
-          </a:prstGeom>
-          <a:ln w="17780">
-            <a:solidFill>
-              <a:srgbClr val="6E7A88"/>
-            </a:solidFill>
-          </a:ln>
-          <a:effectLst/>
-        </p:spPr>
-        <p:style>
-          <a:lnRef idx="2">
-            <a:schemeClr val="accent1"/>
-          </a:lnRef>
-          <a:fillRef idx="0">
-            <a:schemeClr val="accent1"/>
-          </a:fillRef>
-          <a:effectRef idx="1">
-            <a:schemeClr val="accent1"/>
-          </a:effectRef>
-          <a:fontRef idx="minor">
-            <a:schemeClr val="tx1"/>
-          </a:fontRef>
-        </p:style>
-      </p:cxnSp>
-      <p:cxnSp>
-        <p:nvCxnSpPr>
-          <p:cNvPr id="22" name="Connector 21"/>
-          <p:cNvCxnSpPr/>
-          <p:nvPr/>
-        </p:nvCxnSpPr>
-        <p:spPr>
-          <a:xfrm flipV="1">
-            <a:off x="4709160" y="4087368"/>
-            <a:ext cx="0" cy="1170432"/>
-          </a:xfrm>
-          <a:prstGeom prst="line">
-            <a:avLst/>
-          </a:prstGeom>
-          <a:ln w="17780">
-            <a:solidFill>
-              <a:srgbClr val="6E7A88"/>
-            </a:solidFill>
-          </a:ln>
-          <a:effectLst/>
-        </p:spPr>
-        <p:style>
-          <a:lnRef idx="2">
-            <a:schemeClr val="accent1"/>
-          </a:lnRef>
-          <a:fillRef idx="0">
-            <a:schemeClr val="accent1"/>
-          </a:fillRef>
-          <a:effectRef idx="1">
-            <a:schemeClr val="accent1"/>
-          </a:effectRef>
-          <a:fontRef idx="minor">
-            <a:schemeClr val="tx1"/>
-          </a:fontRef>
-        </p:style>
-      </p:cxnSp>
-      <p:cxnSp>
-        <p:nvCxnSpPr>
-          <p:cNvPr id="23" name="Connector 22"/>
-          <p:cNvCxnSpPr/>
-          <p:nvPr/>
-        </p:nvCxnSpPr>
-        <p:spPr>
-          <a:xfrm flipH="1">
-            <a:off x="4489704" y="4087368"/>
-            <a:ext cx="219456" cy="0"/>
-          </a:xfrm>
-          <a:prstGeom prst="line">
-            <a:avLst/>
-          </a:prstGeom>
-          <a:ln w="17780">
-            <a:solidFill>
-              <a:srgbClr val="6E7A88"/>
-            </a:solidFill>
-            <a:tailEnd type="triangle" w="med" len="med"/>
-          </a:ln>
-          <a:effectLst/>
-        </p:spPr>
-        <p:style>
-          <a:lnRef idx="2">
-            <a:schemeClr val="accent1"/>
-          </a:lnRef>
-          <a:fillRef idx="0">
-            <a:schemeClr val="accent1"/>
-          </a:fillRef>
-          <a:effectRef idx="1">
-            <a:schemeClr val="accent1"/>
-          </a:effectRef>
-          <a:fontRef idx="minor">
-            <a:schemeClr val="tx1"/>
-          </a:fontRef>
-        </p:style>
-      </p:cxnSp>
-      <p:sp>
-        <p:nvSpPr>
-          <p:cNvPr id="24" name="TextBox 23"/>
-          <p:cNvSpPr txBox="1"/>
-          <p:nvPr/>
-        </p:nvSpPr>
-        <p:spPr>
-          <a:xfrm>
-            <a:off x="4782312" y="4489703"/>
-            <a:ext cx="1188720" cy="365760"/>
-          </a:xfrm>
-          <a:prstGeom prst="rect">
-            <a:avLst/>
-          </a:prstGeom>
-          <a:noFill/>
-        </p:spPr>
-        <p:txBody>
-          <a:bodyPr wrap="square" anchor="ctr" lIns="18288" rIns="18288" tIns="9144" bIns="9144">
-            <a:spAutoFit/>
-          </a:bodyPr>
-          <a:lstStyle/>
-          <a:p>
-            <a:pPr algn="l">
-              <a:lnSpc>
-                <a:spcPct val="105000"/>
-              </a:lnSpc>
-            </a:pPr>
-            <a:r>
-              <a:rPr sz="1100" b="0" i="0">
-                <a:solidFill>
-                  <a:srgbClr val="6E7A88"/>
-                </a:solidFill>
-                <a:latin typeface="Meiryo"/>
-                <a:ea typeface="Meiryo"/>
-              </a:rPr>
-              <a:t>反復</a:t>
-            </a:r>
-          </a:p>
-        </p:txBody>
-      </p:sp>
-      <p:sp>
-        <p:nvSpPr>
-          <p:cNvPr id="25" name="Rounded Rectangle 24"/>
-          <p:cNvSpPr/>
-          <p:nvPr/>
-        </p:nvSpPr>
-        <p:spPr>
-          <a:xfrm>
-            <a:off x="6278727" y="1691640"/>
-            <a:ext cx="5346039" cy="3931920"/>
-          </a:xfrm>
-          <a:prstGeom prst="roundRect">
-            <a:avLst>
-              <a:gd name="adj" fmla="val 4000"/>
-            </a:avLst>
-          </a:prstGeom>
-          <a:solidFill>
-            <a:srgbClr val="FFFFFF"/>
-          </a:solidFill>
-          <a:ln w="13970">
-            <a:solidFill>
-              <a:srgbClr val="C9D6E5"/>
-            </a:solidFill>
-          </a:ln>
-          <a:effectLst/>
-        </p:spPr>
-        <p:style>
-          <a:lnRef idx="1">
-            <a:schemeClr val="accent1"/>
-          </a:lnRef>
-          <a:fillRef idx="3">
-            <a:schemeClr val="accent1"/>
-          </a:fillRef>
-          <a:effectRef idx="2">
-            <a:schemeClr val="accent1"/>
-          </a:effectRef>
-          <a:fontRef idx="minor">
-            <a:schemeClr val="lt1"/>
-          </a:fontRef>
-        </p:style>
-        <p:txBody>
-          <a:bodyPr rtlCol="0" anchor="ctr"/>
-          <a:lstStyle/>
-          <a:p>
-            <a:pPr algn="ctr"/>
-          </a:p>
-        </p:txBody>
-      </p:sp>
-      <p:sp>
-        <p:nvSpPr>
-          <p:cNvPr id="26" name="Rectangle 25"/>
-          <p:cNvSpPr/>
-          <p:nvPr/>
-        </p:nvSpPr>
-        <p:spPr>
-          <a:xfrm>
-            <a:off x="6278727" y="1691640"/>
-            <a:ext cx="5346039" cy="502920"/>
+            <a:off x="6510528" y="3630168"/>
+            <a:ext cx="5114239" cy="402336"/>
           </a:xfrm>
           <a:prstGeom prst="rect">
             <a:avLst/>
@@ -6625,14 +6112,14 @@
       </p:sp>
       <p:sp>
         <p:nvSpPr>
-          <p:cNvPr id="27" name="TextBox 26"/>
+          <p:cNvPr id="15" name="TextBox 14"/>
           <p:cNvSpPr txBox="1"/>
           <p:nvPr/>
         </p:nvSpPr>
         <p:spPr>
           <a:xfrm>
-            <a:off x="6461607" y="1691640"/>
-            <a:ext cx="4980279" cy="502920"/>
+            <a:off x="6693408" y="3630168"/>
+            <a:ext cx="4748479" cy="402336"/>
           </a:xfrm>
           <a:prstGeom prst="rect">
             <a:avLst/>
@@ -6646,7 +6133,7 @@
           <a:lstStyle/>
           <a:p>
             <a:r>
-              <a:rPr sz="1500" b="1" i="0">
+              <a:rPr sz="1400" b="1" i="0">
                 <a:solidFill>
                   <a:srgbClr val="FFFFFF"/>
                 </a:solidFill>
@@ -6656,7 +6143,7 @@
               <a:t>多点探索（Memetic：GA＋局所探索）</a:t>
             </a:r>
             <a:r>
-              <a:rPr sz="1200" b="0" i="0">
+              <a:rPr sz="1150" b="0" i="0">
                 <a:solidFill>
                   <a:srgbClr val="FFFFFF"/>
                 </a:solidFill>
@@ -6670,14 +6157,14 @@
       </p:sp>
       <p:sp>
         <p:nvSpPr>
-          <p:cNvPr id="28" name="TextBox 27"/>
+          <p:cNvPr id="16" name="TextBox 15"/>
           <p:cNvSpPr txBox="1"/>
           <p:nvPr/>
         </p:nvSpPr>
         <p:spPr>
           <a:xfrm>
-            <a:off x="6507327" y="2276856"/>
-            <a:ext cx="4888839" cy="365760"/>
+            <a:off x="6693408" y="4142232"/>
+            <a:ext cx="4748479" cy="457200"/>
           </a:xfrm>
           <a:prstGeom prst="rect">
             <a:avLst/>
@@ -6685,580 +6172,132 @@
           <a:noFill/>
         </p:spPr>
         <p:txBody>
-          <a:bodyPr wrap="square" anchor="ctr" lIns="18288" rIns="18288" tIns="9144" bIns="9144">
+          <a:bodyPr wrap="square" anchor="t" lIns="18288" rIns="18288" tIns="9144" bIns="9144">
             <a:spAutoFit/>
           </a:bodyPr>
           <a:lstStyle/>
           <a:p>
-            <a:r>
-              <a:rPr sz="1200" b="1" i="0">
+            <a:pPr>
+              <a:lnSpc>
+                <a:spcPct val="108000"/>
+              </a:lnSpc>
+              <a:spcBef>
+                <a:spcPts val="0"/>
+              </a:spcBef>
+            </a:pPr>
+            <a:r>
+              <a:rPr sz="1000" b="1" i="0">
+                <a:solidFill>
+                  <a:srgbClr val="16385C"/>
+                </a:solidFill>
+                <a:latin typeface="Meiryo"/>
+                <a:ea typeface="Meiryo"/>
+              </a:rPr>
+              <a:t>▪ </a:t>
+            </a:r>
+            <a:r>
+              <a:rPr sz="1250" b="0" i="0">
+                <a:solidFill>
+                  <a:srgbClr val="26303A"/>
+                </a:solidFill>
+                <a:latin typeface="Meiryo"/>
+                <a:ea typeface="Meiryo"/>
+              </a:rPr>
+              <a:t>初期集団は </a:t>
+            </a:r>
+            <a:r>
+              <a:rPr sz="1250" b="0" i="1">
+                <a:solidFill>
+                  <a:srgbClr val="26303A"/>
+                </a:solidFill>
+                <a:latin typeface="Meiryo"/>
+                <a:ea typeface="Meiryo"/>
+              </a:rPr>
+              <a:t>S</a:t>
+            </a:r>
+            <a:r>
+              <a:rPr sz="900" b="0" i="1" baseline="-22000">
+                <a:solidFill>
+                  <a:srgbClr val="26303A"/>
+                </a:solidFill>
+                <a:latin typeface="Meiryo"/>
+                <a:ea typeface="Meiryo"/>
+              </a:rPr>
+              <a:t>p</a:t>
+            </a:r>
+            <a:r>
+              <a:rPr sz="1250" b="0" i="0">
+                <a:solidFill>
+                  <a:srgbClr val="26303A"/>
+                </a:solidFill>
+                <a:latin typeface="Meiryo"/>
+                <a:ea typeface="Meiryo"/>
+              </a:rPr>
+              <a:t>＋無作為に生成した個体．</a:t>
+            </a:r>
+            <a:r>
+              <a:rPr sz="1250" b="1" i="0">
                 <a:solidFill>
                   <a:srgbClr val="0F5C28"/>
                 </a:solidFill>
                 <a:latin typeface="Meiryo"/>
                 <a:ea typeface="Meiryo"/>
               </a:rPr>
-              <a:t>選定理由：</a:t>
-            </a:r>
-            <a:r>
-              <a:rPr sz="1200" b="0" i="0">
-                <a:solidFill>
-                  <a:srgbClr val="26303A"/>
-                </a:solidFill>
-                <a:latin typeface="Meiryo"/>
-                <a:ea typeface="Meiryo"/>
-              </a:rPr>
-              <a:t>先行研究で標準的な，GA に局所探索を組み込んだ構成</a:t>
-            </a:r>
-          </a:p>
-        </p:txBody>
-      </p:sp>
-      <p:sp>
-        <p:nvSpPr>
-          <p:cNvPr id="29" name="Rounded Rectangle 28"/>
+              <a:t>選択・交叉（2 親の染色体を組み替え）→ 突然変異 → 局所探索（N5 近傍，各個体）</a:t>
+            </a:r>
+            <a:r>
+              <a:rPr sz="1250" b="0" i="0">
+                <a:solidFill>
+                  <a:srgbClr val="26303A"/>
+                </a:solidFill>
+                <a:latin typeface="Meiryo"/>
+                <a:ea typeface="Meiryo"/>
+              </a:rPr>
+              <a:t>で世代交代する</a:t>
+            </a:r>
+          </a:p>
+          <a:p>
+            <a:pPr>
+              <a:lnSpc>
+                <a:spcPct val="108000"/>
+              </a:lnSpc>
+              <a:spcBef>
+                <a:spcPts val="600"/>
+              </a:spcBef>
+            </a:pPr>
+            <a:r>
+              <a:rPr sz="1000" b="1" i="0">
+                <a:solidFill>
+                  <a:srgbClr val="16385C"/>
+                </a:solidFill>
+                <a:latin typeface="Meiryo"/>
+                <a:ea typeface="Meiryo"/>
+              </a:rPr>
+              <a:t>▪ </a:t>
+            </a:r>
+            <a:r>
+              <a:rPr sz="1250" b="0" i="0">
+                <a:solidFill>
+                  <a:srgbClr val="26303A"/>
+                </a:solidFill>
+                <a:latin typeface="Meiryo"/>
+                <a:ea typeface="Meiryo"/>
+              </a:rPr>
+              <a:t>選定理由：先行研究で標準的な，GA に局所探索を組み込んだ構成</a:t>
+            </a:r>
+          </a:p>
+        </p:txBody>
+      </p:sp>
+      <p:sp>
+        <p:nvSpPr>
+          <p:cNvPr id="17" name="Rounded Rectangle 16"/>
           <p:cNvSpPr/>
           <p:nvPr/>
         </p:nvSpPr>
         <p:spPr>
           <a:xfrm>
-            <a:off x="6598767" y="2715768"/>
-            <a:ext cx="3566160" cy="402336"/>
-          </a:xfrm>
-          <a:prstGeom prst="roundRect">
-            <a:avLst>
-              <a:gd name="adj" fmla="val 12000"/>
-            </a:avLst>
-          </a:prstGeom>
-          <a:solidFill>
-            <a:srgbClr val="FFFFFF"/>
-          </a:solidFill>
-          <a:ln w="13970">
-            <a:solidFill>
-              <a:srgbClr val="C9D6E5"/>
-            </a:solidFill>
-          </a:ln>
-          <a:effectLst/>
-        </p:spPr>
-        <p:style>
-          <a:lnRef idx="1">
-            <a:schemeClr val="accent1"/>
-          </a:lnRef>
-          <a:fillRef idx="3">
-            <a:schemeClr val="accent1"/>
-          </a:fillRef>
-          <a:effectRef idx="2">
-            <a:schemeClr val="accent1"/>
-          </a:effectRef>
-          <a:fontRef idx="minor">
-            <a:schemeClr val="lt1"/>
-          </a:fontRef>
-        </p:style>
-        <p:txBody>
-          <a:bodyPr rtlCol="0" anchor="ctr" wrap="square" lIns="54864" rIns="54864" tIns="18288" bIns="18288"/>
-          <a:lstStyle/>
-          <a:p>
-            <a:pPr algn="ctr">
-              <a:lnSpc>
-                <a:spcPct val="100000"/>
-              </a:lnSpc>
-            </a:pPr>
-            <a:r>
-              <a:rPr sz="1250" b="0" i="0">
-                <a:solidFill>
-                  <a:srgbClr val="26303A"/>
-                </a:solidFill>
-                <a:latin typeface="Meiryo"/>
-                <a:ea typeface="Meiryo"/>
-              </a:rPr>
-              <a:t>初期集団：</a:t>
-            </a:r>
-            <a:r>
-              <a:rPr sz="1250" b="0" i="1">
-                <a:solidFill>
-                  <a:srgbClr val="26303A"/>
-                </a:solidFill>
-                <a:latin typeface="Meiryo"/>
-                <a:ea typeface="Meiryo"/>
-              </a:rPr>
-              <a:t>S</a:t>
-            </a:r>
-            <a:r>
-              <a:rPr sz="900" b="0" i="1" baseline="-22000">
-                <a:solidFill>
-                  <a:srgbClr val="26303A"/>
-                </a:solidFill>
-                <a:latin typeface="Meiryo"/>
-                <a:ea typeface="Meiryo"/>
-              </a:rPr>
-              <a:t>p</a:t>
-            </a:r>
-            <a:r>
-              <a:rPr sz="1250" b="0" i="0">
-                <a:solidFill>
-                  <a:srgbClr val="26303A"/>
-                </a:solidFill>
-                <a:latin typeface="Meiryo"/>
-                <a:ea typeface="Meiryo"/>
-              </a:rPr>
-              <a:t> ＋ 無作為に生成した個体</a:t>
-            </a:r>
-          </a:p>
-        </p:txBody>
-      </p:sp>
-      <p:sp>
-        <p:nvSpPr>
-          <p:cNvPr id="30" name="Rounded Rectangle 29"/>
-          <p:cNvSpPr/>
-          <p:nvPr/>
-        </p:nvSpPr>
-        <p:spPr>
-          <a:xfrm>
-            <a:off x="6598767" y="3392424"/>
-            <a:ext cx="3566160" cy="402336"/>
-          </a:xfrm>
-          <a:prstGeom prst="roundRect">
-            <a:avLst>
-              <a:gd name="adj" fmla="val 12000"/>
-            </a:avLst>
-          </a:prstGeom>
-          <a:solidFill>
-            <a:srgbClr val="0F5C28"/>
-          </a:solidFill>
-          <a:ln>
-            <a:noFill/>
-          </a:ln>
-          <a:effectLst/>
-        </p:spPr>
-        <p:style>
-          <a:lnRef idx="1">
-            <a:schemeClr val="accent1"/>
-          </a:lnRef>
-          <a:fillRef idx="3">
-            <a:schemeClr val="accent1"/>
-          </a:fillRef>
-          <a:effectRef idx="2">
-            <a:schemeClr val="accent1"/>
-          </a:effectRef>
-          <a:fontRef idx="minor">
-            <a:schemeClr val="lt1"/>
-          </a:fontRef>
-        </p:style>
-        <p:txBody>
-          <a:bodyPr rtlCol="0" anchor="ctr" wrap="square" lIns="54864" rIns="54864" tIns="18288" bIns="18288"/>
-          <a:lstStyle/>
-          <a:p>
-            <a:pPr algn="ctr">
-              <a:lnSpc>
-                <a:spcPct val="100000"/>
-              </a:lnSpc>
-            </a:pPr>
-            <a:r>
-              <a:rPr sz="1250" b="1" i="0">
-                <a:solidFill>
-                  <a:srgbClr val="FFFFFF"/>
-                </a:solidFill>
-                <a:latin typeface="Meiryo"/>
-                <a:ea typeface="Meiryo"/>
-              </a:rPr>
-              <a:t>選択・交叉：2 親の染色体を組み替え</a:t>
-            </a:r>
-          </a:p>
-        </p:txBody>
-      </p:sp>
-      <p:cxnSp>
-        <p:nvCxnSpPr>
-          <p:cNvPr id="31" name="Connector 30"/>
-          <p:cNvCxnSpPr/>
-          <p:nvPr/>
-        </p:nvCxnSpPr>
-        <p:spPr>
-          <a:xfrm>
-            <a:off x="8381847" y="3136392"/>
-            <a:ext cx="0" cy="237744"/>
-          </a:xfrm>
-          <a:prstGeom prst="line">
-            <a:avLst/>
-          </a:prstGeom>
-          <a:ln w="17780">
-            <a:solidFill>
-              <a:srgbClr val="6E7A88"/>
-            </a:solidFill>
-            <a:tailEnd type="triangle" w="med" len="med"/>
-          </a:ln>
-          <a:effectLst/>
-        </p:spPr>
-        <p:style>
-          <a:lnRef idx="2">
-            <a:schemeClr val="accent1"/>
-          </a:lnRef>
-          <a:fillRef idx="0">
-            <a:schemeClr val="accent1"/>
-          </a:fillRef>
-          <a:effectRef idx="1">
-            <a:schemeClr val="accent1"/>
-          </a:effectRef>
-          <a:fontRef idx="minor">
-            <a:schemeClr val="tx1"/>
-          </a:fontRef>
-        </p:style>
-      </p:cxnSp>
-      <p:sp>
-        <p:nvSpPr>
-          <p:cNvPr id="32" name="Rounded Rectangle 31"/>
-          <p:cNvSpPr/>
-          <p:nvPr/>
-        </p:nvSpPr>
-        <p:spPr>
-          <a:xfrm>
-            <a:off x="6598767" y="4069080"/>
-            <a:ext cx="3566160" cy="402336"/>
-          </a:xfrm>
-          <a:prstGeom prst="roundRect">
-            <a:avLst>
-              <a:gd name="adj" fmla="val 12000"/>
-            </a:avLst>
-          </a:prstGeom>
-          <a:solidFill>
-            <a:srgbClr val="FFFFFF"/>
-          </a:solidFill>
-          <a:ln w="13970">
-            <a:solidFill>
-              <a:srgbClr val="C9D6E5"/>
-            </a:solidFill>
-          </a:ln>
-          <a:effectLst/>
-        </p:spPr>
-        <p:style>
-          <a:lnRef idx="1">
-            <a:schemeClr val="accent1"/>
-          </a:lnRef>
-          <a:fillRef idx="3">
-            <a:schemeClr val="accent1"/>
-          </a:fillRef>
-          <a:effectRef idx="2">
-            <a:schemeClr val="accent1"/>
-          </a:effectRef>
-          <a:fontRef idx="minor">
-            <a:schemeClr val="lt1"/>
-          </a:fontRef>
-        </p:style>
-        <p:txBody>
-          <a:bodyPr rtlCol="0" anchor="ctr" wrap="square" lIns="54864" rIns="54864" tIns="18288" bIns="18288"/>
-          <a:lstStyle/>
-          <a:p>
-            <a:pPr algn="ctr">
-              <a:lnSpc>
-                <a:spcPct val="100000"/>
-              </a:lnSpc>
-            </a:pPr>
-            <a:r>
-              <a:rPr sz="1250" b="0" i="0">
-                <a:solidFill>
-                  <a:srgbClr val="26303A"/>
-                </a:solidFill>
-                <a:latin typeface="Meiryo"/>
-                <a:ea typeface="Meiryo"/>
-              </a:rPr>
-              <a:t>突然変異</a:t>
-            </a:r>
-          </a:p>
-        </p:txBody>
-      </p:sp>
-      <p:cxnSp>
-        <p:nvCxnSpPr>
-          <p:cNvPr id="33" name="Connector 32"/>
-          <p:cNvCxnSpPr/>
-          <p:nvPr/>
-        </p:nvCxnSpPr>
-        <p:spPr>
-          <a:xfrm>
-            <a:off x="8381847" y="3813048"/>
-            <a:ext cx="0" cy="237744"/>
-          </a:xfrm>
-          <a:prstGeom prst="line">
-            <a:avLst/>
-          </a:prstGeom>
-          <a:ln w="17780">
-            <a:solidFill>
-              <a:srgbClr val="6E7A88"/>
-            </a:solidFill>
-            <a:tailEnd type="triangle" w="med" len="med"/>
-          </a:ln>
-          <a:effectLst/>
-        </p:spPr>
-        <p:style>
-          <a:lnRef idx="2">
-            <a:schemeClr val="accent1"/>
-          </a:lnRef>
-          <a:fillRef idx="0">
-            <a:schemeClr val="accent1"/>
-          </a:fillRef>
-          <a:effectRef idx="1">
-            <a:schemeClr val="accent1"/>
-          </a:effectRef>
-          <a:fontRef idx="minor">
-            <a:schemeClr val="tx1"/>
-          </a:fontRef>
-        </p:style>
-      </p:cxnSp>
-      <p:sp>
-        <p:nvSpPr>
-          <p:cNvPr id="34" name="Rounded Rectangle 33"/>
-          <p:cNvSpPr/>
-          <p:nvPr/>
-        </p:nvSpPr>
-        <p:spPr>
-          <a:xfrm>
-            <a:off x="6598767" y="4745736"/>
-            <a:ext cx="3566160" cy="402336"/>
-          </a:xfrm>
-          <a:prstGeom prst="roundRect">
-            <a:avLst>
-              <a:gd name="adj" fmla="val 12000"/>
-            </a:avLst>
-          </a:prstGeom>
-          <a:solidFill>
-            <a:srgbClr val="EDF2F7"/>
-          </a:solidFill>
-          <a:ln w="13970">
-            <a:solidFill>
-              <a:srgbClr val="C9D6E5"/>
-            </a:solidFill>
-          </a:ln>
-          <a:effectLst/>
-        </p:spPr>
-        <p:style>
-          <a:lnRef idx="1">
-            <a:schemeClr val="accent1"/>
-          </a:lnRef>
-          <a:fillRef idx="3">
-            <a:schemeClr val="accent1"/>
-          </a:fillRef>
-          <a:effectRef idx="2">
-            <a:schemeClr val="accent1"/>
-          </a:effectRef>
-          <a:fontRef idx="minor">
-            <a:schemeClr val="lt1"/>
-          </a:fontRef>
-        </p:style>
-        <p:txBody>
-          <a:bodyPr rtlCol="0" anchor="ctr" wrap="square" lIns="54864" rIns="54864" tIns="18288" bIns="18288"/>
-          <a:lstStyle/>
-          <a:p>
-            <a:pPr algn="ctr">
-              <a:lnSpc>
-                <a:spcPct val="100000"/>
-              </a:lnSpc>
-            </a:pPr>
-            <a:r>
-              <a:rPr sz="1250" b="0" i="0">
-                <a:solidFill>
-                  <a:srgbClr val="26303A"/>
-                </a:solidFill>
-                <a:latin typeface="Meiryo"/>
-                <a:ea typeface="Meiryo"/>
-              </a:rPr>
-              <a:t>局所探索：N5 近傍（各個体）</a:t>
-            </a:r>
-          </a:p>
-        </p:txBody>
-      </p:sp>
-      <p:cxnSp>
-        <p:nvCxnSpPr>
-          <p:cNvPr id="35" name="Connector 34"/>
-          <p:cNvCxnSpPr/>
-          <p:nvPr/>
-        </p:nvCxnSpPr>
-        <p:spPr>
-          <a:xfrm>
-            <a:off x="8381847" y="4489703"/>
-            <a:ext cx="0" cy="237745"/>
-          </a:xfrm>
-          <a:prstGeom prst="line">
-            <a:avLst/>
-          </a:prstGeom>
-          <a:ln w="17780">
-            <a:solidFill>
-              <a:srgbClr val="6E7A88"/>
-            </a:solidFill>
-            <a:tailEnd type="triangle" w="med" len="med"/>
-          </a:ln>
-          <a:effectLst/>
-        </p:spPr>
-        <p:style>
-          <a:lnRef idx="2">
-            <a:schemeClr val="accent1"/>
-          </a:lnRef>
-          <a:fillRef idx="0">
-            <a:schemeClr val="accent1"/>
-          </a:fillRef>
-          <a:effectRef idx="1">
-            <a:schemeClr val="accent1"/>
-          </a:effectRef>
-          <a:fontRef idx="minor">
-            <a:schemeClr val="tx1"/>
-          </a:fontRef>
-        </p:style>
-      </p:cxnSp>
-      <p:cxnSp>
-        <p:nvCxnSpPr>
-          <p:cNvPr id="36" name="Connector 35"/>
-          <p:cNvCxnSpPr/>
-          <p:nvPr/>
-        </p:nvCxnSpPr>
-        <p:spPr>
-          <a:xfrm>
-            <a:off x="10183215" y="4946903"/>
-            <a:ext cx="237744" cy="0"/>
-          </a:xfrm>
-          <a:prstGeom prst="line">
-            <a:avLst/>
-          </a:prstGeom>
-          <a:ln w="17780">
-            <a:solidFill>
-              <a:srgbClr val="6E7A88"/>
-            </a:solidFill>
-          </a:ln>
-          <a:effectLst/>
-        </p:spPr>
-        <p:style>
-          <a:lnRef idx="2">
-            <a:schemeClr val="accent1"/>
-          </a:lnRef>
-          <a:fillRef idx="0">
-            <a:schemeClr val="accent1"/>
-          </a:fillRef>
-          <a:effectRef idx="1">
-            <a:schemeClr val="accent1"/>
-          </a:effectRef>
-          <a:fontRef idx="minor">
-            <a:schemeClr val="tx1"/>
-          </a:fontRef>
-        </p:style>
-      </p:cxnSp>
-      <p:cxnSp>
-        <p:nvCxnSpPr>
-          <p:cNvPr id="37" name="Connector 36"/>
-          <p:cNvCxnSpPr/>
-          <p:nvPr/>
-        </p:nvCxnSpPr>
-        <p:spPr>
-          <a:xfrm flipV="1">
-            <a:off x="10420959" y="3593592"/>
-            <a:ext cx="0" cy="1353311"/>
-          </a:xfrm>
-          <a:prstGeom prst="line">
-            <a:avLst/>
-          </a:prstGeom>
-          <a:ln w="17780">
-            <a:solidFill>
-              <a:srgbClr val="6E7A88"/>
-            </a:solidFill>
-          </a:ln>
-          <a:effectLst/>
-        </p:spPr>
-        <p:style>
-          <a:lnRef idx="2">
-            <a:schemeClr val="accent1"/>
-          </a:lnRef>
-          <a:fillRef idx="0">
-            <a:schemeClr val="accent1"/>
-          </a:fillRef>
-          <a:effectRef idx="1">
-            <a:schemeClr val="accent1"/>
-          </a:effectRef>
-          <a:fontRef idx="minor">
-            <a:schemeClr val="tx1"/>
-          </a:fontRef>
-        </p:style>
-      </p:cxnSp>
-      <p:cxnSp>
-        <p:nvCxnSpPr>
-          <p:cNvPr id="38" name="Connector 37"/>
-          <p:cNvCxnSpPr/>
-          <p:nvPr/>
-        </p:nvCxnSpPr>
-        <p:spPr>
-          <a:xfrm flipH="1">
-            <a:off x="10201503" y="3593592"/>
-            <a:ext cx="219456" cy="0"/>
-          </a:xfrm>
-          <a:prstGeom prst="line">
-            <a:avLst/>
-          </a:prstGeom>
-          <a:ln w="17780">
-            <a:solidFill>
-              <a:srgbClr val="6E7A88"/>
-            </a:solidFill>
-            <a:tailEnd type="triangle" w="med" len="med"/>
-          </a:ln>
-          <a:effectLst/>
-        </p:spPr>
-        <p:style>
-          <a:lnRef idx="2">
-            <a:schemeClr val="accent1"/>
-          </a:lnRef>
-          <a:fillRef idx="0">
-            <a:schemeClr val="accent1"/>
-          </a:fillRef>
-          <a:effectRef idx="1">
-            <a:schemeClr val="accent1"/>
-          </a:effectRef>
-          <a:fontRef idx="minor">
-            <a:schemeClr val="tx1"/>
-          </a:fontRef>
-        </p:style>
-      </p:cxnSp>
-      <p:sp>
-        <p:nvSpPr>
-          <p:cNvPr id="39" name="TextBox 38"/>
-          <p:cNvSpPr txBox="1"/>
-          <p:nvPr/>
-        </p:nvSpPr>
-        <p:spPr>
-          <a:xfrm>
-            <a:off x="10494111" y="4087368"/>
-            <a:ext cx="1188720" cy="365760"/>
-          </a:xfrm>
-          <a:prstGeom prst="rect">
-            <a:avLst/>
-          </a:prstGeom>
-          <a:noFill/>
-        </p:spPr>
-        <p:txBody>
-          <a:bodyPr wrap="square" anchor="ctr" lIns="18288" rIns="18288" tIns="9144" bIns="9144">
-            <a:spAutoFit/>
-          </a:bodyPr>
-          <a:lstStyle/>
-          <a:p>
-            <a:pPr algn="l">
-              <a:lnSpc>
-                <a:spcPct val="105000"/>
-              </a:lnSpc>
-            </a:pPr>
-            <a:r>
-              <a:rPr sz="1100" b="0" i="0">
-                <a:solidFill>
-                  <a:srgbClr val="6E7A88"/>
-                </a:solidFill>
-                <a:latin typeface="Meiryo"/>
-                <a:ea typeface="Meiryo"/>
-              </a:rPr>
-              <a:t>世代交代</a:t>
-            </a:r>
-          </a:p>
-        </p:txBody>
-      </p:sp>
-      <p:sp>
-        <p:nvSpPr>
-          <p:cNvPr id="40" name="Rounded Rectangle 39"/>
-          <p:cNvSpPr/>
-          <p:nvPr/>
-        </p:nvSpPr>
-        <p:spPr>
-          <a:xfrm>
-            <a:off x="566928" y="5760720"/>
-            <a:ext cx="11057839" cy="566928"/>
+            <a:off x="566928" y="5669280"/>
+            <a:ext cx="11057839" cy="530352"/>
           </a:xfrm>
           <a:prstGeom prst="roundRect">
             <a:avLst>

--- a/doc/presentation_materials/JIMA2026fall_発表.pptx
+++ b/doc/presentation_materials/JIMA2026fall_発表.pptx
@@ -5408,6 +5408,16 @@
               </a:lnSpc>
             </a:pPr>
             <a:r>
+              <a:rPr sz="1300" b="0" i="0">
+                <a:solidFill>
+                  <a:srgbClr val="6E7A88"/>
+                </a:solidFill>
+                <a:latin typeface="Meiryo"/>
+                <a:ea typeface="Meiryo"/>
+              </a:rPr>
+              <a:t>初期解 </a:t>
+            </a:r>
+            <a:r>
               <a:rPr sz="1300" b="0" i="1">
                 <a:solidFill>
                   <a:srgbClr val="6E7A88"/>
@@ -5435,7 +5445,7 @@
                 <a:latin typeface="Meiryo"/>
                 <a:ea typeface="Meiryo"/>
               </a:rPr>
-              <a:t> の処理順序を保った解は </a:t>
+              <a:t> は </a:t>
             </a:r>
             <a:r>
               <a:rPr sz="1300" b="0" i="1">
@@ -5873,8 +5883,8 @@
         </p:nvSpPr>
         <p:spPr>
           <a:xfrm>
-            <a:off x="6693408" y="2203704"/>
-            <a:ext cx="4748479" cy="457200"/>
+            <a:off x="6711696" y="2185416"/>
+            <a:ext cx="4711903" cy="896112"/>
           </a:xfrm>
           <a:prstGeom prst="rect">
             <a:avLst/>
@@ -5887,26 +5897,13 @@
           </a:bodyPr>
           <a:lstStyle/>
           <a:p>
-            <a:pPr>
+            <a:pPr algn="l">
               <a:lnSpc>
-                <a:spcPct val="108000"/>
+                <a:spcPct val="118000"/>
               </a:lnSpc>
-              <a:spcBef>
-                <a:spcPts val="0"/>
-              </a:spcBef>
             </a:pPr>
             <a:r>
-              <a:rPr sz="1000" b="1" i="0">
-                <a:solidFill>
-                  <a:srgbClr val="16385C"/>
-                </a:solidFill>
-                <a:latin typeface="Meiryo"/>
-                <a:ea typeface="Meiryo"/>
-              </a:rPr>
-              <a:t>▪ </a:t>
-            </a:r>
-            <a:r>
-              <a:rPr sz="1250" b="0" i="0">
+              <a:rPr sz="1400" b="0" i="0">
                 <a:solidFill>
                   <a:srgbClr val="26303A"/>
                 </a:solidFill>
@@ -5916,7 +5913,7 @@
               <a:t>初期解 </a:t>
             </a:r>
             <a:r>
-              <a:rPr sz="1250" b="0" i="1">
+              <a:rPr sz="1400" b="0" i="1">
                 <a:solidFill>
                   <a:srgbClr val="26303A"/>
                 </a:solidFill>
@@ -5926,7 +5923,7 @@
               <a:t>S</a:t>
             </a:r>
             <a:r>
-              <a:rPr sz="900" b="0" i="1" baseline="-22000">
+              <a:rPr sz="1008" b="0" i="1" baseline="-22000">
                 <a:solidFill>
                   <a:srgbClr val="26303A"/>
                 </a:solidFill>
@@ -5936,79 +5933,149 @@
               <a:t>p</a:t>
             </a:r>
             <a:r>
-              <a:rPr sz="1250" b="0" i="0">
-                <a:solidFill>
-                  <a:srgbClr val="26303A"/>
-                </a:solidFill>
-                <a:latin typeface="Meiryo"/>
-                <a:ea typeface="Meiryo"/>
-              </a:rPr>
-              <a:t> に局所探索（N5 近傍）をかけ，</a:t>
-            </a:r>
-            <a:r>
-              <a:rPr sz="1250" b="1" i="0">
+              <a:rPr sz="1400" b="0" i="0">
+                <a:solidFill>
+                  <a:srgbClr val="26303A"/>
+                </a:solidFill>
+                <a:latin typeface="Meiryo"/>
+                <a:ea typeface="Meiryo"/>
+              </a:rPr>
+              <a:t> → </a:t>
+            </a:r>
+            <a:r>
+              <a:rPr sz="1400" b="1" i="0">
                 <a:solidFill>
                   <a:srgbClr val="E06C00"/>
                 </a:solidFill>
                 <a:latin typeface="Meiryo"/>
                 <a:ea typeface="Meiryo"/>
               </a:rPr>
-              <a:t>摂動（数手の insert 移動）→ 局所探索 → 受理判定（</a:t>
-            </a:r>
-            <a:r>
-              <a:rPr sz="1250" b="1" i="1">
+              <a:t>局所探索</a:t>
+            </a:r>
+            <a:r>
+              <a:rPr sz="1400" b="0" i="0">
+                <a:solidFill>
+                  <a:srgbClr val="26303A"/>
+                </a:solidFill>
+                <a:latin typeface="Meiryo"/>
+                <a:ea typeface="Meiryo"/>
+              </a:rPr>
+              <a:t>（N5 近傍）→ </a:t>
+            </a:r>
+            <a:r>
+              <a:rPr sz="1400" b="1" i="0">
                 <a:solidFill>
                   <a:srgbClr val="E06C00"/>
                 </a:solidFill>
                 <a:latin typeface="Meiryo"/>
                 <a:ea typeface="Meiryo"/>
               </a:rPr>
+              <a:t>摂動</a:t>
+            </a:r>
+            <a:r>
+              <a:rPr sz="1400" b="0" i="0">
+                <a:solidFill>
+                  <a:srgbClr val="26303A"/>
+                </a:solidFill>
+                <a:latin typeface="Meiryo"/>
+                <a:ea typeface="Meiryo"/>
+              </a:rPr>
+              <a:t>（数手の insert 移動）→ </a:t>
+            </a:r>
+            <a:r>
+              <a:rPr sz="1400" b="1" i="0">
+                <a:solidFill>
+                  <a:srgbClr val="E06C00"/>
+                </a:solidFill>
+                <a:latin typeface="Meiryo"/>
+                <a:ea typeface="Meiryo"/>
+              </a:rPr>
+              <a:t>局所探索</a:t>
+            </a:r>
+            <a:r>
+              <a:rPr sz="1400" b="0" i="0">
+                <a:solidFill>
+                  <a:srgbClr val="26303A"/>
+                </a:solidFill>
+                <a:latin typeface="Meiryo"/>
+                <a:ea typeface="Meiryo"/>
+              </a:rPr>
+              <a:t> → </a:t>
+            </a:r>
+            <a:r>
+              <a:rPr sz="1400" b="1" i="0">
+                <a:solidFill>
+                  <a:srgbClr val="E06C00"/>
+                </a:solidFill>
+                <a:latin typeface="Meiryo"/>
+                <a:ea typeface="Meiryo"/>
+              </a:rPr>
+              <a:t>受理判定</a:t>
+            </a:r>
+            <a:r>
+              <a:rPr sz="1400" b="0" i="0">
+                <a:solidFill>
+                  <a:srgbClr val="26303A"/>
+                </a:solidFill>
+                <a:latin typeface="Meiryo"/>
+                <a:ea typeface="Meiryo"/>
+              </a:rPr>
+              <a:t>（</a:t>
+            </a:r>
+            <a:r>
+              <a:rPr sz="1400" b="0" i="1">
+                <a:solidFill>
+                  <a:srgbClr val="26303A"/>
+                </a:solidFill>
+                <a:latin typeface="Meiryo"/>
+                <a:ea typeface="Meiryo"/>
+              </a:rPr>
               <a:t>F</a:t>
             </a:r>
             <a:r>
-              <a:rPr sz="1250" b="1" i="0">
-                <a:solidFill>
-                  <a:srgbClr val="E06C00"/>
-                </a:solidFill>
-                <a:latin typeface="Meiryo"/>
-                <a:ea typeface="Meiryo"/>
-              </a:rPr>
-              <a:t> が改善すれば更新）</a:t>
-            </a:r>
-            <a:r>
-              <a:rPr sz="1250" b="0" i="0">
-                <a:solidFill>
-                  <a:srgbClr val="26303A"/>
-                </a:solidFill>
-                <a:latin typeface="Meiryo"/>
-                <a:ea typeface="Meiryo"/>
-              </a:rPr>
-              <a:t>を反復する</a:t>
-            </a:r>
-          </a:p>
-          <a:p>
-            <a:pPr>
+              <a:rPr sz="1400" b="0" i="0">
+                <a:solidFill>
+                  <a:srgbClr val="26303A"/>
+                </a:solidFill>
+                <a:latin typeface="Meiryo"/>
+                <a:ea typeface="Meiryo"/>
+              </a:rPr>
+              <a:t> が改善すれば更新）→ 摂動に戻って反復</a:t>
+            </a:r>
+          </a:p>
+        </p:txBody>
+      </p:sp>
+      <p:sp>
+        <p:nvSpPr>
+          <p:cNvPr id="13" name="TextBox 12"/>
+          <p:cNvSpPr txBox="1"/>
+          <p:nvPr/>
+        </p:nvSpPr>
+        <p:spPr>
+          <a:xfrm>
+            <a:off x="6711696" y="3081528"/>
+            <a:ext cx="4711903" cy="365760"/>
+          </a:xfrm>
+          <a:prstGeom prst="rect">
+            <a:avLst/>
+          </a:prstGeom>
+          <a:noFill/>
+        </p:spPr>
+        <p:txBody>
+          <a:bodyPr wrap="square" anchor="ctr" lIns="18288" rIns="18288" tIns="9144" bIns="9144">
+            <a:spAutoFit/>
+          </a:bodyPr>
+          <a:lstStyle/>
+          <a:p>
+            <a:pPr algn="l">
               <a:lnSpc>
-                <a:spcPct val="108000"/>
+                <a:spcPct val="105000"/>
               </a:lnSpc>
-              <a:spcBef>
-                <a:spcPts val="600"/>
-              </a:spcBef>
             </a:pPr>
             <a:r>
-              <a:rPr sz="1000" b="1" i="0">
-                <a:solidFill>
-                  <a:srgbClr val="16385C"/>
-                </a:solidFill>
-                <a:latin typeface="Meiryo"/>
-                <a:ea typeface="Meiryo"/>
-              </a:rPr>
-              <a:t>▪ </a:t>
-            </a:r>
-            <a:r>
-              <a:rPr sz="1250" b="0" i="0">
-                <a:solidFill>
-                  <a:srgbClr val="26303A"/>
+              <a:rPr sz="1150" b="0" i="0">
+                <a:solidFill>
+                  <a:srgbClr val="6E7A88"/>
                 </a:solidFill>
                 <a:latin typeface="Meiryo"/>
                 <a:ea typeface="Meiryo"/>
@@ -6020,7 +6087,7 @@
       </p:sp>
       <p:sp>
         <p:nvSpPr>
-          <p:cNvPr id="13" name="Rounded Rectangle 12"/>
+          <p:cNvPr id="14" name="Rounded Rectangle 13"/>
           <p:cNvSpPr/>
           <p:nvPr/>
         </p:nvSpPr>
@@ -6068,7 +6135,7 @@
       </p:sp>
       <p:sp>
         <p:nvSpPr>
-          <p:cNvPr id="14" name="Rectangle 13"/>
+          <p:cNvPr id="15" name="Rectangle 14"/>
           <p:cNvSpPr/>
           <p:nvPr/>
         </p:nvSpPr>
@@ -6112,7 +6179,7 @@
       </p:sp>
       <p:sp>
         <p:nvSpPr>
-          <p:cNvPr id="15" name="TextBox 14"/>
+          <p:cNvPr id="16" name="TextBox 15"/>
           <p:cNvSpPr txBox="1"/>
           <p:nvPr/>
         </p:nvSpPr>
@@ -6157,14 +6224,14 @@
       </p:sp>
       <p:sp>
         <p:nvSpPr>
-          <p:cNvPr id="16" name="TextBox 15"/>
+          <p:cNvPr id="17" name="TextBox 16"/>
           <p:cNvSpPr txBox="1"/>
           <p:nvPr/>
         </p:nvSpPr>
         <p:spPr>
           <a:xfrm>
-            <a:off x="6693408" y="4142232"/>
-            <a:ext cx="4748479" cy="457200"/>
+            <a:off x="6711696" y="4123944"/>
+            <a:ext cx="4711903" cy="896112"/>
           </a:xfrm>
           <a:prstGeom prst="rect">
             <a:avLst/>
@@ -6177,36 +6244,23 @@
           </a:bodyPr>
           <a:lstStyle/>
           <a:p>
-            <a:pPr>
+            <a:pPr algn="l">
               <a:lnSpc>
-                <a:spcPct val="108000"/>
+                <a:spcPct val="118000"/>
               </a:lnSpc>
-              <a:spcBef>
-                <a:spcPts val="0"/>
-              </a:spcBef>
             </a:pPr>
             <a:r>
-              <a:rPr sz="1000" b="1" i="0">
-                <a:solidFill>
-                  <a:srgbClr val="16385C"/>
-                </a:solidFill>
-                <a:latin typeface="Meiryo"/>
-                <a:ea typeface="Meiryo"/>
-              </a:rPr>
-              <a:t>▪ </a:t>
-            </a:r>
-            <a:r>
-              <a:rPr sz="1250" b="0" i="0">
-                <a:solidFill>
-                  <a:srgbClr val="26303A"/>
-                </a:solidFill>
-                <a:latin typeface="Meiryo"/>
-                <a:ea typeface="Meiryo"/>
-              </a:rPr>
-              <a:t>初期集団は </a:t>
-            </a:r>
-            <a:r>
-              <a:rPr sz="1250" b="0" i="1">
+              <a:rPr sz="1400" b="0" i="0">
+                <a:solidFill>
+                  <a:srgbClr val="26303A"/>
+                </a:solidFill>
+                <a:latin typeface="Meiryo"/>
+                <a:ea typeface="Meiryo"/>
+              </a:rPr>
+              <a:t>初期集団（</a:t>
+            </a:r>
+            <a:r>
+              <a:rPr sz="1400" b="0" i="1">
                 <a:solidFill>
                   <a:srgbClr val="26303A"/>
                 </a:solidFill>
@@ -6216,7 +6270,7 @@
               <a:t>S</a:t>
             </a:r>
             <a:r>
-              <a:rPr sz="900" b="0" i="1" baseline="-22000">
+              <a:rPr sz="1008" b="0" i="1" baseline="-22000">
                 <a:solidFill>
                   <a:srgbClr val="26303A"/>
                 </a:solidFill>
@@ -6226,59 +6280,109 @@
               <a:t>p</a:t>
             </a:r>
             <a:r>
-              <a:rPr sz="1250" b="0" i="0">
-                <a:solidFill>
-                  <a:srgbClr val="26303A"/>
-                </a:solidFill>
-                <a:latin typeface="Meiryo"/>
-                <a:ea typeface="Meiryo"/>
-              </a:rPr>
-              <a:t>＋無作為に生成した個体．</a:t>
-            </a:r>
-            <a:r>
-              <a:rPr sz="1250" b="1" i="0">
+              <a:rPr sz="1400" b="0" i="0">
+                <a:solidFill>
+                  <a:srgbClr val="26303A"/>
+                </a:solidFill>
+                <a:latin typeface="Meiryo"/>
+                <a:ea typeface="Meiryo"/>
+              </a:rPr>
+              <a:t>＋無作為に生成した個体）→ </a:t>
+            </a:r>
+            <a:r>
+              <a:rPr sz="1400" b="1" i="0">
                 <a:solidFill>
                   <a:srgbClr val="0F5C28"/>
                 </a:solidFill>
                 <a:latin typeface="Meiryo"/>
                 <a:ea typeface="Meiryo"/>
               </a:rPr>
-              <a:t>選択・交叉（2 親の染色体を組み替え）→ 突然変異 → 局所探索（N5 近傍，各個体）</a:t>
-            </a:r>
-            <a:r>
-              <a:rPr sz="1250" b="0" i="0">
-                <a:solidFill>
-                  <a:srgbClr val="26303A"/>
-                </a:solidFill>
-                <a:latin typeface="Meiryo"/>
-                <a:ea typeface="Meiryo"/>
-              </a:rPr>
-              <a:t>で世代交代する</a:t>
-            </a:r>
-          </a:p>
-          <a:p>
-            <a:pPr>
+              <a:t>選択・交叉</a:t>
+            </a:r>
+            <a:r>
+              <a:rPr sz="1400" b="0" i="0">
+                <a:solidFill>
+                  <a:srgbClr val="26303A"/>
+                </a:solidFill>
+                <a:latin typeface="Meiryo"/>
+                <a:ea typeface="Meiryo"/>
+              </a:rPr>
+              <a:t>（2 親の染色体を組み替え）→ </a:t>
+            </a:r>
+            <a:r>
+              <a:rPr sz="1400" b="1" i="0">
+                <a:solidFill>
+                  <a:srgbClr val="0F5C28"/>
+                </a:solidFill>
+                <a:latin typeface="Meiryo"/>
+                <a:ea typeface="Meiryo"/>
+              </a:rPr>
+              <a:t>突然変異</a:t>
+            </a:r>
+            <a:r>
+              <a:rPr sz="1400" b="0" i="0">
+                <a:solidFill>
+                  <a:srgbClr val="26303A"/>
+                </a:solidFill>
+                <a:latin typeface="Meiryo"/>
+                <a:ea typeface="Meiryo"/>
+              </a:rPr>
+              <a:t> → </a:t>
+            </a:r>
+            <a:r>
+              <a:rPr sz="1400" b="1" i="0">
+                <a:solidFill>
+                  <a:srgbClr val="0F5C28"/>
+                </a:solidFill>
+                <a:latin typeface="Meiryo"/>
+                <a:ea typeface="Meiryo"/>
+              </a:rPr>
+              <a:t>局所探索</a:t>
+            </a:r>
+            <a:r>
+              <a:rPr sz="1400" b="0" i="0">
+                <a:solidFill>
+                  <a:srgbClr val="26303A"/>
+                </a:solidFill>
+                <a:latin typeface="Meiryo"/>
+                <a:ea typeface="Meiryo"/>
+              </a:rPr>
+              <a:t>（N5 近傍，各個体）→ 世代交代して反復</a:t>
+            </a:r>
+          </a:p>
+        </p:txBody>
+      </p:sp>
+      <p:sp>
+        <p:nvSpPr>
+          <p:cNvPr id="18" name="TextBox 17"/>
+          <p:cNvSpPr txBox="1"/>
+          <p:nvPr/>
+        </p:nvSpPr>
+        <p:spPr>
+          <a:xfrm>
+            <a:off x="6711696" y="5020056"/>
+            <a:ext cx="4711903" cy="365760"/>
+          </a:xfrm>
+          <a:prstGeom prst="rect">
+            <a:avLst/>
+          </a:prstGeom>
+          <a:noFill/>
+        </p:spPr>
+        <p:txBody>
+          <a:bodyPr wrap="square" anchor="ctr" lIns="18288" rIns="18288" tIns="9144" bIns="9144">
+            <a:spAutoFit/>
+          </a:bodyPr>
+          <a:lstStyle/>
+          <a:p>
+            <a:pPr algn="l">
               <a:lnSpc>
-                <a:spcPct val="108000"/>
+                <a:spcPct val="105000"/>
               </a:lnSpc>
-              <a:spcBef>
-                <a:spcPts val="600"/>
-              </a:spcBef>
             </a:pPr>
             <a:r>
-              <a:rPr sz="1000" b="1" i="0">
-                <a:solidFill>
-                  <a:srgbClr val="16385C"/>
-                </a:solidFill>
-                <a:latin typeface="Meiryo"/>
-                <a:ea typeface="Meiryo"/>
-              </a:rPr>
-              <a:t>▪ </a:t>
-            </a:r>
-            <a:r>
-              <a:rPr sz="1250" b="0" i="0">
-                <a:solidFill>
-                  <a:srgbClr val="26303A"/>
+              <a:rPr sz="1150" b="0" i="0">
+                <a:solidFill>
+                  <a:srgbClr val="6E7A88"/>
                 </a:solidFill>
                 <a:latin typeface="Meiryo"/>
                 <a:ea typeface="Meiryo"/>
@@ -6290,7 +6394,7 @@
       </p:sp>
       <p:sp>
         <p:nvSpPr>
-          <p:cNvPr id="17" name="Rounded Rectangle 16"/>
+          <p:cNvPr id="19" name="Rounded Rectangle 18"/>
           <p:cNvSpPr/>
           <p:nvPr/>
         </p:nvSpPr>
@@ -10830,7 +10934,7 @@
                 <a:latin typeface="Meiryo"/>
                 <a:ea typeface="Meiryo"/>
               </a:rPr>
-              <a:t> = 0 の解（</a:t>
+              <a:t> = 0 の解（初期解 </a:t>
             </a:r>
             <a:r>
               <a:rPr sz="1300" b="0" i="1">
@@ -10860,7 +10964,7 @@
                 <a:latin typeface="Meiryo"/>
                 <a:ea typeface="Meiryo"/>
               </a:rPr>
-              <a:t> の処理順序を保った解）は全手法が探索せずに得るため HV から除く</a:t>
+              <a:t>）は全手法が探索せずに得るため HV から除く</a:t>
             </a:r>
           </a:p>
           <a:p>

--- a/doc/presentation_materials/JIMA2026fall_発表.pptx
+++ b/doc/presentation_materials/JIMA2026fall_発表.pptx
@@ -6826,9 +6826,289 @@
           </a:p>
         </p:txBody>
       </p:sp>
+      <p:sp>
+        <p:nvSpPr>
+          <p:cNvPr id="8" name="Rounded Rectangle 7"/>
+          <p:cNvSpPr/>
+          <p:nvPr/>
+        </p:nvSpPr>
+        <p:spPr>
+          <a:xfrm>
+            <a:off x="566928" y="1728216"/>
+            <a:ext cx="960120" cy="310896"/>
+          </a:xfrm>
+          <a:prstGeom prst="roundRect">
+            <a:avLst>
+              <a:gd name="adj" fmla="val 30000"/>
+            </a:avLst>
+          </a:prstGeom>
+          <a:solidFill>
+            <a:srgbClr val="6E7A88"/>
+          </a:solidFill>
+          <a:ln>
+            <a:noFill/>
+          </a:ln>
+          <a:effectLst/>
+        </p:spPr>
+        <p:style>
+          <a:lnRef idx="1">
+            <a:schemeClr val="accent1"/>
+          </a:lnRef>
+          <a:fillRef idx="3">
+            <a:schemeClr val="accent1"/>
+          </a:fillRef>
+          <a:effectRef idx="2">
+            <a:schemeClr val="accent1"/>
+          </a:effectRef>
+          <a:fontRef idx="minor">
+            <a:schemeClr val="lt1"/>
+          </a:fontRef>
+        </p:style>
+        <p:txBody>
+          <a:bodyPr rtlCol="0" anchor="ctr" wrap="square" lIns="54864" rIns="54864" tIns="18288" bIns="18288"/>
+          <a:lstStyle/>
+          <a:p>
+            <a:pPr algn="ctr">
+              <a:lnSpc>
+                <a:spcPct val="100000"/>
+              </a:lnSpc>
+            </a:pPr>
+            <a:r>
+              <a:rPr sz="1200" b="1" i="0">
+                <a:solidFill>
+                  <a:srgbClr val="FFFFFF"/>
+                </a:solidFill>
+                <a:latin typeface="Meiryo"/>
+                <a:ea typeface="Meiryo"/>
+              </a:rPr>
+              <a:t>通常の PR</a:t>
+            </a:r>
+          </a:p>
+        </p:txBody>
+      </p:sp>
+      <p:sp>
+        <p:nvSpPr>
+          <p:cNvPr id="9" name="TextBox 8"/>
+          <p:cNvSpPr txBox="1"/>
+          <p:nvPr/>
+        </p:nvSpPr>
+        <p:spPr>
+          <a:xfrm>
+            <a:off x="1664207" y="1691640"/>
+            <a:ext cx="4343400" cy="384048"/>
+          </a:xfrm>
+          <a:prstGeom prst="rect">
+            <a:avLst/>
+          </a:prstGeom>
+          <a:noFill/>
+        </p:spPr>
+        <p:txBody>
+          <a:bodyPr wrap="square" anchor="ctr" lIns="18288" rIns="18288" tIns="9144" bIns="9144">
+            <a:spAutoFit/>
+          </a:bodyPr>
+          <a:lstStyle/>
+          <a:p>
+            <a:pPr algn="l">
+              <a:lnSpc>
+                <a:spcPct val="105000"/>
+              </a:lnSpc>
+            </a:pPr>
+            <a:r>
+              <a:rPr sz="1300" b="0" i="0">
+                <a:solidFill>
+                  <a:srgbClr val="6E7A88"/>
+                </a:solidFill>
+                <a:latin typeface="Meiryo"/>
+                <a:ea typeface="Meiryo"/>
+              </a:rPr>
+              <a:t>探索中に得た良い解どうしを結び，その間を探索する</a:t>
+            </a:r>
+          </a:p>
+        </p:txBody>
+      </p:sp>
+      <p:sp>
+        <p:nvSpPr>
+          <p:cNvPr id="10" name="Rounded Rectangle 9"/>
+          <p:cNvSpPr/>
+          <p:nvPr/>
+        </p:nvSpPr>
+        <p:spPr>
+          <a:xfrm>
+            <a:off x="566928" y="2112264"/>
+            <a:ext cx="960120" cy="310896"/>
+          </a:xfrm>
+          <a:prstGeom prst="roundRect">
+            <a:avLst>
+              <a:gd name="adj" fmla="val 30000"/>
+            </a:avLst>
+          </a:prstGeom>
+          <a:solidFill>
+            <a:srgbClr val="16385C"/>
+          </a:solidFill>
+          <a:ln>
+            <a:noFill/>
+          </a:ln>
+          <a:effectLst/>
+        </p:spPr>
+        <p:style>
+          <a:lnRef idx="1">
+            <a:schemeClr val="accent1"/>
+          </a:lnRef>
+          <a:fillRef idx="3">
+            <a:schemeClr val="accent1"/>
+          </a:fillRef>
+          <a:effectRef idx="2">
+            <a:schemeClr val="accent1"/>
+          </a:effectRef>
+          <a:fontRef idx="minor">
+            <a:schemeClr val="lt1"/>
+          </a:fontRef>
+        </p:style>
+        <p:txBody>
+          <a:bodyPr rtlCol="0" anchor="ctr" wrap="square" lIns="54864" rIns="54864" tIns="18288" bIns="18288"/>
+          <a:lstStyle/>
+          <a:p>
+            <a:pPr algn="ctr">
+              <a:lnSpc>
+                <a:spcPct val="100000"/>
+              </a:lnSpc>
+            </a:pPr>
+            <a:r>
+              <a:rPr sz="1200" b="1" i="0">
+                <a:solidFill>
+                  <a:srgbClr val="FFFFFF"/>
+                </a:solidFill>
+                <a:latin typeface="Meiryo"/>
+                <a:ea typeface="Meiryo"/>
+              </a:rPr>
+              <a:t>本研究</a:t>
+            </a:r>
+          </a:p>
+        </p:txBody>
+      </p:sp>
+      <p:sp>
+        <p:nvSpPr>
+          <p:cNvPr id="11" name="TextBox 10"/>
+          <p:cNvSpPr txBox="1"/>
+          <p:nvPr/>
+        </p:nvSpPr>
+        <p:spPr>
+          <a:xfrm>
+            <a:off x="1664207" y="2075688"/>
+            <a:ext cx="4343400" cy="384048"/>
+          </a:xfrm>
+          <a:prstGeom prst="rect">
+            <a:avLst/>
+          </a:prstGeom>
+          <a:noFill/>
+        </p:spPr>
+        <p:txBody>
+          <a:bodyPr wrap="square" anchor="ctr" lIns="18288" rIns="18288" tIns="9144" bIns="9144">
+            <a:spAutoFit/>
+          </a:bodyPr>
+          <a:lstStyle/>
+          <a:p>
+            <a:pPr algn="l">
+              <a:lnSpc>
+                <a:spcPct val="105000"/>
+              </a:lnSpc>
+            </a:pPr>
+            <a:r>
+              <a:rPr sz="1300" b="0" i="0">
+                <a:solidFill>
+                  <a:srgbClr val="26303A"/>
+                </a:solidFill>
+                <a:latin typeface="Meiryo"/>
+                <a:ea typeface="Meiryo"/>
+              </a:rPr>
+              <a:t>誘導解を </a:t>
+            </a:r>
+            <a:r>
+              <a:rPr sz="1300" b="0" i="1">
+                <a:solidFill>
+                  <a:srgbClr val="26303A"/>
+                </a:solidFill>
+                <a:latin typeface="Meiryo"/>
+                <a:ea typeface="Meiryo"/>
+              </a:rPr>
+              <a:t>S</a:t>
+            </a:r>
+            <a:r>
+              <a:rPr sz="936" b="0" i="1" baseline="-22000">
+                <a:solidFill>
+                  <a:srgbClr val="26303A"/>
+                </a:solidFill>
+                <a:latin typeface="Meiryo"/>
+                <a:ea typeface="Meiryo"/>
+              </a:rPr>
+              <a:t>p</a:t>
+            </a:r>
+            <a:r>
+              <a:rPr sz="1300" b="0" i="0">
+                <a:solidFill>
+                  <a:srgbClr val="26303A"/>
+                </a:solidFill>
+                <a:latin typeface="Meiryo"/>
+                <a:ea typeface="Meiryo"/>
+              </a:rPr>
+              <a:t> に</a:t>
+            </a:r>
+            <a:r>
+              <a:rPr sz="1300" b="1" i="0">
+                <a:solidFill>
+                  <a:srgbClr val="16385C"/>
+                </a:solidFill>
+                <a:latin typeface="Meiryo"/>
+                <a:ea typeface="Meiryo"/>
+              </a:rPr>
+              <a:t>固定</a:t>
+            </a:r>
+            <a:r>
+              <a:rPr sz="1300" b="0" i="0">
+                <a:solidFill>
+                  <a:srgbClr val="26303A"/>
+                </a:solidFill>
+                <a:latin typeface="Meiryo"/>
+                <a:ea typeface="Meiryo"/>
+              </a:rPr>
+              <a:t> → 解を </a:t>
+            </a:r>
+            <a:r>
+              <a:rPr sz="1300" b="0" i="1">
+                <a:solidFill>
+                  <a:srgbClr val="26303A"/>
+                </a:solidFill>
+                <a:latin typeface="Meiryo"/>
+                <a:ea typeface="Meiryo"/>
+              </a:rPr>
+              <a:t>S</a:t>
+            </a:r>
+            <a:r>
+              <a:rPr sz="936" b="0" i="1" baseline="-22000">
+                <a:solidFill>
+                  <a:srgbClr val="26303A"/>
+                </a:solidFill>
+                <a:latin typeface="Meiryo"/>
+                <a:ea typeface="Meiryo"/>
+              </a:rPr>
+              <a:t>p</a:t>
+            </a:r>
+            <a:r>
+              <a:rPr sz="1300" b="0" i="0">
+                <a:solidFill>
+                  <a:srgbClr val="26303A"/>
+                </a:solidFill>
+                <a:latin typeface="Meiryo"/>
+                <a:ea typeface="Meiryo"/>
+              </a:rPr>
+              <a:t> に近づける操作になる</a:t>
+            </a:r>
+          </a:p>
+        </p:txBody>
+      </p:sp>
       <p:pic>
         <p:nvPicPr>
-          <p:cNvPr id="8" name="Picture 7" descr="concept_op.png"/>
+          <p:cNvPr id="12" name="Picture 11" descr="concept_op.png"/>
           <p:cNvPicPr>
             <a:picLocks noChangeAspect="1"/>
           </p:cNvPicPr>
@@ -6842,7 +7122,7 @@
         </p:blipFill>
         <p:spPr>
           <a:xfrm>
-            <a:off x="521207" y="1691640"/>
+            <a:off x="521207" y="2551176"/>
             <a:ext cx="5532120" cy="3640134"/>
           </a:xfrm>
           <a:prstGeom prst="rect">
@@ -6850,286 +7130,6 @@
           </a:prstGeom>
         </p:spPr>
       </p:pic>
-      <p:sp>
-        <p:nvSpPr>
-          <p:cNvPr id="9" name="Rounded Rectangle 8"/>
-          <p:cNvSpPr/>
-          <p:nvPr/>
-        </p:nvSpPr>
-        <p:spPr>
-          <a:xfrm>
-            <a:off x="566928" y="5459790"/>
-            <a:ext cx="960120" cy="310896"/>
-          </a:xfrm>
-          <a:prstGeom prst="roundRect">
-            <a:avLst>
-              <a:gd name="adj" fmla="val 30000"/>
-            </a:avLst>
-          </a:prstGeom>
-          <a:solidFill>
-            <a:srgbClr val="6E7A88"/>
-          </a:solidFill>
-          <a:ln>
-            <a:noFill/>
-          </a:ln>
-          <a:effectLst/>
-        </p:spPr>
-        <p:style>
-          <a:lnRef idx="1">
-            <a:schemeClr val="accent1"/>
-          </a:lnRef>
-          <a:fillRef idx="3">
-            <a:schemeClr val="accent1"/>
-          </a:fillRef>
-          <a:effectRef idx="2">
-            <a:schemeClr val="accent1"/>
-          </a:effectRef>
-          <a:fontRef idx="minor">
-            <a:schemeClr val="lt1"/>
-          </a:fontRef>
-        </p:style>
-        <p:txBody>
-          <a:bodyPr rtlCol="0" anchor="ctr" wrap="square" lIns="54864" rIns="54864" tIns="18288" bIns="18288"/>
-          <a:lstStyle/>
-          <a:p>
-            <a:pPr algn="ctr">
-              <a:lnSpc>
-                <a:spcPct val="100000"/>
-              </a:lnSpc>
-            </a:pPr>
-            <a:r>
-              <a:rPr sz="1200" b="1" i="0">
-                <a:solidFill>
-                  <a:srgbClr val="FFFFFF"/>
-                </a:solidFill>
-                <a:latin typeface="Meiryo"/>
-                <a:ea typeface="Meiryo"/>
-              </a:rPr>
-              <a:t>通常の PR</a:t>
-            </a:r>
-          </a:p>
-        </p:txBody>
-      </p:sp>
-      <p:sp>
-        <p:nvSpPr>
-          <p:cNvPr id="10" name="TextBox 9"/>
-          <p:cNvSpPr txBox="1"/>
-          <p:nvPr/>
-        </p:nvSpPr>
-        <p:spPr>
-          <a:xfrm>
-            <a:off x="1664207" y="5423214"/>
-            <a:ext cx="4343400" cy="384048"/>
-          </a:xfrm>
-          <a:prstGeom prst="rect">
-            <a:avLst/>
-          </a:prstGeom>
-          <a:noFill/>
-        </p:spPr>
-        <p:txBody>
-          <a:bodyPr wrap="square" anchor="ctr" lIns="18288" rIns="18288" tIns="9144" bIns="9144">
-            <a:spAutoFit/>
-          </a:bodyPr>
-          <a:lstStyle/>
-          <a:p>
-            <a:pPr algn="l">
-              <a:lnSpc>
-                <a:spcPct val="105000"/>
-              </a:lnSpc>
-            </a:pPr>
-            <a:r>
-              <a:rPr sz="1300" b="0" i="0">
-                <a:solidFill>
-                  <a:srgbClr val="6E7A88"/>
-                </a:solidFill>
-                <a:latin typeface="Meiryo"/>
-                <a:ea typeface="Meiryo"/>
-              </a:rPr>
-              <a:t>探索中に得た良い解どうしを結び，その間を探索する</a:t>
-            </a:r>
-          </a:p>
-        </p:txBody>
-      </p:sp>
-      <p:sp>
-        <p:nvSpPr>
-          <p:cNvPr id="11" name="Rounded Rectangle 10"/>
-          <p:cNvSpPr/>
-          <p:nvPr/>
-        </p:nvSpPr>
-        <p:spPr>
-          <a:xfrm>
-            <a:off x="566928" y="5843838"/>
-            <a:ext cx="960120" cy="310896"/>
-          </a:xfrm>
-          <a:prstGeom prst="roundRect">
-            <a:avLst>
-              <a:gd name="adj" fmla="val 30000"/>
-            </a:avLst>
-          </a:prstGeom>
-          <a:solidFill>
-            <a:srgbClr val="16385C"/>
-          </a:solidFill>
-          <a:ln>
-            <a:noFill/>
-          </a:ln>
-          <a:effectLst/>
-        </p:spPr>
-        <p:style>
-          <a:lnRef idx="1">
-            <a:schemeClr val="accent1"/>
-          </a:lnRef>
-          <a:fillRef idx="3">
-            <a:schemeClr val="accent1"/>
-          </a:fillRef>
-          <a:effectRef idx="2">
-            <a:schemeClr val="accent1"/>
-          </a:effectRef>
-          <a:fontRef idx="minor">
-            <a:schemeClr val="lt1"/>
-          </a:fontRef>
-        </p:style>
-        <p:txBody>
-          <a:bodyPr rtlCol="0" anchor="ctr" wrap="square" lIns="54864" rIns="54864" tIns="18288" bIns="18288"/>
-          <a:lstStyle/>
-          <a:p>
-            <a:pPr algn="ctr">
-              <a:lnSpc>
-                <a:spcPct val="100000"/>
-              </a:lnSpc>
-            </a:pPr>
-            <a:r>
-              <a:rPr sz="1200" b="1" i="0">
-                <a:solidFill>
-                  <a:srgbClr val="FFFFFF"/>
-                </a:solidFill>
-                <a:latin typeface="Meiryo"/>
-                <a:ea typeface="Meiryo"/>
-              </a:rPr>
-              <a:t>本研究</a:t>
-            </a:r>
-          </a:p>
-        </p:txBody>
-      </p:sp>
-      <p:sp>
-        <p:nvSpPr>
-          <p:cNvPr id="12" name="TextBox 11"/>
-          <p:cNvSpPr txBox="1"/>
-          <p:nvPr/>
-        </p:nvSpPr>
-        <p:spPr>
-          <a:xfrm>
-            <a:off x="1664207" y="5807262"/>
-            <a:ext cx="4343400" cy="384048"/>
-          </a:xfrm>
-          <a:prstGeom prst="rect">
-            <a:avLst/>
-          </a:prstGeom>
-          <a:noFill/>
-        </p:spPr>
-        <p:txBody>
-          <a:bodyPr wrap="square" anchor="ctr" lIns="18288" rIns="18288" tIns="9144" bIns="9144">
-            <a:spAutoFit/>
-          </a:bodyPr>
-          <a:lstStyle/>
-          <a:p>
-            <a:pPr algn="l">
-              <a:lnSpc>
-                <a:spcPct val="105000"/>
-              </a:lnSpc>
-            </a:pPr>
-            <a:r>
-              <a:rPr sz="1300" b="0" i="0">
-                <a:solidFill>
-                  <a:srgbClr val="26303A"/>
-                </a:solidFill>
-                <a:latin typeface="Meiryo"/>
-                <a:ea typeface="Meiryo"/>
-              </a:rPr>
-              <a:t>誘導解を </a:t>
-            </a:r>
-            <a:r>
-              <a:rPr sz="1300" b="0" i="1">
-                <a:solidFill>
-                  <a:srgbClr val="26303A"/>
-                </a:solidFill>
-                <a:latin typeface="Meiryo"/>
-                <a:ea typeface="Meiryo"/>
-              </a:rPr>
-              <a:t>S</a:t>
-            </a:r>
-            <a:r>
-              <a:rPr sz="936" b="0" i="1" baseline="-22000">
-                <a:solidFill>
-                  <a:srgbClr val="26303A"/>
-                </a:solidFill>
-                <a:latin typeface="Meiryo"/>
-                <a:ea typeface="Meiryo"/>
-              </a:rPr>
-              <a:t>p</a:t>
-            </a:r>
-            <a:r>
-              <a:rPr sz="1300" b="0" i="0">
-                <a:solidFill>
-                  <a:srgbClr val="26303A"/>
-                </a:solidFill>
-                <a:latin typeface="Meiryo"/>
-                <a:ea typeface="Meiryo"/>
-              </a:rPr>
-              <a:t> に</a:t>
-            </a:r>
-            <a:r>
-              <a:rPr sz="1300" b="1" i="0">
-                <a:solidFill>
-                  <a:srgbClr val="16385C"/>
-                </a:solidFill>
-                <a:latin typeface="Meiryo"/>
-                <a:ea typeface="Meiryo"/>
-              </a:rPr>
-              <a:t>固定</a:t>
-            </a:r>
-            <a:r>
-              <a:rPr sz="1300" b="0" i="0">
-                <a:solidFill>
-                  <a:srgbClr val="26303A"/>
-                </a:solidFill>
-                <a:latin typeface="Meiryo"/>
-                <a:ea typeface="Meiryo"/>
-              </a:rPr>
-              <a:t> → 解を </a:t>
-            </a:r>
-            <a:r>
-              <a:rPr sz="1300" b="0" i="1">
-                <a:solidFill>
-                  <a:srgbClr val="26303A"/>
-                </a:solidFill>
-                <a:latin typeface="Meiryo"/>
-                <a:ea typeface="Meiryo"/>
-              </a:rPr>
-              <a:t>S</a:t>
-            </a:r>
-            <a:r>
-              <a:rPr sz="936" b="0" i="1" baseline="-22000">
-                <a:solidFill>
-                  <a:srgbClr val="26303A"/>
-                </a:solidFill>
-                <a:latin typeface="Meiryo"/>
-                <a:ea typeface="Meiryo"/>
-              </a:rPr>
-              <a:t>p</a:t>
-            </a:r>
-            <a:r>
-              <a:rPr sz="1300" b="0" i="0">
-                <a:solidFill>
-                  <a:srgbClr val="26303A"/>
-                </a:solidFill>
-                <a:latin typeface="Meiryo"/>
-                <a:ea typeface="Meiryo"/>
-              </a:rPr>
-              <a:t> に近づける操作になる</a:t>
-            </a:r>
-          </a:p>
-        </p:txBody>
-      </p:sp>
       <p:sp>
         <p:nvSpPr>
           <p:cNvPr id="13" name="Rounded Rectangle 12"/>

--- a/doc/presentation_materials/JIMA2026fall_発表.pptx
+++ b/doc/presentation_materials/JIMA2026fall_発表.pptx
@@ -5730,8 +5730,8 @@
         </p:blipFill>
         <p:spPr>
           <a:xfrm>
-            <a:off x="521207" y="1691640"/>
-            <a:ext cx="5669280" cy="3730386"/>
+            <a:off x="521207" y="1755648"/>
+            <a:ext cx="4480560" cy="2948208"/>
           </a:xfrm>
           <a:prstGeom prst="rect">
             <a:avLst/>
@@ -5740,18 +5740,97 @@
       </p:pic>
       <p:sp>
         <p:nvSpPr>
-          <p:cNvPr id="9" name="Rounded Rectangle 8"/>
+          <p:cNvPr id="9" name="Rectangle 8"/>
           <p:cNvSpPr/>
           <p:nvPr/>
         </p:nvSpPr>
         <p:spPr>
           <a:xfrm>
-            <a:off x="6510528" y="1691640"/>
-            <a:ext cx="5114239" cy="1810512"/>
+            <a:off x="5321808" y="1737360"/>
+            <a:ext cx="3014319" cy="384048"/>
+          </a:xfrm>
+          <a:prstGeom prst="rect">
+            <a:avLst/>
+          </a:prstGeom>
+          <a:solidFill>
+            <a:srgbClr val="E06C00"/>
+          </a:solidFill>
+          <a:ln>
+            <a:noFill/>
+          </a:ln>
+          <a:effectLst/>
+        </p:spPr>
+        <p:style>
+          <a:lnRef idx="1">
+            <a:schemeClr val="accent1"/>
+          </a:lnRef>
+          <a:fillRef idx="3">
+            <a:schemeClr val="accent1"/>
+          </a:fillRef>
+          <a:effectRef idx="2">
+            <a:schemeClr val="accent1"/>
+          </a:effectRef>
+          <a:fontRef idx="minor">
+            <a:schemeClr val="lt1"/>
+          </a:fontRef>
+        </p:style>
+        <p:txBody>
+          <a:bodyPr rtlCol="0" anchor="ctr"/>
+          <a:lstStyle/>
+          <a:p>
+            <a:pPr algn="ctr"/>
+          </a:p>
+        </p:txBody>
+      </p:sp>
+      <p:sp>
+        <p:nvSpPr>
+          <p:cNvPr id="10" name="TextBox 9"/>
+          <p:cNvSpPr txBox="1"/>
+          <p:nvPr/>
+        </p:nvSpPr>
+        <p:spPr>
+          <a:xfrm>
+            <a:off x="5458968" y="1737360"/>
+            <a:ext cx="2739999" cy="384048"/>
+          </a:xfrm>
+          <a:prstGeom prst="rect">
+            <a:avLst/>
+          </a:prstGeom>
+          <a:noFill/>
+        </p:spPr>
+        <p:txBody>
+          <a:bodyPr wrap="square" anchor="ctr" lIns="18288" rIns="18288" tIns="9144" bIns="9144">
+            <a:spAutoFit/>
+          </a:bodyPr>
+          <a:lstStyle/>
+          <a:p>
+            <a:r>
+              <a:rPr sz="1350" b="1" i="0">
+                <a:solidFill>
+                  <a:srgbClr val="FFFFFF"/>
+                </a:solidFill>
+                <a:latin typeface="Meiryo"/>
+                <a:ea typeface="Meiryo"/>
+              </a:rPr>
+              <a:t>単点探索（ILS）</a:t>
+            </a:r>
+          </a:p>
+        </p:txBody>
+      </p:sp>
+      <p:sp>
+        <p:nvSpPr>
+          <p:cNvPr id="11" name="Rounded Rectangle 10"/>
+          <p:cNvSpPr/>
+          <p:nvPr/>
+        </p:nvSpPr>
+        <p:spPr>
+          <a:xfrm>
+            <a:off x="5413248" y="2286000"/>
+            <a:ext cx="2355951" cy="384048"/>
           </a:xfrm>
           <a:prstGeom prst="roundRect">
             <a:avLst>
-              <a:gd name="adj" fmla="val 4000"/>
+              <a:gd name="adj" fmla="val 12000"/>
             </a:avLst>
           </a:prstGeom>
           <a:solidFill>
@@ -5779,26 +5858,161 @@
           </a:fontRef>
         </p:style>
         <p:txBody>
-          <a:bodyPr rtlCol="0" anchor="ctr"/>
-          <a:lstStyle/>
-          <a:p>
-            <a:pPr algn="ctr"/>
-          </a:p>
-        </p:txBody>
-      </p:sp>
-      <p:sp>
-        <p:nvSpPr>
-          <p:cNvPr id="10" name="Rectangle 9"/>
+          <a:bodyPr rtlCol="0" anchor="ctr" wrap="square" lIns="54864" rIns="54864" tIns="18288" bIns="18288"/>
+          <a:lstStyle/>
+          <a:p>
+            <a:pPr algn="ctr">
+              <a:lnSpc>
+                <a:spcPct val="100000"/>
+              </a:lnSpc>
+            </a:pPr>
+            <a:r>
+              <a:rPr sz="1100" b="0" i="0">
+                <a:solidFill>
+                  <a:srgbClr val="26303A"/>
+                </a:solidFill>
+                <a:latin typeface="Meiryo"/>
+                <a:ea typeface="Meiryo"/>
+              </a:rPr>
+              <a:t>初期解：</a:t>
+            </a:r>
+            <a:r>
+              <a:rPr sz="1100" b="0" i="1">
+                <a:solidFill>
+                  <a:srgbClr val="26303A"/>
+                </a:solidFill>
+                <a:latin typeface="Meiryo"/>
+                <a:ea typeface="Meiryo"/>
+              </a:rPr>
+              <a:t>S</a:t>
+            </a:r>
+            <a:r>
+              <a:rPr sz="792" b="0" i="1" baseline="-22000">
+                <a:solidFill>
+                  <a:srgbClr val="26303A"/>
+                </a:solidFill>
+                <a:latin typeface="Meiryo"/>
+                <a:ea typeface="Meiryo"/>
+              </a:rPr>
+              <a:t>p</a:t>
+            </a:r>
+          </a:p>
+        </p:txBody>
+      </p:sp>
+      <p:sp>
+        <p:nvSpPr>
+          <p:cNvPr id="12" name="Rounded Rectangle 11"/>
           <p:cNvSpPr/>
           <p:nvPr/>
         </p:nvSpPr>
         <p:spPr>
           <a:xfrm>
-            <a:off x="6510528" y="1691640"/>
-            <a:ext cx="5114239" cy="402336"/>
-          </a:xfrm>
-          <a:prstGeom prst="rect">
-            <a:avLst/>
+            <a:off x="5413248" y="2852928"/>
+            <a:ext cx="2355951" cy="384048"/>
+          </a:xfrm>
+          <a:prstGeom prst="roundRect">
+            <a:avLst>
+              <a:gd name="adj" fmla="val 12000"/>
+            </a:avLst>
+          </a:prstGeom>
+          <a:solidFill>
+            <a:srgbClr val="EDF2F7"/>
+          </a:solidFill>
+          <a:ln w="13970">
+            <a:solidFill>
+              <a:srgbClr val="C9D6E5"/>
+            </a:solidFill>
+          </a:ln>
+          <a:effectLst/>
+        </p:spPr>
+        <p:style>
+          <a:lnRef idx="1">
+            <a:schemeClr val="accent1"/>
+          </a:lnRef>
+          <a:fillRef idx="3">
+            <a:schemeClr val="accent1"/>
+          </a:fillRef>
+          <a:effectRef idx="2">
+            <a:schemeClr val="accent1"/>
+          </a:effectRef>
+          <a:fontRef idx="minor">
+            <a:schemeClr val="lt1"/>
+          </a:fontRef>
+        </p:style>
+        <p:txBody>
+          <a:bodyPr rtlCol="0" anchor="ctr" wrap="square" lIns="54864" rIns="54864" tIns="18288" bIns="18288"/>
+          <a:lstStyle/>
+          <a:p>
+            <a:pPr algn="ctr">
+              <a:lnSpc>
+                <a:spcPct val="100000"/>
+              </a:lnSpc>
+            </a:pPr>
+            <a:r>
+              <a:rPr sz="1100" b="0" i="0">
+                <a:solidFill>
+                  <a:srgbClr val="26303A"/>
+                </a:solidFill>
+                <a:latin typeface="Meiryo"/>
+                <a:ea typeface="Meiryo"/>
+              </a:rPr>
+              <a:t>局所探索：N5 近傍</a:t>
+            </a:r>
+          </a:p>
+        </p:txBody>
+      </p:sp>
+      <p:cxnSp>
+        <p:nvCxnSpPr>
+          <p:cNvPr id="13" name="Connector 12"/>
+          <p:cNvCxnSpPr/>
+          <p:nvPr/>
+        </p:nvCxnSpPr>
+        <p:spPr>
+          <a:xfrm>
+            <a:off x="6591223" y="2688336"/>
+            <a:ext cx="0" cy="146304"/>
+          </a:xfrm>
+          <a:prstGeom prst="line">
+            <a:avLst/>
+          </a:prstGeom>
+          <a:ln w="17780">
+            <a:solidFill>
+              <a:srgbClr val="6E7A88"/>
+            </a:solidFill>
+            <a:tailEnd type="triangle" w="med" len="med"/>
+          </a:ln>
+          <a:effectLst/>
+        </p:spPr>
+        <p:style>
+          <a:lnRef idx="2">
+            <a:schemeClr val="accent1"/>
+          </a:lnRef>
+          <a:fillRef idx="0">
+            <a:schemeClr val="accent1"/>
+          </a:fillRef>
+          <a:effectRef idx="1">
+            <a:schemeClr val="accent1"/>
+          </a:effectRef>
+          <a:fontRef idx="minor">
+            <a:schemeClr val="tx1"/>
+          </a:fontRef>
+        </p:style>
+      </p:cxnSp>
+      <p:sp>
+        <p:nvSpPr>
+          <p:cNvPr id="14" name="Rounded Rectangle 13"/>
+          <p:cNvSpPr/>
+          <p:nvPr/>
+        </p:nvSpPr>
+        <p:spPr>
+          <a:xfrm>
+            <a:off x="5413248" y="3419856"/>
+            <a:ext cx="2355951" cy="384048"/>
+          </a:xfrm>
+          <a:prstGeom prst="roundRect">
+            <a:avLst>
+              <a:gd name="adj" fmla="val 12000"/>
+            </a:avLst>
           </a:prstGeom>
           <a:solidFill>
             <a:srgbClr val="E06C00"/>
@@ -5823,282 +6037,177 @@
           </a:fontRef>
         </p:style>
         <p:txBody>
-          <a:bodyPr rtlCol="0" anchor="ctr"/>
-          <a:lstStyle/>
-          <a:p>
-            <a:pPr algn="ctr"/>
-          </a:p>
-        </p:txBody>
-      </p:sp>
-      <p:sp>
-        <p:nvSpPr>
-          <p:cNvPr id="11" name="TextBox 10"/>
-          <p:cNvSpPr txBox="1"/>
-          <p:nvPr/>
-        </p:nvSpPr>
-        <p:spPr>
-          <a:xfrm>
-            <a:off x="6693408" y="1691640"/>
-            <a:ext cx="4748479" cy="402336"/>
-          </a:xfrm>
-          <a:prstGeom prst="rect">
-            <a:avLst/>
-          </a:prstGeom>
-          <a:noFill/>
-        </p:spPr>
-        <p:txBody>
-          <a:bodyPr wrap="square" anchor="ctr" lIns="18288" rIns="18288" tIns="9144" bIns="9144">
-            <a:spAutoFit/>
-          </a:bodyPr>
-          <a:lstStyle/>
-          <a:p>
-            <a:r>
-              <a:rPr sz="1400" b="1" i="0">
-                <a:solidFill>
-                  <a:srgbClr val="FFFFFF"/>
-                </a:solidFill>
-                <a:latin typeface="Meiryo"/>
-                <a:ea typeface="Meiryo"/>
-              </a:rPr>
-              <a:t>単点探索（ILS：反復局所探索）</a:t>
-            </a:r>
-            <a:r>
-              <a:rPr sz="1150" b="0" i="0">
-                <a:solidFill>
-                  <a:srgbClr val="FFFFFF"/>
-                </a:solidFill>
-                <a:latin typeface="Meiryo"/>
-                <a:ea typeface="Meiryo"/>
-              </a:rPr>
-              <a:t>　現在解は常に 1 つ</a:t>
-            </a:r>
-          </a:p>
-        </p:txBody>
-      </p:sp>
-      <p:sp>
-        <p:nvSpPr>
-          <p:cNvPr id="12" name="TextBox 11"/>
-          <p:cNvSpPr txBox="1"/>
-          <p:nvPr/>
-        </p:nvSpPr>
-        <p:spPr>
-          <a:xfrm>
-            <a:off x="6711696" y="2185416"/>
-            <a:ext cx="4711903" cy="896112"/>
-          </a:xfrm>
-          <a:prstGeom prst="rect">
-            <a:avLst/>
-          </a:prstGeom>
-          <a:noFill/>
-        </p:spPr>
-        <p:txBody>
-          <a:bodyPr wrap="square" anchor="t" lIns="18288" rIns="18288" tIns="9144" bIns="9144">
-            <a:spAutoFit/>
-          </a:bodyPr>
-          <a:lstStyle/>
-          <a:p>
-            <a:pPr algn="l">
+          <a:bodyPr rtlCol="0" anchor="ctr" wrap="square" lIns="54864" rIns="54864" tIns="18288" bIns="18288"/>
+          <a:lstStyle/>
+          <a:p>
+            <a:pPr algn="ctr">
               <a:lnSpc>
-                <a:spcPct val="118000"/>
+                <a:spcPct val="100000"/>
               </a:lnSpc>
             </a:pPr>
             <a:r>
-              <a:rPr sz="1400" b="0" i="0">
-                <a:solidFill>
-                  <a:srgbClr val="26303A"/>
-                </a:solidFill>
-                <a:latin typeface="Meiryo"/>
-                <a:ea typeface="Meiryo"/>
-              </a:rPr>
-              <a:t>初期解 </a:t>
-            </a:r>
-            <a:r>
-              <a:rPr sz="1400" b="0" i="1">
-                <a:solidFill>
-                  <a:srgbClr val="26303A"/>
-                </a:solidFill>
-                <a:latin typeface="Meiryo"/>
-                <a:ea typeface="Meiryo"/>
-              </a:rPr>
-              <a:t>S</a:t>
-            </a:r>
-            <a:r>
-              <a:rPr sz="1008" b="0" i="1" baseline="-22000">
-                <a:solidFill>
-                  <a:srgbClr val="26303A"/>
-                </a:solidFill>
-                <a:latin typeface="Meiryo"/>
-                <a:ea typeface="Meiryo"/>
-              </a:rPr>
-              <a:t>p</a:t>
-            </a:r>
-            <a:r>
-              <a:rPr sz="1400" b="0" i="0">
-                <a:solidFill>
-                  <a:srgbClr val="26303A"/>
-                </a:solidFill>
-                <a:latin typeface="Meiryo"/>
-                <a:ea typeface="Meiryo"/>
-              </a:rPr>
-              <a:t> → </a:t>
-            </a:r>
-            <a:r>
-              <a:rPr sz="1400" b="1" i="0">
-                <a:solidFill>
-                  <a:srgbClr val="E06C00"/>
-                </a:solidFill>
-                <a:latin typeface="Meiryo"/>
-                <a:ea typeface="Meiryo"/>
-              </a:rPr>
-              <a:t>局所探索</a:t>
-            </a:r>
-            <a:r>
-              <a:rPr sz="1400" b="0" i="0">
-                <a:solidFill>
-                  <a:srgbClr val="26303A"/>
-                </a:solidFill>
-                <a:latin typeface="Meiryo"/>
-                <a:ea typeface="Meiryo"/>
-              </a:rPr>
-              <a:t>（N5 近傍）→ </a:t>
-            </a:r>
-            <a:r>
-              <a:rPr sz="1400" b="1" i="0">
-                <a:solidFill>
-                  <a:srgbClr val="E06C00"/>
-                </a:solidFill>
-                <a:latin typeface="Meiryo"/>
-                <a:ea typeface="Meiryo"/>
-              </a:rPr>
-              <a:t>摂動</a:t>
-            </a:r>
-            <a:r>
-              <a:rPr sz="1400" b="0" i="0">
-                <a:solidFill>
-                  <a:srgbClr val="26303A"/>
-                </a:solidFill>
-                <a:latin typeface="Meiryo"/>
-                <a:ea typeface="Meiryo"/>
-              </a:rPr>
-              <a:t>（数手の insert 移動）→ </a:t>
-            </a:r>
-            <a:r>
-              <a:rPr sz="1400" b="1" i="0">
-                <a:solidFill>
-                  <a:srgbClr val="E06C00"/>
-                </a:solidFill>
-                <a:latin typeface="Meiryo"/>
-                <a:ea typeface="Meiryo"/>
-              </a:rPr>
-              <a:t>局所探索</a:t>
-            </a:r>
-            <a:r>
-              <a:rPr sz="1400" b="0" i="0">
-                <a:solidFill>
-                  <a:srgbClr val="26303A"/>
-                </a:solidFill>
-                <a:latin typeface="Meiryo"/>
-                <a:ea typeface="Meiryo"/>
-              </a:rPr>
-              <a:t> → </a:t>
-            </a:r>
-            <a:r>
-              <a:rPr sz="1400" b="1" i="0">
-                <a:solidFill>
-                  <a:srgbClr val="E06C00"/>
-                </a:solidFill>
-                <a:latin typeface="Meiryo"/>
-                <a:ea typeface="Meiryo"/>
-              </a:rPr>
-              <a:t>受理判定</a:t>
-            </a:r>
-            <a:r>
-              <a:rPr sz="1400" b="0" i="0">
-                <a:solidFill>
-                  <a:srgbClr val="26303A"/>
-                </a:solidFill>
-                <a:latin typeface="Meiryo"/>
-                <a:ea typeface="Meiryo"/>
-              </a:rPr>
-              <a:t>（</a:t>
-            </a:r>
-            <a:r>
-              <a:rPr sz="1400" b="0" i="1">
-                <a:solidFill>
-                  <a:srgbClr val="26303A"/>
-                </a:solidFill>
-                <a:latin typeface="Meiryo"/>
-                <a:ea typeface="Meiryo"/>
-              </a:rPr>
-              <a:t>F</a:t>
-            </a:r>
-            <a:r>
-              <a:rPr sz="1400" b="0" i="0">
-                <a:solidFill>
-                  <a:srgbClr val="26303A"/>
-                </a:solidFill>
-                <a:latin typeface="Meiryo"/>
-                <a:ea typeface="Meiryo"/>
-              </a:rPr>
-              <a:t> が改善すれば更新）→ 摂動に戻って反復</a:t>
-            </a:r>
-          </a:p>
-        </p:txBody>
-      </p:sp>
-      <p:sp>
-        <p:nvSpPr>
-          <p:cNvPr id="13" name="TextBox 12"/>
-          <p:cNvSpPr txBox="1"/>
-          <p:nvPr/>
-        </p:nvSpPr>
-        <p:spPr>
-          <a:xfrm>
-            <a:off x="6711696" y="3081528"/>
-            <a:ext cx="4711903" cy="365760"/>
-          </a:xfrm>
-          <a:prstGeom prst="rect">
-            <a:avLst/>
-          </a:prstGeom>
-          <a:noFill/>
-        </p:spPr>
-        <p:txBody>
-          <a:bodyPr wrap="square" anchor="ctr" lIns="18288" rIns="18288" tIns="9144" bIns="9144">
-            <a:spAutoFit/>
-          </a:bodyPr>
-          <a:lstStyle/>
-          <a:p>
-            <a:pPr algn="l">
+              <a:rPr sz="1100" b="1" i="0">
+                <a:solidFill>
+                  <a:srgbClr val="FFFFFF"/>
+                </a:solidFill>
+                <a:latin typeface="Meiryo"/>
+                <a:ea typeface="Meiryo"/>
+              </a:rPr>
+              <a:t>摂動：数手の insert 移動</a:t>
+            </a:r>
+          </a:p>
+        </p:txBody>
+      </p:sp>
+      <p:cxnSp>
+        <p:nvCxnSpPr>
+          <p:cNvPr id="15" name="Connector 14"/>
+          <p:cNvCxnSpPr/>
+          <p:nvPr/>
+        </p:nvCxnSpPr>
+        <p:spPr>
+          <a:xfrm>
+            <a:off x="6591223" y="3255264"/>
+            <a:ext cx="0" cy="146304"/>
+          </a:xfrm>
+          <a:prstGeom prst="line">
+            <a:avLst/>
+          </a:prstGeom>
+          <a:ln w="17780">
+            <a:solidFill>
+              <a:srgbClr val="6E7A88"/>
+            </a:solidFill>
+            <a:tailEnd type="triangle" w="med" len="med"/>
+          </a:ln>
+          <a:effectLst/>
+        </p:spPr>
+        <p:style>
+          <a:lnRef idx="2">
+            <a:schemeClr val="accent1"/>
+          </a:lnRef>
+          <a:fillRef idx="0">
+            <a:schemeClr val="accent1"/>
+          </a:fillRef>
+          <a:effectRef idx="1">
+            <a:schemeClr val="accent1"/>
+          </a:effectRef>
+          <a:fontRef idx="minor">
+            <a:schemeClr val="tx1"/>
+          </a:fontRef>
+        </p:style>
+      </p:cxnSp>
+      <p:sp>
+        <p:nvSpPr>
+          <p:cNvPr id="16" name="Rounded Rectangle 15"/>
+          <p:cNvSpPr/>
+          <p:nvPr/>
+        </p:nvSpPr>
+        <p:spPr>
+          <a:xfrm>
+            <a:off x="5413248" y="3986783"/>
+            <a:ext cx="2355951" cy="384048"/>
+          </a:xfrm>
+          <a:prstGeom prst="roundRect">
+            <a:avLst>
+              <a:gd name="adj" fmla="val 12000"/>
+            </a:avLst>
+          </a:prstGeom>
+          <a:solidFill>
+            <a:srgbClr val="EDF2F7"/>
+          </a:solidFill>
+          <a:ln w="13970">
+            <a:solidFill>
+              <a:srgbClr val="C9D6E5"/>
+            </a:solidFill>
+          </a:ln>
+          <a:effectLst/>
+        </p:spPr>
+        <p:style>
+          <a:lnRef idx="1">
+            <a:schemeClr val="accent1"/>
+          </a:lnRef>
+          <a:fillRef idx="3">
+            <a:schemeClr val="accent1"/>
+          </a:fillRef>
+          <a:effectRef idx="2">
+            <a:schemeClr val="accent1"/>
+          </a:effectRef>
+          <a:fontRef idx="minor">
+            <a:schemeClr val="lt1"/>
+          </a:fontRef>
+        </p:style>
+        <p:txBody>
+          <a:bodyPr rtlCol="0" anchor="ctr" wrap="square" lIns="54864" rIns="54864" tIns="18288" bIns="18288"/>
+          <a:lstStyle/>
+          <a:p>
+            <a:pPr algn="ctr">
               <a:lnSpc>
-                <a:spcPct val="105000"/>
+                <a:spcPct val="100000"/>
               </a:lnSpc>
             </a:pPr>
             <a:r>
-              <a:rPr sz="1150" b="0" i="0">
-                <a:solidFill>
-                  <a:srgbClr val="6E7A88"/>
-                </a:solidFill>
-                <a:latin typeface="Meiryo"/>
-                <a:ea typeface="Meiryo"/>
-              </a:rPr>
-              <a:t>選定理由：局所探索と摂動が別の段にあり，演算子を摂動に組み込める</a:t>
-            </a:r>
-          </a:p>
-        </p:txBody>
-      </p:sp>
-      <p:sp>
-        <p:nvSpPr>
-          <p:cNvPr id="14" name="Rounded Rectangle 13"/>
+              <a:rPr sz="1100" b="0" i="0">
+                <a:solidFill>
+                  <a:srgbClr val="26303A"/>
+                </a:solidFill>
+                <a:latin typeface="Meiryo"/>
+                <a:ea typeface="Meiryo"/>
+              </a:rPr>
+              <a:t>局所探索：N5 近傍</a:t>
+            </a:r>
+          </a:p>
+        </p:txBody>
+      </p:sp>
+      <p:cxnSp>
+        <p:nvCxnSpPr>
+          <p:cNvPr id="17" name="Connector 16"/>
+          <p:cNvCxnSpPr/>
+          <p:nvPr/>
+        </p:nvCxnSpPr>
+        <p:spPr>
+          <a:xfrm>
+            <a:off x="6591223" y="3822191"/>
+            <a:ext cx="0" cy="146305"/>
+          </a:xfrm>
+          <a:prstGeom prst="line">
+            <a:avLst/>
+          </a:prstGeom>
+          <a:ln w="17780">
+            <a:solidFill>
+              <a:srgbClr val="6E7A88"/>
+            </a:solidFill>
+            <a:tailEnd type="triangle" w="med" len="med"/>
+          </a:ln>
+          <a:effectLst/>
+        </p:spPr>
+        <p:style>
+          <a:lnRef idx="2">
+            <a:schemeClr val="accent1"/>
+          </a:lnRef>
+          <a:fillRef idx="0">
+            <a:schemeClr val="accent1"/>
+          </a:fillRef>
+          <a:effectRef idx="1">
+            <a:schemeClr val="accent1"/>
+          </a:effectRef>
+          <a:fontRef idx="minor">
+            <a:schemeClr val="tx1"/>
+          </a:fontRef>
+        </p:style>
+      </p:cxnSp>
+      <p:sp>
+        <p:nvSpPr>
+          <p:cNvPr id="18" name="Rounded Rectangle 17"/>
           <p:cNvSpPr/>
           <p:nvPr/>
         </p:nvSpPr>
         <p:spPr>
           <a:xfrm>
-            <a:off x="6510528" y="3630168"/>
-            <a:ext cx="5114239" cy="1810512"/>
+            <a:off x="5413248" y="4553712"/>
+            <a:ext cx="2355951" cy="384048"/>
           </a:xfrm>
           <a:prstGeom prst="roundRect">
             <a:avLst>
-              <a:gd name="adj" fmla="val 4000"/>
+              <a:gd name="adj" fmla="val 12000"/>
             </a:avLst>
           </a:prstGeom>
           <a:solidFill>
@@ -6126,23 +6235,283 @@
           </a:fontRef>
         </p:style>
         <p:txBody>
-          <a:bodyPr rtlCol="0" anchor="ctr"/>
-          <a:lstStyle/>
-          <a:p>
-            <a:pPr algn="ctr"/>
-          </a:p>
-        </p:txBody>
-      </p:sp>
-      <p:sp>
-        <p:nvSpPr>
-          <p:cNvPr id="15" name="Rectangle 14"/>
+          <a:bodyPr rtlCol="0" anchor="ctr" wrap="square" lIns="54864" rIns="54864" tIns="18288" bIns="18288"/>
+          <a:lstStyle/>
+          <a:p>
+            <a:pPr algn="ctr">
+              <a:lnSpc>
+                <a:spcPct val="100000"/>
+              </a:lnSpc>
+            </a:pPr>
+            <a:r>
+              <a:rPr sz="1100" b="0" i="0">
+                <a:solidFill>
+                  <a:srgbClr val="26303A"/>
+                </a:solidFill>
+                <a:latin typeface="Meiryo"/>
+                <a:ea typeface="Meiryo"/>
+              </a:rPr>
+              <a:t>受理判定：</a:t>
+            </a:r>
+            <a:r>
+              <a:rPr sz="1100" b="0" i="1">
+                <a:solidFill>
+                  <a:srgbClr val="26303A"/>
+                </a:solidFill>
+                <a:latin typeface="Meiryo"/>
+                <a:ea typeface="Meiryo"/>
+              </a:rPr>
+              <a:t>F</a:t>
+            </a:r>
+            <a:r>
+              <a:rPr sz="1100" b="0" i="0">
+                <a:solidFill>
+                  <a:srgbClr val="26303A"/>
+                </a:solidFill>
+                <a:latin typeface="Meiryo"/>
+                <a:ea typeface="Meiryo"/>
+              </a:rPr>
+              <a:t> が改善すれば更新</a:t>
+            </a:r>
+          </a:p>
+        </p:txBody>
+      </p:sp>
+      <p:cxnSp>
+        <p:nvCxnSpPr>
+          <p:cNvPr id="19" name="Connector 18"/>
+          <p:cNvCxnSpPr/>
+          <p:nvPr/>
+        </p:nvCxnSpPr>
+        <p:spPr>
+          <a:xfrm>
+            <a:off x="6591223" y="4389120"/>
+            <a:ext cx="0" cy="146304"/>
+          </a:xfrm>
+          <a:prstGeom prst="line">
+            <a:avLst/>
+          </a:prstGeom>
+          <a:ln w="17780">
+            <a:solidFill>
+              <a:srgbClr val="6E7A88"/>
+            </a:solidFill>
+            <a:tailEnd type="triangle" w="med" len="med"/>
+          </a:ln>
+          <a:effectLst/>
+        </p:spPr>
+        <p:style>
+          <a:lnRef idx="2">
+            <a:schemeClr val="accent1"/>
+          </a:lnRef>
+          <a:fillRef idx="0">
+            <a:schemeClr val="accent1"/>
+          </a:fillRef>
+          <a:effectRef idx="1">
+            <a:schemeClr val="accent1"/>
+          </a:effectRef>
+          <a:fontRef idx="minor">
+            <a:schemeClr val="tx1"/>
+          </a:fontRef>
+        </p:style>
+      </p:cxnSp>
+      <p:cxnSp>
+        <p:nvCxnSpPr>
+          <p:cNvPr id="20" name="Connector 19"/>
+          <p:cNvCxnSpPr/>
+          <p:nvPr/>
+        </p:nvCxnSpPr>
+        <p:spPr>
+          <a:xfrm>
+            <a:off x="7787487" y="4745736"/>
+            <a:ext cx="237744" cy="0"/>
+          </a:xfrm>
+          <a:prstGeom prst="line">
+            <a:avLst/>
+          </a:prstGeom>
+          <a:ln w="17780">
+            <a:solidFill>
+              <a:srgbClr val="6E7A88"/>
+            </a:solidFill>
+          </a:ln>
+          <a:effectLst/>
+        </p:spPr>
+        <p:style>
+          <a:lnRef idx="2">
+            <a:schemeClr val="accent1"/>
+          </a:lnRef>
+          <a:fillRef idx="0">
+            <a:schemeClr val="accent1"/>
+          </a:fillRef>
+          <a:effectRef idx="1">
+            <a:schemeClr val="accent1"/>
+          </a:effectRef>
+          <a:fontRef idx="minor">
+            <a:schemeClr val="tx1"/>
+          </a:fontRef>
+        </p:style>
+      </p:cxnSp>
+      <p:cxnSp>
+        <p:nvCxnSpPr>
+          <p:cNvPr id="21" name="Connector 20"/>
+          <p:cNvCxnSpPr/>
+          <p:nvPr/>
+        </p:nvCxnSpPr>
+        <p:spPr>
+          <a:xfrm flipV="1">
+            <a:off x="8025231" y="3611880"/>
+            <a:ext cx="0" cy="1133856"/>
+          </a:xfrm>
+          <a:prstGeom prst="line">
+            <a:avLst/>
+          </a:prstGeom>
+          <a:ln w="17780">
+            <a:solidFill>
+              <a:srgbClr val="6E7A88"/>
+            </a:solidFill>
+          </a:ln>
+          <a:effectLst/>
+        </p:spPr>
+        <p:style>
+          <a:lnRef idx="2">
+            <a:schemeClr val="accent1"/>
+          </a:lnRef>
+          <a:fillRef idx="0">
+            <a:schemeClr val="accent1"/>
+          </a:fillRef>
+          <a:effectRef idx="1">
+            <a:schemeClr val="accent1"/>
+          </a:effectRef>
+          <a:fontRef idx="minor">
+            <a:schemeClr val="tx1"/>
+          </a:fontRef>
+        </p:style>
+      </p:cxnSp>
+      <p:cxnSp>
+        <p:nvCxnSpPr>
+          <p:cNvPr id="22" name="Connector 21"/>
+          <p:cNvCxnSpPr/>
+          <p:nvPr/>
+        </p:nvCxnSpPr>
+        <p:spPr>
+          <a:xfrm flipH="1">
+            <a:off x="7805775" y="3611880"/>
+            <a:ext cx="219456" cy="0"/>
+          </a:xfrm>
+          <a:prstGeom prst="line">
+            <a:avLst/>
+          </a:prstGeom>
+          <a:ln w="17780">
+            <a:solidFill>
+              <a:srgbClr val="6E7A88"/>
+            </a:solidFill>
+            <a:tailEnd type="triangle" w="med" len="med"/>
+          </a:ln>
+          <a:effectLst/>
+        </p:spPr>
+        <p:style>
+          <a:lnRef idx="2">
+            <a:schemeClr val="accent1"/>
+          </a:lnRef>
+          <a:fillRef idx="0">
+            <a:schemeClr val="accent1"/>
+          </a:fillRef>
+          <a:effectRef idx="1">
+            <a:schemeClr val="accent1"/>
+          </a:effectRef>
+          <a:fontRef idx="minor">
+            <a:schemeClr val="tx1"/>
+          </a:fontRef>
+        </p:style>
+      </p:cxnSp>
+      <p:sp>
+        <p:nvSpPr>
+          <p:cNvPr id="23" name="TextBox 22"/>
+          <p:cNvSpPr txBox="1"/>
+          <p:nvPr/>
+        </p:nvSpPr>
+        <p:spPr>
+          <a:xfrm>
+            <a:off x="8098383" y="3995928"/>
+            <a:ext cx="640080" cy="365760"/>
+          </a:xfrm>
+          <a:prstGeom prst="rect">
+            <a:avLst/>
+          </a:prstGeom>
+          <a:noFill/>
+        </p:spPr>
+        <p:txBody>
+          <a:bodyPr wrap="square" anchor="ctr" lIns="18288" rIns="18288" tIns="9144" bIns="9144">
+            <a:spAutoFit/>
+          </a:bodyPr>
+          <a:lstStyle/>
+          <a:p>
+            <a:pPr algn="l">
+              <a:lnSpc>
+                <a:spcPct val="105000"/>
+              </a:lnSpc>
+            </a:pPr>
+            <a:r>
+              <a:rPr sz="1100" b="0" i="0">
+                <a:solidFill>
+                  <a:srgbClr val="6E7A88"/>
+                </a:solidFill>
+                <a:latin typeface="Meiryo"/>
+                <a:ea typeface="Meiryo"/>
+              </a:rPr>
+              <a:t>反復</a:t>
+            </a:r>
+          </a:p>
+        </p:txBody>
+      </p:sp>
+      <p:sp>
+        <p:nvSpPr>
+          <p:cNvPr id="24" name="TextBox 23"/>
+          <p:cNvSpPr txBox="1"/>
+          <p:nvPr/>
+        </p:nvSpPr>
+        <p:spPr>
+          <a:xfrm>
+            <a:off x="5321808" y="5074920"/>
+            <a:ext cx="3014319" cy="457200"/>
+          </a:xfrm>
+          <a:prstGeom prst="rect">
+            <a:avLst/>
+          </a:prstGeom>
+          <a:noFill/>
+        </p:spPr>
+        <p:txBody>
+          <a:bodyPr wrap="square" anchor="t" lIns="18288" rIns="18288" tIns="9144" bIns="9144">
+            <a:spAutoFit/>
+          </a:bodyPr>
+          <a:lstStyle/>
+          <a:p>
+            <a:pPr algn="l">
+              <a:lnSpc>
+                <a:spcPct val="110000"/>
+              </a:lnSpc>
+            </a:pPr>
+            <a:r>
+              <a:rPr sz="1050" b="0" i="0">
+                <a:solidFill>
+                  <a:srgbClr val="6E7A88"/>
+                </a:solidFill>
+                <a:latin typeface="Meiryo"/>
+                <a:ea typeface="Meiryo"/>
+              </a:rPr>
+              <a:t>選定理由：局所探索と摂動が別の段にあり，演算子を摂動に組み込める</a:t>
+            </a:r>
+          </a:p>
+        </p:txBody>
+      </p:sp>
+      <p:sp>
+        <p:nvSpPr>
+          <p:cNvPr id="25" name="Rectangle 24"/>
           <p:cNvSpPr/>
           <p:nvPr/>
         </p:nvSpPr>
         <p:spPr>
           <a:xfrm>
-            <a:off x="6510528" y="3630168"/>
-            <a:ext cx="5114239" cy="402336"/>
+            <a:off x="8610447" y="1737360"/>
+            <a:ext cx="3014319" cy="384048"/>
           </a:xfrm>
           <a:prstGeom prst="rect">
             <a:avLst/>
@@ -6179,14 +6548,14 @@
       </p:sp>
       <p:sp>
         <p:nvSpPr>
-          <p:cNvPr id="16" name="TextBox 15"/>
+          <p:cNvPr id="26" name="TextBox 25"/>
           <p:cNvSpPr txBox="1"/>
           <p:nvPr/>
         </p:nvSpPr>
         <p:spPr>
           <a:xfrm>
-            <a:off x="6693408" y="3630168"/>
-            <a:ext cx="4748479" cy="402336"/>
+            <a:off x="8747607" y="1737360"/>
+            <a:ext cx="2739999" cy="384048"/>
           </a:xfrm>
           <a:prstGeom prst="rect">
             <a:avLst/>
@@ -6200,67 +6569,79 @@
           <a:lstStyle/>
           <a:p>
             <a:r>
-              <a:rPr sz="1400" b="1" i="0">
+              <a:rPr sz="1350" b="1" i="0">
                 <a:solidFill>
                   <a:srgbClr val="FFFFFF"/>
                 </a:solidFill>
                 <a:latin typeface="Meiryo"/>
                 <a:ea typeface="Meiryo"/>
               </a:rPr>
-              <a:t>多点探索（Memetic：GA＋局所探索）</a:t>
-            </a:r>
-            <a:r>
-              <a:rPr sz="1150" b="0" i="0">
-                <a:solidFill>
-                  <a:srgbClr val="FFFFFF"/>
-                </a:solidFill>
-                <a:latin typeface="Meiryo"/>
-                <a:ea typeface="Meiryo"/>
-              </a:rPr>
-              <a:t>　複数の解を保持</a:t>
-            </a:r>
-          </a:p>
-        </p:txBody>
-      </p:sp>
-      <p:sp>
-        <p:nvSpPr>
-          <p:cNvPr id="17" name="TextBox 16"/>
-          <p:cNvSpPr txBox="1"/>
-          <p:nvPr/>
-        </p:nvSpPr>
-        <p:spPr>
-          <a:xfrm>
-            <a:off x="6711696" y="4123944"/>
-            <a:ext cx="4711903" cy="896112"/>
-          </a:xfrm>
-          <a:prstGeom prst="rect">
-            <a:avLst/>
-          </a:prstGeom>
-          <a:noFill/>
-        </p:spPr>
-        <p:txBody>
-          <a:bodyPr wrap="square" anchor="t" lIns="18288" rIns="18288" tIns="9144" bIns="9144">
-            <a:spAutoFit/>
-          </a:bodyPr>
-          <a:lstStyle/>
-          <a:p>
-            <a:pPr algn="l">
+              <a:t>多点探索（Memetic）</a:t>
+            </a:r>
+          </a:p>
+        </p:txBody>
+      </p:sp>
+      <p:sp>
+        <p:nvSpPr>
+          <p:cNvPr id="27" name="Rounded Rectangle 26"/>
+          <p:cNvSpPr/>
+          <p:nvPr/>
+        </p:nvSpPr>
+        <p:spPr>
+          <a:xfrm>
+            <a:off x="8701887" y="2286000"/>
+            <a:ext cx="2355951" cy="384048"/>
+          </a:xfrm>
+          <a:prstGeom prst="roundRect">
+            <a:avLst>
+              <a:gd name="adj" fmla="val 12000"/>
+            </a:avLst>
+          </a:prstGeom>
+          <a:solidFill>
+            <a:srgbClr val="FFFFFF"/>
+          </a:solidFill>
+          <a:ln w="13970">
+            <a:solidFill>
+              <a:srgbClr val="C9D6E5"/>
+            </a:solidFill>
+          </a:ln>
+          <a:effectLst/>
+        </p:spPr>
+        <p:style>
+          <a:lnRef idx="1">
+            <a:schemeClr val="accent1"/>
+          </a:lnRef>
+          <a:fillRef idx="3">
+            <a:schemeClr val="accent1"/>
+          </a:fillRef>
+          <a:effectRef idx="2">
+            <a:schemeClr val="accent1"/>
+          </a:effectRef>
+          <a:fontRef idx="minor">
+            <a:schemeClr val="lt1"/>
+          </a:fontRef>
+        </p:style>
+        <p:txBody>
+          <a:bodyPr rtlCol="0" anchor="ctr" wrap="square" lIns="54864" rIns="54864" tIns="18288" bIns="18288"/>
+          <a:lstStyle/>
+          <a:p>
+            <a:pPr algn="ctr">
               <a:lnSpc>
-                <a:spcPct val="118000"/>
+                <a:spcPct val="100000"/>
               </a:lnSpc>
             </a:pPr>
             <a:r>
-              <a:rPr sz="1400" b="0" i="0">
+              <a:rPr sz="1100" b="0" i="0">
                 <a:solidFill>
                   <a:srgbClr val="26303A"/>
                 </a:solidFill>
                 <a:latin typeface="Meiryo"/>
                 <a:ea typeface="Meiryo"/>
               </a:rPr>
-              <a:t>初期集団（</a:t>
-            </a:r>
-            <a:r>
-              <a:rPr sz="1400" b="0" i="1">
+              <a:t>初期集団：</a:t>
+            </a:r>
+            <a:r>
+              <a:rPr sz="1100" b="0" i="1">
                 <a:solidFill>
                   <a:srgbClr val="26303A"/>
                 </a:solidFill>
@@ -6270,7 +6651,7 @@
               <a:t>S</a:t>
             </a:r>
             <a:r>
-              <a:rPr sz="1008" b="0" i="1" baseline="-22000">
+              <a:rPr sz="792" b="0" i="1" baseline="-22000">
                 <a:solidFill>
                   <a:srgbClr val="26303A"/>
                 </a:solidFill>
@@ -6280,88 +6661,432 @@
               <a:t>p</a:t>
             </a:r>
             <a:r>
-              <a:rPr sz="1400" b="0" i="0">
+              <a:rPr sz="1100" b="0" i="0">
                 <a:solidFill>
                   <a:srgbClr val="26303A"/>
                 </a:solidFill>
                 <a:latin typeface="Meiryo"/>
                 <a:ea typeface="Meiryo"/>
               </a:rPr>
-              <a:t>＋無作為に生成した個体）→ </a:t>
-            </a:r>
-            <a:r>
-              <a:rPr sz="1400" b="1" i="0">
-                <a:solidFill>
-                  <a:srgbClr val="0F5C28"/>
-                </a:solidFill>
-                <a:latin typeface="Meiryo"/>
-                <a:ea typeface="Meiryo"/>
-              </a:rPr>
-              <a:t>選択・交叉</a:t>
-            </a:r>
-            <a:r>
-              <a:rPr sz="1400" b="0" i="0">
+              <a:t>＋無作為な個体</a:t>
+            </a:r>
+          </a:p>
+        </p:txBody>
+      </p:sp>
+      <p:sp>
+        <p:nvSpPr>
+          <p:cNvPr id="28" name="Rounded Rectangle 27"/>
+          <p:cNvSpPr/>
+          <p:nvPr/>
+        </p:nvSpPr>
+        <p:spPr>
+          <a:xfrm>
+            <a:off x="8701887" y="2852928"/>
+            <a:ext cx="2355951" cy="384048"/>
+          </a:xfrm>
+          <a:prstGeom prst="roundRect">
+            <a:avLst>
+              <a:gd name="adj" fmla="val 12000"/>
+            </a:avLst>
+          </a:prstGeom>
+          <a:solidFill>
+            <a:srgbClr val="0F5C28"/>
+          </a:solidFill>
+          <a:ln>
+            <a:noFill/>
+          </a:ln>
+          <a:effectLst/>
+        </p:spPr>
+        <p:style>
+          <a:lnRef idx="1">
+            <a:schemeClr val="accent1"/>
+          </a:lnRef>
+          <a:fillRef idx="3">
+            <a:schemeClr val="accent1"/>
+          </a:fillRef>
+          <a:effectRef idx="2">
+            <a:schemeClr val="accent1"/>
+          </a:effectRef>
+          <a:fontRef idx="minor">
+            <a:schemeClr val="lt1"/>
+          </a:fontRef>
+        </p:style>
+        <p:txBody>
+          <a:bodyPr rtlCol="0" anchor="ctr" wrap="square" lIns="54864" rIns="54864" tIns="18288" bIns="18288"/>
+          <a:lstStyle/>
+          <a:p>
+            <a:pPr algn="ctr">
+              <a:lnSpc>
+                <a:spcPct val="100000"/>
+              </a:lnSpc>
+            </a:pPr>
+            <a:r>
+              <a:rPr sz="1100" b="1" i="0">
+                <a:solidFill>
+                  <a:srgbClr val="FFFFFF"/>
+                </a:solidFill>
+                <a:latin typeface="Meiryo"/>
+                <a:ea typeface="Meiryo"/>
+              </a:rPr>
+              <a:t>選択・交叉：2 親を組み替え</a:t>
+            </a:r>
+          </a:p>
+        </p:txBody>
+      </p:sp>
+      <p:cxnSp>
+        <p:nvCxnSpPr>
+          <p:cNvPr id="29" name="Connector 28"/>
+          <p:cNvCxnSpPr/>
+          <p:nvPr/>
+        </p:nvCxnSpPr>
+        <p:spPr>
+          <a:xfrm>
+            <a:off x="9879863" y="2688336"/>
+            <a:ext cx="0" cy="146304"/>
+          </a:xfrm>
+          <a:prstGeom prst="line">
+            <a:avLst/>
+          </a:prstGeom>
+          <a:ln w="17780">
+            <a:solidFill>
+              <a:srgbClr val="6E7A88"/>
+            </a:solidFill>
+            <a:tailEnd type="triangle" w="med" len="med"/>
+          </a:ln>
+          <a:effectLst/>
+        </p:spPr>
+        <p:style>
+          <a:lnRef idx="2">
+            <a:schemeClr val="accent1"/>
+          </a:lnRef>
+          <a:fillRef idx="0">
+            <a:schemeClr val="accent1"/>
+          </a:fillRef>
+          <a:effectRef idx="1">
+            <a:schemeClr val="accent1"/>
+          </a:effectRef>
+          <a:fontRef idx="minor">
+            <a:schemeClr val="tx1"/>
+          </a:fontRef>
+        </p:style>
+      </p:cxnSp>
+      <p:sp>
+        <p:nvSpPr>
+          <p:cNvPr id="30" name="Rounded Rectangle 29"/>
+          <p:cNvSpPr/>
+          <p:nvPr/>
+        </p:nvSpPr>
+        <p:spPr>
+          <a:xfrm>
+            <a:off x="8701887" y="3419856"/>
+            <a:ext cx="2355951" cy="384048"/>
+          </a:xfrm>
+          <a:prstGeom prst="roundRect">
+            <a:avLst>
+              <a:gd name="adj" fmla="val 12000"/>
+            </a:avLst>
+          </a:prstGeom>
+          <a:solidFill>
+            <a:srgbClr val="FFFFFF"/>
+          </a:solidFill>
+          <a:ln w="13970">
+            <a:solidFill>
+              <a:srgbClr val="C9D6E5"/>
+            </a:solidFill>
+          </a:ln>
+          <a:effectLst/>
+        </p:spPr>
+        <p:style>
+          <a:lnRef idx="1">
+            <a:schemeClr val="accent1"/>
+          </a:lnRef>
+          <a:fillRef idx="3">
+            <a:schemeClr val="accent1"/>
+          </a:fillRef>
+          <a:effectRef idx="2">
+            <a:schemeClr val="accent1"/>
+          </a:effectRef>
+          <a:fontRef idx="minor">
+            <a:schemeClr val="lt1"/>
+          </a:fontRef>
+        </p:style>
+        <p:txBody>
+          <a:bodyPr rtlCol="0" anchor="ctr" wrap="square" lIns="54864" rIns="54864" tIns="18288" bIns="18288"/>
+          <a:lstStyle/>
+          <a:p>
+            <a:pPr algn="ctr">
+              <a:lnSpc>
+                <a:spcPct val="100000"/>
+              </a:lnSpc>
+            </a:pPr>
+            <a:r>
+              <a:rPr sz="1100" b="0" i="0">
                 <a:solidFill>
                   <a:srgbClr val="26303A"/>
                 </a:solidFill>
                 <a:latin typeface="Meiryo"/>
                 <a:ea typeface="Meiryo"/>
               </a:rPr>
-              <a:t>（2 親の染色体を組み替え）→ </a:t>
-            </a:r>
-            <a:r>
-              <a:rPr sz="1400" b="1" i="0">
-                <a:solidFill>
-                  <a:srgbClr val="0F5C28"/>
-                </a:solidFill>
-                <a:latin typeface="Meiryo"/>
-                <a:ea typeface="Meiryo"/>
-              </a:rPr>
               <a:t>突然変異</a:t>
             </a:r>
-            <a:r>
-              <a:rPr sz="1400" b="0" i="0">
+          </a:p>
+        </p:txBody>
+      </p:sp>
+      <p:cxnSp>
+        <p:nvCxnSpPr>
+          <p:cNvPr id="31" name="Connector 30"/>
+          <p:cNvCxnSpPr/>
+          <p:nvPr/>
+        </p:nvCxnSpPr>
+        <p:spPr>
+          <a:xfrm>
+            <a:off x="9879863" y="3255264"/>
+            <a:ext cx="0" cy="146304"/>
+          </a:xfrm>
+          <a:prstGeom prst="line">
+            <a:avLst/>
+          </a:prstGeom>
+          <a:ln w="17780">
+            <a:solidFill>
+              <a:srgbClr val="6E7A88"/>
+            </a:solidFill>
+            <a:tailEnd type="triangle" w="med" len="med"/>
+          </a:ln>
+          <a:effectLst/>
+        </p:spPr>
+        <p:style>
+          <a:lnRef idx="2">
+            <a:schemeClr val="accent1"/>
+          </a:lnRef>
+          <a:fillRef idx="0">
+            <a:schemeClr val="accent1"/>
+          </a:fillRef>
+          <a:effectRef idx="1">
+            <a:schemeClr val="accent1"/>
+          </a:effectRef>
+          <a:fontRef idx="minor">
+            <a:schemeClr val="tx1"/>
+          </a:fontRef>
+        </p:style>
+      </p:cxnSp>
+      <p:sp>
+        <p:nvSpPr>
+          <p:cNvPr id="32" name="Rounded Rectangle 31"/>
+          <p:cNvSpPr/>
+          <p:nvPr/>
+        </p:nvSpPr>
+        <p:spPr>
+          <a:xfrm>
+            <a:off x="8701887" y="3986783"/>
+            <a:ext cx="2355951" cy="384048"/>
+          </a:xfrm>
+          <a:prstGeom prst="roundRect">
+            <a:avLst>
+              <a:gd name="adj" fmla="val 12000"/>
+            </a:avLst>
+          </a:prstGeom>
+          <a:solidFill>
+            <a:srgbClr val="EDF2F7"/>
+          </a:solidFill>
+          <a:ln w="13970">
+            <a:solidFill>
+              <a:srgbClr val="C9D6E5"/>
+            </a:solidFill>
+          </a:ln>
+          <a:effectLst/>
+        </p:spPr>
+        <p:style>
+          <a:lnRef idx="1">
+            <a:schemeClr val="accent1"/>
+          </a:lnRef>
+          <a:fillRef idx="3">
+            <a:schemeClr val="accent1"/>
+          </a:fillRef>
+          <a:effectRef idx="2">
+            <a:schemeClr val="accent1"/>
+          </a:effectRef>
+          <a:fontRef idx="minor">
+            <a:schemeClr val="lt1"/>
+          </a:fontRef>
+        </p:style>
+        <p:txBody>
+          <a:bodyPr rtlCol="0" anchor="ctr" wrap="square" lIns="54864" rIns="54864" tIns="18288" bIns="18288"/>
+          <a:lstStyle/>
+          <a:p>
+            <a:pPr algn="ctr">
+              <a:lnSpc>
+                <a:spcPct val="100000"/>
+              </a:lnSpc>
+            </a:pPr>
+            <a:r>
+              <a:rPr sz="1100" b="0" i="0">
                 <a:solidFill>
                   <a:srgbClr val="26303A"/>
                 </a:solidFill>
                 <a:latin typeface="Meiryo"/>
                 <a:ea typeface="Meiryo"/>
               </a:rPr>
-              <a:t> → </a:t>
-            </a:r>
-            <a:r>
-              <a:rPr sz="1400" b="1" i="0">
-                <a:solidFill>
-                  <a:srgbClr val="0F5C28"/>
-                </a:solidFill>
-                <a:latin typeface="Meiryo"/>
-                <a:ea typeface="Meiryo"/>
-              </a:rPr>
-              <a:t>局所探索</a:t>
-            </a:r>
-            <a:r>
-              <a:rPr sz="1400" b="0" i="0">
-                <a:solidFill>
-                  <a:srgbClr val="26303A"/>
-                </a:solidFill>
-                <a:latin typeface="Meiryo"/>
-                <a:ea typeface="Meiryo"/>
-              </a:rPr>
-              <a:t>（N5 近傍，各個体）→ 世代交代して反復</a:t>
-            </a:r>
-          </a:p>
-        </p:txBody>
-      </p:sp>
-      <p:sp>
-        <p:nvSpPr>
-          <p:cNvPr id="18" name="TextBox 17"/>
+              <a:t>局所探索：N5 近傍（各個体）</a:t>
+            </a:r>
+          </a:p>
+        </p:txBody>
+      </p:sp>
+      <p:cxnSp>
+        <p:nvCxnSpPr>
+          <p:cNvPr id="33" name="Connector 32"/>
+          <p:cNvCxnSpPr/>
+          <p:nvPr/>
+        </p:nvCxnSpPr>
+        <p:spPr>
+          <a:xfrm>
+            <a:off x="9879863" y="3822191"/>
+            <a:ext cx="0" cy="146305"/>
+          </a:xfrm>
+          <a:prstGeom prst="line">
+            <a:avLst/>
+          </a:prstGeom>
+          <a:ln w="17780">
+            <a:solidFill>
+              <a:srgbClr val="6E7A88"/>
+            </a:solidFill>
+            <a:tailEnd type="triangle" w="med" len="med"/>
+          </a:ln>
+          <a:effectLst/>
+        </p:spPr>
+        <p:style>
+          <a:lnRef idx="2">
+            <a:schemeClr val="accent1"/>
+          </a:lnRef>
+          <a:fillRef idx="0">
+            <a:schemeClr val="accent1"/>
+          </a:fillRef>
+          <a:effectRef idx="1">
+            <a:schemeClr val="accent1"/>
+          </a:effectRef>
+          <a:fontRef idx="minor">
+            <a:schemeClr val="tx1"/>
+          </a:fontRef>
+        </p:style>
+      </p:cxnSp>
+      <p:cxnSp>
+        <p:nvCxnSpPr>
+          <p:cNvPr id="34" name="Connector 33"/>
+          <p:cNvCxnSpPr/>
+          <p:nvPr/>
+        </p:nvCxnSpPr>
+        <p:spPr>
+          <a:xfrm>
+            <a:off x="11076127" y="4178807"/>
+            <a:ext cx="237744" cy="0"/>
+          </a:xfrm>
+          <a:prstGeom prst="line">
+            <a:avLst/>
+          </a:prstGeom>
+          <a:ln w="17780">
+            <a:solidFill>
+              <a:srgbClr val="6E7A88"/>
+            </a:solidFill>
+          </a:ln>
+          <a:effectLst/>
+        </p:spPr>
+        <p:style>
+          <a:lnRef idx="2">
+            <a:schemeClr val="accent1"/>
+          </a:lnRef>
+          <a:fillRef idx="0">
+            <a:schemeClr val="accent1"/>
+          </a:fillRef>
+          <a:effectRef idx="1">
+            <a:schemeClr val="accent1"/>
+          </a:effectRef>
+          <a:fontRef idx="minor">
+            <a:schemeClr val="tx1"/>
+          </a:fontRef>
+        </p:style>
+      </p:cxnSp>
+      <p:cxnSp>
+        <p:nvCxnSpPr>
+          <p:cNvPr id="35" name="Connector 34"/>
+          <p:cNvCxnSpPr/>
+          <p:nvPr/>
+        </p:nvCxnSpPr>
+        <p:spPr>
+          <a:xfrm flipV="1">
+            <a:off x="11313871" y="3044952"/>
+            <a:ext cx="0" cy="1133855"/>
+          </a:xfrm>
+          <a:prstGeom prst="line">
+            <a:avLst/>
+          </a:prstGeom>
+          <a:ln w="17780">
+            <a:solidFill>
+              <a:srgbClr val="6E7A88"/>
+            </a:solidFill>
+          </a:ln>
+          <a:effectLst/>
+        </p:spPr>
+        <p:style>
+          <a:lnRef idx="2">
+            <a:schemeClr val="accent1"/>
+          </a:lnRef>
+          <a:fillRef idx="0">
+            <a:schemeClr val="accent1"/>
+          </a:fillRef>
+          <a:effectRef idx="1">
+            <a:schemeClr val="accent1"/>
+          </a:effectRef>
+          <a:fontRef idx="minor">
+            <a:schemeClr val="tx1"/>
+          </a:fontRef>
+        </p:style>
+      </p:cxnSp>
+      <p:cxnSp>
+        <p:nvCxnSpPr>
+          <p:cNvPr id="36" name="Connector 35"/>
+          <p:cNvCxnSpPr/>
+          <p:nvPr/>
+        </p:nvCxnSpPr>
+        <p:spPr>
+          <a:xfrm flipH="1">
+            <a:off x="11094415" y="3044952"/>
+            <a:ext cx="219456" cy="0"/>
+          </a:xfrm>
+          <a:prstGeom prst="line">
+            <a:avLst/>
+          </a:prstGeom>
+          <a:ln w="17780">
+            <a:solidFill>
+              <a:srgbClr val="6E7A88"/>
+            </a:solidFill>
+            <a:tailEnd type="triangle" w="med" len="med"/>
+          </a:ln>
+          <a:effectLst/>
+        </p:spPr>
+        <p:style>
+          <a:lnRef idx="2">
+            <a:schemeClr val="accent1"/>
+          </a:lnRef>
+          <a:fillRef idx="0">
+            <a:schemeClr val="accent1"/>
+          </a:fillRef>
+          <a:effectRef idx="1">
+            <a:schemeClr val="accent1"/>
+          </a:effectRef>
+          <a:fontRef idx="minor">
+            <a:schemeClr val="tx1"/>
+          </a:fontRef>
+        </p:style>
+      </p:cxnSp>
+      <p:sp>
+        <p:nvSpPr>
+          <p:cNvPr id="37" name="TextBox 36"/>
           <p:cNvSpPr txBox="1"/>
           <p:nvPr/>
         </p:nvSpPr>
         <p:spPr>
           <a:xfrm>
-            <a:off x="6711696" y="5020056"/>
-            <a:ext cx="4711903" cy="365760"/>
+            <a:off x="11387023" y="3428999"/>
+            <a:ext cx="640080" cy="365760"/>
           </a:xfrm>
           <a:prstGeom prst="rect">
             <a:avLst/>
@@ -6380,13 +7105,53 @@
               </a:lnSpc>
             </a:pPr>
             <a:r>
-              <a:rPr sz="1150" b="0" i="0">
+              <a:rPr sz="1100" b="0" i="0">
                 <a:solidFill>
                   <a:srgbClr val="6E7A88"/>
                 </a:solidFill>
                 <a:latin typeface="Meiryo"/>
                 <a:ea typeface="Meiryo"/>
               </a:rPr>
+              <a:t>世代交代</a:t>
+            </a:r>
+          </a:p>
+        </p:txBody>
+      </p:sp>
+      <p:sp>
+        <p:nvSpPr>
+          <p:cNvPr id="38" name="TextBox 37"/>
+          <p:cNvSpPr txBox="1"/>
+          <p:nvPr/>
+        </p:nvSpPr>
+        <p:spPr>
+          <a:xfrm>
+            <a:off x="8610447" y="5074920"/>
+            <a:ext cx="3014319" cy="457200"/>
+          </a:xfrm>
+          <a:prstGeom prst="rect">
+            <a:avLst/>
+          </a:prstGeom>
+          <a:noFill/>
+        </p:spPr>
+        <p:txBody>
+          <a:bodyPr wrap="square" anchor="t" lIns="18288" rIns="18288" tIns="9144" bIns="9144">
+            <a:spAutoFit/>
+          </a:bodyPr>
+          <a:lstStyle/>
+          <a:p>
+            <a:pPr algn="l">
+              <a:lnSpc>
+                <a:spcPct val="110000"/>
+              </a:lnSpc>
+            </a:pPr>
+            <a:r>
+              <a:rPr sz="1050" b="0" i="0">
+                <a:solidFill>
+                  <a:srgbClr val="6E7A88"/>
+                </a:solidFill>
+                <a:latin typeface="Meiryo"/>
+                <a:ea typeface="Meiryo"/>
+              </a:rPr>
               <a:t>選定理由：先行研究で標準的な，GA に局所探索を組み込んだ構成</a:t>
             </a:r>
           </a:p>
@@ -6394,7 +7159,7 @@
       </p:sp>
       <p:sp>
         <p:nvSpPr>
-          <p:cNvPr id="19" name="Rounded Rectangle 18"/>
+          <p:cNvPr id="39" name="Rounded Rectangle 38"/>
           <p:cNvSpPr/>
           <p:nvPr/>
         </p:nvSpPr>
@@ -31104,54 +31869,14 @@
       </p:sp>
       <p:sp>
         <p:nvSpPr>
-          <p:cNvPr id="8" name="TextBox 7"/>
-          <p:cNvSpPr txBox="1"/>
-          <p:nvPr/>
-        </p:nvSpPr>
-        <p:spPr>
-          <a:xfrm>
-            <a:off x="612648" y="1572768"/>
-            <a:ext cx="5391759" cy="365760"/>
-          </a:xfrm>
-          <a:prstGeom prst="rect">
-            <a:avLst/>
-          </a:prstGeom>
-          <a:noFill/>
-        </p:spPr>
-        <p:txBody>
-          <a:bodyPr wrap="square" anchor="ctr" lIns="18288" rIns="18288" tIns="9144" bIns="9144">
-            <a:spAutoFit/>
-          </a:bodyPr>
-          <a:lstStyle/>
-          <a:p>
-            <a:pPr algn="l">
-              <a:lnSpc>
-                <a:spcPct val="105000"/>
-              </a:lnSpc>
-            </a:pPr>
-            <a:r>
-              <a:rPr sz="1500" b="1" i="0">
-                <a:solidFill>
-                  <a:srgbClr val="16385C"/>
-                </a:solidFill>
-                <a:latin typeface="Meiryo"/>
-                <a:ea typeface="Meiryo"/>
-              </a:rPr>
-              <a:t>仮説 1</a:t>
-            </a:r>
-          </a:p>
-        </p:txBody>
-      </p:sp>
-      <p:sp>
-        <p:nvSpPr>
-          <p:cNvPr id="9" name="Rounded Rectangle 8"/>
+          <p:cNvPr id="8" name="Rounded Rectangle 7"/>
           <p:cNvSpPr/>
           <p:nvPr/>
         </p:nvSpPr>
         <p:spPr>
           <a:xfrm>
-            <a:off x="566928" y="1920240"/>
-            <a:ext cx="5391759" cy="1371600"/>
+            <a:off x="566928" y="1755648"/>
+            <a:ext cx="5391759" cy="1261872"/>
           </a:xfrm>
           <a:prstGeom prst="roundRect">
             <a:avLst>
@@ -31190,14 +31915,76 @@
       </p:sp>
       <p:sp>
         <p:nvSpPr>
+          <p:cNvPr id="9" name="Rounded Rectangle 8"/>
+          <p:cNvSpPr/>
+          <p:nvPr/>
+        </p:nvSpPr>
+        <p:spPr>
+          <a:xfrm>
+            <a:off x="731520" y="1581912"/>
+            <a:ext cx="960120" cy="347472"/>
+          </a:xfrm>
+          <a:prstGeom prst="roundRect">
+            <a:avLst>
+              <a:gd name="adj" fmla="val 40000"/>
+            </a:avLst>
+          </a:prstGeom>
+          <a:solidFill>
+            <a:srgbClr val="16385C"/>
+          </a:solidFill>
+          <a:ln w="13970">
+            <a:solidFill>
+              <a:srgbClr val="FFFFFF"/>
+            </a:solidFill>
+          </a:ln>
+          <a:effectLst/>
+        </p:spPr>
+        <p:style>
+          <a:lnRef idx="1">
+            <a:schemeClr val="accent1"/>
+          </a:lnRef>
+          <a:fillRef idx="3">
+            <a:schemeClr val="accent1"/>
+          </a:fillRef>
+          <a:effectRef idx="2">
+            <a:schemeClr val="accent1"/>
+          </a:effectRef>
+          <a:fontRef idx="minor">
+            <a:schemeClr val="lt1"/>
+          </a:fontRef>
+        </p:style>
+        <p:txBody>
+          <a:bodyPr rtlCol="0" anchor="ctr" wrap="square" lIns="54864" rIns="54864" tIns="18288" bIns="18288"/>
+          <a:lstStyle/>
+          <a:p>
+            <a:pPr algn="ctr">
+              <a:lnSpc>
+                <a:spcPct val="100000"/>
+              </a:lnSpc>
+            </a:pPr>
+            <a:r>
+              <a:rPr sz="1250" b="1" i="0">
+                <a:solidFill>
+                  <a:srgbClr val="FFFFFF"/>
+                </a:solidFill>
+                <a:latin typeface="Meiryo"/>
+                <a:ea typeface="Meiryo"/>
+              </a:rPr>
+              <a:t>仮説 1</a:t>
+            </a:r>
+          </a:p>
+        </p:txBody>
+      </p:sp>
+      <p:sp>
+        <p:nvSpPr>
           <p:cNvPr id="10" name="TextBox 9"/>
           <p:cNvSpPr txBox="1"/>
           <p:nvPr/>
         </p:nvSpPr>
         <p:spPr>
           <a:xfrm>
-            <a:off x="713232" y="1965960"/>
-            <a:ext cx="5099151" cy="1280160"/>
+            <a:off x="713232" y="1883664"/>
+            <a:ext cx="5099151" cy="1078992"/>
           </a:xfrm>
           <a:prstGeom prst="rect">
             <a:avLst/>
@@ -31385,8 +32172,8 @@
         </p:blipFill>
         <p:spPr>
           <a:xfrm>
-            <a:off x="1261689" y="3383280"/>
-            <a:ext cx="4002237" cy="2633472"/>
+            <a:off x="914272" y="3090672"/>
+            <a:ext cx="4697069" cy="3090672"/>
           </a:xfrm>
           <a:prstGeom prst="rect">
             <a:avLst/>
@@ -31395,54 +32182,14 @@
       </p:pic>
       <p:sp>
         <p:nvSpPr>
-          <p:cNvPr id="12" name="TextBox 11"/>
-          <p:cNvSpPr txBox="1"/>
-          <p:nvPr/>
-        </p:nvSpPr>
-        <p:spPr>
-          <a:xfrm>
-            <a:off x="6278727" y="1572768"/>
-            <a:ext cx="5391759" cy="365760"/>
-          </a:xfrm>
-          <a:prstGeom prst="rect">
-            <a:avLst/>
-          </a:prstGeom>
-          <a:noFill/>
-        </p:spPr>
-        <p:txBody>
-          <a:bodyPr wrap="square" anchor="ctr" lIns="18288" rIns="18288" tIns="9144" bIns="9144">
-            <a:spAutoFit/>
-          </a:bodyPr>
-          <a:lstStyle/>
-          <a:p>
-            <a:pPr algn="l">
-              <a:lnSpc>
-                <a:spcPct val="105000"/>
-              </a:lnSpc>
-            </a:pPr>
-            <a:r>
-              <a:rPr sz="1500" b="1" i="0">
-                <a:solidFill>
-                  <a:srgbClr val="16385C"/>
-                </a:solidFill>
-                <a:latin typeface="Meiryo"/>
-                <a:ea typeface="Meiryo"/>
-              </a:rPr>
-              <a:t>仮説 2</a:t>
-            </a:r>
-          </a:p>
-        </p:txBody>
-      </p:sp>
-      <p:sp>
-        <p:nvSpPr>
-          <p:cNvPr id="13" name="Rounded Rectangle 12"/>
+          <p:cNvPr id="12" name="Rounded Rectangle 11"/>
           <p:cNvSpPr/>
           <p:nvPr/>
         </p:nvSpPr>
         <p:spPr>
           <a:xfrm>
-            <a:off x="6233007" y="1920240"/>
-            <a:ext cx="5391759" cy="1371600"/>
+            <a:off x="6233007" y="1755648"/>
+            <a:ext cx="5391759" cy="1261872"/>
           </a:xfrm>
           <a:prstGeom prst="roundRect">
             <a:avLst>
@@ -31481,14 +32228,76 @@
       </p:sp>
       <p:sp>
         <p:nvSpPr>
+          <p:cNvPr id="13" name="Rounded Rectangle 12"/>
+          <p:cNvSpPr/>
+          <p:nvPr/>
+        </p:nvSpPr>
+        <p:spPr>
+          <a:xfrm>
+            <a:off x="6397599" y="1581912"/>
+            <a:ext cx="960120" cy="347472"/>
+          </a:xfrm>
+          <a:prstGeom prst="roundRect">
+            <a:avLst>
+              <a:gd name="adj" fmla="val 40000"/>
+            </a:avLst>
+          </a:prstGeom>
+          <a:solidFill>
+            <a:srgbClr val="2E1A0E"/>
+          </a:solidFill>
+          <a:ln w="13970">
+            <a:solidFill>
+              <a:srgbClr val="FFFFFF"/>
+            </a:solidFill>
+          </a:ln>
+          <a:effectLst/>
+        </p:spPr>
+        <p:style>
+          <a:lnRef idx="1">
+            <a:schemeClr val="accent1"/>
+          </a:lnRef>
+          <a:fillRef idx="3">
+            <a:schemeClr val="accent1"/>
+          </a:fillRef>
+          <a:effectRef idx="2">
+            <a:schemeClr val="accent1"/>
+          </a:effectRef>
+          <a:fontRef idx="minor">
+            <a:schemeClr val="lt1"/>
+          </a:fontRef>
+        </p:style>
+        <p:txBody>
+          <a:bodyPr rtlCol="0" anchor="ctr" wrap="square" lIns="54864" rIns="54864" tIns="18288" bIns="18288"/>
+          <a:lstStyle/>
+          <a:p>
+            <a:pPr algn="ctr">
+              <a:lnSpc>
+                <a:spcPct val="100000"/>
+              </a:lnSpc>
+            </a:pPr>
+            <a:r>
+              <a:rPr sz="1250" b="1" i="0">
+                <a:solidFill>
+                  <a:srgbClr val="FFFFFF"/>
+                </a:solidFill>
+                <a:latin typeface="Meiryo"/>
+                <a:ea typeface="Meiryo"/>
+              </a:rPr>
+              <a:t>仮説 2</a:t>
+            </a:r>
+          </a:p>
+        </p:txBody>
+      </p:sp>
+      <p:sp>
+        <p:nvSpPr>
           <p:cNvPr id="14" name="TextBox 13"/>
           <p:cNvSpPr txBox="1"/>
           <p:nvPr/>
         </p:nvSpPr>
         <p:spPr>
           <a:xfrm>
-            <a:off x="6379311" y="1965960"/>
-            <a:ext cx="5099151" cy="1280160"/>
+            <a:off x="6379311" y="1883664"/>
+            <a:ext cx="5099151" cy="1078992"/>
           </a:xfrm>
           <a:prstGeom prst="rect">
             <a:avLst/>
@@ -31636,8 +32445,8 @@
         </p:blipFill>
         <p:spPr>
           <a:xfrm>
-            <a:off x="6927768" y="3383280"/>
-            <a:ext cx="4002237" cy="2633472"/>
+            <a:off x="6580352" y="3090672"/>
+            <a:ext cx="4697069" cy="3090672"/>
           </a:xfrm>
           <a:prstGeom prst="rect">
             <a:avLst/>
@@ -31652,8 +32461,8 @@
         </p:nvSpPr>
         <p:spPr>
           <a:xfrm>
-            <a:off x="566928" y="6071616"/>
-            <a:ext cx="11057839" cy="292608"/>
+            <a:off x="566928" y="6199632"/>
+            <a:ext cx="11057839" cy="219456"/>
           </a:xfrm>
           <a:prstGeom prst="rect">
             <a:avLst/>
@@ -31672,7 +32481,7 @@
               </a:lnSpc>
             </a:pPr>
             <a:r>
-              <a:rPr sz="1250" b="0" i="0">
+              <a:rPr sz="1150" b="0" i="0">
                 <a:solidFill>
                   <a:srgbClr val="6E7A88"/>
                 </a:solidFill>

--- a/doc/presentation_materials/JIMA2026fall_発表.pptx
+++ b/doc/presentation_materials/JIMA2026fall_発表.pptx
@@ -5730,8 +5730,8 @@
         </p:blipFill>
         <p:spPr>
           <a:xfrm>
-            <a:off x="521207" y="1755648"/>
-            <a:ext cx="4480560" cy="2948208"/>
+            <a:off x="521207" y="1783080"/>
+            <a:ext cx="4023360" cy="2647370"/>
           </a:xfrm>
           <a:prstGeom prst="rect">
             <a:avLst/>
@@ -5740,17 +5740,19 @@
       </p:pic>
       <p:sp>
         <p:nvSpPr>
-          <p:cNvPr id="9" name="Rectangle 8"/>
+          <p:cNvPr id="9" name="Rounded Rectangle 8"/>
           <p:cNvSpPr/>
           <p:nvPr/>
         </p:nvSpPr>
         <p:spPr>
           <a:xfrm>
-            <a:off x="5321808" y="1737360"/>
-            <a:ext cx="3014319" cy="384048"/>
-          </a:xfrm>
-          <a:prstGeom prst="rect">
-            <a:avLst/>
+            <a:off x="658368" y="4659050"/>
+            <a:ext cx="128016" cy="201168"/>
+          </a:xfrm>
+          <a:prstGeom prst="roundRect">
+            <a:avLst>
+              <a:gd name="adj" fmla="val 4000"/>
+            </a:avLst>
           </a:prstGeom>
           <a:solidFill>
             <a:srgbClr val="E06C00"/>
@@ -5784,14 +5786,60 @@
       </p:sp>
       <p:sp>
         <p:nvSpPr>
-          <p:cNvPr id="10" name="TextBox 9"/>
+          <p:cNvPr id="10" name="Rounded Rectangle 9"/>
+          <p:cNvSpPr/>
+          <p:nvPr/>
+        </p:nvSpPr>
+        <p:spPr>
+          <a:xfrm>
+            <a:off x="795528" y="4659050"/>
+            <a:ext cx="128016" cy="201168"/>
+          </a:xfrm>
+          <a:prstGeom prst="roundRect">
+            <a:avLst>
+              <a:gd name="adj" fmla="val 4000"/>
+            </a:avLst>
+          </a:prstGeom>
+          <a:solidFill>
+            <a:srgbClr val="0F5C28"/>
+          </a:solidFill>
+          <a:ln>
+            <a:noFill/>
+          </a:ln>
+          <a:effectLst/>
+        </p:spPr>
+        <p:style>
+          <a:lnRef idx="1">
+            <a:schemeClr val="accent1"/>
+          </a:lnRef>
+          <a:fillRef idx="3">
+            <a:schemeClr val="accent1"/>
+          </a:fillRef>
+          <a:effectRef idx="2">
+            <a:schemeClr val="accent1"/>
+          </a:effectRef>
+          <a:fontRef idx="minor">
+            <a:schemeClr val="lt1"/>
+          </a:fontRef>
+        </p:style>
+        <p:txBody>
+          <a:bodyPr rtlCol="0" anchor="ctr"/>
+          <a:lstStyle/>
+          <a:p>
+            <a:pPr algn="ctr"/>
+          </a:p>
+        </p:txBody>
+      </p:sp>
+      <p:sp>
+        <p:nvSpPr>
+          <p:cNvPr id="11" name="TextBox 10"/>
           <p:cNvSpPr txBox="1"/>
           <p:nvPr/>
         </p:nvSpPr>
         <p:spPr>
           <a:xfrm>
-            <a:off x="5458968" y="1737360"/>
-            <a:ext cx="2739999" cy="384048"/>
+            <a:off x="1024128" y="4613330"/>
+            <a:ext cx="3474720" cy="292608"/>
           </a:xfrm>
           <a:prstGeom prst="rect">
             <a:avLst/>
@@ -5804,33 +5852,174 @@
           </a:bodyPr>
           <a:lstStyle/>
           <a:p>
-            <a:r>
-              <a:rPr sz="1350" b="1" i="0">
-                <a:solidFill>
-                  <a:srgbClr val="FFFFFF"/>
-                </a:solidFill>
-                <a:latin typeface="Meiryo"/>
-                <a:ea typeface="Meiryo"/>
-              </a:rPr>
-              <a:t>単点探索（ILS）</a:t>
-            </a:r>
-          </a:p>
-        </p:txBody>
-      </p:sp>
-      <p:sp>
-        <p:nvSpPr>
-          <p:cNvPr id="11" name="Rounded Rectangle 10"/>
+            <a:pPr algn="l">
+              <a:lnSpc>
+                <a:spcPct val="105000"/>
+              </a:lnSpc>
+            </a:pPr>
+            <a:r>
+              <a:rPr sz="1100" b="0" i="0">
+                <a:solidFill>
+                  <a:srgbClr val="6E7A88"/>
+                </a:solidFill>
+                <a:latin typeface="Meiryo"/>
+                <a:ea typeface="Meiryo"/>
+              </a:rPr>
+              <a:t>解を作る操作（ここが 2 構造の差）</a:t>
+            </a:r>
+          </a:p>
+        </p:txBody>
+      </p:sp>
+      <p:sp>
+        <p:nvSpPr>
+          <p:cNvPr id="12" name="Rounded Rectangle 11"/>
           <p:cNvSpPr/>
           <p:nvPr/>
         </p:nvSpPr>
         <p:spPr>
           <a:xfrm>
-            <a:off x="5413248" y="2286000"/>
-            <a:ext cx="2355951" cy="384048"/>
+            <a:off x="658368" y="4969946"/>
+            <a:ext cx="128016" cy="201168"/>
           </a:xfrm>
           <a:prstGeom prst="roundRect">
             <a:avLst>
-              <a:gd name="adj" fmla="val 12000"/>
+              <a:gd name="adj" fmla="val 4000"/>
+            </a:avLst>
+          </a:prstGeom>
+          <a:solidFill>
+            <a:srgbClr val="EDF2F7"/>
+          </a:solidFill>
+          <a:ln w="13970">
+            <a:solidFill>
+              <a:srgbClr val="C9D6E5"/>
+            </a:solidFill>
+          </a:ln>
+          <a:effectLst/>
+        </p:spPr>
+        <p:style>
+          <a:lnRef idx="1">
+            <a:schemeClr val="accent1"/>
+          </a:lnRef>
+          <a:fillRef idx="3">
+            <a:schemeClr val="accent1"/>
+          </a:fillRef>
+          <a:effectRef idx="2">
+            <a:schemeClr val="accent1"/>
+          </a:effectRef>
+          <a:fontRef idx="minor">
+            <a:schemeClr val="lt1"/>
+          </a:fontRef>
+        </p:style>
+        <p:txBody>
+          <a:bodyPr rtlCol="0" anchor="ctr"/>
+          <a:lstStyle/>
+          <a:p>
+            <a:pPr algn="ctr"/>
+          </a:p>
+        </p:txBody>
+      </p:sp>
+      <p:sp>
+        <p:nvSpPr>
+          <p:cNvPr id="13" name="Rounded Rectangle 12"/>
+          <p:cNvSpPr/>
+          <p:nvPr/>
+        </p:nvSpPr>
+        <p:spPr>
+          <a:xfrm>
+            <a:off x="795528" y="4969946"/>
+            <a:ext cx="128016" cy="201168"/>
+          </a:xfrm>
+          <a:prstGeom prst="roundRect">
+            <a:avLst>
+              <a:gd name="adj" fmla="val 4000"/>
+            </a:avLst>
+          </a:prstGeom>
+          <a:solidFill>
+            <a:srgbClr val="EDF2F7"/>
+          </a:solidFill>
+          <a:ln w="13970">
+            <a:solidFill>
+              <a:srgbClr val="C9D6E5"/>
+            </a:solidFill>
+          </a:ln>
+          <a:effectLst/>
+        </p:spPr>
+        <p:style>
+          <a:lnRef idx="1">
+            <a:schemeClr val="accent1"/>
+          </a:lnRef>
+          <a:fillRef idx="3">
+            <a:schemeClr val="accent1"/>
+          </a:fillRef>
+          <a:effectRef idx="2">
+            <a:schemeClr val="accent1"/>
+          </a:effectRef>
+          <a:fontRef idx="minor">
+            <a:schemeClr val="lt1"/>
+          </a:fontRef>
+        </p:style>
+        <p:txBody>
+          <a:bodyPr rtlCol="0" anchor="ctr"/>
+          <a:lstStyle/>
+          <a:p>
+            <a:pPr algn="ctr"/>
+          </a:p>
+        </p:txBody>
+      </p:sp>
+      <p:sp>
+        <p:nvSpPr>
+          <p:cNvPr id="14" name="TextBox 13"/>
+          <p:cNvSpPr txBox="1"/>
+          <p:nvPr/>
+        </p:nvSpPr>
+        <p:spPr>
+          <a:xfrm>
+            <a:off x="1024128" y="4924226"/>
+            <a:ext cx="3474720" cy="292608"/>
+          </a:xfrm>
+          <a:prstGeom prst="rect">
+            <a:avLst/>
+          </a:prstGeom>
+          <a:noFill/>
+        </p:spPr>
+        <p:txBody>
+          <a:bodyPr wrap="square" anchor="ctr" lIns="18288" rIns="18288" tIns="9144" bIns="9144">
+            <a:spAutoFit/>
+          </a:bodyPr>
+          <a:lstStyle/>
+          <a:p>
+            <a:pPr algn="l">
+              <a:lnSpc>
+                <a:spcPct val="105000"/>
+              </a:lnSpc>
+            </a:pPr>
+            <a:r>
+              <a:rPr sz="1100" b="0" i="0">
+                <a:solidFill>
+                  <a:srgbClr val="6E7A88"/>
+                </a:solidFill>
+                <a:latin typeface="Meiryo"/>
+                <a:ea typeface="Meiryo"/>
+              </a:rPr>
+              <a:t>両者で揃えた局所探索</a:t>
+            </a:r>
+          </a:p>
+        </p:txBody>
+      </p:sp>
+      <p:sp>
+        <p:nvSpPr>
+          <p:cNvPr id="15" name="Rounded Rectangle 14"/>
+          <p:cNvSpPr/>
+          <p:nvPr/>
+        </p:nvSpPr>
+        <p:spPr>
+          <a:xfrm>
+            <a:off x="4864608" y="1737360"/>
+            <a:ext cx="3242919" cy="3886200"/>
+          </a:xfrm>
+          <a:prstGeom prst="roundRect">
+            <a:avLst>
+              <a:gd name="adj" fmla="val 5000"/>
             </a:avLst>
           </a:prstGeom>
           <a:solidFill>
@@ -5858,6 +6047,133 @@
           </a:fontRef>
         </p:style>
         <p:txBody>
+          <a:bodyPr rtlCol="0" anchor="ctr"/>
+          <a:lstStyle/>
+          <a:p>
+            <a:pPr algn="ctr"/>
+          </a:p>
+        </p:txBody>
+      </p:sp>
+      <p:sp>
+        <p:nvSpPr>
+          <p:cNvPr id="16" name="Rectangle 15"/>
+          <p:cNvSpPr/>
+          <p:nvPr/>
+        </p:nvSpPr>
+        <p:spPr>
+          <a:xfrm>
+            <a:off x="4864608" y="1737360"/>
+            <a:ext cx="3242919" cy="384048"/>
+          </a:xfrm>
+          <a:prstGeom prst="rect">
+            <a:avLst/>
+          </a:prstGeom>
+          <a:solidFill>
+            <a:srgbClr val="E06C00"/>
+          </a:solidFill>
+          <a:ln>
+            <a:noFill/>
+          </a:ln>
+          <a:effectLst/>
+        </p:spPr>
+        <p:style>
+          <a:lnRef idx="1">
+            <a:schemeClr val="accent1"/>
+          </a:lnRef>
+          <a:fillRef idx="3">
+            <a:schemeClr val="accent1"/>
+          </a:fillRef>
+          <a:effectRef idx="2">
+            <a:schemeClr val="accent1"/>
+          </a:effectRef>
+          <a:fontRef idx="minor">
+            <a:schemeClr val="lt1"/>
+          </a:fontRef>
+        </p:style>
+        <p:txBody>
+          <a:bodyPr rtlCol="0" anchor="ctr"/>
+          <a:lstStyle/>
+          <a:p>
+            <a:pPr algn="ctr"/>
+          </a:p>
+        </p:txBody>
+      </p:sp>
+      <p:sp>
+        <p:nvSpPr>
+          <p:cNvPr id="17" name="TextBox 16"/>
+          <p:cNvSpPr txBox="1"/>
+          <p:nvPr/>
+        </p:nvSpPr>
+        <p:spPr>
+          <a:xfrm>
+            <a:off x="5001768" y="1737360"/>
+            <a:ext cx="2968599" cy="384048"/>
+          </a:xfrm>
+          <a:prstGeom prst="rect">
+            <a:avLst/>
+          </a:prstGeom>
+          <a:noFill/>
+        </p:spPr>
+        <p:txBody>
+          <a:bodyPr wrap="square" anchor="ctr" lIns="18288" rIns="18288" tIns="9144" bIns="9144">
+            <a:spAutoFit/>
+          </a:bodyPr>
+          <a:lstStyle/>
+          <a:p>
+            <a:r>
+              <a:rPr sz="1350" b="1" i="0">
+                <a:solidFill>
+                  <a:srgbClr val="FFFFFF"/>
+                </a:solidFill>
+                <a:latin typeface="Meiryo"/>
+                <a:ea typeface="Meiryo"/>
+              </a:rPr>
+              <a:t>単点探索（ILS）</a:t>
+            </a:r>
+          </a:p>
+        </p:txBody>
+      </p:sp>
+      <p:sp>
+        <p:nvSpPr>
+          <p:cNvPr id="18" name="Rounded Rectangle 17"/>
+          <p:cNvSpPr/>
+          <p:nvPr/>
+        </p:nvSpPr>
+        <p:spPr>
+          <a:xfrm>
+            <a:off x="5001768" y="2286000"/>
+            <a:ext cx="2148840" cy="384048"/>
+          </a:xfrm>
+          <a:prstGeom prst="roundRect">
+            <a:avLst>
+              <a:gd name="adj" fmla="val 12000"/>
+            </a:avLst>
+          </a:prstGeom>
+          <a:solidFill>
+            <a:srgbClr val="FFFFFF"/>
+          </a:solidFill>
+          <a:ln w="13970">
+            <a:solidFill>
+              <a:srgbClr val="C9D6E5"/>
+            </a:solidFill>
+          </a:ln>
+          <a:effectLst/>
+        </p:spPr>
+        <p:style>
+          <a:lnRef idx="1">
+            <a:schemeClr val="accent1"/>
+          </a:lnRef>
+          <a:fillRef idx="3">
+            <a:schemeClr val="accent1"/>
+          </a:fillRef>
+          <a:effectRef idx="2">
+            <a:schemeClr val="accent1"/>
+          </a:effectRef>
+          <a:fontRef idx="minor">
+            <a:schemeClr val="lt1"/>
+          </a:fontRef>
+        </p:style>
+        <p:txBody>
           <a:bodyPr rtlCol="0" anchor="ctr" wrap="square" lIns="54864" rIns="54864" tIns="18288" bIns="18288"/>
           <a:lstStyle/>
           <a:p>
@@ -5867,7 +6183,7 @@
               </a:lnSpc>
             </a:pPr>
             <a:r>
-              <a:rPr sz="1100" b="0" i="0">
+              <a:rPr sz="1050" b="0" i="0">
                 <a:solidFill>
                   <a:srgbClr val="26303A"/>
                 </a:solidFill>
@@ -5877,7 +6193,7 @@
               <a:t>初期解：</a:t>
             </a:r>
             <a:r>
-              <a:rPr sz="1100" b="0" i="1">
+              <a:rPr sz="1050" b="0" i="1">
                 <a:solidFill>
                   <a:srgbClr val="26303A"/>
                 </a:solidFill>
@@ -5887,7 +6203,7 @@
               <a:t>S</a:t>
             </a:r>
             <a:r>
-              <a:rPr sz="792" b="0" i="1" baseline="-22000">
+              <a:rPr sz="756" b="0" i="1" baseline="-22000">
                 <a:solidFill>
                   <a:srgbClr val="26303A"/>
                 </a:solidFill>
@@ -5901,14 +6217,14 @@
       </p:sp>
       <p:sp>
         <p:nvSpPr>
-          <p:cNvPr id="12" name="Rounded Rectangle 11"/>
+          <p:cNvPr id="19" name="Rounded Rectangle 18"/>
           <p:cNvSpPr/>
           <p:nvPr/>
         </p:nvSpPr>
         <p:spPr>
           <a:xfrm>
-            <a:off x="5413248" y="2852928"/>
-            <a:ext cx="2355951" cy="384048"/>
+            <a:off x="5001768" y="2852928"/>
+            <a:ext cx="2148840" cy="384048"/>
           </a:xfrm>
           <a:prstGeom prst="roundRect">
             <a:avLst>
@@ -5949,7 +6265,7 @@
               </a:lnSpc>
             </a:pPr>
             <a:r>
-              <a:rPr sz="1100" b="0" i="0">
+              <a:rPr sz="1050" b="0" i="0">
                 <a:solidFill>
                   <a:srgbClr val="26303A"/>
                 </a:solidFill>
@@ -5963,13 +6279,13 @@
       </p:sp>
       <p:cxnSp>
         <p:nvCxnSpPr>
-          <p:cNvPr id="13" name="Connector 12"/>
+          <p:cNvPr id="20" name="Connector 19"/>
           <p:cNvCxnSpPr/>
           <p:nvPr/>
         </p:nvCxnSpPr>
         <p:spPr>
           <a:xfrm>
-            <a:off x="6591223" y="2688336"/>
+            <a:off x="6076188" y="2688336"/>
             <a:ext cx="0" cy="146304"/>
           </a:xfrm>
           <a:prstGeom prst="line">
@@ -6000,14 +6316,14 @@
       </p:cxnSp>
       <p:sp>
         <p:nvSpPr>
-          <p:cNvPr id="14" name="Rounded Rectangle 13"/>
+          <p:cNvPr id="21" name="Rounded Rectangle 20"/>
           <p:cNvSpPr/>
           <p:nvPr/>
         </p:nvSpPr>
         <p:spPr>
           <a:xfrm>
-            <a:off x="5413248" y="3419856"/>
-            <a:ext cx="2355951" cy="384048"/>
+            <a:off x="5001768" y="3419856"/>
+            <a:ext cx="2148840" cy="384048"/>
           </a:xfrm>
           <a:prstGeom prst="roundRect">
             <a:avLst>
@@ -6046,7 +6362,7 @@
               </a:lnSpc>
             </a:pPr>
             <a:r>
-              <a:rPr sz="1100" b="1" i="0">
+              <a:rPr sz="1050" b="1" i="0">
                 <a:solidFill>
                   <a:srgbClr val="FFFFFF"/>
                 </a:solidFill>
@@ -6060,13 +6376,13 @@
       </p:sp>
       <p:cxnSp>
         <p:nvCxnSpPr>
-          <p:cNvPr id="15" name="Connector 14"/>
+          <p:cNvPr id="22" name="Connector 21"/>
           <p:cNvCxnSpPr/>
           <p:nvPr/>
         </p:nvCxnSpPr>
         <p:spPr>
           <a:xfrm>
-            <a:off x="6591223" y="3255264"/>
+            <a:off x="6076188" y="3255264"/>
             <a:ext cx="0" cy="146304"/>
           </a:xfrm>
           <a:prstGeom prst="line">
@@ -6097,14 +6413,14 @@
       </p:cxnSp>
       <p:sp>
         <p:nvSpPr>
-          <p:cNvPr id="16" name="Rounded Rectangle 15"/>
+          <p:cNvPr id="23" name="Rounded Rectangle 22"/>
           <p:cNvSpPr/>
           <p:nvPr/>
         </p:nvSpPr>
         <p:spPr>
           <a:xfrm>
-            <a:off x="5413248" y="3986783"/>
-            <a:ext cx="2355951" cy="384048"/>
+            <a:off x="5001768" y="3986783"/>
+            <a:ext cx="2148840" cy="384048"/>
           </a:xfrm>
           <a:prstGeom prst="roundRect">
             <a:avLst>
@@ -6145,7 +6461,7 @@
               </a:lnSpc>
             </a:pPr>
             <a:r>
-              <a:rPr sz="1100" b="0" i="0">
+              <a:rPr sz="1050" b="0" i="0">
                 <a:solidFill>
                   <a:srgbClr val="26303A"/>
                 </a:solidFill>
@@ -6159,13 +6475,13 @@
       </p:sp>
       <p:cxnSp>
         <p:nvCxnSpPr>
-          <p:cNvPr id="17" name="Connector 16"/>
+          <p:cNvPr id="24" name="Connector 23"/>
           <p:cNvCxnSpPr/>
           <p:nvPr/>
         </p:nvCxnSpPr>
         <p:spPr>
           <a:xfrm>
-            <a:off x="6591223" y="3822191"/>
+            <a:off x="6076188" y="3822191"/>
             <a:ext cx="0" cy="146305"/>
           </a:xfrm>
           <a:prstGeom prst="line">
@@ -6196,14 +6512,14 @@
       </p:cxnSp>
       <p:sp>
         <p:nvSpPr>
-          <p:cNvPr id="18" name="Rounded Rectangle 17"/>
+          <p:cNvPr id="25" name="Rounded Rectangle 24"/>
           <p:cNvSpPr/>
           <p:nvPr/>
         </p:nvSpPr>
         <p:spPr>
           <a:xfrm>
-            <a:off x="5413248" y="4553712"/>
-            <a:ext cx="2355951" cy="384048"/>
+            <a:off x="5001768" y="4553712"/>
+            <a:ext cx="2148840" cy="384048"/>
           </a:xfrm>
           <a:prstGeom prst="roundRect">
             <a:avLst>
@@ -6244,7 +6560,7 @@
               </a:lnSpc>
             </a:pPr>
             <a:r>
-              <a:rPr sz="1100" b="0" i="0">
+              <a:rPr sz="1050" b="0" i="0">
                 <a:solidFill>
                   <a:srgbClr val="26303A"/>
                 </a:solidFill>
@@ -6254,7 +6570,7 @@
               <a:t>受理判定：</a:t>
             </a:r>
             <a:r>
-              <a:rPr sz="1100" b="0" i="1">
+              <a:rPr sz="1050" b="0" i="1">
                 <a:solidFill>
                   <a:srgbClr val="26303A"/>
                 </a:solidFill>
@@ -6264,7 +6580,7 @@
               <a:t>F</a:t>
             </a:r>
             <a:r>
-              <a:rPr sz="1100" b="0" i="0">
+              <a:rPr sz="1050" b="0" i="0">
                 <a:solidFill>
                   <a:srgbClr val="26303A"/>
                 </a:solidFill>
@@ -6278,13 +6594,13 @@
       </p:sp>
       <p:cxnSp>
         <p:nvCxnSpPr>
-          <p:cNvPr id="19" name="Connector 18"/>
+          <p:cNvPr id="26" name="Connector 25"/>
           <p:cNvCxnSpPr/>
           <p:nvPr/>
         </p:nvCxnSpPr>
         <p:spPr>
           <a:xfrm>
-            <a:off x="6591223" y="4389120"/>
+            <a:off x="6076188" y="4389120"/>
             <a:ext cx="0" cy="146304"/>
           </a:xfrm>
           <a:prstGeom prst="line">
@@ -6315,13 +6631,13 @@
       </p:cxnSp>
       <p:cxnSp>
         <p:nvCxnSpPr>
-          <p:cNvPr id="20" name="Connector 19"/>
+          <p:cNvPr id="27" name="Connector 26"/>
           <p:cNvCxnSpPr/>
           <p:nvPr/>
         </p:nvCxnSpPr>
         <p:spPr>
           <a:xfrm>
-            <a:off x="7787487" y="4745736"/>
+            <a:off x="7168896" y="4745736"/>
             <a:ext cx="237744" cy="0"/>
           </a:xfrm>
           <a:prstGeom prst="line">
@@ -6351,13 +6667,13 @@
       </p:cxnSp>
       <p:cxnSp>
         <p:nvCxnSpPr>
-          <p:cNvPr id="21" name="Connector 20"/>
+          <p:cNvPr id="28" name="Connector 27"/>
           <p:cNvCxnSpPr/>
           <p:nvPr/>
         </p:nvCxnSpPr>
         <p:spPr>
           <a:xfrm flipV="1">
-            <a:off x="8025231" y="3611880"/>
+            <a:off x="7406640" y="3611880"/>
             <a:ext cx="0" cy="1133856"/>
           </a:xfrm>
           <a:prstGeom prst="line">
@@ -6387,13 +6703,13 @@
       </p:cxnSp>
       <p:cxnSp>
         <p:nvCxnSpPr>
-          <p:cNvPr id="22" name="Connector 21"/>
+          <p:cNvPr id="29" name="Connector 28"/>
           <p:cNvCxnSpPr/>
           <p:nvPr/>
         </p:nvCxnSpPr>
         <p:spPr>
           <a:xfrm flipH="1">
-            <a:off x="7805775" y="3611880"/>
+            <a:off x="7187184" y="3611880"/>
             <a:ext cx="219456" cy="0"/>
           </a:xfrm>
           <a:prstGeom prst="line">
@@ -6424,14 +6740,14 @@
       </p:cxnSp>
       <p:sp>
         <p:nvSpPr>
-          <p:cNvPr id="23" name="TextBox 22"/>
+          <p:cNvPr id="30" name="TextBox 29"/>
           <p:cNvSpPr txBox="1"/>
           <p:nvPr/>
         </p:nvSpPr>
         <p:spPr>
           <a:xfrm>
-            <a:off x="8098383" y="3995928"/>
-            <a:ext cx="640080" cy="365760"/>
+            <a:off x="7479792" y="3995928"/>
+            <a:ext cx="685800" cy="365760"/>
           </a:xfrm>
           <a:prstGeom prst="rect">
             <a:avLst/>
@@ -6464,14 +6780,14 @@
       </p:sp>
       <p:sp>
         <p:nvSpPr>
-          <p:cNvPr id="24" name="TextBox 23"/>
+          <p:cNvPr id="31" name="TextBox 30"/>
           <p:cNvSpPr txBox="1"/>
           <p:nvPr/>
         </p:nvSpPr>
         <p:spPr>
           <a:xfrm>
-            <a:off x="5321808" y="5074920"/>
-            <a:ext cx="3014319" cy="457200"/>
+            <a:off x="5047488" y="5047488"/>
+            <a:ext cx="2877159" cy="502920"/>
           </a:xfrm>
           <a:prstGeom prst="rect">
             <a:avLst/>
@@ -6504,97 +6820,18 @@
       </p:sp>
       <p:sp>
         <p:nvSpPr>
-          <p:cNvPr id="25" name="Rectangle 24"/>
+          <p:cNvPr id="32" name="Rounded Rectangle 31"/>
           <p:cNvSpPr/>
           <p:nvPr/>
         </p:nvSpPr>
         <p:spPr>
           <a:xfrm>
-            <a:off x="8610447" y="1737360"/>
-            <a:ext cx="3014319" cy="384048"/>
-          </a:xfrm>
-          <a:prstGeom prst="rect">
-            <a:avLst/>
-          </a:prstGeom>
-          <a:solidFill>
-            <a:srgbClr val="0F5C28"/>
-          </a:solidFill>
-          <a:ln>
-            <a:noFill/>
-          </a:ln>
-          <a:effectLst/>
-        </p:spPr>
-        <p:style>
-          <a:lnRef idx="1">
-            <a:schemeClr val="accent1"/>
-          </a:lnRef>
-          <a:fillRef idx="3">
-            <a:schemeClr val="accent1"/>
-          </a:fillRef>
-          <a:effectRef idx="2">
-            <a:schemeClr val="accent1"/>
-          </a:effectRef>
-          <a:fontRef idx="minor">
-            <a:schemeClr val="lt1"/>
-          </a:fontRef>
-        </p:style>
-        <p:txBody>
-          <a:bodyPr rtlCol="0" anchor="ctr"/>
-          <a:lstStyle/>
-          <a:p>
-            <a:pPr algn="ctr"/>
-          </a:p>
-        </p:txBody>
-      </p:sp>
-      <p:sp>
-        <p:nvSpPr>
-          <p:cNvPr id="26" name="TextBox 25"/>
-          <p:cNvSpPr txBox="1"/>
-          <p:nvPr/>
-        </p:nvSpPr>
-        <p:spPr>
-          <a:xfrm>
-            <a:off x="8747607" y="1737360"/>
-            <a:ext cx="2739999" cy="384048"/>
-          </a:xfrm>
-          <a:prstGeom prst="rect">
-            <a:avLst/>
-          </a:prstGeom>
-          <a:noFill/>
-        </p:spPr>
-        <p:txBody>
-          <a:bodyPr wrap="square" anchor="ctr" lIns="18288" rIns="18288" tIns="9144" bIns="9144">
-            <a:spAutoFit/>
-          </a:bodyPr>
-          <a:lstStyle/>
-          <a:p>
-            <a:r>
-              <a:rPr sz="1350" b="1" i="0">
-                <a:solidFill>
-                  <a:srgbClr val="FFFFFF"/>
-                </a:solidFill>
-                <a:latin typeface="Meiryo"/>
-                <a:ea typeface="Meiryo"/>
-              </a:rPr>
-              <a:t>多点探索（Memetic）</a:t>
-            </a:r>
-          </a:p>
-        </p:txBody>
-      </p:sp>
-      <p:sp>
-        <p:nvSpPr>
-          <p:cNvPr id="27" name="Rounded Rectangle 26"/>
-          <p:cNvSpPr/>
-          <p:nvPr/>
-        </p:nvSpPr>
-        <p:spPr>
-          <a:xfrm>
-            <a:off x="8701887" y="2286000"/>
-            <a:ext cx="2355951" cy="384048"/>
+            <a:off x="8381847" y="1737360"/>
+            <a:ext cx="3242919" cy="3886200"/>
           </a:xfrm>
           <a:prstGeom prst="roundRect">
             <a:avLst>
-              <a:gd name="adj" fmla="val 12000"/>
+              <a:gd name="adj" fmla="val 5000"/>
             </a:avLst>
           </a:prstGeom>
           <a:solidFill>
@@ -6622,72 +6859,26 @@
           </a:fontRef>
         </p:style>
         <p:txBody>
-          <a:bodyPr rtlCol="0" anchor="ctr" wrap="square" lIns="54864" rIns="54864" tIns="18288" bIns="18288"/>
-          <a:lstStyle/>
-          <a:p>
-            <a:pPr algn="ctr">
-              <a:lnSpc>
-                <a:spcPct val="100000"/>
-              </a:lnSpc>
-            </a:pPr>
-            <a:r>
-              <a:rPr sz="1100" b="0" i="0">
-                <a:solidFill>
-                  <a:srgbClr val="26303A"/>
-                </a:solidFill>
-                <a:latin typeface="Meiryo"/>
-                <a:ea typeface="Meiryo"/>
-              </a:rPr>
-              <a:t>初期集団：</a:t>
-            </a:r>
-            <a:r>
-              <a:rPr sz="1100" b="0" i="1">
-                <a:solidFill>
-                  <a:srgbClr val="26303A"/>
-                </a:solidFill>
-                <a:latin typeface="Meiryo"/>
-                <a:ea typeface="Meiryo"/>
-              </a:rPr>
-              <a:t>S</a:t>
-            </a:r>
-            <a:r>
-              <a:rPr sz="792" b="0" i="1" baseline="-22000">
-                <a:solidFill>
-                  <a:srgbClr val="26303A"/>
-                </a:solidFill>
-                <a:latin typeface="Meiryo"/>
-                <a:ea typeface="Meiryo"/>
-              </a:rPr>
-              <a:t>p</a:t>
-            </a:r>
-            <a:r>
-              <a:rPr sz="1100" b="0" i="0">
-                <a:solidFill>
-                  <a:srgbClr val="26303A"/>
-                </a:solidFill>
-                <a:latin typeface="Meiryo"/>
-                <a:ea typeface="Meiryo"/>
-              </a:rPr>
-              <a:t>＋無作為な個体</a:t>
-            </a:r>
-          </a:p>
-        </p:txBody>
-      </p:sp>
-      <p:sp>
-        <p:nvSpPr>
-          <p:cNvPr id="28" name="Rounded Rectangle 27"/>
+          <a:bodyPr rtlCol="0" anchor="ctr"/>
+          <a:lstStyle/>
+          <a:p>
+            <a:pPr algn="ctr"/>
+          </a:p>
+        </p:txBody>
+      </p:sp>
+      <p:sp>
+        <p:nvSpPr>
+          <p:cNvPr id="33" name="Rectangle 32"/>
           <p:cNvSpPr/>
           <p:nvPr/>
         </p:nvSpPr>
         <p:spPr>
           <a:xfrm>
-            <a:off x="8701887" y="2852928"/>
-            <a:ext cx="2355951" cy="384048"/>
-          </a:xfrm>
-          <a:prstGeom prst="roundRect">
-            <a:avLst>
-              <a:gd name="adj" fmla="val 12000"/>
-            </a:avLst>
+            <a:off x="8381847" y="1737360"/>
+            <a:ext cx="3242919" cy="384048"/>
+          </a:xfrm>
+          <a:prstGeom prst="rect">
+            <a:avLst/>
           </a:prstGeom>
           <a:solidFill>
             <a:srgbClr val="0F5C28"/>
@@ -6712,74 +6903,58 @@
           </a:fontRef>
         </p:style>
         <p:txBody>
-          <a:bodyPr rtlCol="0" anchor="ctr" wrap="square" lIns="54864" rIns="54864" tIns="18288" bIns="18288"/>
-          <a:lstStyle/>
-          <a:p>
-            <a:pPr algn="ctr">
-              <a:lnSpc>
-                <a:spcPct val="100000"/>
-              </a:lnSpc>
-            </a:pPr>
-            <a:r>
-              <a:rPr sz="1100" b="1" i="0">
+          <a:bodyPr rtlCol="0" anchor="ctr"/>
+          <a:lstStyle/>
+          <a:p>
+            <a:pPr algn="ctr"/>
+          </a:p>
+        </p:txBody>
+      </p:sp>
+      <p:sp>
+        <p:nvSpPr>
+          <p:cNvPr id="34" name="TextBox 33"/>
+          <p:cNvSpPr txBox="1"/>
+          <p:nvPr/>
+        </p:nvSpPr>
+        <p:spPr>
+          <a:xfrm>
+            <a:off x="8519007" y="1737360"/>
+            <a:ext cx="2968599" cy="384048"/>
+          </a:xfrm>
+          <a:prstGeom prst="rect">
+            <a:avLst/>
+          </a:prstGeom>
+          <a:noFill/>
+        </p:spPr>
+        <p:txBody>
+          <a:bodyPr wrap="square" anchor="ctr" lIns="18288" rIns="18288" tIns="9144" bIns="9144">
+            <a:spAutoFit/>
+          </a:bodyPr>
+          <a:lstStyle/>
+          <a:p>
+            <a:r>
+              <a:rPr sz="1350" b="1" i="0">
                 <a:solidFill>
                   <a:srgbClr val="FFFFFF"/>
                 </a:solidFill>
                 <a:latin typeface="Meiryo"/>
                 <a:ea typeface="Meiryo"/>
               </a:rPr>
-              <a:t>選択・交叉：2 親を組み替え</a:t>
-            </a:r>
-          </a:p>
-        </p:txBody>
-      </p:sp>
-      <p:cxnSp>
-        <p:nvCxnSpPr>
-          <p:cNvPr id="29" name="Connector 28"/>
-          <p:cNvCxnSpPr/>
-          <p:nvPr/>
-        </p:nvCxnSpPr>
-        <p:spPr>
-          <a:xfrm>
-            <a:off x="9879863" y="2688336"/>
-            <a:ext cx="0" cy="146304"/>
-          </a:xfrm>
-          <a:prstGeom prst="line">
-            <a:avLst/>
-          </a:prstGeom>
-          <a:ln w="17780">
-            <a:solidFill>
-              <a:srgbClr val="6E7A88"/>
-            </a:solidFill>
-            <a:tailEnd type="triangle" w="med" len="med"/>
-          </a:ln>
-          <a:effectLst/>
-        </p:spPr>
-        <p:style>
-          <a:lnRef idx="2">
-            <a:schemeClr val="accent1"/>
-          </a:lnRef>
-          <a:fillRef idx="0">
-            <a:schemeClr val="accent1"/>
-          </a:fillRef>
-          <a:effectRef idx="1">
-            <a:schemeClr val="accent1"/>
-          </a:effectRef>
-          <a:fontRef idx="minor">
-            <a:schemeClr val="tx1"/>
-          </a:fontRef>
-        </p:style>
-      </p:cxnSp>
-      <p:sp>
-        <p:nvSpPr>
-          <p:cNvPr id="30" name="Rounded Rectangle 29"/>
+              <a:t>多点探索（Memetic）</a:t>
+            </a:r>
+          </a:p>
+        </p:txBody>
+      </p:sp>
+      <p:sp>
+        <p:nvSpPr>
+          <p:cNvPr id="35" name="Rounded Rectangle 34"/>
           <p:cNvSpPr/>
           <p:nvPr/>
         </p:nvSpPr>
         <p:spPr>
           <a:xfrm>
-            <a:off x="8701887" y="3419856"/>
-            <a:ext cx="2355951" cy="384048"/>
+            <a:off x="8519007" y="2286000"/>
+            <a:ext cx="2148840" cy="384048"/>
           </a:xfrm>
           <a:prstGeom prst="roundRect">
             <a:avLst>
@@ -6820,27 +6995,117 @@
               </a:lnSpc>
             </a:pPr>
             <a:r>
-              <a:rPr sz="1100" b="0" i="0">
+              <a:rPr sz="1050" b="0" i="0">
                 <a:solidFill>
                   <a:srgbClr val="26303A"/>
                 </a:solidFill>
                 <a:latin typeface="Meiryo"/>
                 <a:ea typeface="Meiryo"/>
               </a:rPr>
-              <a:t>突然変異</a:t>
+              <a:t>初期集団：</a:t>
+            </a:r>
+            <a:r>
+              <a:rPr sz="1050" b="0" i="1">
+                <a:solidFill>
+                  <a:srgbClr val="26303A"/>
+                </a:solidFill>
+                <a:latin typeface="Meiryo"/>
+                <a:ea typeface="Meiryo"/>
+              </a:rPr>
+              <a:t>S</a:t>
+            </a:r>
+            <a:r>
+              <a:rPr sz="756" b="0" i="1" baseline="-22000">
+                <a:solidFill>
+                  <a:srgbClr val="26303A"/>
+                </a:solidFill>
+                <a:latin typeface="Meiryo"/>
+                <a:ea typeface="Meiryo"/>
+              </a:rPr>
+              <a:t>p</a:t>
+            </a:r>
+            <a:r>
+              <a:rPr sz="1050" b="0" i="0">
+                <a:solidFill>
+                  <a:srgbClr val="26303A"/>
+                </a:solidFill>
+                <a:latin typeface="Meiryo"/>
+                <a:ea typeface="Meiryo"/>
+              </a:rPr>
+              <a:t>＋無作為な個体</a:t>
+            </a:r>
+          </a:p>
+        </p:txBody>
+      </p:sp>
+      <p:sp>
+        <p:nvSpPr>
+          <p:cNvPr id="36" name="Rounded Rectangle 35"/>
+          <p:cNvSpPr/>
+          <p:nvPr/>
+        </p:nvSpPr>
+        <p:spPr>
+          <a:xfrm>
+            <a:off x="8519007" y="2852928"/>
+            <a:ext cx="2148840" cy="384048"/>
+          </a:xfrm>
+          <a:prstGeom prst="roundRect">
+            <a:avLst>
+              <a:gd name="adj" fmla="val 12000"/>
+            </a:avLst>
+          </a:prstGeom>
+          <a:solidFill>
+            <a:srgbClr val="0F5C28"/>
+          </a:solidFill>
+          <a:ln>
+            <a:noFill/>
+          </a:ln>
+          <a:effectLst/>
+        </p:spPr>
+        <p:style>
+          <a:lnRef idx="1">
+            <a:schemeClr val="accent1"/>
+          </a:lnRef>
+          <a:fillRef idx="3">
+            <a:schemeClr val="accent1"/>
+          </a:fillRef>
+          <a:effectRef idx="2">
+            <a:schemeClr val="accent1"/>
+          </a:effectRef>
+          <a:fontRef idx="minor">
+            <a:schemeClr val="lt1"/>
+          </a:fontRef>
+        </p:style>
+        <p:txBody>
+          <a:bodyPr rtlCol="0" anchor="ctr" wrap="square" lIns="54864" rIns="54864" tIns="18288" bIns="18288"/>
+          <a:lstStyle/>
+          <a:p>
+            <a:pPr algn="ctr">
+              <a:lnSpc>
+                <a:spcPct val="100000"/>
+              </a:lnSpc>
+            </a:pPr>
+            <a:r>
+              <a:rPr sz="1050" b="1" i="0">
+                <a:solidFill>
+                  <a:srgbClr val="FFFFFF"/>
+                </a:solidFill>
+                <a:latin typeface="Meiryo"/>
+                <a:ea typeface="Meiryo"/>
+              </a:rPr>
+              <a:t>選択・交叉：2 親を組み替え</a:t>
             </a:r>
           </a:p>
         </p:txBody>
       </p:sp>
       <p:cxnSp>
         <p:nvCxnSpPr>
-          <p:cNvPr id="31" name="Connector 30"/>
+          <p:cNvPr id="37" name="Connector 36"/>
           <p:cNvCxnSpPr/>
           <p:nvPr/>
         </p:nvCxnSpPr>
         <p:spPr>
           <a:xfrm>
-            <a:off x="9879863" y="3255264"/>
+            <a:off x="9593427" y="2688336"/>
             <a:ext cx="0" cy="146304"/>
           </a:xfrm>
           <a:prstGeom prst="line">
@@ -6871,14 +7136,113 @@
       </p:cxnSp>
       <p:sp>
         <p:nvSpPr>
-          <p:cNvPr id="32" name="Rounded Rectangle 31"/>
+          <p:cNvPr id="38" name="Rounded Rectangle 37"/>
           <p:cNvSpPr/>
           <p:nvPr/>
         </p:nvSpPr>
         <p:spPr>
           <a:xfrm>
-            <a:off x="8701887" y="3986783"/>
-            <a:ext cx="2355951" cy="384048"/>
+            <a:off x="8519007" y="3419856"/>
+            <a:ext cx="2148840" cy="384048"/>
+          </a:xfrm>
+          <a:prstGeom prst="roundRect">
+            <a:avLst>
+              <a:gd name="adj" fmla="val 12000"/>
+            </a:avLst>
+          </a:prstGeom>
+          <a:solidFill>
+            <a:srgbClr val="FFFFFF"/>
+          </a:solidFill>
+          <a:ln w="13970">
+            <a:solidFill>
+              <a:srgbClr val="C9D6E5"/>
+            </a:solidFill>
+          </a:ln>
+          <a:effectLst/>
+        </p:spPr>
+        <p:style>
+          <a:lnRef idx="1">
+            <a:schemeClr val="accent1"/>
+          </a:lnRef>
+          <a:fillRef idx="3">
+            <a:schemeClr val="accent1"/>
+          </a:fillRef>
+          <a:effectRef idx="2">
+            <a:schemeClr val="accent1"/>
+          </a:effectRef>
+          <a:fontRef idx="minor">
+            <a:schemeClr val="lt1"/>
+          </a:fontRef>
+        </p:style>
+        <p:txBody>
+          <a:bodyPr rtlCol="0" anchor="ctr" wrap="square" lIns="54864" rIns="54864" tIns="18288" bIns="18288"/>
+          <a:lstStyle/>
+          <a:p>
+            <a:pPr algn="ctr">
+              <a:lnSpc>
+                <a:spcPct val="100000"/>
+              </a:lnSpc>
+            </a:pPr>
+            <a:r>
+              <a:rPr sz="1050" b="0" i="0">
+                <a:solidFill>
+                  <a:srgbClr val="26303A"/>
+                </a:solidFill>
+                <a:latin typeface="Meiryo"/>
+                <a:ea typeface="Meiryo"/>
+              </a:rPr>
+              <a:t>突然変異</a:t>
+            </a:r>
+          </a:p>
+        </p:txBody>
+      </p:sp>
+      <p:cxnSp>
+        <p:nvCxnSpPr>
+          <p:cNvPr id="39" name="Connector 38"/>
+          <p:cNvCxnSpPr/>
+          <p:nvPr/>
+        </p:nvCxnSpPr>
+        <p:spPr>
+          <a:xfrm>
+            <a:off x="9593427" y="3255264"/>
+            <a:ext cx="0" cy="146304"/>
+          </a:xfrm>
+          <a:prstGeom prst="line">
+            <a:avLst/>
+          </a:prstGeom>
+          <a:ln w="17780">
+            <a:solidFill>
+              <a:srgbClr val="6E7A88"/>
+            </a:solidFill>
+            <a:tailEnd type="triangle" w="med" len="med"/>
+          </a:ln>
+          <a:effectLst/>
+        </p:spPr>
+        <p:style>
+          <a:lnRef idx="2">
+            <a:schemeClr val="accent1"/>
+          </a:lnRef>
+          <a:fillRef idx="0">
+            <a:schemeClr val="accent1"/>
+          </a:fillRef>
+          <a:effectRef idx="1">
+            <a:schemeClr val="accent1"/>
+          </a:effectRef>
+          <a:fontRef idx="minor">
+            <a:schemeClr val="tx1"/>
+          </a:fontRef>
+        </p:style>
+      </p:cxnSp>
+      <p:sp>
+        <p:nvSpPr>
+          <p:cNvPr id="40" name="Rounded Rectangle 39"/>
+          <p:cNvSpPr/>
+          <p:nvPr/>
+        </p:nvSpPr>
+        <p:spPr>
+          <a:xfrm>
+            <a:off x="8519007" y="3986783"/>
+            <a:ext cx="2148840" cy="384048"/>
           </a:xfrm>
           <a:prstGeom prst="roundRect">
             <a:avLst>
@@ -6919,7 +7283,7 @@
               </a:lnSpc>
             </a:pPr>
             <a:r>
-              <a:rPr sz="1100" b="0" i="0">
+              <a:rPr sz="1050" b="0" i="0">
                 <a:solidFill>
                   <a:srgbClr val="26303A"/>
                 </a:solidFill>
@@ -6933,13 +7297,13 @@
       </p:sp>
       <p:cxnSp>
         <p:nvCxnSpPr>
-          <p:cNvPr id="33" name="Connector 32"/>
+          <p:cNvPr id="41" name="Connector 40"/>
           <p:cNvCxnSpPr/>
           <p:nvPr/>
         </p:nvCxnSpPr>
         <p:spPr>
           <a:xfrm>
-            <a:off x="9879863" y="3822191"/>
+            <a:off x="9593427" y="3822191"/>
             <a:ext cx="0" cy="146305"/>
           </a:xfrm>
           <a:prstGeom prst="line">
@@ -6970,13 +7334,13 @@
       </p:cxnSp>
       <p:cxnSp>
         <p:nvCxnSpPr>
-          <p:cNvPr id="34" name="Connector 33"/>
+          <p:cNvPr id="42" name="Connector 41"/>
           <p:cNvCxnSpPr/>
           <p:nvPr/>
         </p:nvCxnSpPr>
         <p:spPr>
           <a:xfrm>
-            <a:off x="11076127" y="4178807"/>
+            <a:off x="10686135" y="4178807"/>
             <a:ext cx="237744" cy="0"/>
           </a:xfrm>
           <a:prstGeom prst="line">
@@ -7006,13 +7370,13 @@
       </p:cxnSp>
       <p:cxnSp>
         <p:nvCxnSpPr>
-          <p:cNvPr id="35" name="Connector 34"/>
+          <p:cNvPr id="43" name="Connector 42"/>
           <p:cNvCxnSpPr/>
           <p:nvPr/>
         </p:nvCxnSpPr>
         <p:spPr>
           <a:xfrm flipV="1">
-            <a:off x="11313871" y="3044952"/>
+            <a:off x="10923879" y="3044952"/>
             <a:ext cx="0" cy="1133855"/>
           </a:xfrm>
           <a:prstGeom prst="line">
@@ -7042,13 +7406,13 @@
       </p:cxnSp>
       <p:cxnSp>
         <p:nvCxnSpPr>
-          <p:cNvPr id="36" name="Connector 35"/>
+          <p:cNvPr id="44" name="Connector 43"/>
           <p:cNvCxnSpPr/>
           <p:nvPr/>
         </p:nvCxnSpPr>
         <p:spPr>
           <a:xfrm flipH="1">
-            <a:off x="11094415" y="3044952"/>
+            <a:off x="10704423" y="3044952"/>
             <a:ext cx="219456" cy="0"/>
           </a:xfrm>
           <a:prstGeom prst="line">
@@ -7079,14 +7443,14 @@
       </p:cxnSp>
       <p:sp>
         <p:nvSpPr>
-          <p:cNvPr id="37" name="TextBox 36"/>
+          <p:cNvPr id="45" name="TextBox 44"/>
           <p:cNvSpPr txBox="1"/>
           <p:nvPr/>
         </p:nvSpPr>
         <p:spPr>
           <a:xfrm>
-            <a:off x="11387023" y="3428999"/>
-            <a:ext cx="640080" cy="365760"/>
+            <a:off x="10997031" y="3428999"/>
+            <a:ext cx="685800" cy="365760"/>
           </a:xfrm>
           <a:prstGeom prst="rect">
             <a:avLst/>
@@ -7119,14 +7483,14 @@
       </p:sp>
       <p:sp>
         <p:nvSpPr>
-          <p:cNvPr id="38" name="TextBox 37"/>
+          <p:cNvPr id="46" name="TextBox 45"/>
           <p:cNvSpPr txBox="1"/>
           <p:nvPr/>
         </p:nvSpPr>
         <p:spPr>
           <a:xfrm>
-            <a:off x="8610447" y="5074920"/>
-            <a:ext cx="3014319" cy="457200"/>
+            <a:off x="8564727" y="5047488"/>
+            <a:ext cx="2877159" cy="502920"/>
           </a:xfrm>
           <a:prstGeom prst="rect">
             <a:avLst/>
@@ -7159,14 +7523,14 @@
       </p:sp>
       <p:sp>
         <p:nvSpPr>
-          <p:cNvPr id="39" name="Rounded Rectangle 38"/>
+          <p:cNvPr id="47" name="Rounded Rectangle 46"/>
           <p:cNvSpPr/>
           <p:nvPr/>
         </p:nvSpPr>
         <p:spPr>
           <a:xfrm>
-            <a:off x="566928" y="5669280"/>
-            <a:ext cx="11057839" cy="530352"/>
+            <a:off x="566928" y="5760720"/>
+            <a:ext cx="11057839" cy="502920"/>
           </a:xfrm>
           <a:prstGeom prst="roundRect">
             <a:avLst>

--- a/doc/presentation_materials/JIMA2026fall_発表.pptx
+++ b/doc/presentation_materials/JIMA2026fall_発表.pptx
@@ -5746,274 +5746,6 @@
         </p:nvSpPr>
         <p:spPr>
           <a:xfrm>
-            <a:off x="658368" y="4659050"/>
-            <a:ext cx="128016" cy="201168"/>
-          </a:xfrm>
-          <a:prstGeom prst="roundRect">
-            <a:avLst>
-              <a:gd name="adj" fmla="val 4000"/>
-            </a:avLst>
-          </a:prstGeom>
-          <a:solidFill>
-            <a:srgbClr val="E06C00"/>
-          </a:solidFill>
-          <a:ln>
-            <a:noFill/>
-          </a:ln>
-          <a:effectLst/>
-        </p:spPr>
-        <p:style>
-          <a:lnRef idx="1">
-            <a:schemeClr val="accent1"/>
-          </a:lnRef>
-          <a:fillRef idx="3">
-            <a:schemeClr val="accent1"/>
-          </a:fillRef>
-          <a:effectRef idx="2">
-            <a:schemeClr val="accent1"/>
-          </a:effectRef>
-          <a:fontRef idx="minor">
-            <a:schemeClr val="lt1"/>
-          </a:fontRef>
-        </p:style>
-        <p:txBody>
-          <a:bodyPr rtlCol="0" anchor="ctr"/>
-          <a:lstStyle/>
-          <a:p>
-            <a:pPr algn="ctr"/>
-          </a:p>
-        </p:txBody>
-      </p:sp>
-      <p:sp>
-        <p:nvSpPr>
-          <p:cNvPr id="10" name="Rounded Rectangle 9"/>
-          <p:cNvSpPr/>
-          <p:nvPr/>
-        </p:nvSpPr>
-        <p:spPr>
-          <a:xfrm>
-            <a:off x="795528" y="4659050"/>
-            <a:ext cx="128016" cy="201168"/>
-          </a:xfrm>
-          <a:prstGeom prst="roundRect">
-            <a:avLst>
-              <a:gd name="adj" fmla="val 4000"/>
-            </a:avLst>
-          </a:prstGeom>
-          <a:solidFill>
-            <a:srgbClr val="0F5C28"/>
-          </a:solidFill>
-          <a:ln>
-            <a:noFill/>
-          </a:ln>
-          <a:effectLst/>
-        </p:spPr>
-        <p:style>
-          <a:lnRef idx="1">
-            <a:schemeClr val="accent1"/>
-          </a:lnRef>
-          <a:fillRef idx="3">
-            <a:schemeClr val="accent1"/>
-          </a:fillRef>
-          <a:effectRef idx="2">
-            <a:schemeClr val="accent1"/>
-          </a:effectRef>
-          <a:fontRef idx="minor">
-            <a:schemeClr val="lt1"/>
-          </a:fontRef>
-        </p:style>
-        <p:txBody>
-          <a:bodyPr rtlCol="0" anchor="ctr"/>
-          <a:lstStyle/>
-          <a:p>
-            <a:pPr algn="ctr"/>
-          </a:p>
-        </p:txBody>
-      </p:sp>
-      <p:sp>
-        <p:nvSpPr>
-          <p:cNvPr id="11" name="TextBox 10"/>
-          <p:cNvSpPr txBox="1"/>
-          <p:nvPr/>
-        </p:nvSpPr>
-        <p:spPr>
-          <a:xfrm>
-            <a:off x="1024128" y="4613330"/>
-            <a:ext cx="3474720" cy="292608"/>
-          </a:xfrm>
-          <a:prstGeom prst="rect">
-            <a:avLst/>
-          </a:prstGeom>
-          <a:noFill/>
-        </p:spPr>
-        <p:txBody>
-          <a:bodyPr wrap="square" anchor="ctr" lIns="18288" rIns="18288" tIns="9144" bIns="9144">
-            <a:spAutoFit/>
-          </a:bodyPr>
-          <a:lstStyle/>
-          <a:p>
-            <a:pPr algn="l">
-              <a:lnSpc>
-                <a:spcPct val="105000"/>
-              </a:lnSpc>
-            </a:pPr>
-            <a:r>
-              <a:rPr sz="1100" b="0" i="0">
-                <a:solidFill>
-                  <a:srgbClr val="6E7A88"/>
-                </a:solidFill>
-                <a:latin typeface="Meiryo"/>
-                <a:ea typeface="Meiryo"/>
-              </a:rPr>
-              <a:t>解を作る操作（ここが 2 構造の差）</a:t>
-            </a:r>
-          </a:p>
-        </p:txBody>
-      </p:sp>
-      <p:sp>
-        <p:nvSpPr>
-          <p:cNvPr id="12" name="Rounded Rectangle 11"/>
-          <p:cNvSpPr/>
-          <p:nvPr/>
-        </p:nvSpPr>
-        <p:spPr>
-          <a:xfrm>
-            <a:off x="658368" y="4969946"/>
-            <a:ext cx="128016" cy="201168"/>
-          </a:xfrm>
-          <a:prstGeom prst="roundRect">
-            <a:avLst>
-              <a:gd name="adj" fmla="val 4000"/>
-            </a:avLst>
-          </a:prstGeom>
-          <a:solidFill>
-            <a:srgbClr val="EDF2F7"/>
-          </a:solidFill>
-          <a:ln w="13970">
-            <a:solidFill>
-              <a:srgbClr val="C9D6E5"/>
-            </a:solidFill>
-          </a:ln>
-          <a:effectLst/>
-        </p:spPr>
-        <p:style>
-          <a:lnRef idx="1">
-            <a:schemeClr val="accent1"/>
-          </a:lnRef>
-          <a:fillRef idx="3">
-            <a:schemeClr val="accent1"/>
-          </a:fillRef>
-          <a:effectRef idx="2">
-            <a:schemeClr val="accent1"/>
-          </a:effectRef>
-          <a:fontRef idx="minor">
-            <a:schemeClr val="lt1"/>
-          </a:fontRef>
-        </p:style>
-        <p:txBody>
-          <a:bodyPr rtlCol="0" anchor="ctr"/>
-          <a:lstStyle/>
-          <a:p>
-            <a:pPr algn="ctr"/>
-          </a:p>
-        </p:txBody>
-      </p:sp>
-      <p:sp>
-        <p:nvSpPr>
-          <p:cNvPr id="13" name="Rounded Rectangle 12"/>
-          <p:cNvSpPr/>
-          <p:nvPr/>
-        </p:nvSpPr>
-        <p:spPr>
-          <a:xfrm>
-            <a:off x="795528" y="4969946"/>
-            <a:ext cx="128016" cy="201168"/>
-          </a:xfrm>
-          <a:prstGeom prst="roundRect">
-            <a:avLst>
-              <a:gd name="adj" fmla="val 4000"/>
-            </a:avLst>
-          </a:prstGeom>
-          <a:solidFill>
-            <a:srgbClr val="EDF2F7"/>
-          </a:solidFill>
-          <a:ln w="13970">
-            <a:solidFill>
-              <a:srgbClr val="C9D6E5"/>
-            </a:solidFill>
-          </a:ln>
-          <a:effectLst/>
-        </p:spPr>
-        <p:style>
-          <a:lnRef idx="1">
-            <a:schemeClr val="accent1"/>
-          </a:lnRef>
-          <a:fillRef idx="3">
-            <a:schemeClr val="accent1"/>
-          </a:fillRef>
-          <a:effectRef idx="2">
-            <a:schemeClr val="accent1"/>
-          </a:effectRef>
-          <a:fontRef idx="minor">
-            <a:schemeClr val="lt1"/>
-          </a:fontRef>
-        </p:style>
-        <p:txBody>
-          <a:bodyPr rtlCol="0" anchor="ctr"/>
-          <a:lstStyle/>
-          <a:p>
-            <a:pPr algn="ctr"/>
-          </a:p>
-        </p:txBody>
-      </p:sp>
-      <p:sp>
-        <p:nvSpPr>
-          <p:cNvPr id="14" name="TextBox 13"/>
-          <p:cNvSpPr txBox="1"/>
-          <p:nvPr/>
-        </p:nvSpPr>
-        <p:spPr>
-          <a:xfrm>
-            <a:off x="1024128" y="4924226"/>
-            <a:ext cx="3474720" cy="292608"/>
-          </a:xfrm>
-          <a:prstGeom prst="rect">
-            <a:avLst/>
-          </a:prstGeom>
-          <a:noFill/>
-        </p:spPr>
-        <p:txBody>
-          <a:bodyPr wrap="square" anchor="ctr" lIns="18288" rIns="18288" tIns="9144" bIns="9144">
-            <a:spAutoFit/>
-          </a:bodyPr>
-          <a:lstStyle/>
-          <a:p>
-            <a:pPr algn="l">
-              <a:lnSpc>
-                <a:spcPct val="105000"/>
-              </a:lnSpc>
-            </a:pPr>
-            <a:r>
-              <a:rPr sz="1100" b="0" i="0">
-                <a:solidFill>
-                  <a:srgbClr val="6E7A88"/>
-                </a:solidFill>
-                <a:latin typeface="Meiryo"/>
-                <a:ea typeface="Meiryo"/>
-              </a:rPr>
-              <a:t>両者で揃えた局所探索</a:t>
-            </a:r>
-          </a:p>
-        </p:txBody>
-      </p:sp>
-      <p:sp>
-        <p:nvSpPr>
-          <p:cNvPr id="15" name="Rounded Rectangle 14"/>
-          <p:cNvSpPr/>
-          <p:nvPr/>
-        </p:nvSpPr>
-        <p:spPr>
-          <a:xfrm>
             <a:off x="4864608" y="1737360"/>
             <a:ext cx="3242919" cy="3886200"/>
           </a:xfrm>
@@ -6056,7 +5788,7 @@
       </p:sp>
       <p:sp>
         <p:nvSpPr>
-          <p:cNvPr id="16" name="Rectangle 15"/>
+          <p:cNvPr id="10" name="Rectangle 9"/>
           <p:cNvSpPr/>
           <p:nvPr/>
         </p:nvSpPr>
@@ -6100,7 +5832,7 @@
       </p:sp>
       <p:sp>
         <p:nvSpPr>
-          <p:cNvPr id="17" name="TextBox 16"/>
+          <p:cNvPr id="11" name="TextBox 10"/>
           <p:cNvSpPr txBox="1"/>
           <p:nvPr/>
         </p:nvSpPr>
@@ -6135,7 +5867,7 @@
       </p:sp>
       <p:sp>
         <p:nvSpPr>
-          <p:cNvPr id="18" name="Rounded Rectangle 17"/>
+          <p:cNvPr id="12" name="Rounded Rectangle 11"/>
           <p:cNvSpPr/>
           <p:nvPr/>
         </p:nvSpPr>
@@ -6217,7 +5949,7 @@
       </p:sp>
       <p:sp>
         <p:nvSpPr>
-          <p:cNvPr id="19" name="Rounded Rectangle 18"/>
+          <p:cNvPr id="13" name="Rounded Rectangle 12"/>
           <p:cNvSpPr/>
           <p:nvPr/>
         </p:nvSpPr>
@@ -6232,7 +5964,7 @@
             </a:avLst>
           </a:prstGeom>
           <a:solidFill>
-            <a:srgbClr val="EDF2F7"/>
+            <a:srgbClr val="DDE6EF"/>
           </a:solidFill>
           <a:ln w="13970">
             <a:solidFill>
@@ -6279,7 +6011,7 @@
       </p:sp>
       <p:cxnSp>
         <p:nvCxnSpPr>
-          <p:cNvPr id="20" name="Connector 19"/>
+          <p:cNvPr id="14" name="Connector 13"/>
           <p:cNvCxnSpPr/>
           <p:nvPr/>
         </p:nvCxnSpPr>
@@ -6316,7 +6048,7 @@
       </p:cxnSp>
       <p:sp>
         <p:nvSpPr>
-          <p:cNvPr id="21" name="Rounded Rectangle 20"/>
+          <p:cNvPr id="15" name="Rounded Rectangle 14"/>
           <p:cNvSpPr/>
           <p:nvPr/>
         </p:nvSpPr>
@@ -6331,10 +6063,12 @@
             </a:avLst>
           </a:prstGeom>
           <a:solidFill>
-            <a:srgbClr val="E06C00"/>
+            <a:srgbClr val="FBE4CC"/>
           </a:solidFill>
-          <a:ln>
-            <a:noFill/>
+          <a:ln w="20320">
+            <a:solidFill>
+              <a:srgbClr val="E06C00"/>
+            </a:solidFill>
           </a:ln>
           <a:effectLst/>
         </p:spPr>
@@ -6364,7 +6098,7 @@
             <a:r>
               <a:rPr sz="1050" b="1" i="0">
                 <a:solidFill>
-                  <a:srgbClr val="FFFFFF"/>
+                  <a:srgbClr val="E06C00"/>
                 </a:solidFill>
                 <a:latin typeface="Meiryo"/>
                 <a:ea typeface="Meiryo"/>
@@ -6376,7 +6110,7 @@
       </p:sp>
       <p:cxnSp>
         <p:nvCxnSpPr>
-          <p:cNvPr id="22" name="Connector 21"/>
+          <p:cNvPr id="16" name="Connector 15"/>
           <p:cNvCxnSpPr/>
           <p:nvPr/>
         </p:nvCxnSpPr>
@@ -6413,7 +6147,7 @@
       </p:cxnSp>
       <p:sp>
         <p:nvSpPr>
-          <p:cNvPr id="23" name="Rounded Rectangle 22"/>
+          <p:cNvPr id="17" name="Rounded Rectangle 16"/>
           <p:cNvSpPr/>
           <p:nvPr/>
         </p:nvSpPr>
@@ -6428,7 +6162,7 @@
             </a:avLst>
           </a:prstGeom>
           <a:solidFill>
-            <a:srgbClr val="EDF2F7"/>
+            <a:srgbClr val="DDE6EF"/>
           </a:solidFill>
           <a:ln w="13970">
             <a:solidFill>
@@ -6475,7 +6209,7 @@
       </p:sp>
       <p:cxnSp>
         <p:nvCxnSpPr>
-          <p:cNvPr id="24" name="Connector 23"/>
+          <p:cNvPr id="18" name="Connector 17"/>
           <p:cNvCxnSpPr/>
           <p:nvPr/>
         </p:nvCxnSpPr>
@@ -6512,7 +6246,7 @@
       </p:cxnSp>
       <p:sp>
         <p:nvSpPr>
-          <p:cNvPr id="25" name="Rounded Rectangle 24"/>
+          <p:cNvPr id="19" name="Rounded Rectangle 18"/>
           <p:cNvSpPr/>
           <p:nvPr/>
         </p:nvSpPr>
@@ -6594,7 +6328,7 @@
       </p:sp>
       <p:cxnSp>
         <p:nvCxnSpPr>
-          <p:cNvPr id="26" name="Connector 25"/>
+          <p:cNvPr id="20" name="Connector 19"/>
           <p:cNvCxnSpPr/>
           <p:nvPr/>
         </p:nvCxnSpPr>
@@ -6631,7 +6365,7 @@
       </p:cxnSp>
       <p:cxnSp>
         <p:nvCxnSpPr>
-          <p:cNvPr id="27" name="Connector 26"/>
+          <p:cNvPr id="21" name="Connector 20"/>
           <p:cNvCxnSpPr/>
           <p:nvPr/>
         </p:nvCxnSpPr>
@@ -6667,7 +6401,7 @@
       </p:cxnSp>
       <p:cxnSp>
         <p:nvCxnSpPr>
-          <p:cNvPr id="28" name="Connector 27"/>
+          <p:cNvPr id="22" name="Connector 21"/>
           <p:cNvCxnSpPr/>
           <p:nvPr/>
         </p:nvCxnSpPr>
@@ -6703,7 +6437,7 @@
       </p:cxnSp>
       <p:cxnSp>
         <p:nvCxnSpPr>
-          <p:cNvPr id="29" name="Connector 28"/>
+          <p:cNvPr id="23" name="Connector 22"/>
           <p:cNvCxnSpPr/>
           <p:nvPr/>
         </p:nvCxnSpPr>
@@ -6740,7 +6474,7 @@
       </p:cxnSp>
       <p:sp>
         <p:nvSpPr>
-          <p:cNvPr id="30" name="TextBox 29"/>
+          <p:cNvPr id="24" name="TextBox 23"/>
           <p:cNvSpPr txBox="1"/>
           <p:nvPr/>
         </p:nvSpPr>
@@ -6780,7 +6514,7 @@
       </p:sp>
       <p:sp>
         <p:nvSpPr>
-          <p:cNvPr id="31" name="TextBox 30"/>
+          <p:cNvPr id="25" name="TextBox 24"/>
           <p:cNvSpPr txBox="1"/>
           <p:nvPr/>
         </p:nvSpPr>
@@ -6820,7 +6554,7 @@
       </p:sp>
       <p:sp>
         <p:nvSpPr>
-          <p:cNvPr id="32" name="Rounded Rectangle 31"/>
+          <p:cNvPr id="26" name="Rounded Rectangle 25"/>
           <p:cNvSpPr/>
           <p:nvPr/>
         </p:nvSpPr>
@@ -6868,7 +6602,7 @@
       </p:sp>
       <p:sp>
         <p:nvSpPr>
-          <p:cNvPr id="33" name="Rectangle 32"/>
+          <p:cNvPr id="27" name="Rectangle 26"/>
           <p:cNvSpPr/>
           <p:nvPr/>
         </p:nvSpPr>
@@ -6912,7 +6646,7 @@
       </p:sp>
       <p:sp>
         <p:nvSpPr>
-          <p:cNvPr id="34" name="TextBox 33"/>
+          <p:cNvPr id="28" name="TextBox 27"/>
           <p:cNvSpPr txBox="1"/>
           <p:nvPr/>
         </p:nvSpPr>
@@ -6947,7 +6681,7 @@
       </p:sp>
       <p:sp>
         <p:nvSpPr>
-          <p:cNvPr id="35" name="Rounded Rectangle 34"/>
+          <p:cNvPr id="29" name="Rounded Rectangle 28"/>
           <p:cNvSpPr/>
           <p:nvPr/>
         </p:nvSpPr>
@@ -7039,7 +6773,7 @@
       </p:sp>
       <p:sp>
         <p:nvSpPr>
-          <p:cNvPr id="36" name="Rounded Rectangle 35"/>
+          <p:cNvPr id="30" name="Rounded Rectangle 29"/>
           <p:cNvSpPr/>
           <p:nvPr/>
         </p:nvSpPr>
@@ -7054,10 +6788,12 @@
             </a:avLst>
           </a:prstGeom>
           <a:solidFill>
-            <a:srgbClr val="0F5C28"/>
+            <a:srgbClr val="D7E9DC"/>
           </a:solidFill>
-          <a:ln>
-            <a:noFill/>
+          <a:ln w="20320">
+            <a:solidFill>
+              <a:srgbClr val="0F5C28"/>
+            </a:solidFill>
           </a:ln>
           <a:effectLst/>
         </p:spPr>
@@ -7087,7 +6823,7 @@
             <a:r>
               <a:rPr sz="1050" b="1" i="0">
                 <a:solidFill>
-                  <a:srgbClr val="FFFFFF"/>
+                  <a:srgbClr val="0F5C28"/>
                 </a:solidFill>
                 <a:latin typeface="Meiryo"/>
                 <a:ea typeface="Meiryo"/>
@@ -7099,7 +6835,7 @@
       </p:sp>
       <p:cxnSp>
         <p:nvCxnSpPr>
-          <p:cNvPr id="37" name="Connector 36"/>
+          <p:cNvPr id="31" name="Connector 30"/>
           <p:cNvCxnSpPr/>
           <p:nvPr/>
         </p:nvCxnSpPr>
@@ -7136,7 +6872,7 @@
       </p:cxnSp>
       <p:sp>
         <p:nvSpPr>
-          <p:cNvPr id="38" name="Rounded Rectangle 37"/>
+          <p:cNvPr id="32" name="Rounded Rectangle 31"/>
           <p:cNvSpPr/>
           <p:nvPr/>
         </p:nvSpPr>
@@ -7198,7 +6934,7 @@
       </p:sp>
       <p:cxnSp>
         <p:nvCxnSpPr>
-          <p:cNvPr id="39" name="Connector 38"/>
+          <p:cNvPr id="33" name="Connector 32"/>
           <p:cNvCxnSpPr/>
           <p:nvPr/>
         </p:nvCxnSpPr>
@@ -7235,7 +6971,7 @@
       </p:cxnSp>
       <p:sp>
         <p:nvSpPr>
-          <p:cNvPr id="40" name="Rounded Rectangle 39"/>
+          <p:cNvPr id="34" name="Rounded Rectangle 33"/>
           <p:cNvSpPr/>
           <p:nvPr/>
         </p:nvSpPr>
@@ -7250,7 +6986,7 @@
             </a:avLst>
           </a:prstGeom>
           <a:solidFill>
-            <a:srgbClr val="EDF2F7"/>
+            <a:srgbClr val="DDE6EF"/>
           </a:solidFill>
           <a:ln w="13970">
             <a:solidFill>
@@ -7297,7 +7033,7 @@
       </p:sp>
       <p:cxnSp>
         <p:nvCxnSpPr>
-          <p:cNvPr id="41" name="Connector 40"/>
+          <p:cNvPr id="35" name="Connector 34"/>
           <p:cNvCxnSpPr/>
           <p:nvPr/>
         </p:nvCxnSpPr>
@@ -7334,7 +7070,7 @@
       </p:cxnSp>
       <p:cxnSp>
         <p:nvCxnSpPr>
-          <p:cNvPr id="42" name="Connector 41"/>
+          <p:cNvPr id="36" name="Connector 35"/>
           <p:cNvCxnSpPr/>
           <p:nvPr/>
         </p:nvCxnSpPr>
@@ -7370,7 +7106,7 @@
       </p:cxnSp>
       <p:cxnSp>
         <p:nvCxnSpPr>
-          <p:cNvPr id="43" name="Connector 42"/>
+          <p:cNvPr id="37" name="Connector 36"/>
           <p:cNvCxnSpPr/>
           <p:nvPr/>
         </p:nvCxnSpPr>
@@ -7406,7 +7142,7 @@
       </p:cxnSp>
       <p:cxnSp>
         <p:nvCxnSpPr>
-          <p:cNvPr id="44" name="Connector 43"/>
+          <p:cNvPr id="38" name="Connector 37"/>
           <p:cNvCxnSpPr/>
           <p:nvPr/>
         </p:nvCxnSpPr>
@@ -7443,7 +7179,7 @@
       </p:cxnSp>
       <p:sp>
         <p:nvSpPr>
-          <p:cNvPr id="45" name="TextBox 44"/>
+          <p:cNvPr id="39" name="TextBox 38"/>
           <p:cNvSpPr txBox="1"/>
           <p:nvPr/>
         </p:nvSpPr>
@@ -7483,7 +7219,7 @@
       </p:sp>
       <p:sp>
         <p:nvSpPr>
-          <p:cNvPr id="46" name="TextBox 45"/>
+          <p:cNvPr id="40" name="TextBox 39"/>
           <p:cNvSpPr txBox="1"/>
           <p:nvPr/>
         </p:nvSpPr>
@@ -7523,7 +7259,7 @@
       </p:sp>
       <p:sp>
         <p:nvSpPr>
-          <p:cNvPr id="47" name="Rounded Rectangle 46"/>
+          <p:cNvPr id="41" name="Rounded Rectangle 40"/>
           <p:cNvSpPr/>
           <p:nvPr/>
         </p:nvSpPr>

--- a/doc/presentation_materials/JIMA2026fall_発表.pptx
+++ b/doc/presentation_materials/JIMA2026fall_発表.pptx
@@ -3618,7 +3618,7 @@
         </p:nvSpPr>
         <p:spPr>
           <a:xfrm>
-            <a:off x="566928" y="1783080"/>
+            <a:off x="566928" y="2286000"/>
             <a:ext cx="6035040" cy="457200"/>
           </a:xfrm>
           <a:prstGeom prst="rect">
@@ -3909,7 +3909,7 @@
         </p:blipFill>
         <p:spPr>
           <a:xfrm>
-            <a:off x="2131904" y="3520440"/>
+            <a:off x="2131904" y="4023360"/>
             <a:ext cx="2905086" cy="566928"/>
           </a:xfrm>
           <a:prstGeom prst="rect">
@@ -3925,7 +3925,7 @@
         </p:nvSpPr>
         <p:spPr>
           <a:xfrm>
-            <a:off x="5961888" y="3666744"/>
+            <a:off x="5961888" y="4169663"/>
             <a:ext cx="640080" cy="274320"/>
           </a:xfrm>
           <a:prstGeom prst="rect">
@@ -3961,7 +3961,7 @@
         </p:nvSpPr>
         <p:spPr>
           <a:xfrm>
-            <a:off x="841247" y="4160520"/>
+            <a:off x="841247" y="4663440"/>
             <a:ext cx="5760720" cy="320040"/>
           </a:xfrm>
           <a:prstGeom prst="rect">
@@ -4061,7 +4061,7 @@
         </p:nvSpPr>
         <p:spPr>
           <a:xfrm>
-            <a:off x="566928" y="4663440"/>
+            <a:off x="566928" y="5166360"/>
             <a:ext cx="6035040" cy="457200"/>
           </a:xfrm>
           <a:prstGeom prst="rect">
@@ -5730,7 +5730,7 @@
         </p:blipFill>
         <p:spPr>
           <a:xfrm>
-            <a:off x="521207" y="1783080"/>
+            <a:off x="521207" y="2356774"/>
             <a:ext cx="4023360" cy="2647370"/>
           </a:xfrm>
           <a:prstGeom prst="rect">
@@ -6788,6 +6788,105 @@
             </a:avLst>
           </a:prstGeom>
           <a:solidFill>
+            <a:srgbClr val="FFFFFF"/>
+          </a:solidFill>
+          <a:ln w="13970">
+            <a:solidFill>
+              <a:srgbClr val="C9D6E5"/>
+            </a:solidFill>
+          </a:ln>
+          <a:effectLst/>
+        </p:spPr>
+        <p:style>
+          <a:lnRef idx="1">
+            <a:schemeClr val="accent1"/>
+          </a:lnRef>
+          <a:fillRef idx="3">
+            <a:schemeClr val="accent1"/>
+          </a:fillRef>
+          <a:effectRef idx="2">
+            <a:schemeClr val="accent1"/>
+          </a:effectRef>
+          <a:fontRef idx="minor">
+            <a:schemeClr val="lt1"/>
+          </a:fontRef>
+        </p:style>
+        <p:txBody>
+          <a:bodyPr rtlCol="0" anchor="ctr" wrap="square" lIns="54864" rIns="54864" tIns="18288" bIns="18288"/>
+          <a:lstStyle/>
+          <a:p>
+            <a:pPr algn="ctr">
+              <a:lnSpc>
+                <a:spcPct val="100000"/>
+              </a:lnSpc>
+            </a:pPr>
+            <a:r>
+              <a:rPr sz="1050" b="0" i="0">
+                <a:solidFill>
+                  <a:srgbClr val="26303A"/>
+                </a:solidFill>
+                <a:latin typeface="Meiryo"/>
+                <a:ea typeface="Meiryo"/>
+              </a:rPr>
+              <a:t>選択</a:t>
+            </a:r>
+          </a:p>
+        </p:txBody>
+      </p:sp>
+      <p:cxnSp>
+        <p:nvCxnSpPr>
+          <p:cNvPr id="31" name="Connector 30"/>
+          <p:cNvCxnSpPr/>
+          <p:nvPr/>
+        </p:nvCxnSpPr>
+        <p:spPr>
+          <a:xfrm>
+            <a:off x="9593427" y="2688336"/>
+            <a:ext cx="0" cy="146304"/>
+          </a:xfrm>
+          <a:prstGeom prst="line">
+            <a:avLst/>
+          </a:prstGeom>
+          <a:ln w="17780">
+            <a:solidFill>
+              <a:srgbClr val="6E7A88"/>
+            </a:solidFill>
+            <a:tailEnd type="triangle" w="med" len="med"/>
+          </a:ln>
+          <a:effectLst/>
+        </p:spPr>
+        <p:style>
+          <a:lnRef idx="2">
+            <a:schemeClr val="accent1"/>
+          </a:lnRef>
+          <a:fillRef idx="0">
+            <a:schemeClr val="accent1"/>
+          </a:fillRef>
+          <a:effectRef idx="1">
+            <a:schemeClr val="accent1"/>
+          </a:effectRef>
+          <a:fontRef idx="minor">
+            <a:schemeClr val="tx1"/>
+          </a:fontRef>
+        </p:style>
+      </p:cxnSp>
+      <p:sp>
+        <p:nvSpPr>
+          <p:cNvPr id="32" name="Rounded Rectangle 31"/>
+          <p:cNvSpPr/>
+          <p:nvPr/>
+        </p:nvSpPr>
+        <p:spPr>
+          <a:xfrm>
+            <a:off x="8519007" y="3419856"/>
+            <a:ext cx="2148840" cy="384048"/>
+          </a:xfrm>
+          <a:prstGeom prst="roundRect">
+            <a:avLst>
+              <a:gd name="adj" fmla="val 12000"/>
+            </a:avLst>
+          </a:prstGeom>
+          <a:solidFill>
             <a:srgbClr val="D7E9DC"/>
           </a:solidFill>
           <a:ln w="20320">
@@ -6828,20 +6927,20 @@
                 <a:latin typeface="Meiryo"/>
                 <a:ea typeface="Meiryo"/>
               </a:rPr>
-              <a:t>選択・交叉：2 親を組み替え</a:t>
+              <a:t>交叉：2 親を組み替え</a:t>
             </a:r>
           </a:p>
         </p:txBody>
       </p:sp>
       <p:cxnSp>
         <p:nvCxnSpPr>
-          <p:cNvPr id="31" name="Connector 30"/>
+          <p:cNvPr id="33" name="Connector 32"/>
           <p:cNvCxnSpPr/>
           <p:nvPr/>
         </p:nvCxnSpPr>
         <p:spPr>
           <a:xfrm>
-            <a:off x="9593427" y="2688336"/>
+            <a:off x="9593427" y="3255264"/>
             <a:ext cx="0" cy="146304"/>
           </a:xfrm>
           <a:prstGeom prst="line">
@@ -6872,13 +6971,13 @@
       </p:cxnSp>
       <p:sp>
         <p:nvSpPr>
-          <p:cNvPr id="32" name="Rounded Rectangle 31"/>
+          <p:cNvPr id="34" name="Rounded Rectangle 33"/>
           <p:cNvSpPr/>
           <p:nvPr/>
         </p:nvSpPr>
         <p:spPr>
           <a:xfrm>
-            <a:off x="8519007" y="3419856"/>
+            <a:off x="8519007" y="3986783"/>
             <a:ext cx="2148840" cy="384048"/>
           </a:xfrm>
           <a:prstGeom prst="roundRect">
@@ -6934,14 +7033,14 @@
       </p:sp>
       <p:cxnSp>
         <p:nvCxnSpPr>
-          <p:cNvPr id="33" name="Connector 32"/>
+          <p:cNvPr id="35" name="Connector 34"/>
           <p:cNvCxnSpPr/>
           <p:nvPr/>
         </p:nvCxnSpPr>
         <p:spPr>
           <a:xfrm>
-            <a:off x="9593427" y="3255264"/>
-            <a:ext cx="0" cy="146304"/>
+            <a:off x="9593427" y="3822191"/>
+            <a:ext cx="0" cy="146305"/>
           </a:xfrm>
           <a:prstGeom prst="line">
             <a:avLst/>
@@ -6971,13 +7070,13 @@
       </p:cxnSp>
       <p:sp>
         <p:nvSpPr>
-          <p:cNvPr id="34" name="Rounded Rectangle 33"/>
+          <p:cNvPr id="36" name="Rounded Rectangle 35"/>
           <p:cNvSpPr/>
           <p:nvPr/>
         </p:nvSpPr>
         <p:spPr>
           <a:xfrm>
-            <a:off x="8519007" y="3986783"/>
+            <a:off x="8519007" y="4553712"/>
             <a:ext cx="2148840" cy="384048"/>
           </a:xfrm>
           <a:prstGeom prst="roundRect">
@@ -7033,14 +7132,14 @@
       </p:sp>
       <p:cxnSp>
         <p:nvCxnSpPr>
-          <p:cNvPr id="35" name="Connector 34"/>
+          <p:cNvPr id="37" name="Connector 36"/>
           <p:cNvCxnSpPr/>
           <p:nvPr/>
         </p:nvCxnSpPr>
         <p:spPr>
           <a:xfrm>
-            <a:off x="9593427" y="3822191"/>
-            <a:ext cx="0" cy="146305"/>
+            <a:off x="9593427" y="4389120"/>
+            <a:ext cx="0" cy="146304"/>
           </a:xfrm>
           <a:prstGeom prst="line">
             <a:avLst/>
@@ -7050,78 +7149,6 @@
               <a:srgbClr val="6E7A88"/>
             </a:solidFill>
             <a:tailEnd type="triangle" w="med" len="med"/>
-          </a:ln>
-          <a:effectLst/>
-        </p:spPr>
-        <p:style>
-          <a:lnRef idx="2">
-            <a:schemeClr val="accent1"/>
-          </a:lnRef>
-          <a:fillRef idx="0">
-            <a:schemeClr val="accent1"/>
-          </a:fillRef>
-          <a:effectRef idx="1">
-            <a:schemeClr val="accent1"/>
-          </a:effectRef>
-          <a:fontRef idx="minor">
-            <a:schemeClr val="tx1"/>
-          </a:fontRef>
-        </p:style>
-      </p:cxnSp>
-      <p:cxnSp>
-        <p:nvCxnSpPr>
-          <p:cNvPr id="36" name="Connector 35"/>
-          <p:cNvCxnSpPr/>
-          <p:nvPr/>
-        </p:nvCxnSpPr>
-        <p:spPr>
-          <a:xfrm>
-            <a:off x="10686135" y="4178807"/>
-            <a:ext cx="237744" cy="0"/>
-          </a:xfrm>
-          <a:prstGeom prst="line">
-            <a:avLst/>
-          </a:prstGeom>
-          <a:ln w="17780">
-            <a:solidFill>
-              <a:srgbClr val="6E7A88"/>
-            </a:solidFill>
-          </a:ln>
-          <a:effectLst/>
-        </p:spPr>
-        <p:style>
-          <a:lnRef idx="2">
-            <a:schemeClr val="accent1"/>
-          </a:lnRef>
-          <a:fillRef idx="0">
-            <a:schemeClr val="accent1"/>
-          </a:fillRef>
-          <a:effectRef idx="1">
-            <a:schemeClr val="accent1"/>
-          </a:effectRef>
-          <a:fontRef idx="minor">
-            <a:schemeClr val="tx1"/>
-          </a:fontRef>
-        </p:style>
-      </p:cxnSp>
-      <p:cxnSp>
-        <p:nvCxnSpPr>
-          <p:cNvPr id="37" name="Connector 36"/>
-          <p:cNvCxnSpPr/>
-          <p:nvPr/>
-        </p:nvCxnSpPr>
-        <p:spPr>
-          <a:xfrm flipV="1">
-            <a:off x="10923879" y="3044952"/>
-            <a:ext cx="0" cy="1133855"/>
-          </a:xfrm>
-          <a:prstGeom prst="line">
-            <a:avLst/>
-          </a:prstGeom>
-          <a:ln w="17780">
-            <a:solidFill>
-              <a:srgbClr val="6E7A88"/>
-            </a:solidFill>
           </a:ln>
           <a:effectLst/>
         </p:spPr>
@@ -7147,6 +7174,78 @@
           <p:nvPr/>
         </p:nvCxnSpPr>
         <p:spPr>
+          <a:xfrm>
+            <a:off x="10686135" y="4745736"/>
+            <a:ext cx="237744" cy="0"/>
+          </a:xfrm>
+          <a:prstGeom prst="line">
+            <a:avLst/>
+          </a:prstGeom>
+          <a:ln w="17780">
+            <a:solidFill>
+              <a:srgbClr val="6E7A88"/>
+            </a:solidFill>
+          </a:ln>
+          <a:effectLst/>
+        </p:spPr>
+        <p:style>
+          <a:lnRef idx="2">
+            <a:schemeClr val="accent1"/>
+          </a:lnRef>
+          <a:fillRef idx="0">
+            <a:schemeClr val="accent1"/>
+          </a:fillRef>
+          <a:effectRef idx="1">
+            <a:schemeClr val="accent1"/>
+          </a:effectRef>
+          <a:fontRef idx="minor">
+            <a:schemeClr val="tx1"/>
+          </a:fontRef>
+        </p:style>
+      </p:cxnSp>
+      <p:cxnSp>
+        <p:nvCxnSpPr>
+          <p:cNvPr id="39" name="Connector 38"/>
+          <p:cNvCxnSpPr/>
+          <p:nvPr/>
+        </p:nvCxnSpPr>
+        <p:spPr>
+          <a:xfrm flipV="1">
+            <a:off x="10923879" y="3044952"/>
+            <a:ext cx="0" cy="1700784"/>
+          </a:xfrm>
+          <a:prstGeom prst="line">
+            <a:avLst/>
+          </a:prstGeom>
+          <a:ln w="17780">
+            <a:solidFill>
+              <a:srgbClr val="6E7A88"/>
+            </a:solidFill>
+          </a:ln>
+          <a:effectLst/>
+        </p:spPr>
+        <p:style>
+          <a:lnRef idx="2">
+            <a:schemeClr val="accent1"/>
+          </a:lnRef>
+          <a:fillRef idx="0">
+            <a:schemeClr val="accent1"/>
+          </a:fillRef>
+          <a:effectRef idx="1">
+            <a:schemeClr val="accent1"/>
+          </a:effectRef>
+          <a:fontRef idx="minor">
+            <a:schemeClr val="tx1"/>
+          </a:fontRef>
+        </p:style>
+      </p:cxnSp>
+      <p:cxnSp>
+        <p:nvCxnSpPr>
+          <p:cNvPr id="40" name="Connector 39"/>
+          <p:cNvCxnSpPr/>
+          <p:nvPr/>
+        </p:nvCxnSpPr>
+        <p:spPr>
           <a:xfrm flipH="1">
             <a:off x="10704423" y="3044952"/>
             <a:ext cx="219456" cy="0"/>
@@ -7179,13 +7278,13 @@
       </p:cxnSp>
       <p:sp>
         <p:nvSpPr>
-          <p:cNvPr id="39" name="TextBox 38"/>
+          <p:cNvPr id="41" name="TextBox 40"/>
           <p:cNvSpPr txBox="1"/>
           <p:nvPr/>
         </p:nvSpPr>
         <p:spPr>
           <a:xfrm>
-            <a:off x="10997031" y="3428999"/>
+            <a:off x="10997031" y="3712463"/>
             <a:ext cx="685800" cy="365760"/>
           </a:xfrm>
           <a:prstGeom prst="rect">
@@ -7219,7 +7318,7 @@
       </p:sp>
       <p:sp>
         <p:nvSpPr>
-          <p:cNvPr id="40" name="TextBox 39"/>
+          <p:cNvPr id="42" name="TextBox 41"/>
           <p:cNvSpPr txBox="1"/>
           <p:nvPr/>
         </p:nvSpPr>
@@ -7259,7 +7358,7 @@
       </p:sp>
       <p:sp>
         <p:nvSpPr>
-          <p:cNvPr id="41" name="Rounded Rectangle 40"/>
+          <p:cNvPr id="43" name="Rounded Rectangle 42"/>
           <p:cNvSpPr/>
           <p:nvPr/>
         </p:nvSpPr>
@@ -29043,7 +29142,7 @@
         </p:nvSpPr>
         <p:spPr>
           <a:xfrm>
-            <a:off x="6281928" y="1783080"/>
+            <a:off x="6281928" y="2240280"/>
             <a:ext cx="5342839" cy="457200"/>
           </a:xfrm>
           <a:prstGeom prst="rect">
@@ -29266,7 +29365,7 @@
         </p:nvSpPr>
         <p:spPr>
           <a:xfrm>
-            <a:off x="6281928" y="3703320"/>
+            <a:off x="6281928" y="4160520"/>
             <a:ext cx="5342839" cy="685800"/>
           </a:xfrm>
           <a:prstGeom prst="rect">
@@ -29343,7 +29442,7 @@
         </p:nvSpPr>
         <p:spPr>
           <a:xfrm>
-            <a:off x="6281928" y="4572000"/>
+            <a:off x="6281928" y="5029200"/>
             <a:ext cx="5342839" cy="640080"/>
           </a:xfrm>
           <a:prstGeom prst="rect">
@@ -31975,8 +32074,68 @@
         </p:nvSpPr>
         <p:spPr>
           <a:xfrm>
-            <a:off x="566928" y="1755648"/>
-            <a:ext cx="5391759" cy="1261872"/>
+            <a:off x="585216" y="1645920"/>
+            <a:ext cx="960120" cy="310896"/>
+          </a:xfrm>
+          <a:prstGeom prst="roundRect">
+            <a:avLst>
+              <a:gd name="adj" fmla="val 40000"/>
+            </a:avLst>
+          </a:prstGeom>
+          <a:solidFill>
+            <a:srgbClr val="16385C"/>
+          </a:solidFill>
+          <a:ln>
+            <a:noFill/>
+          </a:ln>
+          <a:effectLst/>
+        </p:spPr>
+        <p:style>
+          <a:lnRef idx="1">
+            <a:schemeClr val="accent1"/>
+          </a:lnRef>
+          <a:fillRef idx="3">
+            <a:schemeClr val="accent1"/>
+          </a:fillRef>
+          <a:effectRef idx="2">
+            <a:schemeClr val="accent1"/>
+          </a:effectRef>
+          <a:fontRef idx="minor">
+            <a:schemeClr val="lt1"/>
+          </a:fontRef>
+        </p:style>
+        <p:txBody>
+          <a:bodyPr rtlCol="0" anchor="ctr" wrap="square" lIns="54864" rIns="54864" tIns="18288" bIns="18288"/>
+          <a:lstStyle/>
+          <a:p>
+            <a:pPr algn="ctr">
+              <a:lnSpc>
+                <a:spcPct val="100000"/>
+              </a:lnSpc>
+            </a:pPr>
+            <a:r>
+              <a:rPr sz="1250" b="1" i="0">
+                <a:solidFill>
+                  <a:srgbClr val="FFFFFF"/>
+                </a:solidFill>
+                <a:latin typeface="Meiryo"/>
+                <a:ea typeface="Meiryo"/>
+              </a:rPr>
+              <a:t>仮説 1</a:t>
+            </a:r>
+          </a:p>
+        </p:txBody>
+      </p:sp>
+      <p:sp>
+        <p:nvSpPr>
+          <p:cNvPr id="9" name="Rounded Rectangle 8"/>
+          <p:cNvSpPr/>
+          <p:nvPr/>
+        </p:nvSpPr>
+        <p:spPr>
+          <a:xfrm>
+            <a:off x="566928" y="2011680"/>
+            <a:ext cx="5391759" cy="1207008"/>
           </a:xfrm>
           <a:prstGeom prst="roundRect">
             <a:avLst>
@@ -32015,76 +32174,14 @@
       </p:sp>
       <p:sp>
         <p:nvSpPr>
-          <p:cNvPr id="9" name="Rounded Rectangle 8"/>
-          <p:cNvSpPr/>
-          <p:nvPr/>
-        </p:nvSpPr>
-        <p:spPr>
-          <a:xfrm>
-            <a:off x="731520" y="1581912"/>
-            <a:ext cx="960120" cy="347472"/>
-          </a:xfrm>
-          <a:prstGeom prst="roundRect">
-            <a:avLst>
-              <a:gd name="adj" fmla="val 40000"/>
-            </a:avLst>
-          </a:prstGeom>
-          <a:solidFill>
-            <a:srgbClr val="16385C"/>
-          </a:solidFill>
-          <a:ln w="13970">
-            <a:solidFill>
-              <a:srgbClr val="FFFFFF"/>
-            </a:solidFill>
-          </a:ln>
-          <a:effectLst/>
-        </p:spPr>
-        <p:style>
-          <a:lnRef idx="1">
-            <a:schemeClr val="accent1"/>
-          </a:lnRef>
-          <a:fillRef idx="3">
-            <a:schemeClr val="accent1"/>
-          </a:fillRef>
-          <a:effectRef idx="2">
-            <a:schemeClr val="accent1"/>
-          </a:effectRef>
-          <a:fontRef idx="minor">
-            <a:schemeClr val="lt1"/>
-          </a:fontRef>
-        </p:style>
-        <p:txBody>
-          <a:bodyPr rtlCol="0" anchor="ctr" wrap="square" lIns="54864" rIns="54864" tIns="18288" bIns="18288"/>
-          <a:lstStyle/>
-          <a:p>
-            <a:pPr algn="ctr">
-              <a:lnSpc>
-                <a:spcPct val="100000"/>
-              </a:lnSpc>
-            </a:pPr>
-            <a:r>
-              <a:rPr sz="1250" b="1" i="0">
-                <a:solidFill>
-                  <a:srgbClr val="FFFFFF"/>
-                </a:solidFill>
-                <a:latin typeface="Meiryo"/>
-                <a:ea typeface="Meiryo"/>
-              </a:rPr>
-              <a:t>仮説 1</a:t>
-            </a:r>
-          </a:p>
-        </p:txBody>
-      </p:sp>
-      <p:sp>
-        <p:nvSpPr>
           <p:cNvPr id="10" name="TextBox 9"/>
           <p:cNvSpPr txBox="1"/>
           <p:nvPr/>
         </p:nvSpPr>
         <p:spPr>
           <a:xfrm>
-            <a:off x="713232" y="1883664"/>
-            <a:ext cx="5099151" cy="1078992"/>
+            <a:off x="713232" y="2066544"/>
+            <a:ext cx="5099151" cy="1097280"/>
           </a:xfrm>
           <a:prstGeom prst="rect">
             <a:avLst/>
@@ -32272,8 +32369,8 @@
         </p:blipFill>
         <p:spPr>
           <a:xfrm>
-            <a:off x="914272" y="3090672"/>
-            <a:ext cx="4697069" cy="3090672"/>
+            <a:off x="1067136" y="3291840"/>
+            <a:ext cx="4391343" cy="2889503"/>
           </a:xfrm>
           <a:prstGeom prst="rect">
             <a:avLst/>
@@ -32288,8 +32385,68 @@
         </p:nvSpPr>
         <p:spPr>
           <a:xfrm>
-            <a:off x="6233007" y="1755648"/>
-            <a:ext cx="5391759" cy="1261872"/>
+            <a:off x="6251295" y="1645920"/>
+            <a:ext cx="960120" cy="310896"/>
+          </a:xfrm>
+          <a:prstGeom prst="roundRect">
+            <a:avLst>
+              <a:gd name="adj" fmla="val 40000"/>
+            </a:avLst>
+          </a:prstGeom>
+          <a:solidFill>
+            <a:srgbClr val="16385C"/>
+          </a:solidFill>
+          <a:ln>
+            <a:noFill/>
+          </a:ln>
+          <a:effectLst/>
+        </p:spPr>
+        <p:style>
+          <a:lnRef idx="1">
+            <a:schemeClr val="accent1"/>
+          </a:lnRef>
+          <a:fillRef idx="3">
+            <a:schemeClr val="accent1"/>
+          </a:fillRef>
+          <a:effectRef idx="2">
+            <a:schemeClr val="accent1"/>
+          </a:effectRef>
+          <a:fontRef idx="minor">
+            <a:schemeClr val="lt1"/>
+          </a:fontRef>
+        </p:style>
+        <p:txBody>
+          <a:bodyPr rtlCol="0" anchor="ctr" wrap="square" lIns="54864" rIns="54864" tIns="18288" bIns="18288"/>
+          <a:lstStyle/>
+          <a:p>
+            <a:pPr algn="ctr">
+              <a:lnSpc>
+                <a:spcPct val="100000"/>
+              </a:lnSpc>
+            </a:pPr>
+            <a:r>
+              <a:rPr sz="1250" b="1" i="0">
+                <a:solidFill>
+                  <a:srgbClr val="FFFFFF"/>
+                </a:solidFill>
+                <a:latin typeface="Meiryo"/>
+                <a:ea typeface="Meiryo"/>
+              </a:rPr>
+              <a:t>仮説 2</a:t>
+            </a:r>
+          </a:p>
+        </p:txBody>
+      </p:sp>
+      <p:sp>
+        <p:nvSpPr>
+          <p:cNvPr id="13" name="Rounded Rectangle 12"/>
+          <p:cNvSpPr/>
+          <p:nvPr/>
+        </p:nvSpPr>
+        <p:spPr>
+          <a:xfrm>
+            <a:off x="6233007" y="2011680"/>
+            <a:ext cx="5391759" cy="1207008"/>
           </a:xfrm>
           <a:prstGeom prst="roundRect">
             <a:avLst>
@@ -32328,76 +32485,14 @@
       </p:sp>
       <p:sp>
         <p:nvSpPr>
-          <p:cNvPr id="13" name="Rounded Rectangle 12"/>
-          <p:cNvSpPr/>
-          <p:nvPr/>
-        </p:nvSpPr>
-        <p:spPr>
-          <a:xfrm>
-            <a:off x="6397599" y="1581912"/>
-            <a:ext cx="960120" cy="347472"/>
-          </a:xfrm>
-          <a:prstGeom prst="roundRect">
-            <a:avLst>
-              <a:gd name="adj" fmla="val 40000"/>
-            </a:avLst>
-          </a:prstGeom>
-          <a:solidFill>
-            <a:srgbClr val="2E1A0E"/>
-          </a:solidFill>
-          <a:ln w="13970">
-            <a:solidFill>
-              <a:srgbClr val="FFFFFF"/>
-            </a:solidFill>
-          </a:ln>
-          <a:effectLst/>
-        </p:spPr>
-        <p:style>
-          <a:lnRef idx="1">
-            <a:schemeClr val="accent1"/>
-          </a:lnRef>
-          <a:fillRef idx="3">
-            <a:schemeClr val="accent1"/>
-          </a:fillRef>
-          <a:effectRef idx="2">
-            <a:schemeClr val="accent1"/>
-          </a:effectRef>
-          <a:fontRef idx="minor">
-            <a:schemeClr val="lt1"/>
-          </a:fontRef>
-        </p:style>
-        <p:txBody>
-          <a:bodyPr rtlCol="0" anchor="ctr" wrap="square" lIns="54864" rIns="54864" tIns="18288" bIns="18288"/>
-          <a:lstStyle/>
-          <a:p>
-            <a:pPr algn="ctr">
-              <a:lnSpc>
-                <a:spcPct val="100000"/>
-              </a:lnSpc>
-            </a:pPr>
-            <a:r>
-              <a:rPr sz="1250" b="1" i="0">
-                <a:solidFill>
-                  <a:srgbClr val="FFFFFF"/>
-                </a:solidFill>
-                <a:latin typeface="Meiryo"/>
-                <a:ea typeface="Meiryo"/>
-              </a:rPr>
-              <a:t>仮説 2</a:t>
-            </a:r>
-          </a:p>
-        </p:txBody>
-      </p:sp>
-      <p:sp>
-        <p:nvSpPr>
           <p:cNvPr id="14" name="TextBox 13"/>
           <p:cNvSpPr txBox="1"/>
           <p:nvPr/>
         </p:nvSpPr>
         <p:spPr>
           <a:xfrm>
-            <a:off x="6379311" y="1883664"/>
-            <a:ext cx="5099151" cy="1078992"/>
+            <a:off x="6379311" y="2066544"/>
+            <a:ext cx="5099151" cy="1097280"/>
           </a:xfrm>
           <a:prstGeom prst="rect">
             <a:avLst/>
@@ -32545,8 +32640,8 @@
         </p:blipFill>
         <p:spPr>
           <a:xfrm>
-            <a:off x="6580352" y="3090672"/>
-            <a:ext cx="4697069" cy="3090672"/>
+            <a:off x="6733215" y="3291840"/>
+            <a:ext cx="4391343" cy="2889503"/>
           </a:xfrm>
           <a:prstGeom prst="rect">
             <a:avLst/>

--- a/doc/presentation_materials/JIMA2026fall_発表.pptx
+++ b/doc/presentation_materials/JIMA2026fall_発表.pptx
@@ -32369,8 +32369,8 @@
         </p:blipFill>
         <p:spPr>
           <a:xfrm>
-            <a:off x="1067136" y="3291840"/>
-            <a:ext cx="4391343" cy="2889503"/>
+            <a:off x="955962" y="3291840"/>
+            <a:ext cx="4613689" cy="3035807"/>
           </a:xfrm>
           <a:prstGeom prst="rect">
             <a:avLst/>
@@ -32640,8 +32640,8 @@
         </p:blipFill>
         <p:spPr>
           <a:xfrm>
-            <a:off x="6733215" y="3291840"/>
-            <a:ext cx="4391343" cy="2889503"/>
+            <a:off x="6622042" y="3291840"/>
+            <a:ext cx="4613689" cy="3035807"/>
           </a:xfrm>
           <a:prstGeom prst="rect">
             <a:avLst/>
@@ -32656,8 +32656,8 @@
         </p:nvSpPr>
         <p:spPr>
           <a:xfrm>
-            <a:off x="566928" y="6199632"/>
-            <a:ext cx="11057839" cy="219456"/>
+            <a:off x="566928" y="6400800"/>
+            <a:ext cx="11057839" cy="274320"/>
           </a:xfrm>
           <a:prstGeom prst="rect">
             <a:avLst/>
@@ -32676,7 +32676,7 @@
               </a:lnSpc>
             </a:pPr>
             <a:r>
-              <a:rPr sz="1150" b="0" i="0">
+              <a:rPr sz="1100" b="0" i="0">
                 <a:solidFill>
                   <a:srgbClr val="6E7A88"/>
                 </a:solidFill>

--- a/doc/presentation_materials/JIMA2026fall_発表.pptx
+++ b/doc/presentation_materials/JIMA2026fall_発表.pptx
@@ -32369,8 +32369,8 @@
         </p:blipFill>
         <p:spPr>
           <a:xfrm>
-            <a:off x="955962" y="3291840"/>
-            <a:ext cx="4613689" cy="3035807"/>
+            <a:off x="1067136" y="3291840"/>
+            <a:ext cx="4391343" cy="2889503"/>
           </a:xfrm>
           <a:prstGeom prst="rect">
             <a:avLst/>
@@ -32640,8 +32640,8 @@
         </p:blipFill>
         <p:spPr>
           <a:xfrm>
-            <a:off x="6622042" y="3291840"/>
-            <a:ext cx="4613689" cy="3035807"/>
+            <a:off x="6733215" y="3291840"/>
+            <a:ext cx="4391343" cy="2889503"/>
           </a:xfrm>
           <a:prstGeom prst="rect">
             <a:avLst/>
@@ -32656,8 +32656,8 @@
         </p:nvSpPr>
         <p:spPr>
           <a:xfrm>
-            <a:off x="566928" y="6400800"/>
-            <a:ext cx="11057839" cy="274320"/>
+            <a:off x="566928" y="6199632"/>
+            <a:ext cx="11057839" cy="219456"/>
           </a:xfrm>
           <a:prstGeom prst="rect">
             <a:avLst/>
@@ -32676,7 +32676,7 @@
               </a:lnSpc>
             </a:pPr>
             <a:r>
-              <a:rPr sz="1100" b="0" i="0">
+              <a:rPr sz="1150" b="0" i="0">
                 <a:solidFill>
                   <a:srgbClr val="6E7A88"/>
                 </a:solidFill>

--- a/doc/presentation_materials/JIMA2026fall_発表.pptx
+++ b/doc/presentation_materials/JIMA2026fall_発表.pptx
@@ -29142,8 +29142,8 @@
         </p:nvSpPr>
         <p:spPr>
           <a:xfrm>
-            <a:off x="6281928" y="2240280"/>
-            <a:ext cx="5342839" cy="457200"/>
+            <a:off x="6281928" y="1691640"/>
+            <a:ext cx="5342839" cy="4312367"/>
           </a:xfrm>
           <a:prstGeom prst="rect">
             <a:avLst/>
@@ -29151,7 +29151,7 @@
           <a:noFill/>
         </p:spPr>
         <p:txBody>
-          <a:bodyPr wrap="square" anchor="t" lIns="18288" rIns="18288" tIns="9144" bIns="9144">
+          <a:bodyPr wrap="square" anchor="ctr" lIns="18288" rIns="18288" tIns="9144" bIns="9144">
             <a:spAutoFit/>
           </a:bodyPr>
           <a:lstStyle/>
@@ -29165,16 +29165,6 @@
               </a:spcBef>
             </a:pPr>
             <a:r>
-              <a:rPr sz="1200" b="1" i="0">
-                <a:solidFill>
-                  <a:srgbClr val="16385C"/>
-                </a:solidFill>
-                <a:latin typeface="Meiryo"/>
-                <a:ea typeface="Meiryo"/>
-              </a:rPr>
-              <a:t/>
-            </a:r>
-            <a:r>
               <a:rPr sz="1500" b="0" i="0">
                 <a:solidFill>
                   <a:srgbClr val="26303A"/>
@@ -29265,14 +29255,24 @@
               </a:spcBef>
             </a:pPr>
             <a:r>
-              <a:rPr sz="1200" b="1" i="0">
+              <a:rPr sz="1500" b="0" i="0">
+                <a:solidFill>
+                  <a:srgbClr val="26303A"/>
+                </a:solidFill>
+                <a:latin typeface="Meiryo"/>
+                <a:ea typeface="Meiryo"/>
+              </a:rPr>
+              <a:t>● </a:t>
+            </a:r>
+            <a:r>
+              <a:rPr sz="1500" b="1" i="0">
                 <a:solidFill>
                   <a:srgbClr val="16385C"/>
                 </a:solidFill>
                 <a:latin typeface="Meiryo"/>
                 <a:ea typeface="Meiryo"/>
               </a:rPr>
-              <a:t/>
+              <a:t>Pareto フロント</a:t>
             </a:r>
             <a:r>
               <a:rPr sz="1500" b="0" i="0">
@@ -29282,7 +29282,37 @@
                 <a:latin typeface="Meiryo"/>
                 <a:ea typeface="Meiryo"/>
               </a:rPr>
-              <a:t>● </a:t>
+              <a:t>上の非劣解のうち，変更コストが無視できない場面で選ばれるのは，</a:t>
+            </a:r>
+            <a:r>
+              <a:rPr sz="1500" b="0" i="1">
+                <a:solidFill>
+                  <a:srgbClr val="26303A"/>
+                </a:solidFill>
+                <a:latin typeface="Meiryo"/>
+                <a:ea typeface="Meiryo"/>
+              </a:rPr>
+              <a:t>S</a:t>
+            </a:r>
+            <a:r>
+              <a:rPr sz="1080" b="0" i="1" baseline="-22000">
+                <a:solidFill>
+                  <a:srgbClr val="26303A"/>
+                </a:solidFill>
+                <a:latin typeface="Meiryo"/>
+                <a:ea typeface="Meiryo"/>
+              </a:rPr>
+              <a:t>p</a:t>
+            </a:r>
+            <a:r>
+              <a:rPr sz="1500" b="0" i="0">
+                <a:solidFill>
+                  <a:srgbClr val="26303A"/>
+                </a:solidFill>
+                <a:latin typeface="Meiryo"/>
+                <a:ea typeface="Meiryo"/>
+              </a:rPr>
+              <a:t> の近傍（</a:t>
             </a:r>
             <a:r>
               <a:rPr sz="1500" b="1" i="0">
@@ -29292,7 +29322,7 @@
                 <a:latin typeface="Meiryo"/>
                 <a:ea typeface="Meiryo"/>
               </a:rPr>
-              <a:t>Pareto フロント</a:t>
+              <a:t>高安定領域</a:t>
             </a:r>
             <a:r>
               <a:rPr sz="1500" b="0" i="0">
@@ -29302,87 +29332,17 @@
                 <a:latin typeface="Meiryo"/>
                 <a:ea typeface="Meiryo"/>
               </a:rPr>
-              <a:t>上の非劣解のうち，変更コストが無視できない場面で選ばれるのは，</a:t>
-            </a:r>
-            <a:r>
-              <a:rPr sz="1500" b="0" i="1">
-                <a:solidFill>
-                  <a:srgbClr val="26303A"/>
-                </a:solidFill>
-                <a:latin typeface="Meiryo"/>
-                <a:ea typeface="Meiryo"/>
-              </a:rPr>
-              <a:t>S</a:t>
-            </a:r>
-            <a:r>
-              <a:rPr sz="1080" b="0" i="1" baseline="-22000">
-                <a:solidFill>
-                  <a:srgbClr val="26303A"/>
-                </a:solidFill>
-                <a:latin typeface="Meiryo"/>
-                <a:ea typeface="Meiryo"/>
-              </a:rPr>
-              <a:t>p</a:t>
-            </a:r>
-            <a:r>
-              <a:rPr sz="1500" b="0" i="0">
-                <a:solidFill>
-                  <a:srgbClr val="26303A"/>
-                </a:solidFill>
-                <a:latin typeface="Meiryo"/>
-                <a:ea typeface="Meiryo"/>
-              </a:rPr>
-              <a:t> の近傍（</a:t>
-            </a:r>
-            <a:r>
-              <a:rPr sz="1500" b="1" i="0">
-                <a:solidFill>
-                  <a:srgbClr val="16385C"/>
-                </a:solidFill>
-                <a:latin typeface="Meiryo"/>
-                <a:ea typeface="Meiryo"/>
-              </a:rPr>
-              <a:t>高安定領域</a:t>
-            </a:r>
-            <a:r>
-              <a:rPr sz="1500" b="0" i="0">
-                <a:solidFill>
-                  <a:srgbClr val="26303A"/>
-                </a:solidFill>
-                <a:latin typeface="Meiryo"/>
-                <a:ea typeface="Meiryo"/>
-              </a:rPr>
               <a:t>）の解</a:t>
             </a:r>
           </a:p>
-        </p:txBody>
-      </p:sp>
-      <p:sp>
-        <p:nvSpPr>
-          <p:cNvPr id="10" name="TextBox 9"/>
-          <p:cNvSpPr txBox="1"/>
-          <p:nvPr/>
-        </p:nvSpPr>
-        <p:spPr>
-          <a:xfrm>
-            <a:off x="6281928" y="4160520"/>
-            <a:ext cx="5342839" cy="685800"/>
-          </a:xfrm>
-          <a:prstGeom prst="rect">
-            <a:avLst/>
-          </a:prstGeom>
-          <a:noFill/>
-        </p:spPr>
-        <p:txBody>
-          <a:bodyPr wrap="square" anchor="t" lIns="18288" rIns="18288" tIns="9144" bIns="9144">
-            <a:spAutoFit/>
-          </a:bodyPr>
-          <a:lstStyle/>
-          <a:p>
-            <a:pPr algn="l">
+          <a:p>
+            <a:pPr>
               <a:lnSpc>
                 <a:spcPct val="108000"/>
               </a:lnSpc>
+              <a:spcBef>
+                <a:spcPts val="1200"/>
+              </a:spcBef>
             </a:pPr>
             <a:r>
               <a:rPr sz="1550" b="0" i="0">
@@ -29396,10 +29356,13 @@
             </a:r>
           </a:p>
           <a:p>
-            <a:pPr algn="l">
+            <a:pPr>
               <a:lnSpc>
                 <a:spcPct val="108000"/>
               </a:lnSpc>
+              <a:spcBef>
+                <a:spcPts val="0"/>
+              </a:spcBef>
             </a:pPr>
             <a:r>
               <a:rPr sz="1550" b="0" i="0">
@@ -29432,34 +29395,14 @@
               <a:t>が問われる</a:t>
             </a:r>
           </a:p>
-        </p:txBody>
-      </p:sp>
-      <p:sp>
-        <p:nvSpPr>
-          <p:cNvPr id="11" name="TextBox 10"/>
-          <p:cNvSpPr txBox="1"/>
-          <p:nvPr/>
-        </p:nvSpPr>
-        <p:spPr>
-          <a:xfrm>
-            <a:off x="6281928" y="5029200"/>
-            <a:ext cx="5342839" cy="640080"/>
-          </a:xfrm>
-          <a:prstGeom prst="rect">
-            <a:avLst/>
-          </a:prstGeom>
-          <a:noFill/>
-        </p:spPr>
-        <p:txBody>
-          <a:bodyPr wrap="square" anchor="t" lIns="18288" rIns="18288" tIns="9144" bIns="9144">
-            <a:spAutoFit/>
-          </a:bodyPr>
-          <a:lstStyle/>
-          <a:p>
-            <a:pPr algn="l">
+          <a:p>
+            <a:pPr>
               <a:lnSpc>
                 <a:spcPct val="108000"/>
               </a:lnSpc>
+              <a:spcBef>
+                <a:spcPts val="1800"/>
+              </a:spcBef>
             </a:pPr>
             <a:r>
               <a:rPr sz="1350" b="0" i="0">

--- a/doc/presentation_materials/JIMA2026fall_発表.pptx
+++ b/doc/presentation_materials/JIMA2026fall_発表.pptx
@@ -7798,7 +7798,7 @@
         </p:nvSpPr>
         <p:spPr>
           <a:xfrm>
-            <a:off x="566928" y="1728216"/>
+            <a:off x="566928" y="1837944"/>
             <a:ext cx="960120" cy="310896"/>
           </a:xfrm>
           <a:prstGeom prst="roundRect">
@@ -7858,7 +7858,7 @@
         </p:nvSpPr>
         <p:spPr>
           <a:xfrm>
-            <a:off x="1664207" y="1691640"/>
+            <a:off x="1664207" y="1801368"/>
             <a:ext cx="4343400" cy="384048"/>
           </a:xfrm>
           <a:prstGeom prst="rect">
@@ -7898,7 +7898,7 @@
         </p:nvSpPr>
         <p:spPr>
           <a:xfrm>
-            <a:off x="566928" y="2112264"/>
+            <a:off x="566928" y="2221992"/>
             <a:ext cx="960120" cy="310896"/>
           </a:xfrm>
           <a:prstGeom prst="roundRect">
@@ -7958,7 +7958,7 @@
         </p:nvSpPr>
         <p:spPr>
           <a:xfrm>
-            <a:off x="1664207" y="2075688"/>
+            <a:off x="1664207" y="2185416"/>
             <a:ext cx="4343400" cy="384048"/>
           </a:xfrm>
           <a:prstGeom prst="rect">
@@ -8086,7 +8086,7 @@
         </p:blipFill>
         <p:spPr>
           <a:xfrm>
-            <a:off x="521207" y="2551176"/>
+            <a:off x="521207" y="2660904"/>
             <a:ext cx="5532120" cy="3640134"/>
           </a:xfrm>
           <a:prstGeom prst="rect">

--- a/doc/presentation_materials/JIMA2026fall_発表.pptx
+++ b/doc/presentation_materials/JIMA2026fall_発表.pptx
@@ -22896,12 +22896,12 @@
         </p:nvSpPr>
         <p:spPr>
           <a:xfrm>
-            <a:off x="566928" y="1755648"/>
-            <a:ext cx="11057839" cy="658368"/>
+            <a:off x="566928" y="2089404"/>
+            <a:ext cx="2286000" cy="3931920"/>
           </a:xfrm>
           <a:prstGeom prst="roundRect">
             <a:avLst>
-              <a:gd name="adj" fmla="val 12000"/>
+              <a:gd name="adj" fmla="val 6000"/>
             </a:avLst>
           </a:prstGeom>
           <a:solidFill>
@@ -22944,8 +22944,8 @@
         </p:nvSpPr>
         <p:spPr>
           <a:xfrm>
-            <a:off x="841247" y="1755648"/>
-            <a:ext cx="10509199" cy="658368"/>
+            <a:off x="822960" y="2089404"/>
+            <a:ext cx="1773936" cy="3931920"/>
           </a:xfrm>
           <a:prstGeom prst="rect">
             <a:avLst/>
@@ -22958,91 +22958,152 @@
           </a:bodyPr>
           <a:lstStyle/>
           <a:p>
-            <a:pPr algn="ctr">
+            <a:r>
+              <a:rPr sz="1750" b="1" i="0">
+                <a:solidFill>
+                  <a:srgbClr val="16385C"/>
+                </a:solidFill>
+                <a:latin typeface="Meiryo"/>
+                <a:ea typeface="Meiryo"/>
+              </a:rPr>
+              <a:t>外乱</a:t>
+            </a:r>
+          </a:p>
+          <a:p>
+            <a:pPr>
               <a:lnSpc>
-                <a:spcPct val="105000"/>
+                <a:spcPct val="110000"/>
               </a:lnSpc>
+              <a:spcBef>
+                <a:spcPts val="600"/>
+              </a:spcBef>
             </a:pPr>
             <a:r>
-              <a:rPr sz="1600" b="0" i="0">
+              <a:rPr sz="1400" b="0" i="0">
                 <a:solidFill>
                   <a:srgbClr val="26303A"/>
                 </a:solidFill>
                 <a:latin typeface="Meiryo"/>
                 <a:ea typeface="Meiryo"/>
               </a:rPr>
-              <a:t>製造現場では，機械故障や作業遅延などの</a:t>
-            </a:r>
-            <a:r>
-              <a:rPr sz="1600" b="1" i="0">
-                <a:solidFill>
-                  <a:srgbClr val="16385C"/>
-                </a:solidFill>
-                <a:latin typeface="Meiryo"/>
-                <a:ea typeface="Meiryo"/>
-              </a:rPr>
-              <a:t>外乱</a:t>
-            </a:r>
-            <a:r>
-              <a:rPr sz="1600" b="0" i="0">
-                <a:solidFill>
-                  <a:srgbClr val="26303A"/>
-                </a:solidFill>
-                <a:latin typeface="Meiryo"/>
-                <a:ea typeface="Meiryo"/>
-              </a:rPr>
-              <a:t>により，スケジュール通りに作業を実行できないことがある</a:t>
-            </a:r>
-          </a:p>
-        </p:txBody>
-      </p:sp>
-      <p:cxnSp>
-        <p:nvCxnSpPr>
-          <p:cNvPr id="10" name="Connector 9"/>
-          <p:cNvCxnSpPr/>
-          <p:nvPr/>
-        </p:nvCxnSpPr>
-        <p:spPr>
-          <a:xfrm flipH="1">
-            <a:off x="2075688" y="2432303"/>
-            <a:ext cx="4020159" cy="274321"/>
-          </a:xfrm>
-          <a:prstGeom prst="line">
-            <a:avLst/>
-          </a:prstGeom>
-          <a:ln w="20320">
+              <a:t>製造現場では，機械故障や作業遅延などにより，スケジュール通りに作業を実行できないことがある</a:t>
+            </a:r>
+          </a:p>
+        </p:txBody>
+      </p:sp>
+      <p:sp>
+        <p:nvSpPr>
+          <p:cNvPr id="10" name="Rounded Rectangle 9"/>
+          <p:cNvSpPr/>
+          <p:nvPr/>
+        </p:nvSpPr>
+        <p:spPr>
+          <a:xfrm>
+            <a:off x="3355848" y="2089404"/>
+            <a:ext cx="3474720" cy="1874519"/>
+          </a:xfrm>
+          <a:prstGeom prst="roundRect">
+            <a:avLst>
+              <a:gd name="adj" fmla="val 6000"/>
+            </a:avLst>
+          </a:prstGeom>
+          <a:solidFill>
+            <a:srgbClr val="EDF2F7"/>
+          </a:solidFill>
+          <a:ln w="22860">
             <a:solidFill>
-              <a:srgbClr val="6E7A88"/>
+              <a:srgbClr val="16385C"/>
             </a:solidFill>
-            <a:tailEnd type="triangle" w="med" len="med"/>
           </a:ln>
           <a:effectLst/>
         </p:spPr>
         <p:style>
-          <a:lnRef idx="2">
+          <a:lnRef idx="1">
             <a:schemeClr val="accent1"/>
           </a:lnRef>
-          <a:fillRef idx="0">
+          <a:fillRef idx="3">
             <a:schemeClr val="accent1"/>
           </a:fillRef>
-          <a:effectRef idx="1">
+          <a:effectRef idx="2">
             <a:schemeClr val="accent1"/>
           </a:effectRef>
           <a:fontRef idx="minor">
-            <a:schemeClr val="tx1"/>
+            <a:schemeClr val="lt1"/>
           </a:fontRef>
         </p:style>
-      </p:cxnSp>
-      <p:sp>
-        <p:nvSpPr>
-          <p:cNvPr id="11" name="Rounded Rectangle 10"/>
+        <p:txBody>
+          <a:bodyPr rtlCol="0" anchor="ctr"/>
+          <a:lstStyle/>
+          <a:p>
+            <a:pPr algn="ctr"/>
+          </a:p>
+        </p:txBody>
+      </p:sp>
+      <p:sp>
+        <p:nvSpPr>
+          <p:cNvPr id="11" name="TextBox 10"/>
+          <p:cNvSpPr txBox="1"/>
+          <p:nvPr/>
+        </p:nvSpPr>
+        <p:spPr>
+          <a:xfrm>
+            <a:off x="3611880" y="2089404"/>
+            <a:ext cx="2962656" cy="1874519"/>
+          </a:xfrm>
+          <a:prstGeom prst="rect">
+            <a:avLst/>
+          </a:prstGeom>
+          <a:noFill/>
+        </p:spPr>
+        <p:txBody>
+          <a:bodyPr wrap="square" anchor="ctr" lIns="18288" rIns="18288" tIns="9144" bIns="9144">
+            <a:spAutoFit/>
+          </a:bodyPr>
+          <a:lstStyle/>
+          <a:p>
+            <a:r>
+              <a:rPr sz="1750" b="1" i="0">
+                <a:solidFill>
+                  <a:srgbClr val="16385C"/>
+                </a:solidFill>
+                <a:latin typeface="Meiryo"/>
+                <a:ea typeface="Meiryo"/>
+              </a:rPr>
+              <a:t>動的アプローチ</a:t>
+            </a:r>
+          </a:p>
+          <a:p>
+            <a:pPr>
+              <a:lnSpc>
+                <a:spcPct val="110000"/>
+              </a:lnSpc>
+              <a:spcBef>
+                <a:spcPts val="600"/>
+              </a:spcBef>
+            </a:pPr>
+            <a:r>
+              <a:rPr sz="1400" b="0" i="0">
+                <a:solidFill>
+                  <a:srgbClr val="26303A"/>
+                </a:solidFill>
+                <a:latin typeface="Meiryo"/>
+                <a:ea typeface="Meiryo"/>
+              </a:rPr>
+              <a:t>外乱の発生後に，スケジュールを修正する</a:t>
+            </a:r>
+          </a:p>
+        </p:txBody>
+      </p:sp>
+      <p:sp>
+        <p:nvSpPr>
+          <p:cNvPr id="12" name="Rounded Rectangle 11"/>
           <p:cNvSpPr/>
           <p:nvPr/>
         </p:nvSpPr>
         <p:spPr>
           <a:xfrm>
-            <a:off x="566928" y="2743200"/>
-            <a:ext cx="3017520" cy="1097280"/>
+            <a:off x="3355848" y="4375404"/>
+            <a:ext cx="3474720" cy="1645920"/>
           </a:xfrm>
           <a:prstGeom prst="roundRect">
             <a:avLst>
@@ -23083,14 +23144,14 @@
       </p:sp>
       <p:sp>
         <p:nvSpPr>
-          <p:cNvPr id="12" name="TextBox 11"/>
+          <p:cNvPr id="13" name="TextBox 12"/>
           <p:cNvSpPr txBox="1"/>
           <p:nvPr/>
         </p:nvSpPr>
         <p:spPr>
           <a:xfrm>
-            <a:off x="841247" y="2871216"/>
-            <a:ext cx="2468879" cy="384048"/>
+            <a:off x="3611880" y="4375404"/>
+            <a:ext cx="2962656" cy="1645920"/>
           </a:xfrm>
           <a:prstGeom prst="rect">
             <a:avLst/>
@@ -23098,281 +23159,54 @@
           <a:noFill/>
         </p:spPr>
         <p:txBody>
-          <a:bodyPr wrap="square" anchor="t" lIns="18288" rIns="18288" tIns="9144" bIns="9144">
+          <a:bodyPr wrap="square" anchor="ctr" lIns="18288" rIns="18288" tIns="9144" bIns="9144">
             <a:spAutoFit/>
           </a:bodyPr>
           <a:lstStyle/>
           <a:p>
-            <a:pPr algn="l">
+            <a:r>
+              <a:rPr sz="1750" b="1" i="0">
+                <a:solidFill>
+                  <a:srgbClr val="6E7A88"/>
+                </a:solidFill>
+                <a:latin typeface="Meiryo"/>
+                <a:ea typeface="Meiryo"/>
+              </a:rPr>
+              <a:t>静的アプローチ</a:t>
+            </a:r>
+          </a:p>
+          <a:p>
+            <a:pPr>
               <a:lnSpc>
-                <a:spcPct val="105000"/>
+                <a:spcPct val="110000"/>
               </a:lnSpc>
+              <a:spcBef>
+                <a:spcPts val="600"/>
+              </a:spcBef>
             </a:pPr>
             <a:r>
-              <a:rPr sz="1800" b="1" i="0">
+              <a:rPr sz="1350" b="0" i="0">
                 <a:solidFill>
                   <a:srgbClr val="6E7A88"/>
                 </a:solidFill>
                 <a:latin typeface="Meiryo"/>
                 <a:ea typeface="Meiryo"/>
               </a:rPr>
-              <a:t>静的アプローチ</a:t>
-            </a:r>
-          </a:p>
-        </p:txBody>
-      </p:sp>
-      <p:sp>
-        <p:nvSpPr>
-          <p:cNvPr id="13" name="TextBox 12"/>
-          <p:cNvSpPr txBox="1"/>
-          <p:nvPr/>
-        </p:nvSpPr>
-        <p:spPr>
-          <a:xfrm>
-            <a:off x="841247" y="3310128"/>
-            <a:ext cx="2468879" cy="475488"/>
-          </a:xfrm>
-          <a:prstGeom prst="rect">
-            <a:avLst/>
-          </a:prstGeom>
-          <a:noFill/>
-        </p:spPr>
-        <p:txBody>
-          <a:bodyPr wrap="square" anchor="t" lIns="18288" rIns="18288" tIns="9144" bIns="9144">
-            <a:spAutoFit/>
-          </a:bodyPr>
-          <a:lstStyle/>
-          <a:p>
-            <a:pPr algn="l">
-              <a:lnSpc>
-                <a:spcPct val="105000"/>
-              </a:lnSpc>
-            </a:pPr>
-            <a:r>
-              <a:rPr sz="1450" b="0" i="0">
-                <a:solidFill>
-                  <a:srgbClr val="6E7A88"/>
-                </a:solidFill>
-                <a:latin typeface="Meiryo"/>
-                <a:ea typeface="Meiryo"/>
-              </a:rPr>
-              <a:t>事前に余裕を持たせ，外乱に備える</a:t>
-            </a:r>
-          </a:p>
-        </p:txBody>
-      </p:sp>
-      <p:cxnSp>
-        <p:nvCxnSpPr>
-          <p:cNvPr id="14" name="Connector 13"/>
-          <p:cNvCxnSpPr/>
-          <p:nvPr/>
-        </p:nvCxnSpPr>
-        <p:spPr>
-          <a:xfrm>
-            <a:off x="6095847" y="2432303"/>
-            <a:ext cx="1691640" cy="274321"/>
-          </a:xfrm>
-          <a:prstGeom prst="line">
-            <a:avLst/>
-          </a:prstGeom>
-          <a:ln w="27940">
-            <a:solidFill>
-              <a:srgbClr val="16385C"/>
-            </a:solidFill>
-            <a:tailEnd type="triangle" w="med" len="med"/>
-          </a:ln>
-          <a:effectLst/>
-        </p:spPr>
-        <p:style>
-          <a:lnRef idx="2">
-            <a:schemeClr val="accent1"/>
-          </a:lnRef>
-          <a:fillRef idx="0">
-            <a:schemeClr val="accent1"/>
-          </a:fillRef>
-          <a:effectRef idx="1">
-            <a:schemeClr val="accent1"/>
-          </a:effectRef>
-          <a:fontRef idx="minor">
-            <a:schemeClr val="tx1"/>
-          </a:fontRef>
-        </p:style>
-      </p:cxnSp>
-      <p:sp>
-        <p:nvSpPr>
-          <p:cNvPr id="15" name="Rounded Rectangle 14"/>
+              <a:t>外乱に対してロバストなスケジュールを事前に作成する</a:t>
+            </a:r>
+          </a:p>
+        </p:txBody>
+      </p:sp>
+      <p:sp>
+        <p:nvSpPr>
+          <p:cNvPr id="14" name="Rounded Rectangle 13"/>
           <p:cNvSpPr/>
           <p:nvPr/>
         </p:nvSpPr>
         <p:spPr>
           <a:xfrm>
-            <a:off x="3950208" y="2743200"/>
-            <a:ext cx="7674559" cy="1097280"/>
-          </a:xfrm>
-          <a:prstGeom prst="roundRect">
-            <a:avLst>
-              <a:gd name="adj" fmla="val 6000"/>
-            </a:avLst>
-          </a:prstGeom>
-          <a:solidFill>
-            <a:srgbClr val="EDF2F7"/>
-          </a:solidFill>
-          <a:ln w="22860">
-            <a:solidFill>
-              <a:srgbClr val="16385C"/>
-            </a:solidFill>
-          </a:ln>
-          <a:effectLst/>
-        </p:spPr>
-        <p:style>
-          <a:lnRef idx="1">
-            <a:schemeClr val="accent1"/>
-          </a:lnRef>
-          <a:fillRef idx="3">
-            <a:schemeClr val="accent1"/>
-          </a:fillRef>
-          <a:effectRef idx="2">
-            <a:schemeClr val="accent1"/>
-          </a:effectRef>
-          <a:fontRef idx="minor">
-            <a:schemeClr val="lt1"/>
-          </a:fontRef>
-        </p:style>
-        <p:txBody>
-          <a:bodyPr rtlCol="0" anchor="ctr"/>
-          <a:lstStyle/>
-          <a:p>
-            <a:pPr algn="ctr"/>
-          </a:p>
-        </p:txBody>
-      </p:sp>
-      <p:sp>
-        <p:nvSpPr>
-          <p:cNvPr id="16" name="TextBox 15"/>
-          <p:cNvSpPr txBox="1"/>
-          <p:nvPr/>
-        </p:nvSpPr>
-        <p:spPr>
-          <a:xfrm>
-            <a:off x="4224528" y="2871216"/>
-            <a:ext cx="7125919" cy="384048"/>
-          </a:xfrm>
-          <a:prstGeom prst="rect">
-            <a:avLst/>
-          </a:prstGeom>
-          <a:noFill/>
-        </p:spPr>
-        <p:txBody>
-          <a:bodyPr wrap="square" anchor="t" lIns="18288" rIns="18288" tIns="9144" bIns="9144">
-            <a:spAutoFit/>
-          </a:bodyPr>
-          <a:lstStyle/>
-          <a:p>
-            <a:pPr algn="l">
-              <a:lnSpc>
-                <a:spcPct val="105000"/>
-              </a:lnSpc>
-            </a:pPr>
-            <a:r>
-              <a:rPr sz="1800" b="1" i="0">
-                <a:solidFill>
-                  <a:srgbClr val="16385C"/>
-                </a:solidFill>
-                <a:latin typeface="Meiryo"/>
-                <a:ea typeface="Meiryo"/>
-              </a:rPr>
-              <a:t>動的アプローチ</a:t>
-            </a:r>
-          </a:p>
-        </p:txBody>
-      </p:sp>
-      <p:sp>
-        <p:nvSpPr>
-          <p:cNvPr id="17" name="TextBox 16"/>
-          <p:cNvSpPr txBox="1"/>
-          <p:nvPr/>
-        </p:nvSpPr>
-        <p:spPr>
-          <a:xfrm>
-            <a:off x="4224528" y="3310128"/>
-            <a:ext cx="7125919" cy="475488"/>
-          </a:xfrm>
-          <a:prstGeom prst="rect">
-            <a:avLst/>
-          </a:prstGeom>
-          <a:noFill/>
-        </p:spPr>
-        <p:txBody>
-          <a:bodyPr wrap="square" anchor="t" lIns="18288" rIns="18288" tIns="9144" bIns="9144">
-            <a:spAutoFit/>
-          </a:bodyPr>
-          <a:lstStyle/>
-          <a:p>
-            <a:pPr algn="l">
-              <a:lnSpc>
-                <a:spcPct val="105000"/>
-              </a:lnSpc>
-            </a:pPr>
-            <a:r>
-              <a:rPr sz="1450" b="0" i="0">
-                <a:solidFill>
-                  <a:srgbClr val="26303A"/>
-                </a:solidFill>
-                <a:latin typeface="Meiryo"/>
-                <a:ea typeface="Meiryo"/>
-              </a:rPr>
-              <a:t>外乱の発生後に，スケジュールを修正する</a:t>
-            </a:r>
-          </a:p>
-        </p:txBody>
-      </p:sp>
-      <p:cxnSp>
-        <p:nvCxnSpPr>
-          <p:cNvPr id="18" name="Connector 17"/>
-          <p:cNvCxnSpPr/>
-          <p:nvPr/>
-        </p:nvCxnSpPr>
-        <p:spPr>
-          <a:xfrm flipH="1">
-            <a:off x="5573268" y="3858768"/>
-            <a:ext cx="2214219" cy="539496"/>
-          </a:xfrm>
-          <a:prstGeom prst="line">
-            <a:avLst/>
-          </a:prstGeom>
-          <a:ln w="20320">
-            <a:solidFill>
-              <a:srgbClr val="6E7A88"/>
-            </a:solidFill>
-            <a:tailEnd type="triangle" w="med" len="med"/>
-          </a:ln>
-          <a:effectLst/>
-        </p:spPr>
-        <p:style>
-          <a:lnRef idx="2">
-            <a:schemeClr val="accent1"/>
-          </a:lnRef>
-          <a:fillRef idx="0">
-            <a:schemeClr val="accent1"/>
-          </a:fillRef>
-          <a:effectRef idx="1">
-            <a:schemeClr val="accent1"/>
-          </a:effectRef>
-          <a:fontRef idx="minor">
-            <a:schemeClr val="tx1"/>
-          </a:fontRef>
-        </p:style>
-      </p:cxnSp>
-      <p:sp>
-        <p:nvSpPr>
-          <p:cNvPr id="19" name="Rounded Rectangle 18"/>
-          <p:cNvSpPr/>
-          <p:nvPr/>
-        </p:nvSpPr>
-        <p:spPr>
-          <a:xfrm>
-            <a:off x="3950208" y="4434840"/>
-            <a:ext cx="3246120" cy="1783080"/>
+            <a:off x="7333488" y="4375404"/>
+            <a:ext cx="4291279" cy="1645920"/>
           </a:xfrm>
           <a:prstGeom prst="roundRect">
             <a:avLst>
@@ -23413,14 +23247,14 @@
       </p:sp>
       <p:sp>
         <p:nvSpPr>
-          <p:cNvPr id="20" name="TextBox 19"/>
+          <p:cNvPr id="15" name="TextBox 14"/>
           <p:cNvSpPr txBox="1"/>
           <p:nvPr/>
         </p:nvSpPr>
         <p:spPr>
           <a:xfrm>
-            <a:off x="4178808" y="4581144"/>
-            <a:ext cx="2788920" cy="384048"/>
+            <a:off x="7589519" y="4375404"/>
+            <a:ext cx="3779215" cy="1645920"/>
           </a:xfrm>
           <a:prstGeom prst="rect">
             <a:avLst/>
@@ -23428,18 +23262,13 @@
           <a:noFill/>
         </p:spPr>
         <p:txBody>
-          <a:bodyPr wrap="square" anchor="t" lIns="18288" rIns="18288" tIns="9144" bIns="9144">
+          <a:bodyPr wrap="square" anchor="ctr" lIns="18288" rIns="18288" tIns="9144" bIns="9144">
             <a:spAutoFit/>
           </a:bodyPr>
           <a:lstStyle/>
           <a:p>
-            <a:pPr algn="l">
-              <a:lnSpc>
-                <a:spcPct val="105000"/>
-              </a:lnSpc>
-            </a:pPr>
-            <a:r>
-              <a:rPr sz="1550" b="1" i="0">
+            <a:r>
+              <a:rPr sz="1750" b="1" i="0">
                 <a:solidFill>
                   <a:srgbClr val="6E7A88"/>
                 </a:solidFill>
@@ -23447,224 +23276,6 @@
                 <a:ea typeface="Meiryo"/>
               </a:rPr>
               <a:t>完全リアクティブ</a:t>
-            </a:r>
-          </a:p>
-        </p:txBody>
-      </p:sp>
-      <p:sp>
-        <p:nvSpPr>
-          <p:cNvPr id="21" name="TextBox 20"/>
-          <p:cNvSpPr txBox="1"/>
-          <p:nvPr/>
-        </p:nvSpPr>
-        <p:spPr>
-          <a:xfrm>
-            <a:off x="4178808" y="5038344"/>
-            <a:ext cx="2788920" cy="1051560"/>
-          </a:xfrm>
-          <a:prstGeom prst="rect">
-            <a:avLst/>
-          </a:prstGeom>
-          <a:noFill/>
-        </p:spPr>
-        <p:txBody>
-          <a:bodyPr wrap="square" anchor="t" lIns="18288" rIns="18288" tIns="9144" bIns="9144">
-            <a:spAutoFit/>
-          </a:bodyPr>
-          <a:lstStyle/>
-          <a:p>
-            <a:pPr algn="l">
-              <a:lnSpc>
-                <a:spcPct val="110000"/>
-              </a:lnSpc>
-            </a:pPr>
-            <a:r>
-              <a:rPr sz="1300" b="0" i="0">
-                <a:solidFill>
-                  <a:srgbClr val="6E7A88"/>
-                </a:solidFill>
-                <a:latin typeface="Meiryo"/>
-                <a:ea typeface="Meiryo"/>
-              </a:rPr>
-              <a:t>事前のスケジュールを持たず，ディスパッチングルールなどで作業をその場で決める</a:t>
-            </a:r>
-          </a:p>
-        </p:txBody>
-      </p:sp>
-      <p:cxnSp>
-        <p:nvCxnSpPr>
-          <p:cNvPr id="22" name="Connector 21"/>
-          <p:cNvCxnSpPr/>
-          <p:nvPr/>
-        </p:nvCxnSpPr>
-        <p:spPr>
-          <a:xfrm>
-            <a:off x="7787487" y="3858768"/>
-            <a:ext cx="1805940" cy="539496"/>
-          </a:xfrm>
-          <a:prstGeom prst="line">
-            <a:avLst/>
-          </a:prstGeom>
-          <a:ln w="33020">
-            <a:solidFill>
-              <a:srgbClr val="16385C"/>
-            </a:solidFill>
-            <a:tailEnd type="triangle" w="med" len="med"/>
-          </a:ln>
-          <a:effectLst/>
-        </p:spPr>
-        <p:style>
-          <a:lnRef idx="2">
-            <a:schemeClr val="accent1"/>
-          </a:lnRef>
-          <a:fillRef idx="0">
-            <a:schemeClr val="accent1"/>
-          </a:fillRef>
-          <a:effectRef idx="1">
-            <a:schemeClr val="accent1"/>
-          </a:effectRef>
-          <a:fontRef idx="minor">
-            <a:schemeClr val="tx1"/>
-          </a:fontRef>
-        </p:style>
-      </p:cxnSp>
-      <p:sp>
-        <p:nvSpPr>
-          <p:cNvPr id="23" name="Rounded Rectangle 22"/>
-          <p:cNvSpPr/>
-          <p:nvPr/>
-        </p:nvSpPr>
-        <p:spPr>
-          <a:xfrm>
-            <a:off x="7562088" y="4434840"/>
-            <a:ext cx="4062679" cy="1783080"/>
-          </a:xfrm>
-          <a:prstGeom prst="roundRect">
-            <a:avLst>
-              <a:gd name="adj" fmla="val 6000"/>
-            </a:avLst>
-          </a:prstGeom>
-          <a:solidFill>
-            <a:srgbClr val="123150"/>
-          </a:solidFill>
-          <a:ln>
-            <a:noFill/>
-          </a:ln>
-          <a:effectLst/>
-        </p:spPr>
-        <p:style>
-          <a:lnRef idx="1">
-            <a:schemeClr val="accent1"/>
-          </a:lnRef>
-          <a:fillRef idx="3">
-            <a:schemeClr val="accent1"/>
-          </a:fillRef>
-          <a:effectRef idx="2">
-            <a:schemeClr val="accent1"/>
-          </a:effectRef>
-          <a:fontRef idx="minor">
-            <a:schemeClr val="lt1"/>
-          </a:fontRef>
-        </p:style>
-        <p:txBody>
-          <a:bodyPr rtlCol="0" anchor="ctr"/>
-          <a:lstStyle/>
-          <a:p>
-            <a:pPr algn="ctr"/>
-          </a:p>
-        </p:txBody>
-      </p:sp>
-      <p:sp>
-        <p:nvSpPr>
-          <p:cNvPr id="24" name="Rounded Rectangle 23"/>
-          <p:cNvSpPr/>
-          <p:nvPr/>
-        </p:nvSpPr>
-        <p:spPr>
-          <a:xfrm>
-            <a:off x="10436047" y="4261103"/>
-            <a:ext cx="1005840" cy="347472"/>
-          </a:xfrm>
-          <a:prstGeom prst="roundRect">
-            <a:avLst>
-              <a:gd name="adj" fmla="val 40000"/>
-            </a:avLst>
-          </a:prstGeom>
-          <a:solidFill>
-            <a:srgbClr val="3E618C"/>
-          </a:solidFill>
-          <a:ln>
-            <a:noFill/>
-          </a:ln>
-          <a:effectLst/>
-        </p:spPr>
-        <p:style>
-          <a:lnRef idx="1">
-            <a:schemeClr val="accent1"/>
-          </a:lnRef>
-          <a:fillRef idx="3">
-            <a:schemeClr val="accent1"/>
-          </a:fillRef>
-          <a:effectRef idx="2">
-            <a:schemeClr val="accent1"/>
-          </a:effectRef>
-          <a:fontRef idx="minor">
-            <a:schemeClr val="lt1"/>
-          </a:fontRef>
-        </p:style>
-        <p:txBody>
-          <a:bodyPr rtlCol="0" anchor="ctr" wrap="square" lIns="54864" rIns="54864" tIns="18288" bIns="18288"/>
-          <a:lstStyle/>
-          <a:p>
-            <a:pPr algn="ctr">
-              <a:lnSpc>
-                <a:spcPct val="100000"/>
-              </a:lnSpc>
-            </a:pPr>
-            <a:r>
-              <a:rPr sz="1250" b="1" i="0">
-                <a:solidFill>
-                  <a:srgbClr val="FFFFFF"/>
-                </a:solidFill>
-                <a:latin typeface="Meiryo"/>
-                <a:ea typeface="Meiryo"/>
-              </a:rPr>
-              <a:t>本研究</a:t>
-            </a:r>
-          </a:p>
-        </p:txBody>
-      </p:sp>
-      <p:sp>
-        <p:nvSpPr>
-          <p:cNvPr id="25" name="TextBox 24"/>
-          <p:cNvSpPr txBox="1"/>
-          <p:nvPr/>
-        </p:nvSpPr>
-        <p:spPr>
-          <a:xfrm>
-            <a:off x="7818119" y="4709159"/>
-            <a:ext cx="3550615" cy="1417319"/>
-          </a:xfrm>
-          <a:prstGeom prst="rect">
-            <a:avLst/>
-          </a:prstGeom>
-          <a:noFill/>
-        </p:spPr>
-        <p:txBody>
-          <a:bodyPr wrap="square" anchor="t" lIns="18288" rIns="18288" tIns="9144" bIns="9144">
-            <a:spAutoFit/>
-          </a:bodyPr>
-          <a:lstStyle/>
-          <a:p>
-            <a:r>
-              <a:rPr sz="1550" b="1" i="0">
-                <a:solidFill>
-                  <a:srgbClr val="FFFFFF"/>
-                </a:solidFill>
-                <a:latin typeface="Meiryo"/>
-                <a:ea typeface="Meiryo"/>
-              </a:rPr>
-              <a:t>予測リアクティブ再スケジューリング</a:t>
             </a:r>
           </a:p>
           <a:p>
@@ -23679,15 +23290,176 @@
             <a:r>
               <a:rPr sz="1350" b="0" i="0">
                 <a:solidFill>
+                  <a:srgbClr val="6E7A88"/>
+                </a:solidFill>
+                <a:latin typeface="Meiryo"/>
+                <a:ea typeface="Meiryo"/>
+              </a:rPr>
+              <a:t>事前のスケジュールを持たず，ディスパッチングルールなどで作業をその場で決める</a:t>
+            </a:r>
+          </a:p>
+        </p:txBody>
+      </p:sp>
+      <p:sp>
+        <p:nvSpPr>
+          <p:cNvPr id="16" name="Rounded Rectangle 15"/>
+          <p:cNvSpPr/>
+          <p:nvPr/>
+        </p:nvSpPr>
+        <p:spPr>
+          <a:xfrm>
+            <a:off x="7333488" y="2089404"/>
+            <a:ext cx="4291279" cy="1874519"/>
+          </a:xfrm>
+          <a:prstGeom prst="roundRect">
+            <a:avLst>
+              <a:gd name="adj" fmla="val 6000"/>
+            </a:avLst>
+          </a:prstGeom>
+          <a:solidFill>
+            <a:srgbClr val="123150"/>
+          </a:solidFill>
+          <a:ln>
+            <a:noFill/>
+          </a:ln>
+          <a:effectLst/>
+        </p:spPr>
+        <p:style>
+          <a:lnRef idx="1">
+            <a:schemeClr val="accent1"/>
+          </a:lnRef>
+          <a:fillRef idx="3">
+            <a:schemeClr val="accent1"/>
+          </a:fillRef>
+          <a:effectRef idx="2">
+            <a:schemeClr val="accent1"/>
+          </a:effectRef>
+          <a:fontRef idx="minor">
+            <a:schemeClr val="lt1"/>
+          </a:fontRef>
+        </p:style>
+        <p:txBody>
+          <a:bodyPr rtlCol="0" anchor="ctr"/>
+          <a:lstStyle/>
+          <a:p>
+            <a:pPr algn="ctr"/>
+          </a:p>
+        </p:txBody>
+      </p:sp>
+      <p:sp>
+        <p:nvSpPr>
+          <p:cNvPr id="17" name="Rounded Rectangle 16"/>
+          <p:cNvSpPr/>
+          <p:nvPr/>
+        </p:nvSpPr>
+        <p:spPr>
+          <a:xfrm>
+            <a:off x="10436047" y="1915668"/>
+            <a:ext cx="1005840" cy="347472"/>
+          </a:xfrm>
+          <a:prstGeom prst="roundRect">
+            <a:avLst>
+              <a:gd name="adj" fmla="val 40000"/>
+            </a:avLst>
+          </a:prstGeom>
+          <a:solidFill>
+            <a:srgbClr val="3E618C"/>
+          </a:solidFill>
+          <a:ln>
+            <a:noFill/>
+          </a:ln>
+          <a:effectLst/>
+        </p:spPr>
+        <p:style>
+          <a:lnRef idx="1">
+            <a:schemeClr val="accent1"/>
+          </a:lnRef>
+          <a:fillRef idx="3">
+            <a:schemeClr val="accent1"/>
+          </a:fillRef>
+          <a:effectRef idx="2">
+            <a:schemeClr val="accent1"/>
+          </a:effectRef>
+          <a:fontRef idx="minor">
+            <a:schemeClr val="lt1"/>
+          </a:fontRef>
+        </p:style>
+        <p:txBody>
+          <a:bodyPr rtlCol="0" anchor="ctr" wrap="square" lIns="54864" rIns="54864" tIns="18288" bIns="18288"/>
+          <a:lstStyle/>
+          <a:p>
+            <a:pPr algn="ctr">
+              <a:lnSpc>
+                <a:spcPct val="100000"/>
+              </a:lnSpc>
+            </a:pPr>
+            <a:r>
+              <a:rPr sz="1250" b="1" i="0">
+                <a:solidFill>
                   <a:srgbClr val="FFFFFF"/>
                 </a:solidFill>
                 <a:latin typeface="Meiryo"/>
                 <a:ea typeface="Meiryo"/>
               </a:rPr>
+              <a:t>本研究</a:t>
+            </a:r>
+          </a:p>
+        </p:txBody>
+      </p:sp>
+      <p:sp>
+        <p:nvSpPr>
+          <p:cNvPr id="18" name="TextBox 17"/>
+          <p:cNvSpPr txBox="1"/>
+          <p:nvPr/>
+        </p:nvSpPr>
+        <p:spPr>
+          <a:xfrm>
+            <a:off x="7589519" y="2089404"/>
+            <a:ext cx="3779215" cy="1874519"/>
+          </a:xfrm>
+          <a:prstGeom prst="rect">
+            <a:avLst/>
+          </a:prstGeom>
+          <a:noFill/>
+        </p:spPr>
+        <p:txBody>
+          <a:bodyPr wrap="square" anchor="ctr" lIns="18288" rIns="18288" tIns="9144" bIns="9144">
+            <a:spAutoFit/>
+          </a:bodyPr>
+          <a:lstStyle/>
+          <a:p>
+            <a:r>
+              <a:rPr sz="1600" b="1" i="0">
+                <a:solidFill>
+                  <a:srgbClr val="FFFFFF"/>
+                </a:solidFill>
+                <a:latin typeface="Meiryo"/>
+                <a:ea typeface="Meiryo"/>
+              </a:rPr>
+              <a:t>予測リアクティブ再スケジューリング</a:t>
+            </a:r>
+          </a:p>
+          <a:p>
+            <a:pPr>
+              <a:lnSpc>
+                <a:spcPct val="110000"/>
+              </a:lnSpc>
+              <a:spcBef>
+                <a:spcPts val="600"/>
+              </a:spcBef>
+            </a:pPr>
+            <a:r>
+              <a:rPr sz="1400" b="0" i="0">
+                <a:solidFill>
+                  <a:srgbClr val="FFFFFF"/>
+                </a:solidFill>
+                <a:latin typeface="Meiryo"/>
+                <a:ea typeface="Meiryo"/>
+              </a:rPr>
               <a:t>外乱が起きたら，外乱前のスケジュール（</a:t>
             </a:r>
             <a:r>
-              <a:rPr sz="1350" b="1" i="0">
+              <a:rPr sz="1400" b="1" i="0">
                 <a:solidFill>
                   <a:srgbClr val="FFFFFF"/>
                 </a:solidFill>
@@ -23697,7 +23469,7 @@
               <a:t>初期スケジュール </a:t>
             </a:r>
             <a:r>
-              <a:rPr sz="1350" b="1" i="1">
+              <a:rPr sz="1400" b="1" i="1">
                 <a:solidFill>
                   <a:srgbClr val="FFFFFF"/>
                 </a:solidFill>
@@ -23707,7 +23479,7 @@
               <a:t>S</a:t>
             </a:r>
             <a:r>
-              <a:rPr sz="971" b="1" i="1" baseline="-22000">
+              <a:rPr sz="1008" b="1" i="1" baseline="-22000">
                 <a:solidFill>
                   <a:srgbClr val="FFFFFF"/>
                 </a:solidFill>
@@ -23717,7 +23489,7 @@
               <a:t>p</a:t>
             </a:r>
             <a:r>
-              <a:rPr sz="1350" b="0" i="0">
+              <a:rPr sz="1400" b="0" i="0">
                 <a:solidFill>
                   <a:srgbClr val="FFFFFF"/>
                 </a:solidFill>
@@ -23737,7 +23509,7 @@
               </a:spcBef>
             </a:pPr>
             <a:r>
-              <a:rPr sz="1350" b="0" i="0">
+              <a:rPr sz="1400" b="0" i="0">
                 <a:solidFill>
                   <a:srgbClr val="FFFFFF"/>
                 </a:solidFill>
@@ -23747,7 +23519,7 @@
               <a:t>→ </a:t>
             </a:r>
             <a:r>
-              <a:rPr sz="1350" b="0" i="1">
+              <a:rPr sz="1400" b="0" i="1">
                 <a:solidFill>
                   <a:srgbClr val="FFFFFF"/>
                 </a:solidFill>
@@ -23757,7 +23529,7 @@
               <a:t>S</a:t>
             </a:r>
             <a:r>
-              <a:rPr sz="971" b="0" i="1" baseline="-22000">
+              <a:rPr sz="1008" b="0" i="1" baseline="-22000">
                 <a:solidFill>
                   <a:srgbClr val="FFFFFF"/>
                 </a:solidFill>
@@ -23767,7 +23539,7 @@
               <a:t>p</a:t>
             </a:r>
             <a:r>
-              <a:rPr sz="1350" b="0" i="0">
+              <a:rPr sz="1400" b="0" i="0">
                 <a:solidFill>
                   <a:srgbClr val="FFFFFF"/>
                 </a:solidFill>
@@ -23777,7 +23549,7 @@
               <a:t> が存在するので，</a:t>
             </a:r>
             <a:r>
-              <a:rPr sz="1350" b="1" i="1">
+              <a:rPr sz="1400" b="1" i="1">
                 <a:solidFill>
                   <a:srgbClr val="FFD98A"/>
                 </a:solidFill>
@@ -23787,7 +23559,7 @@
               <a:t>S</a:t>
             </a:r>
             <a:r>
-              <a:rPr sz="971" b="1" i="1" baseline="-22000">
+              <a:rPr sz="1008" b="1" i="1" baseline="-22000">
                 <a:solidFill>
                   <a:srgbClr val="FFD98A"/>
                 </a:solidFill>
@@ -23797,7 +23569,7 @@
               <a:t>p</a:t>
             </a:r>
             <a:r>
-              <a:rPr sz="1350" b="1" i="0">
+              <a:rPr sz="1400" b="1" i="0">
                 <a:solidFill>
                   <a:srgbClr val="FFD98A"/>
                 </a:solidFill>
@@ -23807,7 +23579,7 @@
               <a:t> からの変更量</a:t>
             </a:r>
             <a:r>
-              <a:rPr sz="1350" b="0" i="0">
+              <a:rPr sz="1400" b="0" i="0">
                 <a:solidFill>
                   <a:srgbClr val="FFFFFF"/>
                 </a:solidFill>
@@ -23819,6 +23591,154 @@
           </a:p>
         </p:txBody>
       </p:sp>
+      <p:cxnSp>
+        <p:nvCxnSpPr>
+          <p:cNvPr id="19" name="Connector 18"/>
+          <p:cNvCxnSpPr/>
+          <p:nvPr/>
+        </p:nvCxnSpPr>
+        <p:spPr>
+          <a:xfrm>
+            <a:off x="2880360" y="3026664"/>
+            <a:ext cx="448056" cy="0"/>
+          </a:xfrm>
+          <a:prstGeom prst="line">
+            <a:avLst/>
+          </a:prstGeom>
+          <a:ln w="30480">
+            <a:solidFill>
+              <a:srgbClr val="16385C"/>
+            </a:solidFill>
+            <a:tailEnd type="triangle" w="med" len="med"/>
+          </a:ln>
+          <a:effectLst/>
+        </p:spPr>
+        <p:style>
+          <a:lnRef idx="2">
+            <a:schemeClr val="accent1"/>
+          </a:lnRef>
+          <a:fillRef idx="0">
+            <a:schemeClr val="accent1"/>
+          </a:fillRef>
+          <a:effectRef idx="1">
+            <a:schemeClr val="accent1"/>
+          </a:effectRef>
+          <a:fontRef idx="minor">
+            <a:schemeClr val="tx1"/>
+          </a:fontRef>
+        </p:style>
+      </p:cxnSp>
+      <p:cxnSp>
+        <p:nvCxnSpPr>
+          <p:cNvPr id="20" name="Connector 19"/>
+          <p:cNvCxnSpPr/>
+          <p:nvPr/>
+        </p:nvCxnSpPr>
+        <p:spPr>
+          <a:xfrm>
+            <a:off x="2880360" y="5198364"/>
+            <a:ext cx="448056" cy="0"/>
+          </a:xfrm>
+          <a:prstGeom prst="line">
+            <a:avLst/>
+          </a:prstGeom>
+          <a:ln w="20320">
+            <a:solidFill>
+              <a:srgbClr val="6E7A88"/>
+            </a:solidFill>
+            <a:tailEnd type="triangle" w="med" len="med"/>
+          </a:ln>
+          <a:effectLst/>
+        </p:spPr>
+        <p:style>
+          <a:lnRef idx="2">
+            <a:schemeClr val="accent1"/>
+          </a:lnRef>
+          <a:fillRef idx="0">
+            <a:schemeClr val="accent1"/>
+          </a:fillRef>
+          <a:effectRef idx="1">
+            <a:schemeClr val="accent1"/>
+          </a:effectRef>
+          <a:fontRef idx="minor">
+            <a:schemeClr val="tx1"/>
+          </a:fontRef>
+        </p:style>
+      </p:cxnSp>
+      <p:cxnSp>
+        <p:nvCxnSpPr>
+          <p:cNvPr id="21" name="Connector 20"/>
+          <p:cNvCxnSpPr/>
+          <p:nvPr/>
+        </p:nvCxnSpPr>
+        <p:spPr>
+          <a:xfrm>
+            <a:off x="6858000" y="3026664"/>
+            <a:ext cx="448055" cy="2171700"/>
+          </a:xfrm>
+          <a:prstGeom prst="bentConnector3">
+            <a:avLst/>
+          </a:prstGeom>
+          <a:ln w="20320">
+            <a:solidFill>
+              <a:srgbClr val="6E7A88"/>
+            </a:solidFill>
+            <a:tailEnd type="triangle" w="med" len="med"/>
+          </a:ln>
+          <a:effectLst/>
+        </p:spPr>
+        <p:style>
+          <a:lnRef idx="2">
+            <a:schemeClr val="accent1"/>
+          </a:lnRef>
+          <a:fillRef idx="0">
+            <a:schemeClr val="accent1"/>
+          </a:fillRef>
+          <a:effectRef idx="1">
+            <a:schemeClr val="accent1"/>
+          </a:effectRef>
+          <a:fontRef idx="minor">
+            <a:schemeClr val="tx1"/>
+          </a:fontRef>
+        </p:style>
+      </p:cxnSp>
+      <p:cxnSp>
+        <p:nvCxnSpPr>
+          <p:cNvPr id="22" name="Connector 21"/>
+          <p:cNvCxnSpPr/>
+          <p:nvPr/>
+        </p:nvCxnSpPr>
+        <p:spPr>
+          <a:xfrm>
+            <a:off x="6858000" y="3026664"/>
+            <a:ext cx="448055" cy="0"/>
+          </a:xfrm>
+          <a:prstGeom prst="line">
+            <a:avLst/>
+          </a:prstGeom>
+          <a:ln w="33020">
+            <a:solidFill>
+              <a:srgbClr val="16385C"/>
+            </a:solidFill>
+            <a:tailEnd type="triangle" w="med" len="med"/>
+          </a:ln>
+          <a:effectLst/>
+        </p:spPr>
+        <p:style>
+          <a:lnRef idx="2">
+            <a:schemeClr val="accent1"/>
+          </a:lnRef>
+          <a:fillRef idx="0">
+            <a:schemeClr val="accent1"/>
+          </a:fillRef>
+          <a:effectRef idx="1">
+            <a:schemeClr val="accent1"/>
+          </a:effectRef>
+          <a:fontRef idx="minor">
+            <a:schemeClr val="tx1"/>
+          </a:fontRef>
+        </p:style>
+      </p:cxnSp>
     </p:spTree>
   </p:cSld>
   <p:clrMapOvr>
@@ -26775,16 +26695,53 @@
           </a:fontRef>
         </p:style>
       </p:cxnSp>
-      <p:sp>
-        <p:nvSpPr>
-          <p:cNvPr id="29" name="TextBox 28"/>
+      <p:cxnSp>
+        <p:nvCxnSpPr>
+          <p:cNvPr id="29" name="Connector 28"/>
+          <p:cNvCxnSpPr/>
+          <p:nvPr/>
+        </p:nvCxnSpPr>
+        <p:spPr>
+          <a:xfrm>
+            <a:off x="5546750" y="2606039"/>
+            <a:ext cx="0" cy="1298449"/>
+          </a:xfrm>
+          <a:prstGeom prst="line">
+            <a:avLst/>
+          </a:prstGeom>
+          <a:ln w="17780">
+            <a:solidFill>
+              <a:srgbClr val="6E7A88"/>
+            </a:solidFill>
+            <a:prstDash val="sysDot"/>
+          </a:ln>
+          <a:effectLst/>
+        </p:spPr>
+        <p:style>
+          <a:lnRef idx="2">
+            <a:schemeClr val="accent1"/>
+          </a:lnRef>
+          <a:fillRef idx="0">
+            <a:schemeClr val="accent1"/>
+          </a:fillRef>
+          <a:effectRef idx="1">
+            <a:schemeClr val="accent1"/>
+          </a:effectRef>
+          <a:fontRef idx="minor">
+            <a:schemeClr val="tx1"/>
+          </a:fontRef>
+        </p:style>
+      </p:cxnSp>
+      <p:sp>
+        <p:nvSpPr>
+          <p:cNvPr id="30" name="TextBox 29"/>
           <p:cNvSpPr txBox="1"/>
           <p:nvPr/>
         </p:nvSpPr>
         <p:spPr>
           <a:xfrm>
-            <a:off x="2995574" y="2404872"/>
-            <a:ext cx="457200" cy="237744"/>
+            <a:off x="5272430" y="2404872"/>
+            <a:ext cx="548640" cy="237744"/>
           </a:xfrm>
           <a:prstGeom prst="rect">
             <a:avLst/>
@@ -26803,6 +26760,46 @@
               </a:lnSpc>
             </a:pPr>
             <a:r>
+              <a:rPr sz="1000" b="0" i="0">
+                <a:solidFill>
+                  <a:srgbClr val="6E7A88"/>
+                </a:solidFill>
+                <a:latin typeface="Meiryo"/>
+                <a:ea typeface="Meiryo"/>
+              </a:rPr>
+              <a:t>19</a:t>
+            </a:r>
+          </a:p>
+        </p:txBody>
+      </p:sp>
+      <p:sp>
+        <p:nvSpPr>
+          <p:cNvPr id="31" name="TextBox 30"/>
+          <p:cNvSpPr txBox="1"/>
+          <p:nvPr/>
+        </p:nvSpPr>
+        <p:spPr>
+          <a:xfrm>
+            <a:off x="2995574" y="2404872"/>
+            <a:ext cx="457200" cy="237744"/>
+          </a:xfrm>
+          <a:prstGeom prst="rect">
+            <a:avLst/>
+          </a:prstGeom>
+          <a:noFill/>
+        </p:spPr>
+        <p:txBody>
+          <a:bodyPr wrap="square" anchor="t" lIns="18288" rIns="18288" tIns="9144" bIns="9144">
+            <a:spAutoFit/>
+          </a:bodyPr>
+          <a:lstStyle/>
+          <a:p>
+            <a:pPr algn="ctr">
+              <a:lnSpc>
+                <a:spcPct val="105000"/>
+              </a:lnSpc>
+            </a:pPr>
+            <a:r>
               <a:rPr sz="1150" b="1" i="1">
                 <a:solidFill>
                   <a:srgbClr val="26303A"/>
@@ -26827,7 +26824,7 @@
       </p:sp>
       <p:sp>
         <p:nvSpPr>
-          <p:cNvPr id="30" name="TextBox 29"/>
+          <p:cNvPr id="32" name="TextBox 31"/>
           <p:cNvSpPr txBox="1"/>
           <p:nvPr/>
         </p:nvSpPr>
@@ -26867,7 +26864,7 @@
       </p:sp>
       <p:sp>
         <p:nvSpPr>
-          <p:cNvPr id="31" name="TextBox 30"/>
+          <p:cNvPr id="33" name="TextBox 32"/>
           <p:cNvSpPr txBox="1"/>
           <p:nvPr/>
         </p:nvSpPr>
@@ -26907,7 +26904,7 @@
       </p:sp>
       <p:sp>
         <p:nvSpPr>
-          <p:cNvPr id="32" name="Rounded Rectangle 31"/>
+          <p:cNvPr id="34" name="Rounded Rectangle 33"/>
           <p:cNvSpPr/>
           <p:nvPr/>
         </p:nvSpPr>
@@ -26955,7 +26952,7 @@
       </p:sp>
       <p:sp>
         <p:nvSpPr>
-          <p:cNvPr id="33" name="TextBox 32"/>
+          <p:cNvPr id="35" name="TextBox 34"/>
           <p:cNvSpPr txBox="1"/>
           <p:nvPr/>
         </p:nvSpPr>
@@ -26995,7 +26992,7 @@
       </p:sp>
       <p:sp>
         <p:nvSpPr>
-          <p:cNvPr id="34" name="Rounded Rectangle 33"/>
+          <p:cNvPr id="36" name="Rounded Rectangle 35"/>
           <p:cNvSpPr/>
           <p:nvPr/>
         </p:nvSpPr>
@@ -27055,7 +27052,7 @@
       </p:sp>
       <p:sp>
         <p:nvSpPr>
-          <p:cNvPr id="35" name="Rounded Rectangle 34"/>
+          <p:cNvPr id="37" name="Rounded Rectangle 36"/>
           <p:cNvSpPr/>
           <p:nvPr/>
         </p:nvSpPr>
@@ -27115,7 +27112,7 @@
       </p:sp>
       <p:sp>
         <p:nvSpPr>
-          <p:cNvPr id="36" name="TextBox 35"/>
+          <p:cNvPr id="38" name="TextBox 37"/>
           <p:cNvSpPr txBox="1"/>
           <p:nvPr/>
         </p:nvSpPr>
@@ -27155,7 +27152,7 @@
       </p:sp>
       <p:sp>
         <p:nvSpPr>
-          <p:cNvPr id="37" name="Rounded Rectangle 36"/>
+          <p:cNvPr id="39" name="Rounded Rectangle 38"/>
           <p:cNvSpPr/>
           <p:nvPr/>
         </p:nvSpPr>
@@ -27215,7 +27212,7 @@
       </p:sp>
       <p:sp>
         <p:nvSpPr>
-          <p:cNvPr id="38" name="Rounded Rectangle 37"/>
+          <p:cNvPr id="40" name="Rounded Rectangle 39"/>
           <p:cNvSpPr/>
           <p:nvPr/>
         </p:nvSpPr>
@@ -27275,7 +27272,7 @@
       </p:sp>
       <p:sp>
         <p:nvSpPr>
-          <p:cNvPr id="39" name="Rounded Rectangle 38"/>
+          <p:cNvPr id="41" name="Rounded Rectangle 40"/>
           <p:cNvSpPr/>
           <p:nvPr/>
         </p:nvSpPr>
@@ -27335,7 +27332,7 @@
       </p:sp>
       <p:sp>
         <p:nvSpPr>
-          <p:cNvPr id="40" name="TextBox 39"/>
+          <p:cNvPr id="42" name="TextBox 41"/>
           <p:cNvSpPr txBox="1"/>
           <p:nvPr/>
         </p:nvSpPr>
@@ -27375,7 +27372,7 @@
       </p:sp>
       <p:sp>
         <p:nvSpPr>
-          <p:cNvPr id="41" name="Rounded Rectangle 40"/>
+          <p:cNvPr id="43" name="Rounded Rectangle 42"/>
           <p:cNvSpPr/>
           <p:nvPr/>
         </p:nvSpPr>
@@ -27435,7 +27432,7 @@
       </p:sp>
       <p:sp>
         <p:nvSpPr>
-          <p:cNvPr id="42" name="Rounded Rectangle 41"/>
+          <p:cNvPr id="44" name="Rounded Rectangle 43"/>
           <p:cNvSpPr/>
           <p:nvPr/>
         </p:nvSpPr>
@@ -27495,7 +27492,7 @@
       </p:sp>
       <p:sp>
         <p:nvSpPr>
-          <p:cNvPr id="43" name="Rounded Rectangle 42"/>
+          <p:cNvPr id="45" name="Rounded Rectangle 44"/>
           <p:cNvSpPr/>
           <p:nvPr/>
         </p:nvSpPr>
@@ -27543,7 +27540,7 @@
       </p:sp>
       <p:sp>
         <p:nvSpPr>
-          <p:cNvPr id="44" name="Rounded Rectangle 43"/>
+          <p:cNvPr id="46" name="Rounded Rectangle 45"/>
           <p:cNvSpPr/>
           <p:nvPr/>
         </p:nvSpPr>
@@ -27603,7 +27600,7 @@
       </p:sp>
       <p:sp>
         <p:nvSpPr>
-          <p:cNvPr id="45" name="TextBox 44"/>
+          <p:cNvPr id="47" name="TextBox 46"/>
           <p:cNvSpPr txBox="1"/>
           <p:nvPr/>
         </p:nvSpPr>
@@ -27643,7 +27640,7 @@
       </p:sp>
       <p:sp>
         <p:nvSpPr>
-          <p:cNvPr id="46" name="Rounded Rectangle 45"/>
+          <p:cNvPr id="48" name="Rounded Rectangle 47"/>
           <p:cNvSpPr/>
           <p:nvPr/>
         </p:nvSpPr>
@@ -27703,7 +27700,7 @@
       </p:sp>
       <p:sp>
         <p:nvSpPr>
-          <p:cNvPr id="47" name="Rounded Rectangle 46"/>
+          <p:cNvPr id="49" name="Rounded Rectangle 48"/>
           <p:cNvSpPr/>
           <p:nvPr/>
         </p:nvSpPr>
@@ -27765,7 +27762,7 @@
       </p:sp>
       <p:sp>
         <p:nvSpPr>
-          <p:cNvPr id="48" name="Rounded Rectangle 47"/>
+          <p:cNvPr id="50" name="Rounded Rectangle 49"/>
           <p:cNvSpPr/>
           <p:nvPr/>
         </p:nvSpPr>
@@ -27827,7 +27824,7 @@
       </p:sp>
       <p:cxnSp>
         <p:nvCxnSpPr>
-          <p:cNvPr id="49" name="Connector 48"/>
+          <p:cNvPr id="51" name="Connector 50"/>
           <p:cNvCxnSpPr/>
           <p:nvPr/>
         </p:nvCxnSpPr>
@@ -27863,7 +27860,7 @@
       </p:cxnSp>
       <p:sp>
         <p:nvSpPr>
-          <p:cNvPr id="50" name="Rectangle 49"/>
+          <p:cNvPr id="52" name="Rectangle 51"/>
           <p:cNvSpPr/>
           <p:nvPr/>
         </p:nvSpPr>
@@ -27909,7 +27906,7 @@
       </p:sp>
       <p:cxnSp>
         <p:nvCxnSpPr>
-          <p:cNvPr id="51" name="Connector 50"/>
+          <p:cNvPr id="53" name="Connector 52"/>
           <p:cNvCxnSpPr/>
           <p:nvPr/>
         </p:nvCxnSpPr>
@@ -27944,16 +27941,53 @@
           </a:fontRef>
         </p:style>
       </p:cxnSp>
-      <p:sp>
-        <p:nvSpPr>
-          <p:cNvPr id="52" name="TextBox 51"/>
+      <p:cxnSp>
+        <p:nvCxnSpPr>
+          <p:cNvPr id="54" name="Connector 53"/>
+          <p:cNvCxnSpPr/>
+          <p:nvPr/>
+        </p:nvCxnSpPr>
+        <p:spPr>
+          <a:xfrm>
+            <a:off x="5546750" y="4837176"/>
+            <a:ext cx="0" cy="1298448"/>
+          </a:xfrm>
+          <a:prstGeom prst="line">
+            <a:avLst/>
+          </a:prstGeom>
+          <a:ln w="17780">
+            <a:solidFill>
+              <a:srgbClr val="6E7A88"/>
+            </a:solidFill>
+            <a:prstDash val="sysDot"/>
+          </a:ln>
+          <a:effectLst/>
+        </p:spPr>
+        <p:style>
+          <a:lnRef idx="2">
+            <a:schemeClr val="accent1"/>
+          </a:lnRef>
+          <a:fillRef idx="0">
+            <a:schemeClr val="accent1"/>
+          </a:fillRef>
+          <a:effectRef idx="1">
+            <a:schemeClr val="accent1"/>
+          </a:effectRef>
+          <a:fontRef idx="minor">
+            <a:schemeClr val="tx1"/>
+          </a:fontRef>
+        </p:style>
+      </p:cxnSp>
+      <p:sp>
+        <p:nvSpPr>
+          <p:cNvPr id="55" name="TextBox 54"/>
           <p:cNvSpPr txBox="1"/>
           <p:nvPr/>
         </p:nvSpPr>
         <p:spPr>
           <a:xfrm>
-            <a:off x="2995574" y="4636008"/>
-            <a:ext cx="457200" cy="237744"/>
+            <a:off x="5272430" y="4636008"/>
+            <a:ext cx="548640" cy="237744"/>
           </a:xfrm>
           <a:prstGeom prst="rect">
             <a:avLst/>
@@ -27972,6 +28006,46 @@
               </a:lnSpc>
             </a:pPr>
             <a:r>
+              <a:rPr sz="1000" b="0" i="0">
+                <a:solidFill>
+                  <a:srgbClr val="6E7A88"/>
+                </a:solidFill>
+                <a:latin typeface="Meiryo"/>
+                <a:ea typeface="Meiryo"/>
+              </a:rPr>
+              <a:t>19</a:t>
+            </a:r>
+          </a:p>
+        </p:txBody>
+      </p:sp>
+      <p:sp>
+        <p:nvSpPr>
+          <p:cNvPr id="56" name="TextBox 55"/>
+          <p:cNvSpPr txBox="1"/>
+          <p:nvPr/>
+        </p:nvSpPr>
+        <p:spPr>
+          <a:xfrm>
+            <a:off x="2995574" y="4636008"/>
+            <a:ext cx="457200" cy="237744"/>
+          </a:xfrm>
+          <a:prstGeom prst="rect">
+            <a:avLst/>
+          </a:prstGeom>
+          <a:noFill/>
+        </p:spPr>
+        <p:txBody>
+          <a:bodyPr wrap="square" anchor="t" lIns="18288" rIns="18288" tIns="9144" bIns="9144">
+            <a:spAutoFit/>
+          </a:bodyPr>
+          <a:lstStyle/>
+          <a:p>
+            <a:pPr algn="ctr">
+              <a:lnSpc>
+                <a:spcPct val="105000"/>
+              </a:lnSpc>
+            </a:pPr>
+            <a:r>
               <a:rPr sz="1150" b="1" i="1">
                 <a:solidFill>
                   <a:srgbClr val="26303A"/>
@@ -27996,14 +28070,14 @@
       </p:sp>
       <p:cxnSp>
         <p:nvCxnSpPr>
-          <p:cNvPr id="53" name="Connector 52"/>
+          <p:cNvPr id="57" name="Connector 56"/>
           <p:cNvCxnSpPr/>
           <p:nvPr/>
         </p:nvCxnSpPr>
         <p:spPr>
           <a:xfrm flipV="1">
-            <a:off x="6007608" y="2743200"/>
-            <a:ext cx="320040" cy="1719071"/>
+            <a:off x="6007608" y="3131820"/>
+            <a:ext cx="320040" cy="1330451"/>
           </a:xfrm>
           <a:prstGeom prst="line">
             <a:avLst/>
@@ -28033,14 +28107,14 @@
       </p:cxnSp>
       <p:sp>
         <p:nvSpPr>
-          <p:cNvPr id="54" name="Rounded Rectangle 53"/>
+          <p:cNvPr id="58" name="Rounded Rectangle 57"/>
           <p:cNvSpPr/>
           <p:nvPr/>
         </p:nvSpPr>
         <p:spPr>
           <a:xfrm>
-            <a:off x="6373368" y="1645920"/>
-            <a:ext cx="5251399" cy="2514600"/>
+            <a:off x="6373368" y="1965960"/>
+            <a:ext cx="5251399" cy="2057400"/>
           </a:xfrm>
           <a:prstGeom prst="roundRect">
             <a:avLst>
@@ -28081,14 +28155,14 @@
       </p:sp>
       <p:sp>
         <p:nvSpPr>
-          <p:cNvPr id="55" name="TextBox 54"/>
+          <p:cNvPr id="59" name="TextBox 58"/>
           <p:cNvSpPr txBox="1"/>
           <p:nvPr/>
         </p:nvSpPr>
         <p:spPr>
           <a:xfrm>
-            <a:off x="6574536" y="1737360"/>
-            <a:ext cx="4849063" cy="457200"/>
+            <a:off x="6574536" y="2057400"/>
+            <a:ext cx="4849063" cy="658368"/>
           </a:xfrm>
           <a:prstGeom prst="rect">
             <a:avLst/>
@@ -28101,7 +28175,7 @@
           </a:bodyPr>
           <a:lstStyle/>
           <a:p>
-            <a:pPr algn="l">
+            <a:pPr>
               <a:lnSpc>
                 <a:spcPct val="105000"/>
               </a:lnSpc>
@@ -28117,22 +28191,39 @@
               <a:t>処理順序の変更は，現場にコストを生む</a:t>
             </a:r>
           </a:p>
-        </p:txBody>
-      </p:sp>
-      <p:sp>
-        <p:nvSpPr>
-          <p:cNvPr id="56" name="Rounded Rectangle 55"/>
+          <a:p>
+            <a:pPr>
+              <a:lnSpc>
+                <a:spcPct val="105000"/>
+              </a:lnSpc>
+            </a:pPr>
+            <a:r>
+              <a:rPr sz="1300" b="1" i="0">
+                <a:solidFill>
+                  <a:srgbClr val="B03A2E"/>
+                </a:solidFill>
+                <a:latin typeface="Meiryo"/>
+                <a:ea typeface="Meiryo"/>
+              </a:rPr>
+              <a:t>（スケジュール変更コスト）</a:t>
+            </a:r>
+          </a:p>
+        </p:txBody>
+      </p:sp>
+      <p:sp>
+        <p:nvSpPr>
+          <p:cNvPr id="60" name="Rounded Rectangle 59"/>
           <p:cNvSpPr/>
           <p:nvPr/>
         </p:nvSpPr>
         <p:spPr>
           <a:xfrm>
-            <a:off x="6574536" y="2331720"/>
-            <a:ext cx="2355951" cy="731520"/>
+            <a:off x="6574536" y="2807208"/>
+            <a:ext cx="2355951" cy="512064"/>
           </a:xfrm>
           <a:prstGeom prst="roundRect">
             <a:avLst>
-              <a:gd name="adj" fmla="val 12000"/>
+              <a:gd name="adj" fmla="val 10000"/>
             </a:avLst>
           </a:prstGeom>
           <a:solidFill>
@@ -28169,7 +28260,7 @@
               </a:lnSpc>
             </a:pPr>
             <a:r>
-              <a:rPr sz="1350" b="1" i="0">
+              <a:rPr sz="1250" b="1" i="0">
                 <a:solidFill>
                   <a:srgbClr val="26303A"/>
                 </a:solidFill>
@@ -28183,18 +28274,18 @@
       </p:sp>
       <p:sp>
         <p:nvSpPr>
-          <p:cNvPr id="57" name="Rounded Rectangle 56"/>
+          <p:cNvPr id="61" name="Rounded Rectangle 60"/>
           <p:cNvSpPr/>
           <p:nvPr/>
         </p:nvSpPr>
         <p:spPr>
           <a:xfrm>
-            <a:off x="9067647" y="2331720"/>
-            <a:ext cx="2355951" cy="731520"/>
+            <a:off x="9067647" y="2807208"/>
+            <a:ext cx="2355951" cy="512064"/>
           </a:xfrm>
           <a:prstGeom prst="roundRect">
             <a:avLst>
-              <a:gd name="adj" fmla="val 12000"/>
+              <a:gd name="adj" fmla="val 10000"/>
             </a:avLst>
           </a:prstGeom>
           <a:solidFill>
@@ -28231,7 +28322,7 @@
               </a:lnSpc>
             </a:pPr>
             <a:r>
-              <a:rPr sz="1350" b="1" i="0">
+              <a:rPr sz="1250" b="1" i="0">
                 <a:solidFill>
                   <a:srgbClr val="26303A"/>
                 </a:solidFill>
@@ -28245,18 +28336,18 @@
       </p:sp>
       <p:sp>
         <p:nvSpPr>
-          <p:cNvPr id="58" name="Rounded Rectangle 57"/>
+          <p:cNvPr id="62" name="Rounded Rectangle 61"/>
           <p:cNvSpPr/>
           <p:nvPr/>
         </p:nvSpPr>
         <p:spPr>
           <a:xfrm>
-            <a:off x="6574536" y="3200400"/>
-            <a:ext cx="2355951" cy="731520"/>
+            <a:off x="6574536" y="3392424"/>
+            <a:ext cx="2355951" cy="512064"/>
           </a:xfrm>
           <a:prstGeom prst="roundRect">
             <a:avLst>
-              <a:gd name="adj" fmla="val 12000"/>
+              <a:gd name="adj" fmla="val 10000"/>
             </a:avLst>
           </a:prstGeom>
           <a:solidFill>
@@ -28293,7 +28384,7 @@
               </a:lnSpc>
             </a:pPr>
             <a:r>
-              <a:rPr sz="1350" b="1" i="0">
+              <a:rPr sz="1250" b="1" i="0">
                 <a:solidFill>
                   <a:srgbClr val="26303A"/>
                 </a:solidFill>
@@ -28307,18 +28398,18 @@
       </p:sp>
       <p:sp>
         <p:nvSpPr>
-          <p:cNvPr id="59" name="Rounded Rectangle 58"/>
+          <p:cNvPr id="63" name="Rounded Rectangle 62"/>
           <p:cNvSpPr/>
           <p:nvPr/>
         </p:nvSpPr>
         <p:spPr>
           <a:xfrm>
-            <a:off x="9067647" y="3200400"/>
-            <a:ext cx="2355951" cy="731520"/>
+            <a:off x="9067647" y="3392424"/>
+            <a:ext cx="2355951" cy="512064"/>
           </a:xfrm>
           <a:prstGeom prst="roundRect">
             <a:avLst>
-              <a:gd name="adj" fmla="val 12000"/>
+              <a:gd name="adj" fmla="val 10000"/>
             </a:avLst>
           </a:prstGeom>
           <a:solidFill>
@@ -28355,29 +28446,29 @@
               </a:lnSpc>
             </a:pPr>
             <a:r>
-              <a:rPr sz="1350" b="1" i="0">
+              <a:rPr sz="1250" b="1" i="0">
                 <a:solidFill>
                   <a:srgbClr val="26303A"/>
                 </a:solidFill>
                 <a:latin typeface="Meiryo"/>
                 <a:ea typeface="Meiryo"/>
               </a:rPr>
-              <a:t>下流工程・外注先
-への予定変更の波及</a:t>
+              <a:t>下流工程・外注先への
+予定変更の波及</a:t>
             </a:r>
           </a:p>
         </p:txBody>
       </p:sp>
       <p:cxnSp>
         <p:nvCxnSpPr>
-          <p:cNvPr id="60" name="Connector 59"/>
+          <p:cNvPr id="64" name="Connector 63"/>
           <p:cNvCxnSpPr/>
           <p:nvPr/>
         </p:nvCxnSpPr>
         <p:spPr>
           <a:xfrm>
-            <a:off x="8999067" y="4206240"/>
-            <a:ext cx="0" cy="365760"/>
+            <a:off x="8999067" y="4069080"/>
+            <a:ext cx="0" cy="448056"/>
           </a:xfrm>
           <a:prstGeom prst="line">
             <a:avLst/>
@@ -28407,14 +28498,14 @@
       </p:cxnSp>
       <p:sp>
         <p:nvSpPr>
-          <p:cNvPr id="61" name="Rounded Rectangle 60"/>
+          <p:cNvPr id="65" name="Rounded Rectangle 64"/>
           <p:cNvSpPr/>
           <p:nvPr/>
         </p:nvSpPr>
         <p:spPr>
           <a:xfrm>
-            <a:off x="6373368" y="4626864"/>
-            <a:ext cx="5251399" cy="1700784"/>
+            <a:off x="6373368" y="4562856"/>
+            <a:ext cx="5251399" cy="1737360"/>
           </a:xfrm>
           <a:prstGeom prst="roundRect">
             <a:avLst>
@@ -28455,13 +28546,13 @@
       </p:sp>
       <p:sp>
         <p:nvSpPr>
-          <p:cNvPr id="62" name="TextBox 61"/>
+          <p:cNvPr id="66" name="TextBox 65"/>
           <p:cNvSpPr txBox="1"/>
           <p:nvPr/>
         </p:nvSpPr>
         <p:spPr>
           <a:xfrm>
-            <a:off x="6373368" y="4681727"/>
+            <a:off x="6373368" y="4617720"/>
             <a:ext cx="5251399" cy="402336"/>
           </a:xfrm>
           <a:prstGeom prst="rect">
@@ -28495,14 +28586,14 @@
       </p:sp>
       <p:sp>
         <p:nvSpPr>
-          <p:cNvPr id="63" name="Rounded Rectangle 62"/>
+          <p:cNvPr id="67" name="Rounded Rectangle 66"/>
           <p:cNvSpPr/>
           <p:nvPr/>
         </p:nvSpPr>
         <p:spPr>
           <a:xfrm>
-            <a:off x="6574536" y="5129783"/>
-            <a:ext cx="2195931" cy="1033272"/>
+            <a:off x="6574536" y="5065776"/>
+            <a:ext cx="2195931" cy="1069848"/>
           </a:xfrm>
           <a:prstGeom prst="roundRect">
             <a:avLst>
@@ -28543,13 +28634,13 @@
       </p:sp>
       <p:sp>
         <p:nvSpPr>
-          <p:cNvPr id="64" name="Rounded Rectangle 63"/>
+          <p:cNvPr id="68" name="Rounded Rectangle 67"/>
           <p:cNvSpPr/>
           <p:nvPr/>
         </p:nvSpPr>
         <p:spPr>
           <a:xfrm>
-            <a:off x="6574536" y="5129783"/>
+            <a:off x="6574536" y="5065776"/>
             <a:ext cx="2195931" cy="347472"/>
           </a:xfrm>
           <a:prstGeom prst="roundRect">
@@ -28603,14 +28694,14 @@
       </p:sp>
       <p:sp>
         <p:nvSpPr>
-          <p:cNvPr id="65" name="TextBox 64"/>
+          <p:cNvPr id="69" name="TextBox 68"/>
           <p:cNvSpPr txBox="1"/>
           <p:nvPr/>
         </p:nvSpPr>
         <p:spPr>
           <a:xfrm>
-            <a:off x="6665976" y="5477255"/>
-            <a:ext cx="2013051" cy="685800"/>
+            <a:off x="6665976" y="5413248"/>
+            <a:ext cx="2013051" cy="722375"/>
           </a:xfrm>
           <a:prstGeom prst="rect">
             <a:avLst/>
@@ -28643,14 +28734,14 @@
       </p:sp>
       <p:sp>
         <p:nvSpPr>
-          <p:cNvPr id="66" name="TextBox 65"/>
+          <p:cNvPr id="70" name="TextBox 69"/>
           <p:cNvSpPr txBox="1"/>
           <p:nvPr/>
         </p:nvSpPr>
         <p:spPr>
           <a:xfrm>
-            <a:off x="8770467" y="5129783"/>
-            <a:ext cx="457200" cy="1033272"/>
+            <a:off x="8770467" y="5065776"/>
+            <a:ext cx="457200" cy="1069848"/>
           </a:xfrm>
           <a:prstGeom prst="rect">
             <a:avLst/>
@@ -28683,14 +28774,14 @@
       </p:sp>
       <p:sp>
         <p:nvSpPr>
-          <p:cNvPr id="67" name="Rounded Rectangle 66"/>
+          <p:cNvPr id="71" name="Rounded Rectangle 70"/>
           <p:cNvSpPr/>
           <p:nvPr/>
         </p:nvSpPr>
         <p:spPr>
           <a:xfrm>
-            <a:off x="9227667" y="5129783"/>
-            <a:ext cx="2195931" cy="1033272"/>
+            <a:off x="9227667" y="5065776"/>
+            <a:ext cx="2195931" cy="1069848"/>
           </a:xfrm>
           <a:prstGeom prst="roundRect">
             <a:avLst>
@@ -28731,13 +28822,13 @@
       </p:sp>
       <p:sp>
         <p:nvSpPr>
-          <p:cNvPr id="68" name="Rounded Rectangle 67"/>
+          <p:cNvPr id="72" name="Rounded Rectangle 71"/>
           <p:cNvSpPr/>
           <p:nvPr/>
         </p:nvSpPr>
         <p:spPr>
           <a:xfrm>
-            <a:off x="9227667" y="5129783"/>
+            <a:off x="9227667" y="5065776"/>
             <a:ext cx="2195931" cy="347472"/>
           </a:xfrm>
           <a:prstGeom prst="roundRect">
@@ -28791,14 +28882,14 @@
       </p:sp>
       <p:sp>
         <p:nvSpPr>
-          <p:cNvPr id="69" name="TextBox 68"/>
+          <p:cNvPr id="73" name="TextBox 72"/>
           <p:cNvSpPr txBox="1"/>
           <p:nvPr/>
         </p:nvSpPr>
         <p:spPr>
           <a:xfrm>
-            <a:off x="9319107" y="5477255"/>
-            <a:ext cx="2013051" cy="685800"/>
+            <a:off x="9319107" y="5413248"/>
+            <a:ext cx="2013051" cy="722375"/>
           </a:xfrm>
           <a:prstGeom prst="rect">
             <a:avLst/>

--- a/doc/presentation_materials/JIMA2026fall_発表.pptx
+++ b/doc/presentation_materials/JIMA2026fall_発表.pptx
@@ -7514,7 +7514,7 @@
                 <a:latin typeface="Meiryo"/>
                 <a:ea typeface="Meiryo"/>
               </a:rPr>
-              <a:t>提案：安定性誘導演算子（PR と PR-</a:t>
+              <a:t>提案手法：安定性誘導演算子（PR と PR-</a:t>
             </a:r>
             <a:r>
               <a:rPr sz="2450" b="1" i="1">
@@ -10724,7 +10724,7 @@
           <a:noFill/>
           <a:ln w="27940">
             <a:solidFill>
-              <a:srgbClr val="2E1A0E"/>
+              <a:srgbClr val="6A4C93"/>
             </a:solidFill>
           </a:ln>
           <a:effectLst/>
@@ -11003,7 +11003,7 @@
             </a:avLst>
           </a:prstGeom>
           <a:solidFill>
-            <a:srgbClr val="2E1A0E"/>
+            <a:srgbClr val="6A4C93"/>
           </a:solidFill>
           <a:ln>
             <a:noFill/>
@@ -11197,74 +11197,14 @@
       </p:sp>
       <p:sp>
         <p:nvSpPr>
-          <p:cNvPr id="20" name="Rounded Rectangle 19"/>
-          <p:cNvSpPr/>
-          <p:nvPr/>
-        </p:nvSpPr>
-        <p:spPr>
-          <a:xfrm>
-            <a:off x="566928" y="5257800"/>
-            <a:ext cx="1097280" cy="365760"/>
-          </a:xfrm>
-          <a:prstGeom prst="roundRect">
-            <a:avLst>
-              <a:gd name="adj" fmla="val 30000"/>
-            </a:avLst>
-          </a:prstGeom>
-          <a:solidFill>
-            <a:srgbClr val="6E7A88"/>
-          </a:solidFill>
-          <a:ln>
-            <a:noFill/>
-          </a:ln>
-          <a:effectLst/>
-        </p:spPr>
-        <p:style>
-          <a:lnRef idx="1">
-            <a:schemeClr val="accent1"/>
-          </a:lnRef>
-          <a:fillRef idx="3">
-            <a:schemeClr val="accent1"/>
-          </a:fillRef>
-          <a:effectRef idx="2">
-            <a:schemeClr val="accent1"/>
-          </a:effectRef>
-          <a:fontRef idx="minor">
-            <a:schemeClr val="lt1"/>
-          </a:fontRef>
-        </p:style>
-        <p:txBody>
-          <a:bodyPr rtlCol="0" anchor="ctr" wrap="square" lIns="54864" rIns="54864" tIns="18288" bIns="18288"/>
-          <a:lstStyle/>
-          <a:p>
-            <a:pPr algn="ctr">
-              <a:lnSpc>
-                <a:spcPct val="100000"/>
-              </a:lnSpc>
-            </a:pPr>
-            <a:r>
-              <a:rPr sz="1300" b="1" i="0">
-                <a:solidFill>
-                  <a:srgbClr val="FFFFFF"/>
-                </a:solidFill>
-                <a:latin typeface="Meiryo"/>
-                <a:ea typeface="Meiryo"/>
-              </a:rPr>
-              <a:t>仮説の外</a:t>
-            </a:r>
-          </a:p>
-        </p:txBody>
-      </p:sp>
-      <p:sp>
-        <p:nvSpPr>
-          <p:cNvPr id="21" name="TextBox 20"/>
+          <p:cNvPr id="20" name="TextBox 19"/>
           <p:cNvSpPr txBox="1"/>
           <p:nvPr/>
         </p:nvSpPr>
         <p:spPr>
           <a:xfrm>
-            <a:off x="1847088" y="5230368"/>
-            <a:ext cx="9777679" cy="420624"/>
+            <a:off x="566928" y="5230368"/>
+            <a:ext cx="11057839" cy="420624"/>
           </a:xfrm>
           <a:prstGeom prst="rect">
             <a:avLst/>
@@ -11317,7 +11257,7 @@
       </p:sp>
       <p:sp>
         <p:nvSpPr>
-          <p:cNvPr id="22" name="TextBox 21"/>
+          <p:cNvPr id="21" name="TextBox 20"/>
           <p:cNvSpPr txBox="1"/>
           <p:nvPr/>
         </p:nvSpPr>
@@ -14487,9 +14427,208 @@
           </a:prstGeom>
         </p:spPr>
       </p:pic>
-      <p:sp>
-        <p:nvSpPr>
-          <p:cNvPr id="9" name="TextBox 8"/>
+      <p:cxnSp>
+        <p:nvCxnSpPr>
+          <p:cNvPr id="9" name="Connector 8"/>
+          <p:cNvCxnSpPr/>
+          <p:nvPr/>
+        </p:nvCxnSpPr>
+        <p:spPr>
+          <a:xfrm>
+            <a:off x="1701241" y="2553004"/>
+            <a:ext cx="0" cy="534010"/>
+          </a:xfrm>
+          <a:prstGeom prst="line">
+            <a:avLst/>
+          </a:prstGeom>
+          <a:ln w="19050">
+            <a:solidFill>
+              <a:srgbClr val="16385C"/>
+            </a:solidFill>
+            <a:tailEnd type="triangle" w="med" len="med"/>
+            <a:headEnd type="triangle" w="med" len="med"/>
+          </a:ln>
+          <a:effectLst/>
+        </p:spPr>
+        <p:style>
+          <a:lnRef idx="2">
+            <a:schemeClr val="accent1"/>
+          </a:lnRef>
+          <a:fillRef idx="0">
+            <a:schemeClr val="accent1"/>
+          </a:fillRef>
+          <a:effectRef idx="1">
+            <a:schemeClr val="accent1"/>
+          </a:effectRef>
+          <a:fontRef idx="minor">
+            <a:schemeClr val="tx1"/>
+          </a:fontRef>
+        </p:style>
+      </p:cxnSp>
+      <p:sp>
+        <p:nvSpPr>
+          <p:cNvPr id="10" name="Rounded Rectangle 9"/>
+          <p:cNvSpPr/>
+          <p:nvPr/>
+        </p:nvSpPr>
+        <p:spPr>
+          <a:xfrm>
+            <a:off x="1509217" y="2728569"/>
+            <a:ext cx="530352" cy="182880"/>
+          </a:xfrm>
+          <a:prstGeom prst="roundRect">
+            <a:avLst>
+              <a:gd name="adj" fmla="val 6000"/>
+            </a:avLst>
+          </a:prstGeom>
+          <a:solidFill>
+            <a:srgbClr val="FFFFFF"/>
+          </a:solidFill>
+          <a:ln w="13970">
+            <a:solidFill>
+              <a:srgbClr val="16385C"/>
+            </a:solidFill>
+          </a:ln>
+          <a:effectLst/>
+        </p:spPr>
+        <p:style>
+          <a:lnRef idx="1">
+            <a:schemeClr val="accent1"/>
+          </a:lnRef>
+          <a:fillRef idx="3">
+            <a:schemeClr val="accent1"/>
+          </a:fillRef>
+          <a:effectRef idx="2">
+            <a:schemeClr val="accent1"/>
+          </a:effectRef>
+          <a:fontRef idx="minor">
+            <a:schemeClr val="lt1"/>
+          </a:fontRef>
+        </p:style>
+        <p:txBody>
+          <a:bodyPr rtlCol="0" anchor="ctr" wrap="square" lIns="54864" rIns="54864" tIns="18288" bIns="18288"/>
+          <a:lstStyle/>
+          <a:p>
+            <a:pPr algn="ctr">
+              <a:lnSpc>
+                <a:spcPct val="100000"/>
+              </a:lnSpc>
+            </a:pPr>
+            <a:r>
+              <a:rPr sz="850" b="1" i="0">
+                <a:solidFill>
+                  <a:srgbClr val="16385C"/>
+                </a:solidFill>
+                <a:latin typeface="Meiryo"/>
+                <a:ea typeface="Meiryo"/>
+              </a:rPr>
+              <a:t>仮説 1</a:t>
+            </a:r>
+          </a:p>
+        </p:txBody>
+      </p:sp>
+      <p:cxnSp>
+        <p:nvCxnSpPr>
+          <p:cNvPr id="11" name="Connector 10"/>
+          <p:cNvCxnSpPr/>
+          <p:nvPr/>
+        </p:nvCxnSpPr>
+        <p:spPr>
+          <a:xfrm flipV="1">
+            <a:off x="2012137" y="2726740"/>
+            <a:ext cx="526708" cy="405994"/>
+          </a:xfrm>
+          <a:prstGeom prst="line">
+            <a:avLst/>
+          </a:prstGeom>
+          <a:ln w="20320">
+            <a:solidFill>
+              <a:srgbClr val="6A4C93"/>
+            </a:solidFill>
+            <a:tailEnd type="triangle" w="med" len="med"/>
+          </a:ln>
+          <a:effectLst/>
+        </p:spPr>
+        <p:style>
+          <a:lnRef idx="2">
+            <a:schemeClr val="accent1"/>
+          </a:lnRef>
+          <a:fillRef idx="0">
+            <a:schemeClr val="accent1"/>
+          </a:fillRef>
+          <a:effectRef idx="1">
+            <a:schemeClr val="accent1"/>
+          </a:effectRef>
+          <a:fontRef idx="minor">
+            <a:schemeClr val="tx1"/>
+          </a:fontRef>
+        </p:style>
+      </p:cxnSp>
+      <p:sp>
+        <p:nvSpPr>
+          <p:cNvPr id="12" name="Rounded Rectangle 11"/>
+          <p:cNvSpPr/>
+          <p:nvPr/>
+        </p:nvSpPr>
+        <p:spPr>
+          <a:xfrm>
+            <a:off x="2465693" y="2949854"/>
+            <a:ext cx="530352" cy="182880"/>
+          </a:xfrm>
+          <a:prstGeom prst="roundRect">
+            <a:avLst>
+              <a:gd name="adj" fmla="val 6000"/>
+            </a:avLst>
+          </a:prstGeom>
+          <a:solidFill>
+            <a:srgbClr val="FFFFFF"/>
+          </a:solidFill>
+          <a:ln w="13970">
+            <a:solidFill>
+              <a:srgbClr val="6A4C93"/>
+            </a:solidFill>
+          </a:ln>
+          <a:effectLst/>
+        </p:spPr>
+        <p:style>
+          <a:lnRef idx="1">
+            <a:schemeClr val="accent1"/>
+          </a:lnRef>
+          <a:fillRef idx="3">
+            <a:schemeClr val="accent1"/>
+          </a:fillRef>
+          <a:effectRef idx="2">
+            <a:schemeClr val="accent1"/>
+          </a:effectRef>
+          <a:fontRef idx="minor">
+            <a:schemeClr val="lt1"/>
+          </a:fontRef>
+        </p:style>
+        <p:txBody>
+          <a:bodyPr rtlCol="0" anchor="ctr" wrap="square" lIns="54864" rIns="54864" tIns="18288" bIns="18288"/>
+          <a:lstStyle/>
+          <a:p>
+            <a:pPr algn="ctr">
+              <a:lnSpc>
+                <a:spcPct val="100000"/>
+              </a:lnSpc>
+            </a:pPr>
+            <a:r>
+              <a:rPr sz="850" b="1" i="0">
+                <a:solidFill>
+                  <a:srgbClr val="6A4C93"/>
+                </a:solidFill>
+                <a:latin typeface="Meiryo"/>
+                <a:ea typeface="Meiryo"/>
+              </a:rPr>
+              <a:t>仮説 2</a:t>
+            </a:r>
+          </a:p>
+        </p:txBody>
+      </p:sp>
+      <p:sp>
+        <p:nvSpPr>
+          <p:cNvPr id="13" name="TextBox 12"/>
           <p:cNvSpPr txBox="1"/>
           <p:nvPr/>
         </p:nvSpPr>
@@ -14588,13 +14727,36 @@
               <a:t> = 1.0）</a:t>
             </a:r>
           </a:p>
+        </p:txBody>
+      </p:sp>
+      <p:sp>
+        <p:nvSpPr>
+          <p:cNvPr id="14" name="TextBox 13"/>
+          <p:cNvSpPr txBox="1"/>
+          <p:nvPr/>
+        </p:nvSpPr>
+        <p:spPr>
+          <a:xfrm>
+            <a:off x="566928" y="5522976"/>
+            <a:ext cx="11057839" cy="457200"/>
+          </a:xfrm>
+          <a:prstGeom prst="rect">
+            <a:avLst/>
+          </a:prstGeom>
+          <a:noFill/>
+        </p:spPr>
+        <p:txBody>
+          <a:bodyPr wrap="square" anchor="t" lIns="18288" rIns="18288" tIns="9144" bIns="9144">
+            <a:spAutoFit/>
+          </a:bodyPr>
+          <a:lstStyle/>
           <a:p>
             <a:pPr>
               <a:lnSpc>
                 <a:spcPct val="108000"/>
               </a:lnSpc>
               <a:spcBef>
-                <a:spcPts val="700"/>
+                <a:spcPts val="0"/>
               </a:spcBef>
             </a:pPr>
             <a:r>
@@ -14610,7 +14772,7 @@
             <a:r>
               <a:rPr sz="1800" b="1" i="0">
                 <a:solidFill>
-                  <a:srgbClr val="16385C"/>
+                  <a:srgbClr val="6A4C93"/>
                 </a:solidFill>
                 <a:latin typeface="Meiryo"/>
                 <a:ea typeface="Meiryo"/>
@@ -23499,96 +23661,6 @@
               <a:t>）を修正する</a:t>
             </a:r>
           </a:p>
-          <a:p>
-            <a:pPr>
-              <a:lnSpc>
-                <a:spcPct val="110000"/>
-              </a:lnSpc>
-              <a:spcBef>
-                <a:spcPts val="800"/>
-              </a:spcBef>
-            </a:pPr>
-            <a:r>
-              <a:rPr sz="1400" b="0" i="0">
-                <a:solidFill>
-                  <a:srgbClr val="FFFFFF"/>
-                </a:solidFill>
-                <a:latin typeface="Meiryo"/>
-                <a:ea typeface="Meiryo"/>
-              </a:rPr>
-              <a:t>→ </a:t>
-            </a:r>
-            <a:r>
-              <a:rPr sz="1400" b="0" i="1">
-                <a:solidFill>
-                  <a:srgbClr val="FFFFFF"/>
-                </a:solidFill>
-                <a:latin typeface="Meiryo"/>
-                <a:ea typeface="Meiryo"/>
-              </a:rPr>
-              <a:t>S</a:t>
-            </a:r>
-            <a:r>
-              <a:rPr sz="1008" b="0" i="1" baseline="-22000">
-                <a:solidFill>
-                  <a:srgbClr val="FFFFFF"/>
-                </a:solidFill>
-                <a:latin typeface="Meiryo"/>
-                <a:ea typeface="Meiryo"/>
-              </a:rPr>
-              <a:t>p</a:t>
-            </a:r>
-            <a:r>
-              <a:rPr sz="1400" b="0" i="0">
-                <a:solidFill>
-                  <a:srgbClr val="FFFFFF"/>
-                </a:solidFill>
-                <a:latin typeface="Meiryo"/>
-                <a:ea typeface="Meiryo"/>
-              </a:rPr>
-              <a:t> が存在するので，</a:t>
-            </a:r>
-            <a:r>
-              <a:rPr sz="1400" b="1" i="1">
-                <a:solidFill>
-                  <a:srgbClr val="FFD98A"/>
-                </a:solidFill>
-                <a:latin typeface="Meiryo"/>
-                <a:ea typeface="Meiryo"/>
-              </a:rPr>
-              <a:t>S</a:t>
-            </a:r>
-            <a:r>
-              <a:rPr sz="1008" b="1" i="1" baseline="-22000">
-                <a:solidFill>
-                  <a:srgbClr val="FFD98A"/>
-                </a:solidFill>
-                <a:latin typeface="Meiryo"/>
-                <a:ea typeface="Meiryo"/>
-              </a:rPr>
-              <a:t>p</a:t>
-            </a:r>
-            <a:r>
-              <a:rPr sz="1400" b="1" i="0">
-                <a:solidFill>
-                  <a:srgbClr val="FFD98A"/>
-                </a:solidFill>
-                <a:latin typeface="Meiryo"/>
-                <a:ea typeface="Meiryo"/>
-              </a:rPr>
-              <a:t> からの変更量</a:t>
-            </a:r>
-            <a:r>
-              <a:rPr sz="1400" b="0" i="0">
-                <a:solidFill>
-                  <a:srgbClr val="FFFFFF"/>
-                </a:solidFill>
-                <a:latin typeface="Meiryo"/>
-                <a:ea typeface="Meiryo"/>
-              </a:rPr>
-              <a:t>を定義できる</a:t>
-            </a:r>
-          </a:p>
         </p:txBody>
       </p:sp>
       <p:cxnSp>

--- a/doc/presentation_materials/JIMA2026fall_発表.pptx
+++ b/doc/presentation_materials/JIMA2026fall_発表.pptx
@@ -11203,8 +11203,8 @@
         </p:nvSpPr>
         <p:spPr>
           <a:xfrm>
-            <a:off x="566928" y="5230368"/>
-            <a:ext cx="11057839" cy="420624"/>
+            <a:off x="1847088" y="5230368"/>
+            <a:ext cx="9777679" cy="420624"/>
           </a:xfrm>
           <a:prstGeom prst="rect">
             <a:avLst/>

--- a/doc/presentation_materials/JIMA2026fall_発表.pptx
+++ b/doc/presentation_materials/JIMA2026fall_発表.pptx
@@ -15108,7 +15108,7 @@
       </p:sp>
       <p:pic>
         <p:nvPicPr>
-          <p:cNvPr id="8" name="Picture 7" descr="highstab_band.png"/>
+          <p:cNvPr id="8" name="Picture 7" descr="highstab_zoom4.png"/>
           <p:cNvPicPr>
             <a:picLocks noChangeAspect="1"/>
           </p:cNvPicPr>
@@ -15123,7 +15123,7 @@
         <p:spPr>
           <a:xfrm>
             <a:off x="609447" y="1536192"/>
-            <a:ext cx="10972800" cy="3518611"/>
+            <a:ext cx="10972800" cy="3291840"/>
           </a:xfrm>
           <a:prstGeom prst="rect">
             <a:avLst/>
@@ -15138,7 +15138,47 @@
         </p:nvSpPr>
         <p:spPr>
           <a:xfrm>
-            <a:off x="566928" y="5120640"/>
+            <a:off x="566928" y="4846320"/>
+            <a:ext cx="11057839" cy="256032"/>
+          </a:xfrm>
+          <a:prstGeom prst="rect">
+            <a:avLst/>
+          </a:prstGeom>
+          <a:noFill/>
+        </p:spPr>
+        <p:txBody>
+          <a:bodyPr wrap="square" anchor="t" lIns="18288" rIns="18288" tIns="9144" bIns="9144">
+            <a:spAutoFit/>
+          </a:bodyPr>
+          <a:lstStyle/>
+          <a:p>
+            <a:pPr algn="l">
+              <a:lnSpc>
+                <a:spcPct val="105000"/>
+              </a:lnSpc>
+            </a:pPr>
+            <a:r>
+              <a:rPr sz="1250" b="0" i="0">
+                <a:solidFill>
+                  <a:srgbClr val="6E7A88"/>
+                </a:solidFill>
+                <a:latin typeface="Meiryo"/>
+                <a:ea typeface="Meiryo"/>
+              </a:rPr>
+              <a:t>縦軸は最良値の付近を拡大（↓：範囲外，値を併記）．S／L は同じインスタンスで外乱の規模が小／大．全 8 シナリオは前のスライド</a:t>
+            </a:r>
+          </a:p>
+        </p:txBody>
+      </p:sp>
+      <p:sp>
+        <p:nvSpPr>
+          <p:cNvPr id="10" name="TextBox 9"/>
+          <p:cNvSpPr txBox="1"/>
+          <p:nvPr/>
+        </p:nvSpPr>
+        <p:spPr>
+          <a:xfrm>
+            <a:off x="566928" y="5138928"/>
             <a:ext cx="11057839" cy="457200"/>
           </a:xfrm>
           <a:prstGeom prst="rect">
@@ -15161,7 +15201,7 @@
               </a:spcBef>
             </a:pPr>
             <a:r>
-              <a:rPr sz="1360" b="1" i="0">
+              <a:rPr sz="1280" b="1" i="0">
                 <a:solidFill>
                   <a:srgbClr val="16385C"/>
                 </a:solidFill>
@@ -15171,7 +15211,7 @@
               <a:t>▪ </a:t>
             </a:r>
             <a:r>
-              <a:rPr sz="1700" b="0" i="0">
+              <a:rPr sz="1600" b="0" i="0">
                 <a:solidFill>
                   <a:srgbClr val="26303A"/>
                 </a:solidFill>
@@ -15191,7 +15231,7 @@
               </a:spcBef>
             </a:pPr>
             <a:r>
-              <a:rPr sz="1360" b="1" i="0">
+              <a:rPr sz="1280" b="1" i="0">
                 <a:solidFill>
                   <a:srgbClr val="16385C"/>
                 </a:solidFill>
@@ -15201,7 +15241,7 @@
               <a:t>▪ </a:t>
             </a:r>
             <a:r>
-              <a:rPr sz="1700" b="1" i="0">
+              <a:rPr sz="1600" b="1" i="0">
                 <a:solidFill>
                   <a:srgbClr val="16385C"/>
                 </a:solidFill>
@@ -15211,7 +15251,7 @@
               <a:t>Memetic</a:t>
             </a:r>
             <a:r>
-              <a:rPr sz="1700" b="0" i="0">
+              <a:rPr sz="1600" b="0" i="0">
                 <a:solidFill>
                   <a:srgbClr val="26303A"/>
                 </a:solidFill>
@@ -15231,7 +15271,7 @@
               </a:spcBef>
             </a:pPr>
             <a:r>
-              <a:rPr sz="1360" b="1" i="0">
+              <a:rPr sz="1280" b="1" i="0">
                 <a:solidFill>
                   <a:srgbClr val="16385C"/>
                 </a:solidFill>
@@ -15241,7 +15281,7 @@
               <a:t>▪ </a:t>
             </a:r>
             <a:r>
-              <a:rPr sz="1700" b="1" i="0">
+              <a:rPr sz="1600" b="1" i="0">
                 <a:solidFill>
                   <a:srgbClr val="16385C"/>
                 </a:solidFill>
@@ -15251,21 +15291,21 @@
               <a:t>ILS</a:t>
             </a:r>
             <a:r>
-              <a:rPr sz="1700" b="0" i="0">
+              <a:rPr sz="1600" b="0" i="0">
                 <a:solidFill>
                   <a:srgbClr val="26303A"/>
                 </a:solidFill>
                 <a:latin typeface="Meiryo"/>
                 <a:ea typeface="Meiryo"/>
               </a:rPr>
-              <a:t>：演算子なしで 6 つが帯の中 → 有意に向上したのは帯の外の 2 つだけ</a:t>
-            </a:r>
-          </a:p>
-        </p:txBody>
-      </p:sp>
-      <p:sp>
-        <p:nvSpPr>
-          <p:cNvPr id="10" name="TextBox 9"/>
+              <a:t>：演算子なしで 6 つが帯の中 → 有意に向上したのは帯の外の 2 つ（la36L・ta21L）だけ</a:t>
+            </a:r>
+          </a:p>
+        </p:txBody>
+      </p:sp>
+      <p:sp>
+        <p:nvSpPr>
+          <p:cNvPr id="11" name="TextBox 10"/>
           <p:cNvSpPr txBox="1"/>
           <p:nvPr/>
         </p:nvSpPr>
@@ -15291,7 +15331,7 @@
               </a:lnSpc>
             </a:pPr>
             <a:r>
-              <a:rPr sz="1700" b="0" i="0">
+              <a:rPr sz="1650" b="0" i="0">
                 <a:solidFill>
                   <a:srgbClr val="26303A"/>
                 </a:solidFill>
@@ -15301,7 +15341,7 @@
               <a:t>→ 演算子の効果は，探索構造の違いそのものではなく，</a:t>
             </a:r>
             <a:r>
-              <a:rPr sz="1700" b="1" i="0">
+              <a:rPr sz="1650" b="1" i="0">
                 <a:solidFill>
                   <a:srgbClr val="16385C"/>
                 </a:solidFill>
@@ -16055,7 +16095,7 @@
               </a:spcBef>
             </a:pPr>
             <a:r>
-              <a:rPr sz="1440" b="1" i="0">
+              <a:rPr sz="1360" b="1" i="0">
                 <a:solidFill>
                   <a:srgbClr val="16385C"/>
                 </a:solidFill>
@@ -16065,7 +16105,7 @@
               <a:t>▪ </a:t>
             </a:r>
             <a:r>
-              <a:rPr sz="1800" b="0" i="0">
+              <a:rPr sz="1700" b="0" i="0">
                 <a:solidFill>
                   <a:srgbClr val="26303A"/>
                 </a:solidFill>
@@ -16085,7 +16125,7 @@
               </a:spcBef>
             </a:pPr>
             <a:r>
-              <a:rPr sz="1440" b="1" i="0">
+              <a:rPr sz="1360" b="1" i="0">
                 <a:solidFill>
                   <a:srgbClr val="16385C"/>
                 </a:solidFill>
@@ -16095,14 +16135,14 @@
               <a:t>▪ </a:t>
             </a:r>
             <a:r>
-              <a:rPr sz="1800" b="0" i="0">
+              <a:rPr sz="1700" b="0" i="0">
                 <a:solidFill>
                   <a:srgbClr val="26303A"/>
                 </a:solidFill>
                 <a:latin typeface="Meiryo"/>
                 <a:ea typeface="Meiryo"/>
               </a:rPr>
-              <a:t>(b) la36L：Memetic 系は途中で ILS 系を追い越し，より大きい全域 HV に達する</a:t>
+              <a:t>(b) la36L：Memetic 系は途中で ILS 系を追い越す．到達値は演算子を組み込んだ Memetic が最大</a:t>
             </a:r>
           </a:p>
         </p:txBody>

--- a/doc/presentation_materials/JIMA2026fall_発表.pptx
+++ b/doc/presentation_materials/JIMA2026fall_発表.pptx
@@ -15108,7 +15108,7 @@
       </p:sp>
       <p:pic>
         <p:nvPicPr>
-          <p:cNvPr id="8" name="Picture 7" descr="highstab_zoom4.png"/>
+          <p:cNvPr id="8" name="Picture 7" descr="highstab_dumbbell.png"/>
           <p:cNvPicPr>
             <a:picLocks noChangeAspect="1"/>
           </p:cNvPicPr>
@@ -15165,7 +15165,27 @@
                 <a:latin typeface="Meiryo"/>
                 <a:ea typeface="Meiryo"/>
               </a:rPr>
-              <a:t>縦軸は最良値の付近を拡大（↓：範囲外，値を併記）．S／L は同じインスタンスで外乱の規模が小／大．全 8 シナリオは前のスライド</a:t>
+              <a:t>値は各シナリオの最良値を 1 とした中央値．矢印は演算子なしからの有意な変化（</a:t>
+            </a:r>
+            <a:r>
+              <a:rPr sz="1250" b="0" i="1">
+                <a:solidFill>
+                  <a:srgbClr val="6E7A88"/>
+                </a:solidFill>
+                <a:latin typeface="Meiryo"/>
+                <a:ea typeface="Meiryo"/>
+              </a:rPr>
+              <a:t>p</a:t>
+            </a:r>
+            <a:r>
+              <a:rPr sz="1250" b="0" i="0">
+                <a:solidFill>
+                  <a:srgbClr val="6E7A88"/>
+                </a:solidFill>
+                <a:latin typeface="Meiryo"/>
+                <a:ea typeface="Meiryo"/>
+              </a:rPr>
+              <a:t> &lt; 0.05）だけに引く</a:t>
             </a:r>
           </a:p>
         </p:txBody>
@@ -15201,7 +15221,7 @@
               </a:spcBef>
             </a:pPr>
             <a:r>
-              <a:rPr sz="1280" b="1" i="0">
+              <a:rPr sz="1200" b="1" i="0">
                 <a:solidFill>
                   <a:srgbClr val="16385C"/>
                 </a:solidFill>
@@ -15211,7 +15231,7 @@
               <a:t>▪ </a:t>
             </a:r>
             <a:r>
-              <a:rPr sz="1600" b="0" i="0">
+              <a:rPr sz="1500" b="0" i="0">
                 <a:solidFill>
                   <a:srgbClr val="26303A"/>
                 </a:solidFill>
@@ -15227,11 +15247,11 @@
                 <a:spcPct val="108000"/>
               </a:lnSpc>
               <a:spcBef>
-                <a:spcPts val="300"/>
+                <a:spcPts val="200"/>
               </a:spcBef>
             </a:pPr>
             <a:r>
-              <a:rPr sz="1280" b="1" i="0">
+              <a:rPr sz="1200" b="1" i="0">
                 <a:solidFill>
                   <a:srgbClr val="16385C"/>
                 </a:solidFill>
@@ -15241,7 +15261,7 @@
               <a:t>▪ </a:t>
             </a:r>
             <a:r>
-              <a:rPr sz="1600" b="1" i="0">
+              <a:rPr sz="1500" b="1" i="0">
                 <a:solidFill>
                   <a:srgbClr val="16385C"/>
                 </a:solidFill>
@@ -15251,7 +15271,7 @@
               <a:t>Memetic</a:t>
             </a:r>
             <a:r>
-              <a:rPr sz="1600" b="0" i="0">
+              <a:rPr sz="1500" b="0" i="0">
                 <a:solidFill>
                   <a:srgbClr val="26303A"/>
                 </a:solidFill>
@@ -15267,11 +15287,11 @@
                 <a:spcPct val="108000"/>
               </a:lnSpc>
               <a:spcBef>
-                <a:spcPts val="300"/>
+                <a:spcPts val="200"/>
               </a:spcBef>
             </a:pPr>
             <a:r>
-              <a:rPr sz="1280" b="1" i="0">
+              <a:rPr sz="1200" b="1" i="0">
                 <a:solidFill>
                   <a:srgbClr val="16385C"/>
                 </a:solidFill>
@@ -15281,7 +15301,7 @@
               <a:t>▪ </a:t>
             </a:r>
             <a:r>
-              <a:rPr sz="1600" b="1" i="0">
+              <a:rPr sz="1500" b="1" i="0">
                 <a:solidFill>
                   <a:srgbClr val="16385C"/>
                 </a:solidFill>
@@ -15291,7 +15311,7 @@
               <a:t>ILS</a:t>
             </a:r>
             <a:r>
-              <a:rPr sz="1600" b="0" i="0">
+              <a:rPr sz="1500" b="0" i="0">
                 <a:solidFill>
                   <a:srgbClr val="26303A"/>
                 </a:solidFill>

--- a/doc/presentation_materials/JIMA2026fall_発表.pptx
+++ b/doc/presentation_materials/JIMA2026fall_発表.pptx
@@ -15108,7 +15108,7 @@
       </p:sp>
       <p:pic>
         <p:nvPicPr>
-          <p:cNvPr id="8" name="Picture 7" descr="highstab_dumbbell.png"/>
+          <p:cNvPr id="8" name="Picture 7" descr="highstab_band.png"/>
           <p:cNvPicPr>
             <a:picLocks noChangeAspect="1"/>
           </p:cNvPicPr>
@@ -15123,7 +15123,7 @@
         <p:spPr>
           <a:xfrm>
             <a:off x="609447" y="1536192"/>
-            <a:ext cx="10972800" cy="3291840"/>
+            <a:ext cx="10972800" cy="3518611"/>
           </a:xfrm>
           <a:prstGeom prst="rect">
             <a:avLst/>
@@ -15138,67 +15138,7 @@
         </p:nvSpPr>
         <p:spPr>
           <a:xfrm>
-            <a:off x="566928" y="4846320"/>
-            <a:ext cx="11057839" cy="256032"/>
-          </a:xfrm>
-          <a:prstGeom prst="rect">
-            <a:avLst/>
-          </a:prstGeom>
-          <a:noFill/>
-        </p:spPr>
-        <p:txBody>
-          <a:bodyPr wrap="square" anchor="t" lIns="18288" rIns="18288" tIns="9144" bIns="9144">
-            <a:spAutoFit/>
-          </a:bodyPr>
-          <a:lstStyle/>
-          <a:p>
-            <a:pPr algn="l">
-              <a:lnSpc>
-                <a:spcPct val="105000"/>
-              </a:lnSpc>
-            </a:pPr>
-            <a:r>
-              <a:rPr sz="1250" b="0" i="0">
-                <a:solidFill>
-                  <a:srgbClr val="6E7A88"/>
-                </a:solidFill>
-                <a:latin typeface="Meiryo"/>
-                <a:ea typeface="Meiryo"/>
-              </a:rPr>
-              <a:t>値は各シナリオの最良値を 1 とした中央値．矢印は演算子なしからの有意な変化（</a:t>
-            </a:r>
-            <a:r>
-              <a:rPr sz="1250" b="0" i="1">
-                <a:solidFill>
-                  <a:srgbClr val="6E7A88"/>
-                </a:solidFill>
-                <a:latin typeface="Meiryo"/>
-                <a:ea typeface="Meiryo"/>
-              </a:rPr>
-              <a:t>p</a:t>
-            </a:r>
-            <a:r>
-              <a:rPr sz="1250" b="0" i="0">
-                <a:solidFill>
-                  <a:srgbClr val="6E7A88"/>
-                </a:solidFill>
-                <a:latin typeface="Meiryo"/>
-                <a:ea typeface="Meiryo"/>
-              </a:rPr>
-              <a:t> &lt; 0.05）だけに引く</a:t>
-            </a:r>
-          </a:p>
-        </p:txBody>
-      </p:sp>
-      <p:sp>
-        <p:nvSpPr>
-          <p:cNvPr id="10" name="TextBox 9"/>
-          <p:cNvSpPr txBox="1"/>
-          <p:nvPr/>
-        </p:nvSpPr>
-        <p:spPr>
-          <a:xfrm>
-            <a:off x="566928" y="5138928"/>
+            <a:off x="566928" y="5120640"/>
             <a:ext cx="11057839" cy="457200"/>
           </a:xfrm>
           <a:prstGeom prst="rect">
@@ -15221,7 +15161,7 @@
               </a:spcBef>
             </a:pPr>
             <a:r>
-              <a:rPr sz="1200" b="1" i="0">
+              <a:rPr sz="1360" b="1" i="0">
                 <a:solidFill>
                   <a:srgbClr val="16385C"/>
                 </a:solidFill>
@@ -15231,7 +15171,7 @@
               <a:t>▪ </a:t>
             </a:r>
             <a:r>
-              <a:rPr sz="1500" b="0" i="0">
+              <a:rPr sz="1700" b="0" i="0">
                 <a:solidFill>
                   <a:srgbClr val="26303A"/>
                 </a:solidFill>
@@ -15247,11 +15187,11 @@
                 <a:spcPct val="108000"/>
               </a:lnSpc>
               <a:spcBef>
-                <a:spcPts val="200"/>
+                <a:spcPts val="300"/>
               </a:spcBef>
             </a:pPr>
             <a:r>
-              <a:rPr sz="1200" b="1" i="0">
+              <a:rPr sz="1360" b="1" i="0">
                 <a:solidFill>
                   <a:srgbClr val="16385C"/>
                 </a:solidFill>
@@ -15261,7 +15201,7 @@
               <a:t>▪ </a:t>
             </a:r>
             <a:r>
-              <a:rPr sz="1500" b="1" i="0">
+              <a:rPr sz="1700" b="1" i="0">
                 <a:solidFill>
                   <a:srgbClr val="16385C"/>
                 </a:solidFill>
@@ -15271,7 +15211,7 @@
               <a:t>Memetic</a:t>
             </a:r>
             <a:r>
-              <a:rPr sz="1500" b="0" i="0">
+              <a:rPr sz="1700" b="0" i="0">
                 <a:solidFill>
                   <a:srgbClr val="26303A"/>
                 </a:solidFill>
@@ -15287,11 +15227,11 @@
                 <a:spcPct val="108000"/>
               </a:lnSpc>
               <a:spcBef>
-                <a:spcPts val="200"/>
+                <a:spcPts val="300"/>
               </a:spcBef>
             </a:pPr>
             <a:r>
-              <a:rPr sz="1200" b="1" i="0">
+              <a:rPr sz="1360" b="1" i="0">
                 <a:solidFill>
                   <a:srgbClr val="16385C"/>
                 </a:solidFill>
@@ -15301,7 +15241,7 @@
               <a:t>▪ </a:t>
             </a:r>
             <a:r>
-              <a:rPr sz="1500" b="1" i="0">
+              <a:rPr sz="1700" b="1" i="0">
                 <a:solidFill>
                   <a:srgbClr val="16385C"/>
                 </a:solidFill>
@@ -15311,7 +15251,7 @@
               <a:t>ILS</a:t>
             </a:r>
             <a:r>
-              <a:rPr sz="1500" b="0" i="0">
+              <a:rPr sz="1700" b="0" i="0">
                 <a:solidFill>
                   <a:srgbClr val="26303A"/>
                 </a:solidFill>
@@ -15325,7 +15265,7 @@
       </p:sp>
       <p:sp>
         <p:nvSpPr>
-          <p:cNvPr id="11" name="TextBox 10"/>
+          <p:cNvPr id="10" name="TextBox 9"/>
           <p:cNvSpPr txBox="1"/>
           <p:nvPr/>
         </p:nvSpPr>
@@ -15351,7 +15291,7 @@
               </a:lnSpc>
             </a:pPr>
             <a:r>
-              <a:rPr sz="1650" b="0" i="0">
+              <a:rPr sz="1700" b="0" i="0">
                 <a:solidFill>
                   <a:srgbClr val="26303A"/>
                 </a:solidFill>
@@ -15361,7 +15301,7 @@
               <a:t>→ 演算子の効果は，探索構造の違いそのものではなく，</a:t>
             </a:r>
             <a:r>
-              <a:rPr sz="1650" b="1" i="0">
+              <a:rPr sz="1700" b="1" i="0">
                 <a:solidFill>
                   <a:srgbClr val="16385C"/>
                 </a:solidFill>

--- a/doc/presentation_materials/JIMA2026fall_発表.pptx
+++ b/doc/presentation_materials/JIMA2026fall_発表.pptx
@@ -15108,7 +15108,7 @@
       </p:sp>
       <p:pic>
         <p:nvPicPr>
-          <p:cNvPr id="8" name="Picture 7" descr="highstab_band.png"/>
+          <p:cNvPr id="8" name="Picture 7" descr="highstab_zoom4.png"/>
           <p:cNvPicPr>
             <a:picLocks noChangeAspect="1"/>
           </p:cNvPicPr>
@@ -15123,7 +15123,7 @@
         <p:spPr>
           <a:xfrm>
             <a:off x="609447" y="1536192"/>
-            <a:ext cx="10972800" cy="3518611"/>
+            <a:ext cx="10972800" cy="3291840"/>
           </a:xfrm>
           <a:prstGeom prst="rect">
             <a:avLst/>
@@ -15138,7 +15138,47 @@
         </p:nvSpPr>
         <p:spPr>
           <a:xfrm>
-            <a:off x="566928" y="5120640"/>
+            <a:off x="566928" y="4846320"/>
+            <a:ext cx="11057839" cy="256032"/>
+          </a:xfrm>
+          <a:prstGeom prst="rect">
+            <a:avLst/>
+          </a:prstGeom>
+          <a:noFill/>
+        </p:spPr>
+        <p:txBody>
+          <a:bodyPr wrap="square" anchor="t" lIns="18288" rIns="18288" tIns="9144" bIns="9144">
+            <a:spAutoFit/>
+          </a:bodyPr>
+          <a:lstStyle/>
+          <a:p>
+            <a:pPr algn="l">
+              <a:lnSpc>
+                <a:spcPct val="105000"/>
+              </a:lnSpc>
+            </a:pPr>
+            <a:r>
+              <a:rPr sz="1250" b="0" i="0">
+                <a:solidFill>
+                  <a:srgbClr val="6E7A88"/>
+                </a:solidFill>
+                <a:latin typeface="Meiryo"/>
+                <a:ea typeface="Meiryo"/>
+              </a:rPr>
+              <a:t>縦軸は最良値の付近を拡大（↓：範囲外，値を併記）．左の 2 つは ILS が演算子なしで帯の中，右の 2 つは帯の外．全 8 シナリオは前のスライド</a:t>
+            </a:r>
+          </a:p>
+        </p:txBody>
+      </p:sp>
+      <p:sp>
+        <p:nvSpPr>
+          <p:cNvPr id="10" name="TextBox 9"/>
+          <p:cNvSpPr txBox="1"/>
+          <p:nvPr/>
+        </p:nvSpPr>
+        <p:spPr>
+          <a:xfrm>
+            <a:off x="566928" y="5138928"/>
             <a:ext cx="11057839" cy="457200"/>
           </a:xfrm>
           <a:prstGeom prst="rect">
@@ -15161,7 +15201,7 @@
               </a:spcBef>
             </a:pPr>
             <a:r>
-              <a:rPr sz="1360" b="1" i="0">
+              <a:rPr sz="1280" b="1" i="0">
                 <a:solidFill>
                   <a:srgbClr val="16385C"/>
                 </a:solidFill>
@@ -15171,7 +15211,7 @@
               <a:t>▪ </a:t>
             </a:r>
             <a:r>
-              <a:rPr sz="1700" b="0" i="0">
+              <a:rPr sz="1600" b="0" i="0">
                 <a:solidFill>
                   <a:srgbClr val="26303A"/>
                 </a:solidFill>
@@ -15191,7 +15231,7 @@
               </a:spcBef>
             </a:pPr>
             <a:r>
-              <a:rPr sz="1360" b="1" i="0">
+              <a:rPr sz="1280" b="1" i="0">
                 <a:solidFill>
                   <a:srgbClr val="16385C"/>
                 </a:solidFill>
@@ -15201,7 +15241,7 @@
               <a:t>▪ </a:t>
             </a:r>
             <a:r>
-              <a:rPr sz="1700" b="1" i="0">
+              <a:rPr sz="1600" b="1" i="0">
                 <a:solidFill>
                   <a:srgbClr val="16385C"/>
                 </a:solidFill>
@@ -15211,7 +15251,7 @@
               <a:t>Memetic</a:t>
             </a:r>
             <a:r>
-              <a:rPr sz="1700" b="0" i="0">
+              <a:rPr sz="1600" b="0" i="0">
                 <a:solidFill>
                   <a:srgbClr val="26303A"/>
                 </a:solidFill>
@@ -15231,7 +15271,7 @@
               </a:spcBef>
             </a:pPr>
             <a:r>
-              <a:rPr sz="1360" b="1" i="0">
+              <a:rPr sz="1280" b="1" i="0">
                 <a:solidFill>
                   <a:srgbClr val="16385C"/>
                 </a:solidFill>
@@ -15241,7 +15281,7 @@
               <a:t>▪ </a:t>
             </a:r>
             <a:r>
-              <a:rPr sz="1700" b="1" i="0">
+              <a:rPr sz="1600" b="1" i="0">
                 <a:solidFill>
                   <a:srgbClr val="16385C"/>
                 </a:solidFill>
@@ -15251,7 +15291,7 @@
               <a:t>ILS</a:t>
             </a:r>
             <a:r>
-              <a:rPr sz="1700" b="0" i="0">
+              <a:rPr sz="1600" b="0" i="0">
                 <a:solidFill>
                   <a:srgbClr val="26303A"/>
                 </a:solidFill>
@@ -15265,7 +15305,7 @@
       </p:sp>
       <p:sp>
         <p:nvSpPr>
-          <p:cNvPr id="10" name="TextBox 9"/>
+          <p:cNvPr id="11" name="TextBox 10"/>
           <p:cNvSpPr txBox="1"/>
           <p:nvPr/>
         </p:nvSpPr>
@@ -15291,7 +15331,7 @@
               </a:lnSpc>
             </a:pPr>
             <a:r>
-              <a:rPr sz="1700" b="0" i="0">
+              <a:rPr sz="1650" b="0" i="0">
                 <a:solidFill>
                   <a:srgbClr val="26303A"/>
                 </a:solidFill>
@@ -15301,7 +15341,7 @@
               <a:t>→ 演算子の効果は，探索構造の違いそのものではなく，</a:t>
             </a:r>
             <a:r>
-              <a:rPr sz="1700" b="1" i="0">
+              <a:rPr sz="1650" b="1" i="0">
                 <a:solidFill>
                   <a:srgbClr val="16385C"/>
                 </a:solidFill>

--- a/doc/presentation_materials/JIMA2026fall_発表.pptx
+++ b/doc/presentation_materials/JIMA2026fall_発表.pptx
@@ -15123,7 +15123,7 @@
         <p:spPr>
           <a:xfrm>
             <a:off x="609447" y="1536192"/>
-            <a:ext cx="10972800" cy="3291840"/>
+            <a:ext cx="10972800" cy="3383280"/>
           </a:xfrm>
           <a:prstGeom prst="rect">
             <a:avLst/>
@@ -15138,7 +15138,7 @@
         </p:nvSpPr>
         <p:spPr>
           <a:xfrm>
-            <a:off x="566928" y="4846320"/>
+            <a:off x="566928" y="4937759"/>
             <a:ext cx="11057839" cy="256032"/>
           </a:xfrm>
           <a:prstGeom prst="rect">
@@ -15165,7 +15165,7 @@
                 <a:latin typeface="Meiryo"/>
                 <a:ea typeface="Meiryo"/>
               </a:rPr>
-              <a:t>縦軸は最良値の付近を拡大（↓：範囲外，値を併記）．左の 2 つは ILS が演算子なしで帯の中，右の 2 つは帯の外．全 8 シナリオは前のスライド</a:t>
+              <a:t>縦軸は最良値の付近を拡大（↓：範囲外，値を併記）．全 8 シナリオは前のスライド</a:t>
             </a:r>
           </a:p>
         </p:txBody>
@@ -15178,7 +15178,7 @@
         </p:nvSpPr>
         <p:spPr>
           <a:xfrm>
-            <a:off x="566928" y="5138928"/>
+            <a:off x="566928" y="5230368"/>
             <a:ext cx="11057839" cy="457200"/>
           </a:xfrm>
           <a:prstGeom prst="rect">
@@ -15201,7 +15201,7 @@
               </a:spcBef>
             </a:pPr>
             <a:r>
-              <a:rPr sz="1280" b="1" i="0">
+              <a:rPr sz="1240" b="1" i="0">
                 <a:solidFill>
                   <a:srgbClr val="16385C"/>
                 </a:solidFill>
@@ -15211,7 +15211,7 @@
               <a:t>▪ </a:t>
             </a:r>
             <a:r>
-              <a:rPr sz="1600" b="0" i="0">
+              <a:rPr sz="1550" b="0" i="0">
                 <a:solidFill>
                   <a:srgbClr val="26303A"/>
                 </a:solidFill>
@@ -15227,11 +15227,11 @@
                 <a:spcPct val="108000"/>
               </a:lnSpc>
               <a:spcBef>
-                <a:spcPts val="300"/>
+                <a:spcPts val="200"/>
               </a:spcBef>
             </a:pPr>
             <a:r>
-              <a:rPr sz="1280" b="1" i="0">
+              <a:rPr sz="1240" b="1" i="0">
                 <a:solidFill>
                   <a:srgbClr val="16385C"/>
                 </a:solidFill>
@@ -15241,7 +15241,7 @@
               <a:t>▪ </a:t>
             </a:r>
             <a:r>
-              <a:rPr sz="1600" b="1" i="0">
+              <a:rPr sz="1550" b="1" i="0">
                 <a:solidFill>
                   <a:srgbClr val="16385C"/>
                 </a:solidFill>
@@ -15251,7 +15251,7 @@
               <a:t>Memetic</a:t>
             </a:r>
             <a:r>
-              <a:rPr sz="1600" b="0" i="0">
+              <a:rPr sz="1550" b="0" i="0">
                 <a:solidFill>
                   <a:srgbClr val="26303A"/>
                 </a:solidFill>
@@ -15267,11 +15267,11 @@
                 <a:spcPct val="108000"/>
               </a:lnSpc>
               <a:spcBef>
-                <a:spcPts val="300"/>
+                <a:spcPts val="200"/>
               </a:spcBef>
             </a:pPr>
             <a:r>
-              <a:rPr sz="1280" b="1" i="0">
+              <a:rPr sz="1240" b="1" i="0">
                 <a:solidFill>
                   <a:srgbClr val="16385C"/>
                 </a:solidFill>
@@ -15281,7 +15281,7 @@
               <a:t>▪ </a:t>
             </a:r>
             <a:r>
-              <a:rPr sz="1600" b="1" i="0">
+              <a:rPr sz="1550" b="1" i="0">
                 <a:solidFill>
                   <a:srgbClr val="16385C"/>
                 </a:solidFill>
@@ -15291,7 +15291,7 @@
               <a:t>ILS</a:t>
             </a:r>
             <a:r>
-              <a:rPr sz="1600" b="0" i="0">
+              <a:rPr sz="1550" b="0" i="0">
                 <a:solidFill>
                   <a:srgbClr val="26303A"/>
                 </a:solidFill>

--- a/doc/presentation_materials/JIMA2026fall_発表.pptx
+++ b/doc/presentation_materials/JIMA2026fall_発表.pptx
@@ -15545,7 +15545,7 @@
                 <a:latin typeface="Meiryo"/>
                 <a:ea typeface="Meiryo"/>
               </a:rPr>
-              <a:t>外乱と再スケジューリング・先行研究と課題・仮説</a:t>
+              <a:t>外乱と再スケジューリング・先行研究・特殊性と課題・仮説</a:t>
             </a:r>
           </a:p>
         </p:txBody>
@@ -29097,7 +29097,7 @@
                 <a:latin typeface="Meiryo"/>
                 <a:ea typeface="Meiryo"/>
               </a:rPr>
-              <a:t>再スケジューリングの特殊性</a:t>
+              <a:t>先行研究：安定性を確保する 2 つのアプローチ</a:t>
             </a:r>
           </a:p>
         </p:txBody>
@@ -29217,27 +29217,7 @@
                 <a:latin typeface="Meiryo"/>
                 <a:ea typeface="Meiryo"/>
               </a:rPr>
-              <a:t>安定性が最良の解は探索せずに得られる．問われるのは，そこから少しの変更で </a:t>
-            </a:r>
-            <a:r>
-              <a:rPr sz="1500" b="1" i="1">
-                <a:solidFill>
-                  <a:srgbClr val="16385C"/>
-                </a:solidFill>
-                <a:latin typeface="Meiryo"/>
-                <a:ea typeface="Meiryo"/>
-              </a:rPr>
-              <a:t>MS</a:t>
-            </a:r>
-            <a:r>
-              <a:rPr sz="1500" b="1" i="0">
-                <a:solidFill>
-                  <a:srgbClr val="16385C"/>
-                </a:solidFill>
-                <a:latin typeface="Meiryo"/>
-                <a:ea typeface="Meiryo"/>
-              </a:rPr>
-              <a:t> をどこまで下げられるか</a:t>
+              <a:t>安定性は「目的関数に組み込む」か「再スケジュールの範囲を限定する」かで確保されてきた</a:t>
             </a:r>
           </a:p>
         </p:txBody>
@@ -29313,40 +29293,108 @@
           </a:p>
         </p:txBody>
       </p:sp>
-      <p:pic>
-        <p:nvPicPr>
-          <p:cNvPr id="8" name="Picture 7" descr="concept_0.png"/>
-          <p:cNvPicPr>
-            <a:picLocks noChangeAspect="1"/>
-          </p:cNvPicPr>
-          <p:nvPr/>
-        </p:nvPicPr>
-        <p:blipFill>
-          <a:blip r:embed="rId2"/>
-          <a:stretch>
-            <a:fillRect/>
-          </a:stretch>
-        </p:blipFill>
-        <p:spPr>
-          <a:xfrm>
-            <a:off x="521207" y="1691640"/>
-            <a:ext cx="5577840" cy="4312367"/>
+      <p:sp>
+        <p:nvSpPr>
+          <p:cNvPr id="8" name="Rounded Rectangle 7"/>
+          <p:cNvSpPr/>
+          <p:nvPr/>
+        </p:nvSpPr>
+        <p:spPr>
+          <a:xfrm>
+            <a:off x="566928" y="1645920"/>
+            <a:ext cx="5346039" cy="3703320"/>
+          </a:xfrm>
+          <a:prstGeom prst="roundRect">
+            <a:avLst>
+              <a:gd name="adj" fmla="val 4000"/>
+            </a:avLst>
+          </a:prstGeom>
+          <a:solidFill>
+            <a:srgbClr val="FFFFFF"/>
+          </a:solidFill>
+          <a:ln w="13970">
+            <a:solidFill>
+              <a:srgbClr val="C9D6E5"/>
+            </a:solidFill>
+          </a:ln>
+          <a:effectLst/>
+        </p:spPr>
+        <p:style>
+          <a:lnRef idx="1">
+            <a:schemeClr val="accent1"/>
+          </a:lnRef>
+          <a:fillRef idx="3">
+            <a:schemeClr val="accent1"/>
+          </a:fillRef>
+          <a:effectRef idx="2">
+            <a:schemeClr val="accent1"/>
+          </a:effectRef>
+          <a:fontRef idx="minor">
+            <a:schemeClr val="lt1"/>
+          </a:fontRef>
+        </p:style>
+        <p:txBody>
+          <a:bodyPr rtlCol="0" anchor="ctr"/>
+          <a:lstStyle/>
+          <a:p>
+            <a:pPr algn="ctr"/>
+          </a:p>
+        </p:txBody>
+      </p:sp>
+      <p:sp>
+        <p:nvSpPr>
+          <p:cNvPr id="9" name="Rectangle 8"/>
+          <p:cNvSpPr/>
+          <p:nvPr/>
+        </p:nvSpPr>
+        <p:spPr>
+          <a:xfrm>
+            <a:off x="566928" y="1645920"/>
+            <a:ext cx="5346039" cy="502920"/>
           </a:xfrm>
           <a:prstGeom prst="rect">
             <a:avLst/>
           </a:prstGeom>
-        </p:spPr>
-      </p:pic>
-      <p:sp>
-        <p:nvSpPr>
-          <p:cNvPr id="9" name="TextBox 8"/>
+          <a:solidFill>
+            <a:srgbClr val="16385C"/>
+          </a:solidFill>
+          <a:ln>
+            <a:noFill/>
+          </a:ln>
+          <a:effectLst/>
+        </p:spPr>
+        <p:style>
+          <a:lnRef idx="1">
+            <a:schemeClr val="accent1"/>
+          </a:lnRef>
+          <a:fillRef idx="3">
+            <a:schemeClr val="accent1"/>
+          </a:fillRef>
+          <a:effectRef idx="2">
+            <a:schemeClr val="accent1"/>
+          </a:effectRef>
+          <a:fontRef idx="minor">
+            <a:schemeClr val="lt1"/>
+          </a:fontRef>
+        </p:style>
+        <p:txBody>
+          <a:bodyPr rtlCol="0" anchor="ctr"/>
+          <a:lstStyle/>
+          <a:p>
+            <a:pPr algn="ctr"/>
+          </a:p>
+        </p:txBody>
+      </p:sp>
+      <p:sp>
+        <p:nvSpPr>
+          <p:cNvPr id="10" name="TextBox 9"/>
           <p:cNvSpPr txBox="1"/>
           <p:nvPr/>
         </p:nvSpPr>
         <p:spPr>
           <a:xfrm>
-            <a:off x="6281928" y="1691640"/>
-            <a:ext cx="5342839" cy="4312367"/>
+            <a:off x="749808" y="1645920"/>
+            <a:ext cx="4980279" cy="502920"/>
           </a:xfrm>
           <a:prstGeom prst="rect">
             <a:avLst/>
@@ -29359,264 +29407,528 @@
           </a:bodyPr>
           <a:lstStyle/>
           <a:p>
+            <a:pPr algn="l">
+              <a:lnSpc>
+                <a:spcPct val="105000"/>
+              </a:lnSpc>
+            </a:pPr>
+            <a:r>
+              <a:rPr sz="1550" b="1" i="0">
+                <a:solidFill>
+                  <a:srgbClr val="FFFFFF"/>
+                </a:solidFill>
+                <a:latin typeface="Meiryo"/>
+                <a:ea typeface="Meiryo"/>
+              </a:rPr>
+              <a:t>安定性を目的関数に組み込むアプローチ</a:t>
+            </a:r>
+          </a:p>
+        </p:txBody>
+      </p:sp>
+      <p:sp>
+        <p:nvSpPr>
+          <p:cNvPr id="11" name="TextBox 10"/>
+          <p:cNvSpPr txBox="1"/>
+          <p:nvPr/>
+        </p:nvSpPr>
+        <p:spPr>
+          <a:xfrm>
+            <a:off x="795528" y="2267712"/>
+            <a:ext cx="4888839" cy="2286000"/>
+          </a:xfrm>
+          <a:prstGeom prst="rect">
+            <a:avLst/>
+          </a:prstGeom>
+          <a:noFill/>
+        </p:spPr>
+        <p:txBody>
+          <a:bodyPr wrap="square" anchor="t" lIns="18288" rIns="18288" tIns="9144" bIns="9144">
+            <a:spAutoFit/>
+          </a:bodyPr>
+          <a:lstStyle/>
+          <a:p>
             <a:pPr>
               <a:lnSpc>
-                <a:spcPct val="108000"/>
+                <a:spcPct val="100000"/>
               </a:lnSpc>
               <a:spcBef>
                 <a:spcPts val="0"/>
               </a:spcBef>
             </a:pPr>
             <a:r>
-              <a:rPr sz="1500" b="0" i="0">
-                <a:solidFill>
-                  <a:srgbClr val="26303A"/>
-                </a:solidFill>
-                <a:latin typeface="Meiryo"/>
-                <a:ea typeface="Meiryo"/>
-              </a:rPr>
-              <a:t>★ </a:t>
-            </a:r>
-            <a:r>
-              <a:rPr sz="1500" b="0" i="1">
-                <a:solidFill>
-                  <a:srgbClr val="26303A"/>
-                </a:solidFill>
-                <a:latin typeface="Meiryo"/>
-                <a:ea typeface="Meiryo"/>
-              </a:rPr>
-              <a:t>S</a:t>
-            </a:r>
-            <a:r>
-              <a:rPr sz="1080" b="0" i="1" baseline="-22000">
-                <a:solidFill>
-                  <a:srgbClr val="26303A"/>
-                </a:solidFill>
-                <a:latin typeface="Meiryo"/>
-                <a:ea typeface="Meiryo"/>
-              </a:rPr>
-              <a:t>p</a:t>
-            </a:r>
-            <a:r>
-              <a:rPr sz="1500" b="0" i="0">
-                <a:solidFill>
-                  <a:srgbClr val="26303A"/>
-                </a:solidFill>
-                <a:latin typeface="Meiryo"/>
-                <a:ea typeface="Meiryo"/>
-              </a:rPr>
-              <a:t> の処理順序を保って遅延を吸収した解（right-shift）は，</a:t>
-            </a:r>
-            <a:r>
-              <a:rPr sz="1500" b="1" i="0">
+              <a:rPr sz="1350" b="1" i="0">
                 <a:solidFill>
                   <a:srgbClr val="16385C"/>
                 </a:solidFill>
                 <a:latin typeface="Meiryo"/>
                 <a:ea typeface="Meiryo"/>
               </a:rPr>
-              <a:t>探索せずに得られる</a:t>
-            </a:r>
-            <a:r>
-              <a:rPr sz="1500" b="0" i="0">
-                <a:solidFill>
-                  <a:srgbClr val="26303A"/>
-                </a:solidFill>
-                <a:latin typeface="Meiryo"/>
-                <a:ea typeface="Meiryo"/>
-              </a:rPr>
-              <a:t>．変更量 0 で安定性は最良，</a:t>
-            </a:r>
-            <a:r>
-              <a:rPr sz="1500" b="0" i="1">
-                <a:solidFill>
-                  <a:srgbClr val="26303A"/>
-                </a:solidFill>
-                <a:latin typeface="Meiryo"/>
-                <a:ea typeface="Meiryo"/>
-              </a:rPr>
-              <a:t>MS</a:t>
-            </a:r>
-            <a:r>
-              <a:rPr sz="1500" b="0" i="0">
-                <a:solidFill>
-                  <a:srgbClr val="26303A"/>
-                </a:solidFill>
-                <a:latin typeface="Meiryo"/>
-                <a:ea typeface="Meiryo"/>
-              </a:rPr>
-              <a:t> も外乱前に最適化済み</a:t>
+              <a:t>Wu ら (1993)</a:t>
             </a:r>
           </a:p>
           <a:p>
             <a:pPr>
               <a:lnSpc>
-                <a:spcPct val="108000"/>
+                <a:spcPct val="100000"/>
+              </a:lnSpc>
+            </a:pPr>
+            <a:r>
+              <a:rPr sz="1250" b="0" i="0">
+                <a:solidFill>
+                  <a:srgbClr val="26303A"/>
+                </a:solidFill>
+                <a:latin typeface="Meiryo"/>
+                <a:ea typeface="Meiryo"/>
+              </a:rPr>
+              <a:t>　単一機械で効率と安定性を評価基準に定式化</a:t>
+            </a:r>
+          </a:p>
+          <a:p>
+            <a:pPr>
+              <a:lnSpc>
+                <a:spcPct val="100000"/>
               </a:lnSpc>
               <a:spcBef>
-                <a:spcPts val="1200"/>
+                <a:spcPts val="400"/>
               </a:spcBef>
             </a:pPr>
             <a:r>
-              <a:rPr sz="1500" b="0" i="0">
-                <a:solidFill>
-                  <a:srgbClr val="26303A"/>
-                </a:solidFill>
-                <a:latin typeface="Meiryo"/>
-                <a:ea typeface="Meiryo"/>
-              </a:rPr>
-              <a:t>● </a:t>
-            </a:r>
-            <a:r>
-              <a:rPr sz="1500" b="1" i="0">
+              <a:rPr sz="1350" b="1" i="0">
                 <a:solidFill>
                   <a:srgbClr val="16385C"/>
                 </a:solidFill>
                 <a:latin typeface="Meiryo"/>
                 <a:ea typeface="Meiryo"/>
               </a:rPr>
-              <a:t>Pareto フロント</a:t>
-            </a:r>
-            <a:r>
-              <a:rPr sz="1500" b="0" i="0">
-                <a:solidFill>
-                  <a:srgbClr val="26303A"/>
-                </a:solidFill>
-                <a:latin typeface="Meiryo"/>
-                <a:ea typeface="Meiryo"/>
-              </a:rPr>
-              <a:t>上の非劣解のうち，変更コストが無視できない場面で選ばれるのは，</a:t>
-            </a:r>
-            <a:r>
-              <a:rPr sz="1500" b="0" i="1">
-                <a:solidFill>
-                  <a:srgbClr val="26303A"/>
-                </a:solidFill>
-                <a:latin typeface="Meiryo"/>
-                <a:ea typeface="Meiryo"/>
-              </a:rPr>
-              <a:t>S</a:t>
-            </a:r>
-            <a:r>
-              <a:rPr sz="1080" b="0" i="1" baseline="-22000">
-                <a:solidFill>
-                  <a:srgbClr val="26303A"/>
-                </a:solidFill>
-                <a:latin typeface="Meiryo"/>
-                <a:ea typeface="Meiryo"/>
-              </a:rPr>
-              <a:t>p</a:t>
-            </a:r>
-            <a:r>
-              <a:rPr sz="1500" b="0" i="0">
-                <a:solidFill>
-                  <a:srgbClr val="26303A"/>
-                </a:solidFill>
-                <a:latin typeface="Meiryo"/>
-                <a:ea typeface="Meiryo"/>
-              </a:rPr>
-              <a:t> の近傍（</a:t>
-            </a:r>
-            <a:r>
-              <a:rPr sz="1500" b="1" i="0">
-                <a:solidFill>
-                  <a:srgbClr val="16385C"/>
-                </a:solidFill>
-                <a:latin typeface="Meiryo"/>
-                <a:ea typeface="Meiryo"/>
-              </a:rPr>
-              <a:t>高安定領域</a:t>
-            </a:r>
-            <a:r>
-              <a:rPr sz="1500" b="0" i="0">
-                <a:solidFill>
-                  <a:srgbClr val="26303A"/>
-                </a:solidFill>
-                <a:latin typeface="Meiryo"/>
-                <a:ea typeface="Meiryo"/>
-              </a:rPr>
-              <a:t>）の解</a:t>
+              <a:t>Rangsaritratsamee ら (2004)</a:t>
             </a:r>
           </a:p>
           <a:p>
             <a:pPr>
               <a:lnSpc>
-                <a:spcPct val="108000"/>
+                <a:spcPct val="100000"/>
+              </a:lnSpc>
+            </a:pPr>
+            <a:r>
+              <a:rPr sz="1250" b="0" i="0">
+                <a:solidFill>
+                  <a:srgbClr val="26303A"/>
+                </a:solidFill>
+                <a:latin typeface="Meiryo"/>
+                <a:ea typeface="Meiryo"/>
+              </a:rPr>
+              <a:t>　JSP．GA＋局所探索</a:t>
+            </a:r>
+          </a:p>
+          <a:p>
+            <a:pPr>
+              <a:lnSpc>
+                <a:spcPct val="100000"/>
               </a:lnSpc>
               <a:spcBef>
-                <a:spcPts val="1200"/>
+                <a:spcPts val="400"/>
               </a:spcBef>
             </a:pPr>
             <a:r>
-              <a:rPr sz="1550" b="0" i="0">
-                <a:solidFill>
-                  <a:srgbClr val="26303A"/>
-                </a:solidFill>
-                <a:latin typeface="Meiryo"/>
-                <a:ea typeface="Meiryo"/>
-              </a:rPr>
-              <a:t>→ この場合，手法は Pareto フロント全体の品質</a:t>
+              <a:rPr sz="1350" b="1" i="0">
+                <a:solidFill>
+                  <a:srgbClr val="16385C"/>
+                </a:solidFill>
+                <a:latin typeface="Meiryo"/>
+                <a:ea typeface="Meiryo"/>
+              </a:rPr>
+              <a:t>Zhang ら (2013)</a:t>
             </a:r>
           </a:p>
           <a:p>
             <a:pPr>
               <a:lnSpc>
-                <a:spcPct val="108000"/>
+                <a:spcPct val="100000"/>
+              </a:lnSpc>
+            </a:pPr>
+            <a:r>
+              <a:rPr sz="1250" b="0" i="0">
+                <a:solidFill>
+                  <a:srgbClr val="26303A"/>
+                </a:solidFill>
+                <a:latin typeface="Meiryo"/>
+                <a:ea typeface="Meiryo"/>
+              </a:rPr>
+              <a:t>　JSP．GA＋タブーサーチ</a:t>
+            </a:r>
+          </a:p>
+          <a:p>
+            <a:pPr>
+              <a:lnSpc>
+                <a:spcPct val="100000"/>
+              </a:lnSpc>
+              <a:spcBef>
+                <a:spcPts val="400"/>
+              </a:spcBef>
+            </a:pPr>
+            <a:r>
+              <a:rPr sz="1350" b="1" i="0">
+                <a:solidFill>
+                  <a:srgbClr val="16385C"/>
+                </a:solidFill>
+                <a:latin typeface="Meiryo"/>
+                <a:ea typeface="Meiryo"/>
+              </a:rPr>
+              <a:t>Fattahi &amp; Fallahi (2010)</a:t>
+            </a:r>
+          </a:p>
+          <a:p>
+            <a:pPr>
+              <a:lnSpc>
+                <a:spcPct val="100000"/>
+              </a:lnSpc>
+            </a:pPr>
+            <a:r>
+              <a:rPr sz="1250" b="0" i="0">
+                <a:solidFill>
+                  <a:srgbClr val="26303A"/>
+                </a:solidFill>
+                <a:latin typeface="Meiryo"/>
+                <a:ea typeface="Meiryo"/>
+              </a:rPr>
+              <a:t>　FJSP．GA＋局所探索</a:t>
+            </a:r>
+          </a:p>
+          <a:p>
+            <a:pPr>
+              <a:lnSpc>
+                <a:spcPct val="100000"/>
+              </a:lnSpc>
+              <a:spcBef>
+                <a:spcPts val="400"/>
+              </a:spcBef>
+            </a:pPr>
+            <a:r>
+              <a:rPr sz="1350" b="1" i="0">
+                <a:solidFill>
+                  <a:srgbClr val="16385C"/>
+                </a:solidFill>
+                <a:latin typeface="Meiryo"/>
+                <a:ea typeface="Meiryo"/>
+              </a:rPr>
+              <a:t>Valledor ら (2022)，Luo ら (2025)</a:t>
+            </a:r>
+          </a:p>
+          <a:p>
+            <a:pPr>
+              <a:lnSpc>
+                <a:spcPct val="100000"/>
+              </a:lnSpc>
+            </a:pPr>
+            <a:r>
+              <a:rPr sz="1250" b="0" i="0">
+                <a:solidFill>
+                  <a:srgbClr val="26303A"/>
+                </a:solidFill>
+                <a:latin typeface="Meiryo"/>
+                <a:ea typeface="Meiryo"/>
+              </a:rPr>
+              <a:t>　NSGA-II 系で Pareto 支配</a:t>
+            </a:r>
+          </a:p>
+        </p:txBody>
+      </p:sp>
+      <p:sp>
+        <p:nvSpPr>
+          <p:cNvPr id="12" name="Rounded Rectangle 11"/>
+          <p:cNvSpPr/>
+          <p:nvPr/>
+        </p:nvSpPr>
+        <p:spPr>
+          <a:xfrm>
+            <a:off x="795528" y="4800600"/>
+            <a:ext cx="4888839" cy="420624"/>
+          </a:xfrm>
+          <a:prstGeom prst="roundRect">
+            <a:avLst>
+              <a:gd name="adj" fmla="val 20000"/>
+            </a:avLst>
+          </a:prstGeom>
+          <a:solidFill>
+            <a:srgbClr val="EDF2F7"/>
+          </a:solidFill>
+          <a:ln>
+            <a:noFill/>
+          </a:ln>
+          <a:effectLst/>
+        </p:spPr>
+        <p:style>
+          <a:lnRef idx="1">
+            <a:schemeClr val="accent1"/>
+          </a:lnRef>
+          <a:fillRef idx="3">
+            <a:schemeClr val="accent1"/>
+          </a:fillRef>
+          <a:effectRef idx="2">
+            <a:schemeClr val="accent1"/>
+          </a:effectRef>
+          <a:fontRef idx="minor">
+            <a:schemeClr val="lt1"/>
+          </a:fontRef>
+        </p:style>
+        <p:txBody>
+          <a:bodyPr rtlCol="0" anchor="ctr" wrap="square" lIns="54864" rIns="54864" tIns="18288" bIns="18288"/>
+          <a:lstStyle/>
+          <a:p>
+            <a:pPr algn="ctr">
+              <a:lnSpc>
+                <a:spcPct val="100000"/>
+              </a:lnSpc>
+            </a:pPr>
+            <a:r>
+              <a:rPr sz="1350" b="1" i="0">
+                <a:solidFill>
+                  <a:srgbClr val="16385C"/>
+                </a:solidFill>
+                <a:latin typeface="Meiryo"/>
+                <a:ea typeface="Meiryo"/>
+              </a:rPr>
+              <a:t>安定性は解の評価（目的関数の一項）にのみ反映</a:t>
+            </a:r>
+          </a:p>
+        </p:txBody>
+      </p:sp>
+      <p:sp>
+        <p:nvSpPr>
+          <p:cNvPr id="13" name="Rounded Rectangle 12"/>
+          <p:cNvSpPr/>
+          <p:nvPr/>
+        </p:nvSpPr>
+        <p:spPr>
+          <a:xfrm>
+            <a:off x="6278727" y="1645920"/>
+            <a:ext cx="5346039" cy="3703320"/>
+          </a:xfrm>
+          <a:prstGeom prst="roundRect">
+            <a:avLst>
+              <a:gd name="adj" fmla="val 4000"/>
+            </a:avLst>
+          </a:prstGeom>
+          <a:solidFill>
+            <a:srgbClr val="FFFFFF"/>
+          </a:solidFill>
+          <a:ln w="13970">
+            <a:solidFill>
+              <a:srgbClr val="C9D6E5"/>
+            </a:solidFill>
+          </a:ln>
+          <a:effectLst/>
+        </p:spPr>
+        <p:style>
+          <a:lnRef idx="1">
+            <a:schemeClr val="accent1"/>
+          </a:lnRef>
+          <a:fillRef idx="3">
+            <a:schemeClr val="accent1"/>
+          </a:fillRef>
+          <a:effectRef idx="2">
+            <a:schemeClr val="accent1"/>
+          </a:effectRef>
+          <a:fontRef idx="minor">
+            <a:schemeClr val="lt1"/>
+          </a:fontRef>
+        </p:style>
+        <p:txBody>
+          <a:bodyPr rtlCol="0" anchor="ctr"/>
+          <a:lstStyle/>
+          <a:p>
+            <a:pPr algn="ctr"/>
+          </a:p>
+        </p:txBody>
+      </p:sp>
+      <p:sp>
+        <p:nvSpPr>
+          <p:cNvPr id="14" name="Rectangle 13"/>
+          <p:cNvSpPr/>
+          <p:nvPr/>
+        </p:nvSpPr>
+        <p:spPr>
+          <a:xfrm>
+            <a:off x="6278727" y="1645920"/>
+            <a:ext cx="5346039" cy="502920"/>
+          </a:xfrm>
+          <a:prstGeom prst="rect">
+            <a:avLst/>
+          </a:prstGeom>
+          <a:solidFill>
+            <a:srgbClr val="16385C"/>
+          </a:solidFill>
+          <a:ln>
+            <a:noFill/>
+          </a:ln>
+          <a:effectLst/>
+        </p:spPr>
+        <p:style>
+          <a:lnRef idx="1">
+            <a:schemeClr val="accent1"/>
+          </a:lnRef>
+          <a:fillRef idx="3">
+            <a:schemeClr val="accent1"/>
+          </a:fillRef>
+          <a:effectRef idx="2">
+            <a:schemeClr val="accent1"/>
+          </a:effectRef>
+          <a:fontRef idx="minor">
+            <a:schemeClr val="lt1"/>
+          </a:fontRef>
+        </p:style>
+        <p:txBody>
+          <a:bodyPr rtlCol="0" anchor="ctr"/>
+          <a:lstStyle/>
+          <a:p>
+            <a:pPr algn="ctr"/>
+          </a:p>
+        </p:txBody>
+      </p:sp>
+      <p:sp>
+        <p:nvSpPr>
+          <p:cNvPr id="15" name="TextBox 14"/>
+          <p:cNvSpPr txBox="1"/>
+          <p:nvPr/>
+        </p:nvSpPr>
+        <p:spPr>
+          <a:xfrm>
+            <a:off x="6461607" y="1645920"/>
+            <a:ext cx="4980279" cy="502920"/>
+          </a:xfrm>
+          <a:prstGeom prst="rect">
+            <a:avLst/>
+          </a:prstGeom>
+          <a:noFill/>
+        </p:spPr>
+        <p:txBody>
+          <a:bodyPr wrap="square" anchor="ctr" lIns="18288" rIns="18288" tIns="9144" bIns="9144">
+            <a:spAutoFit/>
+          </a:bodyPr>
+          <a:lstStyle/>
+          <a:p>
+            <a:pPr algn="l">
+              <a:lnSpc>
+                <a:spcPct val="105000"/>
+              </a:lnSpc>
+            </a:pPr>
+            <a:r>
+              <a:rPr sz="1550" b="1" i="0">
+                <a:solidFill>
+                  <a:srgbClr val="FFFFFF"/>
+                </a:solidFill>
+                <a:latin typeface="Meiryo"/>
+                <a:ea typeface="Meiryo"/>
+              </a:rPr>
+              <a:t>再スケジュールの対象範囲を限定するアプローチ</a:t>
+            </a:r>
+          </a:p>
+        </p:txBody>
+      </p:sp>
+      <p:sp>
+        <p:nvSpPr>
+          <p:cNvPr id="16" name="TextBox 15"/>
+          <p:cNvSpPr txBox="1"/>
+          <p:nvPr/>
+        </p:nvSpPr>
+        <p:spPr>
+          <a:xfrm>
+            <a:off x="6507327" y="2267712"/>
+            <a:ext cx="4888839" cy="2286000"/>
+          </a:xfrm>
+          <a:prstGeom prst="rect">
+            <a:avLst/>
+          </a:prstGeom>
+          <a:noFill/>
+        </p:spPr>
+        <p:txBody>
+          <a:bodyPr wrap="square" anchor="t" lIns="18288" rIns="18288" tIns="9144" bIns="9144">
+            <a:spAutoFit/>
+          </a:bodyPr>
+          <a:lstStyle/>
+          <a:p>
+            <a:pPr>
+              <a:lnSpc>
+                <a:spcPct val="100000"/>
               </a:lnSpc>
               <a:spcBef>
                 <a:spcPts val="0"/>
               </a:spcBef>
             </a:pPr>
             <a:r>
-              <a:rPr sz="1550" b="0" i="0">
-                <a:solidFill>
-                  <a:srgbClr val="26303A"/>
-                </a:solidFill>
-                <a:latin typeface="Meiryo"/>
-                <a:ea typeface="Meiryo"/>
-              </a:rPr>
-              <a:t>だけではなく，</a:t>
-            </a:r>
-            <a:r>
-              <a:rPr sz="1550" b="1" i="0">
+              <a:rPr sz="1350" b="1" i="0">
                 <a:solidFill>
                   <a:srgbClr val="16385C"/>
                 </a:solidFill>
                 <a:latin typeface="Meiryo"/>
                 <a:ea typeface="Meiryo"/>
               </a:rPr>
-              <a:t>高安定領域の品質</a:t>
-            </a:r>
-            <a:r>
-              <a:rPr sz="1550" b="0" i="0">
-                <a:solidFill>
-                  <a:srgbClr val="26303A"/>
-                </a:solidFill>
-                <a:latin typeface="Meiryo"/>
-                <a:ea typeface="Meiryo"/>
-              </a:rPr>
-              <a:t>が問われる</a:t>
+              <a:t>Bean ら (1991)</a:t>
             </a:r>
           </a:p>
           <a:p>
             <a:pPr>
               <a:lnSpc>
-                <a:spcPct val="108000"/>
+                <a:spcPct val="100000"/>
+              </a:lnSpc>
+            </a:pPr>
+            <a:r>
+              <a:rPr sz="1250" b="0" i="0">
+                <a:solidFill>
+                  <a:srgbClr val="26303A"/>
+                </a:solidFill>
+                <a:latin typeface="Meiryo"/>
+                <a:ea typeface="Meiryo"/>
+              </a:rPr>
+              <a:t>　復帰時点までを再スケジュール（match-up）</a:t>
+            </a:r>
+          </a:p>
+          <a:p>
+            <a:pPr>
+              <a:lnSpc>
+                <a:spcPct val="100000"/>
               </a:lnSpc>
               <a:spcBef>
-                <a:spcPts val="1800"/>
+                <a:spcPts val="400"/>
               </a:spcBef>
             </a:pPr>
             <a:r>
-              <a:rPr sz="1350" b="0" i="0">
+              <a:rPr sz="1350" b="1" i="0">
+                <a:solidFill>
+                  <a:srgbClr val="16385C"/>
+                </a:solidFill>
+                <a:latin typeface="Meiryo"/>
+                <a:ea typeface="Meiryo"/>
+              </a:rPr>
+              <a:t>Abumaizar &amp; Svestka (1997)</a:t>
+            </a:r>
+          </a:p>
+          <a:p>
+            <a:pPr>
+              <a:lnSpc>
+                <a:spcPct val="100000"/>
+              </a:lnSpc>
+            </a:pPr>
+            <a:r>
+              <a:rPr sz="1250" b="0" i="0">
                 <a:solidFill>
                   <a:srgbClr val="26303A"/>
                 </a:solidFill>
                 <a:latin typeface="Meiryo"/>
                 <a:ea typeface="Meiryo"/>
               </a:rPr>
-              <a:t>本研究では，Pareto フロントの品質を hypervolume（HV）で測り，高安定領域に限った HV を</a:t>
-            </a:r>
+              <a:t>　影響を受ける作業だけを再スケジュール</a:t>
+            </a:r>
+          </a:p>
+          <a:p>
+            <a:pPr>
+              <a:lnSpc>
+                <a:spcPct val="100000"/>
+              </a:lnSpc>
+              <a:spcBef>
+                <a:spcPts val="400"/>
+              </a:spcBef>
+            </a:pPr>
             <a:r>
               <a:rPr sz="1350" b="1" i="0">
                 <a:solidFill>
@@ -29625,17 +29937,247 @@
                 <a:latin typeface="Meiryo"/>
                 <a:ea typeface="Meiryo"/>
               </a:rPr>
-              <a:t>高安定 HV</a:t>
-            </a:r>
-            <a:r>
-              <a:rPr sz="1350" b="0" i="0">
+              <a:t>Zakaria &amp; Petrovic (2012)</a:t>
+            </a:r>
+          </a:p>
+          <a:p>
+            <a:pPr>
+              <a:lnSpc>
+                <a:spcPct val="100000"/>
+              </a:lnSpc>
+            </a:pPr>
+            <a:r>
+              <a:rPr sz="1250" b="0" i="0">
                 <a:solidFill>
                   <a:srgbClr val="26303A"/>
                 </a:solidFill>
                 <a:latin typeface="Meiryo"/>
                 <a:ea typeface="Meiryo"/>
               </a:rPr>
-              <a:t> と呼ぶ</a:t>
+              <a:t>　GA の染色体を区間に限定</a:t>
+            </a:r>
+          </a:p>
+          <a:p>
+            <a:pPr>
+              <a:lnSpc>
+                <a:spcPct val="100000"/>
+              </a:lnSpc>
+              <a:spcBef>
+                <a:spcPts val="400"/>
+              </a:spcBef>
+            </a:pPr>
+            <a:r>
+              <a:rPr sz="1350" b="1" i="0">
+                <a:solidFill>
+                  <a:srgbClr val="16385C"/>
+                </a:solidFill>
+                <a:latin typeface="Meiryo"/>
+                <a:ea typeface="Meiryo"/>
+              </a:rPr>
+              <a:t>Sun ら (2026)</a:t>
+            </a:r>
+          </a:p>
+          <a:p>
+            <a:pPr>
+              <a:lnSpc>
+                <a:spcPct val="100000"/>
+              </a:lnSpc>
+            </a:pPr>
+            <a:r>
+              <a:rPr sz="1250" b="0" i="0">
+                <a:solidFill>
+                  <a:srgbClr val="26303A"/>
+                </a:solidFill>
+                <a:latin typeface="Meiryo"/>
+                <a:ea typeface="Meiryo"/>
+              </a:rPr>
+              <a:t>　再最適化の範囲を 4 段階に整理</a:t>
+            </a:r>
+          </a:p>
+        </p:txBody>
+      </p:sp>
+      <p:sp>
+        <p:nvSpPr>
+          <p:cNvPr id="17" name="Rounded Rectangle 16"/>
+          <p:cNvSpPr/>
+          <p:nvPr/>
+        </p:nvSpPr>
+        <p:spPr>
+          <a:xfrm>
+            <a:off x="6507327" y="4800600"/>
+            <a:ext cx="4888839" cy="420624"/>
+          </a:xfrm>
+          <a:prstGeom prst="roundRect">
+            <a:avLst>
+              <a:gd name="adj" fmla="val 20000"/>
+            </a:avLst>
+          </a:prstGeom>
+          <a:solidFill>
+            <a:srgbClr val="EDF2F7"/>
+          </a:solidFill>
+          <a:ln>
+            <a:noFill/>
+          </a:ln>
+          <a:effectLst/>
+        </p:spPr>
+        <p:style>
+          <a:lnRef idx="1">
+            <a:schemeClr val="accent1"/>
+          </a:lnRef>
+          <a:fillRef idx="3">
+            <a:schemeClr val="accent1"/>
+          </a:fillRef>
+          <a:effectRef idx="2">
+            <a:schemeClr val="accent1"/>
+          </a:effectRef>
+          <a:fontRef idx="minor">
+            <a:schemeClr val="lt1"/>
+          </a:fontRef>
+        </p:style>
+        <p:txBody>
+          <a:bodyPr rtlCol="0" anchor="ctr" wrap="square" lIns="54864" rIns="54864" tIns="18288" bIns="18288"/>
+          <a:lstStyle/>
+          <a:p>
+            <a:pPr algn="ctr">
+              <a:lnSpc>
+                <a:spcPct val="100000"/>
+              </a:lnSpc>
+            </a:pPr>
+            <a:r>
+              <a:rPr sz="1350" b="1" i="0">
+                <a:solidFill>
+                  <a:srgbClr val="16385C"/>
+                </a:solidFill>
+                <a:latin typeface="Meiryo"/>
+                <a:ea typeface="Meiryo"/>
+              </a:rPr>
+              <a:t>探索空間の制限で安定性を確保する</a:t>
+            </a:r>
+          </a:p>
+        </p:txBody>
+      </p:sp>
+      <p:sp>
+        <p:nvSpPr>
+          <p:cNvPr id="18" name="TextBox 17"/>
+          <p:cNvSpPr txBox="1"/>
+          <p:nvPr/>
+        </p:nvSpPr>
+        <p:spPr>
+          <a:xfrm>
+            <a:off x="566928" y="5458968"/>
+            <a:ext cx="11057839" cy="457200"/>
+          </a:xfrm>
+          <a:prstGeom prst="rect">
+            <a:avLst/>
+          </a:prstGeom>
+          <a:noFill/>
+        </p:spPr>
+        <p:txBody>
+          <a:bodyPr wrap="square" anchor="ctr" lIns="18288" rIns="18288" tIns="9144" bIns="9144">
+            <a:spAutoFit/>
+          </a:bodyPr>
+          <a:lstStyle/>
+          <a:p>
+            <a:pPr algn="ctr">
+              <a:lnSpc>
+                <a:spcPct val="105000"/>
+              </a:lnSpc>
+            </a:pPr>
+            <a:r>
+              <a:rPr sz="1900" b="0" i="0">
+                <a:solidFill>
+                  <a:srgbClr val="26303A"/>
+                </a:solidFill>
+                <a:latin typeface="Meiryo"/>
+                <a:ea typeface="Meiryo"/>
+              </a:rPr>
+              <a:t>どちらのアプローチでも，メタヒューリスティクスによる解法は GA を基軸とする</a:t>
+            </a:r>
+            <a:r>
+              <a:rPr sz="1900" b="1" i="0">
+                <a:solidFill>
+                  <a:srgbClr val="16385C"/>
+                </a:solidFill>
+                <a:latin typeface="Meiryo"/>
+                <a:ea typeface="Meiryo"/>
+              </a:rPr>
+              <a:t>多点探索に集中</a:t>
+            </a:r>
+          </a:p>
+        </p:txBody>
+      </p:sp>
+      <p:sp>
+        <p:nvSpPr>
+          <p:cNvPr id="19" name="TextBox 18"/>
+          <p:cNvSpPr txBox="1"/>
+          <p:nvPr/>
+        </p:nvSpPr>
+        <p:spPr>
+          <a:xfrm>
+            <a:off x="566928" y="5916168"/>
+            <a:ext cx="11057839" cy="347472"/>
+          </a:xfrm>
+          <a:prstGeom prst="rect">
+            <a:avLst/>
+          </a:prstGeom>
+          <a:noFill/>
+        </p:spPr>
+        <p:txBody>
+          <a:bodyPr wrap="square" anchor="ctr" lIns="18288" rIns="18288" tIns="9144" bIns="9144">
+            <a:spAutoFit/>
+          </a:bodyPr>
+          <a:lstStyle/>
+          <a:p>
+            <a:pPr algn="ctr"/>
+            <a:r>
+              <a:rPr sz="1400" b="1" i="0">
+                <a:solidFill>
+                  <a:srgbClr val="E06C00"/>
+                </a:solidFill>
+                <a:latin typeface="Meiryo"/>
+                <a:ea typeface="Meiryo"/>
+              </a:rPr>
+              <a:t>単点探索</a:t>
+            </a:r>
+            <a:r>
+              <a:rPr sz="1400" b="0" i="0">
+                <a:solidFill>
+                  <a:srgbClr val="26303A"/>
+                </a:solidFill>
+                <a:latin typeface="Meiryo"/>
+                <a:ea typeface="Meiryo"/>
+              </a:rPr>
+              <a:t>：1 つの解を少しずつ変更しながら進む　／　</a:t>
+            </a:r>
+            <a:r>
+              <a:rPr sz="1400" b="1" i="0">
+                <a:solidFill>
+                  <a:srgbClr val="0F5C28"/>
+                </a:solidFill>
+                <a:latin typeface="Meiryo"/>
+                <a:ea typeface="Meiryo"/>
+              </a:rPr>
+              <a:t>多点探索</a:t>
+            </a:r>
+            <a:r>
+              <a:rPr sz="1400" b="0" i="0">
+                <a:solidFill>
+                  <a:srgbClr val="26303A"/>
+                </a:solidFill>
+                <a:latin typeface="Meiryo"/>
+                <a:ea typeface="Meiryo"/>
+              </a:rPr>
+              <a:t>：複数の解を保持し，互いに組み替えながら進む</a:t>
+            </a:r>
+            <a:r>
+              <a:rPr sz="1100" b="0" i="0">
+                <a:solidFill>
+                  <a:srgbClr val="6E7A88"/>
+                </a:solidFill>
+                <a:latin typeface="Meiryo"/>
+                <a:ea typeface="Meiryo"/>
+              </a:rPr>
+              <a:t>（Blum &amp; Roli, 2003）</a:t>
             </a:r>
           </a:p>
         </p:txBody>
@@ -29688,7 +30230,7 @@
                 <a:latin typeface="Meiryo"/>
                 <a:ea typeface="Meiryo"/>
               </a:rPr>
-              <a:t>先行研究：安定性を確保する 2 つのアプローチ</a:t>
+              <a:t>再スケジューリングの特殊性</a:t>
             </a:r>
           </a:p>
         </p:txBody>
@@ -29808,7 +30350,87 @@
                 <a:latin typeface="Meiryo"/>
                 <a:ea typeface="Meiryo"/>
               </a:rPr>
-              <a:t>安定性は「目的関数に組み込む」か「再スケジュールの範囲を限定する」かで確保されてきた</a:t>
+              <a:t>安定性が最良の解 </a:t>
+            </a:r>
+            <a:r>
+              <a:rPr sz="1500" b="1" i="1">
+                <a:solidFill>
+                  <a:srgbClr val="16385C"/>
+                </a:solidFill>
+                <a:latin typeface="Meiryo"/>
+                <a:ea typeface="Meiryo"/>
+              </a:rPr>
+              <a:t>S</a:t>
+            </a:r>
+            <a:r>
+              <a:rPr sz="1080" b="1" i="1" baseline="-22000">
+                <a:solidFill>
+                  <a:srgbClr val="16385C"/>
+                </a:solidFill>
+                <a:latin typeface="Meiryo"/>
+                <a:ea typeface="Meiryo"/>
+              </a:rPr>
+              <a:t>p</a:t>
+            </a:r>
+            <a:r>
+              <a:rPr sz="1500" b="1" i="0">
+                <a:solidFill>
+                  <a:srgbClr val="16385C"/>
+                </a:solidFill>
+                <a:latin typeface="Meiryo"/>
+                <a:ea typeface="Meiryo"/>
+              </a:rPr>
+              <a:t> は探索前にある．求められるのは，</a:t>
+            </a:r>
+            <a:r>
+              <a:rPr sz="1500" b="1" i="1">
+                <a:solidFill>
+                  <a:srgbClr val="16385C"/>
+                </a:solidFill>
+                <a:latin typeface="Meiryo"/>
+                <a:ea typeface="Meiryo"/>
+              </a:rPr>
+              <a:t>S</a:t>
+            </a:r>
+            <a:r>
+              <a:rPr sz="1080" b="1" i="1" baseline="-22000">
+                <a:solidFill>
+                  <a:srgbClr val="16385C"/>
+                </a:solidFill>
+                <a:latin typeface="Meiryo"/>
+                <a:ea typeface="Meiryo"/>
+              </a:rPr>
+              <a:t>p</a:t>
+            </a:r>
+            <a:r>
+              <a:rPr sz="1500" b="1" i="0">
+                <a:solidFill>
+                  <a:srgbClr val="16385C"/>
+                </a:solidFill>
+                <a:latin typeface="Meiryo"/>
+                <a:ea typeface="Meiryo"/>
+              </a:rPr>
+              <a:t> から少しの変更で </a:t>
+            </a:r>
+            <a:r>
+              <a:rPr sz="1500" b="1" i="1">
+                <a:solidFill>
+                  <a:srgbClr val="16385C"/>
+                </a:solidFill>
+                <a:latin typeface="Meiryo"/>
+                <a:ea typeface="Meiryo"/>
+              </a:rPr>
+              <a:t>MS</a:t>
+            </a:r>
+            <a:r>
+              <a:rPr sz="1500" b="1" i="0">
+                <a:solidFill>
+                  <a:srgbClr val="16385C"/>
+                </a:solidFill>
+                <a:latin typeface="Meiryo"/>
+                <a:ea typeface="Meiryo"/>
+              </a:rPr>
+              <a:t> を下げた解</a:t>
             </a:r>
           </a:p>
         </p:txBody>
@@ -29884,108 +30506,40 @@
           </a:p>
         </p:txBody>
       </p:sp>
-      <p:sp>
-        <p:nvSpPr>
-          <p:cNvPr id="8" name="Rounded Rectangle 7"/>
-          <p:cNvSpPr/>
-          <p:nvPr/>
-        </p:nvSpPr>
-        <p:spPr>
-          <a:xfrm>
-            <a:off x="566928" y="1645920"/>
-            <a:ext cx="5346039" cy="3703320"/>
-          </a:xfrm>
-          <a:prstGeom prst="roundRect">
-            <a:avLst>
-              <a:gd name="adj" fmla="val 4000"/>
-            </a:avLst>
-          </a:prstGeom>
-          <a:solidFill>
-            <a:srgbClr val="FFFFFF"/>
-          </a:solidFill>
-          <a:ln w="13970">
-            <a:solidFill>
-              <a:srgbClr val="C9D6E5"/>
-            </a:solidFill>
-          </a:ln>
-          <a:effectLst/>
-        </p:spPr>
-        <p:style>
-          <a:lnRef idx="1">
-            <a:schemeClr val="accent1"/>
-          </a:lnRef>
-          <a:fillRef idx="3">
-            <a:schemeClr val="accent1"/>
-          </a:fillRef>
-          <a:effectRef idx="2">
-            <a:schemeClr val="accent1"/>
-          </a:effectRef>
-          <a:fontRef idx="minor">
-            <a:schemeClr val="lt1"/>
-          </a:fontRef>
-        </p:style>
-        <p:txBody>
-          <a:bodyPr rtlCol="0" anchor="ctr"/>
-          <a:lstStyle/>
-          <a:p>
-            <a:pPr algn="ctr"/>
-          </a:p>
-        </p:txBody>
-      </p:sp>
-      <p:sp>
-        <p:nvSpPr>
-          <p:cNvPr id="9" name="Rectangle 8"/>
-          <p:cNvSpPr/>
-          <p:nvPr/>
-        </p:nvSpPr>
-        <p:spPr>
-          <a:xfrm>
-            <a:off x="566928" y="1645920"/>
-            <a:ext cx="5346039" cy="502920"/>
+      <p:pic>
+        <p:nvPicPr>
+          <p:cNvPr id="8" name="Picture 7" descr="concept_0.png"/>
+          <p:cNvPicPr>
+            <a:picLocks noChangeAspect="1"/>
+          </p:cNvPicPr>
+          <p:nvPr/>
+        </p:nvPicPr>
+        <p:blipFill>
+          <a:blip r:embed="rId2"/>
+          <a:stretch>
+            <a:fillRect/>
+          </a:stretch>
+        </p:blipFill>
+        <p:spPr>
+          <a:xfrm>
+            <a:off x="521207" y="1691640"/>
+            <a:ext cx="5577840" cy="4312367"/>
           </a:xfrm>
           <a:prstGeom prst="rect">
             <a:avLst/>
           </a:prstGeom>
-          <a:solidFill>
-            <a:srgbClr val="16385C"/>
-          </a:solidFill>
-          <a:ln>
-            <a:noFill/>
-          </a:ln>
-          <a:effectLst/>
-        </p:spPr>
-        <p:style>
-          <a:lnRef idx="1">
-            <a:schemeClr val="accent1"/>
-          </a:lnRef>
-          <a:fillRef idx="3">
-            <a:schemeClr val="accent1"/>
-          </a:fillRef>
-          <a:effectRef idx="2">
-            <a:schemeClr val="accent1"/>
-          </a:effectRef>
-          <a:fontRef idx="minor">
-            <a:schemeClr val="lt1"/>
-          </a:fontRef>
-        </p:style>
-        <p:txBody>
-          <a:bodyPr rtlCol="0" anchor="ctr"/>
-          <a:lstStyle/>
-          <a:p>
-            <a:pPr algn="ctr"/>
-          </a:p>
-        </p:txBody>
-      </p:sp>
-      <p:sp>
-        <p:nvSpPr>
-          <p:cNvPr id="10" name="TextBox 9"/>
+        </p:spPr>
+      </p:pic>
+      <p:sp>
+        <p:nvSpPr>
+          <p:cNvPr id="9" name="TextBox 8"/>
           <p:cNvSpPr txBox="1"/>
           <p:nvPr/>
         </p:nvSpPr>
         <p:spPr>
           <a:xfrm>
-            <a:off x="749808" y="1645920"/>
-            <a:ext cx="4980279" cy="502920"/>
+            <a:off x="6281928" y="1691640"/>
+            <a:ext cx="5342839" cy="4312367"/>
           </a:xfrm>
           <a:prstGeom prst="rect">
             <a:avLst/>
@@ -29998,777 +30552,233 @@
           </a:bodyPr>
           <a:lstStyle/>
           <a:p>
-            <a:pPr algn="l">
-              <a:lnSpc>
-                <a:spcPct val="105000"/>
-              </a:lnSpc>
-            </a:pPr>
-            <a:r>
-              <a:rPr sz="1550" b="1" i="0">
-                <a:solidFill>
-                  <a:srgbClr val="FFFFFF"/>
-                </a:solidFill>
-                <a:latin typeface="Meiryo"/>
-                <a:ea typeface="Meiryo"/>
-              </a:rPr>
-              <a:t>安定性を目的関数に組み込むアプローチ</a:t>
-            </a:r>
-          </a:p>
-        </p:txBody>
-      </p:sp>
-      <p:sp>
-        <p:nvSpPr>
-          <p:cNvPr id="11" name="TextBox 10"/>
-          <p:cNvSpPr txBox="1"/>
-          <p:nvPr/>
-        </p:nvSpPr>
-        <p:spPr>
-          <a:xfrm>
-            <a:off x="795528" y="2267712"/>
-            <a:ext cx="4888839" cy="2286000"/>
-          </a:xfrm>
-          <a:prstGeom prst="rect">
-            <a:avLst/>
-          </a:prstGeom>
-          <a:noFill/>
-        </p:spPr>
-        <p:txBody>
-          <a:bodyPr wrap="square" anchor="t" lIns="18288" rIns="18288" tIns="9144" bIns="9144">
-            <a:spAutoFit/>
-          </a:bodyPr>
-          <a:lstStyle/>
-          <a:p>
             <a:pPr>
               <a:lnSpc>
-                <a:spcPct val="100000"/>
+                <a:spcPct val="108000"/>
               </a:lnSpc>
               <a:spcBef>
                 <a:spcPts val="0"/>
               </a:spcBef>
             </a:pPr>
             <a:r>
-              <a:rPr sz="1350" b="1" i="0">
+              <a:rPr sz="1500" b="0" i="0">
+                <a:solidFill>
+                  <a:srgbClr val="26303A"/>
+                </a:solidFill>
+                <a:latin typeface="Meiryo"/>
+                <a:ea typeface="Meiryo"/>
+              </a:rPr>
+              <a:t>★ 初期解 </a:t>
+            </a:r>
+            <a:r>
+              <a:rPr sz="1500" b="0" i="1">
+                <a:solidFill>
+                  <a:srgbClr val="26303A"/>
+                </a:solidFill>
+                <a:latin typeface="Meiryo"/>
+                <a:ea typeface="Meiryo"/>
+              </a:rPr>
+              <a:t>S</a:t>
+            </a:r>
+            <a:r>
+              <a:rPr sz="1080" b="0" i="1" baseline="-22000">
+                <a:solidFill>
+                  <a:srgbClr val="26303A"/>
+                </a:solidFill>
+                <a:latin typeface="Meiryo"/>
+                <a:ea typeface="Meiryo"/>
+              </a:rPr>
+              <a:t>p</a:t>
+            </a:r>
+            <a:r>
+              <a:rPr sz="1500" b="0" i="0">
+                <a:solidFill>
+                  <a:srgbClr val="26303A"/>
+                </a:solidFill>
+                <a:latin typeface="Meiryo"/>
+                <a:ea typeface="Meiryo"/>
+              </a:rPr>
+              <a:t>（処理順序を保って遅延を吸収した解）は，</a:t>
+            </a:r>
+            <a:r>
+              <a:rPr sz="1500" b="1" i="0">
                 <a:solidFill>
                   <a:srgbClr val="16385C"/>
                 </a:solidFill>
                 <a:latin typeface="Meiryo"/>
                 <a:ea typeface="Meiryo"/>
               </a:rPr>
-              <a:t>Wu ら (1993)</a:t>
+              <a:t>探索せずに得られる</a:t>
+            </a:r>
+            <a:r>
+              <a:rPr sz="1500" b="0" i="0">
+                <a:solidFill>
+                  <a:srgbClr val="26303A"/>
+                </a:solidFill>
+                <a:latin typeface="Meiryo"/>
+                <a:ea typeface="Meiryo"/>
+              </a:rPr>
+              <a:t>．変更量 0 で安定性は最良，</a:t>
+            </a:r>
+            <a:r>
+              <a:rPr sz="1500" b="0" i="1">
+                <a:solidFill>
+                  <a:srgbClr val="26303A"/>
+                </a:solidFill>
+                <a:latin typeface="Meiryo"/>
+                <a:ea typeface="Meiryo"/>
+              </a:rPr>
+              <a:t>MS</a:t>
+            </a:r>
+            <a:r>
+              <a:rPr sz="1500" b="0" i="0">
+                <a:solidFill>
+                  <a:srgbClr val="26303A"/>
+                </a:solidFill>
+                <a:latin typeface="Meiryo"/>
+                <a:ea typeface="Meiryo"/>
+              </a:rPr>
+              <a:t> も外乱前に最適化済み</a:t>
             </a:r>
           </a:p>
           <a:p>
             <a:pPr>
               <a:lnSpc>
-                <a:spcPct val="100000"/>
+                <a:spcPct val="108000"/>
               </a:lnSpc>
+              <a:spcBef>
+                <a:spcPts val="1200"/>
+              </a:spcBef>
             </a:pPr>
             <a:r>
-              <a:rPr sz="1250" b="0" i="0">
+              <a:rPr sz="1500" b="0" i="0">
                 <a:solidFill>
                   <a:srgbClr val="26303A"/>
                 </a:solidFill>
                 <a:latin typeface="Meiryo"/>
                 <a:ea typeface="Meiryo"/>
               </a:rPr>
-              <a:t>　単一機械で効率と安定性を評価基準に定式化</a:t>
+              <a:t>● 変更コストが無視できない場面で選ばれるのは，</a:t>
+            </a:r>
+            <a:r>
+              <a:rPr sz="1500" b="1" i="0">
+                <a:solidFill>
+                  <a:srgbClr val="16385C"/>
+                </a:solidFill>
+                <a:latin typeface="Meiryo"/>
+                <a:ea typeface="Meiryo"/>
+              </a:rPr>
+              <a:t>Pareto フロント</a:t>
+            </a:r>
+            <a:r>
+              <a:rPr sz="1500" b="0" i="0">
+                <a:solidFill>
+                  <a:srgbClr val="26303A"/>
+                </a:solidFill>
+                <a:latin typeface="Meiryo"/>
+                <a:ea typeface="Meiryo"/>
+              </a:rPr>
+              <a:t>のうち </a:t>
+            </a:r>
+            <a:r>
+              <a:rPr sz="1500" b="0" i="1">
+                <a:solidFill>
+                  <a:srgbClr val="26303A"/>
+                </a:solidFill>
+                <a:latin typeface="Meiryo"/>
+                <a:ea typeface="Meiryo"/>
+              </a:rPr>
+              <a:t>S</a:t>
+            </a:r>
+            <a:r>
+              <a:rPr sz="1080" b="0" i="1" baseline="-22000">
+                <a:solidFill>
+                  <a:srgbClr val="26303A"/>
+                </a:solidFill>
+                <a:latin typeface="Meiryo"/>
+                <a:ea typeface="Meiryo"/>
+              </a:rPr>
+              <a:t>p</a:t>
+            </a:r>
+            <a:r>
+              <a:rPr sz="1500" b="0" i="0">
+                <a:solidFill>
+                  <a:srgbClr val="26303A"/>
+                </a:solidFill>
+                <a:latin typeface="Meiryo"/>
+                <a:ea typeface="Meiryo"/>
+              </a:rPr>
+              <a:t> の近傍（</a:t>
+            </a:r>
+            <a:r>
+              <a:rPr sz="1500" b="1" i="0">
+                <a:solidFill>
+                  <a:srgbClr val="16385C"/>
+                </a:solidFill>
+                <a:latin typeface="Meiryo"/>
+                <a:ea typeface="Meiryo"/>
+              </a:rPr>
+              <a:t>高安定領域</a:t>
+            </a:r>
+            <a:r>
+              <a:rPr sz="1500" b="0" i="0">
+                <a:solidFill>
+                  <a:srgbClr val="26303A"/>
+                </a:solidFill>
+                <a:latin typeface="Meiryo"/>
+                <a:ea typeface="Meiryo"/>
+              </a:rPr>
+              <a:t>）の解</a:t>
             </a:r>
           </a:p>
           <a:p>
             <a:pPr>
               <a:lnSpc>
-                <a:spcPct val="100000"/>
+                <a:spcPct val="108000"/>
               </a:lnSpc>
               <a:spcBef>
-                <a:spcPts val="400"/>
+                <a:spcPts val="1200"/>
               </a:spcBef>
             </a:pPr>
             <a:r>
-              <a:rPr sz="1350" b="1" i="0">
-                <a:solidFill>
-                  <a:srgbClr val="16385C"/>
-                </a:solidFill>
-                <a:latin typeface="Meiryo"/>
-                <a:ea typeface="Meiryo"/>
-              </a:rPr>
-              <a:t>Rangsaritratsamee ら (2004)</a:t>
+              <a:rPr sz="1550" b="0" i="0">
+                <a:solidFill>
+                  <a:srgbClr val="26303A"/>
+                </a:solidFill>
+                <a:latin typeface="Meiryo"/>
+                <a:ea typeface="Meiryo"/>
+              </a:rPr>
+              <a:t>→ 手法に問われるのは，Pareto フロント全体の品質</a:t>
             </a:r>
           </a:p>
           <a:p>
             <a:pPr>
               <a:lnSpc>
-                <a:spcPct val="100000"/>
-              </a:lnSpc>
-            </a:pPr>
-            <a:r>
-              <a:rPr sz="1250" b="0" i="0">
-                <a:solidFill>
-                  <a:srgbClr val="26303A"/>
-                </a:solidFill>
-                <a:latin typeface="Meiryo"/>
-                <a:ea typeface="Meiryo"/>
-              </a:rPr>
-              <a:t>　JSP．GA＋局所探索</a:t>
-            </a:r>
-          </a:p>
-          <a:p>
-            <a:pPr>
-              <a:lnSpc>
-                <a:spcPct val="100000"/>
-              </a:lnSpc>
-              <a:spcBef>
-                <a:spcPts val="400"/>
-              </a:spcBef>
-            </a:pPr>
-            <a:r>
-              <a:rPr sz="1350" b="1" i="0">
-                <a:solidFill>
-                  <a:srgbClr val="16385C"/>
-                </a:solidFill>
-                <a:latin typeface="Meiryo"/>
-                <a:ea typeface="Meiryo"/>
-              </a:rPr>
-              <a:t>Zhang ら (2013)</a:t>
-            </a:r>
-          </a:p>
-          <a:p>
-            <a:pPr>
-              <a:lnSpc>
-                <a:spcPct val="100000"/>
-              </a:lnSpc>
-            </a:pPr>
-            <a:r>
-              <a:rPr sz="1250" b="0" i="0">
-                <a:solidFill>
-                  <a:srgbClr val="26303A"/>
-                </a:solidFill>
-                <a:latin typeface="Meiryo"/>
-                <a:ea typeface="Meiryo"/>
-              </a:rPr>
-              <a:t>　JSP．GA＋タブーサーチ</a:t>
-            </a:r>
-          </a:p>
-          <a:p>
-            <a:pPr>
-              <a:lnSpc>
-                <a:spcPct val="100000"/>
-              </a:lnSpc>
-              <a:spcBef>
-                <a:spcPts val="400"/>
-              </a:spcBef>
-            </a:pPr>
-            <a:r>
-              <a:rPr sz="1350" b="1" i="0">
-                <a:solidFill>
-                  <a:srgbClr val="16385C"/>
-                </a:solidFill>
-                <a:latin typeface="Meiryo"/>
-                <a:ea typeface="Meiryo"/>
-              </a:rPr>
-              <a:t>Fattahi &amp; Fallahi (2010)</a:t>
-            </a:r>
-          </a:p>
-          <a:p>
-            <a:pPr>
-              <a:lnSpc>
-                <a:spcPct val="100000"/>
-              </a:lnSpc>
-            </a:pPr>
-            <a:r>
-              <a:rPr sz="1250" b="0" i="0">
-                <a:solidFill>
-                  <a:srgbClr val="26303A"/>
-                </a:solidFill>
-                <a:latin typeface="Meiryo"/>
-                <a:ea typeface="Meiryo"/>
-              </a:rPr>
-              <a:t>　FJSP．GA＋局所探索</a:t>
-            </a:r>
-          </a:p>
-          <a:p>
-            <a:pPr>
-              <a:lnSpc>
-                <a:spcPct val="100000"/>
-              </a:lnSpc>
-              <a:spcBef>
-                <a:spcPts val="400"/>
-              </a:spcBef>
-            </a:pPr>
-            <a:r>
-              <a:rPr sz="1350" b="1" i="0">
-                <a:solidFill>
-                  <a:srgbClr val="16385C"/>
-                </a:solidFill>
-                <a:latin typeface="Meiryo"/>
-                <a:ea typeface="Meiryo"/>
-              </a:rPr>
-              <a:t>Valledor ら (2022)，Luo ら (2025)</a:t>
-            </a:r>
-          </a:p>
-          <a:p>
-            <a:pPr>
-              <a:lnSpc>
-                <a:spcPct val="100000"/>
-              </a:lnSpc>
-            </a:pPr>
-            <a:r>
-              <a:rPr sz="1250" b="0" i="0">
-                <a:solidFill>
-                  <a:srgbClr val="26303A"/>
-                </a:solidFill>
-                <a:latin typeface="Meiryo"/>
-                <a:ea typeface="Meiryo"/>
-              </a:rPr>
-              <a:t>　NSGA-II 系で Pareto 支配</a:t>
-            </a:r>
-          </a:p>
-        </p:txBody>
-      </p:sp>
-      <p:sp>
-        <p:nvSpPr>
-          <p:cNvPr id="12" name="Rounded Rectangle 11"/>
-          <p:cNvSpPr/>
-          <p:nvPr/>
-        </p:nvSpPr>
-        <p:spPr>
-          <a:xfrm>
-            <a:off x="795528" y="4800600"/>
-            <a:ext cx="4888839" cy="420624"/>
-          </a:xfrm>
-          <a:prstGeom prst="roundRect">
-            <a:avLst>
-              <a:gd name="adj" fmla="val 20000"/>
-            </a:avLst>
-          </a:prstGeom>
-          <a:solidFill>
-            <a:srgbClr val="EDF2F7"/>
-          </a:solidFill>
-          <a:ln>
-            <a:noFill/>
-          </a:ln>
-          <a:effectLst/>
-        </p:spPr>
-        <p:style>
-          <a:lnRef idx="1">
-            <a:schemeClr val="accent1"/>
-          </a:lnRef>
-          <a:fillRef idx="3">
-            <a:schemeClr val="accent1"/>
-          </a:fillRef>
-          <a:effectRef idx="2">
-            <a:schemeClr val="accent1"/>
-          </a:effectRef>
-          <a:fontRef idx="minor">
-            <a:schemeClr val="lt1"/>
-          </a:fontRef>
-        </p:style>
-        <p:txBody>
-          <a:bodyPr rtlCol="0" anchor="ctr" wrap="square" lIns="54864" rIns="54864" tIns="18288" bIns="18288"/>
-          <a:lstStyle/>
-          <a:p>
-            <a:pPr algn="ctr">
-              <a:lnSpc>
-                <a:spcPct val="100000"/>
-              </a:lnSpc>
-            </a:pPr>
-            <a:r>
-              <a:rPr sz="1350" b="1" i="0">
-                <a:solidFill>
-                  <a:srgbClr val="16385C"/>
-                </a:solidFill>
-                <a:latin typeface="Meiryo"/>
-                <a:ea typeface="Meiryo"/>
-              </a:rPr>
-              <a:t>安定性は解の評価（目的関数の一項）にのみ反映</a:t>
-            </a:r>
-          </a:p>
-        </p:txBody>
-      </p:sp>
-      <p:sp>
-        <p:nvSpPr>
-          <p:cNvPr id="13" name="Rounded Rectangle 12"/>
-          <p:cNvSpPr/>
-          <p:nvPr/>
-        </p:nvSpPr>
-        <p:spPr>
-          <a:xfrm>
-            <a:off x="6278727" y="1645920"/>
-            <a:ext cx="5346039" cy="3703320"/>
-          </a:xfrm>
-          <a:prstGeom prst="roundRect">
-            <a:avLst>
-              <a:gd name="adj" fmla="val 4000"/>
-            </a:avLst>
-          </a:prstGeom>
-          <a:solidFill>
-            <a:srgbClr val="FFFFFF"/>
-          </a:solidFill>
-          <a:ln w="13970">
-            <a:solidFill>
-              <a:srgbClr val="C9D6E5"/>
-            </a:solidFill>
-          </a:ln>
-          <a:effectLst/>
-        </p:spPr>
-        <p:style>
-          <a:lnRef idx="1">
-            <a:schemeClr val="accent1"/>
-          </a:lnRef>
-          <a:fillRef idx="3">
-            <a:schemeClr val="accent1"/>
-          </a:fillRef>
-          <a:effectRef idx="2">
-            <a:schemeClr val="accent1"/>
-          </a:effectRef>
-          <a:fontRef idx="minor">
-            <a:schemeClr val="lt1"/>
-          </a:fontRef>
-        </p:style>
-        <p:txBody>
-          <a:bodyPr rtlCol="0" anchor="ctr"/>
-          <a:lstStyle/>
-          <a:p>
-            <a:pPr algn="ctr"/>
-          </a:p>
-        </p:txBody>
-      </p:sp>
-      <p:sp>
-        <p:nvSpPr>
-          <p:cNvPr id="14" name="Rectangle 13"/>
-          <p:cNvSpPr/>
-          <p:nvPr/>
-        </p:nvSpPr>
-        <p:spPr>
-          <a:xfrm>
-            <a:off x="6278727" y="1645920"/>
-            <a:ext cx="5346039" cy="502920"/>
-          </a:xfrm>
-          <a:prstGeom prst="rect">
-            <a:avLst/>
-          </a:prstGeom>
-          <a:solidFill>
-            <a:srgbClr val="16385C"/>
-          </a:solidFill>
-          <a:ln>
-            <a:noFill/>
-          </a:ln>
-          <a:effectLst/>
-        </p:spPr>
-        <p:style>
-          <a:lnRef idx="1">
-            <a:schemeClr val="accent1"/>
-          </a:lnRef>
-          <a:fillRef idx="3">
-            <a:schemeClr val="accent1"/>
-          </a:fillRef>
-          <a:effectRef idx="2">
-            <a:schemeClr val="accent1"/>
-          </a:effectRef>
-          <a:fontRef idx="minor">
-            <a:schemeClr val="lt1"/>
-          </a:fontRef>
-        </p:style>
-        <p:txBody>
-          <a:bodyPr rtlCol="0" anchor="ctr"/>
-          <a:lstStyle/>
-          <a:p>
-            <a:pPr algn="ctr"/>
-          </a:p>
-        </p:txBody>
-      </p:sp>
-      <p:sp>
-        <p:nvSpPr>
-          <p:cNvPr id="15" name="TextBox 14"/>
-          <p:cNvSpPr txBox="1"/>
-          <p:nvPr/>
-        </p:nvSpPr>
-        <p:spPr>
-          <a:xfrm>
-            <a:off x="6461607" y="1645920"/>
-            <a:ext cx="4980279" cy="502920"/>
-          </a:xfrm>
-          <a:prstGeom prst="rect">
-            <a:avLst/>
-          </a:prstGeom>
-          <a:noFill/>
-        </p:spPr>
-        <p:txBody>
-          <a:bodyPr wrap="square" anchor="ctr" lIns="18288" rIns="18288" tIns="9144" bIns="9144">
-            <a:spAutoFit/>
-          </a:bodyPr>
-          <a:lstStyle/>
-          <a:p>
-            <a:pPr algn="l">
-              <a:lnSpc>
-                <a:spcPct val="105000"/>
-              </a:lnSpc>
-            </a:pPr>
-            <a:r>
-              <a:rPr sz="1550" b="1" i="0">
-                <a:solidFill>
-                  <a:srgbClr val="FFFFFF"/>
-                </a:solidFill>
-                <a:latin typeface="Meiryo"/>
-                <a:ea typeface="Meiryo"/>
-              </a:rPr>
-              <a:t>再スケジュールの対象範囲を限定するアプローチ</a:t>
-            </a:r>
-          </a:p>
-        </p:txBody>
-      </p:sp>
-      <p:sp>
-        <p:nvSpPr>
-          <p:cNvPr id="16" name="TextBox 15"/>
-          <p:cNvSpPr txBox="1"/>
-          <p:nvPr/>
-        </p:nvSpPr>
-        <p:spPr>
-          <a:xfrm>
-            <a:off x="6507327" y="2267712"/>
-            <a:ext cx="4888839" cy="2286000"/>
-          </a:xfrm>
-          <a:prstGeom prst="rect">
-            <a:avLst/>
-          </a:prstGeom>
-          <a:noFill/>
-        </p:spPr>
-        <p:txBody>
-          <a:bodyPr wrap="square" anchor="t" lIns="18288" rIns="18288" tIns="9144" bIns="9144">
-            <a:spAutoFit/>
-          </a:bodyPr>
-          <a:lstStyle/>
-          <a:p>
-            <a:pPr>
-              <a:lnSpc>
-                <a:spcPct val="100000"/>
+                <a:spcPct val="108000"/>
               </a:lnSpc>
               <a:spcBef>
                 <a:spcPts val="0"/>
               </a:spcBef>
             </a:pPr>
             <a:r>
-              <a:rPr sz="1350" b="1" i="0">
+              <a:rPr sz="1550" b="0" i="0">
+                <a:solidFill>
+                  <a:srgbClr val="26303A"/>
+                </a:solidFill>
+                <a:latin typeface="Meiryo"/>
+                <a:ea typeface="Meiryo"/>
+              </a:rPr>
+              <a:t>だけではなく，</a:t>
+            </a:r>
+            <a:r>
+              <a:rPr sz="1550" b="1" i="0">
                 <a:solidFill>
                   <a:srgbClr val="16385C"/>
                 </a:solidFill>
                 <a:latin typeface="Meiryo"/>
                 <a:ea typeface="Meiryo"/>
               </a:rPr>
-              <a:t>Bean ら (1991)</a:t>
-            </a:r>
-          </a:p>
-          <a:p>
-            <a:pPr>
-              <a:lnSpc>
-                <a:spcPct val="100000"/>
-              </a:lnSpc>
-            </a:pPr>
-            <a:r>
-              <a:rPr sz="1250" b="0" i="0">
-                <a:solidFill>
-                  <a:srgbClr val="26303A"/>
-                </a:solidFill>
-                <a:latin typeface="Meiryo"/>
-                <a:ea typeface="Meiryo"/>
-              </a:rPr>
-              <a:t>　復帰時点までを再スケジュール（match-up）</a:t>
-            </a:r>
-          </a:p>
-          <a:p>
-            <a:pPr>
-              <a:lnSpc>
-                <a:spcPct val="100000"/>
-              </a:lnSpc>
-              <a:spcBef>
-                <a:spcPts val="400"/>
-              </a:spcBef>
-            </a:pPr>
-            <a:r>
-              <a:rPr sz="1350" b="1" i="0">
-                <a:solidFill>
-                  <a:srgbClr val="16385C"/>
-                </a:solidFill>
-                <a:latin typeface="Meiryo"/>
-                <a:ea typeface="Meiryo"/>
-              </a:rPr>
-              <a:t>Abumaizar &amp; Svestka (1997)</a:t>
-            </a:r>
-          </a:p>
-          <a:p>
-            <a:pPr>
-              <a:lnSpc>
-                <a:spcPct val="100000"/>
-              </a:lnSpc>
-            </a:pPr>
-            <a:r>
-              <a:rPr sz="1250" b="0" i="0">
-                <a:solidFill>
-                  <a:srgbClr val="26303A"/>
-                </a:solidFill>
-                <a:latin typeface="Meiryo"/>
-                <a:ea typeface="Meiryo"/>
-              </a:rPr>
-              <a:t>　影響を受ける作業だけを再スケジュール</a:t>
-            </a:r>
-          </a:p>
-          <a:p>
-            <a:pPr>
-              <a:lnSpc>
-                <a:spcPct val="100000"/>
-              </a:lnSpc>
-              <a:spcBef>
-                <a:spcPts val="400"/>
-              </a:spcBef>
-            </a:pPr>
-            <a:r>
-              <a:rPr sz="1350" b="1" i="0">
-                <a:solidFill>
-                  <a:srgbClr val="16385C"/>
-                </a:solidFill>
-                <a:latin typeface="Meiryo"/>
-                <a:ea typeface="Meiryo"/>
-              </a:rPr>
-              <a:t>Zakaria &amp; Petrovic (2012)</a:t>
-            </a:r>
-          </a:p>
-          <a:p>
-            <a:pPr>
-              <a:lnSpc>
-                <a:spcPct val="100000"/>
-              </a:lnSpc>
-            </a:pPr>
-            <a:r>
-              <a:rPr sz="1250" b="0" i="0">
-                <a:solidFill>
-                  <a:srgbClr val="26303A"/>
-                </a:solidFill>
-                <a:latin typeface="Meiryo"/>
-                <a:ea typeface="Meiryo"/>
-              </a:rPr>
-              <a:t>　GA の染色体を区間に限定</a:t>
-            </a:r>
-          </a:p>
-          <a:p>
-            <a:pPr>
-              <a:lnSpc>
-                <a:spcPct val="100000"/>
-              </a:lnSpc>
-              <a:spcBef>
-                <a:spcPts val="400"/>
-              </a:spcBef>
-            </a:pPr>
-            <a:r>
-              <a:rPr sz="1350" b="1" i="0">
-                <a:solidFill>
-                  <a:srgbClr val="16385C"/>
-                </a:solidFill>
-                <a:latin typeface="Meiryo"/>
-                <a:ea typeface="Meiryo"/>
-              </a:rPr>
-              <a:t>Sun ら (2026)</a:t>
-            </a:r>
-          </a:p>
-          <a:p>
-            <a:pPr>
-              <a:lnSpc>
-                <a:spcPct val="100000"/>
-              </a:lnSpc>
-            </a:pPr>
-            <a:r>
-              <a:rPr sz="1250" b="0" i="0">
-                <a:solidFill>
-                  <a:srgbClr val="26303A"/>
-                </a:solidFill>
-                <a:latin typeface="Meiryo"/>
-                <a:ea typeface="Meiryo"/>
-              </a:rPr>
-              <a:t>　再最適化の範囲を 4 段階に整理</a:t>
-            </a:r>
-          </a:p>
-        </p:txBody>
-      </p:sp>
-      <p:sp>
-        <p:nvSpPr>
-          <p:cNvPr id="17" name="Rounded Rectangle 16"/>
-          <p:cNvSpPr/>
-          <p:nvPr/>
-        </p:nvSpPr>
-        <p:spPr>
-          <a:xfrm>
-            <a:off x="6507327" y="4800600"/>
-            <a:ext cx="4888839" cy="420624"/>
-          </a:xfrm>
-          <a:prstGeom prst="roundRect">
-            <a:avLst>
-              <a:gd name="adj" fmla="val 20000"/>
-            </a:avLst>
-          </a:prstGeom>
-          <a:solidFill>
-            <a:srgbClr val="EDF2F7"/>
-          </a:solidFill>
-          <a:ln>
-            <a:noFill/>
-          </a:ln>
-          <a:effectLst/>
-        </p:spPr>
-        <p:style>
-          <a:lnRef idx="1">
-            <a:schemeClr val="accent1"/>
-          </a:lnRef>
-          <a:fillRef idx="3">
-            <a:schemeClr val="accent1"/>
-          </a:fillRef>
-          <a:effectRef idx="2">
-            <a:schemeClr val="accent1"/>
-          </a:effectRef>
-          <a:fontRef idx="minor">
-            <a:schemeClr val="lt1"/>
-          </a:fontRef>
-        </p:style>
-        <p:txBody>
-          <a:bodyPr rtlCol="0" anchor="ctr" wrap="square" lIns="54864" rIns="54864" tIns="18288" bIns="18288"/>
-          <a:lstStyle/>
-          <a:p>
-            <a:pPr algn="ctr">
-              <a:lnSpc>
-                <a:spcPct val="100000"/>
-              </a:lnSpc>
-            </a:pPr>
-            <a:r>
-              <a:rPr sz="1350" b="1" i="0">
-                <a:solidFill>
-                  <a:srgbClr val="16385C"/>
-                </a:solidFill>
-                <a:latin typeface="Meiryo"/>
-                <a:ea typeface="Meiryo"/>
-              </a:rPr>
-              <a:t>探索空間の制限で安定性を確保する</a:t>
-            </a:r>
-          </a:p>
-        </p:txBody>
-      </p:sp>
-      <p:sp>
-        <p:nvSpPr>
-          <p:cNvPr id="18" name="TextBox 17"/>
-          <p:cNvSpPr txBox="1"/>
-          <p:nvPr/>
-        </p:nvSpPr>
-        <p:spPr>
-          <a:xfrm>
-            <a:off x="566928" y="5458968"/>
-            <a:ext cx="11057839" cy="457200"/>
-          </a:xfrm>
-          <a:prstGeom prst="rect">
-            <a:avLst/>
-          </a:prstGeom>
-          <a:noFill/>
-        </p:spPr>
-        <p:txBody>
-          <a:bodyPr wrap="square" anchor="ctr" lIns="18288" rIns="18288" tIns="9144" bIns="9144">
-            <a:spAutoFit/>
-          </a:bodyPr>
-          <a:lstStyle/>
-          <a:p>
-            <a:pPr algn="ctr">
-              <a:lnSpc>
-                <a:spcPct val="105000"/>
-              </a:lnSpc>
-            </a:pPr>
-            <a:r>
-              <a:rPr sz="1900" b="0" i="0">
-                <a:solidFill>
-                  <a:srgbClr val="26303A"/>
-                </a:solidFill>
-                <a:latin typeface="Meiryo"/>
-                <a:ea typeface="Meiryo"/>
-              </a:rPr>
-              <a:t>どちらのアプローチでも，メタヒューリスティクスによる解法は GA を基軸とする</a:t>
-            </a:r>
-            <a:r>
-              <a:rPr sz="1900" b="1" i="0">
-                <a:solidFill>
-                  <a:srgbClr val="16385C"/>
-                </a:solidFill>
-                <a:latin typeface="Meiryo"/>
-                <a:ea typeface="Meiryo"/>
-              </a:rPr>
-              <a:t>多点探索に集中</a:t>
-            </a:r>
-          </a:p>
-        </p:txBody>
-      </p:sp>
-      <p:sp>
-        <p:nvSpPr>
-          <p:cNvPr id="19" name="TextBox 18"/>
-          <p:cNvSpPr txBox="1"/>
-          <p:nvPr/>
-        </p:nvSpPr>
-        <p:spPr>
-          <a:xfrm>
-            <a:off x="566928" y="5916168"/>
-            <a:ext cx="11057839" cy="347472"/>
-          </a:xfrm>
-          <a:prstGeom prst="rect">
-            <a:avLst/>
-          </a:prstGeom>
-          <a:noFill/>
-        </p:spPr>
-        <p:txBody>
-          <a:bodyPr wrap="square" anchor="ctr" lIns="18288" rIns="18288" tIns="9144" bIns="9144">
-            <a:spAutoFit/>
-          </a:bodyPr>
-          <a:lstStyle/>
-          <a:p>
-            <a:pPr algn="ctr"/>
-            <a:r>
-              <a:rPr sz="1400" b="1" i="0">
-                <a:solidFill>
-                  <a:srgbClr val="E06C00"/>
-                </a:solidFill>
-                <a:latin typeface="Meiryo"/>
-                <a:ea typeface="Meiryo"/>
-              </a:rPr>
-              <a:t>単点探索</a:t>
-            </a:r>
-            <a:r>
-              <a:rPr sz="1400" b="0" i="0">
-                <a:solidFill>
-                  <a:srgbClr val="26303A"/>
-                </a:solidFill>
-                <a:latin typeface="Meiryo"/>
-                <a:ea typeface="Meiryo"/>
-              </a:rPr>
-              <a:t>：1 つの解を少しずつ変更しながら進む　／　</a:t>
-            </a:r>
-            <a:r>
-              <a:rPr sz="1400" b="1" i="0">
-                <a:solidFill>
-                  <a:srgbClr val="0F5C28"/>
-                </a:solidFill>
-                <a:latin typeface="Meiryo"/>
-                <a:ea typeface="Meiryo"/>
-              </a:rPr>
-              <a:t>多点探索</a:t>
-            </a:r>
-            <a:r>
-              <a:rPr sz="1400" b="0" i="0">
-                <a:solidFill>
-                  <a:srgbClr val="26303A"/>
-                </a:solidFill>
-                <a:latin typeface="Meiryo"/>
-                <a:ea typeface="Meiryo"/>
-              </a:rPr>
-              <a:t>：複数の解を保持し，互いに組み替えながら進む</a:t>
-            </a:r>
-            <a:r>
-              <a:rPr sz="1100" b="0" i="0">
-                <a:solidFill>
-                  <a:srgbClr val="6E7A88"/>
-                </a:solidFill>
-                <a:latin typeface="Meiryo"/>
-                <a:ea typeface="Meiryo"/>
-              </a:rPr>
-              <a:t>（Blum &amp; Roli, 2003）</a:t>
+              <a:t>高安定領域の品質</a:t>
             </a:r>
           </a:p>
         </p:txBody>
@@ -30941,7 +30951,7 @@
                 <a:latin typeface="Meiryo"/>
                 <a:ea typeface="Meiryo"/>
               </a:rPr>
-              <a:t>探索構造の差は検証されておらず，その差を測る形式も，解を </a:t>
+              <a:t>この特殊性から先行研究を見直すと，探索構造の比較・高安定領域の評価・</a:t>
             </a:r>
             <a:r>
               <a:rPr sz="1500" b="1" i="1">
@@ -30971,7 +30981,7 @@
                 <a:latin typeface="Meiryo"/>
                 <a:ea typeface="Meiryo"/>
               </a:rPr>
-              <a:t> に近づける探索操作もない</a:t>
+              <a:t> に近づける操作が欠けている</a:t>
             </a:r>
           </a:p>
         </p:txBody>
@@ -31321,7 +31331,7 @@
                 <a:latin typeface="Meiryo"/>
                 <a:ea typeface="Meiryo"/>
               </a:rPr>
-              <a:t> が探索前に得られているという特性が，単点探索と多点探索の間にどんな差を生むかは分析されていない</a:t>
+              <a:t> を初期解として解を少しずつ変更する単点探索との間にどんな差が生まれるかは，分析されていない</a:t>
             </a:r>
           </a:p>
         </p:txBody>
@@ -31570,7 +31580,27 @@
                 <a:latin typeface="Meiryo"/>
                 <a:ea typeface="Meiryo"/>
               </a:rPr>
-              <a:t>比較は少数の重みでのスカラー値や，Pareto フロント全体の HV で行われ，高安定領域で手法がどう異なるかは分析されていない</a:t>
+              <a:t>比較は少数の重みでのスカラー値や，Pareto フロント全体の hypervolume（HV）で行われ，高安定領域に限った HV（</a:t>
+            </a:r>
+            <a:r>
+              <a:rPr sz="1400" b="1" i="0">
+                <a:solidFill>
+                  <a:srgbClr val="16385C"/>
+                </a:solidFill>
+                <a:latin typeface="Meiryo"/>
+                <a:ea typeface="Meiryo"/>
+              </a:rPr>
+              <a:t>高安定 HV</a:t>
+            </a:r>
+            <a:r>
+              <a:rPr sz="1400" b="0" i="0">
+                <a:solidFill>
+                  <a:srgbClr val="26303A"/>
+                </a:solidFill>
+                <a:latin typeface="Meiryo"/>
+                <a:ea typeface="Meiryo"/>
+              </a:rPr>
+              <a:t>）で手法を比べた例がない</a:t>
             </a:r>
           </a:p>
         </p:txBody>

--- a/doc/presentation_materials/JIMA2026fall_発表.pptx
+++ b/doc/presentation_materials/JIMA2026fall_発表.pptx
@@ -15498,7 +15498,7 @@
                 <a:latin typeface="Meiryo"/>
                 <a:ea typeface="Meiryo"/>
               </a:rPr>
-              <a:t>外乱と再スケジューリング・高安定領域・先行研究・特殊性と課題・仮説</a:t>
+              <a:t>外乱と再スケジューリング・高安定領域と特殊性・先行研究と課題・仮説</a:t>
             </a:r>
           </a:p>
         </p:txBody>
@@ -29919,27 +29919,7 @@
                 <a:latin typeface="Meiryo"/>
                 <a:ea typeface="Meiryo"/>
               </a:rPr>
-              <a:t>→ 手法に問われるのは，Pareto フロント全体の品質</a:t>
-            </a:r>
-          </a:p>
-          <a:p>
-            <a:pPr>
-              <a:lnSpc>
-                <a:spcPct val="108000"/>
-              </a:lnSpc>
-              <a:spcBef>
-                <a:spcPts val="0"/>
-              </a:spcBef>
-            </a:pPr>
-            <a:r>
-              <a:rPr sz="1550" b="0" i="0">
-                <a:solidFill>
-                  <a:srgbClr val="26303A"/>
-                </a:solidFill>
-                <a:latin typeface="Meiryo"/>
-                <a:ea typeface="Meiryo"/>
-              </a:rPr>
-              <a:t>だけではなく，</a:t>
+              <a:t>→ この場合，手法に問われるのは，Pareto フロント全体の品質だけではなく，</a:t>
             </a:r>
             <a:r>
               <a:rPr sz="1550" b="1" i="0">
@@ -30042,7 +30022,7 @@
                 <a:latin typeface="Meiryo"/>
                 <a:ea typeface="Meiryo"/>
               </a:rPr>
-              <a:t>先行研究：安定性を確保する 2 つのアプローチ</a:t>
+              <a:t>再スケジューリングの特殊性</a:t>
             </a:r>
           </a:p>
         </p:txBody>
@@ -30162,7 +30142,37 @@
                 <a:latin typeface="Meiryo"/>
                 <a:ea typeface="Meiryo"/>
               </a:rPr>
-              <a:t>安定性は「目的関数に組み込む」か「再スケジュールの範囲を限定する」かで確保されてきた</a:t>
+              <a:t>静的なスケジューリングにない特殊性：安定性が最良の解 </a:t>
+            </a:r>
+            <a:r>
+              <a:rPr sz="1500" b="1" i="1">
+                <a:solidFill>
+                  <a:srgbClr val="16385C"/>
+                </a:solidFill>
+                <a:latin typeface="Meiryo"/>
+                <a:ea typeface="Meiryo"/>
+              </a:rPr>
+              <a:t>S</a:t>
+            </a:r>
+            <a:r>
+              <a:rPr sz="1080" b="1" i="1" baseline="-22000">
+                <a:solidFill>
+                  <a:srgbClr val="16385C"/>
+                </a:solidFill>
+                <a:latin typeface="Meiryo"/>
+                <a:ea typeface="Meiryo"/>
+              </a:rPr>
+              <a:t>p</a:t>
+            </a:r>
+            <a:r>
+              <a:rPr sz="1500" b="1" i="0">
+                <a:solidFill>
+                  <a:srgbClr val="16385C"/>
+                </a:solidFill>
+                <a:latin typeface="Meiryo"/>
+                <a:ea typeface="Meiryo"/>
+              </a:rPr>
+              <a:t> が，探索を始める前から得られている</a:t>
             </a:r>
           </a:p>
         </p:txBody>
@@ -30246,16 +30256,16 @@
         </p:nvSpPr>
         <p:spPr>
           <a:xfrm>
-            <a:off x="566928" y="1645920"/>
-            <a:ext cx="5346039" cy="3703320"/>
+            <a:off x="566928" y="2377440"/>
+            <a:ext cx="11057839" cy="3291840"/>
           </a:xfrm>
           <a:prstGeom prst="roundRect">
             <a:avLst>
-              <a:gd name="adj" fmla="val 4000"/>
+              <a:gd name="adj" fmla="val 8000"/>
             </a:avLst>
           </a:prstGeom>
           <a:solidFill>
-            <a:srgbClr val="FFFFFF"/>
+            <a:srgbClr val="EDF2F7"/>
           </a:solidFill>
           <a:ln w="13970">
             <a:solidFill>
@@ -30288,58 +30298,14 @@
       </p:sp>
       <p:sp>
         <p:nvSpPr>
-          <p:cNvPr id="9" name="Rectangle 8"/>
-          <p:cNvSpPr/>
-          <p:nvPr/>
-        </p:nvSpPr>
-        <p:spPr>
-          <a:xfrm>
-            <a:off x="566928" y="1645920"/>
-            <a:ext cx="5346039" cy="502920"/>
-          </a:xfrm>
-          <a:prstGeom prst="rect">
-            <a:avLst/>
-          </a:prstGeom>
-          <a:solidFill>
-            <a:srgbClr val="16385C"/>
-          </a:solidFill>
-          <a:ln>
-            <a:noFill/>
-          </a:ln>
-          <a:effectLst/>
-        </p:spPr>
-        <p:style>
-          <a:lnRef idx="1">
-            <a:schemeClr val="accent1"/>
-          </a:lnRef>
-          <a:fillRef idx="3">
-            <a:schemeClr val="accent1"/>
-          </a:fillRef>
-          <a:effectRef idx="2">
-            <a:schemeClr val="accent1"/>
-          </a:effectRef>
-          <a:fontRef idx="minor">
-            <a:schemeClr val="lt1"/>
-          </a:fontRef>
-        </p:style>
-        <p:txBody>
-          <a:bodyPr rtlCol="0" anchor="ctr"/>
-          <a:lstStyle/>
-          <a:p>
-            <a:pPr algn="ctr"/>
-          </a:p>
-        </p:txBody>
-      </p:sp>
-      <p:sp>
-        <p:nvSpPr>
-          <p:cNvPr id="10" name="TextBox 9"/>
+          <p:cNvPr id="9" name="TextBox 8"/>
           <p:cNvSpPr txBox="1"/>
           <p:nvPr/>
         </p:nvSpPr>
         <p:spPr>
           <a:xfrm>
-            <a:off x="749808" y="1645920"/>
-            <a:ext cx="4980279" cy="502920"/>
+            <a:off x="1115568" y="2377440"/>
+            <a:ext cx="9960559" cy="3291840"/>
           </a:xfrm>
           <a:prstGeom prst="rect">
             <a:avLst/>
@@ -30352,777 +30318,123 @@
           </a:bodyPr>
           <a:lstStyle/>
           <a:p>
-            <a:pPr algn="l">
-              <a:lnSpc>
-                <a:spcPct val="105000"/>
-              </a:lnSpc>
-            </a:pPr>
-            <a:r>
-              <a:rPr sz="1550" b="1" i="0">
-                <a:solidFill>
-                  <a:srgbClr val="FFFFFF"/>
-                </a:solidFill>
-                <a:latin typeface="Meiryo"/>
-                <a:ea typeface="Meiryo"/>
-              </a:rPr>
-              <a:t>安定性を目的関数に組み込むアプローチ</a:t>
-            </a:r>
-          </a:p>
-        </p:txBody>
-      </p:sp>
-      <p:sp>
-        <p:nvSpPr>
-          <p:cNvPr id="11" name="TextBox 10"/>
-          <p:cNvSpPr txBox="1"/>
-          <p:nvPr/>
-        </p:nvSpPr>
-        <p:spPr>
-          <a:xfrm>
-            <a:off x="795528" y="2267712"/>
-            <a:ext cx="4888839" cy="2286000"/>
-          </a:xfrm>
-          <a:prstGeom prst="rect">
-            <a:avLst/>
-          </a:prstGeom>
-          <a:noFill/>
-        </p:spPr>
-        <p:txBody>
-          <a:bodyPr wrap="square" anchor="t" lIns="18288" rIns="18288" tIns="9144" bIns="9144">
-            <a:spAutoFit/>
-          </a:bodyPr>
-          <a:lstStyle/>
-          <a:p>
             <a:pPr>
               <a:lnSpc>
-                <a:spcPct val="100000"/>
+                <a:spcPct val="115000"/>
               </a:lnSpc>
               <a:spcBef>
                 <a:spcPts val="0"/>
               </a:spcBef>
             </a:pPr>
             <a:r>
-              <a:rPr sz="1350" b="1" i="0">
+              <a:rPr sz="1900" b="0" i="0">
+                <a:solidFill>
+                  <a:srgbClr val="26303A"/>
+                </a:solidFill>
+                <a:latin typeface="Meiryo"/>
+                <a:ea typeface="Meiryo"/>
+              </a:rPr>
+              <a:t>★ 初期解 </a:t>
+            </a:r>
+            <a:r>
+              <a:rPr sz="1900" b="0" i="1">
+                <a:solidFill>
+                  <a:srgbClr val="26303A"/>
+                </a:solidFill>
+                <a:latin typeface="Meiryo"/>
+                <a:ea typeface="Meiryo"/>
+              </a:rPr>
+              <a:t>S</a:t>
+            </a:r>
+            <a:r>
+              <a:rPr sz="1368" b="0" i="1" baseline="-22000">
+                <a:solidFill>
+                  <a:srgbClr val="26303A"/>
+                </a:solidFill>
+                <a:latin typeface="Meiryo"/>
+                <a:ea typeface="Meiryo"/>
+              </a:rPr>
+              <a:t>p</a:t>
+            </a:r>
+            <a:r>
+              <a:rPr sz="1900" b="0" i="0">
+                <a:solidFill>
+                  <a:srgbClr val="26303A"/>
+                </a:solidFill>
+                <a:latin typeface="Meiryo"/>
+                <a:ea typeface="Meiryo"/>
+              </a:rPr>
+              <a:t>（処理順序を保って遅延を吸収した解）は，</a:t>
+            </a:r>
+            <a:r>
+              <a:rPr sz="1900" b="1" i="0">
                 <a:solidFill>
                   <a:srgbClr val="16385C"/>
                 </a:solidFill>
                 <a:latin typeface="Meiryo"/>
                 <a:ea typeface="Meiryo"/>
               </a:rPr>
-              <a:t>Wu ら (1993)</a:t>
+              <a:t>探索せずに得られる</a:t>
+            </a:r>
+            <a:r>
+              <a:rPr sz="1900" b="0" i="0">
+                <a:solidFill>
+                  <a:srgbClr val="26303A"/>
+                </a:solidFill>
+                <a:latin typeface="Meiryo"/>
+                <a:ea typeface="Meiryo"/>
+              </a:rPr>
+              <a:t>．変更量 0 で安定性は最良，</a:t>
+            </a:r>
+            <a:r>
+              <a:rPr sz="1900" b="0" i="1">
+                <a:solidFill>
+                  <a:srgbClr val="26303A"/>
+                </a:solidFill>
+                <a:latin typeface="Meiryo"/>
+                <a:ea typeface="Meiryo"/>
+              </a:rPr>
+              <a:t>MS</a:t>
+            </a:r>
+            <a:r>
+              <a:rPr sz="1900" b="0" i="0">
+                <a:solidFill>
+                  <a:srgbClr val="26303A"/>
+                </a:solidFill>
+                <a:latin typeface="Meiryo"/>
+                <a:ea typeface="Meiryo"/>
+              </a:rPr>
+              <a:t> も外乱前に最適化済み</a:t>
             </a:r>
           </a:p>
           <a:p>
             <a:pPr>
               <a:lnSpc>
-                <a:spcPct val="100000"/>
-              </a:lnSpc>
-            </a:pPr>
-            <a:r>
-              <a:rPr sz="1250" b="0" i="0">
-                <a:solidFill>
-                  <a:srgbClr val="26303A"/>
-                </a:solidFill>
-                <a:latin typeface="Meiryo"/>
-                <a:ea typeface="Meiryo"/>
-              </a:rPr>
-              <a:t>　単一機械で効率と安定性を評価基準に定式化</a:t>
-            </a:r>
-          </a:p>
-          <a:p>
-            <a:pPr>
-              <a:lnSpc>
-                <a:spcPct val="100000"/>
+                <a:spcPct val="115000"/>
               </a:lnSpc>
               <a:spcBef>
-                <a:spcPts val="400"/>
+                <a:spcPts val="2400"/>
               </a:spcBef>
             </a:pPr>
             <a:r>
-              <a:rPr sz="1350" b="1" i="0">
+              <a:rPr sz="1900" b="0" i="0">
+                <a:solidFill>
+                  <a:srgbClr val="26303A"/>
+                </a:solidFill>
+                <a:latin typeface="Meiryo"/>
+                <a:ea typeface="Meiryo"/>
+              </a:rPr>
+              <a:t>→ 再スケジューリングでは，</a:t>
+            </a:r>
+            <a:r>
+              <a:rPr sz="1900" b="1" i="0">
                 <a:solidFill>
                   <a:srgbClr val="16385C"/>
                 </a:solidFill>
                 <a:latin typeface="Meiryo"/>
                 <a:ea typeface="Meiryo"/>
               </a:rPr>
-              <a:t>Rangsaritratsamee ら (2004)</a:t>
-            </a:r>
-          </a:p>
-          <a:p>
-            <a:pPr>
-              <a:lnSpc>
-                <a:spcPct val="100000"/>
-              </a:lnSpc>
-            </a:pPr>
-            <a:r>
-              <a:rPr sz="1250" b="0" i="0">
-                <a:solidFill>
-                  <a:srgbClr val="26303A"/>
-                </a:solidFill>
-                <a:latin typeface="Meiryo"/>
-                <a:ea typeface="Meiryo"/>
-              </a:rPr>
-              <a:t>　JSP．GA＋局所探索</a:t>
-            </a:r>
-          </a:p>
-          <a:p>
-            <a:pPr>
-              <a:lnSpc>
-                <a:spcPct val="100000"/>
-              </a:lnSpc>
-              <a:spcBef>
-                <a:spcPts val="400"/>
-              </a:spcBef>
-            </a:pPr>
-            <a:r>
-              <a:rPr sz="1350" b="1" i="0">
-                <a:solidFill>
-                  <a:srgbClr val="16385C"/>
-                </a:solidFill>
-                <a:latin typeface="Meiryo"/>
-                <a:ea typeface="Meiryo"/>
-              </a:rPr>
-              <a:t>Zhang ら (2013)</a:t>
-            </a:r>
-          </a:p>
-          <a:p>
-            <a:pPr>
-              <a:lnSpc>
-                <a:spcPct val="100000"/>
-              </a:lnSpc>
-            </a:pPr>
-            <a:r>
-              <a:rPr sz="1250" b="0" i="0">
-                <a:solidFill>
-                  <a:srgbClr val="26303A"/>
-                </a:solidFill>
-                <a:latin typeface="Meiryo"/>
-                <a:ea typeface="Meiryo"/>
-              </a:rPr>
-              <a:t>　JSP．GA＋タブーサーチ</a:t>
-            </a:r>
-          </a:p>
-          <a:p>
-            <a:pPr>
-              <a:lnSpc>
-                <a:spcPct val="100000"/>
-              </a:lnSpc>
-              <a:spcBef>
-                <a:spcPts val="400"/>
-              </a:spcBef>
-            </a:pPr>
-            <a:r>
-              <a:rPr sz="1350" b="1" i="0">
-                <a:solidFill>
-                  <a:srgbClr val="16385C"/>
-                </a:solidFill>
-                <a:latin typeface="Meiryo"/>
-                <a:ea typeface="Meiryo"/>
-              </a:rPr>
-              <a:t>Fattahi &amp; Fallahi (2010)</a:t>
-            </a:r>
-          </a:p>
-          <a:p>
-            <a:pPr>
-              <a:lnSpc>
-                <a:spcPct val="100000"/>
-              </a:lnSpc>
-            </a:pPr>
-            <a:r>
-              <a:rPr sz="1250" b="0" i="0">
-                <a:solidFill>
-                  <a:srgbClr val="26303A"/>
-                </a:solidFill>
-                <a:latin typeface="Meiryo"/>
-                <a:ea typeface="Meiryo"/>
-              </a:rPr>
-              <a:t>　FJSP．GA＋局所探索</a:t>
-            </a:r>
-          </a:p>
-          <a:p>
-            <a:pPr>
-              <a:lnSpc>
-                <a:spcPct val="100000"/>
-              </a:lnSpc>
-              <a:spcBef>
-                <a:spcPts val="400"/>
-              </a:spcBef>
-            </a:pPr>
-            <a:r>
-              <a:rPr sz="1350" b="1" i="0">
-                <a:solidFill>
-                  <a:srgbClr val="16385C"/>
-                </a:solidFill>
-                <a:latin typeface="Meiryo"/>
-                <a:ea typeface="Meiryo"/>
-              </a:rPr>
-              <a:t>Valledor ら (2022)，Luo ら (2025)</a:t>
-            </a:r>
-          </a:p>
-          <a:p>
-            <a:pPr>
-              <a:lnSpc>
-                <a:spcPct val="100000"/>
-              </a:lnSpc>
-            </a:pPr>
-            <a:r>
-              <a:rPr sz="1250" b="0" i="0">
-                <a:solidFill>
-                  <a:srgbClr val="26303A"/>
-                </a:solidFill>
-                <a:latin typeface="Meiryo"/>
-                <a:ea typeface="Meiryo"/>
-              </a:rPr>
-              <a:t>　NSGA-II 系で Pareto 支配</a:t>
-            </a:r>
-          </a:p>
-        </p:txBody>
-      </p:sp>
-      <p:sp>
-        <p:nvSpPr>
-          <p:cNvPr id="12" name="Rounded Rectangle 11"/>
-          <p:cNvSpPr/>
-          <p:nvPr/>
-        </p:nvSpPr>
-        <p:spPr>
-          <a:xfrm>
-            <a:off x="795528" y="4800600"/>
-            <a:ext cx="4888839" cy="420624"/>
-          </a:xfrm>
-          <a:prstGeom prst="roundRect">
-            <a:avLst>
-              <a:gd name="adj" fmla="val 20000"/>
-            </a:avLst>
-          </a:prstGeom>
-          <a:solidFill>
-            <a:srgbClr val="EDF2F7"/>
-          </a:solidFill>
-          <a:ln>
-            <a:noFill/>
-          </a:ln>
-          <a:effectLst/>
-        </p:spPr>
-        <p:style>
-          <a:lnRef idx="1">
-            <a:schemeClr val="accent1"/>
-          </a:lnRef>
-          <a:fillRef idx="3">
-            <a:schemeClr val="accent1"/>
-          </a:fillRef>
-          <a:effectRef idx="2">
-            <a:schemeClr val="accent1"/>
-          </a:effectRef>
-          <a:fontRef idx="minor">
-            <a:schemeClr val="lt1"/>
-          </a:fontRef>
-        </p:style>
-        <p:txBody>
-          <a:bodyPr rtlCol="0" anchor="ctr" wrap="square" lIns="54864" rIns="54864" tIns="18288" bIns="18288"/>
-          <a:lstStyle/>
-          <a:p>
-            <a:pPr algn="ctr">
-              <a:lnSpc>
-                <a:spcPct val="100000"/>
-              </a:lnSpc>
-            </a:pPr>
-            <a:r>
-              <a:rPr sz="1350" b="1" i="0">
-                <a:solidFill>
-                  <a:srgbClr val="16385C"/>
-                </a:solidFill>
-                <a:latin typeface="Meiryo"/>
-                <a:ea typeface="Meiryo"/>
-              </a:rPr>
-              <a:t>安定性は解の評価（目的関数の一項）にのみ反映</a:t>
-            </a:r>
-          </a:p>
-        </p:txBody>
-      </p:sp>
-      <p:sp>
-        <p:nvSpPr>
-          <p:cNvPr id="13" name="Rounded Rectangle 12"/>
-          <p:cNvSpPr/>
-          <p:nvPr/>
-        </p:nvSpPr>
-        <p:spPr>
-          <a:xfrm>
-            <a:off x="6278727" y="1645920"/>
-            <a:ext cx="5346039" cy="3703320"/>
-          </a:xfrm>
-          <a:prstGeom prst="roundRect">
-            <a:avLst>
-              <a:gd name="adj" fmla="val 4000"/>
-            </a:avLst>
-          </a:prstGeom>
-          <a:solidFill>
-            <a:srgbClr val="FFFFFF"/>
-          </a:solidFill>
-          <a:ln w="13970">
-            <a:solidFill>
-              <a:srgbClr val="C9D6E5"/>
-            </a:solidFill>
-          </a:ln>
-          <a:effectLst/>
-        </p:spPr>
-        <p:style>
-          <a:lnRef idx="1">
-            <a:schemeClr val="accent1"/>
-          </a:lnRef>
-          <a:fillRef idx="3">
-            <a:schemeClr val="accent1"/>
-          </a:fillRef>
-          <a:effectRef idx="2">
-            <a:schemeClr val="accent1"/>
-          </a:effectRef>
-          <a:fontRef idx="minor">
-            <a:schemeClr val="lt1"/>
-          </a:fontRef>
-        </p:style>
-        <p:txBody>
-          <a:bodyPr rtlCol="0" anchor="ctr"/>
-          <a:lstStyle/>
-          <a:p>
-            <a:pPr algn="ctr"/>
-          </a:p>
-        </p:txBody>
-      </p:sp>
-      <p:sp>
-        <p:nvSpPr>
-          <p:cNvPr id="14" name="Rectangle 13"/>
-          <p:cNvSpPr/>
-          <p:nvPr/>
-        </p:nvSpPr>
-        <p:spPr>
-          <a:xfrm>
-            <a:off x="6278727" y="1645920"/>
-            <a:ext cx="5346039" cy="502920"/>
-          </a:xfrm>
-          <a:prstGeom prst="rect">
-            <a:avLst/>
-          </a:prstGeom>
-          <a:solidFill>
-            <a:srgbClr val="16385C"/>
-          </a:solidFill>
-          <a:ln>
-            <a:noFill/>
-          </a:ln>
-          <a:effectLst/>
-        </p:spPr>
-        <p:style>
-          <a:lnRef idx="1">
-            <a:schemeClr val="accent1"/>
-          </a:lnRef>
-          <a:fillRef idx="3">
-            <a:schemeClr val="accent1"/>
-          </a:fillRef>
-          <a:effectRef idx="2">
-            <a:schemeClr val="accent1"/>
-          </a:effectRef>
-          <a:fontRef idx="minor">
-            <a:schemeClr val="lt1"/>
-          </a:fontRef>
-        </p:style>
-        <p:txBody>
-          <a:bodyPr rtlCol="0" anchor="ctr"/>
-          <a:lstStyle/>
-          <a:p>
-            <a:pPr algn="ctr"/>
-          </a:p>
-        </p:txBody>
-      </p:sp>
-      <p:sp>
-        <p:nvSpPr>
-          <p:cNvPr id="15" name="TextBox 14"/>
-          <p:cNvSpPr txBox="1"/>
-          <p:nvPr/>
-        </p:nvSpPr>
-        <p:spPr>
-          <a:xfrm>
-            <a:off x="6461607" y="1645920"/>
-            <a:ext cx="4980279" cy="502920"/>
-          </a:xfrm>
-          <a:prstGeom prst="rect">
-            <a:avLst/>
-          </a:prstGeom>
-          <a:noFill/>
-        </p:spPr>
-        <p:txBody>
-          <a:bodyPr wrap="square" anchor="ctr" lIns="18288" rIns="18288" tIns="9144" bIns="9144">
-            <a:spAutoFit/>
-          </a:bodyPr>
-          <a:lstStyle/>
-          <a:p>
-            <a:pPr algn="l">
-              <a:lnSpc>
-                <a:spcPct val="105000"/>
-              </a:lnSpc>
-            </a:pPr>
-            <a:r>
-              <a:rPr sz="1550" b="1" i="0">
-                <a:solidFill>
-                  <a:srgbClr val="FFFFFF"/>
-                </a:solidFill>
-                <a:latin typeface="Meiryo"/>
-                <a:ea typeface="Meiryo"/>
-              </a:rPr>
-              <a:t>再スケジュールの対象範囲を限定するアプローチ</a:t>
-            </a:r>
-          </a:p>
-        </p:txBody>
-      </p:sp>
-      <p:sp>
-        <p:nvSpPr>
-          <p:cNvPr id="16" name="TextBox 15"/>
-          <p:cNvSpPr txBox="1"/>
-          <p:nvPr/>
-        </p:nvSpPr>
-        <p:spPr>
-          <a:xfrm>
-            <a:off x="6507327" y="2267712"/>
-            <a:ext cx="4888839" cy="2286000"/>
-          </a:xfrm>
-          <a:prstGeom prst="rect">
-            <a:avLst/>
-          </a:prstGeom>
-          <a:noFill/>
-        </p:spPr>
-        <p:txBody>
-          <a:bodyPr wrap="square" anchor="t" lIns="18288" rIns="18288" tIns="9144" bIns="9144">
-            <a:spAutoFit/>
-          </a:bodyPr>
-          <a:lstStyle/>
-          <a:p>
-            <a:pPr>
-              <a:lnSpc>
-                <a:spcPct val="100000"/>
-              </a:lnSpc>
-              <a:spcBef>
-                <a:spcPts val="0"/>
-              </a:spcBef>
-            </a:pPr>
-            <a:r>
-              <a:rPr sz="1350" b="1" i="0">
-                <a:solidFill>
-                  <a:srgbClr val="16385C"/>
-                </a:solidFill>
-                <a:latin typeface="Meiryo"/>
-                <a:ea typeface="Meiryo"/>
-              </a:rPr>
-              <a:t>Bean ら (1991)</a:t>
-            </a:r>
-          </a:p>
-          <a:p>
-            <a:pPr>
-              <a:lnSpc>
-                <a:spcPct val="100000"/>
-              </a:lnSpc>
-            </a:pPr>
-            <a:r>
-              <a:rPr sz="1250" b="0" i="0">
-                <a:solidFill>
-                  <a:srgbClr val="26303A"/>
-                </a:solidFill>
-                <a:latin typeface="Meiryo"/>
-                <a:ea typeface="Meiryo"/>
-              </a:rPr>
-              <a:t>　復帰時点までを再スケジュール（match-up）</a:t>
-            </a:r>
-          </a:p>
-          <a:p>
-            <a:pPr>
-              <a:lnSpc>
-                <a:spcPct val="100000"/>
-              </a:lnSpc>
-              <a:spcBef>
-                <a:spcPts val="400"/>
-              </a:spcBef>
-            </a:pPr>
-            <a:r>
-              <a:rPr sz="1350" b="1" i="0">
-                <a:solidFill>
-                  <a:srgbClr val="16385C"/>
-                </a:solidFill>
-                <a:latin typeface="Meiryo"/>
-                <a:ea typeface="Meiryo"/>
-              </a:rPr>
-              <a:t>Abumaizar &amp; Svestka (1997)</a:t>
-            </a:r>
-          </a:p>
-          <a:p>
-            <a:pPr>
-              <a:lnSpc>
-                <a:spcPct val="100000"/>
-              </a:lnSpc>
-            </a:pPr>
-            <a:r>
-              <a:rPr sz="1250" b="0" i="0">
-                <a:solidFill>
-                  <a:srgbClr val="26303A"/>
-                </a:solidFill>
-                <a:latin typeface="Meiryo"/>
-                <a:ea typeface="Meiryo"/>
-              </a:rPr>
-              <a:t>　影響を受ける作業だけを再スケジュール</a:t>
-            </a:r>
-          </a:p>
-          <a:p>
-            <a:pPr>
-              <a:lnSpc>
-                <a:spcPct val="100000"/>
-              </a:lnSpc>
-              <a:spcBef>
-                <a:spcPts val="400"/>
-              </a:spcBef>
-            </a:pPr>
-            <a:r>
-              <a:rPr sz="1350" b="1" i="0">
-                <a:solidFill>
-                  <a:srgbClr val="16385C"/>
-                </a:solidFill>
-                <a:latin typeface="Meiryo"/>
-                <a:ea typeface="Meiryo"/>
-              </a:rPr>
-              <a:t>Zakaria &amp; Petrovic (2012)</a:t>
-            </a:r>
-          </a:p>
-          <a:p>
-            <a:pPr>
-              <a:lnSpc>
-                <a:spcPct val="100000"/>
-              </a:lnSpc>
-            </a:pPr>
-            <a:r>
-              <a:rPr sz="1250" b="0" i="0">
-                <a:solidFill>
-                  <a:srgbClr val="26303A"/>
-                </a:solidFill>
-                <a:latin typeface="Meiryo"/>
-                <a:ea typeface="Meiryo"/>
-              </a:rPr>
-              <a:t>　GA の染色体を区間に限定</a:t>
-            </a:r>
-          </a:p>
-          <a:p>
-            <a:pPr>
-              <a:lnSpc>
-                <a:spcPct val="100000"/>
-              </a:lnSpc>
-              <a:spcBef>
-                <a:spcPts val="400"/>
-              </a:spcBef>
-            </a:pPr>
-            <a:r>
-              <a:rPr sz="1350" b="1" i="0">
-                <a:solidFill>
-                  <a:srgbClr val="16385C"/>
-                </a:solidFill>
-                <a:latin typeface="Meiryo"/>
-                <a:ea typeface="Meiryo"/>
-              </a:rPr>
-              <a:t>Sun ら (2026)</a:t>
-            </a:r>
-          </a:p>
-          <a:p>
-            <a:pPr>
-              <a:lnSpc>
-                <a:spcPct val="100000"/>
-              </a:lnSpc>
-            </a:pPr>
-            <a:r>
-              <a:rPr sz="1250" b="0" i="0">
-                <a:solidFill>
-                  <a:srgbClr val="26303A"/>
-                </a:solidFill>
-                <a:latin typeface="Meiryo"/>
-                <a:ea typeface="Meiryo"/>
-              </a:rPr>
-              <a:t>　再最適化の範囲を 4 段階に整理</a:t>
-            </a:r>
-          </a:p>
-        </p:txBody>
-      </p:sp>
-      <p:sp>
-        <p:nvSpPr>
-          <p:cNvPr id="17" name="Rounded Rectangle 16"/>
-          <p:cNvSpPr/>
-          <p:nvPr/>
-        </p:nvSpPr>
-        <p:spPr>
-          <a:xfrm>
-            <a:off x="6507327" y="4800600"/>
-            <a:ext cx="4888839" cy="420624"/>
-          </a:xfrm>
-          <a:prstGeom prst="roundRect">
-            <a:avLst>
-              <a:gd name="adj" fmla="val 20000"/>
-            </a:avLst>
-          </a:prstGeom>
-          <a:solidFill>
-            <a:srgbClr val="EDF2F7"/>
-          </a:solidFill>
-          <a:ln>
-            <a:noFill/>
-          </a:ln>
-          <a:effectLst/>
-        </p:spPr>
-        <p:style>
-          <a:lnRef idx="1">
-            <a:schemeClr val="accent1"/>
-          </a:lnRef>
-          <a:fillRef idx="3">
-            <a:schemeClr val="accent1"/>
-          </a:fillRef>
-          <a:effectRef idx="2">
-            <a:schemeClr val="accent1"/>
-          </a:effectRef>
-          <a:fontRef idx="minor">
-            <a:schemeClr val="lt1"/>
-          </a:fontRef>
-        </p:style>
-        <p:txBody>
-          <a:bodyPr rtlCol="0" anchor="ctr" wrap="square" lIns="54864" rIns="54864" tIns="18288" bIns="18288"/>
-          <a:lstStyle/>
-          <a:p>
-            <a:pPr algn="ctr">
-              <a:lnSpc>
-                <a:spcPct val="100000"/>
-              </a:lnSpc>
-            </a:pPr>
-            <a:r>
-              <a:rPr sz="1350" b="1" i="0">
-                <a:solidFill>
-                  <a:srgbClr val="16385C"/>
-                </a:solidFill>
-                <a:latin typeface="Meiryo"/>
-                <a:ea typeface="Meiryo"/>
-              </a:rPr>
-              <a:t>探索空間の制限で安定性を確保する</a:t>
-            </a:r>
-          </a:p>
-        </p:txBody>
-      </p:sp>
-      <p:sp>
-        <p:nvSpPr>
-          <p:cNvPr id="18" name="TextBox 17"/>
-          <p:cNvSpPr txBox="1"/>
-          <p:nvPr/>
-        </p:nvSpPr>
-        <p:spPr>
-          <a:xfrm>
-            <a:off x="566928" y="5458968"/>
-            <a:ext cx="11057839" cy="457200"/>
-          </a:xfrm>
-          <a:prstGeom prst="rect">
-            <a:avLst/>
-          </a:prstGeom>
-          <a:noFill/>
-        </p:spPr>
-        <p:txBody>
-          <a:bodyPr wrap="square" anchor="ctr" lIns="18288" rIns="18288" tIns="9144" bIns="9144">
-            <a:spAutoFit/>
-          </a:bodyPr>
-          <a:lstStyle/>
-          <a:p>
-            <a:pPr algn="ctr">
-              <a:lnSpc>
-                <a:spcPct val="105000"/>
-              </a:lnSpc>
-            </a:pPr>
-            <a:r>
-              <a:rPr sz="1900" b="0" i="0">
-                <a:solidFill>
-                  <a:srgbClr val="26303A"/>
-                </a:solidFill>
-                <a:latin typeface="Meiryo"/>
-                <a:ea typeface="Meiryo"/>
-              </a:rPr>
-              <a:t>どちらのアプローチでも，メタヒューリスティクスによる解法は GA を基軸とする</a:t>
-            </a:r>
-            <a:r>
-              <a:rPr sz="1900" b="1" i="0">
-                <a:solidFill>
-                  <a:srgbClr val="16385C"/>
-                </a:solidFill>
-                <a:latin typeface="Meiryo"/>
-                <a:ea typeface="Meiryo"/>
-              </a:rPr>
-              <a:t>多点探索に集中</a:t>
-            </a:r>
-          </a:p>
-        </p:txBody>
-      </p:sp>
-      <p:sp>
-        <p:nvSpPr>
-          <p:cNvPr id="19" name="TextBox 18"/>
-          <p:cNvSpPr txBox="1"/>
-          <p:nvPr/>
-        </p:nvSpPr>
-        <p:spPr>
-          <a:xfrm>
-            <a:off x="566928" y="5916168"/>
-            <a:ext cx="11057839" cy="347472"/>
-          </a:xfrm>
-          <a:prstGeom prst="rect">
-            <a:avLst/>
-          </a:prstGeom>
-          <a:noFill/>
-        </p:spPr>
-        <p:txBody>
-          <a:bodyPr wrap="square" anchor="ctr" lIns="18288" rIns="18288" tIns="9144" bIns="9144">
-            <a:spAutoFit/>
-          </a:bodyPr>
-          <a:lstStyle/>
-          <a:p>
-            <a:pPr algn="ctr"/>
-            <a:r>
-              <a:rPr sz="1400" b="1" i="0">
-                <a:solidFill>
-                  <a:srgbClr val="E06C00"/>
-                </a:solidFill>
-                <a:latin typeface="Meiryo"/>
-                <a:ea typeface="Meiryo"/>
-              </a:rPr>
-              <a:t>単点探索</a:t>
-            </a:r>
-            <a:r>
-              <a:rPr sz="1400" b="0" i="0">
-                <a:solidFill>
-                  <a:srgbClr val="26303A"/>
-                </a:solidFill>
-                <a:latin typeface="Meiryo"/>
-                <a:ea typeface="Meiryo"/>
-              </a:rPr>
-              <a:t>：1 つの解を少しずつ変更しながら進む　／　</a:t>
-            </a:r>
-            <a:r>
-              <a:rPr sz="1400" b="1" i="0">
-                <a:solidFill>
-                  <a:srgbClr val="0F5C28"/>
-                </a:solidFill>
-                <a:latin typeface="Meiryo"/>
-                <a:ea typeface="Meiryo"/>
-              </a:rPr>
-              <a:t>多点探索</a:t>
-            </a:r>
-            <a:r>
-              <a:rPr sz="1400" b="0" i="0">
-                <a:solidFill>
-                  <a:srgbClr val="26303A"/>
-                </a:solidFill>
-                <a:latin typeface="Meiryo"/>
-                <a:ea typeface="Meiryo"/>
-              </a:rPr>
-              <a:t>：複数の解を保持し，互いに組み替えながら進む</a:t>
-            </a:r>
-            <a:r>
-              <a:rPr sz="1100" b="0" i="0">
-                <a:solidFill>
-                  <a:srgbClr val="6E7A88"/>
-                </a:solidFill>
-                <a:latin typeface="Meiryo"/>
-                <a:ea typeface="Meiryo"/>
-              </a:rPr>
-              <a:t>（Blum &amp; Roli, 2003）</a:t>
+              <a:t>この特殊性を活かすことで効果的な探索ができるはずである</a:t>
             </a:r>
           </a:p>
         </p:txBody>
@@ -31175,7 +30487,7 @@
                 <a:latin typeface="Meiryo"/>
                 <a:ea typeface="Meiryo"/>
               </a:rPr>
-              <a:t>再スケジューリングの特殊性</a:t>
+              <a:t>先行研究：安定性を確保する 2 つのアプローチ</a:t>
             </a:r>
           </a:p>
         </p:txBody>
@@ -31295,57 +30607,7 @@
                 <a:latin typeface="Meiryo"/>
                 <a:ea typeface="Meiryo"/>
               </a:rPr>
-              <a:t>安定性が最良の解 </a:t>
-            </a:r>
-            <a:r>
-              <a:rPr sz="1500" b="1" i="1">
-                <a:solidFill>
-                  <a:srgbClr val="16385C"/>
-                </a:solidFill>
-                <a:latin typeface="Meiryo"/>
-                <a:ea typeface="Meiryo"/>
-              </a:rPr>
-              <a:t>S</a:t>
-            </a:r>
-            <a:r>
-              <a:rPr sz="1080" b="1" i="1" baseline="-22000">
-                <a:solidFill>
-                  <a:srgbClr val="16385C"/>
-                </a:solidFill>
-                <a:latin typeface="Meiryo"/>
-                <a:ea typeface="Meiryo"/>
-              </a:rPr>
-              <a:t>p</a:t>
-            </a:r>
-            <a:r>
-              <a:rPr sz="1500" b="1" i="0">
-                <a:solidFill>
-                  <a:srgbClr val="16385C"/>
-                </a:solidFill>
-                <a:latin typeface="Meiryo"/>
-                <a:ea typeface="Meiryo"/>
-              </a:rPr>
-              <a:t> は探索前にある．問われるのは，そこから少しの変更で </a:t>
-            </a:r>
-            <a:r>
-              <a:rPr sz="1500" b="1" i="1">
-                <a:solidFill>
-                  <a:srgbClr val="16385C"/>
-                </a:solidFill>
-                <a:latin typeface="Meiryo"/>
-                <a:ea typeface="Meiryo"/>
-              </a:rPr>
-              <a:t>MS</a:t>
-            </a:r>
-            <a:r>
-              <a:rPr sz="1500" b="1" i="0">
-                <a:solidFill>
-                  <a:srgbClr val="16385C"/>
-                </a:solidFill>
-                <a:latin typeface="Meiryo"/>
-                <a:ea typeface="Meiryo"/>
-              </a:rPr>
-              <a:t> をどこまで下げられるか</a:t>
+              <a:t>安定性は「目的関数に組み込む」か「再スケジュールの範囲を限定する」かで確保されてきた</a:t>
             </a:r>
           </a:p>
         </p:txBody>
@@ -31421,40 +30683,108 @@
           </a:p>
         </p:txBody>
       </p:sp>
-      <p:pic>
-        <p:nvPicPr>
-          <p:cNvPr id="8" name="Picture 7" descr="concept_sp.png"/>
-          <p:cNvPicPr>
-            <a:picLocks noChangeAspect="1"/>
-          </p:cNvPicPr>
-          <p:nvPr/>
-        </p:nvPicPr>
-        <p:blipFill>
-          <a:blip r:embed="rId2"/>
-          <a:stretch>
-            <a:fillRect/>
-          </a:stretch>
-        </p:blipFill>
-        <p:spPr>
-          <a:xfrm>
-            <a:off x="521207" y="1691640"/>
-            <a:ext cx="5577840" cy="4312367"/>
+      <p:sp>
+        <p:nvSpPr>
+          <p:cNvPr id="8" name="Rounded Rectangle 7"/>
+          <p:cNvSpPr/>
+          <p:nvPr/>
+        </p:nvSpPr>
+        <p:spPr>
+          <a:xfrm>
+            <a:off x="566928" y="1645920"/>
+            <a:ext cx="5346039" cy="3703320"/>
+          </a:xfrm>
+          <a:prstGeom prst="roundRect">
+            <a:avLst>
+              <a:gd name="adj" fmla="val 4000"/>
+            </a:avLst>
+          </a:prstGeom>
+          <a:solidFill>
+            <a:srgbClr val="FFFFFF"/>
+          </a:solidFill>
+          <a:ln w="13970">
+            <a:solidFill>
+              <a:srgbClr val="C9D6E5"/>
+            </a:solidFill>
+          </a:ln>
+          <a:effectLst/>
+        </p:spPr>
+        <p:style>
+          <a:lnRef idx="1">
+            <a:schemeClr val="accent1"/>
+          </a:lnRef>
+          <a:fillRef idx="3">
+            <a:schemeClr val="accent1"/>
+          </a:fillRef>
+          <a:effectRef idx="2">
+            <a:schemeClr val="accent1"/>
+          </a:effectRef>
+          <a:fontRef idx="minor">
+            <a:schemeClr val="lt1"/>
+          </a:fontRef>
+        </p:style>
+        <p:txBody>
+          <a:bodyPr rtlCol="0" anchor="ctr"/>
+          <a:lstStyle/>
+          <a:p>
+            <a:pPr algn="ctr"/>
+          </a:p>
+        </p:txBody>
+      </p:sp>
+      <p:sp>
+        <p:nvSpPr>
+          <p:cNvPr id="9" name="Rectangle 8"/>
+          <p:cNvSpPr/>
+          <p:nvPr/>
+        </p:nvSpPr>
+        <p:spPr>
+          <a:xfrm>
+            <a:off x="566928" y="1645920"/>
+            <a:ext cx="5346039" cy="502920"/>
           </a:xfrm>
           <a:prstGeom prst="rect">
             <a:avLst/>
           </a:prstGeom>
-        </p:spPr>
-      </p:pic>
-      <p:sp>
-        <p:nvSpPr>
-          <p:cNvPr id="9" name="TextBox 8"/>
+          <a:solidFill>
+            <a:srgbClr val="16385C"/>
+          </a:solidFill>
+          <a:ln>
+            <a:noFill/>
+          </a:ln>
+          <a:effectLst/>
+        </p:spPr>
+        <p:style>
+          <a:lnRef idx="1">
+            <a:schemeClr val="accent1"/>
+          </a:lnRef>
+          <a:fillRef idx="3">
+            <a:schemeClr val="accent1"/>
+          </a:fillRef>
+          <a:effectRef idx="2">
+            <a:schemeClr val="accent1"/>
+          </a:effectRef>
+          <a:fontRef idx="minor">
+            <a:schemeClr val="lt1"/>
+          </a:fontRef>
+        </p:style>
+        <p:txBody>
+          <a:bodyPr rtlCol="0" anchor="ctr"/>
+          <a:lstStyle/>
+          <a:p>
+            <a:pPr algn="ctr"/>
+          </a:p>
+        </p:txBody>
+      </p:sp>
+      <p:sp>
+        <p:nvSpPr>
+          <p:cNvPr id="10" name="TextBox 9"/>
           <p:cNvSpPr txBox="1"/>
           <p:nvPr/>
         </p:nvSpPr>
         <p:spPr>
           <a:xfrm>
-            <a:off x="6281928" y="1691640"/>
-            <a:ext cx="5342839" cy="4312367"/>
+            <a:off x="749808" y="1645920"/>
+            <a:ext cx="4980279" cy="502920"/>
           </a:xfrm>
           <a:prstGeom prst="rect">
             <a:avLst/>
@@ -31467,273 +30797,777 @@
           </a:bodyPr>
           <a:lstStyle/>
           <a:p>
+            <a:pPr algn="l">
+              <a:lnSpc>
+                <a:spcPct val="105000"/>
+              </a:lnSpc>
+            </a:pPr>
+            <a:r>
+              <a:rPr sz="1550" b="1" i="0">
+                <a:solidFill>
+                  <a:srgbClr val="FFFFFF"/>
+                </a:solidFill>
+                <a:latin typeface="Meiryo"/>
+                <a:ea typeface="Meiryo"/>
+              </a:rPr>
+              <a:t>安定性を目的関数に組み込むアプローチ</a:t>
+            </a:r>
+          </a:p>
+        </p:txBody>
+      </p:sp>
+      <p:sp>
+        <p:nvSpPr>
+          <p:cNvPr id="11" name="TextBox 10"/>
+          <p:cNvSpPr txBox="1"/>
+          <p:nvPr/>
+        </p:nvSpPr>
+        <p:spPr>
+          <a:xfrm>
+            <a:off x="795528" y="2267712"/>
+            <a:ext cx="4888839" cy="2286000"/>
+          </a:xfrm>
+          <a:prstGeom prst="rect">
+            <a:avLst/>
+          </a:prstGeom>
+          <a:noFill/>
+        </p:spPr>
+        <p:txBody>
+          <a:bodyPr wrap="square" anchor="t" lIns="18288" rIns="18288" tIns="9144" bIns="9144">
+            <a:spAutoFit/>
+          </a:bodyPr>
+          <a:lstStyle/>
+          <a:p>
             <a:pPr>
               <a:lnSpc>
-                <a:spcPct val="108000"/>
+                <a:spcPct val="100000"/>
               </a:lnSpc>
               <a:spcBef>
                 <a:spcPts val="0"/>
               </a:spcBef>
             </a:pPr>
             <a:r>
-              <a:rPr sz="1500" b="0" i="0">
-                <a:solidFill>
-                  <a:srgbClr val="26303A"/>
-                </a:solidFill>
-                <a:latin typeface="Meiryo"/>
-                <a:ea typeface="Meiryo"/>
-              </a:rPr>
-              <a:t>★ 初期解 </a:t>
-            </a:r>
-            <a:r>
-              <a:rPr sz="1500" b="0" i="1">
-                <a:solidFill>
-                  <a:srgbClr val="26303A"/>
-                </a:solidFill>
-                <a:latin typeface="Meiryo"/>
-                <a:ea typeface="Meiryo"/>
-              </a:rPr>
-              <a:t>S</a:t>
-            </a:r>
-            <a:r>
-              <a:rPr sz="1080" b="0" i="1" baseline="-22000">
-                <a:solidFill>
-                  <a:srgbClr val="26303A"/>
-                </a:solidFill>
-                <a:latin typeface="Meiryo"/>
-                <a:ea typeface="Meiryo"/>
-              </a:rPr>
-              <a:t>p</a:t>
-            </a:r>
-            <a:r>
-              <a:rPr sz="1500" b="0" i="0">
-                <a:solidFill>
-                  <a:srgbClr val="26303A"/>
-                </a:solidFill>
-                <a:latin typeface="Meiryo"/>
-                <a:ea typeface="Meiryo"/>
-              </a:rPr>
-              <a:t>（処理順序を保って遅延を吸収した解）は，</a:t>
-            </a:r>
-            <a:r>
-              <a:rPr sz="1500" b="1" i="0">
+              <a:rPr sz="1350" b="1" i="0">
                 <a:solidFill>
                   <a:srgbClr val="16385C"/>
                 </a:solidFill>
                 <a:latin typeface="Meiryo"/>
                 <a:ea typeface="Meiryo"/>
               </a:rPr>
-              <a:t>探索せずに得られる</a:t>
-            </a:r>
-            <a:r>
-              <a:rPr sz="1500" b="0" i="0">
-                <a:solidFill>
-                  <a:srgbClr val="26303A"/>
-                </a:solidFill>
-                <a:latin typeface="Meiryo"/>
-                <a:ea typeface="Meiryo"/>
-              </a:rPr>
-              <a:t>．変更量 0 で安定性は最良，</a:t>
-            </a:r>
-            <a:r>
-              <a:rPr sz="1500" b="0" i="1">
-                <a:solidFill>
-                  <a:srgbClr val="26303A"/>
-                </a:solidFill>
-                <a:latin typeface="Meiryo"/>
-                <a:ea typeface="Meiryo"/>
-              </a:rPr>
-              <a:t>MS</a:t>
-            </a:r>
-            <a:r>
-              <a:rPr sz="1500" b="0" i="0">
-                <a:solidFill>
-                  <a:srgbClr val="26303A"/>
-                </a:solidFill>
-                <a:latin typeface="Meiryo"/>
-                <a:ea typeface="Meiryo"/>
-              </a:rPr>
-              <a:t> も外乱前に最適化済み</a:t>
+              <a:t>Wu ら (1993)</a:t>
             </a:r>
           </a:p>
           <a:p>
             <a:pPr>
               <a:lnSpc>
-                <a:spcPct val="108000"/>
+                <a:spcPct val="100000"/>
+              </a:lnSpc>
+            </a:pPr>
+            <a:r>
+              <a:rPr sz="1250" b="0" i="0">
+                <a:solidFill>
+                  <a:srgbClr val="26303A"/>
+                </a:solidFill>
+                <a:latin typeface="Meiryo"/>
+                <a:ea typeface="Meiryo"/>
+              </a:rPr>
+              <a:t>　単一機械で効率と安定性を評価基準に定式化</a:t>
+            </a:r>
+          </a:p>
+          <a:p>
+            <a:pPr>
+              <a:lnSpc>
+                <a:spcPct val="100000"/>
               </a:lnSpc>
               <a:spcBef>
-                <a:spcPts val="1200"/>
+                <a:spcPts val="400"/>
               </a:spcBef>
             </a:pPr>
             <a:r>
-              <a:rPr sz="1500" b="0" i="0">
-                <a:solidFill>
-                  <a:srgbClr val="26303A"/>
-                </a:solidFill>
-                <a:latin typeface="Meiryo"/>
-                <a:ea typeface="Meiryo"/>
-              </a:rPr>
-              <a:t>● 静的なスケジューリングと違い，探索は最初から</a:t>
-            </a:r>
-            <a:r>
-              <a:rPr sz="1500" b="1" i="0">
+              <a:rPr sz="1350" b="1" i="0">
                 <a:solidFill>
                   <a:srgbClr val="16385C"/>
                 </a:solidFill>
                 <a:latin typeface="Meiryo"/>
                 <a:ea typeface="Meiryo"/>
               </a:rPr>
-              <a:t>高品質な解 </a:t>
-            </a:r>
-            <a:r>
-              <a:rPr sz="1500" b="1" i="1">
-                <a:solidFill>
-                  <a:srgbClr val="16385C"/>
-                </a:solidFill>
-                <a:latin typeface="Meiryo"/>
-                <a:ea typeface="Meiryo"/>
-              </a:rPr>
-              <a:t>S</a:t>
-            </a:r>
-            <a:r>
-              <a:rPr sz="1080" b="1" i="1" baseline="-22000">
-                <a:solidFill>
-                  <a:srgbClr val="16385C"/>
-                </a:solidFill>
-                <a:latin typeface="Meiryo"/>
-                <a:ea typeface="Meiryo"/>
-              </a:rPr>
-              <a:t>p</a:t>
-            </a:r>
-            <a:r>
-              <a:rPr sz="1500" b="1" i="0">
-                <a:solidFill>
-                  <a:srgbClr val="16385C"/>
-                </a:solidFill>
-                <a:latin typeface="Meiryo"/>
-                <a:ea typeface="Meiryo"/>
-              </a:rPr>
-              <a:t> を持っている</a:t>
+              <a:t>Rangsaritratsamee ら (2004)</a:t>
             </a:r>
           </a:p>
           <a:p>
             <a:pPr>
               <a:lnSpc>
-                <a:spcPct val="108000"/>
+                <a:spcPct val="100000"/>
+              </a:lnSpc>
+            </a:pPr>
+            <a:r>
+              <a:rPr sz="1250" b="0" i="0">
+                <a:solidFill>
+                  <a:srgbClr val="26303A"/>
+                </a:solidFill>
+                <a:latin typeface="Meiryo"/>
+                <a:ea typeface="Meiryo"/>
+              </a:rPr>
+              <a:t>　JSP．GA＋局所探索</a:t>
+            </a:r>
+          </a:p>
+          <a:p>
+            <a:pPr>
+              <a:lnSpc>
+                <a:spcPct val="100000"/>
               </a:lnSpc>
               <a:spcBef>
-                <a:spcPts val="1200"/>
+                <a:spcPts val="400"/>
               </a:spcBef>
             </a:pPr>
             <a:r>
-              <a:rPr sz="1550" b="0" i="0">
-                <a:solidFill>
-                  <a:srgbClr val="26303A"/>
-                </a:solidFill>
-                <a:latin typeface="Meiryo"/>
-                <a:ea typeface="Meiryo"/>
-              </a:rPr>
-              <a:t>→ 高安定領域の解は，</a:t>
-            </a:r>
-            <a:r>
-              <a:rPr sz="1550" b="0" i="1">
-                <a:solidFill>
-                  <a:srgbClr val="26303A"/>
-                </a:solidFill>
-                <a:latin typeface="Meiryo"/>
-                <a:ea typeface="Meiryo"/>
-              </a:rPr>
-              <a:t>S</a:t>
-            </a:r>
-            <a:r>
-              <a:rPr sz="1116" b="0" i="1" baseline="-22000">
-                <a:solidFill>
-                  <a:srgbClr val="26303A"/>
-                </a:solidFill>
-                <a:latin typeface="Meiryo"/>
-                <a:ea typeface="Meiryo"/>
-              </a:rPr>
-              <a:t>p</a:t>
-            </a:r>
-            <a:r>
-              <a:rPr sz="1550" b="0" i="0">
-                <a:solidFill>
-                  <a:srgbClr val="26303A"/>
-                </a:solidFill>
-                <a:latin typeface="Meiryo"/>
-                <a:ea typeface="Meiryo"/>
-              </a:rPr>
-              <a:t> に少しの変更を加えた解．</a:t>
+              <a:rPr sz="1350" b="1" i="0">
+                <a:solidFill>
+                  <a:srgbClr val="16385C"/>
+                </a:solidFill>
+                <a:latin typeface="Meiryo"/>
+                <a:ea typeface="Meiryo"/>
+              </a:rPr>
+              <a:t>Zhang ら (2013)</a:t>
             </a:r>
           </a:p>
           <a:p>
             <a:pPr>
               <a:lnSpc>
-                <a:spcPct val="108000"/>
+                <a:spcPct val="100000"/>
+              </a:lnSpc>
+            </a:pPr>
+            <a:r>
+              <a:rPr sz="1250" b="0" i="0">
+                <a:solidFill>
+                  <a:srgbClr val="26303A"/>
+                </a:solidFill>
+                <a:latin typeface="Meiryo"/>
+                <a:ea typeface="Meiryo"/>
+              </a:rPr>
+              <a:t>　JSP．GA＋タブーサーチ</a:t>
+            </a:r>
+          </a:p>
+          <a:p>
+            <a:pPr>
+              <a:lnSpc>
+                <a:spcPct val="100000"/>
+              </a:lnSpc>
+              <a:spcBef>
+                <a:spcPts val="400"/>
+              </a:spcBef>
+            </a:pPr>
+            <a:r>
+              <a:rPr sz="1350" b="1" i="0">
+                <a:solidFill>
+                  <a:srgbClr val="16385C"/>
+                </a:solidFill>
+                <a:latin typeface="Meiryo"/>
+                <a:ea typeface="Meiryo"/>
+              </a:rPr>
+              <a:t>Fattahi &amp; Fallahi (2010)</a:t>
+            </a:r>
+          </a:p>
+          <a:p>
+            <a:pPr>
+              <a:lnSpc>
+                <a:spcPct val="100000"/>
+              </a:lnSpc>
+            </a:pPr>
+            <a:r>
+              <a:rPr sz="1250" b="0" i="0">
+                <a:solidFill>
+                  <a:srgbClr val="26303A"/>
+                </a:solidFill>
+                <a:latin typeface="Meiryo"/>
+                <a:ea typeface="Meiryo"/>
+              </a:rPr>
+              <a:t>　FJSP．GA＋局所探索</a:t>
+            </a:r>
+          </a:p>
+          <a:p>
+            <a:pPr>
+              <a:lnSpc>
+                <a:spcPct val="100000"/>
+              </a:lnSpc>
+              <a:spcBef>
+                <a:spcPts val="400"/>
+              </a:spcBef>
+            </a:pPr>
+            <a:r>
+              <a:rPr sz="1350" b="1" i="0">
+                <a:solidFill>
+                  <a:srgbClr val="16385C"/>
+                </a:solidFill>
+                <a:latin typeface="Meiryo"/>
+                <a:ea typeface="Meiryo"/>
+              </a:rPr>
+              <a:t>Valledor ら (2022)，Luo ら (2025)</a:t>
+            </a:r>
+          </a:p>
+          <a:p>
+            <a:pPr>
+              <a:lnSpc>
+                <a:spcPct val="100000"/>
+              </a:lnSpc>
+            </a:pPr>
+            <a:r>
+              <a:rPr sz="1250" b="0" i="0">
+                <a:solidFill>
+                  <a:srgbClr val="26303A"/>
+                </a:solidFill>
+                <a:latin typeface="Meiryo"/>
+                <a:ea typeface="Meiryo"/>
+              </a:rPr>
+              <a:t>　NSGA-II 系で Pareto 支配</a:t>
+            </a:r>
+          </a:p>
+        </p:txBody>
+      </p:sp>
+      <p:sp>
+        <p:nvSpPr>
+          <p:cNvPr id="12" name="Rounded Rectangle 11"/>
+          <p:cNvSpPr/>
+          <p:nvPr/>
+        </p:nvSpPr>
+        <p:spPr>
+          <a:xfrm>
+            <a:off x="795528" y="4800600"/>
+            <a:ext cx="4888839" cy="420624"/>
+          </a:xfrm>
+          <a:prstGeom prst="roundRect">
+            <a:avLst>
+              <a:gd name="adj" fmla="val 20000"/>
+            </a:avLst>
+          </a:prstGeom>
+          <a:solidFill>
+            <a:srgbClr val="EDF2F7"/>
+          </a:solidFill>
+          <a:ln>
+            <a:noFill/>
+          </a:ln>
+          <a:effectLst/>
+        </p:spPr>
+        <p:style>
+          <a:lnRef idx="1">
+            <a:schemeClr val="accent1"/>
+          </a:lnRef>
+          <a:fillRef idx="3">
+            <a:schemeClr val="accent1"/>
+          </a:fillRef>
+          <a:effectRef idx="2">
+            <a:schemeClr val="accent1"/>
+          </a:effectRef>
+          <a:fontRef idx="minor">
+            <a:schemeClr val="lt1"/>
+          </a:fontRef>
+        </p:style>
+        <p:txBody>
+          <a:bodyPr rtlCol="0" anchor="ctr" wrap="square" lIns="54864" rIns="54864" tIns="18288" bIns="18288"/>
+          <a:lstStyle/>
+          <a:p>
+            <a:pPr algn="ctr">
+              <a:lnSpc>
+                <a:spcPct val="100000"/>
+              </a:lnSpc>
+            </a:pPr>
+            <a:r>
+              <a:rPr sz="1350" b="1" i="0">
+                <a:solidFill>
+                  <a:srgbClr val="16385C"/>
+                </a:solidFill>
+                <a:latin typeface="Meiryo"/>
+                <a:ea typeface="Meiryo"/>
+              </a:rPr>
+              <a:t>安定性は解の評価（目的関数の一項）にのみ反映</a:t>
+            </a:r>
+          </a:p>
+        </p:txBody>
+      </p:sp>
+      <p:sp>
+        <p:nvSpPr>
+          <p:cNvPr id="13" name="Rounded Rectangle 12"/>
+          <p:cNvSpPr/>
+          <p:nvPr/>
+        </p:nvSpPr>
+        <p:spPr>
+          <a:xfrm>
+            <a:off x="6278727" y="1645920"/>
+            <a:ext cx="5346039" cy="3703320"/>
+          </a:xfrm>
+          <a:prstGeom prst="roundRect">
+            <a:avLst>
+              <a:gd name="adj" fmla="val 4000"/>
+            </a:avLst>
+          </a:prstGeom>
+          <a:solidFill>
+            <a:srgbClr val="FFFFFF"/>
+          </a:solidFill>
+          <a:ln w="13970">
+            <a:solidFill>
+              <a:srgbClr val="C9D6E5"/>
+            </a:solidFill>
+          </a:ln>
+          <a:effectLst/>
+        </p:spPr>
+        <p:style>
+          <a:lnRef idx="1">
+            <a:schemeClr val="accent1"/>
+          </a:lnRef>
+          <a:fillRef idx="3">
+            <a:schemeClr val="accent1"/>
+          </a:fillRef>
+          <a:effectRef idx="2">
+            <a:schemeClr val="accent1"/>
+          </a:effectRef>
+          <a:fontRef idx="minor">
+            <a:schemeClr val="lt1"/>
+          </a:fontRef>
+        </p:style>
+        <p:txBody>
+          <a:bodyPr rtlCol="0" anchor="ctr"/>
+          <a:lstStyle/>
+          <a:p>
+            <a:pPr algn="ctr"/>
+          </a:p>
+        </p:txBody>
+      </p:sp>
+      <p:sp>
+        <p:nvSpPr>
+          <p:cNvPr id="14" name="Rectangle 13"/>
+          <p:cNvSpPr/>
+          <p:nvPr/>
+        </p:nvSpPr>
+        <p:spPr>
+          <a:xfrm>
+            <a:off x="6278727" y="1645920"/>
+            <a:ext cx="5346039" cy="502920"/>
+          </a:xfrm>
+          <a:prstGeom prst="rect">
+            <a:avLst/>
+          </a:prstGeom>
+          <a:solidFill>
+            <a:srgbClr val="16385C"/>
+          </a:solidFill>
+          <a:ln>
+            <a:noFill/>
+          </a:ln>
+          <a:effectLst/>
+        </p:spPr>
+        <p:style>
+          <a:lnRef idx="1">
+            <a:schemeClr val="accent1"/>
+          </a:lnRef>
+          <a:fillRef idx="3">
+            <a:schemeClr val="accent1"/>
+          </a:fillRef>
+          <a:effectRef idx="2">
+            <a:schemeClr val="accent1"/>
+          </a:effectRef>
+          <a:fontRef idx="minor">
+            <a:schemeClr val="lt1"/>
+          </a:fontRef>
+        </p:style>
+        <p:txBody>
+          <a:bodyPr rtlCol="0" anchor="ctr"/>
+          <a:lstStyle/>
+          <a:p>
+            <a:pPr algn="ctr"/>
+          </a:p>
+        </p:txBody>
+      </p:sp>
+      <p:sp>
+        <p:nvSpPr>
+          <p:cNvPr id="15" name="TextBox 14"/>
+          <p:cNvSpPr txBox="1"/>
+          <p:nvPr/>
+        </p:nvSpPr>
+        <p:spPr>
+          <a:xfrm>
+            <a:off x="6461607" y="1645920"/>
+            <a:ext cx="4980279" cy="502920"/>
+          </a:xfrm>
+          <a:prstGeom prst="rect">
+            <a:avLst/>
+          </a:prstGeom>
+          <a:noFill/>
+        </p:spPr>
+        <p:txBody>
+          <a:bodyPr wrap="square" anchor="ctr" lIns="18288" rIns="18288" tIns="9144" bIns="9144">
+            <a:spAutoFit/>
+          </a:bodyPr>
+          <a:lstStyle/>
+          <a:p>
+            <a:pPr algn="l">
+              <a:lnSpc>
+                <a:spcPct val="105000"/>
+              </a:lnSpc>
+            </a:pPr>
+            <a:r>
+              <a:rPr sz="1550" b="1" i="0">
+                <a:solidFill>
+                  <a:srgbClr val="FFFFFF"/>
+                </a:solidFill>
+                <a:latin typeface="Meiryo"/>
+                <a:ea typeface="Meiryo"/>
+              </a:rPr>
+              <a:t>再スケジュールの対象範囲を限定するアプローチ</a:t>
+            </a:r>
+          </a:p>
+        </p:txBody>
+      </p:sp>
+      <p:sp>
+        <p:nvSpPr>
+          <p:cNvPr id="16" name="TextBox 15"/>
+          <p:cNvSpPr txBox="1"/>
+          <p:nvPr/>
+        </p:nvSpPr>
+        <p:spPr>
+          <a:xfrm>
+            <a:off x="6507327" y="2267712"/>
+            <a:ext cx="4888839" cy="2286000"/>
+          </a:xfrm>
+          <a:prstGeom prst="rect">
+            <a:avLst/>
+          </a:prstGeom>
+          <a:noFill/>
+        </p:spPr>
+        <p:txBody>
+          <a:bodyPr wrap="square" anchor="t" lIns="18288" rIns="18288" tIns="9144" bIns="9144">
+            <a:spAutoFit/>
+          </a:bodyPr>
+          <a:lstStyle/>
+          <a:p>
+            <a:pPr>
+              <a:lnSpc>
+                <a:spcPct val="100000"/>
               </a:lnSpc>
               <a:spcBef>
                 <a:spcPts val="0"/>
               </a:spcBef>
             </a:pPr>
             <a:r>
-              <a:rPr sz="1550" b="0" i="0">
+              <a:rPr sz="1350" b="1" i="0">
+                <a:solidFill>
+                  <a:srgbClr val="16385C"/>
+                </a:solidFill>
+                <a:latin typeface="Meiryo"/>
+                <a:ea typeface="Meiryo"/>
+              </a:rPr>
+              <a:t>Bean ら (1991)</a:t>
+            </a:r>
+          </a:p>
+          <a:p>
+            <a:pPr>
+              <a:lnSpc>
+                <a:spcPct val="100000"/>
+              </a:lnSpc>
+            </a:pPr>
+            <a:r>
+              <a:rPr sz="1250" b="0" i="0">
                 <a:solidFill>
                   <a:srgbClr val="26303A"/>
                 </a:solidFill>
                 <a:latin typeface="Meiryo"/>
                 <a:ea typeface="Meiryo"/>
               </a:rPr>
-              <a:t>問われるのは，</a:t>
-            </a:r>
-            <a:r>
-              <a:rPr sz="1550" b="1" i="1">
+              <a:t>　復帰時点までを再スケジュール（match-up）</a:t>
+            </a:r>
+          </a:p>
+          <a:p>
+            <a:pPr>
+              <a:lnSpc>
+                <a:spcPct val="100000"/>
+              </a:lnSpc>
+              <a:spcBef>
+                <a:spcPts val="400"/>
+              </a:spcBef>
+            </a:pPr>
+            <a:r>
+              <a:rPr sz="1350" b="1" i="0">
                 <a:solidFill>
                   <a:srgbClr val="16385C"/>
                 </a:solidFill>
                 <a:latin typeface="Meiryo"/>
                 <a:ea typeface="Meiryo"/>
               </a:rPr>
-              <a:t>S</a:t>
-            </a:r>
-            <a:r>
-              <a:rPr sz="1116" b="1" i="1" baseline="-22000">
+              <a:t>Abumaizar &amp; Svestka (1997)</a:t>
+            </a:r>
+          </a:p>
+          <a:p>
+            <a:pPr>
+              <a:lnSpc>
+                <a:spcPct val="100000"/>
+              </a:lnSpc>
+            </a:pPr>
+            <a:r>
+              <a:rPr sz="1250" b="0" i="0">
+                <a:solidFill>
+                  <a:srgbClr val="26303A"/>
+                </a:solidFill>
+                <a:latin typeface="Meiryo"/>
+                <a:ea typeface="Meiryo"/>
+              </a:rPr>
+              <a:t>　影響を受ける作業だけを再スケジュール</a:t>
+            </a:r>
+          </a:p>
+          <a:p>
+            <a:pPr>
+              <a:lnSpc>
+                <a:spcPct val="100000"/>
+              </a:lnSpc>
+              <a:spcBef>
+                <a:spcPts val="400"/>
+              </a:spcBef>
+            </a:pPr>
+            <a:r>
+              <a:rPr sz="1350" b="1" i="0">
                 <a:solidFill>
                   <a:srgbClr val="16385C"/>
                 </a:solidFill>
                 <a:latin typeface="Meiryo"/>
                 <a:ea typeface="Meiryo"/>
               </a:rPr>
-              <a:t>p</a:t>
-            </a:r>
-            <a:r>
-              <a:rPr sz="1550" b="1" i="0">
+              <a:t>Zakaria &amp; Petrovic (2012)</a:t>
+            </a:r>
+          </a:p>
+          <a:p>
+            <a:pPr>
+              <a:lnSpc>
+                <a:spcPct val="100000"/>
+              </a:lnSpc>
+            </a:pPr>
+            <a:r>
+              <a:rPr sz="1250" b="0" i="0">
+                <a:solidFill>
+                  <a:srgbClr val="26303A"/>
+                </a:solidFill>
+                <a:latin typeface="Meiryo"/>
+                <a:ea typeface="Meiryo"/>
+              </a:rPr>
+              <a:t>　GA の染色体を区間に限定</a:t>
+            </a:r>
+          </a:p>
+          <a:p>
+            <a:pPr>
+              <a:lnSpc>
+                <a:spcPct val="100000"/>
+              </a:lnSpc>
+              <a:spcBef>
+                <a:spcPts val="400"/>
+              </a:spcBef>
+            </a:pPr>
+            <a:r>
+              <a:rPr sz="1350" b="1" i="0">
                 <a:solidFill>
                   <a:srgbClr val="16385C"/>
                 </a:solidFill>
                 <a:latin typeface="Meiryo"/>
                 <a:ea typeface="Meiryo"/>
               </a:rPr>
-              <a:t> から少しの変更で </a:t>
-            </a:r>
-            <a:r>
-              <a:rPr sz="1550" b="1" i="1">
+              <a:t>Sun ら (2026)</a:t>
+            </a:r>
+          </a:p>
+          <a:p>
+            <a:pPr>
+              <a:lnSpc>
+                <a:spcPct val="100000"/>
+              </a:lnSpc>
+            </a:pPr>
+            <a:r>
+              <a:rPr sz="1250" b="0" i="0">
+                <a:solidFill>
+                  <a:srgbClr val="26303A"/>
+                </a:solidFill>
+                <a:latin typeface="Meiryo"/>
+                <a:ea typeface="Meiryo"/>
+              </a:rPr>
+              <a:t>　再最適化の範囲を 4 段階に整理</a:t>
+            </a:r>
+          </a:p>
+        </p:txBody>
+      </p:sp>
+      <p:sp>
+        <p:nvSpPr>
+          <p:cNvPr id="17" name="Rounded Rectangle 16"/>
+          <p:cNvSpPr/>
+          <p:nvPr/>
+        </p:nvSpPr>
+        <p:spPr>
+          <a:xfrm>
+            <a:off x="6507327" y="4800600"/>
+            <a:ext cx="4888839" cy="420624"/>
+          </a:xfrm>
+          <a:prstGeom prst="roundRect">
+            <a:avLst>
+              <a:gd name="adj" fmla="val 20000"/>
+            </a:avLst>
+          </a:prstGeom>
+          <a:solidFill>
+            <a:srgbClr val="EDF2F7"/>
+          </a:solidFill>
+          <a:ln>
+            <a:noFill/>
+          </a:ln>
+          <a:effectLst/>
+        </p:spPr>
+        <p:style>
+          <a:lnRef idx="1">
+            <a:schemeClr val="accent1"/>
+          </a:lnRef>
+          <a:fillRef idx="3">
+            <a:schemeClr val="accent1"/>
+          </a:fillRef>
+          <a:effectRef idx="2">
+            <a:schemeClr val="accent1"/>
+          </a:effectRef>
+          <a:fontRef idx="minor">
+            <a:schemeClr val="lt1"/>
+          </a:fontRef>
+        </p:style>
+        <p:txBody>
+          <a:bodyPr rtlCol="0" anchor="ctr" wrap="square" lIns="54864" rIns="54864" tIns="18288" bIns="18288"/>
+          <a:lstStyle/>
+          <a:p>
+            <a:pPr algn="ctr">
+              <a:lnSpc>
+                <a:spcPct val="100000"/>
+              </a:lnSpc>
+            </a:pPr>
+            <a:r>
+              <a:rPr sz="1350" b="1" i="0">
                 <a:solidFill>
                   <a:srgbClr val="16385C"/>
                 </a:solidFill>
                 <a:latin typeface="Meiryo"/>
                 <a:ea typeface="Meiryo"/>
               </a:rPr>
-              <a:t>MS</a:t>
-            </a:r>
-            <a:r>
-              <a:rPr sz="1550" b="1" i="0">
+              <a:t>探索空間の制限で安定性を確保する</a:t>
+            </a:r>
+          </a:p>
+        </p:txBody>
+      </p:sp>
+      <p:sp>
+        <p:nvSpPr>
+          <p:cNvPr id="18" name="TextBox 17"/>
+          <p:cNvSpPr txBox="1"/>
+          <p:nvPr/>
+        </p:nvSpPr>
+        <p:spPr>
+          <a:xfrm>
+            <a:off x="566928" y="5458968"/>
+            <a:ext cx="11057839" cy="457200"/>
+          </a:xfrm>
+          <a:prstGeom prst="rect">
+            <a:avLst/>
+          </a:prstGeom>
+          <a:noFill/>
+        </p:spPr>
+        <p:txBody>
+          <a:bodyPr wrap="square" anchor="ctr" lIns="18288" rIns="18288" tIns="9144" bIns="9144">
+            <a:spAutoFit/>
+          </a:bodyPr>
+          <a:lstStyle/>
+          <a:p>
+            <a:pPr algn="ctr">
+              <a:lnSpc>
+                <a:spcPct val="105000"/>
+              </a:lnSpc>
+            </a:pPr>
+            <a:r>
+              <a:rPr sz="1900" b="0" i="0">
+                <a:solidFill>
+                  <a:srgbClr val="26303A"/>
+                </a:solidFill>
+                <a:latin typeface="Meiryo"/>
+                <a:ea typeface="Meiryo"/>
+              </a:rPr>
+              <a:t>どちらのアプローチでも，メタヒューリスティクスによる解法は GA を基軸とする</a:t>
+            </a:r>
+            <a:r>
+              <a:rPr sz="1900" b="1" i="0">
                 <a:solidFill>
                   <a:srgbClr val="16385C"/>
                 </a:solidFill>
                 <a:latin typeface="Meiryo"/>
                 <a:ea typeface="Meiryo"/>
               </a:rPr>
-              <a:t> をどこまで下げられるか</a:t>
+              <a:t>多点探索に集中</a:t>
+            </a:r>
+          </a:p>
+        </p:txBody>
+      </p:sp>
+      <p:sp>
+        <p:nvSpPr>
+          <p:cNvPr id="19" name="TextBox 18"/>
+          <p:cNvSpPr txBox="1"/>
+          <p:nvPr/>
+        </p:nvSpPr>
+        <p:spPr>
+          <a:xfrm>
+            <a:off x="566928" y="5916168"/>
+            <a:ext cx="11057839" cy="347472"/>
+          </a:xfrm>
+          <a:prstGeom prst="rect">
+            <a:avLst/>
+          </a:prstGeom>
+          <a:noFill/>
+        </p:spPr>
+        <p:txBody>
+          <a:bodyPr wrap="square" anchor="ctr" lIns="18288" rIns="18288" tIns="9144" bIns="9144">
+            <a:spAutoFit/>
+          </a:bodyPr>
+          <a:lstStyle/>
+          <a:p>
+            <a:pPr algn="ctr"/>
+            <a:r>
+              <a:rPr sz="1400" b="1" i="0">
+                <a:solidFill>
+                  <a:srgbClr val="E06C00"/>
+                </a:solidFill>
+                <a:latin typeface="Meiryo"/>
+                <a:ea typeface="Meiryo"/>
+              </a:rPr>
+              <a:t>単点探索</a:t>
+            </a:r>
+            <a:r>
+              <a:rPr sz="1400" b="0" i="0">
+                <a:solidFill>
+                  <a:srgbClr val="26303A"/>
+                </a:solidFill>
+                <a:latin typeface="Meiryo"/>
+                <a:ea typeface="Meiryo"/>
+              </a:rPr>
+              <a:t>：1 つの解を少しずつ変更しながら進む　／　</a:t>
+            </a:r>
+            <a:r>
+              <a:rPr sz="1400" b="1" i="0">
+                <a:solidFill>
+                  <a:srgbClr val="0F5C28"/>
+                </a:solidFill>
+                <a:latin typeface="Meiryo"/>
+                <a:ea typeface="Meiryo"/>
+              </a:rPr>
+              <a:t>多点探索</a:t>
+            </a:r>
+            <a:r>
+              <a:rPr sz="1400" b="0" i="0">
+                <a:solidFill>
+                  <a:srgbClr val="26303A"/>
+                </a:solidFill>
+                <a:latin typeface="Meiryo"/>
+                <a:ea typeface="Meiryo"/>
+              </a:rPr>
+              <a:t>：複数の解を保持し，互いに組み替えながら進む</a:t>
+            </a:r>
+            <a:r>
+              <a:rPr sz="1100" b="0" i="0">
+                <a:solidFill>
+                  <a:srgbClr val="6E7A88"/>
+                </a:solidFill>
+                <a:latin typeface="Meiryo"/>
+                <a:ea typeface="Meiryo"/>
+              </a:rPr>
+              <a:t>（Blum &amp; Roli, 2003）</a:t>
             </a:r>
           </a:p>
         </p:txBody>

--- a/doc/presentation_materials/JIMA2026fall_発表.pptx
+++ b/doc/presentation_materials/JIMA2026fall_発表.pptx
@@ -3228,7 +3228,7 @@
               </a:lnSpc>
             </a:pPr>
             <a:r>
-              <a:rPr sz="3000" b="1" i="0">
+              <a:rPr sz="3000" b="1" i="0" lang="ja-JP">
                 <a:solidFill>
                   <a:srgbClr val="FFFFFF"/>
                 </a:solidFill>
@@ -3245,7 +3245,7 @@
               </a:lnSpc>
             </a:pPr>
             <a:r>
-              <a:rPr sz="3000" b="1" i="0">
+              <a:rPr sz="3000" b="1" i="0" lang="ja-JP">
                 <a:solidFill>
                   <a:srgbClr val="FFFFFF"/>
                 </a:solidFill>
@@ -3321,7 +3321,7 @@
               </a:spcBef>
             </a:pPr>
             <a:r>
-              <a:rPr sz="1500" b="0" i="0">
+              <a:rPr sz="1500" b="0" i="0" lang="ja-JP">
                 <a:solidFill>
                   <a:srgbClr val="AFC2D8"/>
                 </a:solidFill>
@@ -3338,7 +3338,7 @@
               </a:spcBef>
             </a:pPr>
             <a:r>
-              <a:rPr sz="1900" b="1" i="0">
+              <a:rPr sz="1900" b="1" i="0" lang="ja-JP">
                 <a:solidFill>
                   <a:srgbClr val="FFFFFF"/>
                 </a:solidFill>
@@ -3355,7 +3355,7 @@
               </a:spcBef>
             </a:pPr>
             <a:r>
-              <a:rPr sz="1250" b="0" i="0">
+              <a:rPr sz="1250" b="0" i="0" lang="ja-JP">
                 <a:solidFill>
                   <a:srgbClr val="8CA3C0"/>
                 </a:solidFill>
@@ -3452,7 +3452,7 @@
           <a:lstStyle/>
           <a:p>
             <a:r>
-              <a:rPr sz="3000" b="1" i="0">
+              <a:rPr sz="3000" b="1" i="0" lang="ja-JP">
                 <a:solidFill>
                   <a:srgbClr val="3E618C"/>
                 </a:solidFill>
@@ -3487,7 +3487,7 @@
           <a:lstStyle/>
           <a:p>
             <a:r>
-              <a:rPr sz="2000" b="0" i="0">
+              <a:rPr sz="2000" b="0" i="0" lang="ja-JP">
                 <a:solidFill>
                   <a:srgbClr val="3E618C"/>
                 </a:solidFill>
@@ -3570,7 +3570,7 @@
           <a:lstStyle/>
           <a:p>
             <a:r>
-              <a:rPr sz="4000" b="1" i="0">
+              <a:rPr sz="4000" b="1" i="0" lang="ja-JP">
                 <a:solidFill>
                   <a:srgbClr val="FFFFFF"/>
                 </a:solidFill>
@@ -3605,7 +3605,7 @@
           <a:lstStyle/>
           <a:p>
             <a:r>
-              <a:rPr sz="2600" b="1" i="0">
+              <a:rPr sz="2600" b="1" i="0" lang="ja-JP">
                 <a:solidFill>
                   <a:srgbClr val="FFFFFF"/>
                 </a:solidFill>
@@ -3622,7 +3622,7 @@
               </a:spcBef>
             </a:pPr>
             <a:r>
-              <a:rPr sz="1300" b="0" i="0">
+              <a:rPr sz="1300" b="0" i="0" lang="ja-JP">
                 <a:solidFill>
                   <a:srgbClr val="AFC2D8"/>
                 </a:solidFill>
@@ -3657,7 +3657,7 @@
           <a:lstStyle/>
           <a:p>
             <a:r>
-              <a:rPr sz="3000" b="1" i="0">
+              <a:rPr sz="3000" b="1" i="0" lang="ja-JP">
                 <a:solidFill>
                   <a:srgbClr val="3E618C"/>
                 </a:solidFill>
@@ -3692,7 +3692,7 @@
           <a:lstStyle/>
           <a:p>
             <a:r>
-              <a:rPr sz="2000" b="0" i="0">
+              <a:rPr sz="2000" b="0" i="0" lang="ja-JP">
                 <a:solidFill>
                   <a:srgbClr val="3E618C"/>
                 </a:solidFill>
@@ -3727,7 +3727,7 @@
           <a:lstStyle/>
           <a:p>
             <a:r>
-              <a:rPr sz="3000" b="1" i="0">
+              <a:rPr sz="3000" b="1" i="0" lang="ja-JP">
                 <a:solidFill>
                   <a:srgbClr val="3E618C"/>
                 </a:solidFill>
@@ -3762,7 +3762,7 @@
           <a:lstStyle/>
           <a:p>
             <a:r>
-              <a:rPr sz="2000" b="0" i="0">
+              <a:rPr sz="2000" b="0" i="0" lang="ja-JP">
                 <a:solidFill>
                   <a:srgbClr val="3E618C"/>
                 </a:solidFill>
@@ -3798,7 +3798,7 @@
           <a:p>
             <a:pPr algn="r"/>
             <a:r>
-              <a:rPr sz="1000" b="0" i="0">
+              <a:rPr sz="1000" b="0" i="0" lang="ja-JP">
                 <a:solidFill>
                   <a:srgbClr val="AFC2D8"/>
                 </a:solidFill>
@@ -3851,7 +3851,7 @@
           <a:lstStyle/>
           <a:p>
             <a:r>
-              <a:rPr sz="2450" b="1" i="0">
+              <a:rPr sz="2450" b="1" i="0" lang="ja-JP">
                 <a:solidFill>
                   <a:srgbClr val="16385C"/>
                 </a:solidFill>
@@ -3971,7 +3971,7 @@
               </a:lnSpc>
             </a:pPr>
             <a:r>
-              <a:rPr sz="1500" b="1" i="0">
+              <a:rPr sz="1500" b="1" i="0" lang="ja-JP">
                 <a:solidFill>
                   <a:srgbClr val="16385C"/>
                 </a:solidFill>
@@ -4006,7 +4006,7 @@
           <a:lstStyle/>
           <a:p>
             <a:r>
-              <a:rPr sz="900" b="0" i="0">
+              <a:rPr sz="900" b="0" i="0" lang="ja-JP">
                 <a:solidFill>
                   <a:srgbClr val="6E7A88"/>
                 </a:solidFill>
@@ -4042,7 +4042,7 @@
           <a:p>
             <a:pPr algn="r"/>
             <a:r>
-              <a:rPr sz="1000" b="0" i="0">
+              <a:rPr sz="1000" b="0" i="0" lang="ja-JP">
                 <a:solidFill>
                   <a:srgbClr val="6E7A88"/>
                 </a:solidFill>
@@ -4085,7 +4085,7 @@
               </a:spcBef>
             </a:pPr>
             <a:r>
-              <a:rPr sz="1200" b="1" i="0">
+              <a:rPr sz="1200" b="1" i="0" lang="ja-JP">
                 <a:solidFill>
                   <a:srgbClr val="16385C"/>
                 </a:solidFill>
@@ -4095,7 +4095,7 @@
               <a:t>▪ </a:t>
             </a:r>
             <a:r>
-              <a:rPr sz="1500" b="0" i="1">
+              <a:rPr sz="1500" b="0" i="1" lang="ja-JP">
                 <a:solidFill>
                   <a:srgbClr val="26303A"/>
                 </a:solidFill>
@@ -4105,7 +4105,7 @@
               <a:t>n</a:t>
             </a:r>
             <a:r>
-              <a:rPr sz="1500" b="0" i="0">
+              <a:rPr sz="1500" b="0" i="0" lang="ja-JP">
                 <a:solidFill>
                   <a:srgbClr val="26303A"/>
                 </a:solidFill>
@@ -4115,7 +4115,7 @@
               <a:t> ジョブ・</a:t>
             </a:r>
             <a:r>
-              <a:rPr sz="1500" b="0" i="1">
+              <a:rPr sz="1500" b="0" i="1" lang="ja-JP">
                 <a:solidFill>
                   <a:srgbClr val="26303A"/>
                 </a:solidFill>
@@ -4125,7 +4125,7 @@
               <a:t>m</a:t>
             </a:r>
             <a:r>
-              <a:rPr sz="1500" b="0" i="0">
+              <a:rPr sz="1500" b="0" i="0" lang="ja-JP">
                 <a:solidFill>
                   <a:srgbClr val="26303A"/>
                 </a:solidFill>
@@ -4135,7 +4135,7 @@
               <a:t> 機械のジョブショップ問題（JSP）に，単一作業の遅延（遅延量 </a:t>
             </a:r>
             <a:r>
-              <a:rPr sz="1500" b="0" i="1">
+              <a:rPr sz="1500" b="0" i="1" lang="ja-JP">
                 <a:solidFill>
                   <a:srgbClr val="26303A"/>
                 </a:solidFill>
@@ -4145,7 +4145,7 @@
               <a:t>Δ</a:t>
             </a:r>
             <a:r>
-              <a:rPr sz="1500" b="0" i="0">
+              <a:rPr sz="1500" b="0" i="0" lang="ja-JP">
                 <a:solidFill>
                   <a:srgbClr val="26303A"/>
                 </a:solidFill>
@@ -4165,7 +4165,7 @@
               </a:spcBef>
             </a:pPr>
             <a:r>
-              <a:rPr sz="1200" b="1" i="0">
+              <a:rPr sz="1200" b="1" i="0" lang="ja-JP">
                 <a:solidFill>
                   <a:srgbClr val="16385C"/>
                 </a:solidFill>
@@ -4175,7 +4175,7 @@
               <a:t>▪ </a:t>
             </a:r>
             <a:r>
-              <a:rPr sz="1500" b="0" i="0">
+              <a:rPr sz="1500" b="0" i="0" lang="ja-JP">
                 <a:solidFill>
                   <a:srgbClr val="26303A"/>
                 </a:solidFill>
@@ -4185,7 +4185,7 @@
               <a:t>再スケジューリング時刻 </a:t>
             </a:r>
             <a:r>
-              <a:rPr sz="1500" b="0" i="1">
+              <a:rPr sz="1500" b="0" i="1" lang="ja-JP">
                 <a:solidFill>
                   <a:srgbClr val="26303A"/>
                 </a:solidFill>
@@ -4195,7 +4195,7 @@
               <a:t>t</a:t>
             </a:r>
             <a:r>
-              <a:rPr sz="1080" b="0" i="1" baseline="-22000">
+              <a:rPr sz="1080" b="0" i="1" lang="ja-JP" baseline="-22000">
                 <a:solidFill>
                   <a:srgbClr val="26303A"/>
                 </a:solidFill>
@@ -4205,7 +4205,7 @@
               <a:t>r</a:t>
             </a:r>
             <a:r>
-              <a:rPr sz="1500" b="0" i="0">
+              <a:rPr sz="1500" b="0" i="0" lang="ja-JP">
                 <a:solidFill>
                   <a:srgbClr val="26303A"/>
                 </a:solidFill>
@@ -4215,7 +4215,7 @@
               <a:t> より前に開始した作業は凍結し，以降の作業集合 </a:t>
             </a:r>
             <a:r>
-              <a:rPr sz="1500" b="0" i="1">
+              <a:rPr sz="1500" b="0" i="1" lang="ja-JP">
                 <a:solidFill>
                   <a:srgbClr val="26303A"/>
                 </a:solidFill>
@@ -4225,7 +4225,7 @@
               <a:t>O</a:t>
             </a:r>
             <a:r>
-              <a:rPr sz="1080" b="0" i="1" baseline="-22000">
+              <a:rPr sz="1080" b="0" i="1" lang="ja-JP" baseline="-22000">
                 <a:solidFill>
                   <a:srgbClr val="26303A"/>
                 </a:solidFill>
@@ -4235,7 +4235,7 @@
               <a:t>opt</a:t>
             </a:r>
             <a:r>
-              <a:rPr sz="1500" b="0" i="0">
+              <a:rPr sz="1500" b="0" i="0" lang="ja-JP">
                 <a:solidFill>
                   <a:srgbClr val="26303A"/>
                 </a:solidFill>
@@ -4245,7 +4245,7 @@
               <a:t> の</a:t>
             </a:r>
             <a:r>
-              <a:rPr sz="1500" b="1" i="0">
+              <a:rPr sz="1500" b="1" i="0" lang="ja-JP">
                 <a:solidFill>
                   <a:srgbClr val="16385C"/>
                 </a:solidFill>
@@ -4255,7 +4255,7 @@
               <a:t>機械ごとの処理順序</a:t>
             </a:r>
             <a:r>
-              <a:rPr sz="1500" b="0" i="0">
+              <a:rPr sz="1500" b="0" i="0" lang="ja-JP">
                 <a:solidFill>
                   <a:srgbClr val="26303A"/>
                 </a:solidFill>
@@ -4275,7 +4275,7 @@
               </a:spcBef>
             </a:pPr>
             <a:r>
-              <a:rPr sz="1200" b="1" i="0">
+              <a:rPr sz="1200" b="1" i="0" lang="ja-JP">
                 <a:solidFill>
                   <a:srgbClr val="16385C"/>
                 </a:solidFill>
@@ -4285,7 +4285,7 @@
               <a:t>▪ </a:t>
             </a:r>
             <a:r>
-              <a:rPr sz="1500" b="0" i="0">
+              <a:rPr sz="1500" b="0" i="0" lang="ja-JP">
                 <a:solidFill>
                   <a:srgbClr val="26303A"/>
                 </a:solidFill>
@@ -4295,7 +4295,7 @@
               <a:t>安定性は</a:t>
             </a:r>
             <a:r>
-              <a:rPr sz="1500" b="1" i="0">
+              <a:rPr sz="1500" b="1" i="0" lang="ja-JP">
                 <a:solidFill>
                   <a:srgbClr val="16385C"/>
                 </a:solidFill>
@@ -4305,7 +4305,7 @@
               <a:t>処理順序の変更量</a:t>
             </a:r>
             <a:r>
-              <a:rPr sz="1500" b="0" i="0">
+              <a:rPr sz="1500" b="0" i="0" lang="ja-JP">
                 <a:solidFill>
                   <a:srgbClr val="26303A"/>
                 </a:solidFill>
@@ -4315,7 +4315,7 @@
               <a:t>で測る（順序偏差 </a:t>
             </a:r>
             <a:r>
-              <a:rPr sz="1500" b="0" i="1">
+              <a:rPr sz="1500" b="0" i="1" lang="ja-JP">
                 <a:solidFill>
                   <a:srgbClr val="26303A"/>
                 </a:solidFill>
@@ -4325,7 +4325,7 @@
               <a:t>D</a:t>
             </a:r>
             <a:r>
-              <a:rPr sz="1500" b="0" i="0">
+              <a:rPr sz="1500" b="0" i="0" lang="ja-JP">
                 <a:solidFill>
                   <a:srgbClr val="26303A"/>
                 </a:solidFill>
@@ -4353,8 +4353,8 @@
         </p:blipFill>
         <p:spPr>
           <a:xfrm>
-            <a:off x="2131904" y="4023360"/>
-            <a:ext cx="2905086" cy="566928"/>
+            <a:off x="2180312" y="4023360"/>
+            <a:ext cx="2808271" cy="566928"/>
           </a:xfrm>
           <a:prstGeom prst="rect">
             <a:avLst/>
@@ -4385,7 +4385,7 @@
           <a:p>
             <a:pPr algn="r"/>
             <a:r>
-              <a:rPr sz="1300" b="0" i="0">
+              <a:rPr sz="1300" b="0" i="0" lang="ja-JP">
                 <a:solidFill>
                   <a:srgbClr val="26303A"/>
                 </a:solidFill>
@@ -4425,7 +4425,7 @@
               </a:lnSpc>
             </a:pPr>
             <a:r>
-              <a:rPr sz="1250" b="0" i="1">
+              <a:rPr sz="1250" b="0" i="1" lang="ja-JP">
                 <a:solidFill>
                   <a:srgbClr val="6E7A88"/>
                 </a:solidFill>
@@ -4435,7 +4435,7 @@
               <a:t>r</a:t>
             </a:r>
             <a:r>
-              <a:rPr sz="900" b="0" i="1" baseline="-22000">
+              <a:rPr sz="900" b="0" i="1" lang="ja-JP" baseline="-22000">
                 <a:solidFill>
                   <a:srgbClr val="6E7A88"/>
                 </a:solidFill>
@@ -4445,7 +4445,7 @@
               <a:t>i,j</a:t>
             </a:r>
             <a:r>
-              <a:rPr sz="1250" b="0" i="0">
+              <a:rPr sz="1250" b="0" i="0" lang="ja-JP">
                 <a:solidFill>
                   <a:srgbClr val="6E7A88"/>
                 </a:solidFill>
@@ -4455,7 +4455,7 @@
               <a:t>：機械 </a:t>
             </a:r>
             <a:r>
-              <a:rPr sz="1250" b="0" i="1">
+              <a:rPr sz="1250" b="0" i="1" lang="ja-JP">
                 <a:solidFill>
                   <a:srgbClr val="6E7A88"/>
                 </a:solidFill>
@@ -4465,7 +4465,7 @@
               <a:t>i</a:t>
             </a:r>
             <a:r>
-              <a:rPr sz="1250" b="0" i="0">
+              <a:rPr sz="1250" b="0" i="0" lang="ja-JP">
                 <a:solidFill>
                   <a:srgbClr val="6E7A88"/>
                 </a:solidFill>
@@ -4475,7 +4475,7 @@
               <a:t> におけるジョブ </a:t>
             </a:r>
             <a:r>
-              <a:rPr sz="1250" b="0" i="1">
+              <a:rPr sz="1250" b="0" i="1" lang="ja-JP">
                 <a:solidFill>
                   <a:srgbClr val="6E7A88"/>
                 </a:solidFill>
@@ -4485,7 +4485,7 @@
               <a:t>j</a:t>
             </a:r>
             <a:r>
-              <a:rPr sz="1250" b="0" i="0">
+              <a:rPr sz="1250" b="0" i="0" lang="ja-JP">
                 <a:solidFill>
                   <a:srgbClr val="6E7A88"/>
                 </a:solidFill>
@@ -4528,7 +4528,7 @@
               </a:spcBef>
             </a:pPr>
             <a:r>
-              <a:rPr sz="1200" b="1" i="0">
+              <a:rPr sz="1200" b="1" i="0" lang="ja-JP">
                 <a:solidFill>
                   <a:srgbClr val="16385C"/>
                 </a:solidFill>
@@ -4538,7 +4538,7 @@
               <a:t>▪ </a:t>
             </a:r>
             <a:r>
-              <a:rPr sz="1500" b="0" i="0">
+              <a:rPr sz="1500" b="0" i="0" lang="ja-JP">
                 <a:solidFill>
                   <a:srgbClr val="26303A"/>
                 </a:solidFill>
@@ -4548,7 +4548,7 @@
               <a:t>二目的（</a:t>
             </a:r>
             <a:r>
-              <a:rPr sz="1500" b="0" i="1">
+              <a:rPr sz="1500" b="0" i="1" lang="ja-JP">
                 <a:solidFill>
                   <a:srgbClr val="26303A"/>
                 </a:solidFill>
@@ -4558,7 +4558,7 @@
               <a:t>MS</a:t>
             </a:r>
             <a:r>
-              <a:rPr sz="1500" b="0" i="0">
+              <a:rPr sz="1500" b="0" i="0" lang="ja-JP">
                 <a:solidFill>
                   <a:srgbClr val="26303A"/>
                 </a:solidFill>
@@ -4568,7 +4568,7 @@
               <a:t>, </a:t>
             </a:r>
             <a:r>
-              <a:rPr sz="1500" b="0" i="1">
+              <a:rPr sz="1500" b="0" i="1" lang="ja-JP">
                 <a:solidFill>
                   <a:srgbClr val="26303A"/>
                 </a:solidFill>
@@ -4578,7 +4578,7 @@
               <a:t>D</a:t>
             </a:r>
             <a:r>
-              <a:rPr sz="1500" b="0" i="0">
+              <a:rPr sz="1500" b="0" i="0" lang="ja-JP">
                 <a:solidFill>
                   <a:srgbClr val="26303A"/>
                 </a:solidFill>
@@ -4588,7 +4588,7 @@
               <a:t>）は重み付き和 </a:t>
             </a:r>
             <a:r>
-              <a:rPr sz="1500" b="0" i="1">
+              <a:rPr sz="1500" b="0" i="1" lang="ja-JP">
                 <a:solidFill>
                   <a:srgbClr val="26303A"/>
                 </a:solidFill>
@@ -4598,7 +4598,7 @@
               <a:t>F</a:t>
             </a:r>
             <a:r>
-              <a:rPr sz="1500" b="0" i="0">
+              <a:rPr sz="1500" b="0" i="0" lang="ja-JP">
                 <a:solidFill>
                   <a:srgbClr val="26303A"/>
                 </a:solidFill>
@@ -4608,7 +4608,7 @@
               <a:t> にまとめ，重み </a:t>
             </a:r>
             <a:r>
-              <a:rPr sz="1500" b="0" i="1">
+              <a:rPr sz="1500" b="0" i="1" lang="ja-JP">
                 <a:solidFill>
                   <a:srgbClr val="26303A"/>
                 </a:solidFill>
@@ -4618,7 +4618,7 @@
               <a:t>λ</a:t>
             </a:r>
             <a:r>
-              <a:rPr sz="1500" b="0" i="0">
+              <a:rPr sz="1500" b="0" i="0" lang="ja-JP">
                 <a:solidFill>
                   <a:srgbClr val="26303A"/>
                 </a:solidFill>
@@ -4706,7 +4706,7 @@
               </a:lnSpc>
             </a:pPr>
             <a:r>
-              <a:rPr sz="1400" b="1" i="0">
+              <a:rPr sz="1400" b="1" i="0" lang="ja-JP">
                 <a:solidFill>
                   <a:srgbClr val="16385C"/>
                 </a:solidFill>
@@ -4746,7 +4746,7 @@
               </a:lnSpc>
             </a:pPr>
             <a:r>
-              <a:rPr sz="1500" b="1" i="1">
+              <a:rPr sz="1500" b="1" i="1" lang="ja-JP">
                 <a:solidFill>
                   <a:srgbClr val="26303A"/>
                 </a:solidFill>
@@ -4756,7 +4756,7 @@
               <a:t>S</a:t>
             </a:r>
             <a:r>
-              <a:rPr sz="1080" b="1" i="1" baseline="-22000">
+              <a:rPr sz="1080" b="1" i="1" lang="ja-JP" baseline="-22000">
                 <a:solidFill>
                   <a:srgbClr val="26303A"/>
                 </a:solidFill>
@@ -4816,7 +4816,7 @@
               </a:lnSpc>
             </a:pPr>
             <a:r>
-              <a:rPr sz="1350" b="1" i="0">
+              <a:rPr sz="1350" b="1" i="0" lang="ja-JP">
                 <a:solidFill>
                   <a:srgbClr val="FFFFFF"/>
                 </a:solidFill>
@@ -4856,7 +4856,7 @@
               </a:lnSpc>
             </a:pPr>
             <a:r>
-              <a:rPr sz="1050" b="0" i="0">
+              <a:rPr sz="1050" b="0" i="0" lang="ja-JP">
                 <a:solidFill>
                   <a:srgbClr val="6E7A88"/>
                 </a:solidFill>
@@ -4916,7 +4916,7 @@
               </a:lnSpc>
             </a:pPr>
             <a:r>
-              <a:rPr sz="1350" b="1" i="0">
+              <a:rPr sz="1350" b="1" i="0" lang="ja-JP">
                 <a:solidFill>
                   <a:srgbClr val="FFFFFF"/>
                 </a:solidFill>
@@ -4956,7 +4956,7 @@
               </a:lnSpc>
             </a:pPr>
             <a:r>
-              <a:rPr sz="1050" b="0" i="0">
+              <a:rPr sz="1050" b="0" i="0" lang="ja-JP">
                 <a:solidFill>
                   <a:srgbClr val="6E7A88"/>
                 </a:solidFill>
@@ -5016,7 +5016,7 @@
               </a:lnSpc>
             </a:pPr>
             <a:r>
-              <a:rPr sz="1350" b="1" i="0">
+              <a:rPr sz="1350" b="1" i="0" lang="ja-JP">
                 <a:solidFill>
                   <a:srgbClr val="FFFFFF"/>
                 </a:solidFill>
@@ -5056,7 +5056,7 @@
               </a:lnSpc>
             </a:pPr>
             <a:r>
-              <a:rPr sz="1050" b="0" i="0">
+              <a:rPr sz="1050" b="0" i="0" lang="ja-JP">
                 <a:solidFill>
                   <a:srgbClr val="6E7A88"/>
                 </a:solidFill>
@@ -5116,7 +5116,7 @@
               </a:lnSpc>
             </a:pPr>
             <a:r>
-              <a:rPr sz="1350" b="1" i="0">
+              <a:rPr sz="1350" b="1" i="0" lang="ja-JP">
                 <a:solidFill>
                   <a:srgbClr val="FFFFFF"/>
                 </a:solidFill>
@@ -5156,7 +5156,7 @@
               </a:lnSpc>
             </a:pPr>
             <a:r>
-              <a:rPr sz="1050" b="0" i="0">
+              <a:rPr sz="1050" b="0" i="0" lang="ja-JP">
                 <a:solidFill>
                   <a:srgbClr val="6E7A88"/>
                 </a:solidFill>
@@ -5196,7 +5196,7 @@
               </a:lnSpc>
             </a:pPr>
             <a:r>
-              <a:rPr sz="1500" b="1" i="1">
+              <a:rPr sz="1500" b="1" i="1" lang="ja-JP">
                 <a:solidFill>
                   <a:srgbClr val="26303A"/>
                 </a:solidFill>
@@ -5206,7 +5206,7 @@
               <a:t>S</a:t>
             </a:r>
             <a:r>
-              <a:rPr sz="1080" b="1" i="1" baseline="-22000">
+              <a:rPr sz="1080" b="1" i="1" lang="ja-JP" baseline="-22000">
                 <a:solidFill>
                   <a:srgbClr val="26303A"/>
                 </a:solidFill>
@@ -5266,7 +5266,7 @@
               </a:lnSpc>
             </a:pPr>
             <a:r>
-              <a:rPr sz="1350" b="1" i="0">
+              <a:rPr sz="1350" b="1" i="0" lang="ja-JP">
                 <a:solidFill>
                   <a:srgbClr val="FFFFFF"/>
                 </a:solidFill>
@@ -5306,7 +5306,7 @@
               </a:lnSpc>
             </a:pPr>
             <a:r>
-              <a:rPr sz="1050" b="0" i="0">
+              <a:rPr sz="1050" b="0" i="0" lang="ja-JP">
                 <a:solidFill>
                   <a:srgbClr val="6E7A88"/>
                 </a:solidFill>
@@ -5366,7 +5366,7 @@
               </a:lnSpc>
             </a:pPr>
             <a:r>
-              <a:rPr sz="1350" b="1" i="0">
+              <a:rPr sz="1350" b="1" i="0" lang="ja-JP">
                 <a:solidFill>
                   <a:srgbClr val="FFFFFF"/>
                 </a:solidFill>
@@ -5406,7 +5406,7 @@
               </a:lnSpc>
             </a:pPr>
             <a:r>
-              <a:rPr sz="1050" b="0" i="0">
+              <a:rPr sz="1050" b="0" i="0" lang="ja-JP">
                 <a:solidFill>
                   <a:srgbClr val="6E7A88"/>
                 </a:solidFill>
@@ -5466,7 +5466,7 @@
               </a:lnSpc>
             </a:pPr>
             <a:r>
-              <a:rPr sz="1350" b="1" i="0">
+              <a:rPr sz="1350" b="1" i="0" lang="ja-JP">
                 <a:solidFill>
                   <a:srgbClr val="FFFFFF"/>
                 </a:solidFill>
@@ -5506,7 +5506,7 @@
               </a:lnSpc>
             </a:pPr>
             <a:r>
-              <a:rPr sz="1050" b="0" i="0">
+              <a:rPr sz="1050" b="0" i="0" lang="ja-JP">
                 <a:solidFill>
                   <a:srgbClr val="6E7A88"/>
                 </a:solidFill>
@@ -5566,7 +5566,7 @@
               </a:lnSpc>
             </a:pPr>
             <a:r>
-              <a:rPr sz="1350" b="1" i="0">
+              <a:rPr sz="1350" b="1" i="0" lang="ja-JP">
                 <a:solidFill>
                   <a:srgbClr val="FFFFFF"/>
                 </a:solidFill>
@@ -5606,7 +5606,7 @@
               </a:lnSpc>
             </a:pPr>
             <a:r>
-              <a:rPr sz="1050" b="0" i="0">
+              <a:rPr sz="1050" b="0" i="0" lang="ja-JP">
                 <a:solidFill>
                   <a:srgbClr val="6E7A88"/>
                 </a:solidFill>
@@ -5792,7 +5792,7 @@
               </a:lnSpc>
             </a:pPr>
             <a:r>
-              <a:rPr sz="1600" b="0" i="1">
+              <a:rPr sz="1600" b="0" i="1" lang="ja-JP">
                 <a:solidFill>
                   <a:srgbClr val="26303A"/>
                 </a:solidFill>
@@ -5802,7 +5802,7 @@
               <a:t>D</a:t>
             </a:r>
             <a:r>
-              <a:rPr sz="1600" b="0" i="0">
+              <a:rPr sz="1600" b="0" i="0" lang="ja-JP">
                 <a:solidFill>
                   <a:srgbClr val="26303A"/>
                 </a:solidFill>
@@ -5812,7 +5812,7 @@
               <a:t> = |2−4| ＋ |4−2| = </a:t>
             </a:r>
             <a:r>
-              <a:rPr sz="1600" b="1" i="0">
+              <a:rPr sz="1600" b="1" i="0" lang="ja-JP">
                 <a:solidFill>
                   <a:srgbClr val="B03A2E"/>
                 </a:solidFill>
@@ -5852,7 +5852,7 @@
               </a:lnSpc>
             </a:pPr>
             <a:r>
-              <a:rPr sz="1300" b="0" i="0">
+              <a:rPr sz="1300" b="0" i="0" lang="ja-JP">
                 <a:solidFill>
                   <a:srgbClr val="6E7A88"/>
                 </a:solidFill>
@@ -5862,7 +5862,7 @@
               <a:t>初期解 </a:t>
             </a:r>
             <a:r>
-              <a:rPr sz="1300" b="0" i="1">
+              <a:rPr sz="1300" b="0" i="1" lang="ja-JP">
                 <a:solidFill>
                   <a:srgbClr val="6E7A88"/>
                 </a:solidFill>
@@ -5872,7 +5872,7 @@
               <a:t>S</a:t>
             </a:r>
             <a:r>
-              <a:rPr sz="936" b="0" i="1" baseline="-22000">
+              <a:rPr sz="936" b="0" i="1" lang="ja-JP" baseline="-22000">
                 <a:solidFill>
                   <a:srgbClr val="6E7A88"/>
                 </a:solidFill>
@@ -5882,7 +5882,7 @@
               <a:t>p</a:t>
             </a:r>
             <a:r>
-              <a:rPr sz="1300" b="0" i="0">
+              <a:rPr sz="1300" b="0" i="0" lang="ja-JP">
                 <a:solidFill>
                   <a:srgbClr val="6E7A88"/>
                 </a:solidFill>
@@ -5892,7 +5892,7 @@
               <a:t> は </a:t>
             </a:r>
             <a:r>
-              <a:rPr sz="1300" b="0" i="1">
+              <a:rPr sz="1300" b="0" i="1" lang="ja-JP">
                 <a:solidFill>
                   <a:srgbClr val="6E7A88"/>
                 </a:solidFill>
@@ -5902,7 +5902,7 @@
               <a:t>D</a:t>
             </a:r>
             <a:r>
-              <a:rPr sz="1300" b="0" i="0">
+              <a:rPr sz="1300" b="0" i="0" lang="ja-JP">
                 <a:solidFill>
                   <a:srgbClr val="6E7A88"/>
                 </a:solidFill>
@@ -5955,7 +5955,7 @@
           <a:lstStyle/>
           <a:p>
             <a:r>
-              <a:rPr sz="2450" b="1" i="0">
+              <a:rPr sz="2450" b="1" i="0" lang="ja-JP">
                 <a:solidFill>
                   <a:srgbClr val="16385C"/>
                 </a:solidFill>
@@ -6075,7 +6075,7 @@
               </a:lnSpc>
             </a:pPr>
             <a:r>
-              <a:rPr sz="1500" b="1" i="0">
+              <a:rPr sz="1500" b="1" i="0" lang="ja-JP">
                 <a:solidFill>
                   <a:srgbClr val="16385C"/>
                 </a:solidFill>
@@ -6110,7 +6110,7 @@
           <a:lstStyle/>
           <a:p>
             <a:r>
-              <a:rPr sz="900" b="0" i="0">
+              <a:rPr sz="900" b="0" i="0" lang="ja-JP">
                 <a:solidFill>
                   <a:srgbClr val="6E7A88"/>
                 </a:solidFill>
@@ -6146,7 +6146,7 @@
           <a:p>
             <a:pPr algn="r"/>
             <a:r>
-              <a:rPr sz="1000" b="0" i="0">
+              <a:rPr sz="1000" b="0" i="0" lang="ja-JP">
                 <a:solidFill>
                   <a:srgbClr val="6E7A88"/>
                 </a:solidFill>
@@ -6297,7 +6297,7 @@
           <a:lstStyle/>
           <a:p>
             <a:r>
-              <a:rPr sz="1350" b="1" i="0">
+              <a:rPr sz="1350" b="1" i="0" lang="ja-JP">
                 <a:solidFill>
                   <a:srgbClr val="FFFFFF"/>
                 </a:solidFill>
@@ -6359,7 +6359,7 @@
               </a:lnSpc>
             </a:pPr>
             <a:r>
-              <a:rPr sz="1050" b="0" i="0">
+              <a:rPr sz="1050" b="0" i="0" lang="ja-JP">
                 <a:solidFill>
                   <a:srgbClr val="26303A"/>
                 </a:solidFill>
@@ -6369,7 +6369,7 @@
               <a:t>初期解：</a:t>
             </a:r>
             <a:r>
-              <a:rPr sz="1050" b="0" i="1">
+              <a:rPr sz="1050" b="0" i="1" lang="ja-JP">
                 <a:solidFill>
                   <a:srgbClr val="26303A"/>
                 </a:solidFill>
@@ -6379,7 +6379,7 @@
               <a:t>S</a:t>
             </a:r>
             <a:r>
-              <a:rPr sz="756" b="0" i="1" baseline="-22000">
+              <a:rPr sz="756" b="0" i="1" lang="ja-JP" baseline="-22000">
                 <a:solidFill>
                   <a:srgbClr val="26303A"/>
                 </a:solidFill>
@@ -6441,7 +6441,7 @@
               </a:lnSpc>
             </a:pPr>
             <a:r>
-              <a:rPr sz="1050" b="0" i="0">
+              <a:rPr sz="1050" b="0" i="0" lang="ja-JP">
                 <a:solidFill>
                   <a:srgbClr val="26303A"/>
                 </a:solidFill>
@@ -6540,7 +6540,7 @@
               </a:lnSpc>
             </a:pPr>
             <a:r>
-              <a:rPr sz="1050" b="1" i="0">
+              <a:rPr sz="1050" b="1" i="0" lang="ja-JP">
                 <a:solidFill>
                   <a:srgbClr val="E06C00"/>
                 </a:solidFill>
@@ -6639,7 +6639,7 @@
               </a:lnSpc>
             </a:pPr>
             <a:r>
-              <a:rPr sz="1050" b="0" i="0">
+              <a:rPr sz="1050" b="0" i="0" lang="ja-JP">
                 <a:solidFill>
                   <a:srgbClr val="26303A"/>
                 </a:solidFill>
@@ -6738,7 +6738,7 @@
               </a:lnSpc>
             </a:pPr>
             <a:r>
-              <a:rPr sz="1050" b="0" i="0">
+              <a:rPr sz="1050" b="0" i="0" lang="ja-JP">
                 <a:solidFill>
                   <a:srgbClr val="26303A"/>
                 </a:solidFill>
@@ -6748,7 +6748,7 @@
               <a:t>受理判定：</a:t>
             </a:r>
             <a:r>
-              <a:rPr sz="1050" b="0" i="1">
+              <a:rPr sz="1050" b="0" i="1" lang="ja-JP">
                 <a:solidFill>
                   <a:srgbClr val="26303A"/>
                 </a:solidFill>
@@ -6758,7 +6758,7 @@
               <a:t>F</a:t>
             </a:r>
             <a:r>
-              <a:rPr sz="1050" b="0" i="0">
+              <a:rPr sz="1050" b="0" i="0" lang="ja-JP">
                 <a:solidFill>
                   <a:srgbClr val="26303A"/>
                 </a:solidFill>
@@ -6944,7 +6944,7 @@
               </a:lnSpc>
             </a:pPr>
             <a:r>
-              <a:rPr sz="1100" b="0" i="0">
+              <a:rPr sz="1100" b="0" i="0" lang="ja-JP">
                 <a:solidFill>
                   <a:srgbClr val="6E7A88"/>
                 </a:solidFill>
@@ -6984,7 +6984,7 @@
               </a:lnSpc>
             </a:pPr>
             <a:r>
-              <a:rPr sz="1050" b="0" i="0">
+              <a:rPr sz="1050" b="0" i="0" lang="ja-JP">
                 <a:solidFill>
                   <a:srgbClr val="6E7A88"/>
                 </a:solidFill>
@@ -7111,7 +7111,7 @@
           <a:lstStyle/>
           <a:p>
             <a:r>
-              <a:rPr sz="1350" b="1" i="0">
+              <a:rPr sz="1350" b="1" i="0" lang="ja-JP">
                 <a:solidFill>
                   <a:srgbClr val="FFFFFF"/>
                 </a:solidFill>
@@ -7173,7 +7173,7 @@
               </a:lnSpc>
             </a:pPr>
             <a:r>
-              <a:rPr sz="1050" b="0" i="0">
+              <a:rPr sz="1050" b="0" i="0" lang="ja-JP">
                 <a:solidFill>
                   <a:srgbClr val="26303A"/>
                 </a:solidFill>
@@ -7183,7 +7183,7 @@
               <a:t>初期集団：</a:t>
             </a:r>
             <a:r>
-              <a:rPr sz="1050" b="0" i="1">
+              <a:rPr sz="1050" b="0" i="1" lang="ja-JP">
                 <a:solidFill>
                   <a:srgbClr val="26303A"/>
                 </a:solidFill>
@@ -7193,7 +7193,7 @@
               <a:t>S</a:t>
             </a:r>
             <a:r>
-              <a:rPr sz="756" b="0" i="1" baseline="-22000">
+              <a:rPr sz="756" b="0" i="1" lang="ja-JP" baseline="-22000">
                 <a:solidFill>
                   <a:srgbClr val="26303A"/>
                 </a:solidFill>
@@ -7203,7 +7203,7 @@
               <a:t>p</a:t>
             </a:r>
             <a:r>
-              <a:rPr sz="1050" b="0" i="0">
+              <a:rPr sz="1050" b="0" i="0" lang="ja-JP">
                 <a:solidFill>
                   <a:srgbClr val="26303A"/>
                 </a:solidFill>
@@ -7265,7 +7265,7 @@
               </a:lnSpc>
             </a:pPr>
             <a:r>
-              <a:rPr sz="1050" b="0" i="0">
+              <a:rPr sz="1050" b="0" i="0" lang="ja-JP">
                 <a:solidFill>
                   <a:srgbClr val="26303A"/>
                 </a:solidFill>
@@ -7364,7 +7364,7 @@
               </a:lnSpc>
             </a:pPr>
             <a:r>
-              <a:rPr sz="1050" b="1" i="0">
+              <a:rPr sz="1050" b="1" i="0" lang="ja-JP">
                 <a:solidFill>
                   <a:srgbClr val="0F5C28"/>
                 </a:solidFill>
@@ -7463,7 +7463,7 @@
               </a:lnSpc>
             </a:pPr>
             <a:r>
-              <a:rPr sz="1050" b="0" i="0">
+              <a:rPr sz="1050" b="0" i="0" lang="ja-JP">
                 <a:solidFill>
                   <a:srgbClr val="26303A"/>
                 </a:solidFill>
@@ -7562,7 +7562,7 @@
               </a:lnSpc>
             </a:pPr>
             <a:r>
-              <a:rPr sz="1050" b="0" i="0">
+              <a:rPr sz="1050" b="0" i="0" lang="ja-JP">
                 <a:solidFill>
                   <a:srgbClr val="26303A"/>
                 </a:solidFill>
@@ -7748,7 +7748,7 @@
               </a:lnSpc>
             </a:pPr>
             <a:r>
-              <a:rPr sz="1100" b="0" i="0">
+              <a:rPr sz="1100" b="0" i="0" lang="ja-JP">
                 <a:solidFill>
                   <a:srgbClr val="6E7A88"/>
                 </a:solidFill>
@@ -7788,7 +7788,7 @@
               </a:lnSpc>
             </a:pPr>
             <a:r>
-              <a:rPr sz="1050" b="0" i="0">
+              <a:rPr sz="1050" b="0" i="0" lang="ja-JP">
                 <a:solidFill>
                   <a:srgbClr val="6E7A88"/>
                 </a:solidFill>
@@ -7848,7 +7848,7 @@
               </a:lnSpc>
             </a:pPr>
             <a:r>
-              <a:rPr sz="1400" b="1" i="0">
+              <a:rPr sz="1400" b="1" i="0" lang="ja-JP">
                 <a:solidFill>
                   <a:srgbClr val="FFFFFF"/>
                 </a:solidFill>
@@ -7858,7 +7858,7 @@
               <a:t>探索構造の差だけを比較するため，局所探索（N5 近傍）・目的関数 </a:t>
             </a:r>
             <a:r>
-              <a:rPr sz="1400" b="1" i="1">
+              <a:rPr sz="1400" b="1" i="1" lang="ja-JP">
                 <a:solidFill>
                   <a:srgbClr val="FFFFFF"/>
                 </a:solidFill>
@@ -7868,7 +7868,7 @@
               <a:t>F</a:t>
             </a:r>
             <a:r>
-              <a:rPr sz="1400" b="1" i="0">
+              <a:rPr sz="1400" b="1" i="0" lang="ja-JP">
                 <a:solidFill>
                   <a:srgbClr val="FFFFFF"/>
                 </a:solidFill>
@@ -7878,7 +7878,7 @@
               <a:t>・初期解 </a:t>
             </a:r>
             <a:r>
-              <a:rPr sz="1400" b="1" i="1">
+              <a:rPr sz="1400" b="1" i="1" lang="ja-JP">
                 <a:solidFill>
                   <a:srgbClr val="FFFFFF"/>
                 </a:solidFill>
@@ -7888,7 +7888,7 @@
               <a:t>S</a:t>
             </a:r>
             <a:r>
-              <a:rPr sz="1008" b="1" i="1" baseline="-22000">
+              <a:rPr sz="1008" b="1" i="1" lang="ja-JP" baseline="-22000">
                 <a:solidFill>
                   <a:srgbClr val="FFFFFF"/>
                 </a:solidFill>
@@ -7898,7 +7898,7 @@
               <a:t>p</a:t>
             </a:r>
             <a:r>
-              <a:rPr sz="1400" b="1" i="0">
+              <a:rPr sz="1400" b="1" i="0" lang="ja-JP">
                 <a:solidFill>
                   <a:srgbClr val="FFFFFF"/>
                 </a:solidFill>
@@ -7951,7 +7951,7 @@
           <a:lstStyle/>
           <a:p>
             <a:r>
-              <a:rPr sz="2450" b="1" i="0">
+              <a:rPr sz="2450" b="1" i="0" lang="ja-JP">
                 <a:solidFill>
                   <a:srgbClr val="16385C"/>
                 </a:solidFill>
@@ -7961,7 +7961,7 @@
               <a:t>提案手法：安定性誘導演算子（PR と PR-</a:t>
             </a:r>
             <a:r>
-              <a:rPr sz="2450" b="1" i="1">
+              <a:rPr sz="2450" b="1" i="1" lang="ja-JP">
                 <a:solidFill>
                   <a:srgbClr val="16385C"/>
                 </a:solidFill>
@@ -7971,7 +7971,7 @@
               <a:t>k</a:t>
             </a:r>
             <a:r>
-              <a:rPr sz="2450" b="1" i="0">
+              <a:rPr sz="2450" b="1" i="0" lang="ja-JP">
                 <a:solidFill>
                   <a:srgbClr val="16385C"/>
                 </a:solidFill>
@@ -8091,7 +8091,7 @@
               </a:lnSpc>
             </a:pPr>
             <a:r>
-              <a:rPr sz="1500" b="1" i="0">
+              <a:rPr sz="1500" b="1" i="0" lang="ja-JP">
                 <a:solidFill>
                   <a:srgbClr val="16385C"/>
                 </a:solidFill>
@@ -8101,7 +8101,7 @@
               <a:t>PR の誘導解を初期スケジュール </a:t>
             </a:r>
             <a:r>
-              <a:rPr sz="1500" b="1" i="1">
+              <a:rPr sz="1500" b="1" i="1" lang="ja-JP">
                 <a:solidFill>
                   <a:srgbClr val="16385C"/>
                 </a:solidFill>
@@ -8111,7 +8111,7 @@
               <a:t>S</a:t>
             </a:r>
             <a:r>
-              <a:rPr sz="1080" b="1" i="1" baseline="-22000">
+              <a:rPr sz="1080" b="1" i="1" lang="ja-JP" baseline="-22000">
                 <a:solidFill>
                   <a:srgbClr val="16385C"/>
                 </a:solidFill>
@@ -8121,7 +8121,7 @@
               <a:t>p</a:t>
             </a:r>
             <a:r>
-              <a:rPr sz="1500" b="1" i="0">
+              <a:rPr sz="1500" b="1" i="0" lang="ja-JP">
                 <a:solidFill>
                   <a:srgbClr val="16385C"/>
                 </a:solidFill>
@@ -8131,7 +8131,7 @@
               <a:t> に固定し，現在解から </a:t>
             </a:r>
             <a:r>
-              <a:rPr sz="1500" b="1" i="1">
+              <a:rPr sz="1500" b="1" i="1" lang="ja-JP">
                 <a:solidFill>
                   <a:srgbClr val="16385C"/>
                 </a:solidFill>
@@ -8141,7 +8141,7 @@
               <a:t>S</a:t>
             </a:r>
             <a:r>
-              <a:rPr sz="1080" b="1" i="1" baseline="-22000">
+              <a:rPr sz="1080" b="1" i="1" lang="ja-JP" baseline="-22000">
                 <a:solidFill>
                   <a:srgbClr val="16385C"/>
                 </a:solidFill>
@@ -8151,7 +8151,7 @@
               <a:t>p</a:t>
             </a:r>
             <a:r>
-              <a:rPr sz="1500" b="1" i="0">
+              <a:rPr sz="1500" b="1" i="0" lang="ja-JP">
                 <a:solidFill>
                   <a:srgbClr val="16385C"/>
                 </a:solidFill>
@@ -8186,7 +8186,7 @@
           <a:lstStyle/>
           <a:p>
             <a:r>
-              <a:rPr sz="900" b="0" i="0">
+              <a:rPr sz="900" b="0" i="0" lang="ja-JP">
                 <a:solidFill>
                   <a:srgbClr val="6E7A88"/>
                 </a:solidFill>
@@ -8222,7 +8222,7 @@
           <a:p>
             <a:pPr algn="r"/>
             <a:r>
-              <a:rPr sz="1000" b="0" i="0">
+              <a:rPr sz="1000" b="0" i="0" lang="ja-JP">
                 <a:solidFill>
                   <a:srgbClr val="6E7A88"/>
                 </a:solidFill>
@@ -8282,7 +8282,7 @@
               </a:lnSpc>
             </a:pPr>
             <a:r>
-              <a:rPr sz="1200" b="1" i="0">
+              <a:rPr sz="1200" b="1" i="0" lang="ja-JP">
                 <a:solidFill>
                   <a:srgbClr val="FFFFFF"/>
                 </a:solidFill>
@@ -8322,7 +8322,7 @@
               </a:lnSpc>
             </a:pPr>
             <a:r>
-              <a:rPr sz="1300" b="0" i="0">
+              <a:rPr sz="1300" b="0" i="0" lang="ja-JP">
                 <a:solidFill>
                   <a:srgbClr val="6E7A88"/>
                 </a:solidFill>
@@ -8382,7 +8382,7 @@
               </a:lnSpc>
             </a:pPr>
             <a:r>
-              <a:rPr sz="1200" b="1" i="0">
+              <a:rPr sz="1200" b="1" i="0" lang="ja-JP">
                 <a:solidFill>
                   <a:srgbClr val="FFFFFF"/>
                 </a:solidFill>
@@ -8422,7 +8422,7 @@
               </a:lnSpc>
             </a:pPr>
             <a:r>
-              <a:rPr sz="1300" b="0" i="0">
+              <a:rPr sz="1300" b="0" i="0" lang="ja-JP">
                 <a:solidFill>
                   <a:srgbClr val="26303A"/>
                 </a:solidFill>
@@ -8432,7 +8432,7 @@
               <a:t>誘導解を </a:t>
             </a:r>
             <a:r>
-              <a:rPr sz="1300" b="0" i="1">
+              <a:rPr sz="1300" b="0" i="1" lang="ja-JP">
                 <a:solidFill>
                   <a:srgbClr val="26303A"/>
                 </a:solidFill>
@@ -8442,7 +8442,7 @@
               <a:t>S</a:t>
             </a:r>
             <a:r>
-              <a:rPr sz="936" b="0" i="1" baseline="-22000">
+              <a:rPr sz="936" b="0" i="1" lang="ja-JP" baseline="-22000">
                 <a:solidFill>
                   <a:srgbClr val="26303A"/>
                 </a:solidFill>
@@ -8452,7 +8452,7 @@
               <a:t>p</a:t>
             </a:r>
             <a:r>
-              <a:rPr sz="1300" b="0" i="0">
+              <a:rPr sz="1300" b="0" i="0" lang="ja-JP">
                 <a:solidFill>
                   <a:srgbClr val="26303A"/>
                 </a:solidFill>
@@ -8462,7 +8462,7 @@
               <a:t> に</a:t>
             </a:r>
             <a:r>
-              <a:rPr sz="1300" b="1" i="0">
+              <a:rPr sz="1300" b="1" i="0" lang="ja-JP">
                 <a:solidFill>
                   <a:srgbClr val="16385C"/>
                 </a:solidFill>
@@ -8472,7 +8472,7 @@
               <a:t>固定</a:t>
             </a:r>
             <a:r>
-              <a:rPr sz="1300" b="0" i="0">
+              <a:rPr sz="1300" b="0" i="0" lang="ja-JP">
                 <a:solidFill>
                   <a:srgbClr val="26303A"/>
                 </a:solidFill>
@@ -8482,7 +8482,7 @@
               <a:t> → 解を </a:t>
             </a:r>
             <a:r>
-              <a:rPr sz="1300" b="0" i="1">
+              <a:rPr sz="1300" b="0" i="1" lang="ja-JP">
                 <a:solidFill>
                   <a:srgbClr val="26303A"/>
                 </a:solidFill>
@@ -8492,7 +8492,7 @@
               <a:t>S</a:t>
             </a:r>
             <a:r>
-              <a:rPr sz="936" b="0" i="1" baseline="-22000">
+              <a:rPr sz="936" b="0" i="1" lang="ja-JP" baseline="-22000">
                 <a:solidFill>
                   <a:srgbClr val="26303A"/>
                 </a:solidFill>
@@ -8502,7 +8502,7 @@
               <a:t>p</a:t>
             </a:r>
             <a:r>
-              <a:rPr sz="1300" b="0" i="0">
+              <a:rPr sz="1300" b="0" i="0" lang="ja-JP">
                 <a:solidFill>
                   <a:srgbClr val="26303A"/>
                 </a:solidFill>
@@ -8614,7 +8614,7 @@
               </a:lnSpc>
             </a:pPr>
             <a:r>
-              <a:rPr sz="1400" b="1" i="0">
+              <a:rPr sz="1400" b="1" i="0" lang="ja-JP">
                 <a:solidFill>
                   <a:srgbClr val="16385C"/>
                 </a:solidFill>
@@ -8624,7 +8624,7 @@
               <a:t>例：ある機械の処理順序を </a:t>
             </a:r>
             <a:r>
-              <a:rPr sz="1400" b="1" i="1">
+              <a:rPr sz="1400" b="1" i="1" lang="ja-JP">
                 <a:solidFill>
                   <a:srgbClr val="16385C"/>
                 </a:solidFill>
@@ -8634,7 +8634,7 @@
               <a:t>S</a:t>
             </a:r>
             <a:r>
-              <a:rPr sz="1008" b="1" i="1" baseline="-22000">
+              <a:rPr sz="1008" b="1" i="1" lang="ja-JP" baseline="-22000">
                 <a:solidFill>
                   <a:srgbClr val="16385C"/>
                 </a:solidFill>
@@ -8644,7 +8644,7 @@
               <a:t>p</a:t>
             </a:r>
             <a:r>
-              <a:rPr sz="1400" b="1" i="0">
+              <a:rPr sz="1400" b="1" i="0" lang="ja-JP">
                 <a:solidFill>
                   <a:srgbClr val="16385C"/>
                 </a:solidFill>
@@ -8730,7 +8730,7 @@
               </a:lnSpc>
             </a:pPr>
             <a:r>
-              <a:rPr sz="1300" b="1" i="1">
+              <a:rPr sz="1300" b="1" i="1" lang="ja-JP">
                 <a:solidFill>
                   <a:srgbClr val="16385C"/>
                 </a:solidFill>
@@ -8740,7 +8740,7 @@
               <a:t>S</a:t>
             </a:r>
             <a:r>
-              <a:rPr sz="936" b="1" i="1" baseline="-22000">
+              <a:rPr sz="936" b="1" i="1" lang="ja-JP" baseline="-22000">
                 <a:solidFill>
                   <a:srgbClr val="16385C"/>
                 </a:solidFill>
@@ -8750,7 +8750,7 @@
               <a:t>p</a:t>
             </a:r>
             <a:r>
-              <a:rPr sz="1300" b="1" i="0">
+              <a:rPr sz="1300" b="1" i="0" lang="ja-JP">
                 <a:solidFill>
                   <a:srgbClr val="16385C"/>
                 </a:solidFill>
@@ -8810,7 +8810,7 @@
               </a:lnSpc>
             </a:pPr>
             <a:r>
-              <a:rPr sz="1300" b="1" i="0">
+              <a:rPr sz="1300" b="1" i="0" lang="ja-JP">
                 <a:solidFill>
                   <a:srgbClr val="FFFFFF"/>
                 </a:solidFill>
@@ -8870,7 +8870,7 @@
               </a:lnSpc>
             </a:pPr>
             <a:r>
-              <a:rPr sz="1300" b="1" i="0">
+              <a:rPr sz="1300" b="1" i="0" lang="ja-JP">
                 <a:solidFill>
                   <a:srgbClr val="FFFFFF"/>
                 </a:solidFill>
@@ -8930,7 +8930,7 @@
               </a:lnSpc>
             </a:pPr>
             <a:r>
-              <a:rPr sz="1300" b="1" i="0">
+              <a:rPr sz="1300" b="1" i="0" lang="ja-JP">
                 <a:solidFill>
                   <a:srgbClr val="FFFFFF"/>
                 </a:solidFill>
@@ -8990,7 +8990,7 @@
               </a:lnSpc>
             </a:pPr>
             <a:r>
-              <a:rPr sz="1300" b="1" i="0">
+              <a:rPr sz="1300" b="1" i="0" lang="ja-JP">
                 <a:solidFill>
                   <a:srgbClr val="FFFFFF"/>
                 </a:solidFill>
@@ -9030,7 +9030,7 @@
               </a:lnSpc>
             </a:pPr>
             <a:r>
-              <a:rPr sz="1300" b="0" i="1">
+              <a:rPr sz="1300" b="0" i="1" lang="ja-JP">
                 <a:solidFill>
                   <a:srgbClr val="26303A"/>
                 </a:solidFill>
@@ -9040,7 +9040,7 @@
               <a:t>D</a:t>
             </a:r>
             <a:r>
-              <a:rPr sz="1300" b="0" i="0">
+              <a:rPr sz="1300" b="0" i="0" lang="ja-JP">
                 <a:solidFill>
                   <a:srgbClr val="26303A"/>
                 </a:solidFill>
@@ -9080,7 +9080,7 @@
               </a:lnSpc>
             </a:pPr>
             <a:r>
-              <a:rPr sz="1300" b="1" i="0">
+              <a:rPr sz="1300" b="1" i="0" lang="ja-JP">
                 <a:solidFill>
                   <a:srgbClr val="26303A"/>
                 </a:solidFill>
@@ -9140,7 +9140,7 @@
               </a:lnSpc>
             </a:pPr>
             <a:r>
-              <a:rPr sz="1300" b="1" i="0">
+              <a:rPr sz="1300" b="1" i="0" lang="ja-JP">
                 <a:solidFill>
                   <a:srgbClr val="FFFFFF"/>
                 </a:solidFill>
@@ -9202,7 +9202,7 @@
               </a:lnSpc>
             </a:pPr>
             <a:r>
-              <a:rPr sz="1300" b="1" i="0">
+              <a:rPr sz="1300" b="1" i="0" lang="ja-JP">
                 <a:solidFill>
                   <a:srgbClr val="FFFFFF"/>
                 </a:solidFill>
@@ -9264,7 +9264,7 @@
               </a:lnSpc>
             </a:pPr>
             <a:r>
-              <a:rPr sz="1300" b="1" i="0">
+              <a:rPr sz="1300" b="1" i="0" lang="ja-JP">
                 <a:solidFill>
                   <a:srgbClr val="FFFFFF"/>
                 </a:solidFill>
@@ -9326,7 +9326,7 @@
               </a:lnSpc>
             </a:pPr>
             <a:r>
-              <a:rPr sz="1300" b="1" i="0">
+              <a:rPr sz="1300" b="1" i="0" lang="ja-JP">
                 <a:solidFill>
                   <a:srgbClr val="FFFFFF"/>
                 </a:solidFill>
@@ -9366,7 +9366,7 @@
               </a:lnSpc>
             </a:pPr>
             <a:r>
-              <a:rPr sz="1300" b="0" i="1">
+              <a:rPr sz="1300" b="0" i="1" lang="ja-JP">
                 <a:solidFill>
                   <a:srgbClr val="26303A"/>
                 </a:solidFill>
@@ -9376,7 +9376,7 @@
               <a:t>D</a:t>
             </a:r>
             <a:r>
-              <a:rPr sz="1300" b="0" i="0">
+              <a:rPr sz="1300" b="0" i="0" lang="ja-JP">
                 <a:solidFill>
                   <a:srgbClr val="26303A"/>
                 </a:solidFill>
@@ -9416,7 +9416,7 @@
               </a:lnSpc>
             </a:pPr>
             <a:r>
-              <a:rPr sz="1100" b="0" i="0">
+              <a:rPr sz="1100" b="0" i="0" lang="ja-JP">
                 <a:solidFill>
                   <a:srgbClr val="B03A2E"/>
                 </a:solidFill>
@@ -9456,7 +9456,7 @@
               </a:lnSpc>
             </a:pPr>
             <a:r>
-              <a:rPr sz="1300" b="1" i="0">
+              <a:rPr sz="1300" b="1" i="0" lang="ja-JP">
                 <a:solidFill>
                   <a:srgbClr val="26303A"/>
                 </a:solidFill>
@@ -9516,7 +9516,7 @@
               </a:lnSpc>
             </a:pPr>
             <a:r>
-              <a:rPr sz="1300" b="1" i="0">
+              <a:rPr sz="1300" b="1" i="0" lang="ja-JP">
                 <a:solidFill>
                   <a:srgbClr val="FFFFFF"/>
                 </a:solidFill>
@@ -9578,7 +9578,7 @@
               </a:lnSpc>
             </a:pPr>
             <a:r>
-              <a:rPr sz="1300" b="1" i="0">
+              <a:rPr sz="1300" b="1" i="0" lang="ja-JP">
                 <a:solidFill>
                   <a:srgbClr val="FFFFFF"/>
                 </a:solidFill>
@@ -9640,7 +9640,7 @@
               </a:lnSpc>
             </a:pPr>
             <a:r>
-              <a:rPr sz="1300" b="1" i="0">
+              <a:rPr sz="1300" b="1" i="0" lang="ja-JP">
                 <a:solidFill>
                   <a:srgbClr val="FFFFFF"/>
                 </a:solidFill>
@@ -9700,7 +9700,7 @@
               </a:lnSpc>
             </a:pPr>
             <a:r>
-              <a:rPr sz="1300" b="1" i="0">
+              <a:rPr sz="1300" b="1" i="0" lang="ja-JP">
                 <a:solidFill>
                   <a:srgbClr val="FFFFFF"/>
                 </a:solidFill>
@@ -9740,7 +9740,7 @@
               </a:lnSpc>
             </a:pPr>
             <a:r>
-              <a:rPr sz="1300" b="0" i="1">
+              <a:rPr sz="1300" b="0" i="1" lang="ja-JP">
                 <a:solidFill>
                   <a:srgbClr val="26303A"/>
                 </a:solidFill>
@@ -9750,7 +9750,7 @@
               <a:t>D</a:t>
             </a:r>
             <a:r>
-              <a:rPr sz="1300" b="0" i="0">
+              <a:rPr sz="1300" b="0" i="0" lang="ja-JP">
                 <a:solidFill>
                   <a:srgbClr val="26303A"/>
                 </a:solidFill>
@@ -9790,7 +9790,7 @@
               </a:lnSpc>
             </a:pPr>
             <a:r>
-              <a:rPr sz="1100" b="0" i="0">
+              <a:rPr sz="1100" b="0" i="0" lang="ja-JP">
                 <a:solidFill>
                   <a:srgbClr val="B03A2E"/>
                 </a:solidFill>
@@ -9800,7 +9800,7 @@
               <a:t>↓ swap：J3 と J2 を入れ替え（</a:t>
             </a:r>
             <a:r>
-              <a:rPr sz="1100" b="0" i="1">
+              <a:rPr sz="1100" b="0" i="1" lang="ja-JP">
                 <a:solidFill>
                   <a:srgbClr val="B03A2E"/>
                 </a:solidFill>
@@ -9810,7 +9810,7 @@
               <a:t>S</a:t>
             </a:r>
             <a:r>
-              <a:rPr sz="792" b="0" i="1" baseline="-22000">
+              <a:rPr sz="792" b="0" i="1" lang="ja-JP" baseline="-22000">
                 <a:solidFill>
                   <a:srgbClr val="B03A2E"/>
                 </a:solidFill>
@@ -9820,7 +9820,7 @@
               <a:t>p</a:t>
             </a:r>
             <a:r>
-              <a:rPr sz="1100" b="0" i="0">
+              <a:rPr sz="1100" b="0" i="0" lang="ja-JP">
                 <a:solidFill>
                   <a:srgbClr val="B03A2E"/>
                 </a:solidFill>
@@ -9860,7 +9860,7 @@
               </a:lnSpc>
             </a:pPr>
             <a:r>
-              <a:rPr sz="1300" b="1" i="0">
+              <a:rPr sz="1300" b="1" i="0" lang="ja-JP">
                 <a:solidFill>
                   <a:srgbClr val="26303A"/>
                 </a:solidFill>
@@ -9920,7 +9920,7 @@
               </a:lnSpc>
             </a:pPr>
             <a:r>
-              <a:rPr sz="1300" b="1" i="0">
+              <a:rPr sz="1300" b="1" i="0" lang="ja-JP">
                 <a:solidFill>
                   <a:srgbClr val="FFFFFF"/>
                 </a:solidFill>
@@ -9980,7 +9980,7 @@
               </a:lnSpc>
             </a:pPr>
             <a:r>
-              <a:rPr sz="1300" b="1" i="0">
+              <a:rPr sz="1300" b="1" i="0" lang="ja-JP">
                 <a:solidFill>
                   <a:srgbClr val="FFFFFF"/>
                 </a:solidFill>
@@ -10040,7 +10040,7 @@
               </a:lnSpc>
             </a:pPr>
             <a:r>
-              <a:rPr sz="1300" b="1" i="0">
+              <a:rPr sz="1300" b="1" i="0" lang="ja-JP">
                 <a:solidFill>
                   <a:srgbClr val="FFFFFF"/>
                 </a:solidFill>
@@ -10100,7 +10100,7 @@
               </a:lnSpc>
             </a:pPr>
             <a:r>
-              <a:rPr sz="1300" b="1" i="0">
+              <a:rPr sz="1300" b="1" i="0" lang="ja-JP">
                 <a:solidFill>
                   <a:srgbClr val="FFFFFF"/>
                 </a:solidFill>
@@ -10140,7 +10140,7 @@
               </a:lnSpc>
             </a:pPr>
             <a:r>
-              <a:rPr sz="1300" b="0" i="1">
+              <a:rPr sz="1300" b="0" i="1" lang="ja-JP">
                 <a:solidFill>
                   <a:srgbClr val="26303A"/>
                 </a:solidFill>
@@ -10150,7 +10150,7 @@
               <a:t>D</a:t>
             </a:r>
             <a:r>
-              <a:rPr sz="1300" b="0" i="0">
+              <a:rPr sz="1300" b="0" i="0" lang="ja-JP">
                 <a:solidFill>
                   <a:srgbClr val="26303A"/>
                 </a:solidFill>
@@ -10190,7 +10190,7 @@
               </a:lnSpc>
             </a:pPr>
             <a:r>
-              <a:rPr sz="1150" b="0" i="0">
+              <a:rPr sz="1150" b="0" i="0" lang="ja-JP">
                 <a:solidFill>
                   <a:srgbClr val="6E7A88"/>
                 </a:solidFill>
@@ -10200,7 +10200,7 @@
               <a:t>赤枠：</a:t>
             </a:r>
             <a:r>
-              <a:rPr sz="1150" b="0" i="1">
+              <a:rPr sz="1150" b="0" i="1" lang="ja-JP">
                 <a:solidFill>
                   <a:srgbClr val="6E7A88"/>
                 </a:solidFill>
@@ -10210,7 +10210,7 @@
               <a:t>S</a:t>
             </a:r>
             <a:r>
-              <a:rPr sz="827" b="0" i="1" baseline="-22000">
+              <a:rPr sz="827" b="0" i="1" lang="ja-JP" baseline="-22000">
                 <a:solidFill>
                   <a:srgbClr val="6E7A88"/>
                 </a:solidFill>
@@ -10220,7 +10220,7 @@
               <a:t>p</a:t>
             </a:r>
             <a:r>
-              <a:rPr sz="1150" b="0" i="0">
+              <a:rPr sz="1150" b="0" i="0" lang="ja-JP">
                 <a:solidFill>
                   <a:srgbClr val="6E7A88"/>
                 </a:solidFill>
@@ -10230,7 +10230,7 @@
               <a:t> と順位が異なる作業（その数が </a:t>
             </a:r>
             <a:r>
-              <a:rPr sz="1150" b="0" i="1">
+              <a:rPr sz="1150" b="0" i="1" lang="ja-JP">
                 <a:solidFill>
                   <a:srgbClr val="6E7A88"/>
                 </a:solidFill>
@@ -10240,7 +10240,7 @@
               <a:t>d</a:t>
             </a:r>
             <a:r>
-              <a:rPr sz="1150" b="0" i="0">
+              <a:rPr sz="1150" b="0" i="0" lang="ja-JP">
                 <a:solidFill>
                   <a:srgbClr val="6E7A88"/>
                 </a:solidFill>
@@ -10257,7 +10257,7 @@
               </a:lnSpc>
             </a:pPr>
             <a:r>
-              <a:rPr sz="1150" b="0" i="0">
+              <a:rPr sz="1150" b="0" i="0" lang="ja-JP">
                 <a:solidFill>
                   <a:srgbClr val="6E7A88"/>
                 </a:solidFill>
@@ -10267,7 +10267,7 @@
               <a:t>1 回の swap で 1 作業を </a:t>
             </a:r>
             <a:r>
-              <a:rPr sz="1150" b="0" i="1">
+              <a:rPr sz="1150" b="0" i="1" lang="ja-JP">
                 <a:solidFill>
                   <a:srgbClr val="6E7A88"/>
                 </a:solidFill>
@@ -10277,7 +10277,7 @@
               <a:t>S</a:t>
             </a:r>
             <a:r>
-              <a:rPr sz="827" b="0" i="1" baseline="-22000">
+              <a:rPr sz="827" b="0" i="1" lang="ja-JP" baseline="-22000">
                 <a:solidFill>
                   <a:srgbClr val="6E7A88"/>
                 </a:solidFill>
@@ -10287,7 +10287,7 @@
               <a:t>p</a:t>
             </a:r>
             <a:r>
-              <a:rPr sz="1150" b="0" i="0">
+              <a:rPr sz="1150" b="0" i="0" lang="ja-JP">
                 <a:solidFill>
                   <a:srgbClr val="6E7A88"/>
                 </a:solidFill>
@@ -10297,7 +10297,7 @@
               <a:t> の順位に合わせ，</a:t>
             </a:r>
             <a:r>
-              <a:rPr sz="1150" b="0" i="1">
+              <a:rPr sz="1150" b="0" i="1" lang="ja-JP">
                 <a:solidFill>
                   <a:srgbClr val="6E7A88"/>
                 </a:solidFill>
@@ -10307,7 +10307,7 @@
               <a:t>D</a:t>
             </a:r>
             <a:r>
-              <a:rPr sz="1150" b="0" i="0">
+              <a:rPr sz="1150" b="0" i="0" lang="ja-JP">
                 <a:solidFill>
                   <a:srgbClr val="6E7A88"/>
                 </a:solidFill>
@@ -10390,7 +10390,7 @@
           <a:lstStyle/>
           <a:p>
             <a:r>
-              <a:rPr sz="1300" b="1" i="0">
+              <a:rPr sz="1300" b="1" i="0" lang="ja-JP">
                 <a:solidFill>
                   <a:srgbClr val="16385C"/>
                 </a:solidFill>
@@ -10407,7 +10407,7 @@
               </a:spcBef>
             </a:pPr>
             <a:r>
-              <a:rPr sz="1250" b="1" i="0">
+              <a:rPr sz="1250" b="1" i="0" lang="ja-JP">
                 <a:solidFill>
                   <a:srgbClr val="E06C00"/>
                 </a:solidFill>
@@ -10417,7 +10417,7 @@
               <a:t>ILS：</a:t>
             </a:r>
             <a:r>
-              <a:rPr sz="1250" b="0" i="0">
+              <a:rPr sz="1250" b="0" i="0" lang="ja-JP">
                 <a:solidFill>
                   <a:srgbClr val="26303A"/>
                 </a:solidFill>
@@ -10434,7 +10434,7 @@
               </a:spcBef>
             </a:pPr>
             <a:r>
-              <a:rPr sz="1250" b="1" i="0">
+              <a:rPr sz="1250" b="1" i="0" lang="ja-JP">
                 <a:solidFill>
                   <a:srgbClr val="0F5C28"/>
                 </a:solidFill>
@@ -10444,7 +10444,7 @@
               <a:t>Memetic：</a:t>
             </a:r>
             <a:r>
-              <a:rPr sz="1250" b="0" i="0">
+              <a:rPr sz="1250" b="0" i="0" lang="ja-JP">
                 <a:solidFill>
                   <a:srgbClr val="26303A"/>
                 </a:solidFill>
@@ -10497,7 +10497,7 @@
           <a:lstStyle/>
           <a:p>
             <a:r>
-              <a:rPr sz="2450" b="1" i="0">
+              <a:rPr sz="2450" b="1" i="0" lang="ja-JP">
                 <a:solidFill>
                   <a:srgbClr val="16385C"/>
                 </a:solidFill>
@@ -10617,7 +10617,7 @@
               </a:lnSpc>
             </a:pPr>
             <a:r>
-              <a:rPr sz="1500" b="1" i="0">
+              <a:rPr sz="1500" b="1" i="0" lang="ja-JP">
                 <a:solidFill>
                   <a:srgbClr val="16385C"/>
                 </a:solidFill>
@@ -10652,7 +10652,7 @@
           <a:lstStyle/>
           <a:p>
             <a:r>
-              <a:rPr sz="900" b="0" i="0">
+              <a:rPr sz="900" b="0" i="0" lang="ja-JP">
                 <a:solidFill>
                   <a:srgbClr val="6E7A88"/>
                 </a:solidFill>
@@ -10688,7 +10688,7 @@
           <a:p>
             <a:pPr algn="r"/>
             <a:r>
-              <a:rPr sz="1000" b="0" i="0">
+              <a:rPr sz="1000" b="0" i="0" lang="ja-JP">
                 <a:solidFill>
                   <a:srgbClr val="6E7A88"/>
                 </a:solidFill>
@@ -10732,7 +10732,7 @@
                     <a:p>
                       <a:pPr algn="l"/>
                       <a:r>
-                        <a:rPr sz="1450" b="1" i="0">
+                        <a:rPr sz="1450" b="1" i="0" lang="ja-JP">
                           <a:solidFill>
                             <a:srgbClr val="FFFFFF"/>
                           </a:solidFill>
@@ -10756,7 +10756,7 @@
                     <a:p>
                       <a:pPr algn="ctr"/>
                       <a:r>
-                        <a:rPr sz="1450" b="1" i="0">
+                        <a:rPr sz="1450" b="1" i="0" lang="ja-JP">
                           <a:solidFill>
                             <a:srgbClr val="FFFFFF"/>
                           </a:solidFill>
@@ -10780,7 +10780,7 @@
                     <a:p>
                       <a:pPr algn="ctr"/>
                       <a:r>
-                        <a:rPr sz="1450" b="1" i="0">
+                        <a:rPr sz="1450" b="1" i="0" lang="ja-JP">
                           <a:solidFill>
                             <a:srgbClr val="FFFFFF"/>
                           </a:solidFill>
@@ -10790,7 +10790,7 @@
                         <a:t>PR-</a:t>
                       </a:r>
                       <a:r>
-                        <a:rPr sz="1450" b="1" i="1">
+                        <a:rPr sz="1450" b="1" i="1" lang="ja-JP">
                           <a:solidFill>
                             <a:srgbClr val="FFFFFF"/>
                           </a:solidFill>
@@ -10800,7 +10800,7 @@
                         <a:t>k</a:t>
                       </a:r>
                       <a:r>
-                        <a:rPr sz="1450" b="1" i="0">
+                        <a:rPr sz="1450" b="1" i="0" lang="ja-JP">
                           <a:solidFill>
                             <a:srgbClr val="FFFFFF"/>
                           </a:solidFill>
@@ -10824,7 +10824,7 @@
                     <a:p>
                       <a:pPr algn="ctr"/>
                       <a:r>
-                        <a:rPr sz="1450" b="1" i="0">
+                        <a:rPr sz="1450" b="1" i="0" lang="ja-JP">
                           <a:solidFill>
                             <a:srgbClr val="FFFFFF"/>
                           </a:solidFill>
@@ -10850,7 +10850,7 @@
                     <a:p>
                       <a:pPr algn="l"/>
                       <a:r>
-                        <a:rPr sz="1450" b="1" i="0">
+                        <a:rPr sz="1450" b="1" i="0" lang="ja-JP">
                           <a:solidFill>
                             <a:srgbClr val="E06C00"/>
                           </a:solidFill>
@@ -10879,7 +10879,7 @@
                     <a:p>
                       <a:pPr algn="ctr"/>
                       <a:r>
-                        <a:rPr sz="1450" b="1" i="0">
+                        <a:rPr sz="1450" b="1" i="0" lang="ja-JP">
                           <a:solidFill>
                             <a:srgbClr val="E06C00"/>
                           </a:solidFill>
@@ -10908,7 +10908,7 @@
                     <a:p>
                       <a:pPr algn="ctr"/>
                       <a:r>
-                        <a:rPr sz="1450" b="1" i="0">
+                        <a:rPr sz="1450" b="1" i="0" lang="ja-JP">
                           <a:solidFill>
                             <a:srgbClr val="E06C00"/>
                           </a:solidFill>
@@ -10918,7 +10918,7 @@
                         <a:t>ILS＋PR-</a:t>
                       </a:r>
                       <a:r>
-                        <a:rPr sz="1450" b="1" i="1">
+                        <a:rPr sz="1450" b="1" i="1" lang="ja-JP">
                           <a:solidFill>
                             <a:srgbClr val="E06C00"/>
                           </a:solidFill>
@@ -10947,7 +10947,7 @@
                     <a:p>
                       <a:pPr algn="ctr"/>
                       <a:r>
-                        <a:rPr sz="1450" b="1" i="0">
+                        <a:rPr sz="1450" b="1" i="0" lang="ja-JP">
                           <a:solidFill>
                             <a:srgbClr val="E06C00"/>
                           </a:solidFill>
@@ -10978,7 +10978,7 @@
                     <a:p>
                       <a:pPr algn="l"/>
                       <a:r>
-                        <a:rPr sz="1450" b="1" i="0">
+                        <a:rPr sz="1450" b="1" i="0" lang="ja-JP">
                           <a:solidFill>
                             <a:srgbClr val="0F5C28"/>
                           </a:solidFill>
@@ -11007,7 +11007,7 @@
                     <a:p>
                       <a:pPr algn="ctr"/>
                       <a:r>
-                        <a:rPr sz="1450" b="1" i="0">
+                        <a:rPr sz="1450" b="1" i="0" lang="ja-JP">
                           <a:solidFill>
                             <a:srgbClr val="0F5C28"/>
                           </a:solidFill>
@@ -11036,7 +11036,7 @@
                     <a:p>
                       <a:pPr algn="ctr"/>
                       <a:r>
-                        <a:rPr sz="1450" b="1" i="0">
+                        <a:rPr sz="1450" b="1" i="0" lang="ja-JP">
                           <a:solidFill>
                             <a:srgbClr val="0F5C28"/>
                           </a:solidFill>
@@ -11046,7 +11046,7 @@
                         <a:t>Memetic＋PR-</a:t>
                       </a:r>
                       <a:r>
-                        <a:rPr sz="1450" b="1" i="1">
+                        <a:rPr sz="1450" b="1" i="1" lang="ja-JP">
                           <a:solidFill>
                             <a:srgbClr val="0F5C28"/>
                           </a:solidFill>
@@ -11075,7 +11075,7 @@
                     <a:p>
                       <a:pPr algn="ctr"/>
                       <a:r>
-                        <a:rPr sz="1450" b="1" i="0">
+                        <a:rPr sz="1450" b="1" i="0" lang="ja-JP">
                           <a:solidFill>
                             <a:srgbClr val="0F5C28"/>
                           </a:solidFill>
@@ -11289,7 +11289,7 @@
               </a:lnSpc>
             </a:pPr>
             <a:r>
-              <a:rPr sz="1400" b="1" i="0">
+              <a:rPr sz="1400" b="1" i="0" lang="ja-JP">
                 <a:solidFill>
                   <a:srgbClr val="FFFFFF"/>
                 </a:solidFill>
@@ -11329,7 +11329,7 @@
               </a:lnSpc>
             </a:pPr>
             <a:r>
-              <a:rPr sz="1700" b="1" i="0">
+              <a:rPr sz="1700" b="1" i="0" lang="ja-JP">
                 <a:solidFill>
                   <a:srgbClr val="26303A"/>
                 </a:solidFill>
@@ -11364,7 +11364,7 @@
           <a:lstStyle/>
           <a:p>
             <a:r>
-              <a:rPr sz="1500" b="1" i="0">
+              <a:rPr sz="1500" b="1" i="0" lang="ja-JP">
                 <a:solidFill>
                   <a:srgbClr val="16385C"/>
                 </a:solidFill>
@@ -11374,7 +11374,7 @@
               <a:t>判定：</a:t>
             </a:r>
             <a:r>
-              <a:rPr sz="1500" b="0" i="0">
+              <a:rPr sz="1500" b="0" i="0" lang="ja-JP">
                 <a:solidFill>
                   <a:srgbClr val="26303A"/>
                 </a:solidFill>
@@ -11478,7 +11478,7 @@
               </a:lnSpc>
             </a:pPr>
             <a:r>
-              <a:rPr sz="1400" b="1" i="0">
+              <a:rPr sz="1400" b="1" i="0" lang="ja-JP">
                 <a:solidFill>
                   <a:srgbClr val="FFFFFF"/>
                 </a:solidFill>
@@ -11518,7 +11518,7 @@
               </a:lnSpc>
             </a:pPr>
             <a:r>
-              <a:rPr sz="1700" b="1" i="0">
+              <a:rPr sz="1700" b="1" i="0" lang="ja-JP">
                 <a:solidFill>
                   <a:srgbClr val="26303A"/>
                 </a:solidFill>
@@ -11553,7 +11553,7 @@
           <a:lstStyle/>
           <a:p>
             <a:r>
-              <a:rPr sz="1500" b="1" i="0">
+              <a:rPr sz="1500" b="1" i="0" lang="ja-JP">
                 <a:solidFill>
                   <a:srgbClr val="16385C"/>
                 </a:solidFill>
@@ -11563,7 +11563,7 @@
               <a:t>判定：</a:t>
             </a:r>
             <a:r>
-              <a:rPr sz="1500" b="0" i="0">
+              <a:rPr sz="1500" b="0" i="0" lang="ja-JP">
                 <a:solidFill>
                   <a:srgbClr val="26303A"/>
                 </a:solidFill>
@@ -11573,7 +11573,7 @@
               <a:t>Memetic＋PR-</a:t>
             </a:r>
             <a:r>
-              <a:rPr sz="1500" b="0" i="1">
+              <a:rPr sz="1500" b="0" i="1" lang="ja-JP">
                 <a:solidFill>
                   <a:srgbClr val="26303A"/>
                 </a:solidFill>
@@ -11583,7 +11583,7 @@
               <a:t>k</a:t>
             </a:r>
             <a:r>
-              <a:rPr sz="1500" b="0" i="0">
+              <a:rPr sz="1500" b="0" i="0" lang="ja-JP">
                 <a:solidFill>
                   <a:srgbClr val="26303A"/>
                 </a:solidFill>
@@ -11667,7 +11667,7 @@
               </a:lnSpc>
             </a:pPr>
             <a:r>
-              <a:rPr sz="1500" b="0" i="0">
+              <a:rPr sz="1500" b="0" i="0" lang="ja-JP">
                 <a:solidFill>
                   <a:srgbClr val="26303A"/>
                 </a:solidFill>
@@ -11677,7 +11677,7 @@
               <a:t>ILS＋PR-</a:t>
             </a:r>
             <a:r>
-              <a:rPr sz="1500" b="0" i="1">
+              <a:rPr sz="1500" b="0" i="1" lang="ja-JP">
                 <a:solidFill>
                   <a:srgbClr val="26303A"/>
                 </a:solidFill>
@@ -11687,7 +11687,7 @@
               <a:t>k</a:t>
             </a:r>
             <a:r>
-              <a:rPr sz="1500" b="0" i="0">
+              <a:rPr sz="1500" b="0" i="0" lang="ja-JP">
                 <a:solidFill>
                   <a:srgbClr val="26303A"/>
                 </a:solidFill>
@@ -11727,7 +11727,7 @@
               </a:spcBef>
             </a:pPr>
             <a:r>
-              <a:rPr sz="1250" b="1" i="0">
+              <a:rPr sz="1250" b="1" i="0" lang="ja-JP">
                 <a:solidFill>
                   <a:srgbClr val="6E7A88"/>
                 </a:solidFill>
@@ -11737,7 +11737,7 @@
               <a:t>検定：</a:t>
             </a:r>
             <a:r>
-              <a:rPr sz="1250" b="0" i="0">
+              <a:rPr sz="1250" b="0" i="0" lang="ja-JP">
                 <a:solidFill>
                   <a:srgbClr val="6E7A88"/>
                 </a:solidFill>
@@ -11747,7 +11747,7 @@
               <a:t>両側 Mann–Whitney の </a:t>
             </a:r>
             <a:r>
-              <a:rPr sz="1250" b="0" i="1">
+              <a:rPr sz="1250" b="0" i="1" lang="ja-JP">
                 <a:solidFill>
                   <a:srgbClr val="6E7A88"/>
                 </a:solidFill>
@@ -11757,7 +11757,7 @@
               <a:t>U</a:t>
             </a:r>
             <a:r>
-              <a:rPr sz="1250" b="0" i="0">
+              <a:rPr sz="1250" b="0" i="0" lang="ja-JP">
                 <a:solidFill>
                   <a:srgbClr val="6E7A88"/>
                 </a:solidFill>
@@ -11774,7 +11774,7 @@
               </a:spcBef>
             </a:pPr>
             <a:r>
-              <a:rPr sz="1250" b="1" i="0">
+              <a:rPr sz="1250" b="1" i="0" lang="ja-JP">
                 <a:solidFill>
                   <a:srgbClr val="6E7A88"/>
                 </a:solidFill>
@@ -11784,7 +11784,7 @@
               <a:t>効果量：</a:t>
             </a:r>
             <a:r>
-              <a:rPr sz="1250" b="0" i="0">
+              <a:rPr sz="1250" b="0" i="0" lang="ja-JP">
                 <a:solidFill>
                   <a:srgbClr val="6E7A88"/>
                 </a:solidFill>
@@ -11794,7 +11794,7 @@
               <a:t>Cliff's </a:t>
             </a:r>
             <a:r>
-              <a:rPr sz="1250" b="0" i="1">
+              <a:rPr sz="1250" b="0" i="1" lang="ja-JP">
                 <a:solidFill>
                   <a:srgbClr val="6E7A88"/>
                 </a:solidFill>
@@ -11804,7 +11804,7 @@
               <a:t>δ</a:t>
             </a:r>
             <a:r>
-              <a:rPr sz="1250" b="0" i="0">
+              <a:rPr sz="1250" b="0" i="0" lang="ja-JP">
                 <a:solidFill>
                   <a:srgbClr val="6E7A88"/>
                 </a:solidFill>
@@ -11814,7 +11814,7 @@
               <a:t>．</a:t>
             </a:r>
             <a:r>
-              <a:rPr sz="1250" b="0" i="1">
+              <a:rPr sz="1250" b="0" i="1" lang="ja-JP">
                 <a:solidFill>
                   <a:srgbClr val="6E7A88"/>
                 </a:solidFill>
@@ -11824,7 +11824,7 @@
               <a:t>|δ|</a:t>
             </a:r>
             <a:r>
-              <a:rPr sz="1250" b="0" i="0">
+              <a:rPr sz="1250" b="0" i="0" lang="ja-JP">
                 <a:solidFill>
                   <a:srgbClr val="6E7A88"/>
                 </a:solidFill>
@@ -11877,7 +11877,7 @@
           <a:lstStyle/>
           <a:p>
             <a:r>
-              <a:rPr sz="2450" b="1" i="0">
+              <a:rPr sz="2450" b="1" i="0" lang="ja-JP">
                 <a:solidFill>
                   <a:srgbClr val="16385C"/>
                 </a:solidFill>
@@ -11997,7 +11997,7 @@
               </a:lnSpc>
             </a:pPr>
             <a:r>
-              <a:rPr sz="1500" b="1" i="0">
+              <a:rPr sz="1500" b="1" i="0" lang="ja-JP">
                 <a:solidFill>
                   <a:srgbClr val="16385C"/>
                 </a:solidFill>
@@ -12007,7 +12007,7 @@
               <a:t>高安定 HV は，順序偏差 </a:t>
             </a:r>
             <a:r>
-              <a:rPr sz="1500" b="1" i="1">
+              <a:rPr sz="1500" b="1" i="1" lang="ja-JP">
                 <a:solidFill>
                   <a:srgbClr val="16385C"/>
                 </a:solidFill>
@@ -12017,7 +12017,7 @@
               <a:t>D</a:t>
             </a:r>
             <a:r>
-              <a:rPr sz="1500" b="1" i="0">
+              <a:rPr sz="1500" b="1" i="0" lang="ja-JP">
                 <a:solidFill>
                   <a:srgbClr val="16385C"/>
                 </a:solidFill>
@@ -12027,7 +12027,7 @@
               <a:t> が </a:t>
             </a:r>
             <a:r>
-              <a:rPr sz="1500" b="1" i="1">
+              <a:rPr sz="1500" b="1" i="1" lang="ja-JP">
                 <a:solidFill>
                   <a:srgbClr val="16385C"/>
                 </a:solidFill>
@@ -12037,7 +12037,7 @@
               <a:t>P</a:t>
             </a:r>
             <a:r>
-              <a:rPr sz="1080" b="1" i="1" baseline="-22000">
+              <a:rPr sz="1080" b="1" i="1" lang="ja-JP" baseline="-22000">
                 <a:solidFill>
                   <a:srgbClr val="16385C"/>
                 </a:solidFill>
@@ -12047,7 +12047,7 @@
               <a:t>θ</a:t>
             </a:r>
             <a:r>
-              <a:rPr sz="1500" b="1" i="0">
+              <a:rPr sz="1500" b="1" i="0" lang="ja-JP">
                 <a:solidFill>
                   <a:srgbClr val="16385C"/>
                 </a:solidFill>
@@ -12082,7 +12082,7 @@
           <a:lstStyle/>
           <a:p>
             <a:r>
-              <a:rPr sz="900" b="0" i="0">
+              <a:rPr sz="900" b="0" i="0" lang="ja-JP">
                 <a:solidFill>
                   <a:srgbClr val="6E7A88"/>
                 </a:solidFill>
@@ -12118,7 +12118,7 @@
           <a:p>
             <a:pPr algn="r"/>
             <a:r>
-              <a:rPr sz="1000" b="0" i="0">
+              <a:rPr sz="1000" b="0" i="0" lang="ja-JP">
                 <a:solidFill>
                   <a:srgbClr val="6E7A88"/>
                 </a:solidFill>
@@ -12185,7 +12185,7 @@
               </a:spcBef>
             </a:pPr>
             <a:r>
-              <a:rPr sz="1040" b="1" i="0">
+              <a:rPr sz="1040" b="1" i="0" lang="ja-JP">
                 <a:solidFill>
                   <a:srgbClr val="16385C"/>
                 </a:solidFill>
@@ -12195,7 +12195,7 @@
               <a:t>▪ </a:t>
             </a:r>
             <a:r>
-              <a:rPr sz="1300" b="0" i="1">
+              <a:rPr sz="1300" b="0" i="1" lang="ja-JP">
                 <a:solidFill>
                   <a:srgbClr val="26303A"/>
                 </a:solidFill>
@@ -12205,7 +12205,7 @@
               <a:t>P</a:t>
             </a:r>
             <a:r>
-              <a:rPr sz="936" b="0" i="1" baseline="-22000">
+              <a:rPr sz="936" b="0" i="1" lang="ja-JP" baseline="-22000">
                 <a:solidFill>
                   <a:srgbClr val="26303A"/>
                 </a:solidFill>
@@ -12215,7 +12215,7 @@
               <a:t>θ</a:t>
             </a:r>
             <a:r>
-              <a:rPr sz="1300" b="0" i="0">
+              <a:rPr sz="1300" b="0" i="0" lang="ja-JP">
                 <a:solidFill>
                   <a:srgbClr val="26303A"/>
                 </a:solidFill>
@@ -12225,7 +12225,7 @@
               <a:t>：全手法・全試行の非劣解の </a:t>
             </a:r>
             <a:r>
-              <a:rPr sz="1300" b="0" i="1">
+              <a:rPr sz="1300" b="0" i="1" lang="ja-JP">
                 <a:solidFill>
                   <a:srgbClr val="26303A"/>
                 </a:solidFill>
@@ -12235,7 +12235,7 @@
               <a:t>D</a:t>
             </a:r>
             <a:r>
-              <a:rPr sz="1300" b="0" i="0">
+              <a:rPr sz="1300" b="0" i="0" lang="ja-JP">
                 <a:solidFill>
                   <a:srgbClr val="26303A"/>
                 </a:solidFill>
@@ -12245,7 +12245,7 @@
               <a:t> の </a:t>
             </a:r>
             <a:r>
-              <a:rPr sz="1300" b="0" i="1">
+              <a:rPr sz="1300" b="0" i="1" lang="ja-JP">
                 <a:solidFill>
                   <a:srgbClr val="26303A"/>
                 </a:solidFill>
@@ -12255,7 +12255,7 @@
               <a:t>θ</a:t>
             </a:r>
             <a:r>
-              <a:rPr sz="1300" b="0" i="0">
+              <a:rPr sz="1300" b="0" i="0" lang="ja-JP">
                 <a:solidFill>
                   <a:srgbClr val="26303A"/>
                 </a:solidFill>
@@ -12265,7 +12265,7 @@
               <a:t> パーセンタイル．</a:t>
             </a:r>
             <a:r>
-              <a:rPr sz="1300" b="0" i="1">
+              <a:rPr sz="1300" b="0" i="1" lang="ja-JP">
                 <a:solidFill>
                   <a:srgbClr val="26303A"/>
                 </a:solidFill>
@@ -12275,7 +12275,7 @@
               <a:t>D</a:t>
             </a:r>
             <a:r>
-              <a:rPr sz="1300" b="0" i="0">
+              <a:rPr sz="1300" b="0" i="0" lang="ja-JP">
                 <a:solidFill>
                   <a:srgbClr val="26303A"/>
                 </a:solidFill>
@@ -12285,7 +12285,7 @@
               <a:t> = 0 の解（初期解 </a:t>
             </a:r>
             <a:r>
-              <a:rPr sz="1300" b="0" i="1">
+              <a:rPr sz="1300" b="0" i="1" lang="ja-JP">
                 <a:solidFill>
                   <a:srgbClr val="26303A"/>
                 </a:solidFill>
@@ -12295,7 +12295,7 @@
               <a:t>S</a:t>
             </a:r>
             <a:r>
-              <a:rPr sz="936" b="0" i="1" baseline="-22000">
+              <a:rPr sz="936" b="0" i="1" lang="ja-JP" baseline="-22000">
                 <a:solidFill>
                   <a:srgbClr val="26303A"/>
                 </a:solidFill>
@@ -12305,7 +12305,7 @@
               <a:t>p</a:t>
             </a:r>
             <a:r>
-              <a:rPr sz="1300" b="0" i="0">
+              <a:rPr sz="1300" b="0" i="0" lang="ja-JP">
                 <a:solidFill>
                   <a:srgbClr val="26303A"/>
                 </a:solidFill>
@@ -12325,7 +12325,7 @@
               </a:spcBef>
             </a:pPr>
             <a:r>
-              <a:rPr sz="1040" b="1" i="0">
+              <a:rPr sz="1040" b="1" i="0" lang="ja-JP">
                 <a:solidFill>
                   <a:srgbClr val="16385C"/>
                 </a:solidFill>
@@ -12335,7 +12335,7 @@
               <a:t>▪ </a:t>
             </a:r>
             <a:r>
-              <a:rPr sz="1300" b="0" i="0">
+              <a:rPr sz="1300" b="0" i="0" lang="ja-JP">
                 <a:solidFill>
                   <a:srgbClr val="26303A"/>
                 </a:solidFill>
@@ -12345,7 +12345,7 @@
               <a:t>全域 HV・高安定 HV は全ての重み </a:t>
             </a:r>
             <a:r>
-              <a:rPr sz="1300" b="0" i="1">
+              <a:rPr sz="1300" b="0" i="1" lang="ja-JP">
                 <a:solidFill>
                   <a:srgbClr val="26303A"/>
                 </a:solidFill>
@@ -12355,7 +12355,7 @@
               <a:t>λ</a:t>
             </a:r>
             <a:r>
-              <a:rPr sz="1300" b="0" i="0">
+              <a:rPr sz="1300" b="0" i="0" lang="ja-JP">
                 <a:solidFill>
                   <a:srgbClr val="26303A"/>
                 </a:solidFill>
@@ -12452,7 +12452,7 @@
           <a:lstStyle/>
           <a:p>
             <a:r>
-              <a:rPr sz="3000" b="1" i="0">
+              <a:rPr sz="3000" b="1" i="0" lang="ja-JP">
                 <a:solidFill>
                   <a:srgbClr val="3E618C"/>
                 </a:solidFill>
@@ -12487,7 +12487,7 @@
           <a:lstStyle/>
           <a:p>
             <a:r>
-              <a:rPr sz="2000" b="0" i="0">
+              <a:rPr sz="2000" b="0" i="0" lang="ja-JP">
                 <a:solidFill>
                   <a:srgbClr val="3E618C"/>
                 </a:solidFill>
@@ -12522,7 +12522,7 @@
           <a:lstStyle/>
           <a:p>
             <a:r>
-              <a:rPr sz="3000" b="1" i="0">
+              <a:rPr sz="3000" b="1" i="0" lang="ja-JP">
                 <a:solidFill>
                   <a:srgbClr val="3E618C"/>
                 </a:solidFill>
@@ -12557,7 +12557,7 @@
           <a:lstStyle/>
           <a:p>
             <a:r>
-              <a:rPr sz="2000" b="0" i="0">
+              <a:rPr sz="2000" b="0" i="0" lang="ja-JP">
                 <a:solidFill>
                   <a:srgbClr val="3E618C"/>
                 </a:solidFill>
@@ -12640,7 +12640,7 @@
           <a:lstStyle/>
           <a:p>
             <a:r>
-              <a:rPr sz="4000" b="1" i="0">
+              <a:rPr sz="4000" b="1" i="0" lang="ja-JP">
                 <a:solidFill>
                   <a:srgbClr val="FFFFFF"/>
                 </a:solidFill>
@@ -12675,7 +12675,7 @@
           <a:lstStyle/>
           <a:p>
             <a:r>
-              <a:rPr sz="2600" b="1" i="0">
+              <a:rPr sz="2600" b="1" i="0" lang="ja-JP">
                 <a:solidFill>
                   <a:srgbClr val="FFFFFF"/>
                 </a:solidFill>
@@ -12692,7 +12692,7 @@
               </a:spcBef>
             </a:pPr>
             <a:r>
-              <a:rPr sz="1300" b="0" i="0">
+              <a:rPr sz="1300" b="0" i="0" lang="ja-JP">
                 <a:solidFill>
                   <a:srgbClr val="AFC2D8"/>
                 </a:solidFill>
@@ -12727,7 +12727,7 @@
           <a:lstStyle/>
           <a:p>
             <a:r>
-              <a:rPr sz="3000" b="1" i="0">
+              <a:rPr sz="3000" b="1" i="0" lang="ja-JP">
                 <a:solidFill>
                   <a:srgbClr val="3E618C"/>
                 </a:solidFill>
@@ -12762,7 +12762,7 @@
           <a:lstStyle/>
           <a:p>
             <a:r>
-              <a:rPr sz="2000" b="0" i="0">
+              <a:rPr sz="2000" b="0" i="0" lang="ja-JP">
                 <a:solidFill>
                   <a:srgbClr val="3E618C"/>
                 </a:solidFill>
@@ -12798,7 +12798,7 @@
           <a:p>
             <a:pPr algn="r"/>
             <a:r>
-              <a:rPr sz="1000" b="0" i="0">
+              <a:rPr sz="1000" b="0" i="0" lang="ja-JP">
                 <a:solidFill>
                   <a:srgbClr val="AFC2D8"/>
                 </a:solidFill>
@@ -12851,7 +12851,7 @@
           <a:lstStyle/>
           <a:p>
             <a:r>
-              <a:rPr sz="2450" b="1" i="0">
+              <a:rPr sz="2450" b="1" i="0" lang="ja-JP">
                 <a:solidFill>
                   <a:srgbClr val="16385C"/>
                 </a:solidFill>
@@ -12971,7 +12971,7 @@
               </a:lnSpc>
             </a:pPr>
             <a:r>
-              <a:rPr sz="1500" b="1" i="0">
+              <a:rPr sz="1500" b="1" i="0" lang="ja-JP">
                 <a:solidFill>
                   <a:srgbClr val="16385C"/>
                 </a:solidFill>
@@ -13006,7 +13006,7 @@
           <a:lstStyle/>
           <a:p>
             <a:r>
-              <a:rPr sz="900" b="0" i="0">
+              <a:rPr sz="900" b="0" i="0" lang="ja-JP">
                 <a:solidFill>
                   <a:srgbClr val="6E7A88"/>
                 </a:solidFill>
@@ -13042,7 +13042,7 @@
           <a:p>
             <a:pPr algn="r"/>
             <a:r>
-              <a:rPr sz="1000" b="0" i="0">
+              <a:rPr sz="1000" b="0" i="0" lang="ja-JP">
                 <a:solidFill>
                   <a:srgbClr val="6E7A88"/>
                 </a:solidFill>
@@ -13084,7 +13084,7 @@
                     <a:p>
                       <a:pPr algn="l"/>
                       <a:r>
-                        <a:rPr sz="1250" b="1" i="0">
+                        <a:rPr sz="1250" b="1" i="0" lang="ja-JP">
                           <a:solidFill>
                             <a:srgbClr val="FFFFFF"/>
                           </a:solidFill>
@@ -13108,7 +13108,7 @@
                     <a:p>
                       <a:pPr algn="l"/>
                       <a:r>
-                        <a:rPr sz="1250" b="1" i="0">
+                        <a:rPr sz="1250" b="1" i="0" lang="ja-JP">
                           <a:solidFill>
                             <a:srgbClr val="FFFFFF"/>
                           </a:solidFill>
@@ -13134,7 +13134,7 @@
                     <a:p>
                       <a:pPr algn="l"/>
                       <a:r>
-                        <a:rPr sz="1250" b="0" i="0">
+                        <a:rPr sz="1250" b="0" i="0" lang="ja-JP">
                           <a:solidFill>
                             <a:srgbClr val="26303A"/>
                           </a:solidFill>
@@ -13163,7 +13163,7 @@
                     <a:p>
                       <a:pPr algn="l"/>
                       <a:r>
-                        <a:rPr sz="1250" b="0" i="0">
+                        <a:rPr sz="1250" b="0" i="0" lang="ja-JP">
                           <a:solidFill>
                             <a:srgbClr val="26303A"/>
                           </a:solidFill>
@@ -13173,7 +13173,7 @@
                         <a:t>ILS・Memetic と，それぞれに PR-</a:t>
                       </a:r>
                       <a:r>
-                        <a:rPr sz="1250" b="0" i="1">
+                        <a:rPr sz="1250" b="0" i="1" lang="ja-JP">
                           <a:solidFill>
                             <a:srgbClr val="26303A"/>
                           </a:solidFill>
@@ -13183,7 +13183,7 @@
                         <a:t>k</a:t>
                       </a:r>
                       <a:r>
-                        <a:rPr sz="1250" b="0" i="0">
+                        <a:rPr sz="1250" b="0" i="0" lang="ja-JP">
                           <a:solidFill>
                             <a:srgbClr val="26303A"/>
                           </a:solidFill>
@@ -13214,7 +13214,7 @@
                     <a:p>
                       <a:pPr algn="l"/>
                       <a:r>
-                        <a:rPr sz="1250" b="0" i="0">
+                        <a:rPr sz="1250" b="0" i="0" lang="ja-JP">
                           <a:solidFill>
                             <a:srgbClr val="26303A"/>
                           </a:solidFill>
@@ -13243,7 +13243,7 @@
                     <a:p>
                       <a:pPr algn="l"/>
                       <a:r>
-                        <a:rPr sz="1250" b="0" i="0">
+                        <a:rPr sz="1250" b="0" i="0" lang="ja-JP">
                           <a:solidFill>
                             <a:srgbClr val="26303A"/>
                           </a:solidFill>
@@ -13253,7 +13253,7 @@
                         <a:t>mt10・la21・la36・la40・ta21 に単一作業の完了遅延（</a:t>
                       </a:r>
                       <a:r>
-                        <a:rPr sz="1250" b="0" i="1">
+                        <a:rPr sz="1250" b="0" i="1" lang="ja-JP">
                           <a:solidFill>
                             <a:srgbClr val="26303A"/>
                           </a:solidFill>
@@ -13263,7 +13263,7 @@
                         <a:t>Δ</a:t>
                       </a:r>
                       <a:r>
-                        <a:rPr sz="1250" b="0" i="0">
+                        <a:rPr sz="1250" b="0" i="0" lang="ja-JP">
                           <a:solidFill>
                             <a:srgbClr val="26303A"/>
                           </a:solidFill>
@@ -13294,7 +13294,7 @@
                     <a:p>
                       <a:pPr algn="l"/>
                       <a:r>
-                        <a:rPr sz="1250" b="0" i="0">
+                        <a:rPr sz="1250" b="0" i="0" lang="ja-JP">
                           <a:solidFill>
                             <a:srgbClr val="26303A"/>
                           </a:solidFill>
@@ -13323,7 +13323,7 @@
                     <a:p>
                       <a:pPr algn="l"/>
                       <a:r>
-                        <a:rPr sz="1250" b="0" i="0">
+                        <a:rPr sz="1250" b="0" i="0" lang="ja-JP">
                           <a:solidFill>
                             <a:srgbClr val="26303A"/>
                           </a:solidFill>
@@ -13336,7 +13336,7 @@
                     <a:p>
                       <a:pPr algn="l"/>
                       <a:r>
-                        <a:rPr sz="1250" b="0" i="0">
+                        <a:rPr sz="1250" b="0" i="0" lang="ja-JP">
                           <a:solidFill>
                             <a:srgbClr val="26303A"/>
                           </a:solidFill>
@@ -13346,7 +13346,7 @@
                         <a:t>la36 と ta21 は同一問題・同一 </a:t>
                       </a:r>
                       <a:r>
-                        <a:rPr sz="1250" b="0" i="1">
+                        <a:rPr sz="1250" b="0" i="1" lang="ja-JP">
                           <a:solidFill>
                             <a:srgbClr val="26303A"/>
                           </a:solidFill>
@@ -13356,7 +13356,7 @@
                         <a:t>S</a:t>
                       </a:r>
                       <a:r>
-                        <a:rPr sz="900" b="0" i="1" baseline="-22000">
+                        <a:rPr sz="900" b="0" i="1" lang="ja-JP" baseline="-22000">
                           <a:solidFill>
                             <a:srgbClr val="26303A"/>
                           </a:solidFill>
@@ -13366,7 +13366,7 @@
                         <a:t>p</a:t>
                       </a:r>
                       <a:r>
-                        <a:rPr sz="1250" b="0" i="0">
+                        <a:rPr sz="1250" b="0" i="0" lang="ja-JP">
                           <a:solidFill>
                             <a:srgbClr val="26303A"/>
                           </a:solidFill>
@@ -13397,7 +13397,7 @@
                     <a:p>
                       <a:pPr algn="l"/>
                       <a:r>
-                        <a:rPr sz="1250" b="0" i="0">
+                        <a:rPr sz="1250" b="0" i="0" lang="ja-JP">
                           <a:solidFill>
                             <a:srgbClr val="26303A"/>
                           </a:solidFill>
@@ -13407,7 +13407,7 @@
                         <a:t>初期スケジュール </a:t>
                       </a:r>
                       <a:r>
-                        <a:rPr sz="1250" b="0" i="1">
+                        <a:rPr sz="1250" b="0" i="1" lang="ja-JP">
                           <a:solidFill>
                             <a:srgbClr val="26303A"/>
                           </a:solidFill>
@@ -13417,7 +13417,7 @@
                         <a:t>S</a:t>
                       </a:r>
                       <a:r>
-                        <a:rPr sz="900" b="0" i="1" baseline="-22000">
+                        <a:rPr sz="900" b="0" i="1" lang="ja-JP" baseline="-22000">
                           <a:solidFill>
                             <a:srgbClr val="26303A"/>
                           </a:solidFill>
@@ -13446,7 +13446,7 @@
                     <a:p>
                       <a:pPr algn="l"/>
                       <a:r>
-                        <a:rPr sz="1250" b="0" i="0">
+                        <a:rPr sz="1250" b="0" i="0" lang="ja-JP">
                           <a:solidFill>
                             <a:srgbClr val="26303A"/>
                           </a:solidFill>
@@ -13477,7 +13477,7 @@
                     <a:p>
                       <a:pPr algn="l"/>
                       <a:r>
-                        <a:rPr sz="1250" b="0" i="0">
+                        <a:rPr sz="1250" b="0" i="0" lang="ja-JP">
                           <a:solidFill>
                             <a:srgbClr val="26303A"/>
                           </a:solidFill>
@@ -13487,7 +13487,7 @@
                         <a:t>重み </a:t>
                       </a:r>
                       <a:r>
-                        <a:rPr sz="1250" b="0" i="1">
+                        <a:rPr sz="1250" b="0" i="1" lang="ja-JP">
                           <a:solidFill>
                             <a:srgbClr val="26303A"/>
                           </a:solidFill>
@@ -13516,7 +13516,7 @@
                     <a:p>
                       <a:pPr algn="l"/>
                       <a:r>
-                        <a:rPr sz="1250" b="0" i="0">
+                        <a:rPr sz="1250" b="0" i="0" lang="ja-JP">
                           <a:solidFill>
                             <a:srgbClr val="26303A"/>
                           </a:solidFill>
@@ -13526,7 +13526,7 @@
                         <a:t>0, 0.1, …, 0.9 の 10 点（</a:t>
                       </a:r>
                       <a:r>
-                        <a:rPr sz="1250" b="0" i="1">
+                        <a:rPr sz="1250" b="0" i="1" lang="ja-JP">
                           <a:solidFill>
                             <a:srgbClr val="26303A"/>
                           </a:solidFill>
@@ -13536,7 +13536,7 @@
                         <a:t>λ</a:t>
                       </a:r>
                       <a:r>
-                        <a:rPr sz="1250" b="0" i="0">
+                        <a:rPr sz="1250" b="0" i="0" lang="ja-JP">
                           <a:solidFill>
                             <a:srgbClr val="26303A"/>
                           </a:solidFill>
@@ -13546,7 +13546,7 @@
                         <a:t> = 1.0 は </a:t>
                       </a:r>
                       <a:r>
-                        <a:rPr sz="1250" b="0" i="1">
+                        <a:rPr sz="1250" b="0" i="1" lang="ja-JP">
                           <a:solidFill>
                             <a:srgbClr val="26303A"/>
                           </a:solidFill>
@@ -13556,7 +13556,7 @@
                         <a:t>D</a:t>
                       </a:r>
                       <a:r>
-                        <a:rPr sz="1250" b="0" i="0">
+                        <a:rPr sz="1250" b="0" i="0" lang="ja-JP">
                           <a:solidFill>
                             <a:srgbClr val="26303A"/>
                           </a:solidFill>
@@ -13587,7 +13587,7 @@
                     <a:p>
                       <a:pPr algn="l"/>
                       <a:r>
-                        <a:rPr sz="1250" b="0" i="0">
+                        <a:rPr sz="1250" b="0" i="0" lang="ja-JP">
                           <a:solidFill>
                             <a:srgbClr val="26303A"/>
                           </a:solidFill>
@@ -13616,7 +13616,7 @@
                     <a:p>
                       <a:pPr algn="l"/>
                       <a:r>
-                        <a:rPr sz="1250" b="0" i="0">
+                        <a:rPr sz="1250" b="0" i="0" lang="ja-JP">
                           <a:solidFill>
                             <a:srgbClr val="26303A"/>
                           </a:solidFill>
@@ -13647,7 +13647,7 @@
                     <a:p>
                       <a:pPr algn="l"/>
                       <a:r>
-                        <a:rPr sz="1250" b="0" i="0">
+                        <a:rPr sz="1250" b="0" i="0" lang="ja-JP">
                           <a:solidFill>
                             <a:srgbClr val="26303A"/>
                           </a:solidFill>
@@ -13676,7 +13676,7 @@
                     <a:p>
                       <a:pPr algn="l"/>
                       <a:r>
-                        <a:rPr sz="1250" b="0" i="0">
+                        <a:rPr sz="1250" b="0" i="0" lang="ja-JP">
                           <a:solidFill>
                             <a:srgbClr val="26303A"/>
                           </a:solidFill>
@@ -13686,7 +13686,7 @@
                         <a:t>GA・Memetic 系：交叉率 0.85，突然変異率 0.1，集団 50（</a:t>
                       </a:r>
                       <a:r>
-                        <a:rPr sz="1250" b="0" i="1">
+                        <a:rPr sz="1250" b="0" i="1" lang="ja-JP">
                           <a:solidFill>
                             <a:srgbClr val="26303A"/>
                           </a:solidFill>
@@ -13696,7 +13696,7 @@
                         <a:t>S</a:t>
                       </a:r>
                       <a:r>
-                        <a:rPr sz="900" b="0" i="1" baseline="-22000">
+                        <a:rPr sz="900" b="0" i="1" lang="ja-JP" baseline="-22000">
                           <a:solidFill>
                             <a:srgbClr val="26303A"/>
                           </a:solidFill>
@@ -13706,7 +13706,7 @@
                         <a:t>p</a:t>
                       </a:r>
                       <a:r>
-                        <a:rPr sz="1250" b="0" i="0">
+                        <a:rPr sz="1250" b="0" i="0" lang="ja-JP">
                           <a:solidFill>
                             <a:srgbClr val="26303A"/>
                           </a:solidFill>
@@ -13719,7 +13719,7 @@
                     <a:p>
                       <a:pPr algn="l"/>
                       <a:r>
-                        <a:rPr sz="1250" b="0" i="0">
+                        <a:rPr sz="1250" b="0" i="0" lang="ja-JP">
                           <a:solidFill>
                             <a:srgbClr val="26303A"/>
                           </a:solidFill>
@@ -13750,7 +13750,7 @@
                     <a:p>
                       <a:pPr algn="l"/>
                       <a:r>
-                        <a:rPr sz="1250" b="0" i="0">
+                        <a:rPr sz="1250" b="0" i="0" lang="ja-JP">
                           <a:solidFill>
                             <a:srgbClr val="26303A"/>
                           </a:solidFill>
@@ -13779,7 +13779,7 @@
                     <a:p>
                       <a:pPr algn="l"/>
                       <a:r>
-                        <a:rPr sz="1250" b="0" i="0">
+                        <a:rPr sz="1250" b="0" i="0" lang="ja-JP">
                           <a:solidFill>
                             <a:srgbClr val="26303A"/>
                           </a:solidFill>
@@ -13792,7 +13792,7 @@
                     <a:p>
                       <a:pPr algn="l"/>
                       <a:r>
-                        <a:rPr sz="1250" b="0" i="0">
+                        <a:rPr sz="1250" b="0" i="0" lang="ja-JP">
                           <a:solidFill>
                             <a:srgbClr val="26303A"/>
                           </a:solidFill>
@@ -13823,7 +13823,7 @@
                     <a:p>
                       <a:pPr algn="l"/>
                       <a:r>
-                        <a:rPr sz="1250" b="0" i="0">
+                        <a:rPr sz="1250" b="0" i="0" lang="ja-JP">
                           <a:solidFill>
                             <a:srgbClr val="26303A"/>
                           </a:solidFill>
@@ -13852,7 +13852,7 @@
                     <a:p>
                       <a:pPr algn="l"/>
                       <a:r>
-                        <a:rPr sz="1250" b="0" i="1">
+                        <a:rPr sz="1250" b="0" i="1" lang="ja-JP">
                           <a:solidFill>
                             <a:srgbClr val="26303A"/>
                           </a:solidFill>
@@ -13862,7 +13862,7 @@
                         <a:t>θ</a:t>
                       </a:r>
                       <a:r>
-                        <a:rPr sz="1250" b="0" i="0">
+                        <a:rPr sz="1250" b="0" i="0" lang="ja-JP">
                           <a:solidFill>
                             <a:srgbClr val="26303A"/>
                           </a:solidFill>
@@ -13872,7 +13872,7 @@
                         <a:t> = 50（</a:t>
                       </a:r>
                       <a:r>
-                        <a:rPr sz="1250" b="0" i="1">
+                        <a:rPr sz="1250" b="0" i="1" lang="ja-JP">
                           <a:solidFill>
                             <a:srgbClr val="26303A"/>
                           </a:solidFill>
@@ -13882,7 +13882,7 @@
                         <a:t>P</a:t>
                       </a:r>
                       <a:r>
-                        <a:rPr sz="900" b="0" i="1" baseline="-22000">
+                        <a:rPr sz="900" b="0" i="1" lang="ja-JP" baseline="-22000">
                           <a:solidFill>
                             <a:srgbClr val="26303A"/>
                           </a:solidFill>
@@ -13892,7 +13892,7 @@
                         <a:t>50</a:t>
                       </a:r>
                       <a:r>
-                        <a:rPr sz="1250" b="0" i="0">
+                        <a:rPr sz="1250" b="0" i="0" lang="ja-JP">
                           <a:solidFill>
                             <a:srgbClr val="26303A"/>
                           </a:solidFill>
@@ -13902,7 +13902,7 @@
                         <a:t>：全手法・全試行の非劣解の </a:t>
                       </a:r>
                       <a:r>
-                        <a:rPr sz="1250" b="0" i="1">
+                        <a:rPr sz="1250" b="0" i="1" lang="ja-JP">
                           <a:solidFill>
                             <a:srgbClr val="26303A"/>
                           </a:solidFill>
@@ -13912,7 +13912,7 @@
                         <a:t>D</a:t>
                       </a:r>
                       <a:r>
-                        <a:rPr sz="1250" b="0" i="0">
+                        <a:rPr sz="1250" b="0" i="0" lang="ja-JP">
                           <a:solidFill>
                             <a:srgbClr val="26303A"/>
                           </a:solidFill>
@@ -13943,7 +13943,7 @@
                     <a:p>
                       <a:pPr algn="l"/>
                       <a:r>
-                        <a:rPr sz="1250" b="0" i="0">
+                        <a:rPr sz="1250" b="0" i="0" lang="ja-JP">
                           <a:solidFill>
                             <a:srgbClr val="26303A"/>
                           </a:solidFill>
@@ -13972,7 +13972,7 @@
                     <a:p>
                       <a:pPr algn="l"/>
                       <a:r>
-                        <a:rPr sz="1250" b="0" i="0">
+                        <a:rPr sz="1250" b="0" i="0" lang="ja-JP">
                           <a:solidFill>
                             <a:srgbClr val="26303A"/>
                           </a:solidFill>
@@ -14027,7 +14027,7 @@
               </a:lnSpc>
             </a:pPr>
             <a:r>
-              <a:rPr sz="1350" b="1" i="0">
+              <a:rPr sz="1350" b="1" i="0" lang="ja-JP">
                 <a:solidFill>
                   <a:srgbClr val="16385C"/>
                 </a:solidFill>
@@ -14070,7 +14070,7 @@
               </a:spcBef>
             </a:pPr>
             <a:r>
-              <a:rPr sz="1040" b="1" i="0">
+              <a:rPr sz="1040" b="1" i="0" lang="ja-JP">
                 <a:solidFill>
                   <a:srgbClr val="16385C"/>
                 </a:solidFill>
@@ -14080,7 +14080,7 @@
               <a:t>▪ </a:t>
             </a:r>
             <a:r>
-              <a:rPr sz="1300" b="1" i="0">
+              <a:rPr sz="1300" b="1" i="0" lang="ja-JP">
                 <a:solidFill>
                   <a:srgbClr val="16385C"/>
                 </a:solidFill>
@@ -14090,7 +14090,7 @@
               <a:t>高安定領域の境界</a:t>
             </a:r>
             <a:r>
-              <a:rPr sz="1300" b="0" i="0">
+              <a:rPr sz="1300" b="0" i="0" lang="ja-JP">
                 <a:solidFill>
                   <a:srgbClr val="26303A"/>
                 </a:solidFill>
@@ -14100,7 +14100,7 @@
               <a:t>：</a:t>
             </a:r>
             <a:r>
-              <a:rPr sz="1300" b="0" i="1">
+              <a:rPr sz="1300" b="0" i="1" lang="ja-JP">
                 <a:solidFill>
                   <a:srgbClr val="26303A"/>
                 </a:solidFill>
@@ -14110,7 +14110,7 @@
               <a:t>θ</a:t>
             </a:r>
             <a:r>
-              <a:rPr sz="1300" b="0" i="0">
+              <a:rPr sz="1300" b="0" i="0" lang="ja-JP">
                 <a:solidFill>
                   <a:srgbClr val="26303A"/>
                 </a:solidFill>
@@ -14130,7 +14130,7 @@
               </a:spcBef>
             </a:pPr>
             <a:r>
-              <a:rPr sz="1040" b="1" i="0">
+              <a:rPr sz="1040" b="1" i="0" lang="ja-JP">
                 <a:solidFill>
                   <a:srgbClr val="16385C"/>
                 </a:solidFill>
@@ -14140,7 +14140,7 @@
               <a:t>▪ </a:t>
             </a:r>
             <a:r>
-              <a:rPr sz="1300" b="1" i="0">
+              <a:rPr sz="1300" b="1" i="0" lang="ja-JP">
                 <a:solidFill>
                   <a:srgbClr val="16385C"/>
                 </a:solidFill>
@@ -14150,7 +14150,7 @@
               <a:t>計算予算</a:t>
             </a:r>
             <a:r>
-              <a:rPr sz="1300" b="0" i="0">
+              <a:rPr sz="1300" b="0" i="0" lang="ja-JP">
                 <a:solidFill>
                   <a:srgbClr val="26303A"/>
                 </a:solidFill>
@@ -14170,7 +14170,7 @@
               </a:spcBef>
             </a:pPr>
             <a:r>
-              <a:rPr sz="1040" b="1" i="0">
+              <a:rPr sz="1040" b="1" i="0" lang="ja-JP">
                 <a:solidFill>
                   <a:srgbClr val="16385C"/>
                 </a:solidFill>
@@ -14180,7 +14180,7 @@
               <a:t>▪ </a:t>
             </a:r>
             <a:r>
-              <a:rPr sz="1300" b="1" i="0">
+              <a:rPr sz="1300" b="1" i="0" lang="ja-JP">
                 <a:solidFill>
                   <a:srgbClr val="16385C"/>
                 </a:solidFill>
@@ -14190,7 +14190,7 @@
               <a:t>パラメータ感度</a:t>
             </a:r>
             <a:r>
-              <a:rPr sz="1300" b="0" i="0">
+              <a:rPr sz="1300" b="0" i="0" lang="ja-JP">
                 <a:solidFill>
                   <a:srgbClr val="26303A"/>
                 </a:solidFill>
@@ -14243,7 +14243,7 @@
           <a:lstStyle/>
           <a:p>
             <a:r>
-              <a:rPr sz="2450" b="1" i="0">
+              <a:rPr sz="2450" b="1" i="0" lang="ja-JP">
                 <a:solidFill>
                   <a:srgbClr val="16385C"/>
                 </a:solidFill>
@@ -14363,7 +14363,7 @@
               </a:lnSpc>
             </a:pPr>
             <a:r>
-              <a:rPr sz="1500" b="1" i="0">
+              <a:rPr sz="1500" b="1" i="0" lang="ja-JP">
                 <a:solidFill>
                   <a:srgbClr val="16385C"/>
                 </a:solidFill>
@@ -14398,7 +14398,7 @@
           <a:lstStyle/>
           <a:p>
             <a:r>
-              <a:rPr sz="900" b="0" i="0">
+              <a:rPr sz="900" b="0" i="0" lang="ja-JP">
                 <a:solidFill>
                   <a:srgbClr val="6E7A88"/>
                 </a:solidFill>
@@ -14434,7 +14434,7 @@
           <a:p>
             <a:pPr algn="r"/>
             <a:r>
-              <a:rPr sz="1000" b="0" i="0">
+              <a:rPr sz="1000" b="0" i="0" lang="ja-JP">
                 <a:solidFill>
                   <a:srgbClr val="6E7A88"/>
                 </a:solidFill>
@@ -14501,7 +14501,7 @@
               </a:spcBef>
             </a:pPr>
             <a:r>
-              <a:rPr sz="1440" b="1" i="0">
+              <a:rPr sz="1440" b="1" i="0" lang="ja-JP">
                 <a:solidFill>
                   <a:srgbClr val="16385C"/>
                 </a:solidFill>
@@ -14511,7 +14511,7 @@
               <a:t>▪ </a:t>
             </a:r>
             <a:r>
-              <a:rPr sz="1800" b="0" i="0">
+              <a:rPr sz="1800" b="0" i="0" lang="ja-JP">
                 <a:solidFill>
                   <a:srgbClr val="26303A"/>
                 </a:solidFill>
@@ -14531,7 +14531,7 @@
               </a:spcBef>
             </a:pPr>
             <a:r>
-              <a:rPr sz="1440" b="1" i="0">
+              <a:rPr sz="1440" b="1" i="0" lang="ja-JP">
                 <a:solidFill>
                   <a:srgbClr val="16385C"/>
                 </a:solidFill>
@@ -14541,7 +14541,7 @@
               <a:t>▪ </a:t>
             </a:r>
             <a:r>
-              <a:rPr sz="1800" b="0" i="0">
+              <a:rPr sz="1800" b="0" i="0" lang="ja-JP">
                 <a:solidFill>
                   <a:srgbClr val="26303A"/>
                 </a:solidFill>
@@ -14551,7 +14551,7 @@
               <a:t>(b) ta21L：Memetic は高安定領域に入るが，</a:t>
             </a:r>
             <a:r>
-              <a:rPr sz="1800" b="0" i="1">
+              <a:rPr sz="1800" b="0" i="1" lang="ja-JP">
                 <a:solidFill>
                   <a:srgbClr val="26303A"/>
                 </a:solidFill>
@@ -14561,7 +14561,7 @@
               <a:t>MS</a:t>
             </a:r>
             <a:r>
-              <a:rPr sz="1800" b="0" i="0">
+              <a:rPr sz="1800" b="0" i="0" lang="ja-JP">
                 <a:solidFill>
                   <a:srgbClr val="26303A"/>
                 </a:solidFill>
@@ -14581,7 +14581,7 @@
               </a:spcBef>
             </a:pPr>
             <a:r>
-              <a:rPr sz="1440" b="1" i="0">
+              <a:rPr sz="1440" b="1" i="0" lang="ja-JP">
                 <a:solidFill>
                   <a:srgbClr val="16385C"/>
                 </a:solidFill>
@@ -14591,7 +14591,7 @@
               <a:t>▪ </a:t>
             </a:r>
             <a:r>
-              <a:rPr sz="1800" b="0" i="0">
+              <a:rPr sz="1800" b="0" i="0" lang="ja-JP">
                 <a:solidFill>
                   <a:srgbClr val="26303A"/>
                 </a:solidFill>
@@ -14644,7 +14644,7 @@
           <a:lstStyle/>
           <a:p>
             <a:r>
-              <a:rPr sz="2450" b="1" i="0">
+              <a:rPr sz="2450" b="1" i="0" lang="ja-JP">
                 <a:solidFill>
                   <a:srgbClr val="16385C"/>
                 </a:solidFill>
@@ -14764,7 +14764,7 @@
               </a:lnSpc>
             </a:pPr>
             <a:r>
-              <a:rPr sz="1500" b="1" i="0">
+              <a:rPr sz="1500" b="1" i="0" lang="ja-JP">
                 <a:solidFill>
                   <a:srgbClr val="16385C"/>
                 </a:solidFill>
@@ -14799,7 +14799,7 @@
           <a:lstStyle/>
           <a:p>
             <a:r>
-              <a:rPr sz="900" b="0" i="0">
+              <a:rPr sz="900" b="0" i="0" lang="ja-JP">
                 <a:solidFill>
                   <a:srgbClr val="6E7A88"/>
                 </a:solidFill>
@@ -14835,7 +14835,7 @@
           <a:p>
             <a:pPr algn="r"/>
             <a:r>
-              <a:rPr sz="1000" b="0" i="0">
+              <a:rPr sz="1000" b="0" i="0" lang="ja-JP">
                 <a:solidFill>
                   <a:srgbClr val="6E7A88"/>
                 </a:solidFill>
@@ -14959,7 +14959,7 @@
               </a:lnSpc>
             </a:pPr>
             <a:r>
-              <a:rPr sz="850" b="1" i="0">
+              <a:rPr sz="850" b="1" i="0" lang="ja-JP">
                 <a:solidFill>
                   <a:srgbClr val="16385C"/>
                 </a:solidFill>
@@ -15058,7 +15058,7 @@
               </a:lnSpc>
             </a:pPr>
             <a:r>
-              <a:rPr sz="850" b="1" i="0">
+              <a:rPr sz="850" b="1" i="0" lang="ja-JP">
                 <a:solidFill>
                   <a:srgbClr val="6A4C93"/>
                 </a:solidFill>
@@ -15101,7 +15101,7 @@
               </a:spcBef>
             </a:pPr>
             <a:r>
-              <a:rPr sz="1440" b="1" i="0">
+              <a:rPr sz="1440" b="1" i="0" lang="ja-JP">
                 <a:solidFill>
                   <a:srgbClr val="16385C"/>
                 </a:solidFill>
@@ -15111,7 +15111,7 @@
               <a:t>▪ </a:t>
             </a:r>
             <a:r>
-              <a:rPr sz="1800" b="1" i="0">
+              <a:rPr sz="1800" b="1" i="0" lang="ja-JP">
                 <a:solidFill>
                   <a:srgbClr val="16385C"/>
                 </a:solidFill>
@@ -15121,7 +15121,7 @@
               <a:t>仮説 1</a:t>
             </a:r>
             <a:r>
-              <a:rPr sz="1800" b="0" i="0">
+              <a:rPr sz="1800" b="0" i="0" lang="ja-JP">
                 <a:solidFill>
                   <a:srgbClr val="26303A"/>
                 </a:solidFill>
@@ -15131,7 +15131,7 @@
               <a:t>：演算子なしで ILS &gt; Memetic（全シナリオで </a:t>
             </a:r>
             <a:r>
-              <a:rPr sz="1800" b="0" i="1">
+              <a:rPr sz="1800" b="0" i="1" lang="ja-JP">
                 <a:solidFill>
                   <a:srgbClr val="26303A"/>
                 </a:solidFill>
@@ -15141,7 +15141,7 @@
               <a:t>p</a:t>
             </a:r>
             <a:r>
-              <a:rPr sz="1800" b="0" i="0">
+              <a:rPr sz="1800" b="0" i="0" lang="ja-JP">
                 <a:solidFill>
                   <a:srgbClr val="26303A"/>
                 </a:solidFill>
@@ -15151,7 +15151,7 @@
               <a:t> &lt; 0.001，</a:t>
             </a:r>
             <a:r>
-              <a:rPr sz="1800" b="0" i="1">
+              <a:rPr sz="1800" b="0" i="1" lang="ja-JP">
                 <a:solidFill>
                   <a:srgbClr val="26303A"/>
                 </a:solidFill>
@@ -15161,7 +15161,7 @@
               <a:t>|δ|</a:t>
             </a:r>
             <a:r>
-              <a:rPr sz="1800" b="0" i="0">
+              <a:rPr sz="1800" b="0" i="0" lang="ja-JP">
                 <a:solidFill>
                   <a:srgbClr val="26303A"/>
                 </a:solidFill>
@@ -15204,7 +15204,7 @@
               </a:spcBef>
             </a:pPr>
             <a:r>
-              <a:rPr sz="1440" b="1" i="0">
+              <a:rPr sz="1440" b="1" i="0" lang="ja-JP">
                 <a:solidFill>
                   <a:srgbClr val="16385C"/>
                 </a:solidFill>
@@ -15214,7 +15214,7 @@
               <a:t>▪ </a:t>
             </a:r>
             <a:r>
-              <a:rPr sz="1800" b="1" i="0">
+              <a:rPr sz="1800" b="1" i="0" lang="ja-JP">
                 <a:solidFill>
                   <a:srgbClr val="6A4C93"/>
                 </a:solidFill>
@@ -15224,7 +15224,7 @@
               <a:t>仮説 2</a:t>
             </a:r>
             <a:r>
-              <a:rPr sz="1800" b="0" i="0">
+              <a:rPr sz="1800" b="0" i="0" lang="ja-JP">
                 <a:solidFill>
                   <a:srgbClr val="26303A"/>
                 </a:solidFill>
@@ -15234,7 +15234,7 @@
               <a:t>：演算子を組み込んだ Memetic &gt; Memetic（全シナリオで </a:t>
             </a:r>
             <a:r>
-              <a:rPr sz="1800" b="0" i="1">
+              <a:rPr sz="1800" b="0" i="1" lang="ja-JP">
                 <a:solidFill>
                   <a:srgbClr val="26303A"/>
                 </a:solidFill>
@@ -15244,7 +15244,7 @@
               <a:t>p</a:t>
             </a:r>
             <a:r>
-              <a:rPr sz="1800" b="0" i="0">
+              <a:rPr sz="1800" b="0" i="0" lang="ja-JP">
                 <a:solidFill>
                   <a:srgbClr val="26303A"/>
                 </a:solidFill>
@@ -15254,7 +15254,7 @@
               <a:t> &lt; 0.001，</a:t>
             </a:r>
             <a:r>
-              <a:rPr sz="1800" b="0" i="1">
+              <a:rPr sz="1800" b="0" i="1" lang="ja-JP">
                 <a:solidFill>
                   <a:srgbClr val="26303A"/>
                 </a:solidFill>
@@ -15264,7 +15264,7 @@
               <a:t>|δ|</a:t>
             </a:r>
             <a:r>
-              <a:rPr sz="1800" b="0" i="0">
+              <a:rPr sz="1800" b="0" i="0" lang="ja-JP">
                 <a:solidFill>
                   <a:srgbClr val="26303A"/>
                 </a:solidFill>
@@ -15284,7 +15284,7 @@
               </a:spcBef>
             </a:pPr>
             <a:r>
-              <a:rPr sz="1530" b="0" i="0">
+              <a:rPr sz="1530" b="0" i="0" lang="ja-JP">
                 <a:solidFill>
                   <a:srgbClr val="6E7A88"/>
                 </a:solidFill>
@@ -15294,7 +15294,7 @@
               <a:t>　－ </a:t>
             </a:r>
             <a:r>
-              <a:rPr sz="1620" b="0" i="0">
+              <a:rPr sz="1620" b="0" i="0" lang="ja-JP">
                 <a:solidFill>
                   <a:srgbClr val="26303A"/>
                 </a:solidFill>
@@ -15439,7 +15439,7 @@
           <a:lstStyle/>
           <a:p>
             <a:r>
-              <a:rPr sz="4000" b="1" i="0">
+              <a:rPr sz="4000" b="1" i="0" lang="ja-JP">
                 <a:solidFill>
                   <a:srgbClr val="FFFFFF"/>
                 </a:solidFill>
@@ -15474,7 +15474,7 @@
           <a:lstStyle/>
           <a:p>
             <a:r>
-              <a:rPr sz="2600" b="1" i="0">
+              <a:rPr sz="2600" b="1" i="0" lang="ja-JP">
                 <a:solidFill>
                   <a:srgbClr val="FFFFFF"/>
                 </a:solidFill>
@@ -15491,14 +15491,14 @@
               </a:spcBef>
             </a:pPr>
             <a:r>
-              <a:rPr sz="1300" b="0" i="0">
+              <a:rPr sz="1300" b="0" i="0" lang="ja-JP">
                 <a:solidFill>
                   <a:srgbClr val="AFC2D8"/>
                 </a:solidFill>
                 <a:latin typeface="Meiryo"/>
                 <a:ea typeface="Meiryo"/>
               </a:rPr>
-              <a:t>外乱と再スケジューリング・高安定領域と特殊性・先行研究と課題・仮説</a:t>
+              <a:t>外乱と再スケジューリング・高安定領域・特殊性・先行研究・課題・仮説</a:t>
             </a:r>
           </a:p>
         </p:txBody>
@@ -15526,7 +15526,7 @@
           <a:lstStyle/>
           <a:p>
             <a:r>
-              <a:rPr sz="3000" b="1" i="0">
+              <a:rPr sz="3000" b="1" i="0" lang="ja-JP">
                 <a:solidFill>
                   <a:srgbClr val="3E618C"/>
                 </a:solidFill>
@@ -15561,7 +15561,7 @@
           <a:lstStyle/>
           <a:p>
             <a:r>
-              <a:rPr sz="2000" b="0" i="0">
+              <a:rPr sz="2000" b="0" i="0" lang="ja-JP">
                 <a:solidFill>
                   <a:srgbClr val="3E618C"/>
                 </a:solidFill>
@@ -15596,7 +15596,7 @@
           <a:lstStyle/>
           <a:p>
             <a:r>
-              <a:rPr sz="3000" b="1" i="0">
+              <a:rPr sz="3000" b="1" i="0" lang="ja-JP">
                 <a:solidFill>
                   <a:srgbClr val="3E618C"/>
                 </a:solidFill>
@@ -15631,7 +15631,7 @@
           <a:lstStyle/>
           <a:p>
             <a:r>
-              <a:rPr sz="2000" b="0" i="0">
+              <a:rPr sz="2000" b="0" i="0" lang="ja-JP">
                 <a:solidFill>
                   <a:srgbClr val="3E618C"/>
                 </a:solidFill>
@@ -15666,7 +15666,7 @@
           <a:lstStyle/>
           <a:p>
             <a:r>
-              <a:rPr sz="3000" b="1" i="0">
+              <a:rPr sz="3000" b="1" i="0" lang="ja-JP">
                 <a:solidFill>
                   <a:srgbClr val="3E618C"/>
                 </a:solidFill>
@@ -15701,7 +15701,7 @@
           <a:lstStyle/>
           <a:p>
             <a:r>
-              <a:rPr sz="2000" b="0" i="0">
+              <a:rPr sz="2000" b="0" i="0" lang="ja-JP">
                 <a:solidFill>
                   <a:srgbClr val="3E618C"/>
                 </a:solidFill>
@@ -15737,7 +15737,7 @@
           <a:p>
             <a:pPr algn="r"/>
             <a:r>
-              <a:rPr sz="1000" b="0" i="0">
+              <a:rPr sz="1000" b="0" i="0" lang="ja-JP">
                 <a:solidFill>
                   <a:srgbClr val="AFC2D8"/>
                 </a:solidFill>
@@ -15790,7 +15790,7 @@
           <a:lstStyle/>
           <a:p>
             <a:r>
-              <a:rPr sz="2450" b="1" i="0">
+              <a:rPr sz="2450" b="1" i="0" lang="ja-JP">
                 <a:solidFill>
                   <a:srgbClr val="16385C"/>
                 </a:solidFill>
@@ -15910,7 +15910,7 @@
               </a:lnSpc>
             </a:pPr>
             <a:r>
-              <a:rPr sz="1500" b="1" i="0">
+              <a:rPr sz="1500" b="1" i="0" lang="ja-JP">
                 <a:solidFill>
                   <a:srgbClr val="16385C"/>
                 </a:solidFill>
@@ -15945,7 +15945,7 @@
           <a:lstStyle/>
           <a:p>
             <a:r>
-              <a:rPr sz="900" b="0" i="0">
+              <a:rPr sz="900" b="0" i="0" lang="ja-JP">
                 <a:solidFill>
                   <a:srgbClr val="6E7A88"/>
                 </a:solidFill>
@@ -15981,7 +15981,7 @@
           <a:p>
             <a:pPr algn="r"/>
             <a:r>
-              <a:rPr sz="1000" b="0" i="0">
+              <a:rPr sz="1000" b="0" i="0" lang="ja-JP">
                 <a:solidFill>
                   <a:srgbClr val="6E7A88"/>
                 </a:solidFill>
@@ -16045,7 +16045,7 @@
               </a:lnSpc>
             </a:pPr>
             <a:r>
-              <a:rPr sz="1250" b="0" i="0">
+              <a:rPr sz="1250" b="0" i="0" lang="ja-JP">
                 <a:solidFill>
                   <a:srgbClr val="6E7A88"/>
                 </a:solidFill>
@@ -16088,7 +16088,7 @@
               </a:spcBef>
             </a:pPr>
             <a:r>
-              <a:rPr sz="1240" b="1" i="0">
+              <a:rPr sz="1240" b="1" i="0" lang="ja-JP">
                 <a:solidFill>
                   <a:srgbClr val="16385C"/>
                 </a:solidFill>
@@ -16098,7 +16098,7 @@
               <a:t>▪ </a:t>
             </a:r>
             <a:r>
-              <a:rPr sz="1550" b="0" i="0">
+              <a:rPr sz="1550" b="0" i="0" lang="ja-JP">
                 <a:solidFill>
                   <a:srgbClr val="26303A"/>
                 </a:solidFill>
@@ -16118,7 +16118,7 @@
               </a:spcBef>
             </a:pPr>
             <a:r>
-              <a:rPr sz="1240" b="1" i="0">
+              <a:rPr sz="1240" b="1" i="0" lang="ja-JP">
                 <a:solidFill>
                   <a:srgbClr val="16385C"/>
                 </a:solidFill>
@@ -16128,7 +16128,7 @@
               <a:t>▪ </a:t>
             </a:r>
             <a:r>
-              <a:rPr sz="1550" b="1" i="0">
+              <a:rPr sz="1550" b="1" i="0" lang="ja-JP">
                 <a:solidFill>
                   <a:srgbClr val="16385C"/>
                 </a:solidFill>
@@ -16138,7 +16138,7 @@
               <a:t>Memetic</a:t>
             </a:r>
             <a:r>
-              <a:rPr sz="1550" b="0" i="0">
+              <a:rPr sz="1550" b="0" i="0" lang="ja-JP">
                 <a:solidFill>
                   <a:srgbClr val="26303A"/>
                 </a:solidFill>
@@ -16158,7 +16158,7 @@
               </a:spcBef>
             </a:pPr>
             <a:r>
-              <a:rPr sz="1240" b="1" i="0">
+              <a:rPr sz="1240" b="1" i="0" lang="ja-JP">
                 <a:solidFill>
                   <a:srgbClr val="16385C"/>
                 </a:solidFill>
@@ -16168,7 +16168,7 @@
               <a:t>▪ </a:t>
             </a:r>
             <a:r>
-              <a:rPr sz="1550" b="1" i="0">
+              <a:rPr sz="1550" b="1" i="0" lang="ja-JP">
                 <a:solidFill>
                   <a:srgbClr val="16385C"/>
                 </a:solidFill>
@@ -16178,7 +16178,7 @@
               <a:t>ILS</a:t>
             </a:r>
             <a:r>
-              <a:rPr sz="1550" b="0" i="0">
+              <a:rPr sz="1550" b="0" i="0" lang="ja-JP">
                 <a:solidFill>
                   <a:srgbClr val="26303A"/>
                 </a:solidFill>
@@ -16218,7 +16218,7 @@
               </a:lnSpc>
             </a:pPr>
             <a:r>
-              <a:rPr sz="1650" b="0" i="0">
+              <a:rPr sz="1650" b="0" i="0" lang="ja-JP">
                 <a:solidFill>
                   <a:srgbClr val="26303A"/>
                 </a:solidFill>
@@ -16228,7 +16228,7 @@
               <a:t>→ 演算子の効果は，探索構造の違いそのものではなく，</a:t>
             </a:r>
             <a:r>
-              <a:rPr sz="1650" b="1" i="0">
+              <a:rPr sz="1650" b="1" i="0" lang="ja-JP">
                 <a:solidFill>
                   <a:srgbClr val="16385C"/>
                 </a:solidFill>
@@ -16281,7 +16281,7 @@
           <a:lstStyle/>
           <a:p>
             <a:r>
-              <a:rPr sz="2450" b="1" i="0">
+              <a:rPr sz="2450" b="1" i="0" lang="ja-JP">
                 <a:solidFill>
                   <a:srgbClr val="16385C"/>
                 </a:solidFill>
@@ -16401,7 +16401,7 @@
               </a:lnSpc>
             </a:pPr>
             <a:r>
-              <a:rPr sz="1500" b="1" i="0">
+              <a:rPr sz="1500" b="1" i="0" lang="ja-JP">
                 <a:solidFill>
                   <a:srgbClr val="16385C"/>
                 </a:solidFill>
@@ -16436,7 +16436,7 @@
           <a:lstStyle/>
           <a:p>
             <a:r>
-              <a:rPr sz="900" b="0" i="0">
+              <a:rPr sz="900" b="0" i="0" lang="ja-JP">
                 <a:solidFill>
                   <a:srgbClr val="6E7A88"/>
                 </a:solidFill>
@@ -16472,7 +16472,7 @@
           <a:p>
             <a:pPr algn="r"/>
             <a:r>
-              <a:rPr sz="1000" b="0" i="0">
+              <a:rPr sz="1000" b="0" i="0" lang="ja-JP">
                 <a:solidFill>
                   <a:srgbClr val="6E7A88"/>
                 </a:solidFill>
@@ -16539,7 +16539,7 @@
               </a:spcBef>
             </a:pPr>
             <a:r>
-              <a:rPr sz="1360" b="1" i="0">
+              <a:rPr sz="1360" b="1" i="0" lang="ja-JP">
                 <a:solidFill>
                   <a:srgbClr val="16385C"/>
                 </a:solidFill>
@@ -16549,7 +16549,7 @@
               <a:t>▪ </a:t>
             </a:r>
             <a:r>
-              <a:rPr sz="1700" b="0" i="0">
+              <a:rPr sz="1700" b="0" i="0" lang="ja-JP">
                 <a:solidFill>
                   <a:srgbClr val="26303A"/>
                 </a:solidFill>
@@ -16569,7 +16569,7 @@
               </a:spcBef>
             </a:pPr>
             <a:r>
-              <a:rPr sz="1360" b="1" i="0">
+              <a:rPr sz="1360" b="1" i="0" lang="ja-JP">
                 <a:solidFill>
                   <a:srgbClr val="16385C"/>
                 </a:solidFill>
@@ -16579,7 +16579,7 @@
               <a:t>▪ </a:t>
             </a:r>
             <a:r>
-              <a:rPr sz="1700" b="0" i="0">
+              <a:rPr sz="1700" b="0" i="0" lang="ja-JP">
                 <a:solidFill>
                   <a:srgbClr val="26303A"/>
                 </a:solidFill>
@@ -16632,7 +16632,7 @@
           <a:lstStyle/>
           <a:p>
             <a:r>
-              <a:rPr sz="2450" b="1" i="0">
+              <a:rPr sz="2450" b="1" i="0" lang="ja-JP">
                 <a:solidFill>
                   <a:srgbClr val="16385C"/>
                 </a:solidFill>
@@ -16752,7 +16752,7 @@
               </a:lnSpc>
             </a:pPr>
             <a:r>
-              <a:rPr sz="1500" b="1" i="0">
+              <a:rPr sz="1500" b="1" i="0" lang="ja-JP">
                 <a:solidFill>
                   <a:srgbClr val="16385C"/>
                 </a:solidFill>
@@ -16787,7 +16787,7 @@
           <a:lstStyle/>
           <a:p>
             <a:r>
-              <a:rPr sz="900" b="0" i="0">
+              <a:rPr sz="900" b="0" i="0" lang="ja-JP">
                 <a:solidFill>
                   <a:srgbClr val="6E7A88"/>
                 </a:solidFill>
@@ -16823,7 +16823,7 @@
           <a:p>
             <a:pPr algn="r"/>
             <a:r>
-              <a:rPr sz="1000" b="0" i="0">
+              <a:rPr sz="1000" b="0" i="0" lang="ja-JP">
                 <a:solidFill>
                   <a:srgbClr val="6E7A88"/>
                 </a:solidFill>
@@ -16863,7 +16863,7 @@
               </a:lnSpc>
             </a:pPr>
             <a:r>
-              <a:rPr sz="1700" b="1" i="0">
+              <a:rPr sz="1700" b="1" i="0" lang="ja-JP">
                 <a:solidFill>
                   <a:srgbClr val="16385C"/>
                 </a:solidFill>
@@ -16907,7 +16907,7 @@
                     <a:p>
                       <a:pPr algn="l"/>
                       <a:r>
-                        <a:rPr sz="1650" b="1" i="0">
+                        <a:rPr sz="1650" b="1" i="0" lang="ja-JP">
                           <a:solidFill>
                             <a:srgbClr val="FFFFFF"/>
                           </a:solidFill>
@@ -16931,7 +16931,7 @@
                     <a:p>
                       <a:pPr algn="ctr"/>
                       <a:r>
-                        <a:rPr sz="1650" b="1" i="0">
+                        <a:rPr sz="1650" b="1" i="0" lang="ja-JP">
                           <a:solidFill>
                             <a:srgbClr val="FFFFFF"/>
                           </a:solidFill>
@@ -16955,7 +16955,7 @@
                     <a:p>
                       <a:pPr algn="ctr"/>
                       <a:r>
-                        <a:rPr sz="1650" b="1" i="0">
+                        <a:rPr sz="1650" b="1" i="0" lang="ja-JP">
                           <a:solidFill>
                             <a:srgbClr val="FFFFFF"/>
                           </a:solidFill>
@@ -16979,7 +16979,7 @@
                     <a:p>
                       <a:pPr algn="ctr"/>
                       <a:r>
-                        <a:rPr sz="1650" b="1" i="0">
+                        <a:rPr sz="1650" b="1" i="0" lang="ja-JP">
                           <a:solidFill>
                             <a:srgbClr val="FFFFFF"/>
                           </a:solidFill>
@@ -17005,7 +17005,7 @@
                     <a:p>
                       <a:pPr algn="l"/>
                       <a:r>
-                        <a:rPr sz="1650" b="0" i="0">
+                        <a:rPr sz="1650" b="0" i="0" lang="ja-JP">
                           <a:solidFill>
                             <a:srgbClr val="26303A"/>
                           </a:solidFill>
@@ -17034,7 +17034,7 @@
                     <a:p>
                       <a:pPr algn="ctr"/>
                       <a:r>
-                        <a:rPr sz="1650" b="0" i="0">
+                        <a:rPr sz="1650" b="0" i="0" lang="ja-JP">
                           <a:solidFill>
                             <a:srgbClr val="26303A"/>
                           </a:solidFill>
@@ -17063,7 +17063,7 @@
                     <a:p>
                       <a:pPr algn="ctr"/>
                       <a:r>
-                        <a:rPr sz="1650" b="0" i="0">
+                        <a:rPr sz="1650" b="0" i="0" lang="ja-JP">
                           <a:solidFill>
                             <a:srgbClr val="26303A"/>
                           </a:solidFill>
@@ -17092,7 +17092,7 @@
                     <a:p>
                       <a:pPr algn="ctr"/>
                       <a:r>
-                        <a:rPr sz="1650" b="1" i="0">
+                        <a:rPr sz="1650" b="1" i="0" lang="ja-JP">
                           <a:solidFill>
                             <a:srgbClr val="16385C"/>
                           </a:solidFill>
@@ -17123,7 +17123,7 @@
                     <a:p>
                       <a:pPr algn="l"/>
                       <a:r>
-                        <a:rPr sz="1650" b="0" i="0">
+                        <a:rPr sz="1650" b="0" i="0" lang="ja-JP">
                           <a:solidFill>
                             <a:srgbClr val="26303A"/>
                           </a:solidFill>
@@ -17133,7 +17133,7 @@
                         <a:t>ILS+PR-</a:t>
                       </a:r>
                       <a:r>
-                        <a:rPr sz="1650" b="0" i="1">
+                        <a:rPr sz="1650" b="0" i="1" lang="ja-JP">
                           <a:solidFill>
                             <a:srgbClr val="26303A"/>
                           </a:solidFill>
@@ -17162,7 +17162,7 @@
                     <a:p>
                       <a:pPr algn="ctr"/>
                       <a:r>
-                        <a:rPr sz="1650" b="0" i="0">
+                        <a:rPr sz="1650" b="0" i="0" lang="ja-JP">
                           <a:solidFill>
                             <a:srgbClr val="26303A"/>
                           </a:solidFill>
@@ -17191,7 +17191,7 @@
                     <a:p>
                       <a:pPr algn="ctr"/>
                       <a:r>
-                        <a:rPr sz="1650" b="1" i="0">
+                        <a:rPr sz="1650" b="1" i="0" lang="ja-JP">
                           <a:solidFill>
                             <a:srgbClr val="16385C"/>
                           </a:solidFill>
@@ -17220,7 +17220,7 @@
                     <a:p>
                       <a:pPr algn="ctr"/>
                       <a:r>
-                        <a:rPr sz="1650" b="1" i="0">
+                        <a:rPr sz="1650" b="1" i="0" lang="ja-JP">
                           <a:solidFill>
                             <a:srgbClr val="16385C"/>
                           </a:solidFill>
@@ -17251,7 +17251,7 @@
                     <a:p>
                       <a:pPr algn="l"/>
                       <a:r>
-                        <a:rPr sz="1650" b="0" i="0">
+                        <a:rPr sz="1650" b="0" i="0" lang="ja-JP">
                           <a:solidFill>
                             <a:srgbClr val="26303A"/>
                           </a:solidFill>
@@ -17280,7 +17280,7 @@
                     <a:p>
                       <a:pPr algn="ctr"/>
                       <a:r>
-                        <a:rPr sz="1650" b="0" i="0">
+                        <a:rPr sz="1650" b="0" i="0" lang="ja-JP">
                           <a:solidFill>
                             <a:srgbClr val="26303A"/>
                           </a:solidFill>
@@ -17309,7 +17309,7 @@
                     <a:p>
                       <a:pPr algn="ctr"/>
                       <a:r>
-                        <a:rPr sz="1650" b="1" i="0">
+                        <a:rPr sz="1650" b="1" i="0" lang="ja-JP">
                           <a:solidFill>
                             <a:srgbClr val="16385C"/>
                           </a:solidFill>
@@ -17338,7 +17338,7 @@
                     <a:p>
                       <a:pPr algn="ctr"/>
                       <a:r>
-                        <a:rPr sz="1650" b="1" i="0">
+                        <a:rPr sz="1650" b="1" i="0" lang="ja-JP">
                           <a:solidFill>
                             <a:srgbClr val="16385C"/>
                           </a:solidFill>
@@ -17369,7 +17369,7 @@
                     <a:p>
                       <a:pPr algn="l"/>
                       <a:r>
-                        <a:rPr sz="1650" b="0" i="0">
+                        <a:rPr sz="1650" b="0" i="0" lang="ja-JP">
                           <a:solidFill>
                             <a:srgbClr val="26303A"/>
                           </a:solidFill>
@@ -17398,7 +17398,7 @@
                     <a:p>
                       <a:pPr algn="ctr"/>
                       <a:r>
-                        <a:rPr sz="1650" b="0" i="0">
+                        <a:rPr sz="1650" b="0" i="0" lang="ja-JP">
                           <a:solidFill>
                             <a:srgbClr val="26303A"/>
                           </a:solidFill>
@@ -17427,7 +17427,7 @@
                     <a:p>
                       <a:pPr algn="ctr"/>
                       <a:r>
-                        <a:rPr sz="1650" b="0" i="0">
+                        <a:rPr sz="1650" b="0" i="0" lang="ja-JP">
                           <a:solidFill>
                             <a:srgbClr val="26303A"/>
                           </a:solidFill>
@@ -17456,7 +17456,7 @@
                     <a:p>
                       <a:pPr algn="ctr"/>
                       <a:r>
-                        <a:rPr sz="1650" b="0" i="0">
+                        <a:rPr sz="1650" b="0" i="0" lang="ja-JP">
                           <a:solidFill>
                             <a:srgbClr val="26303A"/>
                           </a:solidFill>
@@ -17487,7 +17487,7 @@
                     <a:p>
                       <a:pPr algn="l"/>
                       <a:r>
-                        <a:rPr sz="1650" b="0" i="0">
+                        <a:rPr sz="1650" b="0" i="0" lang="ja-JP">
                           <a:solidFill>
                             <a:srgbClr val="26303A"/>
                           </a:solidFill>
@@ -17516,7 +17516,7 @@
                     <a:p>
                       <a:pPr algn="ctr"/>
                       <a:r>
-                        <a:rPr sz="1650" b="0" i="0">
+                        <a:rPr sz="1650" b="0" i="0" lang="ja-JP">
                           <a:solidFill>
                             <a:srgbClr val="26303A"/>
                           </a:solidFill>
@@ -17545,7 +17545,7 @@
                     <a:p>
                       <a:pPr algn="ctr"/>
                       <a:r>
-                        <a:rPr sz="1650" b="0" i="0">
+                        <a:rPr sz="1650" b="0" i="0" lang="ja-JP">
                           <a:solidFill>
                             <a:srgbClr val="26303A"/>
                           </a:solidFill>
@@ -17574,7 +17574,7 @@
                     <a:p>
                       <a:pPr algn="ctr"/>
                       <a:r>
-                        <a:rPr sz="1650" b="0" i="0">
+                        <a:rPr sz="1650" b="0" i="0" lang="ja-JP">
                           <a:solidFill>
                             <a:srgbClr val="26303A"/>
                           </a:solidFill>
@@ -17605,7 +17605,7 @@
                     <a:p>
                       <a:pPr algn="l"/>
                       <a:r>
-                        <a:rPr sz="1650" b="0" i="0">
+                        <a:rPr sz="1650" b="0" i="0" lang="ja-JP">
                           <a:solidFill>
                             <a:srgbClr val="26303A"/>
                           </a:solidFill>
@@ -17615,7 +17615,7 @@
                         <a:t>Memetic+PR-</a:t>
                       </a:r>
                       <a:r>
-                        <a:rPr sz="1650" b="0" i="1">
+                        <a:rPr sz="1650" b="0" i="1" lang="ja-JP">
                           <a:solidFill>
                             <a:srgbClr val="26303A"/>
                           </a:solidFill>
@@ -17644,7 +17644,7 @@
                     <a:p>
                       <a:pPr algn="ctr"/>
                       <a:r>
-                        <a:rPr sz="1650" b="1" i="0">
+                        <a:rPr sz="1650" b="1" i="0" lang="ja-JP">
                           <a:solidFill>
                             <a:srgbClr val="16385C"/>
                           </a:solidFill>
@@ -17673,7 +17673,7 @@
                     <a:p>
                       <a:pPr algn="ctr"/>
                       <a:r>
-                        <a:rPr sz="1650" b="1" i="0">
+                        <a:rPr sz="1650" b="1" i="0" lang="ja-JP">
                           <a:solidFill>
                             <a:srgbClr val="16385C"/>
                           </a:solidFill>
@@ -17702,7 +17702,7 @@
                     <a:p>
                       <a:pPr algn="ctr"/>
                       <a:r>
-                        <a:rPr sz="1650" b="0" i="0">
+                        <a:rPr sz="1650" b="0" i="0" lang="ja-JP">
                           <a:solidFill>
                             <a:srgbClr val="26303A"/>
                           </a:solidFill>
@@ -17733,7 +17733,7 @@
                     <a:p>
                       <a:pPr algn="l"/>
                       <a:r>
-                        <a:rPr sz="1650" b="0" i="0">
+                        <a:rPr sz="1650" b="0" i="0" lang="ja-JP">
                           <a:solidFill>
                             <a:srgbClr val="26303A"/>
                           </a:solidFill>
@@ -17762,7 +17762,7 @@
                     <a:p>
                       <a:pPr algn="ctr"/>
                       <a:r>
-                        <a:rPr sz="1650" b="1" i="0">
+                        <a:rPr sz="1650" b="1" i="0" lang="ja-JP">
                           <a:solidFill>
                             <a:srgbClr val="16385C"/>
                           </a:solidFill>
@@ -17791,7 +17791,7 @@
                     <a:p>
                       <a:pPr algn="ctr"/>
                       <a:r>
-                        <a:rPr sz="1650" b="1" i="0">
+                        <a:rPr sz="1650" b="1" i="0" lang="ja-JP">
                           <a:solidFill>
                             <a:srgbClr val="16385C"/>
                           </a:solidFill>
@@ -17820,7 +17820,7 @@
                     <a:p>
                       <a:pPr algn="ctr"/>
                       <a:r>
-                        <a:rPr sz="1650" b="0" i="0">
+                        <a:rPr sz="1650" b="0" i="0" lang="ja-JP">
                           <a:solidFill>
                             <a:srgbClr val="26303A"/>
                           </a:solidFill>
@@ -17875,7 +17875,7 @@
               </a:lnSpc>
             </a:pPr>
             <a:r>
-              <a:rPr sz="1400" b="0" i="0">
+              <a:rPr sz="1400" b="0" i="0" lang="ja-JP">
                 <a:solidFill>
                   <a:srgbClr val="6E7A88"/>
                 </a:solidFill>
@@ -17915,7 +17915,7 @@
               </a:lnSpc>
             </a:pPr>
             <a:r>
-              <a:rPr sz="1800" b="1" i="0">
+              <a:rPr sz="1800" b="1" i="0" lang="ja-JP">
                 <a:solidFill>
                   <a:srgbClr val="16385C"/>
                 </a:solidFill>
@@ -17955,7 +17955,7 @@
               </a:lnSpc>
             </a:pPr>
             <a:r>
-              <a:rPr sz="1700" b="0" i="0">
+              <a:rPr sz="1700" b="0" i="0" lang="ja-JP">
                 <a:solidFill>
                   <a:srgbClr val="26303A"/>
                 </a:solidFill>
@@ -17972,7 +17972,7 @@
               </a:lnSpc>
             </a:pPr>
             <a:r>
-              <a:rPr sz="1700" b="0" i="0">
+              <a:rPr sz="1700" b="0" i="0" lang="ja-JP">
                 <a:solidFill>
                   <a:srgbClr val="26303A"/>
                 </a:solidFill>
@@ -17989,7 +17989,7 @@
               </a:lnSpc>
             </a:pPr>
             <a:r>
-              <a:rPr sz="1700" b="0" i="0">
+              <a:rPr sz="1700" b="0" i="0" lang="ja-JP">
                 <a:solidFill>
                   <a:srgbClr val="26303A"/>
                 </a:solidFill>
@@ -17999,7 +17999,7 @@
               <a:t>→ </a:t>
             </a:r>
             <a:r>
-              <a:rPr sz="1700" b="1" i="0">
+              <a:rPr sz="1700" b="1" i="0" lang="ja-JP">
                 <a:solidFill>
                   <a:srgbClr val="16385C"/>
                 </a:solidFill>
@@ -18016,7 +18016,7 @@
               </a:lnSpc>
             </a:pPr>
             <a:r>
-              <a:rPr sz="1700" b="1" i="0">
+              <a:rPr sz="1700" b="1" i="0" lang="ja-JP">
                 <a:solidFill>
                   <a:srgbClr val="16385C"/>
                 </a:solidFill>
@@ -18056,7 +18056,7 @@
               </a:lnSpc>
             </a:pPr>
             <a:r>
-              <a:rPr sz="1800" b="1" i="0">
+              <a:rPr sz="1800" b="1" i="0" lang="ja-JP">
                 <a:solidFill>
                   <a:srgbClr val="16385C"/>
                 </a:solidFill>
@@ -18096,7 +18096,7 @@
               </a:lnSpc>
             </a:pPr>
             <a:r>
-              <a:rPr sz="1700" b="0" i="0">
+              <a:rPr sz="1700" b="0" i="0" lang="ja-JP">
                 <a:solidFill>
                   <a:srgbClr val="26303A"/>
                 </a:solidFill>
@@ -18113,7 +18113,7 @@
               </a:lnSpc>
             </a:pPr>
             <a:r>
-              <a:rPr sz="1700" b="0" i="0">
+              <a:rPr sz="1700" b="0" i="0" lang="ja-JP">
                 <a:solidFill>
                   <a:srgbClr val="26303A"/>
                 </a:solidFill>
@@ -18130,7 +18130,7 @@
               </a:lnSpc>
             </a:pPr>
             <a:r>
-              <a:rPr sz="1700" b="0" i="0">
+              <a:rPr sz="1700" b="0" i="0" lang="ja-JP">
                 <a:solidFill>
                   <a:srgbClr val="26303A"/>
                 </a:solidFill>
@@ -18147,7 +18147,7 @@
               </a:lnSpc>
             </a:pPr>
             <a:r>
-              <a:rPr sz="1700" b="0" i="0">
+              <a:rPr sz="1700" b="0" i="0" lang="ja-JP">
                 <a:solidFill>
                   <a:srgbClr val="26303A"/>
                 </a:solidFill>
@@ -18244,7 +18244,7 @@
           <a:lstStyle/>
           <a:p>
             <a:r>
-              <a:rPr sz="3000" b="1" i="0">
+              <a:rPr sz="3000" b="1" i="0" lang="ja-JP">
                 <a:solidFill>
                   <a:srgbClr val="3E618C"/>
                 </a:solidFill>
@@ -18279,7 +18279,7 @@
           <a:lstStyle/>
           <a:p>
             <a:r>
-              <a:rPr sz="2000" b="0" i="0">
+              <a:rPr sz="2000" b="0" i="0" lang="ja-JP">
                 <a:solidFill>
                   <a:srgbClr val="3E618C"/>
                 </a:solidFill>
@@ -18314,7 +18314,7 @@
           <a:lstStyle/>
           <a:p>
             <a:r>
-              <a:rPr sz="3000" b="1" i="0">
+              <a:rPr sz="3000" b="1" i="0" lang="ja-JP">
                 <a:solidFill>
                   <a:srgbClr val="3E618C"/>
                 </a:solidFill>
@@ -18349,7 +18349,7 @@
           <a:lstStyle/>
           <a:p>
             <a:r>
-              <a:rPr sz="2000" b="0" i="0">
+              <a:rPr sz="2000" b="0" i="0" lang="ja-JP">
                 <a:solidFill>
                   <a:srgbClr val="3E618C"/>
                 </a:solidFill>
@@ -18384,7 +18384,7 @@
           <a:lstStyle/>
           <a:p>
             <a:r>
-              <a:rPr sz="3000" b="1" i="0">
+              <a:rPr sz="3000" b="1" i="0" lang="ja-JP">
                 <a:solidFill>
                   <a:srgbClr val="3E618C"/>
                 </a:solidFill>
@@ -18419,7 +18419,7 @@
           <a:lstStyle/>
           <a:p>
             <a:r>
-              <a:rPr sz="2000" b="0" i="0">
+              <a:rPr sz="2000" b="0" i="0" lang="ja-JP">
                 <a:solidFill>
                   <a:srgbClr val="3E618C"/>
                 </a:solidFill>
@@ -18502,7 +18502,7 @@
           <a:lstStyle/>
           <a:p>
             <a:r>
-              <a:rPr sz="4000" b="1" i="0">
+              <a:rPr sz="4000" b="1" i="0" lang="ja-JP">
                 <a:solidFill>
                   <a:srgbClr val="FFFFFF"/>
                 </a:solidFill>
@@ -18537,7 +18537,7 @@
           <a:lstStyle/>
           <a:p>
             <a:r>
-              <a:rPr sz="2600" b="1" i="0">
+              <a:rPr sz="2600" b="1" i="0" lang="ja-JP">
                 <a:solidFill>
                   <a:srgbClr val="FFFFFF"/>
                 </a:solidFill>
@@ -18554,7 +18554,7 @@
               </a:spcBef>
             </a:pPr>
             <a:r>
-              <a:rPr sz="1300" b="0" i="0">
+              <a:rPr sz="1300" b="0" i="0" lang="ja-JP">
                 <a:solidFill>
                   <a:srgbClr val="AFC2D8"/>
                 </a:solidFill>
@@ -18590,7 +18590,7 @@
           <a:p>
             <a:pPr algn="r"/>
             <a:r>
-              <a:rPr sz="1000" b="0" i="0">
+              <a:rPr sz="1000" b="0" i="0" lang="ja-JP">
                 <a:solidFill>
                   <a:srgbClr val="AFC2D8"/>
                 </a:solidFill>
@@ -18643,7 +18643,7 @@
           <a:lstStyle/>
           <a:p>
             <a:r>
-              <a:rPr sz="2450" b="1" i="0">
+              <a:rPr sz="2450" b="1" i="0" lang="ja-JP">
                 <a:solidFill>
                   <a:srgbClr val="16385C"/>
                 </a:solidFill>
@@ -18763,7 +18763,7 @@
               </a:lnSpc>
             </a:pPr>
             <a:r>
-              <a:rPr sz="1500" b="1" i="1">
+              <a:rPr sz="1500" b="1" i="1" lang="ja-JP">
                 <a:solidFill>
                   <a:srgbClr val="16385C"/>
                 </a:solidFill>
@@ -18773,7 +18773,7 @@
               <a:t>S</a:t>
             </a:r>
             <a:r>
-              <a:rPr sz="1080" b="1" i="1" baseline="-22000">
+              <a:rPr sz="1080" b="1" i="1" lang="ja-JP" baseline="-22000">
                 <a:solidFill>
                   <a:srgbClr val="16385C"/>
                 </a:solidFill>
@@ -18783,7 +18783,7 @@
               <a:t>p</a:t>
             </a:r>
             <a:r>
-              <a:rPr sz="1500" b="1" i="0">
+              <a:rPr sz="1500" b="1" i="0" lang="ja-JP">
                 <a:solidFill>
                   <a:srgbClr val="16385C"/>
                 </a:solidFill>
@@ -18818,7 +18818,7 @@
           <a:lstStyle/>
           <a:p>
             <a:r>
-              <a:rPr sz="900" b="0" i="0">
+              <a:rPr sz="900" b="0" i="0" lang="ja-JP">
                 <a:solidFill>
                   <a:srgbClr val="6E7A88"/>
                 </a:solidFill>
@@ -18854,7 +18854,7 @@
           <a:p>
             <a:pPr algn="r"/>
             <a:r>
-              <a:rPr sz="1000" b="0" i="0">
+              <a:rPr sz="1000" b="0" i="0" lang="ja-JP">
                 <a:solidFill>
                   <a:srgbClr val="6E7A88"/>
                 </a:solidFill>
@@ -18962,7 +18962,7 @@
               </a:lnSpc>
             </a:pPr>
             <a:r>
-              <a:rPr sz="1700" b="1" i="0">
+              <a:rPr sz="1700" b="1" i="0" lang="ja-JP">
                 <a:solidFill>
                   <a:srgbClr val="FFFFFF"/>
                 </a:solidFill>
@@ -19002,7 +19002,7 @@
               </a:lnSpc>
             </a:pPr>
             <a:r>
-              <a:rPr sz="1550" b="1" i="0">
+              <a:rPr sz="1550" b="1" i="0" lang="ja-JP">
                 <a:solidFill>
                   <a:srgbClr val="16385C"/>
                 </a:solidFill>
@@ -19042,7 +19042,7 @@
               </a:lnSpc>
             </a:pPr>
             <a:r>
-              <a:rPr sz="1400" b="0" i="0">
+              <a:rPr sz="1400" b="0" i="0" lang="ja-JP">
                 <a:solidFill>
                   <a:srgbClr val="26303A"/>
                 </a:solidFill>
@@ -19052,7 +19052,7 @@
               <a:t>高安定 HV は</a:t>
             </a:r>
             <a:r>
-              <a:rPr sz="1400" b="1" i="0">
+              <a:rPr sz="1400" b="1" i="0" lang="ja-JP">
                 <a:solidFill>
                   <a:srgbClr val="26303A"/>
                 </a:solidFill>
@@ -19062,7 +19062,7 @@
               <a:t>単点探索（ILS）</a:t>
             </a:r>
             <a:r>
-              <a:rPr sz="1400" b="0" i="0">
+              <a:rPr sz="1400" b="0" i="0" lang="ja-JP">
                 <a:solidFill>
                   <a:srgbClr val="26303A"/>
                 </a:solidFill>
@@ -19170,7 +19170,7 @@
               </a:lnSpc>
             </a:pPr>
             <a:r>
-              <a:rPr sz="1700" b="1" i="0">
+              <a:rPr sz="1700" b="1" i="0" lang="ja-JP">
                 <a:solidFill>
                   <a:srgbClr val="FFFFFF"/>
                 </a:solidFill>
@@ -19210,7 +19210,7 @@
               </a:lnSpc>
             </a:pPr>
             <a:r>
-              <a:rPr sz="1550" b="1" i="0">
+              <a:rPr sz="1550" b="1" i="0" lang="ja-JP">
                 <a:solidFill>
                   <a:srgbClr val="16385C"/>
                 </a:solidFill>
@@ -19250,7 +19250,7 @@
               </a:lnSpc>
             </a:pPr>
             <a:r>
-              <a:rPr sz="1400" b="0" i="0">
+              <a:rPr sz="1400" b="0" i="0" lang="ja-JP">
                 <a:solidFill>
                   <a:srgbClr val="26303A"/>
                 </a:solidFill>
@@ -19260,7 +19260,7 @@
               <a:t>安定性誘導演算子は</a:t>
             </a:r>
             <a:r>
-              <a:rPr sz="1400" b="1" i="0">
+              <a:rPr sz="1400" b="1" i="0" lang="ja-JP">
                 <a:solidFill>
                   <a:srgbClr val="26303A"/>
                 </a:solidFill>
@@ -19270,7 +19270,7 @@
               <a:t>多点探索の高安定 HV を単点探索と同程度まで向上</a:t>
             </a:r>
             <a:r>
-              <a:rPr sz="1400" b="0" i="0">
+              <a:rPr sz="1400" b="0" i="0" lang="ja-JP">
                 <a:solidFill>
                   <a:srgbClr val="26303A"/>
                 </a:solidFill>
@@ -19287,7 +19287,7 @@
               </a:lnSpc>
             </a:pPr>
             <a:r>
-              <a:rPr sz="1400" b="0" i="0">
+              <a:rPr sz="1400" b="0" i="0" lang="ja-JP">
                 <a:solidFill>
                   <a:srgbClr val="26303A"/>
                 </a:solidFill>
@@ -19395,7 +19395,7 @@
               </a:lnSpc>
             </a:pPr>
             <a:r>
-              <a:rPr sz="1700" b="1" i="0">
+              <a:rPr sz="1700" b="1" i="0" lang="ja-JP">
                 <a:solidFill>
                   <a:srgbClr val="FFFFFF"/>
                 </a:solidFill>
@@ -19435,7 +19435,7 @@
               </a:lnSpc>
             </a:pPr>
             <a:r>
-              <a:rPr sz="1550" b="1" i="0">
+              <a:rPr sz="1550" b="1" i="0" lang="ja-JP">
                 <a:solidFill>
                   <a:srgbClr val="16385C"/>
                 </a:solidFill>
@@ -19475,7 +19475,7 @@
               </a:lnSpc>
             </a:pPr>
             <a:r>
-              <a:rPr sz="1400" b="0" i="0">
+              <a:rPr sz="1400" b="0" i="0" lang="ja-JP">
                 <a:solidFill>
                   <a:srgbClr val="26303A"/>
                 </a:solidFill>
@@ -19485,7 +19485,7 @@
               <a:t>全域 HV を重視するなら </a:t>
             </a:r>
             <a:r>
-              <a:rPr sz="1400" b="1" i="0">
+              <a:rPr sz="1400" b="1" i="0" lang="ja-JP">
                 <a:solidFill>
                   <a:srgbClr val="26303A"/>
                 </a:solidFill>
@@ -19495,7 +19495,7 @@
               <a:t>Memetic＋演算子</a:t>
             </a:r>
             <a:r>
-              <a:rPr sz="1400" b="0" i="0">
+              <a:rPr sz="1400" b="0" i="0" lang="ja-JP">
                 <a:solidFill>
                   <a:srgbClr val="26303A"/>
                 </a:solidFill>
@@ -19505,7 +19505,7 @@
               <a:t>，短い計算時間で解を得るなら </a:t>
             </a:r>
             <a:r>
-              <a:rPr sz="1400" b="1" i="0">
+              <a:rPr sz="1400" b="1" i="0" lang="ja-JP">
                 <a:solidFill>
                   <a:srgbClr val="26303A"/>
                 </a:solidFill>
@@ -19515,7 +19515,7 @@
               <a:t>ILS</a:t>
             </a:r>
             <a:r>
-              <a:rPr sz="1400" b="0" i="0">
+              <a:rPr sz="1400" b="0" i="0" lang="ja-JP">
                 <a:solidFill>
                   <a:srgbClr val="26303A"/>
                 </a:solidFill>
@@ -19532,7 +19532,7 @@
               </a:lnSpc>
             </a:pPr>
             <a:r>
-              <a:rPr sz="1400" b="0" i="0">
+              <a:rPr sz="1400" b="0" i="0" lang="ja-JP">
                 <a:solidFill>
                   <a:srgbClr val="26303A"/>
                 </a:solidFill>
@@ -19620,7 +19620,7 @@
               </a:lnSpc>
             </a:pPr>
             <a:r>
-              <a:rPr sz="1550" b="1" i="0">
+              <a:rPr sz="1550" b="1" i="0" lang="ja-JP">
                 <a:solidFill>
                   <a:srgbClr val="16385C"/>
                 </a:solidFill>
@@ -19660,7 +19660,7 @@
               </a:lnSpc>
             </a:pPr>
             <a:r>
-              <a:rPr sz="1400" b="0" i="0">
+              <a:rPr sz="1400" b="0" i="0" lang="ja-JP">
                 <a:solidFill>
                   <a:srgbClr val="26303A"/>
                 </a:solidFill>
@@ -19677,7 +19677,7 @@
               </a:lnSpc>
             </a:pPr>
             <a:r>
-              <a:rPr sz="1400" b="0" i="0">
+              <a:rPr sz="1400" b="0" i="0" lang="ja-JP">
                 <a:solidFill>
                   <a:srgbClr val="26303A"/>
                 </a:solidFill>
@@ -19687,7 +19687,7 @@
               <a:t>→ </a:t>
             </a:r>
             <a:r>
-              <a:rPr sz="1400" b="1" i="0">
+              <a:rPr sz="1400" b="1" i="0" lang="ja-JP">
                 <a:solidFill>
                   <a:srgbClr val="16385C"/>
                 </a:solidFill>
@@ -19740,7 +19740,7 @@
           <a:lstStyle/>
           <a:p>
             <a:r>
-              <a:rPr sz="2450" b="1" i="0">
+              <a:rPr sz="2450" b="1" i="0" lang="ja-JP">
                 <a:solidFill>
                   <a:srgbClr val="16385C"/>
                 </a:solidFill>
@@ -19860,7 +19860,7 @@
               </a:lnSpc>
             </a:pPr>
             <a:r>
-              <a:rPr sz="1500" b="1" i="0">
+              <a:rPr sz="1500" b="1" i="0" lang="ja-JP">
                 <a:solidFill>
                   <a:srgbClr val="16385C"/>
                 </a:solidFill>
@@ -19895,7 +19895,7 @@
           <a:lstStyle/>
           <a:p>
             <a:r>
-              <a:rPr sz="900" b="0" i="0">
+              <a:rPr sz="900" b="0" i="0" lang="ja-JP">
                 <a:solidFill>
                   <a:srgbClr val="6E7A88"/>
                 </a:solidFill>
@@ -19931,7 +19931,7 @@
           <a:p>
             <a:pPr algn="r"/>
             <a:r>
-              <a:rPr sz="1000" b="0" i="0">
+              <a:rPr sz="1000" b="0" i="0" lang="ja-JP">
                 <a:solidFill>
                   <a:srgbClr val="6E7A88"/>
                 </a:solidFill>
@@ -19971,7 +19971,7 @@
               </a:lnSpc>
             </a:pPr>
             <a:r>
-              <a:rPr sz="1800" b="1" i="0">
+              <a:rPr sz="1800" b="1" i="0" lang="ja-JP">
                 <a:solidFill>
                   <a:srgbClr val="16385C"/>
                 </a:solidFill>
@@ -20014,7 +20014,7 @@
               </a:spcBef>
             </a:pPr>
             <a:r>
-              <a:rPr sz="1320" b="1" i="0">
+              <a:rPr sz="1320" b="1" i="0" lang="ja-JP">
                 <a:solidFill>
                   <a:srgbClr val="16385C"/>
                 </a:solidFill>
@@ -20024,7 +20024,7 @@
               <a:t/>
             </a:r>
             <a:r>
-              <a:rPr sz="1650" b="0" i="0">
+              <a:rPr sz="1650" b="0" i="0" lang="ja-JP">
                 <a:solidFill>
                   <a:srgbClr val="26303A"/>
                 </a:solidFill>
@@ -20034,7 +20034,7 @@
               <a:t>(i) </a:t>
             </a:r>
             <a:r>
-              <a:rPr sz="1650" b="0" i="1">
+              <a:rPr sz="1650" b="0" i="1" lang="ja-JP">
                 <a:solidFill>
                   <a:srgbClr val="26303A"/>
                 </a:solidFill>
@@ -20044,7 +20044,7 @@
               <a:t>p</a:t>
             </a:r>
             <a:r>
-              <a:rPr sz="1650" b="0" i="0">
+              <a:rPr sz="1650" b="0" i="0" lang="ja-JP">
                 <a:solidFill>
                   <a:srgbClr val="26303A"/>
                 </a:solidFill>
@@ -20054,7 +20054,7 @@
               <a:t> が有意水準に近い比較は，</a:t>
             </a:r>
             <a:r>
-              <a:rPr sz="1650" b="0" i="1">
+              <a:rPr sz="1650" b="0" i="1" lang="ja-JP">
                 <a:solidFill>
                   <a:srgbClr val="26303A"/>
                 </a:solidFill>
@@ -20064,7 +20064,7 @@
               <a:t>n</a:t>
             </a:r>
             <a:r>
-              <a:rPr sz="1650" b="0" i="0">
+              <a:rPr sz="1650" b="0" i="0" lang="ja-JP">
                 <a:solidFill>
                   <a:srgbClr val="26303A"/>
                 </a:solidFill>
@@ -20084,7 +20084,7 @@
               </a:spcBef>
             </a:pPr>
             <a:r>
-              <a:rPr sz="1320" b="1" i="0">
+              <a:rPr sz="1320" b="1" i="0" lang="ja-JP">
                 <a:solidFill>
                   <a:srgbClr val="16385C"/>
                 </a:solidFill>
@@ -20094,7 +20094,7 @@
               <a:t/>
             </a:r>
             <a:r>
-              <a:rPr sz="1650" b="0" i="0">
+              <a:rPr sz="1650" b="0" i="0" lang="ja-JP">
                 <a:solidFill>
                   <a:srgbClr val="26303A"/>
                 </a:solidFill>
@@ -20114,7 +20114,7 @@
               </a:spcBef>
             </a:pPr>
             <a:r>
-              <a:rPr sz="1320" b="1" i="0">
+              <a:rPr sz="1320" b="1" i="0" lang="ja-JP">
                 <a:solidFill>
                   <a:srgbClr val="16385C"/>
                 </a:solidFill>
@@ -20124,7 +20124,7 @@
               <a:t/>
             </a:r>
             <a:r>
-              <a:rPr sz="1650" b="0" i="0">
+              <a:rPr sz="1650" b="0" i="0" lang="ja-JP">
                 <a:solidFill>
                   <a:srgbClr val="26303A"/>
                 </a:solidFill>
@@ -20144,7 +20144,7 @@
               </a:spcBef>
             </a:pPr>
             <a:r>
-              <a:rPr sz="1320" b="1" i="0">
+              <a:rPr sz="1320" b="1" i="0" lang="ja-JP">
                 <a:solidFill>
                   <a:srgbClr val="16385C"/>
                 </a:solidFill>
@@ -20154,7 +20154,7 @@
               <a:t/>
             </a:r>
             <a:r>
-              <a:rPr sz="1650" b="0" i="0">
+              <a:rPr sz="1650" b="0" i="0" lang="ja-JP">
                 <a:solidFill>
                   <a:srgbClr val="26303A"/>
                 </a:solidFill>
@@ -20164,7 +20164,7 @@
               <a:t>(iv) 初期スケジュール </a:t>
             </a:r>
             <a:r>
-              <a:rPr sz="1650" b="0" i="1">
+              <a:rPr sz="1650" b="0" i="1" lang="ja-JP">
                 <a:solidFill>
                   <a:srgbClr val="26303A"/>
                 </a:solidFill>
@@ -20174,7 +20174,7 @@
               <a:t>S</a:t>
             </a:r>
             <a:r>
-              <a:rPr sz="1188" b="0" i="1" baseline="-22000">
+              <a:rPr sz="1188" b="0" i="1" lang="ja-JP" baseline="-22000">
                 <a:solidFill>
                   <a:srgbClr val="26303A"/>
                 </a:solidFill>
@@ -20184,7 +20184,7 @@
               <a:t>p</a:t>
             </a:r>
             <a:r>
-              <a:rPr sz="1650" b="0" i="0">
+              <a:rPr sz="1650" b="0" i="0" lang="ja-JP">
                 <a:solidFill>
                   <a:srgbClr val="26303A"/>
                 </a:solidFill>
@@ -20204,7 +20204,7 @@
               </a:spcBef>
             </a:pPr>
             <a:r>
-              <a:rPr sz="1320" b="1" i="0">
+              <a:rPr sz="1320" b="1" i="0" lang="ja-JP">
                 <a:solidFill>
                   <a:srgbClr val="16385C"/>
                 </a:solidFill>
@@ -20214,7 +20214,7 @@
               <a:t/>
             </a:r>
             <a:r>
-              <a:rPr sz="1650" b="0" i="0">
+              <a:rPr sz="1650" b="0" i="0" lang="ja-JP">
                 <a:solidFill>
                   <a:srgbClr val="26303A"/>
                 </a:solidFill>
@@ -20254,7 +20254,7 @@
               </a:lnSpc>
             </a:pPr>
             <a:r>
-              <a:rPr sz="1800" b="1" i="0">
+              <a:rPr sz="1800" b="1" i="0" lang="ja-JP">
                 <a:solidFill>
                   <a:srgbClr val="16385C"/>
                 </a:solidFill>
@@ -20297,7 +20297,7 @@
               </a:spcBef>
             </a:pPr>
             <a:r>
-              <a:rPr sz="1320" b="1" i="0">
+              <a:rPr sz="1320" b="1" i="0" lang="ja-JP">
                 <a:solidFill>
                   <a:srgbClr val="16385C"/>
                 </a:solidFill>
@@ -20307,7 +20307,7 @@
               <a:t>▪ </a:t>
             </a:r>
             <a:r>
-              <a:rPr sz="1650" b="0" i="0">
+              <a:rPr sz="1650" b="0" i="0" lang="ja-JP">
                 <a:solidFill>
                   <a:srgbClr val="26303A"/>
                 </a:solidFill>
@@ -20327,7 +20327,7 @@
               </a:spcBef>
             </a:pPr>
             <a:r>
-              <a:rPr sz="1320" b="1" i="0">
+              <a:rPr sz="1320" b="1" i="0" lang="ja-JP">
                 <a:solidFill>
                   <a:srgbClr val="16385C"/>
                 </a:solidFill>
@@ -20337,7 +20337,7 @@
               <a:t>▪ </a:t>
             </a:r>
             <a:r>
-              <a:rPr sz="1650" b="0" i="0">
+              <a:rPr sz="1650" b="0" i="0" lang="ja-JP">
                 <a:solidFill>
                   <a:srgbClr val="26303A"/>
                 </a:solidFill>
@@ -20357,7 +20357,7 @@
               </a:spcBef>
             </a:pPr>
             <a:r>
-              <a:rPr sz="1320" b="1" i="0">
+              <a:rPr sz="1320" b="1" i="0" lang="ja-JP">
                 <a:solidFill>
                   <a:srgbClr val="16385C"/>
                 </a:solidFill>
@@ -20367,7 +20367,7 @@
               <a:t>▪ </a:t>
             </a:r>
             <a:r>
-              <a:rPr sz="1650" b="0" i="0">
+              <a:rPr sz="1650" b="0" i="0" lang="ja-JP">
                 <a:solidFill>
                   <a:srgbClr val="26303A"/>
                 </a:solidFill>
@@ -20387,7 +20387,7 @@
               </a:spcBef>
             </a:pPr>
             <a:r>
-              <a:rPr sz="1320" b="1" i="0">
+              <a:rPr sz="1320" b="1" i="0" lang="ja-JP">
                 <a:solidFill>
                   <a:srgbClr val="16385C"/>
                 </a:solidFill>
@@ -20397,7 +20397,7 @@
               <a:t>▪ </a:t>
             </a:r>
             <a:r>
-              <a:rPr sz="1650" b="0" i="0">
+              <a:rPr sz="1650" b="0" i="0" lang="ja-JP">
                 <a:solidFill>
                   <a:srgbClr val="26303A"/>
                 </a:solidFill>
@@ -20437,7 +20437,7 @@
               </a:lnSpc>
             </a:pPr>
             <a:r>
-              <a:rPr sz="1300" b="0" i="0">
+              <a:rPr sz="1300" b="0" i="0" lang="ja-JP">
                 <a:solidFill>
                   <a:srgbClr val="6E7A88"/>
                 </a:solidFill>
@@ -20539,7 +20539,7 @@
               </a:lnSpc>
             </a:pPr>
             <a:r>
-              <a:rPr sz="3000" b="1" i="0">
+              <a:rPr sz="3000" b="1" i="0" lang="ja-JP">
                 <a:solidFill>
                   <a:srgbClr val="FFFFFF"/>
                 </a:solidFill>
@@ -20592,7 +20592,7 @@
           <a:lstStyle/>
           <a:p>
             <a:r>
-              <a:rPr sz="2450" b="1" i="0">
+              <a:rPr sz="2450" b="1" i="0" lang="ja-JP">
                 <a:solidFill>
                   <a:srgbClr val="16385C"/>
                 </a:solidFill>
@@ -20663,7 +20663,7 @@
           <a:lstStyle/>
           <a:p>
             <a:r>
-              <a:rPr sz="900" b="0" i="0">
+              <a:rPr sz="900" b="0" i="0" lang="ja-JP">
                 <a:solidFill>
                   <a:srgbClr val="6E7A88"/>
                 </a:solidFill>
@@ -20699,7 +20699,7 @@
           <a:p>
             <a:pPr algn="r"/>
             <a:r>
-              <a:rPr sz="1000" b="0" i="0">
+              <a:rPr sz="1000" b="0" i="0" lang="ja-JP">
                 <a:solidFill>
                   <a:srgbClr val="6E7A88"/>
                 </a:solidFill>
@@ -20742,7 +20742,7 @@
               </a:spcBef>
             </a:pPr>
             <a:r>
-              <a:rPr sz="1200" b="1" i="0">
+              <a:rPr sz="1200" b="1" i="0" lang="ja-JP">
                 <a:solidFill>
                   <a:srgbClr val="16385C"/>
                 </a:solidFill>
@@ -20752,7 +20752,7 @@
               <a:t>▪ </a:t>
             </a:r>
             <a:r>
-              <a:rPr sz="1500" b="1" i="0">
+              <a:rPr sz="1500" b="1" i="0" lang="ja-JP">
                 <a:solidFill>
                   <a:srgbClr val="16385C"/>
                 </a:solidFill>
@@ -20762,7 +20762,7 @@
               <a:t>外乱を単一の作業遅延に限る理由</a:t>
             </a:r>
             <a:r>
-              <a:rPr sz="1500" b="0" i="0">
+              <a:rPr sz="1500" b="0" i="0" lang="ja-JP">
                 <a:solidFill>
                   <a:srgbClr val="26303A"/>
                 </a:solidFill>
@@ -20782,7 +20782,7 @@
               </a:spcBef>
             </a:pPr>
             <a:r>
-              <a:rPr sz="1200" b="1" i="0">
+              <a:rPr sz="1200" b="1" i="0" lang="ja-JP">
                 <a:solidFill>
                   <a:srgbClr val="16385C"/>
                 </a:solidFill>
@@ -20792,7 +20792,7 @@
               <a:t>▪ </a:t>
             </a:r>
             <a:r>
-              <a:rPr sz="1500" b="1" i="0">
+              <a:rPr sz="1500" b="1" i="0" lang="ja-JP">
                 <a:solidFill>
                   <a:srgbClr val="16385C"/>
                 </a:solidFill>
@@ -20802,7 +20802,7 @@
               <a:t>再スケジューリング時刻 </a:t>
             </a:r>
             <a:r>
-              <a:rPr sz="1500" b="1" i="1">
+              <a:rPr sz="1500" b="1" i="1" lang="ja-JP">
                 <a:solidFill>
                   <a:srgbClr val="16385C"/>
                 </a:solidFill>
@@ -20812,7 +20812,7 @@
               <a:t>t</a:t>
             </a:r>
             <a:r>
-              <a:rPr sz="1080" b="1" i="1" baseline="-22000">
+              <a:rPr sz="1080" b="1" i="1" lang="ja-JP" baseline="-22000">
                 <a:solidFill>
                   <a:srgbClr val="16385C"/>
                 </a:solidFill>
@@ -20822,7 +20822,7 @@
               <a:t>r</a:t>
             </a:r>
             <a:r>
-              <a:rPr sz="1500" b="0" i="0">
+              <a:rPr sz="1500" b="0" i="0" lang="ja-JP">
                 <a:solidFill>
                   <a:srgbClr val="26303A"/>
                 </a:solidFill>
@@ -20832,7 +20832,7 @@
               <a:t>：遅延の解消時刻．遅延の発生から </a:t>
             </a:r>
             <a:r>
-              <a:rPr sz="1500" b="0" i="1">
+              <a:rPr sz="1500" b="0" i="1" lang="ja-JP">
                 <a:solidFill>
                   <a:srgbClr val="26303A"/>
                 </a:solidFill>
@@ -20842,7 +20842,7 @@
               <a:t>t</a:t>
             </a:r>
             <a:r>
-              <a:rPr sz="1080" b="0" i="1" baseline="-22000">
+              <a:rPr sz="1080" b="0" i="1" lang="ja-JP" baseline="-22000">
                 <a:solidFill>
                   <a:srgbClr val="26303A"/>
                 </a:solidFill>
@@ -20852,7 +20852,7 @@
               <a:t>r</a:t>
             </a:r>
             <a:r>
-              <a:rPr sz="1500" b="0" i="0">
+              <a:rPr sz="1500" b="0" i="0" lang="ja-JP">
                 <a:solidFill>
                   <a:srgbClr val="26303A"/>
                 </a:solidFill>
@@ -20862,7 +20862,7 @@
               <a:t> までは，機械上の順序を </a:t>
             </a:r>
             <a:r>
-              <a:rPr sz="1500" b="0" i="1">
+              <a:rPr sz="1500" b="0" i="1" lang="ja-JP">
                 <a:solidFill>
                   <a:srgbClr val="26303A"/>
                 </a:solidFill>
@@ -20872,7 +20872,7 @@
               <a:t>S</a:t>
             </a:r>
             <a:r>
-              <a:rPr sz="1080" b="0" i="1" baseline="-22000">
+              <a:rPr sz="1080" b="0" i="1" lang="ja-JP" baseline="-22000">
                 <a:solidFill>
                   <a:srgbClr val="26303A"/>
                 </a:solidFill>
@@ -20882,7 +20882,7 @@
               <a:t>p</a:t>
             </a:r>
             <a:r>
-              <a:rPr sz="1500" b="0" i="0">
+              <a:rPr sz="1500" b="0" i="0" lang="ja-JP">
                 <a:solidFill>
                   <a:srgbClr val="26303A"/>
                 </a:solidFill>
@@ -20892,7 +20892,7 @@
               <a:t> から変えずに遅延を吸収して実行を続ける（right-shift）．この間に開始した作業はもう変更できないため凍結し，</a:t>
             </a:r>
             <a:r>
-              <a:rPr sz="1500" b="0" i="1">
+              <a:rPr sz="1500" b="0" i="1" lang="ja-JP">
                 <a:solidFill>
                   <a:srgbClr val="26303A"/>
                 </a:solidFill>
@@ -20902,7 +20902,7 @@
               <a:t>t</a:t>
             </a:r>
             <a:r>
-              <a:rPr sz="1080" b="0" i="1" baseline="-22000">
+              <a:rPr sz="1080" b="0" i="1" lang="ja-JP" baseline="-22000">
                 <a:solidFill>
                   <a:srgbClr val="26303A"/>
                 </a:solidFill>
@@ -20912,7 +20912,7 @@
               <a:t>r</a:t>
             </a:r>
             <a:r>
-              <a:rPr sz="1500" b="0" i="0">
+              <a:rPr sz="1500" b="0" i="0" lang="ja-JP">
                 <a:solidFill>
                   <a:srgbClr val="26303A"/>
                 </a:solidFill>
@@ -20932,7 +20932,7 @@
               </a:spcBef>
             </a:pPr>
             <a:r>
-              <a:rPr sz="1200" b="1" i="0">
+              <a:rPr sz="1200" b="1" i="0" lang="ja-JP">
                 <a:solidFill>
                   <a:srgbClr val="16385C"/>
                 </a:solidFill>
@@ -20942,7 +20942,7 @@
               <a:t>▪ </a:t>
             </a:r>
             <a:r>
-              <a:rPr sz="1500" b="1" i="0">
+              <a:rPr sz="1500" b="1" i="0" lang="ja-JP">
                 <a:solidFill>
                   <a:srgbClr val="16385C"/>
                 </a:solidFill>
@@ -20952,7 +20952,7 @@
               <a:t>安定性を順序偏差で測る理由</a:t>
             </a:r>
             <a:r>
-              <a:rPr sz="1500" b="0" i="0">
+              <a:rPr sz="1500" b="0" i="0" lang="ja-JP">
                 <a:solidFill>
                   <a:srgbClr val="26303A"/>
                 </a:solidFill>
@@ -20962,7 +20962,7 @@
               <a:t>：変更量の測り方は，開始時刻偏差と順序偏差の二系統に大別される（Sun ら (2026) は前者の開始時刻の絶対偏差和を採る）．本研究は，探索で用いる操作（N5 近傍と安定性誘導演算子の swap 移動）がいずれも順列操作であること，および </a:t>
             </a:r>
             <a:r>
-              <a:rPr sz="1500" b="0" i="1">
+              <a:rPr sz="1500" b="0" i="1" lang="ja-JP">
                 <a:solidFill>
                   <a:srgbClr val="26303A"/>
                 </a:solidFill>
@@ -20972,7 +20972,7 @@
               <a:t>MS</a:t>
             </a:r>
             <a:r>
-              <a:rPr sz="1500" b="0" i="0">
+              <a:rPr sz="1500" b="0" i="0" lang="ja-JP">
                 <a:solidFill>
                   <a:srgbClr val="26303A"/>
                 </a:solidFill>
@@ -21025,7 +21025,7 @@
           <a:lstStyle/>
           <a:p>
             <a:r>
-              <a:rPr sz="2450" b="1" i="0">
+              <a:rPr sz="2450" b="1" i="0" lang="ja-JP">
                 <a:solidFill>
                   <a:srgbClr val="16385C"/>
                 </a:solidFill>
@@ -21096,7 +21096,7 @@
           <a:lstStyle/>
           <a:p>
             <a:r>
-              <a:rPr sz="900" b="0" i="0">
+              <a:rPr sz="900" b="0" i="0" lang="ja-JP">
                 <a:solidFill>
                   <a:srgbClr val="6E7A88"/>
                 </a:solidFill>
@@ -21132,7 +21132,7 @@
           <a:p>
             <a:pPr algn="r"/>
             <a:r>
-              <a:rPr sz="1000" b="0" i="0">
+              <a:rPr sz="1000" b="0" i="0" lang="ja-JP">
                 <a:solidFill>
                   <a:srgbClr val="6E7A88"/>
                 </a:solidFill>
@@ -21160,8 +21160,8 @@
         </p:blipFill>
         <p:spPr>
           <a:xfrm>
-            <a:off x="3643240" y="1325880"/>
-            <a:ext cx="4905213" cy="548640"/>
+            <a:off x="3693261" y="1325880"/>
+            <a:ext cx="4805172" cy="548640"/>
           </a:xfrm>
           <a:prstGeom prst="rect">
             <a:avLst/>
@@ -21192,7 +21192,7 @@
           <a:p>
             <a:pPr algn="r"/>
             <a:r>
-              <a:rPr sz="1300" b="0" i="0">
+              <a:rPr sz="1300" b="0" i="0" lang="ja-JP">
                 <a:solidFill>
                   <a:srgbClr val="26303A"/>
                 </a:solidFill>
@@ -21232,7 +21232,7 @@
               </a:lnSpc>
             </a:pPr>
             <a:r>
-              <a:rPr sz="1250" b="0" i="1">
+              <a:rPr sz="1250" b="0" i="1" lang="ja-JP">
                 <a:solidFill>
                   <a:srgbClr val="6E7A88"/>
                 </a:solidFill>
@@ -21242,7 +21242,7 @@
               <a:t>D</a:t>
             </a:r>
             <a:r>
-              <a:rPr sz="1250" b="0" i="0">
+              <a:rPr sz="1250" b="0" i="0" lang="ja-JP">
                 <a:solidFill>
                   <a:srgbClr val="6E7A88"/>
                 </a:solidFill>
@@ -21252,7 +21252,7 @@
               <a:t>，</a:t>
             </a:r>
             <a:r>
-              <a:rPr sz="1250" b="0" i="1">
+              <a:rPr sz="1250" b="0" i="1" lang="ja-JP">
                 <a:solidFill>
                   <a:srgbClr val="6E7A88"/>
                 </a:solidFill>
@@ -21262,7 +21262,7 @@
               <a:t>MS</a:t>
             </a:r>
             <a:r>
-              <a:rPr sz="1250" b="0" i="0">
+              <a:rPr sz="1250" b="0" i="0" lang="ja-JP">
                 <a:solidFill>
                   <a:srgbClr val="6E7A88"/>
                 </a:solidFill>
@@ -21272,7 +21272,7 @@
               <a:t> は min-max 正規化値．</a:t>
             </a:r>
             <a:r>
-              <a:rPr sz="1250" b="0" i="1">
+              <a:rPr sz="1250" b="0" i="1" lang="ja-JP">
                 <a:solidFill>
                   <a:srgbClr val="6E7A88"/>
                 </a:solidFill>
@@ -21282,7 +21282,7 @@
               <a:t>λ</a:t>
             </a:r>
             <a:r>
-              <a:rPr sz="1250" b="0" i="0">
+              <a:rPr sz="1250" b="0" i="0" lang="ja-JP">
                 <a:solidFill>
                   <a:srgbClr val="6E7A88"/>
                 </a:solidFill>
@@ -21292,7 +21292,7 @@
               <a:t> = 0, 0.1, …, 0.9 の 10 点で探索を独立に行う（</a:t>
             </a:r>
             <a:r>
-              <a:rPr sz="1250" b="0" i="1">
+              <a:rPr sz="1250" b="0" i="1" lang="ja-JP">
                 <a:solidFill>
                   <a:srgbClr val="6E7A88"/>
                 </a:solidFill>
@@ -21302,7 +21302,7 @@
               <a:t>λ</a:t>
             </a:r>
             <a:r>
-              <a:rPr sz="1250" b="0" i="0">
+              <a:rPr sz="1250" b="0" i="0" lang="ja-JP">
                 <a:solidFill>
                   <a:srgbClr val="6E7A88"/>
                 </a:solidFill>
@@ -21312,7 +21312,7 @@
               <a:t> = 1.0 は </a:t>
             </a:r>
             <a:r>
-              <a:rPr sz="1250" b="0" i="1">
+              <a:rPr sz="1250" b="0" i="1" lang="ja-JP">
                 <a:solidFill>
                   <a:srgbClr val="6E7A88"/>
                 </a:solidFill>
@@ -21322,7 +21322,7 @@
               <a:t>D</a:t>
             </a:r>
             <a:r>
-              <a:rPr sz="1250" b="0" i="0">
+              <a:rPr sz="1250" b="0" i="0" lang="ja-JP">
                 <a:solidFill>
                   <a:srgbClr val="6E7A88"/>
                 </a:solidFill>
@@ -21365,7 +21365,7 @@
               </a:spcBef>
             </a:pPr>
             <a:r>
-              <a:rPr sz="1160" b="1" i="0">
+              <a:rPr sz="1160" b="1" i="0" lang="ja-JP">
                 <a:solidFill>
                   <a:srgbClr val="16385C"/>
                 </a:solidFill>
@@ -21375,7 +21375,7 @@
               <a:t>▪ </a:t>
             </a:r>
             <a:r>
-              <a:rPr sz="1450" b="1" i="0">
+              <a:rPr sz="1450" b="1" i="0" lang="ja-JP">
                 <a:solidFill>
                   <a:srgbClr val="16385C"/>
                 </a:solidFill>
@@ -21385,7 +21385,7 @@
               <a:t>運用との対応</a:t>
             </a:r>
             <a:r>
-              <a:rPr sz="1450" b="0" i="0">
+              <a:rPr sz="1450" b="0" i="0" lang="ja-JP">
                 <a:solidFill>
                   <a:srgbClr val="26303A"/>
                 </a:solidFill>
@@ -21405,7 +21405,7 @@
               </a:spcBef>
             </a:pPr>
             <a:r>
-              <a:rPr sz="1160" b="1" i="0">
+              <a:rPr sz="1160" b="1" i="0" lang="ja-JP">
                 <a:solidFill>
                   <a:srgbClr val="16385C"/>
                 </a:solidFill>
@@ -21415,7 +21415,7 @@
               <a:t>▪ </a:t>
             </a:r>
             <a:r>
-              <a:rPr sz="1450" b="1" i="0">
+              <a:rPr sz="1450" b="1" i="0" lang="ja-JP">
                 <a:solidFill>
                   <a:srgbClr val="16385C"/>
                 </a:solidFill>
@@ -21425,7 +21425,7 @@
               <a:t>先行研究との対応</a:t>
             </a:r>
             <a:r>
-              <a:rPr sz="1450" b="0" i="0">
+              <a:rPr sz="1450" b="0" i="0" lang="ja-JP">
                 <a:solidFill>
                   <a:srgbClr val="26303A"/>
                 </a:solidFill>
@@ -21445,7 +21445,7 @@
               </a:spcBef>
             </a:pPr>
             <a:r>
-              <a:rPr sz="1160" b="1" i="0">
+              <a:rPr sz="1160" b="1" i="0" lang="ja-JP">
                 <a:solidFill>
                   <a:srgbClr val="16385C"/>
                 </a:solidFill>
@@ -21455,7 +21455,7 @@
               <a:t>▪ </a:t>
             </a:r>
             <a:r>
-              <a:rPr sz="1450" b="1" i="0">
+              <a:rPr sz="1450" b="1" i="0" lang="ja-JP">
                 <a:solidFill>
                   <a:srgbClr val="16385C"/>
                 </a:solidFill>
@@ -21465,7 +21465,7 @@
               <a:t>統制比較の共通基盤</a:t>
             </a:r>
             <a:r>
-              <a:rPr sz="1450" b="0" i="0">
+              <a:rPr sz="1450" b="0" i="0" lang="ja-JP">
                 <a:solidFill>
                   <a:srgbClr val="26303A"/>
                 </a:solidFill>
@@ -21475,7 +21475,7 @@
               <a:t>：単点探索と多点探索に同じ目的 </a:t>
             </a:r>
             <a:r>
-              <a:rPr sz="1450" b="0" i="1">
+              <a:rPr sz="1450" b="0" i="1" lang="ja-JP">
                 <a:solidFill>
                   <a:srgbClr val="26303A"/>
                 </a:solidFill>
@@ -21485,7 +21485,7 @@
               <a:t>F</a:t>
             </a:r>
             <a:r>
-              <a:rPr sz="1450" b="0" i="0">
+              <a:rPr sz="1450" b="0" i="0" lang="ja-JP">
                 <a:solidFill>
                   <a:srgbClr val="26303A"/>
                 </a:solidFill>
@@ -21505,7 +21505,7 @@
               </a:spcBef>
             </a:pPr>
             <a:r>
-              <a:rPr sz="1160" b="1" i="0">
+              <a:rPr sz="1160" b="1" i="0" lang="ja-JP">
                 <a:solidFill>
                   <a:srgbClr val="16385C"/>
                 </a:solidFill>
@@ -21515,7 +21515,7 @@
               <a:t>▪ </a:t>
             </a:r>
             <a:r>
-              <a:rPr sz="1450" b="1" i="0">
+              <a:rPr sz="1450" b="1" i="0" lang="ja-JP">
                 <a:solidFill>
                   <a:srgbClr val="16385C"/>
                 </a:solidFill>
@@ -21525,7 +21525,7 @@
               <a:t>評価との対応</a:t>
             </a:r>
             <a:r>
-              <a:rPr sz="1450" b="0" i="0">
+              <a:rPr sz="1450" b="0" i="0" lang="ja-JP">
                 <a:solidFill>
                   <a:srgbClr val="26303A"/>
                 </a:solidFill>
@@ -21545,7 +21545,7 @@
               </a:spcBef>
             </a:pPr>
             <a:r>
-              <a:rPr sz="1160" b="1" i="0">
+              <a:rPr sz="1160" b="1" i="0" lang="ja-JP">
                 <a:solidFill>
                   <a:srgbClr val="16385C"/>
                 </a:solidFill>
@@ -21555,7 +21555,7 @@
               <a:t>▪ </a:t>
             </a:r>
             <a:r>
-              <a:rPr sz="1450" b="1" i="0">
+              <a:rPr sz="1450" b="1" i="0" lang="ja-JP">
                 <a:solidFill>
                   <a:srgbClr val="16385C"/>
                 </a:solidFill>
@@ -21565,7 +21565,7 @@
               <a:t>限界</a:t>
             </a:r>
             <a:r>
-              <a:rPr sz="1450" b="0" i="0">
+              <a:rPr sz="1450" b="0" i="0" lang="ja-JP">
                 <a:solidFill>
                   <a:srgbClr val="26303A"/>
                 </a:solidFill>
@@ -21618,7 +21618,7 @@
           <a:lstStyle/>
           <a:p>
             <a:r>
-              <a:rPr sz="2450" b="1" i="0">
+              <a:rPr sz="2450" b="1" i="0" lang="ja-JP">
                 <a:solidFill>
                   <a:srgbClr val="16385C"/>
                 </a:solidFill>
@@ -21689,7 +21689,7 @@
           <a:lstStyle/>
           <a:p>
             <a:r>
-              <a:rPr sz="900" b="0" i="0">
+              <a:rPr sz="900" b="0" i="0" lang="ja-JP">
                 <a:solidFill>
                   <a:srgbClr val="6E7A88"/>
                 </a:solidFill>
@@ -21725,7 +21725,7 @@
           <a:p>
             <a:pPr algn="r"/>
             <a:r>
-              <a:rPr sz="1000" b="0" i="0">
+              <a:rPr sz="1000" b="0" i="0" lang="ja-JP">
                 <a:solidFill>
                   <a:srgbClr val="6E7A88"/>
                 </a:solidFill>
@@ -21857,7 +21857,7 @@
               </a:lnSpc>
             </a:pPr>
             <a:r>
-              <a:rPr sz="1450" b="1" i="0">
+              <a:rPr sz="1450" b="1" i="0" lang="ja-JP">
                 <a:solidFill>
                   <a:srgbClr val="FFFFFF"/>
                 </a:solidFill>
@@ -21900,7 +21900,7 @@
               </a:spcBef>
             </a:pPr>
             <a:r>
-              <a:rPr sz="1040" b="1" i="0">
+              <a:rPr sz="1040" b="1" i="0" lang="ja-JP">
                 <a:solidFill>
                   <a:srgbClr val="16385C"/>
                 </a:solidFill>
@@ -21910,7 +21910,7 @@
               <a:t>▪ </a:t>
             </a:r>
             <a:r>
-              <a:rPr sz="1300" b="0" i="0">
+              <a:rPr sz="1300" b="0" i="0" lang="ja-JP">
                 <a:solidFill>
                   <a:srgbClr val="26303A"/>
                 </a:solidFill>
@@ -21930,7 +21930,7 @@
               </a:spcBef>
             </a:pPr>
             <a:r>
-              <a:rPr sz="1040" b="1" i="0">
+              <a:rPr sz="1040" b="1" i="0" lang="ja-JP">
                 <a:solidFill>
                   <a:srgbClr val="16385C"/>
                 </a:solidFill>
@@ -21940,7 +21940,7 @@
               <a:t>▪ </a:t>
             </a:r>
             <a:r>
-              <a:rPr sz="1300" b="1" i="0">
+              <a:rPr sz="1300" b="1" i="0" lang="ja-JP">
                 <a:solidFill>
                   <a:srgbClr val="16385C"/>
                 </a:solidFill>
@@ -21950,7 +21950,7 @@
               <a:t>局所探索と摂動が独立した段に分かれている</a:t>
             </a:r>
             <a:r>
-              <a:rPr sz="1300" b="0" i="0">
+              <a:rPr sz="1300" b="0" i="0" lang="ja-JP">
                 <a:solidFill>
                   <a:srgbClr val="26303A"/>
                 </a:solidFill>
@@ -21970,7 +21970,7 @@
               </a:spcBef>
             </a:pPr>
             <a:r>
-              <a:rPr sz="1040" b="1" i="0">
+              <a:rPr sz="1040" b="1" i="0" lang="ja-JP">
                 <a:solidFill>
                   <a:srgbClr val="16385C"/>
                 </a:solidFill>
@@ -21980,7 +21980,7 @@
               <a:t>▪ </a:t>
             </a:r>
             <a:r>
-              <a:rPr sz="1300" b="0" i="0">
+              <a:rPr sz="1300" b="0" i="0" lang="ja-JP">
                 <a:solidFill>
                   <a:srgbClr val="26303A"/>
                 </a:solidFill>
@@ -22000,7 +22000,7 @@
               </a:spcBef>
             </a:pPr>
             <a:r>
-              <a:rPr sz="1040" b="1" i="0">
+              <a:rPr sz="1040" b="1" i="0" lang="ja-JP">
                 <a:solidFill>
                   <a:srgbClr val="16385C"/>
                 </a:solidFill>
@@ -22010,7 +22010,7 @@
               <a:t>▪ </a:t>
             </a:r>
             <a:r>
-              <a:rPr sz="1300" b="0" i="0">
+              <a:rPr sz="1300" b="0" i="0" lang="ja-JP">
                 <a:solidFill>
                   <a:srgbClr val="26303A"/>
                 </a:solidFill>
@@ -22020,7 +22020,7 @@
               <a:t>設定：初期解 </a:t>
             </a:r>
             <a:r>
-              <a:rPr sz="1300" b="0" i="1">
+              <a:rPr sz="1300" b="0" i="1" lang="ja-JP">
                 <a:solidFill>
                   <a:srgbClr val="26303A"/>
                 </a:solidFill>
@@ -22030,7 +22030,7 @@
               <a:t>S</a:t>
             </a:r>
             <a:r>
-              <a:rPr sz="936" b="0" i="1" baseline="-22000">
+              <a:rPr sz="936" b="0" i="1" lang="ja-JP" baseline="-22000">
                 <a:solidFill>
                   <a:srgbClr val="26303A"/>
                 </a:solidFill>
@@ -22040,7 +22040,7 @@
               <a:t>p</a:t>
             </a:r>
             <a:r>
-              <a:rPr sz="1300" b="0" i="0">
+              <a:rPr sz="1300" b="0" i="0" lang="ja-JP">
                 <a:solidFill>
                   <a:srgbClr val="26303A"/>
                 </a:solidFill>
@@ -22050,7 +22050,7 @@
               <a:t>．insert 摂動は 2〜5 手を停滞度に応じて巡回．best の </a:t>
             </a:r>
             <a:r>
-              <a:rPr sz="1300" b="0" i="1">
+              <a:rPr sz="1300" b="0" i="1" lang="ja-JP">
                 <a:solidFill>
                   <a:srgbClr val="26303A"/>
                 </a:solidFill>
@@ -22060,7 +22060,7 @@
               <a:t>F</a:t>
             </a:r>
             <a:r>
-              <a:rPr sz="1300" b="0" i="0">
+              <a:rPr sz="1300" b="0" i="0" lang="ja-JP">
                 <a:solidFill>
                   <a:srgbClr val="26303A"/>
                 </a:solidFill>
@@ -22192,7 +22192,7 @@
               </a:lnSpc>
             </a:pPr>
             <a:r>
-              <a:rPr sz="1450" b="1" i="0">
+              <a:rPr sz="1450" b="1" i="0" lang="ja-JP">
                 <a:solidFill>
                   <a:srgbClr val="FFFFFF"/>
                 </a:solidFill>
@@ -22235,7 +22235,7 @@
               </a:spcBef>
             </a:pPr>
             <a:r>
-              <a:rPr sz="1040" b="1" i="0">
+              <a:rPr sz="1040" b="1" i="0" lang="ja-JP">
                 <a:solidFill>
                   <a:srgbClr val="16385C"/>
                 </a:solidFill>
@@ -22245,7 +22245,7 @@
               <a:t>▪ </a:t>
             </a:r>
             <a:r>
-              <a:rPr sz="1300" b="0" i="0">
+              <a:rPr sz="1300" b="0" i="0" lang="ja-JP">
                 <a:solidFill>
                   <a:srgbClr val="26303A"/>
                 </a:solidFill>
@@ -22255,7 +22255,7 @@
               <a:t>先行研究（Rangsaritratsamee ら 2004，Fattahi &amp; Fallahi 2010）で用いられる，</a:t>
             </a:r>
             <a:r>
-              <a:rPr sz="1300" b="1" i="0">
+              <a:rPr sz="1300" b="1" i="0" lang="ja-JP">
                 <a:solidFill>
                   <a:srgbClr val="16385C"/>
                 </a:solidFill>
@@ -22275,7 +22275,7 @@
               </a:spcBef>
             </a:pPr>
             <a:r>
-              <a:rPr sz="1040" b="1" i="0">
+              <a:rPr sz="1040" b="1" i="0" lang="ja-JP">
                 <a:solidFill>
                   <a:srgbClr val="16385C"/>
                 </a:solidFill>
@@ -22285,7 +22285,7 @@
               <a:t>▪ </a:t>
             </a:r>
             <a:r>
-              <a:rPr sz="1300" b="0" i="0">
+              <a:rPr sz="1300" b="0" i="0" lang="ja-JP">
                 <a:solidFill>
                   <a:srgbClr val="26303A"/>
                 </a:solidFill>
@@ -22305,7 +22305,7 @@
               </a:spcBef>
             </a:pPr>
             <a:r>
-              <a:rPr sz="1040" b="1" i="0">
+              <a:rPr sz="1040" b="1" i="0" lang="ja-JP">
                 <a:solidFill>
                   <a:srgbClr val="16385C"/>
                 </a:solidFill>
@@ -22315,7 +22315,7 @@
               <a:t>▪ </a:t>
             </a:r>
             <a:r>
-              <a:rPr sz="1300" b="0" i="0">
+              <a:rPr sz="1300" b="0" i="0" lang="ja-JP">
                 <a:solidFill>
                   <a:srgbClr val="26303A"/>
                 </a:solidFill>
@@ -22325,7 +22325,7 @@
               <a:t>各個体に N5 局所探索を適用し，改善解を染色体に書き戻す Lamarckian 型．初期集団に </a:t>
             </a:r>
             <a:r>
-              <a:rPr sz="1300" b="0" i="1">
+              <a:rPr sz="1300" b="0" i="1" lang="ja-JP">
                 <a:solidFill>
                   <a:srgbClr val="26303A"/>
                 </a:solidFill>
@@ -22335,7 +22335,7 @@
               <a:t>S</a:t>
             </a:r>
             <a:r>
-              <a:rPr sz="936" b="0" i="1" baseline="-22000">
+              <a:rPr sz="936" b="0" i="1" lang="ja-JP" baseline="-22000">
                 <a:solidFill>
                   <a:srgbClr val="26303A"/>
                 </a:solidFill>
@@ -22345,7 +22345,7 @@
               <a:t>p</a:t>
             </a:r>
             <a:r>
-              <a:rPr sz="1300" b="0" i="0">
+              <a:rPr sz="1300" b="0" i="0" lang="ja-JP">
                 <a:solidFill>
                   <a:srgbClr val="26303A"/>
                 </a:solidFill>
@@ -22365,7 +22365,7 @@
               </a:spcBef>
             </a:pPr>
             <a:r>
-              <a:rPr sz="1040" b="1" i="0">
+              <a:rPr sz="1040" b="1" i="0" lang="ja-JP">
                 <a:solidFill>
                   <a:srgbClr val="16385C"/>
                 </a:solidFill>
@@ -22375,7 +22375,7 @@
               <a:t>▪ </a:t>
             </a:r>
             <a:r>
-              <a:rPr sz="1300" b="0" i="0">
+              <a:rPr sz="1300" b="0" i="0" lang="ja-JP">
                 <a:solidFill>
                   <a:srgbClr val="26303A"/>
                 </a:solidFill>
@@ -22428,7 +22428,7 @@
           <a:lstStyle/>
           <a:p>
             <a:r>
-              <a:rPr sz="2450" b="1" i="0">
+              <a:rPr sz="2450" b="1" i="0" lang="ja-JP">
                 <a:solidFill>
                   <a:srgbClr val="16385C"/>
                 </a:solidFill>
@@ -22548,7 +22548,7 @@
               </a:lnSpc>
             </a:pPr>
             <a:r>
-              <a:rPr sz="1500" b="1" i="0">
+              <a:rPr sz="1500" b="1" i="0" lang="ja-JP">
                 <a:solidFill>
                   <a:srgbClr val="16385C"/>
                 </a:solidFill>
@@ -22558,7 +22558,7 @@
               <a:t>外乱が起きたら，事前に作成した初期スケジュール </a:t>
             </a:r>
             <a:r>
-              <a:rPr sz="1500" b="1" i="1">
+              <a:rPr sz="1500" b="1" i="1" lang="ja-JP">
                 <a:solidFill>
                   <a:srgbClr val="16385C"/>
                 </a:solidFill>
@@ -22568,7 +22568,7 @@
               <a:t>S</a:t>
             </a:r>
             <a:r>
-              <a:rPr sz="1080" b="1" i="1" baseline="-22000">
+              <a:rPr sz="1080" b="1" i="1" lang="ja-JP" baseline="-22000">
                 <a:solidFill>
                   <a:srgbClr val="16385C"/>
                 </a:solidFill>
@@ -22578,7 +22578,7 @@
               <a:t>p</a:t>
             </a:r>
             <a:r>
-              <a:rPr sz="1500" b="1" i="0">
+              <a:rPr sz="1500" b="1" i="0" lang="ja-JP">
                 <a:solidFill>
                   <a:srgbClr val="16385C"/>
                 </a:solidFill>
@@ -22613,7 +22613,7 @@
           <a:lstStyle/>
           <a:p>
             <a:r>
-              <a:rPr sz="900" b="0" i="0">
+              <a:rPr sz="900" b="0" i="0" lang="ja-JP">
                 <a:solidFill>
                   <a:srgbClr val="6E7A88"/>
                 </a:solidFill>
@@ -22649,7 +22649,7 @@
           <a:p>
             <a:pPr algn="r"/>
             <a:r>
-              <a:rPr sz="1000" b="0" i="0">
+              <a:rPr sz="1000" b="0" i="0" lang="ja-JP">
                 <a:solidFill>
                   <a:srgbClr val="6E7A88"/>
                 </a:solidFill>
@@ -22732,7 +22732,7 @@
           <a:lstStyle/>
           <a:p>
             <a:r>
-              <a:rPr sz="1750" b="1" i="0">
+              <a:rPr sz="1750" b="1" i="0" lang="ja-JP">
                 <a:solidFill>
                   <a:srgbClr val="16385C"/>
                 </a:solidFill>
@@ -22752,7 +22752,7 @@
               </a:spcBef>
             </a:pPr>
             <a:r>
-              <a:rPr sz="1400" b="0" i="0">
+              <a:rPr sz="1400" b="0" i="0" lang="ja-JP">
                 <a:solidFill>
                   <a:srgbClr val="26303A"/>
                 </a:solidFill>
@@ -22835,7 +22835,7 @@
           <a:lstStyle/>
           <a:p>
             <a:r>
-              <a:rPr sz="1750" b="1" i="0">
+              <a:rPr sz="1750" b="1" i="0" lang="ja-JP">
                 <a:solidFill>
                   <a:srgbClr val="16385C"/>
                 </a:solidFill>
@@ -22855,7 +22855,7 @@
               </a:spcBef>
             </a:pPr>
             <a:r>
-              <a:rPr sz="1400" b="0" i="0">
+              <a:rPr sz="1400" b="0" i="0" lang="ja-JP">
                 <a:solidFill>
                   <a:srgbClr val="26303A"/>
                 </a:solidFill>
@@ -22938,7 +22938,7 @@
           <a:lstStyle/>
           <a:p>
             <a:r>
-              <a:rPr sz="1750" b="1" i="0">
+              <a:rPr sz="1750" b="1" i="0" lang="ja-JP">
                 <a:solidFill>
                   <a:srgbClr val="6E7A88"/>
                 </a:solidFill>
@@ -22958,7 +22958,7 @@
               </a:spcBef>
             </a:pPr>
             <a:r>
-              <a:rPr sz="1350" b="0" i="0">
+              <a:rPr sz="1350" b="0" i="0" lang="ja-JP">
                 <a:solidFill>
                   <a:srgbClr val="6E7A88"/>
                 </a:solidFill>
@@ -23041,7 +23041,7 @@
           <a:lstStyle/>
           <a:p>
             <a:r>
-              <a:rPr sz="1750" b="1" i="0">
+              <a:rPr sz="1750" b="1" i="0" lang="ja-JP">
                 <a:solidFill>
                   <a:srgbClr val="6E7A88"/>
                 </a:solidFill>
@@ -23061,7 +23061,7 @@
               </a:spcBef>
             </a:pPr>
             <a:r>
-              <a:rPr sz="1350" b="0" i="0">
+              <a:rPr sz="1350" b="0" i="0" lang="ja-JP">
                 <a:solidFill>
                   <a:srgbClr val="6E7A88"/>
                 </a:solidFill>
@@ -23167,7 +23167,7 @@
               </a:lnSpc>
             </a:pPr>
             <a:r>
-              <a:rPr sz="1250" b="1" i="0">
+              <a:rPr sz="1250" b="1" i="0" lang="ja-JP">
                 <a:solidFill>
                   <a:srgbClr val="FFFFFF"/>
                 </a:solidFill>
@@ -23202,7 +23202,7 @@
           <a:lstStyle/>
           <a:p>
             <a:r>
-              <a:rPr sz="1600" b="1" i="0">
+              <a:rPr sz="1600" b="1" i="0" lang="ja-JP">
                 <a:solidFill>
                   <a:srgbClr val="FFFFFF"/>
                 </a:solidFill>
@@ -23222,7 +23222,7 @@
               </a:spcBef>
             </a:pPr>
             <a:r>
-              <a:rPr sz="1400" b="0" i="0">
+              <a:rPr sz="1400" b="0" i="0" lang="ja-JP">
                 <a:solidFill>
                   <a:srgbClr val="FFFFFF"/>
                 </a:solidFill>
@@ -23232,7 +23232,7 @@
               <a:t>外乱が起きたら，外乱前のスケジュール（</a:t>
             </a:r>
             <a:r>
-              <a:rPr sz="1400" b="1" i="0">
+              <a:rPr sz="1400" b="1" i="0" lang="ja-JP">
                 <a:solidFill>
                   <a:srgbClr val="FFFFFF"/>
                 </a:solidFill>
@@ -23242,7 +23242,7 @@
               <a:t>初期スケジュール </a:t>
             </a:r>
             <a:r>
-              <a:rPr sz="1400" b="1" i="1">
+              <a:rPr sz="1400" b="1" i="1" lang="ja-JP">
                 <a:solidFill>
                   <a:srgbClr val="FFFFFF"/>
                 </a:solidFill>
@@ -23252,7 +23252,7 @@
               <a:t>S</a:t>
             </a:r>
             <a:r>
-              <a:rPr sz="1008" b="1" i="1" baseline="-22000">
+              <a:rPr sz="1008" b="1" i="1" lang="ja-JP" baseline="-22000">
                 <a:solidFill>
                   <a:srgbClr val="FFFFFF"/>
                 </a:solidFill>
@@ -23262,7 +23262,7 @@
               <a:t>p</a:t>
             </a:r>
             <a:r>
-              <a:rPr sz="1400" b="0" i="0">
+              <a:rPr sz="1400" b="0" i="0" lang="ja-JP">
                 <a:solidFill>
                   <a:srgbClr val="FFFFFF"/>
                 </a:solidFill>
@@ -23463,7 +23463,7 @@
           <a:lstStyle/>
           <a:p>
             <a:r>
-              <a:rPr sz="2450" b="1" i="0">
+              <a:rPr sz="2450" b="1" i="0" lang="ja-JP">
                 <a:solidFill>
                   <a:srgbClr val="16385C"/>
                 </a:solidFill>
@@ -23534,7 +23534,7 @@
           <a:lstStyle/>
           <a:p>
             <a:r>
-              <a:rPr sz="900" b="0" i="0">
+              <a:rPr sz="900" b="0" i="0" lang="ja-JP">
                 <a:solidFill>
                   <a:srgbClr val="6E7A88"/>
                 </a:solidFill>
@@ -23570,7 +23570,7 @@
           <a:p>
             <a:pPr algn="r"/>
             <a:r>
-              <a:rPr sz="1000" b="0" i="0">
+              <a:rPr sz="1000" b="0" i="0" lang="ja-JP">
                 <a:solidFill>
                   <a:srgbClr val="6E7A88"/>
                 </a:solidFill>
@@ -23613,7 +23613,7 @@
               </a:spcBef>
             </a:pPr>
             <a:r>
-              <a:rPr sz="1160" b="1" i="0">
+              <a:rPr sz="1160" b="1" i="0" lang="ja-JP">
                 <a:solidFill>
                   <a:srgbClr val="16385C"/>
                 </a:solidFill>
@@ -23623,7 +23623,7 @@
               <a:t>▪ </a:t>
             </a:r>
             <a:r>
-              <a:rPr sz="1450" b="1" i="0">
+              <a:rPr sz="1450" b="1" i="0" lang="ja-JP">
                 <a:solidFill>
                   <a:srgbClr val="16385C"/>
                 </a:solidFill>
@@ -23633,7 +23633,7 @@
               <a:t>誘導解を </a:t>
             </a:r>
             <a:r>
-              <a:rPr sz="1450" b="1" i="1">
+              <a:rPr sz="1450" b="1" i="1" lang="ja-JP">
                 <a:solidFill>
                   <a:srgbClr val="16385C"/>
                 </a:solidFill>
@@ -23643,7 +23643,7 @@
               <a:t>S</a:t>
             </a:r>
             <a:r>
-              <a:rPr sz="1044" b="1" i="1" baseline="-22000">
+              <a:rPr sz="1044" b="1" i="1" lang="ja-JP" baseline="-22000">
                 <a:solidFill>
                   <a:srgbClr val="16385C"/>
                 </a:solidFill>
@@ -23653,7 +23653,7 @@
               <a:t>p</a:t>
             </a:r>
             <a:r>
-              <a:rPr sz="1450" b="1" i="0">
+              <a:rPr sz="1450" b="1" i="0" lang="ja-JP">
                 <a:solidFill>
                   <a:srgbClr val="16385C"/>
                 </a:solidFill>
@@ -23663,7 +23663,7 @@
               <a:t> に固定する理由</a:t>
             </a:r>
             <a:r>
-              <a:rPr sz="1450" b="0" i="0">
+              <a:rPr sz="1450" b="0" i="0" lang="ja-JP">
                 <a:solidFill>
                   <a:srgbClr val="26303A"/>
                 </a:solidFill>
@@ -23673,7 +23673,7 @@
               <a:t>：(a) </a:t>
             </a:r>
             <a:r>
-              <a:rPr sz="1450" b="0" i="1">
+              <a:rPr sz="1450" b="0" i="1" lang="ja-JP">
                 <a:solidFill>
                   <a:srgbClr val="26303A"/>
                 </a:solidFill>
@@ -23683,7 +23683,7 @@
               <a:t>S</a:t>
             </a:r>
             <a:r>
-              <a:rPr sz="1044" b="0" i="1" baseline="-22000">
+              <a:rPr sz="1044" b="0" i="1" lang="ja-JP" baseline="-22000">
                 <a:solidFill>
                   <a:srgbClr val="26303A"/>
                 </a:solidFill>
@@ -23693,7 +23693,7 @@
               <a:t>p</a:t>
             </a:r>
             <a:r>
-              <a:rPr sz="1450" b="0" i="0">
+              <a:rPr sz="1450" b="0" i="0" lang="ja-JP">
                 <a:solidFill>
                   <a:srgbClr val="26303A"/>
                 </a:solidFill>
@@ -23703,7 +23703,7 @@
               <a:t> は順序偏差 </a:t>
             </a:r>
             <a:r>
-              <a:rPr sz="1450" b="0" i="1">
+              <a:rPr sz="1450" b="0" i="1" lang="ja-JP">
                 <a:solidFill>
                   <a:srgbClr val="26303A"/>
                 </a:solidFill>
@@ -23713,7 +23713,7 @@
               <a:t>D</a:t>
             </a:r>
             <a:r>
-              <a:rPr sz="1450" b="0" i="0">
+              <a:rPr sz="1450" b="0" i="0" lang="ja-JP">
                 <a:solidFill>
                   <a:srgbClr val="26303A"/>
                 </a:solidFill>
@@ -23723,7 +23723,7 @@
               <a:t> を最小にする解なので，PR を「</a:t>
             </a:r>
             <a:r>
-              <a:rPr sz="1450" b="0" i="1">
+              <a:rPr sz="1450" b="0" i="1" lang="ja-JP">
                 <a:solidFill>
                   <a:srgbClr val="26303A"/>
                 </a:solidFill>
@@ -23733,7 +23733,7 @@
               <a:t>D</a:t>
             </a:r>
             <a:r>
-              <a:rPr sz="1450" b="0" i="0">
+              <a:rPr sz="1450" b="0" i="0" lang="ja-JP">
                 <a:solidFill>
                   <a:srgbClr val="26303A"/>
                 </a:solidFill>
@@ -23743,7 +23743,7 @@
               <a:t> を最小にする解へ向かう移動」と一意に解釈できる．(b) </a:t>
             </a:r>
             <a:r>
-              <a:rPr sz="1450" b="0" i="1">
+              <a:rPr sz="1450" b="0" i="1" lang="ja-JP">
                 <a:solidFill>
                   <a:srgbClr val="26303A"/>
                 </a:solidFill>
@@ -23753,7 +23753,7 @@
               <a:t>S</a:t>
             </a:r>
             <a:r>
-              <a:rPr sz="1044" b="0" i="1" baseline="-22000">
+              <a:rPr sz="1044" b="0" i="1" lang="ja-JP" baseline="-22000">
                 <a:solidFill>
                   <a:srgbClr val="26303A"/>
                 </a:solidFill>
@@ -23763,7 +23763,7 @@
               <a:t>p</a:t>
             </a:r>
             <a:r>
-              <a:rPr sz="1450" b="0" i="0">
+              <a:rPr sz="1450" b="0" i="0" lang="ja-JP">
                 <a:solidFill>
                   <a:srgbClr val="26303A"/>
                 </a:solidFill>
@@ -23773,7 +23773,7 @@
               <a:t> へ向かう経路上には </a:t>
             </a:r>
             <a:r>
-              <a:rPr sz="1450" b="0" i="1">
+              <a:rPr sz="1450" b="0" i="1" lang="ja-JP">
                 <a:solidFill>
                   <a:srgbClr val="26303A"/>
                 </a:solidFill>
@@ -23783,7 +23783,7 @@
               <a:t>D</a:t>
             </a:r>
             <a:r>
-              <a:rPr sz="1450" b="0" i="0">
+              <a:rPr sz="1450" b="0" i="0" lang="ja-JP">
                 <a:solidFill>
                   <a:srgbClr val="26303A"/>
                 </a:solidFill>
@@ -23793,7 +23793,7 @@
               <a:t> が小さく </a:t>
             </a:r>
             <a:r>
-              <a:rPr sz="1450" b="0" i="1">
+              <a:rPr sz="1450" b="0" i="1" lang="ja-JP">
                 <a:solidFill>
                   <a:srgbClr val="26303A"/>
                 </a:solidFill>
@@ -23803,7 +23803,7 @@
               <a:t>MS</a:t>
             </a:r>
             <a:r>
-              <a:rPr sz="1450" b="0" i="0">
+              <a:rPr sz="1450" b="0" i="0" lang="ja-JP">
                 <a:solidFill>
                   <a:srgbClr val="26303A"/>
                 </a:solidFill>
@@ -23823,7 +23823,7 @@
               </a:spcBef>
             </a:pPr>
             <a:r>
-              <a:rPr sz="1160" b="1" i="0">
+              <a:rPr sz="1160" b="1" i="0" lang="ja-JP">
                 <a:solidFill>
                   <a:srgbClr val="16385C"/>
                 </a:solidFill>
@@ -23833,7 +23833,7 @@
               <a:t>▪ </a:t>
             </a:r>
             <a:r>
-              <a:rPr sz="1450" b="1" i="0">
+              <a:rPr sz="1450" b="1" i="0" lang="ja-JP">
                 <a:solidFill>
                   <a:srgbClr val="16385C"/>
                 </a:solidFill>
@@ -23843,7 +23843,7 @@
               <a:t>PR-</a:t>
             </a:r>
             <a:r>
-              <a:rPr sz="1450" b="1" i="1">
+              <a:rPr sz="1450" b="1" i="1" lang="ja-JP">
                 <a:solidFill>
                   <a:srgbClr val="16385C"/>
                 </a:solidFill>
@@ -23853,7 +23853,7 @@
               <a:t>k</a:t>
             </a:r>
             <a:r>
-              <a:rPr sz="1450" b="1" i="0">
+              <a:rPr sz="1450" b="1" i="0" lang="ja-JP">
                 <a:solidFill>
                   <a:srgbClr val="16385C"/>
                 </a:solidFill>
@@ -23863,7 +23863,7 @@
               <a:t> で </a:t>
             </a:r>
             <a:r>
-              <a:rPr sz="1450" b="1" i="1">
+              <a:rPr sz="1450" b="1" i="1" lang="ja-JP">
                 <a:solidFill>
                   <a:srgbClr val="16385C"/>
                 </a:solidFill>
@@ -23873,7 +23873,7 @@
               <a:t>k</a:t>
             </a:r>
             <a:r>
-              <a:rPr sz="1450" b="1" i="0">
+              <a:rPr sz="1450" b="1" i="0" lang="ja-JP">
                 <a:solidFill>
                   <a:srgbClr val="16385C"/>
                 </a:solidFill>
@@ -23883,7 +23883,7 @@
               <a:t> を変える理由</a:t>
             </a:r>
             <a:r>
-              <a:rPr sz="1450" b="0" i="0">
+              <a:rPr sz="1450" b="0" i="0" lang="ja-JP">
                 <a:solidFill>
                   <a:srgbClr val="26303A"/>
                 </a:solidFill>
@@ -23893,7 +23893,7 @@
               <a:t>：</a:t>
             </a:r>
             <a:r>
-              <a:rPr sz="1450" b="0" i="1">
+              <a:rPr sz="1450" b="0" i="1" lang="ja-JP">
                 <a:solidFill>
                   <a:srgbClr val="26303A"/>
                 </a:solidFill>
@@ -23903,7 +23903,7 @@
               <a:t>k</a:t>
             </a:r>
             <a:r>
-              <a:rPr sz="1450" b="0" i="0">
+              <a:rPr sz="1450" b="0" i="0" lang="ja-JP">
                 <a:solidFill>
                   <a:srgbClr val="26303A"/>
                 </a:solidFill>
@@ -23913,7 +23913,7 @@
               <a:t> が </a:t>
             </a:r>
             <a:r>
-              <a:rPr sz="1450" b="0" i="1">
+              <a:rPr sz="1450" b="0" i="1" lang="ja-JP">
                 <a:solidFill>
                   <a:srgbClr val="26303A"/>
                 </a:solidFill>
@@ -23923,7 +23923,7 @@
               <a:t>d</a:t>
             </a:r>
             <a:r>
-              <a:rPr sz="1450" b="0" i="0">
+              <a:rPr sz="1450" b="0" i="0" lang="ja-JP">
                 <a:solidFill>
                   <a:srgbClr val="26303A"/>
                 </a:solidFill>
@@ -23933,7 +23933,7 @@
               <a:t> に等しければ </a:t>
             </a:r>
             <a:r>
-              <a:rPr sz="1450" b="0" i="1">
+              <a:rPr sz="1450" b="0" i="1" lang="ja-JP">
                 <a:solidFill>
                   <a:srgbClr val="26303A"/>
                 </a:solidFill>
@@ -23943,7 +23943,7 @@
               <a:t>S</a:t>
             </a:r>
             <a:r>
-              <a:rPr sz="1044" b="0" i="1" baseline="-22000">
+              <a:rPr sz="1044" b="0" i="1" lang="ja-JP" baseline="-22000">
                 <a:solidFill>
                   <a:srgbClr val="26303A"/>
                 </a:solidFill>
@@ -23953,7 +23953,7 @@
               <a:t>p</a:t>
             </a:r>
             <a:r>
-              <a:rPr sz="1450" b="0" i="0">
+              <a:rPr sz="1450" b="0" i="0" lang="ja-JP">
                 <a:solidFill>
                   <a:srgbClr val="26303A"/>
                 </a:solidFill>
@@ -23963,7 +23963,7 @@
               <a:t> まで戻り，小さければ現在解の近くに留まる．</a:t>
             </a:r>
             <a:r>
-              <a:rPr sz="1450" b="0" i="1">
+              <a:rPr sz="1450" b="0" i="1" lang="ja-JP">
                 <a:solidFill>
                   <a:srgbClr val="26303A"/>
                 </a:solidFill>
@@ -23973,7 +23973,7 @@
               <a:t>k</a:t>
             </a:r>
             <a:r>
-              <a:rPr sz="1450" b="0" i="0">
+              <a:rPr sz="1450" b="0" i="0" lang="ja-JP">
                 <a:solidFill>
                   <a:srgbClr val="26303A"/>
                 </a:solidFill>
@@ -23983,7 +23983,7 @@
               <a:t> を変えて繰り返すことで，現在解と </a:t>
             </a:r>
             <a:r>
-              <a:rPr sz="1450" b="0" i="1">
+              <a:rPr sz="1450" b="0" i="1" lang="ja-JP">
                 <a:solidFill>
                   <a:srgbClr val="26303A"/>
                 </a:solidFill>
@@ -23993,7 +23993,7 @@
               <a:t>S</a:t>
             </a:r>
             <a:r>
-              <a:rPr sz="1044" b="0" i="1" baseline="-22000">
+              <a:rPr sz="1044" b="0" i="1" lang="ja-JP" baseline="-22000">
                 <a:solidFill>
                   <a:srgbClr val="26303A"/>
                 </a:solidFill>
@@ -24003,7 +24003,7 @@
               <a:t>p</a:t>
             </a:r>
             <a:r>
-              <a:rPr sz="1450" b="0" i="0">
+              <a:rPr sz="1450" b="0" i="0" lang="ja-JP">
                 <a:solidFill>
                   <a:srgbClr val="26303A"/>
                 </a:solidFill>
@@ -24023,7 +24023,7 @@
               </a:spcBef>
             </a:pPr>
             <a:r>
-              <a:rPr sz="1160" b="1" i="0">
+              <a:rPr sz="1160" b="1" i="0" lang="ja-JP">
                 <a:solidFill>
                   <a:srgbClr val="16385C"/>
                 </a:solidFill>
@@ -24033,7 +24033,7 @@
               <a:t>▪ </a:t>
             </a:r>
             <a:r>
-              <a:rPr sz="1450" b="1" i="0">
+              <a:rPr sz="1450" b="1" i="0" lang="ja-JP">
                 <a:solidFill>
                   <a:srgbClr val="16385C"/>
                 </a:solidFill>
@@ -24043,7 +24043,7 @@
               <a:t>組み込み方</a:t>
             </a:r>
             <a:r>
-              <a:rPr sz="1450" b="0" i="0">
+              <a:rPr sz="1450" b="0" i="0" lang="ja-JP">
                 <a:solidFill>
                   <a:srgbClr val="26303A"/>
                 </a:solidFill>
@@ -24053,7 +24053,7 @@
               <a:t>：両構造に「</a:t>
             </a:r>
             <a:r>
-              <a:rPr sz="1450" b="0" i="1">
+              <a:rPr sz="1450" b="0" i="1" lang="ja-JP">
                 <a:solidFill>
                   <a:srgbClr val="26303A"/>
                 </a:solidFill>
@@ -24063,7 +24063,7 @@
               <a:t>S</a:t>
             </a:r>
             <a:r>
-              <a:rPr sz="1044" b="0" i="1" baseline="-22000">
+              <a:rPr sz="1044" b="0" i="1" lang="ja-JP" baseline="-22000">
                 <a:solidFill>
                   <a:srgbClr val="26303A"/>
                 </a:solidFill>
@@ -24073,7 +24073,7 @@
               <a:t>p</a:t>
             </a:r>
             <a:r>
-              <a:rPr sz="1450" b="0" i="0">
+              <a:rPr sz="1450" b="0" i="0" lang="ja-JP">
                 <a:solidFill>
                   <a:srgbClr val="26303A"/>
                 </a:solidFill>
@@ -24083,7 +24083,7 @@
               <a:t> に近づける swap 移動」という核を共有させ，発動の契機と返し方は各構造の標準的な組み込み方に合わせる．ILS は停滞時に摂動として発動し，</a:t>
             </a:r>
             <a:r>
-              <a:rPr sz="1450" b="0" i="1">
+              <a:rPr sz="1450" b="0" i="1" lang="ja-JP">
                 <a:solidFill>
                   <a:srgbClr val="26303A"/>
                 </a:solidFill>
@@ -24093,7 +24093,7 @@
               <a:t>k</a:t>
             </a:r>
             <a:r>
-              <a:rPr sz="1450" b="0" i="0">
+              <a:rPr sz="1450" b="0" i="0" lang="ja-JP">
                 <a:solidFill>
                   <a:srgbClr val="26303A"/>
                 </a:solidFill>
@@ -24103,7 +24103,7 @@
               <a:t> を 1 から </a:t>
             </a:r>
             <a:r>
-              <a:rPr sz="1450" b="0" i="1">
+              <a:rPr sz="1450" b="0" i="1" lang="ja-JP">
                 <a:solidFill>
                   <a:srgbClr val="26303A"/>
                 </a:solidFill>
@@ -24113,7 +24113,7 @@
               <a:t>d</a:t>
             </a:r>
             <a:r>
-              <a:rPr sz="1450" b="0" i="0">
+              <a:rPr sz="1450" b="0" i="0" lang="ja-JP">
                 <a:solidFill>
                   <a:srgbClr val="26303A"/>
                 </a:solidFill>
@@ -24123,7 +24123,7 @@
               <a:t> まで 1 ずつ増やして，上限に達するか best が改善したら 1 に戻す．Memetic は局所探索の後に個体ごとに確率的に適用し（</a:t>
             </a:r>
             <a:r>
-              <a:rPr sz="1450" b="0" i="1">
+              <a:rPr sz="1450" b="0" i="1" lang="ja-JP">
                 <a:solidFill>
                   <a:srgbClr val="26303A"/>
                 </a:solidFill>
@@ -24133,7 +24133,7 @@
               <a:t>k</a:t>
             </a:r>
             <a:r>
-              <a:rPr sz="1450" b="0" i="0">
+              <a:rPr sz="1450" b="0" i="0" lang="ja-JP">
                 <a:solidFill>
                   <a:srgbClr val="26303A"/>
                 </a:solidFill>
@@ -24143,7 +24143,7 @@
               <a:t> は 1〜</a:t>
             </a:r>
             <a:r>
-              <a:rPr sz="1450" b="0" i="1">
+              <a:rPr sz="1450" b="0" i="1" lang="ja-JP">
                 <a:solidFill>
                   <a:srgbClr val="26303A"/>
                 </a:solidFill>
@@ -24153,7 +24153,7 @@
               <a:t>d</a:t>
             </a:r>
             <a:r>
-              <a:rPr sz="1450" b="0" i="0">
+              <a:rPr sz="1450" b="0" i="0" lang="ja-JP">
                 <a:solidFill>
                   <a:srgbClr val="26303A"/>
                 </a:solidFill>
@@ -24173,7 +24173,7 @@
               </a:spcBef>
             </a:pPr>
             <a:r>
-              <a:rPr sz="1232" b="0" i="0">
+              <a:rPr sz="1232" b="0" i="0" lang="ja-JP">
                 <a:solidFill>
                   <a:srgbClr val="6E7A88"/>
                 </a:solidFill>
@@ -24183,7 +24183,7 @@
               <a:t>　－ </a:t>
             </a:r>
             <a:r>
-              <a:rPr sz="1305" b="0" i="0">
+              <a:rPr sz="1305" b="0" i="0" lang="ja-JP">
                 <a:solidFill>
                   <a:srgbClr val="26303A"/>
                 </a:solidFill>
@@ -24203,7 +24203,7 @@
               </a:spcBef>
             </a:pPr>
             <a:r>
-              <a:rPr sz="1160" b="1" i="0">
+              <a:rPr sz="1160" b="1" i="0" lang="ja-JP">
                 <a:solidFill>
                   <a:srgbClr val="16385C"/>
                 </a:solidFill>
@@ -24213,7 +24213,7 @@
               <a:t>▪ </a:t>
             </a:r>
             <a:r>
-              <a:rPr sz="1450" b="1" i="0">
+              <a:rPr sz="1450" b="1" i="0" lang="ja-JP">
                 <a:solidFill>
                   <a:srgbClr val="16385C"/>
                 </a:solidFill>
@@ -24223,7 +24223,7 @@
               <a:t>入れ替える作業の選び方</a:t>
             </a:r>
             <a:r>
-              <a:rPr sz="1450" b="0" i="0">
+              <a:rPr sz="1450" b="0" i="0" lang="ja-JP">
                 <a:solidFill>
                   <a:srgbClr val="26303A"/>
                 </a:solidFill>
@@ -24233,7 +24233,7 @@
               <a:t>：実行可能な候補からランダムに選び，評価回数を </a:t>
             </a:r>
             <a:r>
-              <a:rPr sz="1450" b="0" i="1">
+              <a:rPr sz="1450" b="0" i="1" lang="ja-JP">
                 <a:solidFill>
                   <a:srgbClr val="26303A"/>
                 </a:solidFill>
@@ -24243,7 +24243,7 @@
               <a:t>O(d)</a:t>
             </a:r>
             <a:r>
-              <a:rPr sz="1450" b="0" i="0">
+              <a:rPr sz="1450" b="0" i="0" lang="ja-JP">
                 <a:solidFill>
                   <a:srgbClr val="26303A"/>
                 </a:solidFill>
@@ -24253,7 +24253,7 @@
               <a:t> に抑える．全候補を評価する best 選択は </a:t>
             </a:r>
             <a:r>
-              <a:rPr sz="1450" b="0" i="1">
+              <a:rPr sz="1450" b="0" i="1" lang="ja-JP">
                 <a:solidFill>
                   <a:srgbClr val="26303A"/>
                 </a:solidFill>
@@ -24263,7 +24263,7 @@
               <a:t>O(d</a:t>
             </a:r>
             <a:r>
-              <a:rPr sz="1044" b="0" i="1" baseline="30000">
+              <a:rPr sz="1044" b="0" i="1" lang="ja-JP" baseline="30000">
                 <a:solidFill>
                   <a:srgbClr val="26303A"/>
                 </a:solidFill>
@@ -24273,7 +24273,7 @@
               <a:t>2</a:t>
             </a:r>
             <a:r>
-              <a:rPr sz="1450" b="0" i="1">
+              <a:rPr sz="1450" b="0" i="1" lang="ja-JP">
                 <a:solidFill>
                   <a:srgbClr val="26303A"/>
                 </a:solidFill>
@@ -24283,7 +24283,7 @@
               <a:t>)</a:t>
             </a:r>
             <a:r>
-              <a:rPr sz="1450" b="0" i="0">
+              <a:rPr sz="1450" b="0" i="0" lang="ja-JP">
                 <a:solidFill>
                   <a:srgbClr val="26303A"/>
                 </a:solidFill>
@@ -24336,7 +24336,7 @@
           <a:lstStyle/>
           <a:p>
             <a:r>
-              <a:rPr sz="2450" b="1" i="0">
+              <a:rPr sz="2450" b="1" i="0" lang="ja-JP">
                 <a:solidFill>
                   <a:srgbClr val="16385C"/>
                 </a:solidFill>
@@ -24407,7 +24407,7 @@
           <a:lstStyle/>
           <a:p>
             <a:r>
-              <a:rPr sz="900" b="0" i="0">
+              <a:rPr sz="900" b="0" i="0" lang="ja-JP">
                 <a:solidFill>
                   <a:srgbClr val="6E7A88"/>
                 </a:solidFill>
@@ -24443,7 +24443,7 @@
           <a:p>
             <a:pPr algn="r"/>
             <a:r>
-              <a:rPr sz="1000" b="0" i="0">
+              <a:rPr sz="1000" b="0" i="0" lang="ja-JP">
                 <a:solidFill>
                   <a:srgbClr val="6E7A88"/>
                 </a:solidFill>
@@ -24485,7 +24485,7 @@
                     <a:p>
                       <a:pPr algn="l"/>
                       <a:r>
-                        <a:rPr sz="1350" b="1" i="0">
+                        <a:rPr sz="1350" b="1" i="0" lang="ja-JP">
                           <a:solidFill>
                             <a:srgbClr val="FFFFFF"/>
                           </a:solidFill>
@@ -24509,7 +24509,7 @@
                     <a:p>
                       <a:pPr algn="l"/>
                       <a:r>
-                        <a:rPr sz="1350" b="1" i="0">
+                        <a:rPr sz="1350" b="1" i="0" lang="ja-JP">
                           <a:solidFill>
                             <a:srgbClr val="FFFFFF"/>
                           </a:solidFill>
@@ -24535,7 +24535,7 @@
                     <a:p>
                       <a:pPr algn="l"/>
                       <a:r>
-                        <a:rPr sz="1350" b="0" i="0">
+                        <a:rPr sz="1350" b="0" i="0" lang="ja-JP">
                           <a:solidFill>
                             <a:srgbClr val="26303A"/>
                           </a:solidFill>
@@ -24564,7 +24564,7 @@
                     <a:p>
                       <a:pPr algn="l"/>
                       <a:r>
-                        <a:rPr sz="1350" b="0" i="0">
+                        <a:rPr sz="1350" b="0" i="0" lang="ja-JP">
                           <a:solidFill>
                             <a:srgbClr val="26303A"/>
                           </a:solidFill>
@@ -24574,7 +24574,7 @@
                         <a:t>交叉率 0.85，突然変異率 0.1，集団 50（</a:t>
                       </a:r>
                       <a:r>
-                        <a:rPr sz="1350" b="0" i="1">
+                        <a:rPr sz="1350" b="0" i="1" lang="ja-JP">
                           <a:solidFill>
                             <a:srgbClr val="26303A"/>
                           </a:solidFill>
@@ -24584,7 +24584,7 @@
                         <a:t>S</a:t>
                       </a:r>
                       <a:r>
-                        <a:rPr sz="971" b="0" i="1" baseline="-22000">
+                        <a:rPr sz="971" b="0" i="1" lang="ja-JP" baseline="-22000">
                           <a:solidFill>
                             <a:srgbClr val="26303A"/>
                           </a:solidFill>
@@ -24594,7 +24594,7 @@
                         <a:t>p</a:t>
                       </a:r>
                       <a:r>
-                        <a:rPr sz="1350" b="0" i="0">
+                        <a:rPr sz="1350" b="0" i="0" lang="ja-JP">
                           <a:solidFill>
                             <a:srgbClr val="26303A"/>
                           </a:solidFill>
@@ -24625,7 +24625,7 @@
                     <a:p>
                       <a:pPr algn="l"/>
                       <a:r>
-                        <a:rPr sz="1350" b="0" i="0">
+                        <a:rPr sz="1350" b="0" i="0" lang="ja-JP">
                           <a:solidFill>
                             <a:srgbClr val="26303A"/>
                           </a:solidFill>
@@ -24654,7 +24654,7 @@
                     <a:p>
                       <a:pPr algn="l"/>
                       <a:r>
-                        <a:rPr sz="1350" b="0" i="0">
+                        <a:rPr sz="1350" b="0" i="0" lang="ja-JP">
                           <a:solidFill>
                             <a:srgbClr val="26303A"/>
                           </a:solidFill>
@@ -24685,7 +24685,7 @@
                     <a:p>
                       <a:pPr algn="l"/>
                       <a:r>
-                        <a:rPr sz="1350" b="0" i="0">
+                        <a:rPr sz="1350" b="0" i="0" lang="ja-JP">
                           <a:solidFill>
                             <a:srgbClr val="26303A"/>
                           </a:solidFill>
@@ -24714,7 +24714,7 @@
                     <a:p>
                       <a:pPr algn="l"/>
                       <a:r>
-                        <a:rPr sz="1350" b="0" i="0">
+                        <a:rPr sz="1350" b="0" i="0" lang="ja-JP">
                           <a:solidFill>
                             <a:srgbClr val="26303A"/>
                           </a:solidFill>
@@ -24745,7 +24745,7 @@
                     <a:p>
                       <a:pPr algn="l"/>
                       <a:r>
-                        <a:rPr sz="1350" b="0" i="0">
+                        <a:rPr sz="1350" b="0" i="0" lang="ja-JP">
                           <a:solidFill>
                             <a:srgbClr val="26303A"/>
                           </a:solidFill>
@@ -24774,7 +24774,7 @@
                     <a:p>
                       <a:pPr algn="l"/>
                       <a:r>
-                        <a:rPr sz="1350" b="0" i="0">
+                        <a:rPr sz="1350" b="0" i="0" lang="ja-JP">
                           <a:solidFill>
                             <a:srgbClr val="26303A"/>
                           </a:solidFill>
@@ -24805,7 +24805,7 @@
                     <a:p>
                       <a:pPr algn="l"/>
                       <a:r>
-                        <a:rPr sz="1350" b="0" i="0">
+                        <a:rPr sz="1350" b="0" i="0" lang="ja-JP">
                           <a:solidFill>
                             <a:srgbClr val="26303A"/>
                           </a:solidFill>
@@ -24815,7 +24815,7 @@
                         <a:t>PR-</a:t>
                       </a:r>
                       <a:r>
-                        <a:rPr sz="1350" b="0" i="1">
+                        <a:rPr sz="1350" b="0" i="1" lang="ja-JP">
                           <a:solidFill>
                             <a:srgbClr val="26303A"/>
                           </a:solidFill>
@@ -24825,7 +24825,7 @@
                         <a:t>k</a:t>
                       </a:r>
                       <a:r>
-                        <a:rPr sz="1350" b="0" i="0">
+                        <a:rPr sz="1350" b="0" i="0" lang="ja-JP">
                           <a:solidFill>
                             <a:srgbClr val="26303A"/>
                           </a:solidFill>
@@ -24835,7 +24835,7 @@
                         <a:t> の深さ </a:t>
                       </a:r>
                       <a:r>
-                        <a:rPr sz="1350" b="0" i="1">
+                        <a:rPr sz="1350" b="0" i="1" lang="ja-JP">
                           <a:solidFill>
                             <a:srgbClr val="26303A"/>
                           </a:solidFill>
@@ -24864,7 +24864,7 @@
                     <a:p>
                       <a:pPr algn="l"/>
                       <a:r>
-                        <a:rPr sz="1350" b="0" i="0">
+                        <a:rPr sz="1350" b="0" i="0" lang="ja-JP">
                           <a:solidFill>
                             <a:srgbClr val="26303A"/>
                           </a:solidFill>
@@ -24874,7 +24874,7 @@
                         <a:t>1 から </a:t>
                       </a:r>
                       <a:r>
-                        <a:rPr sz="1350" b="0" i="1">
+                        <a:rPr sz="1350" b="0" i="1" lang="ja-JP">
                           <a:solidFill>
                             <a:srgbClr val="26303A"/>
                           </a:solidFill>
@@ -24884,7 +24884,7 @@
                         <a:t>S</a:t>
                       </a:r>
                       <a:r>
-                        <a:rPr sz="971" b="0" i="1" baseline="-22000">
+                        <a:rPr sz="971" b="0" i="1" lang="ja-JP" baseline="-22000">
                           <a:solidFill>
                             <a:srgbClr val="26303A"/>
                           </a:solidFill>
@@ -24894,7 +24894,7 @@
                         <a:t>p</a:t>
                       </a:r>
                       <a:r>
-                        <a:rPr sz="1350" b="0" i="0">
+                        <a:rPr sz="1350" b="0" i="0" lang="ja-JP">
                           <a:solidFill>
                             <a:srgbClr val="26303A"/>
                           </a:solidFill>
@@ -24904,7 +24904,7 @@
                         <a:t> と処理順位が異なる作業数 </a:t>
                       </a:r>
                       <a:r>
-                        <a:rPr sz="1350" b="0" i="1">
+                        <a:rPr sz="1350" b="0" i="1" lang="ja-JP">
                           <a:solidFill>
                             <a:srgbClr val="26303A"/>
                           </a:solidFill>
@@ -24914,7 +24914,7 @@
                         <a:t>d</a:t>
                       </a:r>
                       <a:r>
-                        <a:rPr sz="1350" b="0" i="0">
+                        <a:rPr sz="1350" b="0" i="0" lang="ja-JP">
                           <a:solidFill>
                             <a:srgbClr val="26303A"/>
                           </a:solidFill>
@@ -24945,7 +24945,7 @@
                     <a:p>
                       <a:pPr algn="l"/>
                       <a:r>
-                        <a:rPr sz="1350" b="0" i="0">
+                        <a:rPr sz="1350" b="0" i="0" lang="ja-JP">
                           <a:solidFill>
                             <a:srgbClr val="26303A"/>
                           </a:solidFill>
@@ -24974,7 +24974,7 @@
                     <a:p>
                       <a:pPr algn="l"/>
                       <a:r>
-                        <a:rPr sz="1350" b="0" i="0">
+                        <a:rPr sz="1350" b="0" i="0" lang="ja-JP">
                           <a:solidFill>
                             <a:srgbClr val="26303A"/>
                           </a:solidFill>
@@ -25005,7 +25005,7 @@
                     <a:p>
                       <a:pPr algn="l"/>
                       <a:r>
-                        <a:rPr sz="1350" b="0" i="0">
+                        <a:rPr sz="1350" b="0" i="0" lang="ja-JP">
                           <a:solidFill>
                             <a:srgbClr val="26303A"/>
                           </a:solidFill>
@@ -25034,7 +25034,7 @@
                     <a:p>
                       <a:pPr algn="l"/>
                       <a:r>
-                        <a:rPr sz="1350" b="0" i="0">
+                        <a:rPr sz="1350" b="0" i="0" lang="ja-JP">
                           <a:solidFill>
                             <a:srgbClr val="26303A"/>
                           </a:solidFill>
@@ -25102,7 +25102,7 @@
           <a:lstStyle/>
           <a:p>
             <a:r>
-              <a:rPr sz="2450" b="1" i="0">
+              <a:rPr sz="2450" b="1" i="0" lang="ja-JP">
                 <a:solidFill>
                   <a:srgbClr val="16385C"/>
                 </a:solidFill>
@@ -25173,7 +25173,7 @@
           <a:lstStyle/>
           <a:p>
             <a:r>
-              <a:rPr sz="900" b="0" i="0">
+              <a:rPr sz="900" b="0" i="0" lang="ja-JP">
                 <a:solidFill>
                   <a:srgbClr val="6E7A88"/>
                 </a:solidFill>
@@ -25209,7 +25209,7 @@
           <a:p>
             <a:pPr algn="r"/>
             <a:r>
-              <a:rPr sz="1000" b="0" i="0">
+              <a:rPr sz="1000" b="0" i="0" lang="ja-JP">
                 <a:solidFill>
                   <a:srgbClr val="6E7A88"/>
                 </a:solidFill>
@@ -25252,7 +25252,7 @@
               </a:spcBef>
             </a:pPr>
             <a:r>
-              <a:rPr sz="1200" b="1" i="0">
+              <a:rPr sz="1200" b="1" i="0" lang="ja-JP">
                 <a:solidFill>
                   <a:srgbClr val="16385C"/>
                 </a:solidFill>
@@ -25262,7 +25262,7 @@
               <a:t>▪ </a:t>
             </a:r>
             <a:r>
-              <a:rPr sz="1500" b="1" i="0">
+              <a:rPr sz="1500" b="1" i="0" lang="ja-JP">
                 <a:solidFill>
                   <a:srgbClr val="16385C"/>
                 </a:solidFill>
@@ -25272,7 +25272,7 @@
               <a:t>高安定領域の境界</a:t>
             </a:r>
             <a:r>
-              <a:rPr sz="1500" b="0" i="0">
+              <a:rPr sz="1500" b="0" i="0" lang="ja-JP">
                 <a:solidFill>
                   <a:srgbClr val="26303A"/>
                 </a:solidFill>
@@ -25282,7 +25282,7 @@
               <a:t>：</a:t>
             </a:r>
             <a:r>
-              <a:rPr sz="1500" b="0" i="1">
+              <a:rPr sz="1500" b="0" i="1" lang="ja-JP">
                 <a:solidFill>
                   <a:srgbClr val="26303A"/>
                 </a:solidFill>
@@ -25292,7 +25292,7 @@
               <a:t>θ</a:t>
             </a:r>
             <a:r>
-              <a:rPr sz="1500" b="0" i="0">
+              <a:rPr sz="1500" b="0" i="0" lang="ja-JP">
                 <a:solidFill>
                   <a:srgbClr val="26303A"/>
                 </a:solidFill>
@@ -25312,7 +25312,7 @@
               </a:spcBef>
             </a:pPr>
             <a:r>
-              <a:rPr sz="1200" b="1" i="0">
+              <a:rPr sz="1200" b="1" i="0" lang="ja-JP">
                 <a:solidFill>
                   <a:srgbClr val="16385C"/>
                 </a:solidFill>
@@ -25322,7 +25322,7 @@
               <a:t>▪ </a:t>
             </a:r>
             <a:r>
-              <a:rPr sz="1500" b="1" i="0">
+              <a:rPr sz="1500" b="1" i="0" lang="ja-JP">
                 <a:solidFill>
                   <a:srgbClr val="16385C"/>
                 </a:solidFill>
@@ -25332,7 +25332,7 @@
               <a:t>計算時間</a:t>
             </a:r>
             <a:r>
-              <a:rPr sz="1500" b="0" i="0">
+              <a:rPr sz="1500" b="0" i="0" lang="ja-JP">
                 <a:solidFill>
                   <a:srgbClr val="26303A"/>
                 </a:solidFill>
@@ -25352,7 +25352,7 @@
               </a:spcBef>
             </a:pPr>
             <a:r>
-              <a:rPr sz="1200" b="1" i="0">
+              <a:rPr sz="1200" b="1" i="0" lang="ja-JP">
                 <a:solidFill>
                   <a:srgbClr val="16385C"/>
                 </a:solidFill>
@@ -25362,7 +25362,7 @@
               <a:t>▪ </a:t>
             </a:r>
             <a:r>
-              <a:rPr sz="1500" b="1" i="0">
+              <a:rPr sz="1500" b="1" i="0" lang="ja-JP">
                 <a:solidFill>
                   <a:srgbClr val="16385C"/>
                 </a:solidFill>
@@ -25372,7 +25372,7 @@
               <a:t>PR か PR-</a:t>
             </a:r>
             <a:r>
-              <a:rPr sz="1500" b="1" i="1">
+              <a:rPr sz="1500" b="1" i="1" lang="ja-JP">
                 <a:solidFill>
                   <a:srgbClr val="16385C"/>
                 </a:solidFill>
@@ -25382,7 +25382,7 @@
               <a:t>k</a:t>
             </a:r>
             <a:r>
-              <a:rPr sz="1500" b="1" i="0">
+              <a:rPr sz="1500" b="1" i="0" lang="ja-JP">
                 <a:solidFill>
                   <a:srgbClr val="16385C"/>
                 </a:solidFill>
@@ -25392,7 +25392,7 @@
               <a:t> か</a:t>
             </a:r>
             <a:r>
-              <a:rPr sz="1500" b="0" i="0">
+              <a:rPr sz="1500" b="0" i="0" lang="ja-JP">
                 <a:solidFill>
                   <a:srgbClr val="26303A"/>
                 </a:solidFill>
@@ -25402,7 +25402,7 @@
               <a:t>：ILS ではどちらを組み込んでも 3 指標とも差は 2% 以内．Memetic では全域 HV・高安定 HV は PR がわずかに上回り（有意差は各 2 シナリオ），AUC は 1 回の計算が軽い PR-</a:t>
             </a:r>
             <a:r>
-              <a:rPr sz="1500" b="0" i="1">
+              <a:rPr sz="1500" b="0" i="1" lang="ja-JP">
                 <a:solidFill>
                   <a:srgbClr val="26303A"/>
                 </a:solidFill>
@@ -25412,7 +25412,7 @@
               <a:t>k</a:t>
             </a:r>
             <a:r>
-              <a:rPr sz="1500" b="0" i="0">
+              <a:rPr sz="1500" b="0" i="0" lang="ja-JP">
                 <a:solidFill>
                   <a:srgbClr val="26303A"/>
                 </a:solidFill>
@@ -25432,7 +25432,7 @@
               </a:spcBef>
             </a:pPr>
             <a:r>
-              <a:rPr sz="1200" b="1" i="0">
+              <a:rPr sz="1200" b="1" i="0" lang="ja-JP">
                 <a:solidFill>
                   <a:srgbClr val="16385C"/>
                 </a:solidFill>
@@ -25442,7 +25442,7 @@
               <a:t>▪ </a:t>
             </a:r>
             <a:r>
-              <a:rPr sz="1500" b="1" i="0">
+              <a:rPr sz="1500" b="1" i="0" lang="ja-JP">
                 <a:solidFill>
                   <a:srgbClr val="16385C"/>
                 </a:solidFill>
@@ -25452,7 +25452,7 @@
               <a:t>ILS で演算子により有意に向上した 2 シナリオ</a:t>
             </a:r>
             <a:r>
-              <a:rPr sz="1500" b="0" i="0">
+              <a:rPr sz="1500" b="0" i="0" lang="ja-JP">
                 <a:solidFill>
                   <a:srgbClr val="26303A"/>
                 </a:solidFill>
@@ -25462,7 +25462,7 @@
               <a:t>：la36L・ta21L で </a:t>
             </a:r>
             <a:r>
-              <a:rPr sz="1500" b="0" i="1">
+              <a:rPr sz="1500" b="0" i="1" lang="ja-JP">
                 <a:solidFill>
                   <a:srgbClr val="26303A"/>
                 </a:solidFill>
@@ -25472,7 +25472,7 @@
               <a:t>p</a:t>
             </a:r>
             <a:r>
-              <a:rPr sz="1500" b="0" i="0">
+              <a:rPr sz="1500" b="0" i="0" lang="ja-JP">
                 <a:solidFill>
                   <a:srgbClr val="26303A"/>
                 </a:solidFill>
@@ -25482,7 +25482,7 @@
               <a:t> &lt; 0.05．Holm 補正後に残るのは ta21L のみ（la36L は </a:t>
             </a:r>
             <a:r>
-              <a:rPr sz="1500" b="0" i="1">
+              <a:rPr sz="1500" b="0" i="1" lang="ja-JP">
                 <a:solidFill>
                   <a:srgbClr val="26303A"/>
                 </a:solidFill>
@@ -25492,7 +25492,7 @@
               <a:t>p</a:t>
             </a:r>
             <a:r>
-              <a:rPr sz="1080" b="0" i="1" baseline="-22000">
+              <a:rPr sz="1080" b="0" i="1" lang="ja-JP" baseline="-22000">
                 <a:solidFill>
                   <a:srgbClr val="26303A"/>
                 </a:solidFill>
@@ -25502,7 +25502,7 @@
               <a:t>adj</a:t>
             </a:r>
             <a:r>
-              <a:rPr sz="1500" b="0" i="0">
+              <a:rPr sz="1500" b="0" i="0" lang="ja-JP">
                 <a:solidFill>
                   <a:srgbClr val="26303A"/>
                 </a:solidFill>
@@ -25555,7 +25555,7 @@
           <a:lstStyle/>
           <a:p>
             <a:r>
-              <a:rPr sz="2450" b="1" i="0">
+              <a:rPr sz="2450" b="1" i="0" lang="ja-JP">
                 <a:solidFill>
                   <a:srgbClr val="16385C"/>
                 </a:solidFill>
@@ -25626,7 +25626,7 @@
           <a:lstStyle/>
           <a:p>
             <a:r>
-              <a:rPr sz="900" b="0" i="0">
+              <a:rPr sz="900" b="0" i="0" lang="ja-JP">
                 <a:solidFill>
                   <a:srgbClr val="6E7A88"/>
                 </a:solidFill>
@@ -25662,7 +25662,7 @@
           <a:p>
             <a:pPr algn="r"/>
             <a:r>
-              <a:rPr sz="1000" b="0" i="0">
+              <a:rPr sz="1000" b="0" i="0" lang="ja-JP">
                 <a:solidFill>
                   <a:srgbClr val="6E7A88"/>
                 </a:solidFill>
@@ -25705,7 +25705,7 @@
               </a:spcBef>
             </a:pPr>
             <a:r>
-              <a:rPr sz="1200" b="1" i="0">
+              <a:rPr sz="1200" b="1" i="0" lang="ja-JP">
                 <a:solidFill>
                   <a:srgbClr val="16385C"/>
                 </a:solidFill>
@@ -25715,7 +25715,7 @@
               <a:t>▪ </a:t>
             </a:r>
             <a:r>
-              <a:rPr sz="1500" b="1" i="0">
+              <a:rPr sz="1500" b="1" i="0" lang="ja-JP">
                 <a:solidFill>
                   <a:srgbClr val="16385C"/>
                 </a:solidFill>
@@ -25725,7 +25725,7 @@
               <a:t>ランダム方向の対照実験</a:t>
             </a:r>
             <a:r>
-              <a:rPr sz="1500" b="0" i="0">
+              <a:rPr sz="1500" b="0" i="0" lang="ja-JP">
                 <a:solidFill>
                   <a:srgbClr val="26303A"/>
                 </a:solidFill>
@@ -25735,7 +25735,7 @@
               <a:t>：Memetic に組み込んだ演算子による向上が，摂動一般の効果か，</a:t>
             </a:r>
             <a:r>
-              <a:rPr sz="1500" b="0" i="1">
+              <a:rPr sz="1500" b="0" i="1" lang="ja-JP">
                 <a:solidFill>
                   <a:srgbClr val="26303A"/>
                 </a:solidFill>
@@ -25745,7 +25745,7 @@
               <a:t>S</a:t>
             </a:r>
             <a:r>
-              <a:rPr sz="1080" b="0" i="1" baseline="-22000">
+              <a:rPr sz="1080" b="0" i="1" lang="ja-JP" baseline="-22000">
                 <a:solidFill>
                   <a:srgbClr val="26303A"/>
                 </a:solidFill>
@@ -25755,7 +25755,7 @@
               <a:t>p</a:t>
             </a:r>
             <a:r>
-              <a:rPr sz="1500" b="0" i="0">
+              <a:rPr sz="1500" b="0" i="0" lang="ja-JP">
                 <a:solidFill>
                   <a:srgbClr val="26303A"/>
                 </a:solidFill>
@@ -25775,7 +25775,7 @@
               </a:spcBef>
             </a:pPr>
             <a:r>
-              <a:rPr sz="1275" b="0" i="0">
+              <a:rPr sz="1275" b="0" i="0" lang="ja-JP">
                 <a:solidFill>
                   <a:srgbClr val="6E7A88"/>
                 </a:solidFill>
@@ -25785,7 +25785,7 @@
               <a:t>　－ </a:t>
             </a:r>
             <a:r>
-              <a:rPr sz="1350" b="0" i="0">
+              <a:rPr sz="1350" b="0" i="0" lang="ja-JP">
                 <a:solidFill>
                   <a:srgbClr val="26303A"/>
                 </a:solidFill>
@@ -25805,7 +25805,7 @@
               </a:spcBef>
             </a:pPr>
             <a:r>
-              <a:rPr sz="1275" b="0" i="0">
+              <a:rPr sz="1275" b="0" i="0" lang="ja-JP">
                 <a:solidFill>
                   <a:srgbClr val="6E7A88"/>
                 </a:solidFill>
@@ -25815,7 +25815,7 @@
               <a:t>　－ </a:t>
             </a:r>
             <a:r>
-              <a:rPr sz="1350" b="0" i="0">
+              <a:rPr sz="1350" b="0" i="0" lang="ja-JP">
                 <a:solidFill>
                   <a:srgbClr val="26303A"/>
                 </a:solidFill>
@@ -25835,7 +25835,7 @@
               </a:spcBef>
             </a:pPr>
             <a:r>
-              <a:rPr sz="1200" b="1" i="0">
+              <a:rPr sz="1200" b="1" i="0" lang="ja-JP">
                 <a:solidFill>
                   <a:srgbClr val="16385C"/>
                 </a:solidFill>
@@ -25845,7 +25845,7 @@
               <a:t>▪ </a:t>
             </a:r>
             <a:r>
-              <a:rPr sz="1500" b="1" i="0">
+              <a:rPr sz="1500" b="1" i="0" lang="ja-JP">
                 <a:solidFill>
                   <a:srgbClr val="16385C"/>
                 </a:solidFill>
@@ -25855,7 +25855,7 @@
               <a:t>パラメータ感度</a:t>
             </a:r>
             <a:r>
-              <a:rPr sz="1500" b="0" i="0">
+              <a:rPr sz="1500" b="0" i="0" lang="ja-JP">
                 <a:solidFill>
                   <a:srgbClr val="26303A"/>
                 </a:solidFill>
@@ -25908,7 +25908,7 @@
           <a:lstStyle/>
           <a:p>
             <a:r>
-              <a:rPr sz="2450" b="1" i="0">
+              <a:rPr sz="2450" b="1" i="0" lang="ja-JP">
                 <a:solidFill>
                   <a:srgbClr val="16385C"/>
                 </a:solidFill>
@@ -26028,7 +26028,7 @@
               </a:lnSpc>
             </a:pPr>
             <a:r>
-              <a:rPr sz="1500" b="1" i="0">
+              <a:rPr sz="1500" b="1" i="0" lang="ja-JP">
                 <a:solidFill>
                   <a:srgbClr val="16385C"/>
                 </a:solidFill>
@@ -26063,7 +26063,7 @@
           <a:lstStyle/>
           <a:p>
             <a:r>
-              <a:rPr sz="900" b="0" i="0">
+              <a:rPr sz="900" b="0" i="0" lang="ja-JP">
                 <a:solidFill>
                   <a:srgbClr val="6E7A88"/>
                 </a:solidFill>
@@ -26099,7 +26099,7 @@
           <a:p>
             <a:pPr algn="r"/>
             <a:r>
-              <a:rPr sz="1000" b="0" i="0">
+              <a:rPr sz="1000" b="0" i="0" lang="ja-JP">
                 <a:solidFill>
                   <a:srgbClr val="6E7A88"/>
                 </a:solidFill>
@@ -26134,7 +26134,7 @@
           <a:lstStyle/>
           <a:p>
             <a:r>
-              <a:rPr sz="1250" b="1" i="0">
+              <a:rPr sz="1250" b="1" i="0" lang="ja-JP">
                 <a:solidFill>
                   <a:srgbClr val="26303A"/>
                 </a:solidFill>
@@ -26144,7 +26144,7 @@
               <a:t>例：</a:t>
             </a:r>
             <a:r>
-              <a:rPr sz="1250" b="1" i="0">
+              <a:rPr sz="1250" b="1" i="0" lang="ja-JP">
                 <a:solidFill>
                   <a:srgbClr val="B03A2E"/>
                 </a:solidFill>
@@ -26154,7 +26154,7 @@
               <a:t>M2 の J1 が 3 遅延（赤）</a:t>
             </a:r>
             <a:r>
-              <a:rPr sz="1250" b="0" i="0">
+              <a:rPr sz="1250" b="0" i="0" lang="ja-JP">
                 <a:solidFill>
                   <a:srgbClr val="26303A"/>
                 </a:solidFill>
@@ -26164,7 +26164,7 @@
               <a:t> → 時刻 </a:t>
             </a:r>
             <a:r>
-              <a:rPr sz="1250" b="0" i="1">
+              <a:rPr sz="1250" b="0" i="1" lang="ja-JP">
                 <a:solidFill>
                   <a:srgbClr val="26303A"/>
                 </a:solidFill>
@@ -26174,7 +26174,7 @@
               <a:t>t</a:t>
             </a:r>
             <a:r>
-              <a:rPr sz="900" b="0" i="1" baseline="-22000">
+              <a:rPr sz="900" b="0" i="1" lang="ja-JP" baseline="-22000">
                 <a:solidFill>
                   <a:srgbClr val="26303A"/>
                 </a:solidFill>
@@ -26184,7 +26184,7 @@
               <a:t>r</a:t>
             </a:r>
             <a:r>
-              <a:rPr sz="1250" b="0" i="0">
+              <a:rPr sz="1250" b="0" i="0" lang="ja-JP">
                 <a:solidFill>
                   <a:srgbClr val="26303A"/>
                 </a:solidFill>
@@ -26272,7 +26272,7 @@
               </a:lnSpc>
             </a:pPr>
             <a:r>
-              <a:rPr sz="1350" b="1" i="1">
+              <a:rPr sz="1350" b="1" i="1" lang="ja-JP">
                 <a:solidFill>
                   <a:srgbClr val="26303A"/>
                 </a:solidFill>
@@ -26282,7 +26282,7 @@
               <a:t>S</a:t>
             </a:r>
             <a:r>
-              <a:rPr sz="971" b="1" i="1" baseline="-22000">
+              <a:rPr sz="971" b="1" i="1" lang="ja-JP" baseline="-22000">
                 <a:solidFill>
                   <a:srgbClr val="26303A"/>
                 </a:solidFill>
@@ -26292,7 +26292,7 @@
               <a:t>p</a:t>
             </a:r>
             <a:r>
-              <a:rPr sz="1350" b="1" i="0">
+              <a:rPr sz="1350" b="1" i="0" lang="ja-JP">
                 <a:solidFill>
                   <a:srgbClr val="26303A"/>
                 </a:solidFill>
@@ -26352,7 +26352,7 @@
               </a:lnSpc>
             </a:pPr>
             <a:r>
-              <a:rPr sz="1100" b="0" i="0">
+              <a:rPr sz="1100" b="0" i="0" lang="ja-JP">
                 <a:solidFill>
                   <a:srgbClr val="26303A"/>
                 </a:solidFill>
@@ -26412,7 +26412,7 @@
               </a:lnSpc>
             </a:pPr>
             <a:r>
-              <a:rPr sz="1100" b="1" i="0">
+              <a:rPr sz="1100" b="1" i="0" lang="ja-JP">
                 <a:solidFill>
                   <a:srgbClr val="FFFFFF"/>
                 </a:solidFill>
@@ -26452,7 +26452,7 @@
               </a:lnSpc>
             </a:pPr>
             <a:r>
-              <a:rPr sz="1050" b="0" i="0">
+              <a:rPr sz="1050" b="0" i="0" lang="ja-JP">
                 <a:solidFill>
                   <a:srgbClr val="6E7A88"/>
                 </a:solidFill>
@@ -26512,7 +26512,7 @@
               </a:lnSpc>
             </a:pPr>
             <a:r>
-              <a:rPr sz="1050" b="1" i="0">
+              <a:rPr sz="1050" b="1" i="0" lang="ja-JP">
                 <a:solidFill>
                   <a:srgbClr val="FFFFFF"/>
                 </a:solidFill>
@@ -26572,7 +26572,7 @@
               </a:lnSpc>
             </a:pPr>
             <a:r>
-              <a:rPr sz="1050" b="1" i="0">
+              <a:rPr sz="1050" b="1" i="0" lang="ja-JP">
                 <a:solidFill>
                   <a:srgbClr val="FFFFFF"/>
                 </a:solidFill>
@@ -26632,7 +26632,7 @@
               </a:lnSpc>
             </a:pPr>
             <a:r>
-              <a:rPr sz="1050" b="1" i="0">
+              <a:rPr sz="1050" b="1" i="0" lang="ja-JP">
                 <a:solidFill>
                   <a:srgbClr val="FFFFFF"/>
                 </a:solidFill>
@@ -26672,7 +26672,7 @@
               </a:lnSpc>
             </a:pPr>
             <a:r>
-              <a:rPr sz="1050" b="0" i="0">
+              <a:rPr sz="1050" b="0" i="0" lang="ja-JP">
                 <a:solidFill>
                   <a:srgbClr val="6E7A88"/>
                 </a:solidFill>
@@ -26732,7 +26732,7 @@
               </a:lnSpc>
             </a:pPr>
             <a:r>
-              <a:rPr sz="1050" b="1" i="0">
+              <a:rPr sz="1050" b="1" i="0" lang="ja-JP">
                 <a:solidFill>
                   <a:srgbClr val="FFFFFF"/>
                 </a:solidFill>
@@ -26792,7 +26792,7 @@
               </a:lnSpc>
             </a:pPr>
             <a:r>
-              <a:rPr sz="1050" b="1" i="0">
+              <a:rPr sz="1050" b="1" i="0" lang="ja-JP">
                 <a:solidFill>
                   <a:srgbClr val="FFFFFF"/>
                 </a:solidFill>
@@ -26900,7 +26900,7 @@
               </a:lnSpc>
             </a:pPr>
             <a:r>
-              <a:rPr sz="1050" b="1" i="0">
+              <a:rPr sz="1050" b="1" i="0" lang="ja-JP">
                 <a:solidFill>
                   <a:srgbClr val="FFFFFF"/>
                 </a:solidFill>
@@ -26940,7 +26940,7 @@
               </a:lnSpc>
             </a:pPr>
             <a:r>
-              <a:rPr sz="1050" b="0" i="0">
+              <a:rPr sz="1050" b="0" i="0" lang="ja-JP">
                 <a:solidFill>
                   <a:srgbClr val="6E7A88"/>
                 </a:solidFill>
@@ -27000,7 +27000,7 @@
               </a:lnSpc>
             </a:pPr>
             <a:r>
-              <a:rPr sz="1050" b="1" i="0">
+              <a:rPr sz="1050" b="1" i="0" lang="ja-JP">
                 <a:solidFill>
                   <a:srgbClr val="FFFFFF"/>
                 </a:solidFill>
@@ -27060,7 +27060,7 @@
               </a:lnSpc>
             </a:pPr>
             <a:r>
-              <a:rPr sz="1050" b="1" i="0">
+              <a:rPr sz="1050" b="1" i="0" lang="ja-JP">
                 <a:solidFill>
                   <a:srgbClr val="FFFFFF"/>
                 </a:solidFill>
@@ -27120,7 +27120,7 @@
               </a:lnSpc>
             </a:pPr>
             <a:r>
-              <a:rPr sz="1050" b="1" i="0">
+              <a:rPr sz="1050" b="1" i="0" lang="ja-JP">
                 <a:solidFill>
                   <a:srgbClr val="FFFFFF"/>
                 </a:solidFill>
@@ -27316,7 +27316,7 @@
               </a:lnSpc>
             </a:pPr>
             <a:r>
-              <a:rPr sz="1000" b="0" i="0">
+              <a:rPr sz="1000" b="0" i="0" lang="ja-JP">
                 <a:solidFill>
                   <a:srgbClr val="6E7A88"/>
                 </a:solidFill>
@@ -27356,7 +27356,7 @@
               </a:lnSpc>
             </a:pPr>
             <a:r>
-              <a:rPr sz="1150" b="1" i="1">
+              <a:rPr sz="1150" b="1" i="1" lang="ja-JP">
                 <a:solidFill>
                   <a:srgbClr val="26303A"/>
                 </a:solidFill>
@@ -27366,7 +27366,7 @@
               <a:t>t</a:t>
             </a:r>
             <a:r>
-              <a:rPr sz="827" b="1" i="1" baseline="-22000">
+              <a:rPr sz="827" b="1" i="1" lang="ja-JP" baseline="-22000">
                 <a:solidFill>
                   <a:srgbClr val="26303A"/>
                 </a:solidFill>
@@ -27406,7 +27406,7 @@
               </a:lnSpc>
             </a:pPr>
             <a:r>
-              <a:rPr sz="950" b="0" i="0">
+              <a:rPr sz="950" b="0" i="0" lang="ja-JP">
                 <a:solidFill>
                   <a:srgbClr val="6E7A88"/>
                 </a:solidFill>
@@ -27446,7 +27446,7 @@
               </a:lnSpc>
             </a:pPr>
             <a:r>
-              <a:rPr sz="950" b="0" i="0">
+              <a:rPr sz="950" b="0" i="0" lang="ja-JP">
                 <a:solidFill>
                   <a:srgbClr val="6E7A88"/>
                 </a:solidFill>
@@ -27534,7 +27534,7 @@
               </a:lnSpc>
             </a:pPr>
             <a:r>
-              <a:rPr sz="1350" b="1" i="0">
+              <a:rPr sz="1350" b="1" i="0" lang="ja-JP">
                 <a:solidFill>
                   <a:srgbClr val="26303A"/>
                 </a:solidFill>
@@ -27594,7 +27594,7 @@
               </a:lnSpc>
             </a:pPr>
             <a:r>
-              <a:rPr sz="1100" b="1" i="0">
+              <a:rPr sz="1100" b="1" i="0" lang="ja-JP">
                 <a:solidFill>
                   <a:srgbClr val="FFFFFF"/>
                 </a:solidFill>
@@ -27654,7 +27654,7 @@
               </a:lnSpc>
             </a:pPr>
             <a:r>
-              <a:rPr sz="1100" b="1" i="0">
+              <a:rPr sz="1100" b="1" i="0" lang="ja-JP">
                 <a:solidFill>
                   <a:srgbClr val="FFFFFF"/>
                 </a:solidFill>
@@ -27694,7 +27694,7 @@
               </a:lnSpc>
             </a:pPr>
             <a:r>
-              <a:rPr sz="1050" b="0" i="0">
+              <a:rPr sz="1050" b="0" i="0" lang="ja-JP">
                 <a:solidFill>
                   <a:srgbClr val="6E7A88"/>
                 </a:solidFill>
@@ -27754,7 +27754,7 @@
               </a:lnSpc>
             </a:pPr>
             <a:r>
-              <a:rPr sz="1050" b="1" i="0">
+              <a:rPr sz="1050" b="1" i="0" lang="ja-JP">
                 <a:solidFill>
                   <a:srgbClr val="FFFFFF"/>
                 </a:solidFill>
@@ -27814,7 +27814,7 @@
               </a:lnSpc>
             </a:pPr>
             <a:r>
-              <a:rPr sz="1050" b="1" i="0">
+              <a:rPr sz="1050" b="1" i="0" lang="ja-JP">
                 <a:solidFill>
                   <a:srgbClr val="FFFFFF"/>
                 </a:solidFill>
@@ -27874,7 +27874,7 @@
               </a:lnSpc>
             </a:pPr>
             <a:r>
-              <a:rPr sz="1050" b="1" i="0">
+              <a:rPr sz="1050" b="1" i="0" lang="ja-JP">
                 <a:solidFill>
                   <a:srgbClr val="FFFFFF"/>
                 </a:solidFill>
@@ -27914,7 +27914,7 @@
               </a:lnSpc>
             </a:pPr>
             <a:r>
-              <a:rPr sz="1050" b="0" i="0">
+              <a:rPr sz="1050" b="0" i="0" lang="ja-JP">
                 <a:solidFill>
                   <a:srgbClr val="6E7A88"/>
                 </a:solidFill>
@@ -27974,7 +27974,7 @@
               </a:lnSpc>
             </a:pPr>
             <a:r>
-              <a:rPr sz="1050" b="1" i="0">
+              <a:rPr sz="1050" b="1" i="0" lang="ja-JP">
                 <a:solidFill>
                   <a:srgbClr val="FFFFFF"/>
                 </a:solidFill>
@@ -28034,7 +28034,7 @@
               </a:lnSpc>
             </a:pPr>
             <a:r>
-              <a:rPr sz="1050" b="1" i="0">
+              <a:rPr sz="1050" b="1" i="0" lang="ja-JP">
                 <a:solidFill>
                   <a:srgbClr val="FFFFFF"/>
                 </a:solidFill>
@@ -28142,7 +28142,7 @@
               </a:lnSpc>
             </a:pPr>
             <a:r>
-              <a:rPr sz="1050" b="1" i="0">
+              <a:rPr sz="1050" b="1" i="0" lang="ja-JP">
                 <a:solidFill>
                   <a:srgbClr val="FFFFFF"/>
                 </a:solidFill>
@@ -28182,7 +28182,7 @@
               </a:lnSpc>
             </a:pPr>
             <a:r>
-              <a:rPr sz="1050" b="0" i="0">
+              <a:rPr sz="1050" b="0" i="0" lang="ja-JP">
                 <a:solidFill>
                   <a:srgbClr val="6E7A88"/>
                 </a:solidFill>
@@ -28242,7 +28242,7 @@
               </a:lnSpc>
             </a:pPr>
             <a:r>
-              <a:rPr sz="1050" b="1" i="0">
+              <a:rPr sz="1050" b="1" i="0" lang="ja-JP">
                 <a:solidFill>
                   <a:srgbClr val="FFFFFF"/>
                 </a:solidFill>
@@ -28304,7 +28304,7 @@
               </a:lnSpc>
             </a:pPr>
             <a:r>
-              <a:rPr sz="1050" b="1" i="0">
+              <a:rPr sz="1050" b="1" i="0" lang="ja-JP">
                 <a:solidFill>
                   <a:srgbClr val="FFFFFF"/>
                 </a:solidFill>
@@ -28366,7 +28366,7 @@
               </a:lnSpc>
             </a:pPr>
             <a:r>
-              <a:rPr sz="1050" b="1" i="0">
+              <a:rPr sz="1050" b="1" i="0" lang="ja-JP">
                 <a:solidFill>
                   <a:srgbClr val="FFFFFF"/>
                 </a:solidFill>
@@ -28562,7 +28562,7 @@
               </a:lnSpc>
             </a:pPr>
             <a:r>
-              <a:rPr sz="1000" b="0" i="0">
+              <a:rPr sz="1000" b="0" i="0" lang="ja-JP">
                 <a:solidFill>
                   <a:srgbClr val="6E7A88"/>
                 </a:solidFill>
@@ -28602,7 +28602,7 @@
               </a:lnSpc>
             </a:pPr>
             <a:r>
-              <a:rPr sz="1150" b="1" i="1">
+              <a:rPr sz="1150" b="1" i="1" lang="ja-JP">
                 <a:solidFill>
                   <a:srgbClr val="26303A"/>
                 </a:solidFill>
@@ -28612,7 +28612,7 @@
               <a:t>t</a:t>
             </a:r>
             <a:r>
-              <a:rPr sz="827" b="1" i="1" baseline="-22000">
+              <a:rPr sz="827" b="1" i="1" lang="ja-JP" baseline="-22000">
                 <a:solidFill>
                   <a:srgbClr val="26303A"/>
                 </a:solidFill>
@@ -28737,7 +28737,7 @@
               </a:lnSpc>
             </a:pPr>
             <a:r>
-              <a:rPr sz="1550" b="1" i="0">
+              <a:rPr sz="1550" b="1" i="0" lang="ja-JP">
                 <a:solidFill>
                   <a:srgbClr val="B03A2E"/>
                 </a:solidFill>
@@ -28754,7 +28754,7 @@
               </a:lnSpc>
             </a:pPr>
             <a:r>
-              <a:rPr sz="1300" b="1" i="0">
+              <a:rPr sz="1300" b="1" i="0" lang="ja-JP">
                 <a:solidFill>
                   <a:srgbClr val="B03A2E"/>
                 </a:solidFill>
@@ -28816,7 +28816,7 @@
               </a:lnSpc>
             </a:pPr>
             <a:r>
-              <a:rPr sz="1250" b="1" i="0">
+              <a:rPr sz="1250" b="1" i="0" lang="ja-JP">
                 <a:solidFill>
                   <a:srgbClr val="26303A"/>
                 </a:solidFill>
@@ -28878,7 +28878,7 @@
               </a:lnSpc>
             </a:pPr>
             <a:r>
-              <a:rPr sz="1250" b="1" i="0">
+              <a:rPr sz="1250" b="1" i="0" lang="ja-JP">
                 <a:solidFill>
                   <a:srgbClr val="26303A"/>
                 </a:solidFill>
@@ -28940,7 +28940,7 @@
               </a:lnSpc>
             </a:pPr>
             <a:r>
-              <a:rPr sz="1250" b="1" i="0">
+              <a:rPr sz="1250" b="1" i="0" lang="ja-JP">
                 <a:solidFill>
                   <a:srgbClr val="26303A"/>
                 </a:solidFill>
@@ -29002,7 +29002,7 @@
               </a:lnSpc>
             </a:pPr>
             <a:r>
-              <a:rPr sz="1250" b="1" i="0">
+              <a:rPr sz="1250" b="1" i="0" lang="ja-JP">
                 <a:solidFill>
                   <a:srgbClr val="26303A"/>
                 </a:solidFill>
@@ -29128,7 +29128,7 @@
               </a:lnSpc>
             </a:pPr>
             <a:r>
-              <a:rPr sz="1600" b="1" i="0">
+              <a:rPr sz="1600" b="1" i="0" lang="ja-JP">
                 <a:solidFill>
                   <a:srgbClr val="16385C"/>
                 </a:solidFill>
@@ -29236,7 +29236,7 @@
               </a:lnSpc>
             </a:pPr>
             <a:r>
-              <a:rPr sz="1350" b="1" i="0">
+              <a:rPr sz="1350" b="1" i="0" lang="ja-JP">
                 <a:solidFill>
                   <a:srgbClr val="FFFFFF"/>
                 </a:solidFill>
@@ -29276,7 +29276,7 @@
               </a:lnSpc>
             </a:pPr>
             <a:r>
-              <a:rPr sz="1250" b="0" i="0">
+              <a:rPr sz="1250" b="0" i="0" lang="ja-JP">
                 <a:solidFill>
                   <a:srgbClr val="26303A"/>
                 </a:solidFill>
@@ -29316,7 +29316,7 @@
               </a:lnSpc>
             </a:pPr>
             <a:r>
-              <a:rPr sz="2000" b="1" i="0">
+              <a:rPr sz="2000" b="1" i="0" lang="ja-JP">
                 <a:solidFill>
                   <a:srgbClr val="16385C"/>
                 </a:solidFill>
@@ -29424,7 +29424,7 @@
               </a:lnSpc>
             </a:pPr>
             <a:r>
-              <a:rPr sz="1350" b="1" i="0">
+              <a:rPr sz="1350" b="1" i="0" lang="ja-JP">
                 <a:solidFill>
                   <a:srgbClr val="FFFFFF"/>
                 </a:solidFill>
@@ -29464,7 +29464,7 @@
               </a:lnSpc>
             </a:pPr>
             <a:r>
-              <a:rPr sz="1250" b="0" i="0">
+              <a:rPr sz="1250" b="0" i="0" lang="ja-JP">
                 <a:solidFill>
                   <a:srgbClr val="26303A"/>
                 </a:solidFill>
@@ -29481,7 +29481,7 @@
               </a:lnSpc>
             </a:pPr>
             <a:r>
-              <a:rPr sz="1250" b="0" i="0">
+              <a:rPr sz="1250" b="0" i="0" lang="ja-JP">
                 <a:solidFill>
                   <a:srgbClr val="26303A"/>
                 </a:solidFill>
@@ -29534,14 +29534,14 @@
           <a:lstStyle/>
           <a:p>
             <a:r>
-              <a:rPr sz="2450" b="1" i="0">
+              <a:rPr sz="2450" b="1" i="0" lang="ja-JP">
                 <a:solidFill>
                   <a:srgbClr val="16385C"/>
                 </a:solidFill>
                 <a:latin typeface="Meiryo"/>
                 <a:ea typeface="Meiryo"/>
               </a:rPr>
-              <a:t>求められる解：高安定領域</a:t>
+              <a:t>本研究の着目点：高安定領域</a:t>
             </a:r>
           </a:p>
         </p:txBody>
@@ -29654,17 +29654,17 @@
               </a:lnSpc>
             </a:pPr>
             <a:r>
-              <a:rPr sz="1500" b="1" i="0">
+              <a:rPr sz="1500" b="1" i="0" lang="ja-JP">
                 <a:solidFill>
                   <a:srgbClr val="16385C"/>
                 </a:solidFill>
                 <a:latin typeface="Meiryo"/>
                 <a:ea typeface="Meiryo"/>
               </a:rPr>
-              <a:t>変更コストが無視できない場面では </a:t>
-            </a:r>
-            <a:r>
-              <a:rPr sz="1500" b="1" i="1">
+              <a:t>スケジュール変更コストが無視できない場面では </a:t>
+            </a:r>
+            <a:r>
+              <a:rPr sz="1500" b="1" i="1" lang="ja-JP">
                 <a:solidFill>
                   <a:srgbClr val="16385C"/>
                 </a:solidFill>
@@ -29674,7 +29674,7 @@
               <a:t>S</a:t>
             </a:r>
             <a:r>
-              <a:rPr sz="1080" b="1" i="1" baseline="-22000">
+              <a:rPr sz="1080" b="1" i="1" lang="ja-JP" baseline="-22000">
                 <a:solidFill>
                   <a:srgbClr val="16385C"/>
                 </a:solidFill>
@@ -29684,14 +29684,14 @@
               <a:t>p</a:t>
             </a:r>
             <a:r>
-              <a:rPr sz="1500" b="1" i="0">
+              <a:rPr sz="1500" b="1" i="0" lang="ja-JP">
                 <a:solidFill>
                   <a:srgbClr val="16385C"/>
                 </a:solidFill>
                 <a:latin typeface="Meiryo"/>
                 <a:ea typeface="Meiryo"/>
               </a:rPr>
-              <a:t> の近傍の解が選ばれる．本研究は，この領域の品質を高安定 HV で測る</a:t>
+              <a:t> の近傍の解が求められるため，本研究は高安定領域の品質に着目する</a:t>
             </a:r>
           </a:p>
         </p:txBody>
@@ -29719,7 +29719,7 @@
           <a:lstStyle/>
           <a:p>
             <a:r>
-              <a:rPr sz="900" b="0" i="0">
+              <a:rPr sz="900" b="0" i="0" lang="ja-JP">
                 <a:solidFill>
                   <a:srgbClr val="6E7A88"/>
                 </a:solidFill>
@@ -29755,7 +29755,7 @@
           <a:p>
             <a:pPr algn="r"/>
             <a:r>
-              <a:rPr sz="1000" b="0" i="0">
+              <a:rPr sz="1000" b="0" i="0" lang="ja-JP">
                 <a:solidFill>
                   <a:srgbClr val="6E7A88"/>
                 </a:solidFill>
@@ -29822,17 +29822,17 @@
               </a:spcBef>
             </a:pPr>
             <a:r>
-              <a:rPr sz="1500" b="0" i="0">
+              <a:rPr sz="1500" b="0" i="0" lang="ja-JP">
                 <a:solidFill>
                   <a:srgbClr val="26303A"/>
                 </a:solidFill>
                 <a:latin typeface="Meiryo"/>
                 <a:ea typeface="Meiryo"/>
               </a:rPr>
-              <a:t>● 二目的の </a:t>
-            </a:r>
-            <a:r>
-              <a:rPr sz="1500" b="1" i="0">
+              <a:t>● スケジュール変更コストが無視できない場面で求められるのは，</a:t>
+            </a:r>
+            <a:r>
+              <a:rPr sz="1500" b="1" i="0" lang="ja-JP">
                 <a:solidFill>
                   <a:srgbClr val="16385C"/>
                 </a:solidFill>
@@ -29842,27 +29842,47 @@
               <a:t>Pareto フロント</a:t>
             </a:r>
             <a:r>
-              <a:rPr sz="1500" b="0" i="0">
+              <a:rPr sz="1500" b="0" i="0" lang="ja-JP">
                 <a:solidFill>
                   <a:srgbClr val="26303A"/>
                 </a:solidFill>
                 <a:latin typeface="Meiryo"/>
                 <a:ea typeface="Meiryo"/>
               </a:rPr>
-              <a:t>上の解はどれも非劣だが，変更コストが無視できない場面で選ばれるのは，</a:t>
-            </a:r>
-            <a:r>
-              <a:rPr sz="1500" b="0" i="1">
+              <a:t>上の</a:t>
+            </a:r>
+            <a:r>
+              <a:rPr sz="1500" b="1" i="0" lang="ja-JP">
+                <a:solidFill>
+                  <a:srgbClr val="16385C"/>
+                </a:solidFill>
+                <a:latin typeface="Meiryo"/>
+                <a:ea typeface="Meiryo"/>
+              </a:rPr>
+              <a:t>高安定領域</a:t>
+            </a:r>
+            <a:r>
+              <a:rPr sz="1500" b="0" i="0" lang="ja-JP">
                 <a:solidFill>
                   <a:srgbClr val="26303A"/>
                 </a:solidFill>
                 <a:latin typeface="Meiryo"/>
                 <a:ea typeface="Meiryo"/>
               </a:rPr>
+              <a:t>（</a:t>
+            </a:r>
+            <a:r>
+              <a:rPr sz="1500" b="0" i="1" lang="ja-JP">
+                <a:solidFill>
+                  <a:srgbClr val="26303A"/>
+                </a:solidFill>
+                <a:latin typeface="Meiryo"/>
+                <a:ea typeface="Meiryo"/>
+              </a:rPr>
               <a:t>S</a:t>
             </a:r>
             <a:r>
-              <a:rPr sz="1080" b="0" i="1" baseline="-22000">
+              <a:rPr sz="1080" b="0" i="1" lang="ja-JP" baseline="-22000">
                 <a:solidFill>
                   <a:srgbClr val="26303A"/>
                 </a:solidFill>
@@ -29872,34 +29892,14 @@
               <a:t>p</a:t>
             </a:r>
             <a:r>
-              <a:rPr sz="1500" b="0" i="0">
+              <a:rPr sz="1500" b="0" i="0" lang="ja-JP">
                 <a:solidFill>
                   <a:srgbClr val="26303A"/>
                 </a:solidFill>
                 <a:latin typeface="Meiryo"/>
                 <a:ea typeface="Meiryo"/>
               </a:rPr>
-              <a:t> の近傍（</a:t>
-            </a:r>
-            <a:r>
-              <a:rPr sz="1500" b="1" i="0">
-                <a:solidFill>
-                  <a:srgbClr val="16385C"/>
-                </a:solidFill>
-                <a:latin typeface="Meiryo"/>
-                <a:ea typeface="Meiryo"/>
-              </a:rPr>
-              <a:t>高安定領域</a:t>
-            </a:r>
-            <a:r>
-              <a:rPr sz="1500" b="0" i="0">
-                <a:solidFill>
-                  <a:srgbClr val="26303A"/>
-                </a:solidFill>
-                <a:latin typeface="Meiryo"/>
-                <a:ea typeface="Meiryo"/>
-              </a:rPr>
-              <a:t>）の解</a:t>
+              <a:t> の近傍）の解</a:t>
             </a:r>
           </a:p>
           <a:p>
@@ -29912,17 +29912,17 @@
               </a:spcBef>
             </a:pPr>
             <a:r>
-              <a:rPr sz="1550" b="0" i="0">
+              <a:rPr sz="1550" b="0" i="0" lang="ja-JP">
                 <a:solidFill>
                   <a:srgbClr val="26303A"/>
                 </a:solidFill>
                 <a:latin typeface="Meiryo"/>
                 <a:ea typeface="Meiryo"/>
               </a:rPr>
-              <a:t>→ この場合，手法に問われるのは，Pareto フロント全体の品質だけではなく，</a:t>
-            </a:r>
-            <a:r>
-              <a:rPr sz="1550" b="1" i="0">
+              <a:t>→ 本研究では，この</a:t>
+            </a:r>
+            <a:r>
+              <a:rPr sz="1550" b="1" i="0" lang="ja-JP">
                 <a:solidFill>
                   <a:srgbClr val="16385C"/>
                 </a:solidFill>
@@ -29930,6 +29930,16 @@
                 <a:ea typeface="Meiryo"/>
               </a:rPr>
               <a:t>高安定領域の品質</a:t>
+            </a:r>
+            <a:r>
+              <a:rPr sz="1550" b="0" i="0" lang="ja-JP">
+                <a:solidFill>
+                  <a:srgbClr val="26303A"/>
+                </a:solidFill>
+                <a:latin typeface="Meiryo"/>
+                <a:ea typeface="Meiryo"/>
+              </a:rPr>
+              <a:t>に着目する</a:t>
             </a:r>
           </a:p>
           <a:p>
@@ -29942,17 +29952,17 @@
               </a:spcBef>
             </a:pPr>
             <a:r>
-              <a:rPr sz="1350" b="0" i="0">
+              <a:rPr sz="1350" b="0" i="0" lang="ja-JP">
                 <a:solidFill>
                   <a:srgbClr val="26303A"/>
                 </a:solidFill>
                 <a:latin typeface="Meiryo"/>
                 <a:ea typeface="Meiryo"/>
               </a:rPr>
-              <a:t>本研究では，Pareto フロントの品質を hypervolume（HV）で測り，高安定領域に限った HV を</a:t>
-            </a:r>
-            <a:r>
-              <a:rPr sz="1350" b="1" i="0">
+              <a:t>Pareto フロントの品質は hypervolume（HV）で測り，高安定領域に限った HV を</a:t>
+            </a:r>
+            <a:r>
+              <a:rPr sz="1350" b="1" i="0" lang="ja-JP">
                 <a:solidFill>
                   <a:srgbClr val="16385C"/>
                 </a:solidFill>
@@ -29962,7 +29972,7 @@
               <a:t>高安定 HV</a:t>
             </a:r>
             <a:r>
-              <a:rPr sz="1350" b="0" i="0">
+              <a:rPr sz="1350" b="0" i="0" lang="ja-JP">
                 <a:solidFill>
                   <a:srgbClr val="26303A"/>
                 </a:solidFill>
@@ -30015,14 +30025,14 @@
           <a:lstStyle/>
           <a:p>
             <a:r>
-              <a:rPr sz="2450" b="1" i="0">
+              <a:rPr sz="2450" b="1" i="0" lang="ja-JP">
                 <a:solidFill>
                   <a:srgbClr val="16385C"/>
                 </a:solidFill>
                 <a:latin typeface="Meiryo"/>
                 <a:ea typeface="Meiryo"/>
               </a:rPr>
-              <a:t>再スケジューリングの特殊性</a:t>
+              <a:t>本研究の出発点：再スケジューリングの特殊性</a:t>
             </a:r>
           </a:p>
         </p:txBody>
@@ -30135,44 +30145,34 @@
               </a:lnSpc>
             </a:pPr>
             <a:r>
-              <a:rPr sz="1500" b="1" i="0">
+              <a:rPr sz="1500" b="1" i="1" lang="ja-JP">
                 <a:solidFill>
                   <a:srgbClr val="16385C"/>
                 </a:solidFill>
                 <a:latin typeface="Meiryo"/>
                 <a:ea typeface="Meiryo"/>
               </a:rPr>
-              <a:t>静的なスケジューリングにない特殊性：安定性が最良の解 </a:t>
-            </a:r>
-            <a:r>
-              <a:rPr sz="1500" b="1" i="1">
+              <a:t>S</a:t>
+            </a:r>
+            <a:r>
+              <a:rPr sz="1080" b="1" i="1" lang="ja-JP" baseline="-22000">
                 <a:solidFill>
                   <a:srgbClr val="16385C"/>
                 </a:solidFill>
                 <a:latin typeface="Meiryo"/>
                 <a:ea typeface="Meiryo"/>
               </a:rPr>
-              <a:t>S</a:t>
-            </a:r>
-            <a:r>
-              <a:rPr sz="1080" b="1" i="1" baseline="-22000">
+              <a:t>p</a:t>
+            </a:r>
+            <a:r>
+              <a:rPr sz="1500" b="1" i="0" lang="ja-JP">
                 <a:solidFill>
                   <a:srgbClr val="16385C"/>
                 </a:solidFill>
                 <a:latin typeface="Meiryo"/>
                 <a:ea typeface="Meiryo"/>
               </a:rPr>
-              <a:t>p</a:t>
-            </a:r>
-            <a:r>
-              <a:rPr sz="1500" b="1" i="0">
-                <a:solidFill>
-                  <a:srgbClr val="16385C"/>
-                </a:solidFill>
-                <a:latin typeface="Meiryo"/>
-                <a:ea typeface="Meiryo"/>
-              </a:rPr>
-              <a:t> が，探索を始める前から得られている</a:t>
+              <a:t> が探索前に得られているこの問題では，この特性が探索構造の優劣を左右するのではないか</a:t>
             </a:r>
           </a:p>
         </p:txBody>
@@ -30200,7 +30200,7 @@
           <a:lstStyle/>
           <a:p>
             <a:r>
-              <a:rPr sz="900" b="0" i="0">
+              <a:rPr sz="900" b="0" i="0" lang="ja-JP">
                 <a:solidFill>
                   <a:srgbClr val="6E7A88"/>
                 </a:solidFill>
@@ -30236,7 +30236,7 @@
           <a:p>
             <a:pPr algn="r"/>
             <a:r>
-              <a:rPr sz="1000" b="0" i="0">
+              <a:rPr sz="1000" b="0" i="0" lang="ja-JP">
                 <a:solidFill>
                   <a:srgbClr val="6E7A88"/>
                 </a:solidFill>
@@ -30248,54 +30248,30 @@
           </a:p>
         </p:txBody>
       </p:sp>
-      <p:sp>
-        <p:nvSpPr>
-          <p:cNvPr id="8" name="Rounded Rectangle 7"/>
-          <p:cNvSpPr/>
-          <p:nvPr/>
-        </p:nvSpPr>
-        <p:spPr>
-          <a:xfrm>
-            <a:off x="566928" y="2377440"/>
-            <a:ext cx="11057839" cy="3291840"/>
-          </a:xfrm>
-          <a:prstGeom prst="roundRect">
-            <a:avLst>
-              <a:gd name="adj" fmla="val 8000"/>
-            </a:avLst>
-          </a:prstGeom>
-          <a:solidFill>
-            <a:srgbClr val="EDF2F7"/>
-          </a:solidFill>
-          <a:ln w="13970">
-            <a:solidFill>
-              <a:srgbClr val="C9D6E5"/>
-            </a:solidFill>
-          </a:ln>
-          <a:effectLst/>
-        </p:spPr>
-        <p:style>
-          <a:lnRef idx="1">
-            <a:schemeClr val="accent1"/>
-          </a:lnRef>
-          <a:fillRef idx="3">
-            <a:schemeClr val="accent1"/>
-          </a:fillRef>
-          <a:effectRef idx="2">
-            <a:schemeClr val="accent1"/>
-          </a:effectRef>
-          <a:fontRef idx="minor">
-            <a:schemeClr val="lt1"/>
-          </a:fontRef>
-        </p:style>
-        <p:txBody>
-          <a:bodyPr rtlCol="0" anchor="ctr"/>
-          <a:lstStyle/>
-          <a:p>
-            <a:pPr algn="ctr"/>
-          </a:p>
-        </p:txBody>
-      </p:sp>
+      <p:pic>
+        <p:nvPicPr>
+          <p:cNvPr id="8" name="Picture 7" descr="concept_sp.png"/>
+          <p:cNvPicPr>
+            <a:picLocks noChangeAspect="1"/>
+          </p:cNvPicPr>
+          <p:nvPr/>
+        </p:nvPicPr>
+        <p:blipFill>
+          <a:blip r:embed="rId2"/>
+          <a:stretch>
+            <a:fillRect/>
+          </a:stretch>
+        </p:blipFill>
+        <p:spPr>
+          <a:xfrm>
+            <a:off x="521207" y="1691640"/>
+            <a:ext cx="5577840" cy="4312367"/>
+          </a:xfrm>
+          <a:prstGeom prst="rect">
+            <a:avLst/>
+          </a:prstGeom>
+        </p:spPr>
+      </p:pic>
       <p:sp>
         <p:nvSpPr>
           <p:cNvPr id="9" name="TextBox 8"/>
@@ -30304,8 +30280,8 @@
         </p:nvSpPr>
         <p:spPr>
           <a:xfrm>
-            <a:off x="1115568" y="2377440"/>
-            <a:ext cx="9960559" cy="3291840"/>
+            <a:off x="6281928" y="1691640"/>
+            <a:ext cx="5342839" cy="4312367"/>
           </a:xfrm>
           <a:prstGeom prst="rect">
             <a:avLst/>
@@ -30320,34 +30296,45 @@
           <a:p>
             <a:pPr>
               <a:lnSpc>
-                <a:spcPct val="115000"/>
+                <a:spcPct val="108000"/>
               </a:lnSpc>
               <a:spcBef>
                 <a:spcPts val="0"/>
               </a:spcBef>
             </a:pPr>
             <a:r>
-              <a:rPr sz="1900" b="0" i="0">
+              <a:rPr sz="1500" b="0" i="0" lang="ja-JP">
                 <a:solidFill>
                   <a:srgbClr val="26303A"/>
                 </a:solidFill>
                 <a:latin typeface="Meiryo"/>
                 <a:ea typeface="Meiryo"/>
               </a:rPr>
-              <a:t>★ 初期解 </a:t>
-            </a:r>
-            <a:r>
-              <a:rPr sz="1900" b="0" i="1">
+              <a:t>★ 再スケジューリングの特殊性：</a:t>
+            </a:r>
+            <a:br/>
+            <a:r>
+              <a:rPr sz="1500" b="0" i="0" lang="ja-JP">
                 <a:solidFill>
                   <a:srgbClr val="26303A"/>
                 </a:solidFill>
                 <a:latin typeface="Meiryo"/>
                 <a:ea typeface="Meiryo"/>
               </a:rPr>
+              <a:t>初期解 </a:t>
+            </a:r>
+            <a:r>
+              <a:rPr sz="1500" b="0" i="1" lang="ja-JP">
+                <a:solidFill>
+                  <a:srgbClr val="26303A"/>
+                </a:solidFill>
+                <a:latin typeface="Meiryo"/>
+                <a:ea typeface="Meiryo"/>
+              </a:rPr>
               <a:t>S</a:t>
             </a:r>
             <a:r>
-              <a:rPr sz="1368" b="0" i="1" baseline="-22000">
+              <a:rPr sz="1080" b="0" i="1" lang="ja-JP" baseline="-22000">
                 <a:solidFill>
                   <a:srgbClr val="26303A"/>
                 </a:solidFill>
@@ -30357,7 +30344,7 @@
               <a:t>p</a:t>
             </a:r>
             <a:r>
-              <a:rPr sz="1900" b="0" i="0">
+              <a:rPr sz="1500" b="0" i="0" lang="ja-JP">
                 <a:solidFill>
                   <a:srgbClr val="26303A"/>
                 </a:solidFill>
@@ -30367,7 +30354,7 @@
               <a:t>（処理順序を保って遅延を吸収した解）は，</a:t>
             </a:r>
             <a:r>
-              <a:rPr sz="1900" b="1" i="0">
+              <a:rPr sz="1500" b="1" i="0" lang="ja-JP">
                 <a:solidFill>
                   <a:srgbClr val="16385C"/>
                 </a:solidFill>
@@ -30377,7 +30364,7 @@
               <a:t>探索せずに得られる</a:t>
             </a:r>
             <a:r>
-              <a:rPr sz="1900" b="0" i="0">
+              <a:rPr sz="1500" b="0" i="0" lang="ja-JP">
                 <a:solidFill>
                   <a:srgbClr val="26303A"/>
                 </a:solidFill>
@@ -30387,7 +30374,7 @@
               <a:t>．変更量 0 で安定性は最良，</a:t>
             </a:r>
             <a:r>
-              <a:rPr sz="1900" b="0" i="1">
+              <a:rPr sz="1500" b="0" i="1" lang="ja-JP">
                 <a:solidFill>
                   <a:srgbClr val="26303A"/>
                 </a:solidFill>
@@ -30397,7 +30384,7 @@
               <a:t>MS</a:t>
             </a:r>
             <a:r>
-              <a:rPr sz="1900" b="0" i="0">
+              <a:rPr sz="1500" b="0" i="0" lang="ja-JP">
                 <a:solidFill>
                   <a:srgbClr val="26303A"/>
                 </a:solidFill>
@@ -30410,31 +30397,133 @@
           <a:p>
             <a:pPr>
               <a:lnSpc>
-                <a:spcPct val="115000"/>
+                <a:spcPct val="108000"/>
               </a:lnSpc>
               <a:spcBef>
-                <a:spcPts val="2400"/>
+                <a:spcPts val="1200"/>
               </a:spcBef>
             </a:pPr>
             <a:r>
-              <a:rPr sz="1900" b="0" i="0">
+              <a:rPr sz="1550" b="0" i="0" lang="ja-JP">
                 <a:solidFill>
                   <a:srgbClr val="26303A"/>
                 </a:solidFill>
                 <a:latin typeface="Meiryo"/>
                 <a:ea typeface="Meiryo"/>
               </a:rPr>
-              <a:t>→ 再スケジューリングでは，</a:t>
-            </a:r>
-            <a:r>
-              <a:rPr sz="1900" b="1" i="0">
+              <a:t>→ この </a:t>
+            </a:r>
+            <a:r>
+              <a:rPr sz="1550" b="0" i="1" lang="ja-JP">
+                <a:solidFill>
+                  <a:srgbClr val="26303A"/>
+                </a:solidFill>
+                <a:latin typeface="Meiryo"/>
+                <a:ea typeface="Meiryo"/>
+              </a:rPr>
+              <a:t>S</a:t>
+            </a:r>
+            <a:r>
+              <a:rPr sz="1116" b="0" i="1" lang="ja-JP" baseline="-22000">
+                <a:solidFill>
+                  <a:srgbClr val="26303A"/>
+                </a:solidFill>
+                <a:latin typeface="Meiryo"/>
+                <a:ea typeface="Meiryo"/>
+              </a:rPr>
+              <a:t>p</a:t>
+            </a:r>
+            <a:r>
+              <a:rPr sz="1550" b="0" i="0" lang="ja-JP">
+                <a:solidFill>
+                  <a:srgbClr val="26303A"/>
+                </a:solidFill>
+                <a:latin typeface="Meiryo"/>
+                <a:ea typeface="Meiryo"/>
+              </a:rPr>
+              <a:t> の存在が，</a:t>
+            </a:r>
+            <a:r>
+              <a:rPr sz="1550" b="1" i="0" lang="ja-JP">
                 <a:solidFill>
                   <a:srgbClr val="16385C"/>
                 </a:solidFill>
                 <a:latin typeface="Meiryo"/>
                 <a:ea typeface="Meiryo"/>
               </a:rPr>
-              <a:t>この特殊性を活かすことで効果的な探索ができるはずである</a:t>
+              <a:t>探索構造の優劣に大きな影響を与えるのではないか</a:t>
+            </a:r>
+          </a:p>
+          <a:p>
+            <a:pPr>
+              <a:lnSpc>
+                <a:spcPct val="108000"/>
+              </a:lnSpc>
+              <a:spcBef>
+                <a:spcPts val="1800"/>
+              </a:spcBef>
+            </a:pPr>
+            <a:r>
+              <a:rPr sz="1350" b="1" i="0" lang="ja-JP">
+                <a:solidFill>
+                  <a:srgbClr val="E06C00"/>
+                </a:solidFill>
+                <a:latin typeface="Meiryo"/>
+                <a:ea typeface="Meiryo"/>
+              </a:rPr>
+              <a:t>単点探索</a:t>
+            </a:r>
+            <a:r>
+              <a:rPr sz="1350" b="0" i="0" lang="ja-JP">
+                <a:solidFill>
+                  <a:srgbClr val="26303A"/>
+                </a:solidFill>
+                <a:latin typeface="Meiryo"/>
+                <a:ea typeface="Meiryo"/>
+              </a:rPr>
+              <a:t>：1 つの解を少しずつ変更しながら進む</a:t>
+            </a:r>
+          </a:p>
+          <a:p>
+            <a:pPr>
+              <a:lnSpc>
+                <a:spcPct val="108000"/>
+              </a:lnSpc>
+              <a:spcBef>
+                <a:spcPts val="200"/>
+              </a:spcBef>
+            </a:pPr>
+            <a:r>
+              <a:rPr sz="1350" b="1" i="0" lang="ja-JP">
+                <a:solidFill>
+                  <a:srgbClr val="0F5C28"/>
+                </a:solidFill>
+                <a:latin typeface="Meiryo"/>
+                <a:ea typeface="Meiryo"/>
+              </a:rPr>
+              <a:t>多点探索</a:t>
+            </a:r>
+            <a:r>
+              <a:rPr sz="1350" b="0" i="0" lang="ja-JP">
+                <a:solidFill>
+                  <a:srgbClr val="26303A"/>
+                </a:solidFill>
+                <a:latin typeface="Meiryo"/>
+                <a:ea typeface="Meiryo"/>
+              </a:rPr>
+              <a:t>：複数の解を保持し，互いに組み替えながら進む</a:t>
+            </a:r>
+          </a:p>
+          <a:p>
+            <a:r>
+              <a:rPr sz="1100" b="0" i="0" lang="ja-JP">
+                <a:solidFill>
+                  <a:srgbClr val="6E7A88"/>
+                </a:solidFill>
+                <a:latin typeface="Meiryo"/>
+                <a:ea typeface="Meiryo"/>
+              </a:rPr>
+              <a:t>（Blum &amp; Roli, 2003）</a:t>
             </a:r>
           </a:p>
         </p:txBody>
@@ -30480,7 +30569,7 @@
           <a:lstStyle/>
           <a:p>
             <a:r>
-              <a:rPr sz="2450" b="1" i="0">
+              <a:rPr sz="2450" b="1" i="0" lang="ja-JP">
                 <a:solidFill>
                   <a:srgbClr val="16385C"/>
                 </a:solidFill>
@@ -30600,14 +30689,14 @@
               </a:lnSpc>
             </a:pPr>
             <a:r>
-              <a:rPr sz="1500" b="1" i="0">
+              <a:rPr sz="1500" b="1" i="0" lang="ja-JP">
                 <a:solidFill>
                   <a:srgbClr val="16385C"/>
                 </a:solidFill>
                 <a:latin typeface="Meiryo"/>
                 <a:ea typeface="Meiryo"/>
               </a:rPr>
-              <a:t>安定性は「目的関数に組み込む」か「再スケジュールの範囲を限定する」かで確保されてきた</a:t>
+              <a:t>安定性の確保は 2 つのアプローチに分かれるが，どちらもメタヒューリスティクスによる解法は多点探索に集中している</a:t>
             </a:r>
           </a:p>
         </p:txBody>
@@ -30635,7 +30724,7 @@
           <a:lstStyle/>
           <a:p>
             <a:r>
-              <a:rPr sz="900" b="0" i="0">
+              <a:rPr sz="900" b="0" i="0" lang="ja-JP">
                 <a:solidFill>
                   <a:srgbClr val="6E7A88"/>
                 </a:solidFill>
@@ -30671,7 +30760,7 @@
           <a:p>
             <a:pPr algn="r"/>
             <a:r>
-              <a:rPr sz="1000" b="0" i="0">
+              <a:rPr sz="1000" b="0" i="0" lang="ja-JP">
                 <a:solidFill>
                   <a:srgbClr val="6E7A88"/>
                 </a:solidFill>
@@ -30692,7 +30781,7 @@
         <p:spPr>
           <a:xfrm>
             <a:off x="566928" y="1645920"/>
-            <a:ext cx="5346039" cy="3703320"/>
+            <a:ext cx="5346039" cy="3977639"/>
           </a:xfrm>
           <a:prstGeom prst="roundRect">
             <a:avLst>
@@ -30803,7 +30892,7 @@
               </a:lnSpc>
             </a:pPr>
             <a:r>
-              <a:rPr sz="1550" b="1" i="0">
+              <a:rPr sz="1550" b="1" i="0" lang="ja-JP">
                 <a:solidFill>
                   <a:srgbClr val="FFFFFF"/>
                 </a:solidFill>
@@ -30846,7 +30935,7 @@
               </a:spcBef>
             </a:pPr>
             <a:r>
-              <a:rPr sz="1350" b="1" i="0">
+              <a:rPr sz="1350" b="1" i="0" lang="ja-JP">
                 <a:solidFill>
                   <a:srgbClr val="16385C"/>
                 </a:solidFill>
@@ -30863,7 +30952,7 @@
               </a:lnSpc>
             </a:pPr>
             <a:r>
-              <a:rPr sz="1250" b="0" i="0">
+              <a:rPr sz="1250" b="0" i="0" lang="ja-JP">
                 <a:solidFill>
                   <a:srgbClr val="26303A"/>
                 </a:solidFill>
@@ -30883,7 +30972,7 @@
               </a:spcBef>
             </a:pPr>
             <a:r>
-              <a:rPr sz="1350" b="1" i="0">
+              <a:rPr sz="1350" b="1" i="0" lang="ja-JP">
                 <a:solidFill>
                   <a:srgbClr val="16385C"/>
                 </a:solidFill>
@@ -30900,7 +30989,7 @@
               </a:lnSpc>
             </a:pPr>
             <a:r>
-              <a:rPr sz="1250" b="0" i="0">
+              <a:rPr sz="1250" b="0" i="0" lang="ja-JP">
                 <a:solidFill>
                   <a:srgbClr val="26303A"/>
                 </a:solidFill>
@@ -30920,7 +31009,7 @@
               </a:spcBef>
             </a:pPr>
             <a:r>
-              <a:rPr sz="1350" b="1" i="0">
+              <a:rPr sz="1350" b="1" i="0" lang="ja-JP">
                 <a:solidFill>
                   <a:srgbClr val="16385C"/>
                 </a:solidFill>
@@ -30937,7 +31026,7 @@
               </a:lnSpc>
             </a:pPr>
             <a:r>
-              <a:rPr sz="1250" b="0" i="0">
+              <a:rPr sz="1250" b="0" i="0" lang="ja-JP">
                 <a:solidFill>
                   <a:srgbClr val="26303A"/>
                 </a:solidFill>
@@ -30957,7 +31046,7 @@
               </a:spcBef>
             </a:pPr>
             <a:r>
-              <a:rPr sz="1350" b="1" i="0">
+              <a:rPr sz="1350" b="1" i="0" lang="ja-JP">
                 <a:solidFill>
                   <a:srgbClr val="16385C"/>
                 </a:solidFill>
@@ -30974,7 +31063,7 @@
               </a:lnSpc>
             </a:pPr>
             <a:r>
-              <a:rPr sz="1250" b="0" i="0">
+              <a:rPr sz="1250" b="0" i="0" lang="ja-JP">
                 <a:solidFill>
                   <a:srgbClr val="26303A"/>
                 </a:solidFill>
@@ -30994,7 +31083,7 @@
               </a:spcBef>
             </a:pPr>
             <a:r>
-              <a:rPr sz="1350" b="1" i="0">
+              <a:rPr sz="1350" b="1" i="0" lang="ja-JP">
                 <a:solidFill>
                   <a:srgbClr val="16385C"/>
                 </a:solidFill>
@@ -31011,7 +31100,7 @@
               </a:lnSpc>
             </a:pPr>
             <a:r>
-              <a:rPr sz="1250" b="0" i="0">
+              <a:rPr sz="1250" b="0" i="0" lang="ja-JP">
                 <a:solidFill>
                   <a:srgbClr val="26303A"/>
                 </a:solidFill>
@@ -31031,7 +31120,7 @@
         </p:nvSpPr>
         <p:spPr>
           <a:xfrm>
-            <a:off x="795528" y="4800600"/>
+            <a:off x="795528" y="5074920"/>
             <a:ext cx="4888839" cy="420624"/>
           </a:xfrm>
           <a:prstGeom prst="roundRect">
@@ -31071,7 +31160,7 @@
               </a:lnSpc>
             </a:pPr>
             <a:r>
-              <a:rPr sz="1350" b="1" i="0">
+              <a:rPr sz="1350" b="1" i="0" lang="ja-JP">
                 <a:solidFill>
                   <a:srgbClr val="16385C"/>
                 </a:solidFill>
@@ -31092,7 +31181,7 @@
         <p:spPr>
           <a:xfrm>
             <a:off x="6278727" y="1645920"/>
-            <a:ext cx="5346039" cy="3703320"/>
+            <a:ext cx="5346039" cy="3977639"/>
           </a:xfrm>
           <a:prstGeom prst="roundRect">
             <a:avLst>
@@ -31203,7 +31292,7 @@
               </a:lnSpc>
             </a:pPr>
             <a:r>
-              <a:rPr sz="1550" b="1" i="0">
+              <a:rPr sz="1550" b="1" i="0" lang="ja-JP">
                 <a:solidFill>
                   <a:srgbClr val="FFFFFF"/>
                 </a:solidFill>
@@ -31246,7 +31335,7 @@
               </a:spcBef>
             </a:pPr>
             <a:r>
-              <a:rPr sz="1350" b="1" i="0">
+              <a:rPr sz="1350" b="1" i="0" lang="ja-JP">
                 <a:solidFill>
                   <a:srgbClr val="16385C"/>
                 </a:solidFill>
@@ -31263,7 +31352,7 @@
               </a:lnSpc>
             </a:pPr>
             <a:r>
-              <a:rPr sz="1250" b="0" i="0">
+              <a:rPr sz="1250" b="0" i="0" lang="ja-JP">
                 <a:solidFill>
                   <a:srgbClr val="26303A"/>
                 </a:solidFill>
@@ -31283,7 +31372,7 @@
               </a:spcBef>
             </a:pPr>
             <a:r>
-              <a:rPr sz="1350" b="1" i="0">
+              <a:rPr sz="1350" b="1" i="0" lang="ja-JP">
                 <a:solidFill>
                   <a:srgbClr val="16385C"/>
                 </a:solidFill>
@@ -31300,7 +31389,7 @@
               </a:lnSpc>
             </a:pPr>
             <a:r>
-              <a:rPr sz="1250" b="0" i="0">
+              <a:rPr sz="1250" b="0" i="0" lang="ja-JP">
                 <a:solidFill>
                   <a:srgbClr val="26303A"/>
                 </a:solidFill>
@@ -31320,7 +31409,7 @@
               </a:spcBef>
             </a:pPr>
             <a:r>
-              <a:rPr sz="1350" b="1" i="0">
+              <a:rPr sz="1350" b="1" i="0" lang="ja-JP">
                 <a:solidFill>
                   <a:srgbClr val="16385C"/>
                 </a:solidFill>
@@ -31337,7 +31426,7 @@
               </a:lnSpc>
             </a:pPr>
             <a:r>
-              <a:rPr sz="1250" b="0" i="0">
+              <a:rPr sz="1250" b="0" i="0" lang="ja-JP">
                 <a:solidFill>
                   <a:srgbClr val="26303A"/>
                 </a:solidFill>
@@ -31357,7 +31446,7 @@
               </a:spcBef>
             </a:pPr>
             <a:r>
-              <a:rPr sz="1350" b="1" i="0">
+              <a:rPr sz="1350" b="1" i="0" lang="ja-JP">
                 <a:solidFill>
                   <a:srgbClr val="16385C"/>
                 </a:solidFill>
@@ -31374,7 +31463,7 @@
               </a:lnSpc>
             </a:pPr>
             <a:r>
-              <a:rPr sz="1250" b="0" i="0">
+              <a:rPr sz="1250" b="0" i="0" lang="ja-JP">
                 <a:solidFill>
                   <a:srgbClr val="26303A"/>
                 </a:solidFill>
@@ -31394,7 +31483,7 @@
         </p:nvSpPr>
         <p:spPr>
           <a:xfrm>
-            <a:off x="6507327" y="4800600"/>
+            <a:off x="6507327" y="5074920"/>
             <a:ext cx="4888839" cy="420624"/>
           </a:xfrm>
           <a:prstGeom prst="roundRect">
@@ -31434,7 +31523,7 @@
               </a:lnSpc>
             </a:pPr>
             <a:r>
-              <a:rPr sz="1350" b="1" i="0">
+              <a:rPr sz="1350" b="1" i="0" lang="ja-JP">
                 <a:solidFill>
                   <a:srgbClr val="16385C"/>
                 </a:solidFill>
@@ -31454,7 +31543,7 @@
         </p:nvSpPr>
         <p:spPr>
           <a:xfrm>
-            <a:off x="566928" y="5458968"/>
+            <a:off x="566928" y="5760720"/>
             <a:ext cx="11057839" cy="457200"/>
           </a:xfrm>
           <a:prstGeom prst="rect">
@@ -31474,7 +31563,7 @@
               </a:lnSpc>
             </a:pPr>
             <a:r>
-              <a:rPr sz="1900" b="0" i="0">
+              <a:rPr sz="1900" b="0" i="0" lang="ja-JP">
                 <a:solidFill>
                   <a:srgbClr val="26303A"/>
                 </a:solidFill>
@@ -31484,7 +31573,7 @@
               <a:t>どちらのアプローチでも，メタヒューリスティクスによる解法は GA を基軸とする</a:t>
             </a:r>
             <a:r>
-              <a:rPr sz="1900" b="1" i="0">
+              <a:rPr sz="1900" b="1" i="0" lang="ja-JP">
                 <a:solidFill>
                   <a:srgbClr val="16385C"/>
                 </a:solidFill>
@@ -31492,82 +31581,6 @@
                 <a:ea typeface="Meiryo"/>
               </a:rPr>
               <a:t>多点探索に集中</a:t>
-            </a:r>
-          </a:p>
-        </p:txBody>
-      </p:sp>
-      <p:sp>
-        <p:nvSpPr>
-          <p:cNvPr id="19" name="TextBox 18"/>
-          <p:cNvSpPr txBox="1"/>
-          <p:nvPr/>
-        </p:nvSpPr>
-        <p:spPr>
-          <a:xfrm>
-            <a:off x="566928" y="5916168"/>
-            <a:ext cx="11057839" cy="347472"/>
-          </a:xfrm>
-          <a:prstGeom prst="rect">
-            <a:avLst/>
-          </a:prstGeom>
-          <a:noFill/>
-        </p:spPr>
-        <p:txBody>
-          <a:bodyPr wrap="square" anchor="ctr" lIns="18288" rIns="18288" tIns="9144" bIns="9144">
-            <a:spAutoFit/>
-          </a:bodyPr>
-          <a:lstStyle/>
-          <a:p>
-            <a:pPr algn="ctr"/>
-            <a:r>
-              <a:rPr sz="1400" b="1" i="0">
-                <a:solidFill>
-                  <a:srgbClr val="E06C00"/>
-                </a:solidFill>
-                <a:latin typeface="Meiryo"/>
-                <a:ea typeface="Meiryo"/>
-              </a:rPr>
-              <a:t>単点探索</a:t>
-            </a:r>
-            <a:r>
-              <a:rPr sz="1400" b="0" i="0">
-                <a:solidFill>
-                  <a:srgbClr val="26303A"/>
-                </a:solidFill>
-                <a:latin typeface="Meiryo"/>
-                <a:ea typeface="Meiryo"/>
-              </a:rPr>
-              <a:t>：1 つの解を少しずつ変更しながら進む　／　</a:t>
-            </a:r>
-            <a:r>
-              <a:rPr sz="1400" b="1" i="0">
-                <a:solidFill>
-                  <a:srgbClr val="0F5C28"/>
-                </a:solidFill>
-                <a:latin typeface="Meiryo"/>
-                <a:ea typeface="Meiryo"/>
-              </a:rPr>
-              <a:t>多点探索</a:t>
-            </a:r>
-            <a:r>
-              <a:rPr sz="1400" b="0" i="0">
-                <a:solidFill>
-                  <a:srgbClr val="26303A"/>
-                </a:solidFill>
-                <a:latin typeface="Meiryo"/>
-                <a:ea typeface="Meiryo"/>
-              </a:rPr>
-              <a:t>：複数の解を保持し，互いに組み替えながら進む</a:t>
-            </a:r>
-            <a:r>
-              <a:rPr sz="1100" b="0" i="0">
-                <a:solidFill>
-                  <a:srgbClr val="6E7A88"/>
-                </a:solidFill>
-                <a:latin typeface="Meiryo"/>
-                <a:ea typeface="Meiryo"/>
-              </a:rPr>
-              <a:t>（Blum &amp; Roli, 2003）</a:t>
             </a:r>
           </a:p>
         </p:txBody>
@@ -31613,14 +31626,14 @@
           <a:lstStyle/>
           <a:p>
             <a:r>
-              <a:rPr sz="2450" b="1" i="0">
+              <a:rPr sz="2450" b="1" i="0" lang="ja-JP">
                 <a:solidFill>
                   <a:srgbClr val="16385C"/>
                 </a:solidFill>
                 <a:latin typeface="Meiryo"/>
                 <a:ea typeface="Meiryo"/>
               </a:rPr>
-              <a:t>残された 3 つの課題</a:t>
+              <a:t>先行研究に残された 3 つの課題</a:t>
             </a:r>
           </a:p>
         </p:txBody>
@@ -31733,7 +31746,7 @@
               </a:lnSpc>
             </a:pPr>
             <a:r>
-              <a:rPr sz="1500" b="1" i="0">
+              <a:rPr sz="1500" b="1" i="0" lang="ja-JP">
                 <a:solidFill>
                   <a:srgbClr val="16385C"/>
                 </a:solidFill>
@@ -31743,7 +31756,7 @@
               <a:t>先行研究には，探索構造の比較・高安定領域での評価・解を </a:t>
             </a:r>
             <a:r>
-              <a:rPr sz="1500" b="1" i="1">
+              <a:rPr sz="1500" b="1" i="1" lang="ja-JP">
                 <a:solidFill>
                   <a:srgbClr val="16385C"/>
                 </a:solidFill>
@@ -31753,7 +31766,7 @@
               <a:t>S</a:t>
             </a:r>
             <a:r>
-              <a:rPr sz="1080" b="1" i="1" baseline="-22000">
+              <a:rPr sz="1080" b="1" i="1" lang="ja-JP" baseline="-22000">
                 <a:solidFill>
                   <a:srgbClr val="16385C"/>
                 </a:solidFill>
@@ -31763,7 +31776,7 @@
               <a:t>p</a:t>
             </a:r>
             <a:r>
-              <a:rPr sz="1500" b="1" i="0">
+              <a:rPr sz="1500" b="1" i="0" lang="ja-JP">
                 <a:solidFill>
                   <a:srgbClr val="16385C"/>
                 </a:solidFill>
@@ -31798,7 +31811,7 @@
           <a:lstStyle/>
           <a:p>
             <a:r>
-              <a:rPr sz="900" b="0" i="0">
+              <a:rPr sz="900" b="0" i="0" lang="ja-JP">
                 <a:solidFill>
                   <a:srgbClr val="6E7A88"/>
                 </a:solidFill>
@@ -31834,7 +31847,7 @@
           <a:p>
             <a:pPr algn="r"/>
             <a:r>
-              <a:rPr sz="1000" b="0" i="0">
+              <a:rPr sz="1000" b="0" i="0" lang="ja-JP">
                 <a:solidFill>
                   <a:srgbClr val="6E7A88"/>
                 </a:solidFill>
@@ -31942,7 +31955,7 @@
               </a:lnSpc>
             </a:pPr>
             <a:r>
-              <a:rPr sz="1800" b="1" i="0">
+              <a:rPr sz="1800" b="1" i="0" lang="ja-JP">
                 <a:solidFill>
                   <a:srgbClr val="FFFFFF"/>
                 </a:solidFill>
@@ -31982,7 +31995,7 @@
               </a:lnSpc>
             </a:pPr>
             <a:r>
-              <a:rPr sz="1600" b="1" i="0">
+              <a:rPr sz="1600" b="1" i="0" lang="ja-JP">
                 <a:solidFill>
                   <a:srgbClr val="16385C"/>
                 </a:solidFill>
@@ -31999,7 +32012,7 @@
               </a:lnSpc>
             </a:pPr>
             <a:r>
-              <a:rPr sz="1600" b="1" i="0">
+              <a:rPr sz="1600" b="1" i="0" lang="ja-JP">
                 <a:solidFill>
                   <a:srgbClr val="16385C"/>
                 </a:solidFill>
@@ -32083,44 +32096,34 @@
               </a:lnSpc>
             </a:pPr>
             <a:r>
-              <a:rPr sz="1400" b="0" i="0">
+              <a:rPr sz="1400" b="0" i="1" lang="ja-JP">
                 <a:solidFill>
                   <a:srgbClr val="26303A"/>
                 </a:solidFill>
                 <a:latin typeface="Meiryo"/>
                 <a:ea typeface="Meiryo"/>
               </a:rPr>
-              <a:t>解法は多点探索に集中している．</a:t>
-            </a:r>
-            <a:r>
-              <a:rPr sz="1400" b="0" i="1">
+              <a:t>S</a:t>
+            </a:r>
+            <a:r>
+              <a:rPr sz="1008" b="0" i="1" lang="ja-JP" baseline="-22000">
                 <a:solidFill>
                   <a:srgbClr val="26303A"/>
                 </a:solidFill>
                 <a:latin typeface="Meiryo"/>
                 <a:ea typeface="Meiryo"/>
               </a:rPr>
-              <a:t>S</a:t>
-            </a:r>
-            <a:r>
-              <a:rPr sz="1008" b="0" i="1" baseline="-22000">
+              <a:t>p</a:t>
+            </a:r>
+            <a:r>
+              <a:rPr sz="1400" b="0" i="0" lang="ja-JP">
                 <a:solidFill>
                   <a:srgbClr val="26303A"/>
                 </a:solidFill>
                 <a:latin typeface="Meiryo"/>
                 <a:ea typeface="Meiryo"/>
               </a:rPr>
-              <a:t>p</a:t>
-            </a:r>
-            <a:r>
-              <a:rPr sz="1400" b="0" i="0">
-                <a:solidFill>
-                  <a:srgbClr val="26303A"/>
-                </a:solidFill>
-                <a:latin typeface="Meiryo"/>
-                <a:ea typeface="Meiryo"/>
-              </a:rPr>
-              <a:t> を初期解として解を少しずつ変更する単点探索との間にどんな差が生まれるかは，分析されていない</a:t>
+              <a:t> の存在が単点探索と多点探索の優劣に与える影響は，分析されていない</a:t>
             </a:r>
           </a:p>
         </p:txBody>
@@ -32221,7 +32224,7 @@
               </a:lnSpc>
             </a:pPr>
             <a:r>
-              <a:rPr sz="1800" b="1" i="0">
+              <a:rPr sz="1800" b="1" i="0" lang="ja-JP">
                 <a:solidFill>
                   <a:srgbClr val="FFFFFF"/>
                 </a:solidFill>
@@ -32261,7 +32264,7 @@
               </a:lnSpc>
             </a:pPr>
             <a:r>
-              <a:rPr sz="1600" b="1" i="0">
+              <a:rPr sz="1600" b="1" i="0" lang="ja-JP">
                 <a:solidFill>
                   <a:srgbClr val="16385C"/>
                 </a:solidFill>
@@ -32278,7 +32281,7 @@
               </a:lnSpc>
             </a:pPr>
             <a:r>
-              <a:rPr sz="1600" b="1" i="0">
+              <a:rPr sz="1600" b="1" i="0" lang="ja-JP">
                 <a:solidFill>
                   <a:srgbClr val="16385C"/>
                 </a:solidFill>
@@ -32362,14 +32365,31 @@
               </a:lnSpc>
             </a:pPr>
             <a:r>
-              <a:rPr sz="1400" b="0" i="0">
+              <a:rPr sz="1400" b="0" i="0" lang="ja-JP">
                 <a:solidFill>
                   <a:srgbClr val="26303A"/>
                 </a:solidFill>
                 <a:latin typeface="Meiryo"/>
                 <a:ea typeface="Meiryo"/>
               </a:rPr>
-              <a:t>比較は少数の重みでのスカラー値や，Pareto フロント全体の HV で行われ，高安定領域で手法がどう異なるかは分析されていない</a:t>
+              <a:t>比較は少数の重みでのスカラー値や，Pareto フロント全体の HV で行われ，</a:t>
+            </a:r>
+          </a:p>
+          <a:p>
+            <a:pPr algn="l">
+              <a:lnSpc>
+                <a:spcPct val="118000"/>
+              </a:lnSpc>
+            </a:pPr>
+            <a:r>
+              <a:rPr sz="1400" b="0" i="0" lang="ja-JP">
+                <a:solidFill>
+                  <a:srgbClr val="26303A"/>
+                </a:solidFill>
+                <a:latin typeface="Meiryo"/>
+                <a:ea typeface="Meiryo"/>
+              </a:rPr>
+              <a:t>高安定領域で手法がどう異なるかは分析されていない</a:t>
             </a:r>
           </a:p>
         </p:txBody>
@@ -32470,7 +32490,7 @@
               </a:lnSpc>
             </a:pPr>
             <a:r>
-              <a:rPr sz="1800" b="1" i="0">
+              <a:rPr sz="1800" b="1" i="0" lang="ja-JP">
                 <a:solidFill>
                   <a:srgbClr val="FFFFFF"/>
                 </a:solidFill>
@@ -32510,7 +32530,7 @@
               </a:lnSpc>
             </a:pPr>
             <a:r>
-              <a:rPr sz="1600" b="1" i="0">
+              <a:rPr sz="1600" b="1" i="0" lang="ja-JP">
                 <a:solidFill>
                   <a:srgbClr val="16385C"/>
                 </a:solidFill>
@@ -32520,7 +32540,7 @@
               <a:t>解を </a:t>
             </a:r>
             <a:r>
-              <a:rPr sz="1600" b="1" i="1">
+              <a:rPr sz="1600" b="1" i="1" lang="ja-JP">
                 <a:solidFill>
                   <a:srgbClr val="16385C"/>
                 </a:solidFill>
@@ -32530,7 +32550,7 @@
               <a:t>S</a:t>
             </a:r>
             <a:r>
-              <a:rPr sz="1152" b="1" i="1" baseline="-22000">
+              <a:rPr sz="1152" b="1" i="1" lang="ja-JP" baseline="-22000">
                 <a:solidFill>
                   <a:srgbClr val="16385C"/>
                 </a:solidFill>
@@ -32540,7 +32560,7 @@
               <a:t>p</a:t>
             </a:r>
             <a:r>
-              <a:rPr sz="1600" b="1" i="0">
+              <a:rPr sz="1600" b="1" i="0" lang="ja-JP">
                 <a:solidFill>
                   <a:srgbClr val="16385C"/>
                 </a:solidFill>
@@ -32557,7 +32577,7 @@
               </a:lnSpc>
             </a:pPr>
             <a:r>
-              <a:rPr sz="1600" b="1" i="0">
+              <a:rPr sz="1600" b="1" i="0" lang="ja-JP">
                 <a:solidFill>
                   <a:srgbClr val="16385C"/>
                 </a:solidFill>
@@ -32641,7 +32661,7 @@
               </a:lnSpc>
             </a:pPr>
             <a:r>
-              <a:rPr sz="1400" b="1" i="0">
+              <a:rPr sz="1400" b="1" i="0" lang="ja-JP">
                 <a:solidFill>
                   <a:srgbClr val="16385C"/>
                 </a:solidFill>
@@ -32651,7 +32671,7 @@
               <a:t>目的関数に組み込む</a:t>
             </a:r>
             <a:r>
-              <a:rPr sz="1400" b="0" i="0">
+              <a:rPr sz="1400" b="0" i="0" lang="ja-JP">
                 <a:solidFill>
                   <a:srgbClr val="26303A"/>
                 </a:solidFill>
@@ -32661,7 +32681,7 @@
               <a:t>：安定性は解の評価にだけ入る．交叉や局所探索などの探索操作は </a:t>
             </a:r>
             <a:r>
-              <a:rPr sz="1400" b="0" i="1">
+              <a:rPr sz="1400" b="0" i="1" lang="ja-JP">
                 <a:solidFill>
                   <a:srgbClr val="26303A"/>
                 </a:solidFill>
@@ -32671,7 +32691,7 @@
               <a:t>S</a:t>
             </a:r>
             <a:r>
-              <a:rPr sz="1008" b="0" i="1" baseline="-22000">
+              <a:rPr sz="1008" b="0" i="1" lang="ja-JP" baseline="-22000">
                 <a:solidFill>
                   <a:srgbClr val="26303A"/>
                 </a:solidFill>
@@ -32681,7 +32701,7 @@
               <a:t>p</a:t>
             </a:r>
             <a:r>
-              <a:rPr sz="1400" b="0" i="0">
+              <a:rPr sz="1400" b="0" i="0" lang="ja-JP">
                 <a:solidFill>
                   <a:srgbClr val="26303A"/>
                 </a:solidFill>
@@ -32698,7 +32718,7 @@
               </a:lnSpc>
             </a:pPr>
             <a:r>
-              <a:rPr sz="1400" b="1" i="0">
+              <a:rPr sz="1400" b="1" i="0" lang="ja-JP">
                 <a:solidFill>
                   <a:srgbClr val="16385C"/>
                 </a:solidFill>
@@ -32708,7 +32728,7 @@
               <a:t>範囲を限定する</a:t>
             </a:r>
             <a:r>
-              <a:rPr sz="1400" b="0" i="0">
+              <a:rPr sz="1400" b="0" i="0" lang="ja-JP">
                 <a:solidFill>
                   <a:srgbClr val="26303A"/>
                 </a:solidFill>
@@ -32725,7 +32745,7 @@
               </a:lnSpc>
             </a:pPr>
             <a:r>
-              <a:rPr sz="1400" b="0" i="0">
+              <a:rPr sz="1400" b="0" i="0" lang="ja-JP">
                 <a:solidFill>
                   <a:srgbClr val="26303A"/>
                 </a:solidFill>
@@ -32735,7 +32755,7 @@
               <a:t>→ どちらも，探索の途中で解を </a:t>
             </a:r>
             <a:r>
-              <a:rPr sz="1400" b="0" i="1">
+              <a:rPr sz="1400" b="0" i="1" lang="ja-JP">
                 <a:solidFill>
                   <a:srgbClr val="26303A"/>
                 </a:solidFill>
@@ -32745,7 +32765,7 @@
               <a:t>S</a:t>
             </a:r>
             <a:r>
-              <a:rPr sz="1008" b="0" i="1" baseline="-22000">
+              <a:rPr sz="1008" b="0" i="1" lang="ja-JP" baseline="-22000">
                 <a:solidFill>
                   <a:srgbClr val="26303A"/>
                 </a:solidFill>
@@ -32755,7 +32775,7 @@
               <a:t>p</a:t>
             </a:r>
             <a:r>
-              <a:rPr sz="1400" b="0" i="0">
+              <a:rPr sz="1400" b="0" i="0" lang="ja-JP">
                 <a:solidFill>
                   <a:srgbClr val="26303A"/>
                 </a:solidFill>
@@ -32808,7 +32828,7 @@
           <a:lstStyle/>
           <a:p>
             <a:r>
-              <a:rPr sz="2450" b="1" i="0">
+              <a:rPr sz="2450" b="1" i="0" lang="ja-JP">
                 <a:solidFill>
                   <a:srgbClr val="16385C"/>
                 </a:solidFill>
@@ -32928,7 +32948,7 @@
               </a:lnSpc>
             </a:pPr>
             <a:r>
-              <a:rPr sz="1500" b="1" i="0">
+              <a:rPr sz="1500" b="1" i="0" lang="ja-JP">
                 <a:solidFill>
                   <a:srgbClr val="16385C"/>
                 </a:solidFill>
@@ -32963,7 +32983,7 @@
           <a:lstStyle/>
           <a:p>
             <a:r>
-              <a:rPr sz="900" b="0" i="0">
+              <a:rPr sz="900" b="0" i="0" lang="ja-JP">
                 <a:solidFill>
                   <a:srgbClr val="6E7A88"/>
                 </a:solidFill>
@@ -32999,7 +33019,7 @@
           <a:p>
             <a:pPr algn="r"/>
             <a:r>
-              <a:rPr sz="1000" b="0" i="0">
+              <a:rPr sz="1000" b="0" i="0" lang="ja-JP">
                 <a:solidFill>
                   <a:srgbClr val="6E7A88"/>
                 </a:solidFill>
@@ -33059,7 +33079,7 @@
               </a:lnSpc>
             </a:pPr>
             <a:r>
-              <a:rPr sz="1250" b="1" i="0">
+              <a:rPr sz="1250" b="1" i="0" lang="ja-JP">
                 <a:solidFill>
                   <a:srgbClr val="FFFFFF"/>
                 </a:solidFill>
@@ -33145,7 +33165,7 @@
               </a:lnSpc>
             </a:pPr>
             <a:r>
-              <a:rPr sz="1550" b="0" i="0">
+              <a:rPr sz="1550" b="0" i="0" lang="ja-JP">
                 <a:solidFill>
                   <a:srgbClr val="FFFFFF"/>
                 </a:solidFill>
@@ -33155,7 +33175,7 @@
               <a:t>交叉で 2 親の染色体を組み替える</a:t>
             </a:r>
             <a:r>
-              <a:rPr sz="1550" b="1" i="0">
+              <a:rPr sz="1550" b="1" i="0" lang="ja-JP">
                 <a:solidFill>
                   <a:srgbClr val="FFD98A"/>
                 </a:solidFill>
@@ -33165,7 +33185,7 @@
               <a:t>多点探索</a:t>
             </a:r>
             <a:r>
-              <a:rPr sz="1550" b="0" i="0">
+              <a:rPr sz="1550" b="0" i="0" lang="ja-JP">
                 <a:solidFill>
                   <a:srgbClr val="FFFFFF"/>
                 </a:solidFill>
@@ -33182,7 +33202,7 @@
               </a:lnSpc>
             </a:pPr>
             <a:r>
-              <a:rPr sz="1550" b="0" i="1">
+              <a:rPr sz="1550" b="0" i="1" lang="ja-JP">
                 <a:solidFill>
                   <a:srgbClr val="FFFFFF"/>
                 </a:solidFill>
@@ -33192,7 +33212,7 @@
               <a:t>S</a:t>
             </a:r>
             <a:r>
-              <a:rPr sz="1116" b="0" i="1" baseline="-22000">
+              <a:rPr sz="1116" b="0" i="1" lang="ja-JP" baseline="-22000">
                 <a:solidFill>
                   <a:srgbClr val="FFFFFF"/>
                 </a:solidFill>
@@ -33202,7 +33222,7 @@
               <a:t>p</a:t>
             </a:r>
             <a:r>
-              <a:rPr sz="1550" b="0" i="0">
+              <a:rPr sz="1550" b="0" i="0" lang="ja-JP">
                 <a:solidFill>
                   <a:srgbClr val="FFFFFF"/>
                 </a:solidFill>
@@ -33219,7 +33239,7 @@
               </a:lnSpc>
             </a:pPr>
             <a:r>
-              <a:rPr sz="1550" b="0" i="0">
+              <a:rPr sz="1550" b="0" i="0" lang="ja-JP">
                 <a:solidFill>
                   <a:srgbClr val="FFFFFF"/>
                 </a:solidFill>
@@ -33229,7 +33249,7 @@
               <a:t>そのため，</a:t>
             </a:r>
             <a:r>
-              <a:rPr sz="1550" b="0" i="1">
+              <a:rPr sz="1550" b="0" i="1" lang="ja-JP">
                 <a:solidFill>
                   <a:srgbClr val="FFFFFF"/>
                 </a:solidFill>
@@ -33239,7 +33259,7 @@
               <a:t>S</a:t>
             </a:r>
             <a:r>
-              <a:rPr sz="1116" b="0" i="1" baseline="-22000">
+              <a:rPr sz="1116" b="0" i="1" lang="ja-JP" baseline="-22000">
                 <a:solidFill>
                   <a:srgbClr val="FFFFFF"/>
                 </a:solidFill>
@@ -33249,7 +33269,7 @@
               <a:t>p</a:t>
             </a:r>
             <a:r>
-              <a:rPr sz="1550" b="0" i="0">
+              <a:rPr sz="1550" b="0" i="0" lang="ja-JP">
                 <a:solidFill>
                   <a:srgbClr val="FFFFFF"/>
                 </a:solidFill>
@@ -33266,7 +33286,7 @@
               </a:lnSpc>
             </a:pPr>
             <a:r>
-              <a:rPr sz="1550" b="1" i="0">
+              <a:rPr sz="1550" b="1" i="0" lang="ja-JP">
                 <a:solidFill>
                   <a:srgbClr val="FFD98A"/>
                 </a:solidFill>
@@ -33276,7 +33296,7 @@
               <a:t>単点探索</a:t>
             </a:r>
             <a:r>
-              <a:rPr sz="1550" b="0" i="0">
+              <a:rPr sz="1550" b="0" i="0" lang="ja-JP">
                 <a:solidFill>
                   <a:srgbClr val="FFFFFF"/>
                 </a:solidFill>
@@ -33286,7 +33306,7 @@
               <a:t>のほうが，</a:t>
             </a:r>
             <a:r>
-              <a:rPr sz="1550" b="1" i="0">
+              <a:rPr sz="1550" b="1" i="0" lang="ja-JP">
                 <a:solidFill>
                   <a:srgbClr val="FFD98A"/>
                 </a:solidFill>
@@ -33370,7 +33390,7 @@
               </a:lnSpc>
             </a:pPr>
             <a:r>
-              <a:rPr sz="1250" b="1" i="0">
+              <a:rPr sz="1250" b="1" i="0" lang="ja-JP">
                 <a:solidFill>
                   <a:srgbClr val="FFFFFF"/>
                 </a:solidFill>
@@ -33456,7 +33476,7 @@
               </a:lnSpc>
             </a:pPr>
             <a:r>
-              <a:rPr sz="1550" b="0" i="0">
+              <a:rPr sz="1550" b="0" i="0" lang="ja-JP">
                 <a:solidFill>
                   <a:srgbClr val="FFFFFF"/>
                 </a:solidFill>
@@ -33466,7 +33486,7 @@
               <a:t>多点探索に，解を </a:t>
             </a:r>
             <a:r>
-              <a:rPr sz="1550" b="0" i="1">
+              <a:rPr sz="1550" b="0" i="1" lang="ja-JP">
                 <a:solidFill>
                   <a:srgbClr val="FFFFFF"/>
                 </a:solidFill>
@@ -33476,7 +33496,7 @@
               <a:t>S</a:t>
             </a:r>
             <a:r>
-              <a:rPr sz="1116" b="0" i="1" baseline="-22000">
+              <a:rPr sz="1116" b="0" i="1" lang="ja-JP" baseline="-22000">
                 <a:solidFill>
                   <a:srgbClr val="FFFFFF"/>
                 </a:solidFill>
@@ -33486,7 +33506,7 @@
               <a:t>p</a:t>
             </a:r>
             <a:r>
-              <a:rPr sz="1550" b="0" i="0">
+              <a:rPr sz="1550" b="0" i="0" lang="ja-JP">
                 <a:solidFill>
                   <a:srgbClr val="FFFFFF"/>
                 </a:solidFill>
@@ -33503,7 +33523,7 @@
               </a:lnSpc>
             </a:pPr>
             <a:r>
-              <a:rPr sz="1550" b="0" i="0">
+              <a:rPr sz="1550" b="0" i="0" lang="ja-JP">
                 <a:solidFill>
                   <a:srgbClr val="FFFFFF"/>
                 </a:solidFill>
@@ -33513,7 +33533,7 @@
               <a:t>（</a:t>
             </a:r>
             <a:r>
-              <a:rPr sz="1550" b="1" i="0">
+              <a:rPr sz="1550" b="1" i="0" lang="ja-JP">
                 <a:solidFill>
                   <a:srgbClr val="FFD98A"/>
                 </a:solidFill>
@@ -33523,7 +33543,7 @@
               <a:t>安定性誘導演算子</a:t>
             </a:r>
             <a:r>
-              <a:rPr sz="1550" b="0" i="0">
+              <a:rPr sz="1550" b="0" i="0" lang="ja-JP">
                 <a:solidFill>
                   <a:srgbClr val="FFFFFF"/>
                 </a:solidFill>
@@ -33540,7 +33560,7 @@
               </a:lnSpc>
             </a:pPr>
             <a:r>
-              <a:rPr sz="1550" b="0" i="0">
+              <a:rPr sz="1550" b="0" i="0" lang="ja-JP">
                 <a:solidFill>
                   <a:srgbClr val="FFFFFF"/>
                 </a:solidFill>
@@ -33557,7 +33577,7 @@
               </a:lnSpc>
             </a:pPr>
             <a:r>
-              <a:rPr sz="1550" b="1" i="0">
+              <a:rPr sz="1550" b="1" i="0" lang="ja-JP">
                 <a:solidFill>
                   <a:srgbClr val="FFD98A"/>
                 </a:solidFill>
@@ -33621,7 +33641,7 @@
               </a:lnSpc>
             </a:pPr>
             <a:r>
-              <a:rPr sz="1150" b="0" i="0">
+              <a:rPr sz="1150" b="0" i="0" lang="ja-JP">
                 <a:solidFill>
                   <a:srgbClr val="6E7A88"/>
                 </a:solidFill>
